--- a/第七週(10-22)/第七週_第1節_簡報.pptx
+++ b/第七週(10-22)/第七週_第1節_簡報.pptx
@@ -3843,7 +3843,29 @@
                 <a:ea typeface="Arial Unicode MS"/>
                 <a:cs typeface="Arial Unicode MS"/>
               </a:rPr>
-              <a:t>，上週，雷達、超音波、衛星定位、IMU。大家在作業頁上做了二十二格判斷：雷達直接量速度，超音波是停車場的王，衛星定位在高樓會偏、在隧道會斷，IMU 會飄。結論是：</a:t>
+              <a:t>，上週，雷達、超音波、衛星定位、IMU。大家在作業頁上填了四張小表：雷達、超音波、衛星定位、IMU 各兩顆型號，放進幾個情境，每一格判斷「這顆在這裡夠不夠用」。雷達三個情境、超音波兩個、衛星定位三個、IMU 三個，乘上兩顆，總共</a:t>
+            </a:r>
+            <a:r>
+              <a:rPr sz="1200" b="1" lang="zh-TW" dirty="0">
+                <a:solidFill>
+                  <a:srgbClr val="000000"/>
+                </a:solidFill>
+                <a:latin typeface="Arial Unicode MS"/>
+                <a:ea typeface="Arial Unicode MS"/>
+                <a:cs typeface="Arial Unicode MS"/>
+              </a:rPr>
+              <a:t>二十二格</a:t>
+            </a:r>
+            <a:r>
+              <a:rPr sz="1200" lang="zh-TW" dirty="0">
+                <a:solidFill>
+                  <a:srgbClr val="000000"/>
+                </a:solidFill>
+                <a:latin typeface="Arial Unicode MS"/>
+                <a:ea typeface="Arial Unicode MS"/>
+                <a:cs typeface="Arial Unicode MS"/>
+              </a:rPr>
+              <a:t>。判斷下來：雷達直接量速度，超音波是停車場的王，衛星定位在高樓會偏、在隧道會斷，IMU 會飄。結論是：</a:t>
             </a:r>
             <a:r>
               <a:rPr sz="1200" b="1" lang="zh-TW" dirty="0">
@@ -4030,7 +4052,7 @@
                 <a:ea typeface="Arial Unicode MS"/>
                 <a:cs typeface="Arial Unicode MS"/>
               </a:rPr>
-              <a:t>剛剛最後一格：上週二十二格判斷，結論是沒有一種感測器樣樣都贏。
+              <a:t>剛剛最後一格：上週作業那四張小表、二十二格「夠不夠」的判斷，結論是沒有一種感測器樣樣都贏。雷達在國道很強，到了一百五十公尺卻分不出車道；超音波只在停車場夠用；衛星定位進了隧道就收不到；IMU 也撐不過隧道。
 </a:t>
             </a:r>
           </a:p>
@@ -14497,7 +14519,7 @@
                 <a:ea typeface="Arial" pitchFamily="34" charset="-122"/>
                 <a:cs typeface="Arial" pitchFamily="34" charset="-120"/>
               </a:rPr>
-              <a:t>22 ô: không loại nào thắng cả năm tình huống.</a:t>
+              <a:t>4 bảng nhỏ, 22 ô «đủ hay không»: không loại nào thắng cả năm tình huống.</a:t>
             </a:r>
             <a:endParaRPr lang="en-US" sz="1050" dirty="0"/>
           </a:p>
@@ -14517,7 +14539,7 @@
                 <a:ea typeface="微軟正黑體" pitchFamily="34" charset="-122"/>
                 <a:cs typeface="微軟正黑體" pitchFamily="34" charset="-120"/>
               </a:rPr>
-              <a:t>22 格判斷：沒有一種五個情境都贏。</a:t>
+              <a:t>四張小表 22 格「夠不夠」：沒有一種五個情境都贏。</a:t>
             </a:r>
             <a:endParaRPr lang="en-US" sz="1050" dirty="0"/>
           </a:p>

--- a/第七週(10-22)/第七週_第1節_簡報.pptx
+++ b/第七週(10-22)/第七週_第1節_簡報.pptx
@@ -4623,19 +4623,19 @@
                 <a:spcPts val="0"/>
               </a:spcBef>
               <a:spcAft>
-                <a:spcPts val="200"/>
+                <a:spcPts val="133"/>
               </a:spcAft>
             </a:pPr>
             <a:r>
-              <a:rPr sz="1200" lang="zh-TW" dirty="0">
-                <a:solidFill>
-                  <a:srgbClr val="000000"/>
-                </a:solidFill>
-                <a:latin typeface="Arial Unicode MS"/>
-                <a:ea typeface="Arial Unicode MS"/>
-                <a:cs typeface="Arial Unicode MS"/>
-              </a:rPr>
-              <a:t>這張表把前三週學過的東西，換一個方向排：橫的是條件，直的是六種感測器。四個符號寫在最下面：打勾是照常，三角形是變差，叉叉是失靈，橫線是不相關。
+              <a:rPr sz="800" lang="zh-TW" dirty="0">
+                <a:solidFill>
+                  <a:srgbClr val="000000"/>
+                </a:solidFill>
+                <a:latin typeface="Arial Unicode MS"/>
+                <a:ea typeface="Arial Unicode MS"/>
+                <a:cs typeface="Arial Unicode MS"/>
+              </a:rPr>
+              <a:t>這張表把前幾週學過的東西，換一個方向排：橫的是八種條件，直的是六種感測器。四個符號寫在最下面：打勾是照常，三角形是變差，叉叉是失靈，橫線是這個條件跟它不相關。我們一列一列看，每一列都問：誰出問題、為什麼。
 </a:t>
             </a:r>
           </a:p>
@@ -4645,41 +4645,30 @@
                 <a:spcPts val="0"/>
               </a:spcBef>
               <a:spcAft>
-                <a:spcPts val="200"/>
+                <a:spcPts val="133"/>
               </a:spcAft>
             </a:pPr>
             <a:r>
-              <a:rPr sz="1200" lang="zh-TW" dirty="0">
-                <a:solidFill>
-                  <a:srgbClr val="000000"/>
-                </a:solidFill>
-                <a:latin typeface="Arial Unicode MS"/>
-                <a:ea typeface="Arial Unicode MS"/>
-                <a:cs typeface="Arial Unicode MS"/>
-              </a:rPr>
-              <a:t>先</a:t>
-            </a:r>
-            <a:r>
-              <a:rPr sz="1200" b="1" lang="zh-TW" dirty="0">
-                <a:solidFill>
-                  <a:srgbClr val="000000"/>
-                </a:solidFill>
-                <a:latin typeface="Arial Unicode MS"/>
-                <a:ea typeface="Arial Unicode MS"/>
-                <a:cs typeface="Arial Unicode MS"/>
-              </a:rPr>
-              <a:t>橫著讀一列</a:t>
-            </a:r>
-            <a:r>
-              <a:rPr sz="1200" lang="zh-TW" dirty="0">
-                <a:solidFill>
-                  <a:srgbClr val="000000"/>
-                </a:solidFill>
-                <a:latin typeface="Arial Unicode MS"/>
-                <a:ea typeface="Arial Unicode MS"/>
-                <a:cs typeface="Arial Unicode MS"/>
-              </a:rPr>
-              <a:t>，大雨、濃霧：相機叉叉，雨刷刷不乾淨、霧裡什麼都糊；光達三角形，測距變短、多出雜點；雷達打勾，第六週講過，四公釐的波長比雨滴大，繞過去了；超音波三角形，水滴黏在探頭上會亂報；衛星定位和 IMU 都不受影響。
+              <a:rPr sz="800" b="1" lang="zh-TW" dirty="0">
+                <a:solidFill>
+                  <a:srgbClr val="000000"/>
+                </a:solidFill>
+                <a:latin typeface="Arial Unicode MS"/>
+                <a:ea typeface="Arial Unicode MS"/>
+                <a:cs typeface="Arial Unicode MS"/>
+              </a:rPr>
+              <a:t>第一列，大雨、濃霧。</a:t>
+            </a:r>
+            <a:r>
+              <a:rPr sz="800" lang="zh-TW" dirty="0">
+                <a:solidFill>
+                  <a:srgbClr val="000000"/>
+                </a:solidFill>
+                <a:latin typeface="Arial Unicode MS"/>
+                <a:ea typeface="Arial Unicode MS"/>
+                <a:cs typeface="Arial Unicode MS"/>
+              </a:rPr>
+              <a:t>相機叉叉：就像戴著沾滿水的眼鏡，鏡頭和擋風玻璃上的水珠把畫面弄糊，霧把光打散，遠處的東西整片變白。光達三角形：雷射打到半空中的雨滴、霧滴，就提早彈回來，點雲上多出一堆雜點，看得到的距離也變短；第五週講的「多次回波」就是為了這個。雷達打勾：第六週講過，四公釐的波長比一公釐的雨滴大，繞得過去。超音波三角形：探頭上的水膜會讓它誤報。衛星定位和 IMU 不受雨霧影響。
 </a:t>
             </a:r>
           </a:p>
@@ -4689,41 +4678,30 @@
                 <a:spcPts val="0"/>
               </a:spcBef>
               <a:spcAft>
-                <a:spcPts val="200"/>
+                <a:spcPts val="133"/>
               </a:spcAft>
             </a:pPr>
             <a:r>
-              <a:rPr sz="1200" lang="zh-TW" dirty="0">
-                <a:solidFill>
-                  <a:srgbClr val="000000"/>
-                </a:solidFill>
-                <a:latin typeface="Arial Unicode MS"/>
-                <a:ea typeface="Arial Unicode MS"/>
-                <a:cs typeface="Arial Unicode MS"/>
-              </a:rPr>
-              <a:t>再</a:t>
-            </a:r>
-            <a:r>
-              <a:rPr sz="1200" b="1" lang="zh-TW" dirty="0">
-                <a:solidFill>
-                  <a:srgbClr val="000000"/>
-                </a:solidFill>
-                <a:latin typeface="Arial Unicode MS"/>
-                <a:ea typeface="Arial Unicode MS"/>
-                <a:cs typeface="Arial Unicode MS"/>
-              </a:rPr>
-              <a:t>直著讀一欄</a:t>
-            </a:r>
-            <a:r>
-              <a:rPr sz="1200" lang="zh-TW" dirty="0">
-                <a:solidFill>
-                  <a:srgbClr val="000000"/>
-                </a:solidFill>
-                <a:latin typeface="Arial Unicode MS"/>
-                <a:ea typeface="Arial Unicode MS"/>
-                <a:cs typeface="Arial Unicode MS"/>
-              </a:rPr>
-              <a:t>，衛星定位：前面幾列幾乎都打勾，下雨、晚上都不怕。可是最後一列，高樓窄巷和隧道，叉叉。它的弱點只有一種，但那一種很致命。
+              <a:rPr sz="800" b="1" lang="zh-TW" dirty="0">
+                <a:solidFill>
+                  <a:srgbClr val="000000"/>
+                </a:solidFill>
+                <a:latin typeface="Arial Unicode MS"/>
+                <a:ea typeface="Arial Unicode MS"/>
+                <a:cs typeface="Arial Unicode MS"/>
+              </a:rPr>
+              <a:t>第二列，夜間。</a:t>
+            </a:r>
+            <a:r>
+              <a:rPr sz="800" lang="zh-TW" dirty="0">
+                <a:solidFill>
+                  <a:srgbClr val="000000"/>
+                </a:solidFill>
+                <a:latin typeface="Arial Unicode MS"/>
+                <a:ea typeface="Arial Unicode MS"/>
+                <a:cs typeface="Arial Unicode MS"/>
+              </a:rPr>
+              <a:t>只有相機是三角形：它靠外面的光，天一黑，畫面暗、雜點多，暗處穿黑衣服的人最難看。不過有路燈、有車燈的地方還看得到，所以是三角形不是叉叉。光達、雷達、超音波都是自己發訊號，不需要光；衛星定位和 IMU 也不看光，全部打勾。
 </a:t>
             </a:r>
           </a:p>
@@ -4733,85 +4711,30 @@
                 <a:spcPts val="0"/>
               </a:spcBef>
               <a:spcAft>
-                <a:spcPts val="200"/>
+                <a:spcPts val="133"/>
               </a:spcAft>
             </a:pPr>
             <a:r>
-              <a:rPr sz="1200" lang="zh-TW" dirty="0">
-                <a:solidFill>
-                  <a:srgbClr val="000000"/>
-                </a:solidFill>
-                <a:latin typeface="Arial Unicode MS"/>
-                <a:ea typeface="Arial Unicode MS"/>
-                <a:cs typeface="Arial Unicode MS"/>
-              </a:rPr>
-              <a:t>有幾格要說明一下。</a:t>
-            </a:r>
-            <a:r>
-              <a:rPr sz="1200" b="1" lang="zh-TW" dirty="0">
-                <a:solidFill>
-                  <a:srgbClr val="000000"/>
-                </a:solidFill>
-                <a:latin typeface="Arial Unicode MS"/>
-                <a:ea typeface="Arial Unicode MS"/>
-                <a:cs typeface="Arial Unicode MS"/>
-              </a:rPr>
-              <a:t>夜間的相機是三角形</a:t>
-            </a:r>
-            <a:r>
-              <a:rPr sz="1200" lang="zh-TW" dirty="0">
-                <a:solidFill>
-                  <a:srgbClr val="000000"/>
-                </a:solidFill>
-                <a:latin typeface="Arial Unicode MS"/>
-                <a:ea typeface="Arial Unicode MS"/>
-                <a:cs typeface="Arial Unicode MS"/>
-              </a:rPr>
-              <a:t>，不是叉叉：有路燈、有車燈的地方還看得到，等一下看真的畫面。</a:t>
-            </a:r>
-            <a:r>
-              <a:rPr sz="1200" b="1" lang="zh-TW" dirty="0">
-                <a:solidFill>
-                  <a:srgbClr val="000000"/>
-                </a:solidFill>
-                <a:latin typeface="Arial Unicode MS"/>
-                <a:ea typeface="Arial Unicode MS"/>
-                <a:cs typeface="Arial Unicode MS"/>
-              </a:rPr>
-              <a:t>遠處的行人和機車，雷達是叉叉</a:t>
-            </a:r>
-            <a:r>
-              <a:rPr sz="1200" lang="zh-TW" dirty="0">
-                <a:solidFill>
-                  <a:srgbClr val="000000"/>
-                </a:solidFill>
-                <a:latin typeface="Arial Unicode MS"/>
-                <a:ea typeface="Arial Unicode MS"/>
-                <a:cs typeface="Arial Unicode MS"/>
-              </a:rPr>
-              <a:t>：這一格是今天才加的，等一下用真的資料給各位看。</a:t>
-            </a:r>
-            <a:r>
-              <a:rPr sz="1200" b="1" lang="zh-TW" dirty="0">
-                <a:solidFill>
-                  <a:srgbClr val="000000"/>
-                </a:solidFill>
-                <a:latin typeface="Arial Unicode MS"/>
-                <a:ea typeface="Arial Unicode MS"/>
-                <a:cs typeface="Arial Unicode MS"/>
-              </a:rPr>
-              <a:t>被泥巴蓋住，雷達是三角形</a:t>
-            </a:r>
-            <a:r>
-              <a:rPr sz="1200" lang="zh-TW" dirty="0">
-                <a:solidFill>
-                  <a:srgbClr val="000000"/>
-                </a:solidFill>
-                <a:latin typeface="Arial Unicode MS"/>
-                <a:ea typeface="Arial Unicode MS"/>
-                <a:cs typeface="Arial Unicode MS"/>
-              </a:rPr>
-              <a:t>：雷達的電波穿得過薄薄一層泥，可是厚的冰雪也會擋。
+              <a:rPr sz="800" b="1" lang="zh-TW" dirty="0">
+                <a:solidFill>
+                  <a:srgbClr val="000000"/>
+                </a:solidFill>
+                <a:latin typeface="Arial Unicode MS"/>
+                <a:ea typeface="Arial Unicode MS"/>
+                <a:cs typeface="Arial Unicode MS"/>
+              </a:rPr>
+              <a:t>第三列，逆光、隧道出口。</a:t>
+            </a:r>
+            <a:r>
+              <a:rPr sz="800" lang="zh-TW" dirty="0">
+                <a:solidFill>
+                  <a:srgbClr val="000000"/>
+                </a:solidFill>
+                <a:latin typeface="Arial Unicode MS"/>
+                <a:ea typeface="Arial Unicode MS"/>
+                <a:cs typeface="Arial Unicode MS"/>
+              </a:rPr>
+              <a:t>相機叉叉：就像從暗的隧道開出去，眼睛一瞬間整片白。第五週講的動態範圍不夠，太亮的地方全白、太暗的地方全黑。光達三角形：強烈的陽光也會被光達收進去，像雜訊，遠處反射弱的點容易掉。雷達、超音波不靠光，打勾；IMU 打勾。衛星定位是橫線，這一列講的是光線，跟它無關；隧道本身放在最後一列。
 </a:t>
             </a:r>
           </a:p>
@@ -4821,19 +4744,30 @@
                 <a:spcPts val="0"/>
               </a:spcBef>
               <a:spcAft>
-                <a:spcPts val="200"/>
+                <a:spcPts val="133"/>
               </a:spcAft>
             </a:pPr>
             <a:r>
-              <a:rPr sz="1200" lang="zh-TW" dirty="0">
-                <a:solidFill>
-                  <a:srgbClr val="000000"/>
-                </a:solidFill>
-                <a:latin typeface="Arial Unicode MS"/>
-                <a:ea typeface="Arial Unicode MS"/>
-                <a:cs typeface="Arial Unicode MS"/>
-              </a:rPr>
-              <a:t>最後一列的 IMU 是三角形：IMU 本身在隧道裡不會壞，可是衛星斷了，要它一個人撐很久，第六週算過撐不到隧道的盡頭。
+              <a:rPr sz="800" b="1" lang="zh-TW" dirty="0">
+                <a:solidFill>
+                  <a:srgbClr val="000000"/>
+                </a:solidFill>
+                <a:latin typeface="Arial Unicode MS"/>
+                <a:ea typeface="Arial Unicode MS"/>
+                <a:cs typeface="Arial Unicode MS"/>
+              </a:rPr>
+              <a:t>第四列，黑車、玻璃、鏡面。</a:t>
+            </a:r>
+            <a:r>
+              <a:rPr sz="800" lang="zh-TW" dirty="0">
+                <a:solidFill>
+                  <a:srgbClr val="000000"/>
+                </a:solidFill>
+                <a:latin typeface="Arial Unicode MS"/>
+                <a:ea typeface="Arial Unicode MS"/>
+                <a:cs typeface="Arial Unicode MS"/>
+              </a:rPr>
+              <a:t>相機三角形：黑色的車在暗處看不出輪廓，玻璃上會映出天空和別的車，騙過相機。光達三角形：第五週那顆 OS1，白色的東西量得到一百七十公尺，黑色的只剩九十；玻璃把雷射整束反射走，點雲上破一個洞；鏡面還會造出鬼點。雷達打勾：它看的是金屬，跟顏色無關，金屬車身反射很強。超音波打勾：聲音碰到玻璃一樣會彈回來。衛星定位和 IMU 是橫線。
 </a:t>
             </a:r>
           </a:p>
@@ -4843,22 +4777,154 @@
                 <a:spcPts val="0"/>
               </a:spcBef>
               <a:spcAft>
-                <a:spcPts val="200"/>
+                <a:spcPts val="133"/>
               </a:spcAft>
             </a:pPr>
             <a:r>
-              <a:rPr sz="1200" lang="zh-TW" dirty="0">
-                <a:solidFill>
-                  <a:srgbClr val="000000"/>
-                </a:solidFill>
-                <a:latin typeface="Arial Unicode MS"/>
-                <a:ea typeface="Arial Unicode MS"/>
-                <a:cs typeface="Arial Unicode MS"/>
-              </a:rPr>
-              <a:t>最後請各位找一找：</a:t>
-            </a:r>
-            <a:r>
-              <a:rPr sz="1200" b="1" lang="zh-TW" dirty="0">
+              <a:rPr sz="800" b="1" lang="zh-TW" dirty="0">
+                <a:solidFill>
+                  <a:srgbClr val="000000"/>
+                </a:solidFill>
+                <a:latin typeface="Arial Unicode MS"/>
+                <a:ea typeface="Arial Unicode MS"/>
+                <a:cs typeface="Arial Unicode MS"/>
+              </a:rPr>
+              <a:t>第五列，靜止物、頭頂的橋。</a:t>
+            </a:r>
+            <a:r>
+              <a:rPr sz="800" lang="zh-TW" dirty="0">
+                <a:solidFill>
+                  <a:srgbClr val="000000"/>
+                </a:solidFill>
+                <a:latin typeface="Arial Unicode MS"/>
+                <a:ea typeface="Arial Unicode MS"/>
+                <a:cs typeface="Arial Unicode MS"/>
+              </a:rPr>
+              <a:t>這一列換雷達出問題，三角形：它量不出高度，頭頂的路牌、天橋和路上停著的車，在它眼裡是同一個位置；路邊靜止的東西又太多，軟體常常把靜止的點過濾掉。丟太少，就為了路牌急煞；丟太多，可能把停著的車也丟掉，第二節開場會再講。相機和光達都看得出那是在上面，打勾。
+</a:t>
+            </a:r>
+          </a:p>
+          <a:p>
+            <a:pPr algn="l">
+              <a:spcBef>
+                <a:spcPts val="0"/>
+              </a:spcBef>
+              <a:spcAft>
+                <a:spcPts val="133"/>
+              </a:spcAft>
+            </a:pPr>
+            <a:r>
+              <a:rPr sz="800" b="1" lang="zh-TW" dirty="0">
+                <a:solidFill>
+                  <a:srgbClr val="000000"/>
+                </a:solidFill>
+                <a:latin typeface="Arial Unicode MS"/>
+                <a:ea typeface="Arial Unicode MS"/>
+                <a:cs typeface="Arial Unicode MS"/>
+              </a:rPr>
+              <a:t>第六列，遠處的行人、機車。</a:t>
+            </a:r>
+            <a:r>
+              <a:rPr sz="800" lang="zh-TW" dirty="0">
+                <a:solidFill>
+                  <a:srgbClr val="000000"/>
+                </a:solidFill>
+                <a:latin typeface="Arial Unicode MS"/>
+                <a:ea typeface="Arial Unicode MS"/>
+                <a:cs typeface="Arial Unicode MS"/>
+              </a:rPr>
+              <a:t>雷達叉叉：人和機車小、又不是金屬，反射很弱；等一下看真的資料，行人在十公尺內也只有兩成多抓得到。光達三角形：點一遠就稀，三十公尺外一台車身上只剩兩個點，一個人更少。相機打勾：只要光線夠，它認得出那是一個人、一台機車，這正是其他感測器做不到的。
+</a:t>
+            </a:r>
+          </a:p>
+          <a:p>
+            <a:pPr algn="l">
+              <a:spcBef>
+                <a:spcPts val="0"/>
+              </a:spcBef>
+              <a:spcAft>
+                <a:spcPts val="133"/>
+              </a:spcAft>
+            </a:pPr>
+            <a:r>
+              <a:rPr sz="800" b="1" lang="zh-TW" dirty="0">
+                <a:solidFill>
+                  <a:srgbClr val="000000"/>
+                </a:solidFill>
+                <a:latin typeface="Arial Unicode MS"/>
+                <a:ea typeface="Arial Unicode MS"/>
+                <a:cs typeface="Arial Unicode MS"/>
+              </a:rPr>
+              <a:t>第七列，被泥巴、冰雪蓋住。</a:t>
+            </a:r>
+            <a:r>
+              <a:rPr sz="800" lang="zh-TW" dirty="0">
+                <a:solidFill>
+                  <a:srgbClr val="000000"/>
+                </a:solidFill>
+                <a:latin typeface="Arial Unicode MS"/>
+                <a:ea typeface="Arial Unicode MS"/>
+                <a:cs typeface="Arial Unicode MS"/>
+              </a:rPr>
+              <a:t>相機、光達、超音波都是叉叉：就像眼鏡上糊了泥巴，鏡頭、光達的罩子、超音波的探頭被蓋住，訊號出不去也進不來。雷達三角形：薄薄一層泥，電波穿得過；厚的冰雪就會擋住。衛星定位的天線在車頂、IMU 在車子裡面，打勾。
+</a:t>
+            </a:r>
+          </a:p>
+          <a:p>
+            <a:pPr algn="l">
+              <a:spcBef>
+                <a:spcPts val="0"/>
+              </a:spcBef>
+              <a:spcAft>
+                <a:spcPts val="133"/>
+              </a:spcAft>
+            </a:pPr>
+            <a:r>
+              <a:rPr sz="800" b="1" lang="zh-TW" dirty="0">
+                <a:solidFill>
+                  <a:srgbClr val="000000"/>
+                </a:solidFill>
+                <a:latin typeface="Arial Unicode MS"/>
+                <a:ea typeface="Arial Unicode MS"/>
+                <a:cs typeface="Arial Unicode MS"/>
+              </a:rPr>
+              <a:t>第八列，高樓窄巷、隧道。</a:t>
+            </a:r>
+            <a:r>
+              <a:rPr sz="800" lang="zh-TW" dirty="0">
+                <a:solidFill>
+                  <a:srgbClr val="000000"/>
+                </a:solidFill>
+                <a:latin typeface="Arial Unicode MS"/>
+                <a:ea typeface="Arial Unicode MS"/>
+                <a:cs typeface="Arial Unicode MS"/>
+              </a:rPr>
+              <a:t>這一列換衛星定位叉叉：高樓之間訊號從牆上反射，位置偏好幾十公尺，它自己還不知道；進了隧道，乾脆收不到。IMU 三角形：它本身不會壞，可是衛星斷了，要它一個人撐很久，第六週算過，工業級的也只撐三十四秒，雪山隧道要五百八十秒。相機、光達、雷達、超音波在隧道裡照常工作，打勾；隧道出口那一瞬間的強光，已經算在第三列。
+</a:t>
+            </a:r>
+          </a:p>
+          <a:p>
+            <a:pPr algn="l">
+              <a:spcBef>
+                <a:spcPts val="0"/>
+              </a:spcBef>
+              <a:spcAft>
+                <a:spcPts val="133"/>
+              </a:spcAft>
+            </a:pPr>
+            <a:r>
+              <a:rPr sz="800" lang="zh-TW" dirty="0">
+                <a:solidFill>
+                  <a:srgbClr val="000000"/>
+                </a:solidFill>
+                <a:latin typeface="Arial Unicode MS"/>
+                <a:ea typeface="Arial Unicode MS"/>
+                <a:cs typeface="Arial Unicode MS"/>
+              </a:rPr>
+              <a:t>最後請各位直著看，找一找：</a:t>
+            </a:r>
+            <a:r>
+              <a:rPr sz="800" b="1" lang="zh-TW" dirty="0">
                 <a:solidFill>
                   <a:srgbClr val="000000"/>
                 </a:solidFill>
@@ -4869,15 +4935,15 @@
               <a:t>有沒有哪一欄全部是打勾？</a:t>
             </a:r>
             <a:r>
-              <a:rPr sz="1200" lang="zh-TW" dirty="0">
-                <a:solidFill>
-                  <a:srgbClr val="000000"/>
-                </a:solidFill>
-                <a:latin typeface="Arial Unicode MS"/>
-                <a:ea typeface="Arial Unicode MS"/>
-                <a:cs typeface="Arial Unicode MS"/>
-              </a:rPr>
-              <a:t>沒有。每一欄都至少有一個叉叉或三角形。這就是為什麼車上要裝好幾種。</a:t>
+              <a:rPr sz="800" lang="zh-TW" dirty="0">
+                <a:solidFill>
+                  <a:srgbClr val="000000"/>
+                </a:solidFill>
+                <a:latin typeface="Arial Unicode MS"/>
+                <a:ea typeface="Arial Unicode MS"/>
+                <a:cs typeface="Arial Unicode MS"/>
+              </a:rPr>
+              <a:t>沒有。每一欄都至少有一個叉叉或三角形，而且壞在不同的列：相機怕光線和天氣，光達怕黑色和玻璃，雷達怕靜止物和行人，超音波怕被蓋住，衛星定位怕高樓和隧道，IMU 怕撐太久。剛好互相錯開，這就是為什麼車上要裝好幾種。</a:t>
             </a:r>
           </a:p>
         </p:txBody>

--- a/第七週(10-22)/第七週_第1節_簡報.pptx
+++ b/第七週(10-22)/第七週_第1節_簡報.pptx
@@ -5,7 +5,7 @@
     <p:sldMasterId id="2147483648" r:id="rId1"/>
   </p:sldMasterIdLst>
   <p:notesMasterIdLst>
-    <p:notesMasterId r:id="rId19"/>
+    <p:notesMasterId r:id="rId20"/>
   </p:notesMasterIdLst>
   <p:sldIdLst>
     <p:sldId id="256" r:id="rId2"/>
@@ -25,6 +25,7 @@
     <p:sldId id="270" r:id="rId16"/>
     <p:sldId id="271" r:id="rId17"/>
     <p:sldId id="272" r:id="rId18"/>
+    <p:sldId id="273" r:id="rId19"/>
   </p:sldIdLst>
   <p:sldSz cx="9144000" cy="5143500"/>
   <p:notesSz cx="7560000" cy="10692000"/>
@@ -752,7 +753,7 @@
                 <a:ea typeface="Arial Unicode MS"/>
                 <a:cs typeface="Arial Unicode MS"/>
               </a:rPr>
-              <a:t>剛剛看的是一個瞬間。這張表是把 mini 版十段場景全部算一遍。資料集裡，每一台車、每一個人都有人工畫的立體框，官方也算好了框裡有幾個光達點、幾個雷達點。我把它們照距離分四段。
+              <a:t>下一張是一張統計表，先看真的長什麼樣子。
 </a:t>
             </a:r>
           </a:p>
@@ -766,6 +767,17 @@
               </a:spcAft>
             </a:pPr>
             <a:r>
+              <a:rPr sz="1200" lang="zh-TW" dirty="0">
+                <a:solidFill>
+                  <a:srgbClr val="000000"/>
+                </a:solidFill>
+                <a:latin typeface="Arial Unicode MS"/>
+                <a:ea typeface="Arial Unicode MS"/>
+                <a:cs typeface="Arial Unicode MS"/>
+              </a:rPr>
+              <a:t>這四台車，都是 nuScenes 裡完整出現在前方相機畫面裡的車。我把每一台裁出來，放大到看起來差不多大，然後只畫</a:t>
+            </a:r>
+            <a:r>
               <a:rPr sz="1200" b="1" lang="zh-TW" dirty="0">
                 <a:solidFill>
                   <a:srgbClr val="000000"/>
@@ -774,7 +786,7 @@
                 <a:ea typeface="Arial Unicode MS"/>
                 <a:cs typeface="Arial Unicode MS"/>
               </a:rPr>
-              <a:t>第二欄，車身上的光達點</a:t>
+              <a:t>打在車身上的光達點</a:t>
             </a:r>
             <a:r>
               <a:rPr sz="1200" lang="zh-TW" dirty="0">
@@ -785,7 +797,7 @@
                 <a:ea typeface="Arial Unicode MS"/>
                 <a:cs typeface="Arial Unicode MS"/>
               </a:rPr>
-              <a:t>，取中位數，就是排在正中間的那個數字。十公尺內五百個，十到二十公尺六十五個，二十到三十公尺十二個，三十公尺以外只剩兩個。第五週講過，光達的點是一個角度一個角度灑出去的，距離愈遠，攤得愈開，打到身上的就愈少。
+              <a:t>，就是橘色的點。四台的距離，剛好各落在下一張表的一段，點數也都接近那一段的中間值，所以不是我特別挑的例子。
 </a:t>
             </a:r>
           </a:p>
@@ -807,7 +819,7 @@
                 <a:ea typeface="Arial Unicode MS"/>
                 <a:cs typeface="Arial Unicode MS"/>
               </a:rPr>
-              <a:t>後面三欄，有沒有被雷達抓到</a:t>
+              <a:t>最左邊，十公尺</a:t>
             </a:r>
             <a:r>
               <a:rPr sz="1200" lang="zh-TW" dirty="0">
@@ -818,29 +830,7 @@
                 <a:ea typeface="Arial Unicode MS"/>
                 <a:cs typeface="Arial Unicode MS"/>
               </a:rPr>
-              <a:t>，也就是框裡至少有一個雷達點的比例。車子，十公尺內將近七成，到三十公尺外還有四成多。機車和腳踏車，只有一到兩成。行人，</a:t>
-            </a:r>
-            <a:r>
-              <a:rPr sz="1200" b="1" lang="zh-TW" dirty="0">
-                <a:solidFill>
-                  <a:srgbClr val="000000"/>
-                </a:solidFill>
-                <a:latin typeface="Arial Unicode MS"/>
-                <a:ea typeface="Arial Unicode MS"/>
-                <a:cs typeface="Arial Unicode MS"/>
-              </a:rPr>
-              <a:t>十公尺內也只有兩成多</a:t>
-            </a:r>
-            <a:r>
-              <a:rPr sz="1200" lang="zh-TW" dirty="0">
-                <a:solidFill>
-                  <a:srgbClr val="000000"/>
-                </a:solidFill>
-                <a:latin typeface="Arial Unicode MS"/>
-                <a:ea typeface="Arial Unicode MS"/>
-                <a:cs typeface="Arial Unicode MS"/>
-              </a:rPr>
-              <a:t>，三十公尺外不到一成。
+              <a:t>，四百二十一個點，一條一條的掃描線，把整台廂型車的形狀都描出來了。
 </a:t>
             </a:r>
           </a:p>
@@ -854,6 +844,17 @@
               </a:spcAft>
             </a:pPr>
             <a:r>
+              <a:rPr sz="1200" b="1" lang="zh-TW" dirty="0">
+                <a:solidFill>
+                  <a:srgbClr val="000000"/>
+                </a:solidFill>
+                <a:latin typeface="Arial Unicode MS"/>
+                <a:ea typeface="Arial Unicode MS"/>
+                <a:cs typeface="Arial Unicode MS"/>
+              </a:rPr>
+              <a:t>十七公尺</a:t>
+            </a:r>
+            <a:r>
               <a:rPr sz="1200" lang="zh-TW" dirty="0">
                 <a:solidFill>
                   <a:srgbClr val="000000"/>
@@ -862,7 +863,7 @@
                 <a:ea typeface="Arial Unicode MS"/>
                 <a:cs typeface="Arial Unicode MS"/>
               </a:rPr>
-              <a:t>為什麼？雷達的電波打到金屬，回來很強，車子像一面鏡子；人和機車小，又大多不是金屬，回來的很弱，常常在過濾的時候就被當成雜訊丟掉了。
+              <a:t>，六十四個點。還看得出是一台車，可是掃描線已經稀稀落落。
 </a:t>
             </a:r>
           </a:p>
@@ -876,6 +877,17 @@
               </a:spcAft>
             </a:pPr>
             <a:r>
+              <a:rPr sz="1200" b="1" lang="zh-TW" dirty="0">
+                <a:solidFill>
+                  <a:srgbClr val="000000"/>
+                </a:solidFill>
+                <a:latin typeface="Arial Unicode MS"/>
+                <a:ea typeface="Arial Unicode MS"/>
+                <a:cs typeface="Arial Unicode MS"/>
+              </a:rPr>
+              <a:t>二十四公尺</a:t>
+            </a:r>
+            <a:r>
               <a:rPr sz="1200" lang="zh-TW" dirty="0">
                 <a:solidFill>
                   <a:srgbClr val="000000"/>
@@ -884,29 +896,7 @@
                 <a:ea typeface="Arial Unicode MS"/>
                 <a:cs typeface="Arial Unicode MS"/>
               </a:rPr>
-              <a:t>這一格對河內很重要：滿街都是機車和行人，</a:t>
-            </a:r>
-            <a:r>
-              <a:rPr sz="1200" b="1" lang="zh-TW" dirty="0">
-                <a:solidFill>
-                  <a:srgbClr val="000000"/>
-                </a:solidFill>
-                <a:latin typeface="Arial Unicode MS"/>
-                <a:ea typeface="Arial Unicode MS"/>
-                <a:cs typeface="Arial Unicode MS"/>
-              </a:rPr>
-              <a:t>雷達最不擅長的，剛好是那裡最多的</a:t>
-            </a:r>
-            <a:r>
-              <a:rPr sz="1200" lang="zh-TW" dirty="0">
-                <a:solidFill>
-                  <a:srgbClr val="000000"/>
-                </a:solidFill>
-                <a:latin typeface="Arial Unicode MS"/>
-                <a:ea typeface="Arial Unicode MS"/>
-                <a:cs typeface="Arial Unicode MS"/>
-              </a:rPr>
-              <a:t>。所以上週表上的雷達在河內「夠」，講的是測距和解析度；真的上路，還要靠相機和光達來補人和機車。
+              <a:t>，十二個點。只剩幾小段。
 </a:t>
             </a:r>
           </a:p>
@@ -920,6 +910,17 @@
               </a:spcAft>
             </a:pPr>
             <a:r>
+              <a:rPr sz="1200" b="1" lang="zh-TW" dirty="0">
+                <a:solidFill>
+                  <a:srgbClr val="000000"/>
+                </a:solidFill>
+                <a:latin typeface="Arial Unicode MS"/>
+                <a:ea typeface="Arial Unicode MS"/>
+                <a:cs typeface="Arial Unicode MS"/>
+              </a:rPr>
+              <a:t>最右邊，四十一公尺</a:t>
+            </a:r>
+            <a:r>
               <a:rPr sz="1200" lang="zh-TW" dirty="0">
                 <a:solidFill>
                   <a:srgbClr val="000000"/>
@@ -928,7 +929,73 @@
                 <a:ea typeface="Arial Unicode MS"/>
                 <a:cs typeface="Arial Unicode MS"/>
               </a:rPr>
-              <a:t>順便提醒：雷達點是零，不代表一定看不到。有時候是被前面的車擋住了，有時候是過濾掉了。但這麼多筆資料一起看，趨勢很清楚。</a:t>
+              <a:t>，</a:t>
+            </a:r>
+            <a:r>
+              <a:rPr sz="1200" b="1" lang="zh-TW" dirty="0">
+                <a:solidFill>
+                  <a:srgbClr val="000000"/>
+                </a:solidFill>
+                <a:latin typeface="Arial Unicode MS"/>
+                <a:ea typeface="Arial Unicode MS"/>
+                <a:cs typeface="Arial Unicode MS"/>
+              </a:rPr>
+              <a:t>只剩兩個點</a:t>
+            </a:r>
+            <a:r>
+              <a:rPr sz="1200" lang="zh-TW" dirty="0">
+                <a:solidFill>
+                  <a:srgbClr val="000000"/>
+                </a:solidFill>
+                <a:latin typeface="Arial Unicode MS"/>
+                <a:ea typeface="Arial Unicode MS"/>
+                <a:cs typeface="Arial Unicode MS"/>
+              </a:rPr>
+              <a:t>。光達只知道「那裡有東西」，看不出那是車、是箱子，還是一根柱子。
+</a:t>
+            </a:r>
+          </a:p>
+          <a:p>
+            <a:pPr algn="l">
+              <a:spcBef>
+                <a:spcPts val="0"/>
+              </a:spcBef>
+              <a:spcAft>
+                <a:spcPts val="200"/>
+              </a:spcAft>
+            </a:pPr>
+            <a:r>
+              <a:rPr sz="1200" lang="zh-TW" dirty="0">
+                <a:solidFill>
+                  <a:srgbClr val="000000"/>
+                </a:solidFill>
+                <a:latin typeface="Arial Unicode MS"/>
+                <a:ea typeface="Arial Unicode MS"/>
+                <a:cs typeface="Arial Unicode MS"/>
+              </a:rPr>
+              <a:t>為什麼遠了會掉這麼快？這顆光達有三十二條雷射線，上下兩條之間差一點三三度。在四十一公尺外，兩條線之間就差將近一公尺，可是一台車只有一公尺半高，只有一兩條線碰得到它；左右方向也一樣，一條線上的點一遠就攤開。第三週說「距離兩倍，點數剩四分之一」，那是平均的說法；真的車還要看它多大、朝哪邊、有沒有被別的車擋到。
+</a:t>
+            </a:r>
+          </a:p>
+          <a:p>
+            <a:pPr algn="l">
+              <a:spcBef>
+                <a:spcPts val="0"/>
+              </a:spcBef>
+              <a:spcAft>
+                <a:spcPts val="200"/>
+              </a:spcAft>
+            </a:pPr>
+            <a:r>
+              <a:rPr sz="1200" lang="zh-TW" dirty="0">
+                <a:solidFill>
+                  <a:srgbClr val="000000"/>
+                </a:solidFill>
+                <a:latin typeface="Arial Unicode MS"/>
+                <a:ea typeface="Arial Unicode MS"/>
+                <a:cs typeface="Arial Unicode MS"/>
+              </a:rPr>
+              <a:t>下一張，把十段場景全部算一遍。</a:t>
             </a:r>
           </a:p>
         </p:txBody>
@@ -1049,29 +1116,7 @@
                 <a:ea typeface="Arial Unicode MS"/>
                 <a:cs typeface="Arial Unicode MS"/>
               </a:rPr>
-              <a:t>接下來不是天氣，是</a:t>
-            </a:r>
-            <a:r>
-              <a:rPr sz="1200" b="1" lang="zh-TW" dirty="0">
-                <a:solidFill>
-                  <a:srgbClr val="000000"/>
-                </a:solidFill>
-                <a:latin typeface="Arial Unicode MS"/>
-                <a:ea typeface="Arial Unicode MS"/>
-                <a:cs typeface="Arial Unicode MS"/>
-              </a:rPr>
-              <a:t>表面和地形</a:t>
-            </a:r>
-            <a:r>
-              <a:rPr sz="1200" lang="zh-TW" dirty="0">
-                <a:solidFill>
-                  <a:srgbClr val="000000"/>
-                </a:solidFill>
-                <a:latin typeface="Arial Unicode MS"/>
-                <a:ea typeface="Arial Unicode MS"/>
-                <a:cs typeface="Arial Unicode MS"/>
-              </a:rPr>
-              <a:t>。這兩個例子前兩週都講過，今天把它們放在一起。
+              <a:t>剛剛看的是一個瞬間。這張表是把 mini 版十段場景全部算一遍。資料集裡，每一台車、每一個人都有人工畫的立體框，官方也算好了框裡有幾個光達點、幾個雷達點。我把它們照距離分四段。
 </a:t>
             </a:r>
           </a:p>
@@ -1093,7 +1138,7 @@
                 <a:ea typeface="Arial Unicode MS"/>
                 <a:cs typeface="Arial Unicode MS"/>
               </a:rPr>
-              <a:t>光達怕鏡面和玻璃。</a:t>
+              <a:t>第二欄，車身上的光達點</a:t>
             </a:r>
             <a:r>
               <a:rPr sz="1200" lang="zh-TW" dirty="0">
@@ -1104,7 +1149,7 @@
                 <a:ea typeface="Arial Unicode MS"/>
                 <a:cs typeface="Arial Unicode MS"/>
               </a:rPr>
-              <a:t>左邊是第五週的動畫，會循環播三格。第五週講過：①玻璃帷幕把雷射整束反射走，回不來，那一塊就破一個洞；②鏡面更麻煩，光被鏡子轉個彎才打到旁邊的車，光達以為東西在鏡子後面，那就是鬼點。
+              <a:t>，取中位數，就是排在正中間的那個數字。十公尺內五百個，十到二十公尺六十五個，二十到三十公尺十二個，三十公尺以外只剩兩個。第五週講過，光達的點是一個角度一個角度灑出去的，距離愈遠，攤得愈開，打到身上的就愈少。
 </a:t>
             </a:r>
           </a:p>
@@ -1126,7 +1171,7 @@
                 <a:ea typeface="Arial Unicode MS"/>
                 <a:cs typeface="Arial Unicode MS"/>
               </a:rPr>
-              <a:t>衛星定位怕高樓反射。</a:t>
+              <a:t>後面三欄，有沒有被雷達抓到</a:t>
             </a:r>
             <a:r>
               <a:rPr sz="1200" lang="zh-TW" dirty="0">
@@ -1137,7 +1182,29 @@
                 <a:ea typeface="Arial Unicode MS"/>
                 <a:cs typeface="Arial Unicode MS"/>
               </a:rPr>
-              <a:t>第六週：窄巷裡，訊號從牆上反射進來，多走了一段路，接收機以為衛星比較遠，算出來的位置偏掉，而且它自己不知道。
+              <a:t>，也就是框裡至少有一個雷達點的比例。車子，十公尺內將近七成，到三十公尺外還有四成多。機車和腳踏車，只有一到兩成。行人，</a:t>
+            </a:r>
+            <a:r>
+              <a:rPr sz="1200" b="1" lang="zh-TW" dirty="0">
+                <a:solidFill>
+                  <a:srgbClr val="000000"/>
+                </a:solidFill>
+                <a:latin typeface="Arial Unicode MS"/>
+                <a:ea typeface="Arial Unicode MS"/>
+                <a:cs typeface="Arial Unicode MS"/>
+              </a:rPr>
+              <a:t>十公尺內也只有兩成多</a:t>
+            </a:r>
+            <a:r>
+              <a:rPr sz="1200" lang="zh-TW" dirty="0">
+                <a:solidFill>
+                  <a:srgbClr val="000000"/>
+                </a:solidFill>
+                <a:latin typeface="Arial Unicode MS"/>
+                <a:ea typeface="Arial Unicode MS"/>
+                <a:cs typeface="Arial Unicode MS"/>
+              </a:rPr>
+              <a:t>，三十公尺外不到一成。
 </a:t>
             </a:r>
           </a:p>
@@ -1159,7 +1226,7 @@
                 <a:ea typeface="Arial Unicode MS"/>
                 <a:cs typeface="Arial Unicode MS"/>
               </a:rPr>
-              <a:t>雷達也有同一種毛病，前兩張看過了：量不出高度，頭頂的路牌和路上的車分不出來。
+              <a:t>為什麼？雷達的電波打到金屬，回來很強，車子像一面鏡子；人和機車小，又大多不是金屬，回來的很弱，常常在過濾的時候就被當成雜訊丟掉了。
 </a:t>
             </a:r>
           </a:p>
@@ -1181,7 +1248,7 @@
                 <a:ea typeface="Arial Unicode MS"/>
                 <a:cs typeface="Arial Unicode MS"/>
               </a:rPr>
-              <a:t>這幾個有一個共同點，請各位想一想是第幾種壞法？</a:t>
+              <a:t>這一格對河內很重要：滿街都是機車和行人，</a:t>
             </a:r>
             <a:r>
               <a:rPr sz="1200" b="1" lang="zh-TW" dirty="0">
@@ -1192,7 +1259,7 @@
                 <a:ea typeface="Arial Unicode MS"/>
                 <a:cs typeface="Arial Unicode MS"/>
               </a:rPr>
-              <a:t>第二種，看錯。</a:t>
+              <a:t>雷達最不擅長的，剛好是那裡最多的</a:t>
             </a:r>
             <a:r>
               <a:rPr sz="1200" lang="zh-TW" dirty="0">
@@ -1203,7 +1270,7 @@
                 <a:ea typeface="Arial Unicode MS"/>
                 <a:cs typeface="Arial Unicode MS"/>
               </a:rPr>
-              <a:t>它們都有給答案，而且很有把握，只是答案是錯的。就像看鏡子裡的人，你以為他站在鏡子後面。
+              <a:t>。所以上週表上的雷達在河內「夠」，講的是測距和解析度；真的上路，還要靠相機和光達來補人和機車。
 </a:t>
             </a:r>
           </a:p>
@@ -1225,7 +1292,7 @@
                 <a:ea typeface="Arial Unicode MS"/>
                 <a:cs typeface="Arial Unicode MS"/>
               </a:rPr>
-              <a:t>這種壞法比看不到還麻煩，因為它不會自己舉手說「我不確定」。要靠別的感測器比對，才發現它錯了。這就是下一節要講的。</a:t>
+              <a:t>順便提醒：雷達點是零，不代表一定看不到。有時候是被前面的車擋住了，有時候是過濾掉了。但這麼多筆資料一起看，趨勢很清楚。</a:t>
             </a:r>
           </a:p>
         </p:txBody>
@@ -1346,7 +1413,7 @@
                 <a:ea typeface="Arial Unicode MS"/>
                 <a:cs typeface="Arial Unicode MS"/>
               </a:rPr>
-              <a:t>再來是最日常的一種：</a:t>
+              <a:t>接下來不是天氣，是</a:t>
             </a:r>
             <a:r>
               <a:rPr sz="1200" b="1" lang="zh-TW" dirty="0">
@@ -1357,7 +1424,7 @@
                 <a:ea typeface="Arial Unicode MS"/>
                 <a:cs typeface="Arial Unicode MS"/>
               </a:rPr>
-              <a:t>髒了、被蓋住。</a:t>
+              <a:t>表面和地形</a:t>
             </a:r>
             <a:r>
               <a:rPr sz="1200" lang="zh-TW" dirty="0">
@@ -1368,7 +1435,7 @@
                 <a:ea typeface="Arial Unicode MS"/>
                 <a:cs typeface="Arial Unicode MS"/>
               </a:rPr>
-              <a:t>
+              <a:t>。這兩個例子前兩週都講過，今天把它們放在一起。
 </a:t>
             </a:r>
           </a:p>
@@ -1382,6 +1449,17 @@
               </a:spcAft>
             </a:pPr>
             <a:r>
+              <a:rPr sz="1200" b="1" lang="zh-TW" dirty="0">
+                <a:solidFill>
+                  <a:srgbClr val="000000"/>
+                </a:solidFill>
+                <a:latin typeface="Arial Unicode MS"/>
+                <a:ea typeface="Arial Unicode MS"/>
+                <a:cs typeface="Arial Unicode MS"/>
+              </a:rPr>
+              <a:t>光達怕鏡面和玻璃。</a:t>
+            </a:r>
+            <a:r>
               <a:rPr sz="1200" lang="zh-TW" dirty="0">
                 <a:solidFill>
                   <a:srgbClr val="000000"/>
@@ -1390,7 +1468,7 @@
                 <a:ea typeface="Arial Unicode MS"/>
                 <a:cs typeface="Arial Unicode MS"/>
               </a:rPr>
-              <a:t>各位戴眼鏡的就知道：鏡片上一滴雨、一點灰塵，看東西就不清楚。車上的相機、光達、超音波都是車子的眼睛，而且它們裝在車頭、車頂，比眼鏡髒得更快：泥巴、雪、冬天路上灑的鹽、高速公路上撞死的昆蟲。
+              <a:t>左邊是第五週的動畫，會循環播三格。第五週講過：①玻璃帷幕把雷射整束反射走，回不來，那一塊就破一個洞；②鏡面更麻煩，光被鏡子轉個彎才打到旁邊的車，光達以為東西在鏡子後面，那就是鬼點。
 </a:t>
             </a:r>
           </a:p>
@@ -1404,6 +1482,17 @@
               </a:spcAft>
             </a:pPr>
             <a:r>
+              <a:rPr sz="1200" b="1" lang="zh-TW" dirty="0">
+                <a:solidFill>
+                  <a:srgbClr val="000000"/>
+                </a:solidFill>
+                <a:latin typeface="Arial Unicode MS"/>
+                <a:ea typeface="Arial Unicode MS"/>
+                <a:cs typeface="Arial Unicode MS"/>
+              </a:rPr>
+              <a:t>衛星定位怕高樓反射。</a:t>
+            </a:r>
+            <a:r>
               <a:rPr sz="1200" lang="zh-TW" dirty="0">
                 <a:solidFill>
                   <a:srgbClr val="000000"/>
@@ -1412,29 +1501,7 @@
                 <a:ea typeface="Arial Unicode MS"/>
                 <a:cs typeface="Arial Unicode MS"/>
               </a:rPr>
-              <a:t>看一支一分半的動畫。這是法國汽車零件廠 Valeo 的宣傳片，它在賣清洗系統，所以最後是廣告。可是前面講的道理是對的。</a:t>
-            </a:r>
-            <a:r>
-              <a:rPr sz="1200" b="1" lang="zh-TW" dirty="0">
-                <a:solidFill>
-                  <a:srgbClr val="000000"/>
-                </a:solidFill>
-                <a:latin typeface="Arial Unicode MS"/>
-                <a:ea typeface="Arial Unicode MS"/>
-                <a:cs typeface="Arial Unicode MS"/>
-              </a:rPr>
-              <a:t>0:45</a:t>
-            </a:r>
-            <a:r>
-              <a:rPr sz="1200" lang="zh-TW" dirty="0">
-                <a:solidFill>
-                  <a:srgbClr val="000000"/>
-                </a:solidFill>
-                <a:latin typeface="Arial Unicode MS"/>
-                <a:ea typeface="Arial Unicode MS"/>
-                <a:cs typeface="Arial Unicode MS"/>
-              </a:rPr>
-              <a:t> 停一下：畫面上三副眼鏡，灰塵、冰和鹽、水滴，都會讓感測器看不清楚。後面那段是它的做法：對著鏡頭噴水清洗。
+              <a:t>第六週：窄巷裡，訊號從牆上反射進來，多走了一段路，接收機以為衛星比較遠，算出來的位置偏掉，而且它自己不知道。
 </a:t>
             </a:r>
           </a:p>
@@ -1456,29 +1523,7 @@
                 <a:ea typeface="Arial Unicode MS"/>
                 <a:cs typeface="Arial Unicode MS"/>
               </a:rPr>
-              <a:t>這件事跟第四張的三種壞法有關。第六週那顆 Bosch 超音波，規格表上有一行 </a:t>
-            </a:r>
-            <a:r>
-              <a:rPr sz="1200" b="1" lang="zh-TW" dirty="0">
-                <a:solidFill>
-                  <a:srgbClr val="000000"/>
-                </a:solidFill>
-                <a:latin typeface="Arial Unicode MS"/>
-                <a:ea typeface="Arial Unicode MS"/>
-                <a:cs typeface="Arial Unicode MS"/>
-              </a:rPr>
-              <a:t>Blindness detection</a:t>
-            </a:r>
-            <a:r>
-              <a:rPr sz="1200" lang="zh-TW" dirty="0">
-                <a:solidFill>
-                  <a:srgbClr val="000000"/>
-                </a:solidFill>
-                <a:latin typeface="Arial Unicode MS"/>
-                <a:ea typeface="Arial Unicode MS"/>
-                <a:cs typeface="Arial Unicode MS"/>
-              </a:rPr>
-              <a:t>：它會發現自己被蓋住，告訴車子「我現在聽不清楚」，儀表板跳警告。HC-SR04 沒有這一行，被蓋住就照常說「沒事」。
+              <a:t>雷達也有同一種毛病，前兩張看過了：量不出高度，頭頂的路牌和路上的車分不出來。
 </a:t>
             </a:r>
           </a:p>
@@ -1500,7 +1545,7 @@
                 <a:ea typeface="Arial Unicode MS"/>
                 <a:cs typeface="Arial Unicode MS"/>
               </a:rPr>
-              <a:t>所以，</a:t>
+              <a:t>這幾個有一個共同點，請各位想一想是第幾種壞法？</a:t>
             </a:r>
             <a:r>
               <a:rPr sz="1200" b="1" lang="zh-TW" dirty="0">
@@ -1511,7 +1556,7 @@
                 <a:ea typeface="Arial Unicode MS"/>
                 <a:cs typeface="Arial Unicode MS"/>
               </a:rPr>
-              <a:t>會發現自己被蓋住，就把最危險的第三種壞法，變成最好處理的第一種。</a:t>
+              <a:t>第二種，看錯。</a:t>
             </a:r>
             <a:r>
               <a:rPr sz="1200" lang="zh-TW" dirty="0">
@@ -1522,7 +1567,29 @@
                 <a:ea typeface="Arial Unicode MS"/>
                 <a:cs typeface="Arial Unicode MS"/>
               </a:rPr>
-              <a:t>車用和教學用的差別，常常就差在這一行。</a:t>
+              <a:t>它們都有給答案，而且很有把握，只是答案是錯的。就像看鏡子裡的人，你以為他站在鏡子後面。
+</a:t>
+            </a:r>
+          </a:p>
+          <a:p>
+            <a:pPr algn="l">
+              <a:spcBef>
+                <a:spcPts val="0"/>
+              </a:spcBef>
+              <a:spcAft>
+                <a:spcPts val="200"/>
+              </a:spcAft>
+            </a:pPr>
+            <a:r>
+              <a:rPr sz="1200" lang="zh-TW" dirty="0">
+                <a:solidFill>
+                  <a:srgbClr val="000000"/>
+                </a:solidFill>
+                <a:latin typeface="Arial Unicode MS"/>
+                <a:ea typeface="Arial Unicode MS"/>
+                <a:cs typeface="Arial Unicode MS"/>
+              </a:rPr>
+              <a:t>這種壞法比看不到還麻煩，因為它不會自己舉手說「我不確定」。要靠別的感測器比對，才發現它錯了。這就是下一節要講的。</a:t>
             </a:r>
           </a:p>
         </p:txBody>
@@ -1643,7 +1710,7 @@
                 <a:ea typeface="Arial Unicode MS"/>
                 <a:cs typeface="Arial Unicode MS"/>
               </a:rPr>
-              <a:t>最後一種條件是</a:t>
+              <a:t>再來是最日常的一種：</a:t>
             </a:r>
             <a:r>
               <a:rPr sz="1200" b="1" lang="zh-TW" dirty="0">
@@ -1654,7 +1721,7 @@
                 <a:ea typeface="Arial Unicode MS"/>
                 <a:cs typeface="Arial Unicode MS"/>
               </a:rPr>
-              <a:t>時間</a:t>
+              <a:t>髒了、被蓋住。</a:t>
             </a:r>
             <a:r>
               <a:rPr sz="1200" lang="zh-TW" dirty="0">
@@ -1665,7 +1732,7 @@
                 <a:ea typeface="Arial Unicode MS"/>
                 <a:cs typeface="Arial Unicode MS"/>
               </a:rPr>
-              <a:t>。
+              <a:t>
 </a:t>
             </a:r>
           </a:p>
@@ -1687,51 +1754,7 @@
                 <a:ea typeface="Arial Unicode MS"/>
                 <a:cs typeface="Arial Unicode MS"/>
               </a:rPr>
-              <a:t>左邊這張圖第六週第二節看過：橫軸是衛星斷掉以後過了幾秒，縱軸是車子橫向偏了幾公尺。綠色那條是工業級的 IMU，每小時偏八度，時速八十，</a:t>
-            </a:r>
-            <a:r>
-              <a:rPr sz="1200" b="1" lang="zh-TW" dirty="0">
-                <a:solidFill>
-                  <a:srgbClr val="000000"/>
-                </a:solidFill>
-                <a:latin typeface="Arial Unicode MS"/>
-                <a:ea typeface="Arial Unicode MS"/>
-                <a:cs typeface="Arial Unicode MS"/>
-              </a:rPr>
-              <a:t>三十四秒</a:t>
-            </a:r>
-            <a:r>
-              <a:rPr sz="1200" lang="zh-TW" dirty="0">
-                <a:solidFill>
-                  <a:srgbClr val="000000"/>
-                </a:solidFill>
-                <a:latin typeface="Arial Unicode MS"/>
-                <a:ea typeface="Arial Unicode MS"/>
-                <a:cs typeface="Arial Unicode MS"/>
-              </a:rPr>
-              <a:t>就橫向偏零點五公尺，碰到紅線。手機等級的那條，兩秒就出去了。雪山隧道要開</a:t>
-            </a:r>
-            <a:r>
-              <a:rPr sz="1200" b="1" lang="zh-TW" dirty="0">
-                <a:solidFill>
-                  <a:srgbClr val="000000"/>
-                </a:solidFill>
-                <a:latin typeface="Arial Unicode MS"/>
-                <a:ea typeface="Arial Unicode MS"/>
-                <a:cs typeface="Arial Unicode MS"/>
-              </a:rPr>
-              <a:t>五百八十秒</a:t>
-            </a:r>
-            <a:r>
-              <a:rPr sz="1200" lang="zh-TW" dirty="0">
-                <a:solidFill>
-                  <a:srgbClr val="000000"/>
-                </a:solidFill>
-                <a:latin typeface="Arial Unicode MS"/>
-                <a:ea typeface="Arial Unicode MS"/>
-                <a:cs typeface="Arial Unicode MS"/>
-              </a:rPr>
-              <a:t>，撐不住。
+              <a:t>各位戴眼鏡的就知道：鏡片上一滴雨、一點灰塵，看東西就不清楚。車上的相機、光達、超音波都是車子的眼睛，而且它們裝在車頭、車頂，比眼鏡髒得更快：泥巴、雪、冬天路上灑的鹽、高速公路上撞死的昆蟲。
 </a:t>
             </a:r>
           </a:p>
@@ -1753,7 +1776,7 @@
                 <a:ea typeface="Arial Unicode MS"/>
                 <a:cs typeface="Arial Unicode MS"/>
               </a:rPr>
-              <a:t>這兩種感測器的壞法，個性剛好相反。</a:t>
+              <a:t>看一支一分半的動畫。這是法國汽車零件廠 Valeo 的宣傳片，它在賣清洗系統，所以最後是廣告。可是前面講的道理是對的。</a:t>
             </a:r>
             <a:r>
               <a:rPr sz="1200" b="1" lang="zh-TW" dirty="0">
@@ -1764,7 +1787,7 @@
                 <a:ea typeface="Arial Unicode MS"/>
                 <a:cs typeface="Arial Unicode MS"/>
               </a:rPr>
-              <a:t>IMU 是慢慢壞</a:t>
+              <a:t>0:45</a:t>
             </a:r>
             <a:r>
               <a:rPr sz="1200" lang="zh-TW" dirty="0">
@@ -1775,29 +1798,7 @@
                 <a:ea typeface="Arial Unicode MS"/>
                 <a:cs typeface="Arial Unicode MS"/>
               </a:rPr>
-              <a:t>：一開始很準，愈久愈歪，像閉著眼睛走路。</a:t>
-            </a:r>
-            <a:r>
-              <a:rPr sz="1200" b="1" lang="zh-TW" dirty="0">
-                <a:solidFill>
-                  <a:srgbClr val="000000"/>
-                </a:solidFill>
-                <a:latin typeface="Arial Unicode MS"/>
-                <a:ea typeface="Arial Unicode MS"/>
-                <a:cs typeface="Arial Unicode MS"/>
-              </a:rPr>
-              <a:t>衛星是突然壞</a:t>
-            </a:r>
-            <a:r>
-              <a:rPr sz="1200" lang="zh-TW" dirty="0">
-                <a:solidFill>
-                  <a:srgbClr val="000000"/>
-                </a:solidFill>
-                <a:latin typeface="Arial Unicode MS"/>
-                <a:ea typeface="Arial Unicode MS"/>
-                <a:cs typeface="Arial Unicode MS"/>
-              </a:rPr>
-              <a:t>：平常好好的，一進隧道，一秒鐘就沒了。
+              <a:t> 停一下：畫面上三副眼鏡，灰塵、冰和鹽、水滴，都會讓感測器看不清楚。後面那段是它的做法：對著鏡頭噴水清洗。
 </a:t>
             </a:r>
           </a:p>
@@ -1819,7 +1820,73 @@
                 <a:ea typeface="Arial Unicode MS"/>
                 <a:cs typeface="Arial Unicode MS"/>
               </a:rPr>
-              <a:t>慢慢壞的，配上突然壞的，剛好可以互補：衛星在的時候，幫 IMU 歸零；衛星斷的那幾秒，IMU 先頂上。這就是下一節要講的融合。</a:t>
+              <a:t>這件事跟第四張的三種壞法有關。第六週那顆 Bosch 超音波，規格表上有一行 </a:t>
+            </a:r>
+            <a:r>
+              <a:rPr sz="1200" b="1" lang="zh-TW" dirty="0">
+                <a:solidFill>
+                  <a:srgbClr val="000000"/>
+                </a:solidFill>
+                <a:latin typeface="Arial Unicode MS"/>
+                <a:ea typeface="Arial Unicode MS"/>
+                <a:cs typeface="Arial Unicode MS"/>
+              </a:rPr>
+              <a:t>Blindness detection</a:t>
+            </a:r>
+            <a:r>
+              <a:rPr sz="1200" lang="zh-TW" dirty="0">
+                <a:solidFill>
+                  <a:srgbClr val="000000"/>
+                </a:solidFill>
+                <a:latin typeface="Arial Unicode MS"/>
+                <a:ea typeface="Arial Unicode MS"/>
+                <a:cs typeface="Arial Unicode MS"/>
+              </a:rPr>
+              <a:t>：它會發現自己被蓋住，告訴車子「我現在聽不清楚」，儀表板跳警告。HC-SR04 沒有這一行，被蓋住就照常說「沒事」。
+</a:t>
+            </a:r>
+          </a:p>
+          <a:p>
+            <a:pPr algn="l">
+              <a:spcBef>
+                <a:spcPts val="0"/>
+              </a:spcBef>
+              <a:spcAft>
+                <a:spcPts val="200"/>
+              </a:spcAft>
+            </a:pPr>
+            <a:r>
+              <a:rPr sz="1200" lang="zh-TW" dirty="0">
+                <a:solidFill>
+                  <a:srgbClr val="000000"/>
+                </a:solidFill>
+                <a:latin typeface="Arial Unicode MS"/>
+                <a:ea typeface="Arial Unicode MS"/>
+                <a:cs typeface="Arial Unicode MS"/>
+              </a:rPr>
+              <a:t>所以，</a:t>
+            </a:r>
+            <a:r>
+              <a:rPr sz="1200" b="1" lang="zh-TW" dirty="0">
+                <a:solidFill>
+                  <a:srgbClr val="000000"/>
+                </a:solidFill>
+                <a:latin typeface="Arial Unicode MS"/>
+                <a:ea typeface="Arial Unicode MS"/>
+                <a:cs typeface="Arial Unicode MS"/>
+              </a:rPr>
+              <a:t>會發現自己被蓋住，就把最危險的第三種壞法，變成最好處理的第一種。</a:t>
+            </a:r>
+            <a:r>
+              <a:rPr sz="1200" lang="zh-TW" dirty="0">
+                <a:solidFill>
+                  <a:srgbClr val="000000"/>
+                </a:solidFill>
+                <a:latin typeface="Arial Unicode MS"/>
+                <a:ea typeface="Arial Unicode MS"/>
+                <a:cs typeface="Arial Unicode MS"/>
+              </a:rPr>
+              <a:t>車用和教學用的差別，常常就差在這一行。</a:t>
             </a:r>
           </a:p>
         </p:txBody>
@@ -1928,41 +1995,41 @@
                 <a:spcPts val="0"/>
               </a:spcBef>
               <a:spcAft>
-                <a:spcPts val="133"/>
+                <a:spcPts val="200"/>
               </a:spcAft>
             </a:pPr>
             <a:r>
-              <a:rPr sz="800" lang="zh-TW" dirty="0">
-                <a:solidFill>
-                  <a:srgbClr val="000000"/>
-                </a:solidFill>
-                <a:latin typeface="Arial Unicode MS"/>
-                <a:ea typeface="Arial Unicode MS"/>
-                <a:cs typeface="Arial Unicode MS"/>
-              </a:rPr>
-              <a:t>這一張回答一個問題：</a:t>
-            </a:r>
-            <a:r>
-              <a:rPr sz="800" b="1" lang="zh-TW" dirty="0">
-                <a:solidFill>
-                  <a:srgbClr val="000000"/>
-                </a:solidFill>
-                <a:latin typeface="Arial Unicode MS"/>
-                <a:ea typeface="Arial Unicode MS"/>
-                <a:cs typeface="Arial Unicode MS"/>
-              </a:rPr>
-              <a:t>雷達看不看得到人？</a:t>
-            </a:r>
-            <a:r>
-              <a:rPr sz="800" lang="zh-TW" dirty="0">
-                <a:solidFill>
-                  <a:srgbClr val="000000"/>
-                </a:solidFill>
-                <a:latin typeface="Arial Unicode MS"/>
-                <a:ea typeface="Arial Unicode MS"/>
-                <a:cs typeface="Arial Unicode MS"/>
-              </a:rPr>
-              <a:t>答案是：看得到，可是抓不穩。先看一個它沒抓到的瞬間，再看整份資料。
+              <a:rPr sz="1200" lang="zh-TW" dirty="0">
+                <a:solidFill>
+                  <a:srgbClr val="000000"/>
+                </a:solidFill>
+                <a:latin typeface="Arial Unicode MS"/>
+                <a:ea typeface="Arial Unicode MS"/>
+                <a:cs typeface="Arial Unicode MS"/>
+              </a:rPr>
+              <a:t>最後一種條件是</a:t>
+            </a:r>
+            <a:r>
+              <a:rPr sz="1200" b="1" lang="zh-TW" dirty="0">
+                <a:solidFill>
+                  <a:srgbClr val="000000"/>
+                </a:solidFill>
+                <a:latin typeface="Arial Unicode MS"/>
+                <a:ea typeface="Arial Unicode MS"/>
+                <a:cs typeface="Arial Unicode MS"/>
+              </a:rPr>
+              <a:t>時間</a:t>
+            </a:r>
+            <a:r>
+              <a:rPr sz="1200" lang="zh-TW" dirty="0">
+                <a:solidFill>
+                  <a:srgbClr val="000000"/>
+                </a:solidFill>
+                <a:latin typeface="Arial Unicode MS"/>
+                <a:ea typeface="Arial Unicode MS"/>
+                <a:cs typeface="Arial Unicode MS"/>
+              </a:rPr>
+              <a:t>。
 </a:t>
             </a:r>
           </a:p>
@@ -1972,19 +2039,63 @@
                 <a:spcPts val="0"/>
               </a:spcBef>
               <a:spcAft>
-                <a:spcPts val="133"/>
+                <a:spcPts val="200"/>
               </a:spcAft>
             </a:pPr>
             <a:r>
-              <a:rPr sz="800" lang="zh-TW" dirty="0">
-                <a:solidFill>
-                  <a:srgbClr val="000000"/>
-                </a:solidFill>
-                <a:latin typeface="Arial Unicode MS"/>
-                <a:ea typeface="Arial Unicode MS"/>
-                <a:cs typeface="Arial Unicode MS"/>
-              </a:rPr>
-              <a:t>先看真的資料。波士頓的一個路口，斑馬線上有六個人正在過馬路，離車子八到十公尺，很近。
+              <a:rPr sz="1200" lang="zh-TW" dirty="0">
+                <a:solidFill>
+                  <a:srgbClr val="000000"/>
+                </a:solidFill>
+                <a:latin typeface="Arial Unicode MS"/>
+                <a:ea typeface="Arial Unicode MS"/>
+                <a:cs typeface="Arial Unicode MS"/>
+              </a:rPr>
+              <a:t>左邊這張圖第六週第二節看過：橫軸是衛星斷掉以後過了幾秒，縱軸是車子橫向偏了幾公尺。綠色那條是工業級的 IMU，每小時偏八度，時速八十，</a:t>
+            </a:r>
+            <a:r>
+              <a:rPr sz="1200" b="1" lang="zh-TW" dirty="0">
+                <a:solidFill>
+                  <a:srgbClr val="000000"/>
+                </a:solidFill>
+                <a:latin typeface="Arial Unicode MS"/>
+                <a:ea typeface="Arial Unicode MS"/>
+                <a:cs typeface="Arial Unicode MS"/>
+              </a:rPr>
+              <a:t>三十四秒</a:t>
+            </a:r>
+            <a:r>
+              <a:rPr sz="1200" lang="zh-TW" dirty="0">
+                <a:solidFill>
+                  <a:srgbClr val="000000"/>
+                </a:solidFill>
+                <a:latin typeface="Arial Unicode MS"/>
+                <a:ea typeface="Arial Unicode MS"/>
+                <a:cs typeface="Arial Unicode MS"/>
+              </a:rPr>
+              <a:t>就橫向偏零點五公尺，碰到紅線。手機等級的那條，兩秒就出去了。雪山隧道要開</a:t>
+            </a:r>
+            <a:r>
+              <a:rPr sz="1200" b="1" lang="zh-TW" dirty="0">
+                <a:solidFill>
+                  <a:srgbClr val="000000"/>
+                </a:solidFill>
+                <a:latin typeface="Arial Unicode MS"/>
+                <a:ea typeface="Arial Unicode MS"/>
+                <a:cs typeface="Arial Unicode MS"/>
+              </a:rPr>
+              <a:t>五百八十秒</a:t>
+            </a:r>
+            <a:r>
+              <a:rPr sz="1200" lang="zh-TW" dirty="0">
+                <a:solidFill>
+                  <a:srgbClr val="000000"/>
+                </a:solidFill>
+                <a:latin typeface="Arial Unicode MS"/>
+                <a:ea typeface="Arial Unicode MS"/>
+                <a:cs typeface="Arial Unicode MS"/>
+              </a:rPr>
+              <a:t>，撐不住。
 </a:t>
             </a:r>
           </a:p>
@@ -1994,52 +2105,63 @@
                 <a:spcPts val="0"/>
               </a:spcBef>
               <a:spcAft>
-                <a:spcPts val="133"/>
+                <a:spcPts val="200"/>
               </a:spcAft>
             </a:pPr>
             <a:r>
-              <a:rPr sz="800" b="1" lang="zh-TW" dirty="0">
-                <a:solidFill>
-                  <a:srgbClr val="000000"/>
-                </a:solidFill>
-                <a:latin typeface="Arial Unicode MS"/>
-                <a:ea typeface="Arial Unicode MS"/>
-                <a:cs typeface="Arial Unicode MS"/>
-              </a:rPr>
-              <a:t>左邊這張圖是從上往下看，可是要先講清楚：雷達不是從上面往下照。</a:t>
-            </a:r>
-            <a:r>
-              <a:rPr sz="800" lang="zh-TW" dirty="0">
-                <a:solidFill>
-                  <a:srgbClr val="000000"/>
-                </a:solidFill>
-                <a:latin typeface="Arial Unicode MS"/>
-                <a:ea typeface="Arial Unicode MS"/>
-                <a:cs typeface="Arial Unicode MS"/>
-              </a:rPr>
-              <a:t>自己的車在最下面中間，綠色的長方形，車頭朝上。雷達裝在車頭的保險桿上，就是那個橘色的小方塊，離地大約五十公分。電波是</a:t>
-            </a:r>
-            <a:r>
-              <a:rPr sz="800" b="1" lang="zh-TW" dirty="0">
-                <a:solidFill>
-                  <a:srgbClr val="000000"/>
-                </a:solidFill>
-                <a:latin typeface="Arial Unicode MS"/>
-                <a:ea typeface="Arial Unicode MS"/>
-                <a:cs typeface="Arial Unicode MS"/>
-              </a:rPr>
-              <a:t>水平往前</a:t>
-            </a:r>
-            <a:r>
-              <a:rPr sz="800" lang="zh-TW" dirty="0">
-                <a:solidFill>
-                  <a:srgbClr val="000000"/>
-                </a:solidFill>
-                <a:latin typeface="Arial Unicode MS"/>
-                <a:ea typeface="Arial Unicode MS"/>
-                <a:cs typeface="Arial Unicode MS"/>
-              </a:rPr>
-              <a:t>打出去的，像拿手電筒往前照，左右張開成一個扇形，就是淡綠色那一塊。上週讀過 ARS 408 的規格：近場正負四十五度內看得到七十公尺，到正負六十度還有二十公尺，扇形就是照這個畫的。
+              <a:rPr sz="1200" lang="zh-TW" dirty="0">
+                <a:solidFill>
+                  <a:srgbClr val="000000"/>
+                </a:solidFill>
+                <a:latin typeface="Arial Unicode MS"/>
+                <a:ea typeface="Arial Unicode MS"/>
+                <a:cs typeface="Arial Unicode MS"/>
+              </a:rPr>
+              <a:t>這兩種感測器的壞法，個性剛好相反。</a:t>
+            </a:r>
+            <a:r>
+              <a:rPr sz="1200" b="1" lang="zh-TW" dirty="0">
+                <a:solidFill>
+                  <a:srgbClr val="000000"/>
+                </a:solidFill>
+                <a:latin typeface="Arial Unicode MS"/>
+                <a:ea typeface="Arial Unicode MS"/>
+                <a:cs typeface="Arial Unicode MS"/>
+              </a:rPr>
+              <a:t>IMU 是慢慢壞</a:t>
+            </a:r>
+            <a:r>
+              <a:rPr sz="1200" lang="zh-TW" dirty="0">
+                <a:solidFill>
+                  <a:srgbClr val="000000"/>
+                </a:solidFill>
+                <a:latin typeface="Arial Unicode MS"/>
+                <a:ea typeface="Arial Unicode MS"/>
+                <a:cs typeface="Arial Unicode MS"/>
+              </a:rPr>
+              <a:t>：一開始很準，愈久愈歪，像閉著眼睛走路。</a:t>
+            </a:r>
+            <a:r>
+              <a:rPr sz="1200" b="1" lang="zh-TW" dirty="0">
+                <a:solidFill>
+                  <a:srgbClr val="000000"/>
+                </a:solidFill>
+                <a:latin typeface="Arial Unicode MS"/>
+                <a:ea typeface="Arial Unicode MS"/>
+                <a:cs typeface="Arial Unicode MS"/>
+              </a:rPr>
+              <a:t>衛星是突然壞</a:t>
+            </a:r>
+            <a:r>
+              <a:rPr sz="1200" lang="zh-TW" dirty="0">
+                <a:solidFill>
+                  <a:srgbClr val="000000"/>
+                </a:solidFill>
+                <a:latin typeface="Arial Unicode MS"/>
+                <a:ea typeface="Arial Unicode MS"/>
+                <a:cs typeface="Arial Unicode MS"/>
+              </a:rPr>
+              <a:t>：平常好好的，一進隧道，一秒鐘就沒了。
 </a:t>
             </a:r>
           </a:p>
@@ -2049,481 +2171,19 @@
                 <a:spcPts val="0"/>
               </a:spcBef>
               <a:spcAft>
-                <a:spcPts val="133"/>
+                <a:spcPts val="200"/>
               </a:spcAft>
             </a:pPr>
             <a:r>
-              <a:rPr sz="800" lang="zh-TW" dirty="0">
-                <a:solidFill>
-                  <a:srgbClr val="000000"/>
-                </a:solidFill>
-                <a:latin typeface="Arial Unicode MS"/>
-                <a:ea typeface="Arial Unicode MS"/>
-                <a:cs typeface="Arial Unicode MS"/>
-              </a:rPr>
-              <a:t>它回報的每一個點，只有兩個數字：</a:t>
-            </a:r>
-            <a:r>
-              <a:rPr sz="800" b="1" lang="zh-TW" dirty="0">
-                <a:solidFill>
-                  <a:srgbClr val="000000"/>
-                </a:solidFill>
-                <a:latin typeface="Arial Unicode MS"/>
-                <a:ea typeface="Arial Unicode MS"/>
-                <a:cs typeface="Arial Unicode MS"/>
-              </a:rPr>
-              <a:t>多遠、偏左還是偏右</a:t>
-            </a:r>
-            <a:r>
-              <a:rPr sz="800" lang="zh-TW" dirty="0">
-                <a:solidFill>
-                  <a:srgbClr val="000000"/>
-                </a:solidFill>
-                <a:latin typeface="Arial Unicode MS"/>
-                <a:ea typeface="Arial Unicode MS"/>
-                <a:cs typeface="Arial Unicode MS"/>
-              </a:rPr>
-              <a:t>，沒有高度。所以把它的點畫出來，本來就是一張平面圖，我只是把這張平面圖鋪在地上給大家看。
-</a:t>
-            </a:r>
-          </a:p>
-          <a:p>
-            <a:pPr algn="l">
-              <a:spcBef>
-                <a:spcPts val="0"/>
-              </a:spcBef>
-              <a:spcAft>
-                <a:spcPts val="133"/>
-              </a:spcAft>
-            </a:pPr>
-            <a:r>
-              <a:rPr sz="800" lang="zh-TW" dirty="0">
-                <a:solidFill>
-                  <a:srgbClr val="000000"/>
-                </a:solidFill>
-                <a:latin typeface="Arial Unicode MS"/>
-                <a:ea typeface="Arial Unicode MS"/>
-                <a:cs typeface="Arial Unicode MS"/>
-              </a:rPr>
-              <a:t>黃色的小框是行人，離雷達只有五到八公尺，全部在扇形裡面（圖上有七個，其中一個不在相機畫面裡）。電波一定掃過他們，可是</a:t>
-            </a:r>
-            <a:r>
-              <a:rPr sz="800" b="1" lang="zh-TW" dirty="0">
-                <a:solidFill>
-                  <a:srgbClr val="000000"/>
-                </a:solidFill>
-                <a:latin typeface="Arial Unicode MS"/>
-                <a:ea typeface="Arial Unicode MS"/>
-                <a:cs typeface="Arial Unicode MS"/>
-              </a:rPr>
-              <a:t>黃框旁邊一個圈都沒有。</a:t>
-            </a:r>
-            <a:r>
-              <a:rPr sz="800" lang="zh-TW" dirty="0">
-                <a:solidFill>
-                  <a:srgbClr val="000000"/>
-                </a:solidFill>
-                <a:latin typeface="Arial Unicode MS"/>
-                <a:ea typeface="Arial Unicode MS"/>
-                <a:cs typeface="Arial Unicode MS"/>
-              </a:rPr>
-              <a:t>再往前看，二十公尺外那兩台車，身上都有綠圈。</a:t>
-            </a:r>
-            <a:r>
-              <a:rPr sz="800" b="1" lang="zh-TW" dirty="0">
-                <a:solidFill>
-                  <a:srgbClr val="000000"/>
-                </a:solidFill>
-                <a:latin typeface="Arial Unicode MS"/>
-                <a:ea typeface="Arial Unicode MS"/>
-                <a:cs typeface="Arial Unicode MS"/>
-              </a:rPr>
-              <a:t>車抓得到，人抓不到。</a:t>
-            </a:r>
-            <a:r>
-              <a:rPr sz="800" lang="zh-TW" dirty="0">
-                <a:solidFill>
-                  <a:srgbClr val="000000"/>
-                </a:solidFill>
-                <a:latin typeface="Arial Unicode MS"/>
-                <a:ea typeface="Arial Unicode MS"/>
-                <a:cs typeface="Arial Unicode MS"/>
-              </a:rPr>
-              <a:t>左右兩邊和右下角那幾個紅圈在扇形外面，是車子側面另外兩顆雷達打到的東西，離這群人十五公尺以上。
-</a:t>
-            </a:r>
-          </a:p>
-          <a:p>
-            <a:pPr algn="l">
-              <a:spcBef>
-                <a:spcPts val="0"/>
-              </a:spcBef>
-              <a:spcAft>
-                <a:spcPts val="133"/>
-              </a:spcAft>
-            </a:pPr>
-            <a:r>
-              <a:rPr sz="800" b="1" lang="zh-TW" dirty="0">
-                <a:solidFill>
-                  <a:srgbClr val="000000"/>
-                </a:solidFill>
-                <a:latin typeface="Arial Unicode MS"/>
-                <a:ea typeface="Arial Unicode MS"/>
-                <a:cs typeface="Arial Unicode MS"/>
-              </a:rPr>
-              <a:t>右邊，光達，同一個瞬間。</a:t>
-            </a:r>
-            <a:r>
-              <a:rPr sz="800" lang="zh-TW" dirty="0">
-                <a:solidFill>
-                  <a:srgbClr val="000000"/>
-                </a:solidFill>
-                <a:latin typeface="Arial Unicode MS"/>
-                <a:ea typeface="Arial Unicode MS"/>
-                <a:cs typeface="Arial Unicode MS"/>
-              </a:rPr>
-              <a:t>每一個人身上都有點，少的七個，多的七十一個。
-</a:t>
-            </a:r>
-          </a:p>
-          <a:p>
-            <a:pPr algn="l">
-              <a:spcBef>
-                <a:spcPts val="0"/>
-              </a:spcBef>
-              <a:spcAft>
-                <a:spcPts val="133"/>
-              </a:spcAft>
-            </a:pPr>
-            <a:r>
-              <a:rPr sz="800" b="1" lang="zh-TW" dirty="0">
-                <a:solidFill>
-                  <a:srgbClr val="000000"/>
-                </a:solidFill>
-                <a:latin typeface="Arial Unicode MS"/>
-                <a:ea typeface="Arial Unicode MS"/>
-                <a:cs typeface="Arial Unicode MS"/>
-              </a:rPr>
-              <a:t>電波明明掃過去了，為什麼沒有點？</a:t>
-            </a:r>
-            <a:r>
-              <a:rPr sz="800" lang="zh-TW" dirty="0">
-                <a:solidFill>
-                  <a:srgbClr val="000000"/>
-                </a:solidFill>
-                <a:latin typeface="Arial Unicode MS"/>
-                <a:ea typeface="Arial Unicode MS"/>
-                <a:cs typeface="Arial Unicode MS"/>
-              </a:rPr>
-              <a:t>先想一個例子：拿手電筒在黑暗裡照，照到一面鏡子，光整束彈回來，刺眼；照到一件毛衣，光散掉，回來的很少。對雷達來說，</a:t>
-            </a:r>
-            <a:r>
-              <a:rPr sz="800" b="1" lang="zh-TW" dirty="0">
-                <a:solidFill>
-                  <a:srgbClr val="000000"/>
-                </a:solidFill>
-                <a:latin typeface="Arial Unicode MS"/>
-                <a:ea typeface="Arial Unicode MS"/>
-                <a:cs typeface="Arial Unicode MS"/>
-              </a:rPr>
-              <a:t>車子是鏡子，人是毛衣。</a:t>
-            </a:r>
-            <a:r>
-              <a:rPr sz="800" lang="zh-TW" dirty="0">
-                <a:solidFill>
-                  <a:srgbClr val="000000"/>
-                </a:solidFill>
-                <a:latin typeface="Arial Unicode MS"/>
-                <a:ea typeface="Arial Unicode MS"/>
-                <a:cs typeface="Arial Unicode MS"/>
-              </a:rPr>
-              <a:t>車子是一大塊金屬，又有很多平面和直角，電波打上去，大部分彈回雷達；人小小的、圓圓的，身體又不是金屬，電波打上去，散到四面八方，回到雷達的很少。
-</a:t>
-            </a:r>
-          </a:p>
-          <a:p>
-            <a:pPr algn="l">
-              <a:spcBef>
-                <a:spcPts val="0"/>
-              </a:spcBef>
-              <a:spcAft>
-                <a:spcPts val="133"/>
-              </a:spcAft>
-            </a:pPr>
-            <a:r>
-              <a:rPr sz="800" lang="zh-TW" dirty="0">
-                <a:solidFill>
-                  <a:srgbClr val="000000"/>
-                </a:solidFill>
-                <a:latin typeface="Arial Unicode MS"/>
-                <a:ea typeface="Arial Unicode MS"/>
-                <a:cs typeface="Arial Unicode MS"/>
-              </a:rPr>
-              <a:t>這件事有人量過。Bosch 和德國 Ulm 大學二〇一三年的論文整理：77 GHz 的雷達看一個人，平均反射強度大約負八 dBsm，也就是只像一塊零點一六平方公尺的反射面；</a:t>
-            </a:r>
-            <a:r>
-              <a:rPr sz="800" b="1" lang="zh-TW" dirty="0">
-                <a:solidFill>
-                  <a:srgbClr val="000000"/>
-                </a:solidFill>
-                <a:latin typeface="Arial Unicode MS"/>
-                <a:ea typeface="Arial Unicode MS"/>
-                <a:cs typeface="Arial Unicode MS"/>
-              </a:rPr>
-              <a:t>從側面看，還要再弱三倍左右。</a:t>
-            </a:r>
-            <a:r>
-              <a:rPr sz="800" lang="zh-TW" dirty="0">
-                <a:solidFill>
-                  <a:srgbClr val="000000"/>
-                </a:solidFill>
-                <a:latin typeface="Arial Unicode MS"/>
-                <a:ea typeface="Arial Unicode MS"/>
-                <a:cs typeface="Arial Unicode MS"/>
-              </a:rPr>
-              <a:t>過斑馬線的人，正好是側面對著雷達。
-</a:t>
-            </a:r>
-          </a:p>
-          <a:p>
-            <a:pPr algn="l">
-              <a:spcBef>
-                <a:spcPts val="0"/>
-              </a:spcBef>
-              <a:spcAft>
-                <a:spcPts val="133"/>
-              </a:spcAft>
-            </a:pPr>
-            <a:r>
-              <a:rPr sz="800" lang="zh-TW" dirty="0">
-                <a:solidFill>
-                  <a:srgbClr val="000000"/>
-                </a:solidFill>
-                <a:latin typeface="Arial Unicode MS"/>
-                <a:ea typeface="Arial Unicode MS"/>
-                <a:cs typeface="Arial Unicode MS"/>
-              </a:rPr>
-              <a:t>回來的太弱，會怎樣？雷達有一個門檻，比門檻弱的回波，它當成雜訊，不報。我把這一格的原始資料打開來看，七個人裡面，</a:t>
-            </a:r>
-            <a:r>
-              <a:rPr sz="800" b="1" lang="zh-TW" dirty="0">
-                <a:solidFill>
-                  <a:srgbClr val="000000"/>
-                </a:solidFill>
-                <a:latin typeface="Arial Unicode MS"/>
-                <a:ea typeface="Arial Unicode MS"/>
-                <a:cs typeface="Arial Unicode MS"/>
-              </a:rPr>
-              <a:t>六個連一個原始的點都沒有</a:t>
-            </a:r>
-            <a:r>
-              <a:rPr sz="800" lang="zh-TW" dirty="0">
-                <a:solidFill>
-                  <a:srgbClr val="000000"/>
-                </a:solidFill>
-                <a:latin typeface="Arial Unicode MS"/>
-                <a:ea typeface="Arial Unicode MS"/>
-                <a:cs typeface="Arial Unicode MS"/>
-              </a:rPr>
-              <a:t>，就是被門檻擋掉了。
-</a:t>
-            </a:r>
-          </a:p>
-          <a:p>
-            <a:pPr algn="l">
-              <a:spcBef>
-                <a:spcPts val="0"/>
-              </a:spcBef>
-              <a:spcAft>
-                <a:spcPts val="133"/>
-              </a:spcAft>
-            </a:pPr>
-            <a:r>
-              <a:rPr sz="800" lang="zh-TW" dirty="0">
-                <a:solidFill>
-                  <a:srgbClr val="000000"/>
-                </a:solidFill>
-                <a:latin typeface="Arial Unicode MS"/>
-                <a:ea typeface="Arial Unicode MS"/>
-                <a:cs typeface="Arial Unicode MS"/>
-              </a:rPr>
-              <a:t>剩下那一個，正前方九點四公尺、正在橫越的那個人，雷達其實收到了一個回波。可是雷達量速度，量的是「朝我來、還是離我去」的那一段速度，上週講都卜勒的時候講過。這個人橫著走，每秒走一公尺多，朝雷達的那一段速度卻只有每秒零點二公尺，幾乎是零，在雷達眼裡跟停著的東西差不多。ARS 408 把這個點標成「停下來的物體」，nuScenes 預設的過濾規則會把這一類點丟掉，所以圖上也沒有它。
-</a:t>
-            </a:r>
-          </a:p>
-          <a:p>
-            <a:pPr algn="l">
-              <a:spcBef>
-                <a:spcPts val="0"/>
-              </a:spcBef>
-              <a:spcAft>
-                <a:spcPts val="133"/>
-              </a:spcAft>
-            </a:pPr>
-            <a:r>
-              <a:rPr sz="800" lang="zh-TW" dirty="0">
-                <a:solidFill>
-                  <a:srgbClr val="000000"/>
-                </a:solidFill>
-                <a:latin typeface="Arial Unicode MS"/>
-                <a:ea typeface="Arial Unicode MS"/>
-                <a:cs typeface="Arial Unicode MS"/>
-              </a:rPr>
-              <a:t>同學可能會覺得：</a:t>
-            </a:r>
-            <a:r>
-              <a:rPr sz="800" b="1" lang="zh-TW" dirty="0">
-                <a:solidFill>
-                  <a:srgbClr val="000000"/>
-                </a:solidFill>
-                <a:latin typeface="Arial Unicode MS"/>
-                <a:ea typeface="Arial Unicode MS"/>
-                <a:cs typeface="Arial Unicode MS"/>
-              </a:rPr>
-              <a:t>雷達這麼難看到人？不太可能吧。</a:t>
-            </a:r>
-            <a:r>
-              <a:rPr sz="800" lang="zh-TW" dirty="0">
-                <a:solidFill>
-                  <a:srgbClr val="000000"/>
-                </a:solidFill>
-                <a:latin typeface="Arial Unicode MS"/>
-                <a:ea typeface="Arial Unicode MS"/>
-                <a:cs typeface="Arial Unicode MS"/>
-              </a:rPr>
-              <a:t>這個懷疑很好。答案是：</a:t>
-            </a:r>
-            <a:r>
-              <a:rPr sz="800" b="1" lang="zh-TW" dirty="0">
-                <a:solidFill>
-                  <a:srgbClr val="000000"/>
-                </a:solidFill>
-                <a:latin typeface="Arial Unicode MS"/>
-                <a:ea typeface="Arial Unicode MS"/>
-                <a:cs typeface="Arial Unicode MS"/>
-              </a:rPr>
-              <a:t>不是看不到，是看得很不穩。</a:t>
-            </a:r>
-            <a:r>
-              <a:rPr sz="800" lang="zh-TW" dirty="0">
-                <a:solidFill>
-                  <a:srgbClr val="000000"/>
-                </a:solidFill>
-                <a:latin typeface="Arial Unicode MS"/>
-                <a:ea typeface="Arial Unicode MS"/>
-                <a:cs typeface="Arial Unicode MS"/>
-              </a:rPr>
-              <a:t>我把 mini 版裡，十五公尺內、光達看得到的行人全部算了一遍。八十八個人，跟著每個人走一段，有六十四個，大約七成，</a:t>
-            </a:r>
-            <a:r>
-              <a:rPr sz="800" b="1" lang="zh-TW" dirty="0">
-                <a:solidFill>
-                  <a:srgbClr val="000000"/>
-                </a:solidFill>
-                <a:latin typeface="Arial Unicode MS"/>
-                <a:ea typeface="Arial Unicode MS"/>
-                <a:cs typeface="Arial Unicode MS"/>
-              </a:rPr>
-              <a:t>至少被雷達抓到過一次</a:t>
-            </a:r>
-            <a:r>
-              <a:rPr sz="800" lang="zh-TW" dirty="0">
-                <a:solidFill>
-                  <a:srgbClr val="000000"/>
-                </a:solidFill>
-                <a:latin typeface="Arial Unicode MS"/>
-                <a:ea typeface="Arial Unicode MS"/>
-                <a:cs typeface="Arial Unicode MS"/>
-              </a:rPr>
-              <a:t>。可是在任何一個瞬間，抓得到的只有兩到三成；車子在同樣的距離，大約六成。一個人走過去，雷達這一下有、下一下沒有，</a:t>
-            </a:r>
-            <a:r>
-              <a:rPr sz="800" b="1" lang="zh-TW" dirty="0">
-                <a:solidFill>
-                  <a:srgbClr val="000000"/>
-                </a:solidFill>
-                <a:latin typeface="Arial Unicode MS"/>
-                <a:ea typeface="Arial Unicode MS"/>
-                <a:cs typeface="Arial Unicode MS"/>
-              </a:rPr>
-              <a:t>像接觸不良的燈泡，一閃一閃的。</a:t>
-            </a:r>
-            <a:r>
-              <a:rPr sz="800" lang="zh-TW" dirty="0">
-                <a:solidFill>
-                  <a:srgbClr val="000000"/>
-                </a:solidFill>
-                <a:latin typeface="Arial Unicode MS"/>
-                <a:ea typeface="Arial Unicode MS"/>
-                <a:cs typeface="Arial Unicode MS"/>
-              </a:rPr>
-              <a:t>
-</a:t>
-            </a:r>
-          </a:p>
-          <a:p>
-            <a:pPr algn="l">
-              <a:spcBef>
-                <a:spcPts val="0"/>
-              </a:spcBef>
-              <a:spcAft>
-                <a:spcPts val="133"/>
-              </a:spcAft>
-            </a:pPr>
-            <a:r>
-              <a:rPr sz="800" lang="zh-TW" dirty="0">
-                <a:solidFill>
-                  <a:srgbClr val="000000"/>
-                </a:solidFill>
-                <a:latin typeface="Arial Unicode MS"/>
-                <a:ea typeface="Arial Unicode MS"/>
-                <a:cs typeface="Arial Unicode MS"/>
-              </a:rPr>
-              <a:t>為什麼一閃一閃？剛剛那篇論文說：人走路的時候，姿勢、方向、手腳的角度一直在變，所以人的反射強度比車子跳得厲害得多。論文裡還提到一件跟毛衣例子剛好對上的事：穿羊毛衣服的人，反射更弱。
-</a:t>
-            </a:r>
-          </a:p>
-          <a:p>
-            <a:pPr algn="l">
-              <a:spcBef>
-                <a:spcPts val="0"/>
-              </a:spcBef>
-              <a:spcAft>
-                <a:spcPts val="133"/>
-              </a:spcAft>
-            </a:pPr>
-            <a:r>
-              <a:rPr sz="800" lang="zh-TW" dirty="0">
-                <a:solidFill>
-                  <a:srgbClr val="000000"/>
-                </a:solidFill>
-                <a:latin typeface="Arial Unicode MS"/>
-                <a:ea typeface="Arial Unicode MS"/>
-                <a:cs typeface="Arial Unicode MS"/>
-              </a:rPr>
-              <a:t>那雷達還能不能用來看行人？下一張講。
-</a:t>
-            </a:r>
-          </a:p>
-          <a:p>
-            <a:pPr algn="l">
-              <a:spcBef>
-                <a:spcPts val="0"/>
-              </a:spcBef>
-              <a:spcAft>
-                <a:spcPts val="133"/>
-              </a:spcAft>
-            </a:pPr>
-            <a:r>
-              <a:rPr sz="800" lang="zh-TW" dirty="0">
-                <a:solidFill>
-                  <a:srgbClr val="000000"/>
-                </a:solidFill>
-                <a:latin typeface="Arial Unicode MS"/>
-                <a:ea typeface="Arial Unicode MS"/>
-                <a:cs typeface="Arial Unicode MS"/>
-              </a:rPr>
-              <a:t>為什麼不把雷達點畫在相機畫面上？因為雷達量不出高度，所有的點只能畫在同一個高度，遠處的點擠在地平線附近，會疊在近處的人身上，看起來好像打到人，其實是後面幾十公尺的東西。畫在地上，前後距離才分得清楚。</a:t>
+              <a:rPr sz="1200" lang="zh-TW" dirty="0">
+                <a:solidFill>
+                  <a:srgbClr val="000000"/>
+                </a:solidFill>
+                <a:latin typeface="Arial Unicode MS"/>
+                <a:ea typeface="Arial Unicode MS"/>
+                <a:cs typeface="Arial Unicode MS"/>
+              </a:rPr>
+              <a:t>慢慢壞的，配上突然壞的，剛好可以互補：衛星在的時候，幫 IMU 歸零；衛星斷的那幾秒，IMU 先頂上。這就是下一節要講的融合。</a:t>
             </a:r>
           </a:p>
         </p:txBody>
@@ -2632,19 +2292,41 @@
                 <a:spcPts val="0"/>
               </a:spcBef>
               <a:spcAft>
-                <a:spcPts val="175"/>
+                <a:spcPts val="133"/>
               </a:spcAft>
             </a:pPr>
             <a:r>
-              <a:rPr sz="1050" lang="zh-TW" dirty="0">
-                <a:solidFill>
-                  <a:srgbClr val="000000"/>
-                </a:solidFill>
-                <a:latin typeface="Arial Unicode MS"/>
-                <a:ea typeface="Arial Unicode MS"/>
-                <a:cs typeface="Arial Unicode MS"/>
-              </a:rPr>
-              <a:t>剛剛那張看起來，雷達看人好像很差。各位不要因此覺得雷達不適合看人。新一代的雷達，專門為「人」做了好幾件事，第八週會細講，今天先知道有這四招。
+              <a:rPr sz="800" lang="zh-TW" dirty="0">
+                <a:solidFill>
+                  <a:srgbClr val="000000"/>
+                </a:solidFill>
+                <a:latin typeface="Arial Unicode MS"/>
+                <a:ea typeface="Arial Unicode MS"/>
+                <a:cs typeface="Arial Unicode MS"/>
+              </a:rPr>
+              <a:t>這一張回答一個問題：</a:t>
+            </a:r>
+            <a:r>
+              <a:rPr sz="800" b="1" lang="zh-TW" dirty="0">
+                <a:solidFill>
+                  <a:srgbClr val="000000"/>
+                </a:solidFill>
+                <a:latin typeface="Arial Unicode MS"/>
+                <a:ea typeface="Arial Unicode MS"/>
+                <a:cs typeface="Arial Unicode MS"/>
+              </a:rPr>
+              <a:t>雷達看不看得到人？</a:t>
+            </a:r>
+            <a:r>
+              <a:rPr sz="800" lang="zh-TW" dirty="0">
+                <a:solidFill>
+                  <a:srgbClr val="000000"/>
+                </a:solidFill>
+                <a:latin typeface="Arial Unicode MS"/>
+                <a:ea typeface="Arial Unicode MS"/>
+                <a:cs typeface="Arial Unicode MS"/>
+              </a:rPr>
+              <a:t>答案是：看得到，可是抓不穩。先看一個它沒抓到的瞬間，再看整份資料。
 </a:t>
             </a:r>
           </a:p>
@@ -2654,30 +2336,19 @@
                 <a:spcPts val="0"/>
               </a:spcBef>
               <a:spcAft>
-                <a:spcPts val="175"/>
+                <a:spcPts val="133"/>
               </a:spcAft>
             </a:pPr>
             <a:r>
-              <a:rPr sz="1050" b="1" lang="zh-TW" dirty="0">
-                <a:solidFill>
-                  <a:srgbClr val="000000"/>
-                </a:solidFill>
-                <a:latin typeface="Arial Unicode MS"/>
-                <a:ea typeface="Arial Unicode MS"/>
-                <a:cs typeface="Arial Unicode MS"/>
-              </a:rPr>
-              <a:t>第一招，點更多。</a:t>
-            </a:r>
-            <a:r>
-              <a:rPr sz="1050" lang="zh-TW" dirty="0">
-                <a:solidFill>
-                  <a:srgbClr val="000000"/>
-                </a:solidFill>
-                <a:latin typeface="Arial Unicode MS"/>
-                <a:ea typeface="Arial Unicode MS"/>
-                <a:cs typeface="Arial Unicode MS"/>
-              </a:rPr>
-              <a:t>就是上週講的 4D 雷達。天線從 408 的二十四個，變成 548 的一百九十二個，角度分得更細，一個人身上能分到好幾個點，不會跟旁邊、後面的東西混在一起；又量得出高度，人是瘦高的，車是矮寬的，多一個分辨的線索。
+              <a:rPr sz="800" lang="zh-TW" dirty="0">
+                <a:solidFill>
+                  <a:srgbClr val="000000"/>
+                </a:solidFill>
+                <a:latin typeface="Arial Unicode MS"/>
+                <a:ea typeface="Arial Unicode MS"/>
+                <a:cs typeface="Arial Unicode MS"/>
+              </a:rPr>
+              <a:t>先看真的資料。波士頓的一個路口，斑馬線上有六個人正在過馬路，離車子八到十公尺，很近。
 </a:t>
             </a:r>
           </a:p>
@@ -2687,52 +2358,52 @@
                 <a:spcPts val="0"/>
               </a:spcBef>
               <a:spcAft>
-                <a:spcPts val="175"/>
+                <a:spcPts val="133"/>
               </a:spcAft>
             </a:pPr>
             <a:r>
-              <a:rPr sz="1050" b="1" lang="zh-TW" dirty="0">
-                <a:solidFill>
-                  <a:srgbClr val="000000"/>
-                </a:solidFill>
-                <a:latin typeface="Arial Unicode MS"/>
-                <a:ea typeface="Arial Unicode MS"/>
-                <a:cs typeface="Arial Unicode MS"/>
-              </a:rPr>
-              <a:t>第二招，看動作。</a:t>
-            </a:r>
-            <a:r>
-              <a:rPr sz="1050" lang="zh-TW" dirty="0">
-                <a:solidFill>
-                  <a:srgbClr val="000000"/>
-                </a:solidFill>
-                <a:latin typeface="Arial Unicode MS"/>
-                <a:ea typeface="Arial Unicode MS"/>
-                <a:cs typeface="Arial Unicode MS"/>
-              </a:rPr>
-              <a:t>看左邊這張照片，一個正在過馬路的人。一根電線桿，整根都是同一個速度，零。一個人走路，身體往前，手和腳卻一前一後地擺，有的部位快、有的慢、有的往回。雷達量得到這種「同一個東西裡，有好幾種速度，而且有節奏」的特徵，英文叫 micro-Doppler，</a:t>
-            </a:r>
-            <a:r>
-              <a:rPr sz="1050" b="1" lang="zh-TW" dirty="0">
-                <a:solidFill>
-                  <a:srgbClr val="000000"/>
-                </a:solidFill>
-                <a:latin typeface="Arial Unicode MS"/>
-                <a:ea typeface="Arial Unicode MS"/>
-                <a:cs typeface="Arial Unicode MS"/>
-              </a:rPr>
-              <a:t>微都卜勒</a:t>
-            </a:r>
-            <a:r>
-              <a:rPr sz="1050" lang="zh-TW" dirty="0">
-                <a:solidFill>
-                  <a:srgbClr val="000000"/>
-                </a:solidFill>
-                <a:latin typeface="Arial Unicode MS"/>
-                <a:ea typeface="Arial Unicode MS"/>
-                <a:cs typeface="Arial Unicode MS"/>
-              </a:rPr>
-              <a:t>，可以用來分辨行人、腳踏車和桿子。這是雷達研究裡很成熟的方向，不過量產車用到什麼程度，我沒有資料可以講。
+              <a:rPr sz="800" b="1" lang="zh-TW" dirty="0">
+                <a:solidFill>
+                  <a:srgbClr val="000000"/>
+                </a:solidFill>
+                <a:latin typeface="Arial Unicode MS"/>
+                <a:ea typeface="Arial Unicode MS"/>
+                <a:cs typeface="Arial Unicode MS"/>
+              </a:rPr>
+              <a:t>左邊這張圖是從上往下看，可是要先講清楚：雷達不是從上面往下照。</a:t>
+            </a:r>
+            <a:r>
+              <a:rPr sz="800" lang="zh-TW" dirty="0">
+                <a:solidFill>
+                  <a:srgbClr val="000000"/>
+                </a:solidFill>
+                <a:latin typeface="Arial Unicode MS"/>
+                <a:ea typeface="Arial Unicode MS"/>
+                <a:cs typeface="Arial Unicode MS"/>
+              </a:rPr>
+              <a:t>自己的車在最下面中間，綠色的長方形，車頭朝上。雷達裝在車頭的保險桿上，就是那個橘色的小方塊，離地大約五十公分。電波是</a:t>
+            </a:r>
+            <a:r>
+              <a:rPr sz="800" b="1" lang="zh-TW" dirty="0">
+                <a:solidFill>
+                  <a:srgbClr val="000000"/>
+                </a:solidFill>
+                <a:latin typeface="Arial Unicode MS"/>
+                <a:ea typeface="Arial Unicode MS"/>
+                <a:cs typeface="Arial Unicode MS"/>
+              </a:rPr>
+              <a:t>水平往前</a:t>
+            </a:r>
+            <a:r>
+              <a:rPr sz="800" lang="zh-TW" dirty="0">
+                <a:solidFill>
+                  <a:srgbClr val="000000"/>
+                </a:solidFill>
+                <a:latin typeface="Arial Unicode MS"/>
+                <a:ea typeface="Arial Unicode MS"/>
+                <a:cs typeface="Arial Unicode MS"/>
+              </a:rPr>
+              <a:t>打出去的，像拿手電筒往前照，左右張開成一個扇形，就是淡綠色那一塊。上週讀過 ARS 408 的規格：近場正負四十五度內看得到七十公尺，到正負六十度還有二十公尺，扇形就是照這個畫的。
 </a:t>
             </a:r>
           </a:p>
@@ -2742,30 +2413,41 @@
                 <a:spcPts val="0"/>
               </a:spcBef>
               <a:spcAft>
-                <a:spcPts val="175"/>
+                <a:spcPts val="133"/>
               </a:spcAft>
             </a:pPr>
             <a:r>
-              <a:rPr sz="1050" b="1" lang="zh-TW" dirty="0">
-                <a:solidFill>
-                  <a:srgbClr val="000000"/>
-                </a:solidFill>
-                <a:latin typeface="Arial Unicode MS"/>
-                <a:ea typeface="Arial Unicode MS"/>
-                <a:cs typeface="Arial Unicode MS"/>
-              </a:rPr>
-              <a:t>第三招，看久一點。</a:t>
-            </a:r>
-            <a:r>
-              <a:rPr sz="1050" lang="zh-TW" dirty="0">
-                <a:solidFill>
-                  <a:srgbClr val="000000"/>
-                </a:solidFill>
-                <a:latin typeface="Arial Unicode MS"/>
-                <a:ea typeface="Arial Unicode MS"/>
-                <a:cs typeface="Arial Unicode MS"/>
-              </a:rPr>
-              <a:t>剛剛說雷達看人一閃一閃。可是雷達每秒更新十幾次，一瞬間只抓到兩三成，一秒鐘裡還是會抓到好幾次。把連續幾次的掃描疊起來一起看，再用追蹤把一閃一閃的點串成一條線，中間的空檔先用預測補，下一節會講。荷蘭一份公開資料集的論文也寫到：加上高度、再把連續幾次掃描疊起來，雷達和光達的差距就縮小了。
+              <a:rPr sz="800" lang="zh-TW" dirty="0">
+                <a:solidFill>
+                  <a:srgbClr val="000000"/>
+                </a:solidFill>
+                <a:latin typeface="Arial Unicode MS"/>
+                <a:ea typeface="Arial Unicode MS"/>
+                <a:cs typeface="Arial Unicode MS"/>
+              </a:rPr>
+              <a:t>它回報的每一個點，只有兩個數字：</a:t>
+            </a:r>
+            <a:r>
+              <a:rPr sz="800" b="1" lang="zh-TW" dirty="0">
+                <a:solidFill>
+                  <a:srgbClr val="000000"/>
+                </a:solidFill>
+                <a:latin typeface="Arial Unicode MS"/>
+                <a:ea typeface="Arial Unicode MS"/>
+                <a:cs typeface="Arial Unicode MS"/>
+              </a:rPr>
+              <a:t>多遠、偏左還是偏右</a:t>
+            </a:r>
+            <a:r>
+              <a:rPr sz="800" lang="zh-TW" dirty="0">
+                <a:solidFill>
+                  <a:srgbClr val="000000"/>
+                </a:solidFill>
+                <a:latin typeface="Arial Unicode MS"/>
+                <a:ea typeface="Arial Unicode MS"/>
+                <a:cs typeface="Arial Unicode MS"/>
+              </a:rPr>
+              <a:t>，沒有高度。所以把它的點畫出來，本來就是一張平面圖，我只是把這張平面圖鋪在地上給大家看。
 </a:t>
             </a:r>
           </a:p>
@@ -2775,52 +2457,63 @@
                 <a:spcPts val="0"/>
               </a:spcBef>
               <a:spcAft>
-                <a:spcPts val="175"/>
+                <a:spcPts val="133"/>
               </a:spcAft>
             </a:pPr>
             <a:r>
-              <a:rPr sz="1050" b="1" lang="zh-TW" dirty="0">
-                <a:solidFill>
-                  <a:srgbClr val="000000"/>
-                </a:solidFill>
-                <a:latin typeface="Arial Unicode MS"/>
-                <a:ea typeface="Arial Unicode MS"/>
-                <a:cs typeface="Arial Unicode MS"/>
-              </a:rPr>
-              <a:t>第四招，跟別人一起看。</a:t>
-            </a:r>
-            <a:r>
-              <a:rPr sz="1050" lang="zh-TW" dirty="0">
-                <a:solidFill>
-                  <a:srgbClr val="000000"/>
-                </a:solidFill>
-                <a:latin typeface="Arial Unicode MS"/>
-                <a:ea typeface="Arial Unicode MS"/>
-                <a:cs typeface="Arial Unicode MS"/>
-              </a:rPr>
-              <a:t>這是量產車最常見的做法。雷達抓到人的時候，距離和接近的速度量得很準，晚上、下雨也照樣量，這正是相機最弱的地方；它做不到的，是</a:t>
-            </a:r>
-            <a:r>
-              <a:rPr sz="1050" b="1" lang="zh-TW" dirty="0">
-                <a:solidFill>
-                  <a:srgbClr val="000000"/>
-                </a:solidFill>
-                <a:latin typeface="Arial Unicode MS"/>
-                <a:ea typeface="Arial Unicode MS"/>
-                <a:cs typeface="Arial Unicode MS"/>
-              </a:rPr>
-              <a:t>認出那是一個人</a:t>
-            </a:r>
-            <a:r>
-              <a:rPr sz="1050" lang="zh-TW" dirty="0">
-                <a:solidFill>
-                  <a:srgbClr val="000000"/>
-                </a:solidFill>
-                <a:latin typeface="Arial Unicode MS"/>
-                <a:ea typeface="Arial Unicode MS"/>
-                <a:cs typeface="Arial Unicode MS"/>
-              </a:rPr>
-              <a:t>，那要靠相機。所以像 Toyota 的預防碰撞系統，就是相機加毫米波雷達一起看行人。晚上也有人用熱像儀加雷達：人的身體是熱的，在熱像裡特別明顯。
+              <a:rPr sz="800" lang="zh-TW" dirty="0">
+                <a:solidFill>
+                  <a:srgbClr val="000000"/>
+                </a:solidFill>
+                <a:latin typeface="Arial Unicode MS"/>
+                <a:ea typeface="Arial Unicode MS"/>
+                <a:cs typeface="Arial Unicode MS"/>
+              </a:rPr>
+              <a:t>黃色的小框是行人，離雷達只有五到八公尺，全部在扇形裡面（圖上有七個，其中一個不在相機畫面裡）。電波一定掃過他們，可是</a:t>
+            </a:r>
+            <a:r>
+              <a:rPr sz="800" b="1" lang="zh-TW" dirty="0">
+                <a:solidFill>
+                  <a:srgbClr val="000000"/>
+                </a:solidFill>
+                <a:latin typeface="Arial Unicode MS"/>
+                <a:ea typeface="Arial Unicode MS"/>
+                <a:cs typeface="Arial Unicode MS"/>
+              </a:rPr>
+              <a:t>黃框旁邊一個圈都沒有。</a:t>
+            </a:r>
+            <a:r>
+              <a:rPr sz="800" lang="zh-TW" dirty="0">
+                <a:solidFill>
+                  <a:srgbClr val="000000"/>
+                </a:solidFill>
+                <a:latin typeface="Arial Unicode MS"/>
+                <a:ea typeface="Arial Unicode MS"/>
+                <a:cs typeface="Arial Unicode MS"/>
+              </a:rPr>
+              <a:t>再往前看，二十公尺外那兩台車，身上都有綠圈。</a:t>
+            </a:r>
+            <a:r>
+              <a:rPr sz="800" b="1" lang="zh-TW" dirty="0">
+                <a:solidFill>
+                  <a:srgbClr val="000000"/>
+                </a:solidFill>
+                <a:latin typeface="Arial Unicode MS"/>
+                <a:ea typeface="Arial Unicode MS"/>
+                <a:cs typeface="Arial Unicode MS"/>
+              </a:rPr>
+              <a:t>車抓得到，人抓不到。</a:t>
+            </a:r>
+            <a:r>
+              <a:rPr sz="800" lang="zh-TW" dirty="0">
+                <a:solidFill>
+                  <a:srgbClr val="000000"/>
+                </a:solidFill>
+                <a:latin typeface="Arial Unicode MS"/>
+                <a:ea typeface="Arial Unicode MS"/>
+                <a:cs typeface="Arial Unicode MS"/>
+              </a:rPr>
+              <a:t>左右兩邊和右下角那幾個紅圈在扇形外面，是車子側面另外兩顆雷達打到的東西，離這群人十五公尺以上。
 </a:t>
             </a:r>
           </a:p>
@@ -2830,19 +2523,30 @@
                 <a:spcPts val="0"/>
               </a:spcBef>
               <a:spcAft>
-                <a:spcPts val="175"/>
+                <a:spcPts val="133"/>
               </a:spcAft>
             </a:pPr>
             <a:r>
-              <a:rPr sz="1050" lang="zh-TW" dirty="0">
-                <a:solidFill>
-                  <a:srgbClr val="000000"/>
-                </a:solidFill>
-                <a:latin typeface="Arial Unicode MS"/>
-                <a:ea typeface="Arial Unicode MS"/>
-                <a:cs typeface="Arial Unicode MS"/>
-              </a:rPr>
-              <a:t>這些新做法有沒有用？剛剛那份荷蘭的資料集，二〇二二年公開，用的是新一代 4D 雷達：車子正前方的行人，大約一半找得到，比我們今天這顆二〇一八年的 ARS 408 好，但行人還是最難找的那一類；加上相機，分數再往上。
+              <a:rPr sz="800" b="1" lang="zh-TW" dirty="0">
+                <a:solidFill>
+                  <a:srgbClr val="000000"/>
+                </a:solidFill>
+                <a:latin typeface="Arial Unicode MS"/>
+                <a:ea typeface="Arial Unicode MS"/>
+                <a:cs typeface="Arial Unicode MS"/>
+              </a:rPr>
+              <a:t>右邊，光達，同一個瞬間。</a:t>
+            </a:r>
+            <a:r>
+              <a:rPr sz="800" lang="zh-TW" dirty="0">
+                <a:solidFill>
+                  <a:srgbClr val="000000"/>
+                </a:solidFill>
+                <a:latin typeface="Arial Unicode MS"/>
+                <a:ea typeface="Arial Unicode MS"/>
+                <a:cs typeface="Arial Unicode MS"/>
+              </a:rPr>
+              <a:t>每一個人身上都有點，少的七個，多的七十一個。
 </a:t>
             </a:r>
           </a:p>
@@ -2852,30 +2556,338 @@
                 <a:spcPts val="0"/>
               </a:spcBef>
               <a:spcAft>
-                <a:spcPts val="175"/>
+                <a:spcPts val="133"/>
               </a:spcAft>
             </a:pPr>
             <a:r>
-              <a:rPr sz="1050" lang="zh-TW" dirty="0">
-                <a:solidFill>
-                  <a:srgbClr val="000000"/>
-                </a:solidFill>
-                <a:latin typeface="Arial Unicode MS"/>
-                <a:ea typeface="Arial Unicode MS"/>
-                <a:cs typeface="Arial Unicode MS"/>
-              </a:rPr>
-              <a:t>所以結論是：</a:t>
-            </a:r>
-            <a:r>
-              <a:rPr sz="1050" b="1" lang="zh-TW" dirty="0">
-                <a:solidFill>
-                  <a:srgbClr val="000000"/>
-                </a:solidFill>
-                <a:latin typeface="Arial Unicode MS"/>
-                <a:ea typeface="Arial Unicode MS"/>
-                <a:cs typeface="Arial Unicode MS"/>
-              </a:rPr>
-              <a:t>雷達不是不適合看人，是不能單獨看人。</a:t>
+              <a:rPr sz="800" b="1" lang="zh-TW" dirty="0">
+                <a:solidFill>
+                  <a:srgbClr val="000000"/>
+                </a:solidFill>
+                <a:latin typeface="Arial Unicode MS"/>
+                <a:ea typeface="Arial Unicode MS"/>
+                <a:cs typeface="Arial Unicode MS"/>
+              </a:rPr>
+              <a:t>電波明明掃過去了，為什麼沒有點？</a:t>
+            </a:r>
+            <a:r>
+              <a:rPr sz="800" lang="zh-TW" dirty="0">
+                <a:solidFill>
+                  <a:srgbClr val="000000"/>
+                </a:solidFill>
+                <a:latin typeface="Arial Unicode MS"/>
+                <a:ea typeface="Arial Unicode MS"/>
+                <a:cs typeface="Arial Unicode MS"/>
+              </a:rPr>
+              <a:t>先想一個例子：拿手電筒在黑暗裡照，照到一面鏡子，光整束彈回來，刺眼；照到一件毛衣，光散掉，回來的很少。對雷達來說，</a:t>
+            </a:r>
+            <a:r>
+              <a:rPr sz="800" b="1" lang="zh-TW" dirty="0">
+                <a:solidFill>
+                  <a:srgbClr val="000000"/>
+                </a:solidFill>
+                <a:latin typeface="Arial Unicode MS"/>
+                <a:ea typeface="Arial Unicode MS"/>
+                <a:cs typeface="Arial Unicode MS"/>
+              </a:rPr>
+              <a:t>車子是鏡子，人是毛衣。</a:t>
+            </a:r>
+            <a:r>
+              <a:rPr sz="800" lang="zh-TW" dirty="0">
+                <a:solidFill>
+                  <a:srgbClr val="000000"/>
+                </a:solidFill>
+                <a:latin typeface="Arial Unicode MS"/>
+                <a:ea typeface="Arial Unicode MS"/>
+                <a:cs typeface="Arial Unicode MS"/>
+              </a:rPr>
+              <a:t>車子是一大塊金屬，又有很多平面和直角，電波打上去，大部分彈回雷達；人小小的、圓圓的，身體又不是金屬，電波打上去，散到四面八方，回到雷達的很少。
+</a:t>
+            </a:r>
+          </a:p>
+          <a:p>
+            <a:pPr algn="l">
+              <a:spcBef>
+                <a:spcPts val="0"/>
+              </a:spcBef>
+              <a:spcAft>
+                <a:spcPts val="133"/>
+              </a:spcAft>
+            </a:pPr>
+            <a:r>
+              <a:rPr sz="800" lang="zh-TW" dirty="0">
+                <a:solidFill>
+                  <a:srgbClr val="000000"/>
+                </a:solidFill>
+                <a:latin typeface="Arial Unicode MS"/>
+                <a:ea typeface="Arial Unicode MS"/>
+                <a:cs typeface="Arial Unicode MS"/>
+              </a:rPr>
+              <a:t>這件事有人量過。Bosch 和德國 Ulm 大學二〇一三年的論文整理：77 GHz 的雷達看一個人，平均反射強度大約負八 dBsm，也就是只像一塊零點一六平方公尺的反射面；</a:t>
+            </a:r>
+            <a:r>
+              <a:rPr sz="800" b="1" lang="zh-TW" dirty="0">
+                <a:solidFill>
+                  <a:srgbClr val="000000"/>
+                </a:solidFill>
+                <a:latin typeface="Arial Unicode MS"/>
+                <a:ea typeface="Arial Unicode MS"/>
+                <a:cs typeface="Arial Unicode MS"/>
+              </a:rPr>
+              <a:t>從側面看，還要再弱三倍左右。</a:t>
+            </a:r>
+            <a:r>
+              <a:rPr sz="800" lang="zh-TW" dirty="0">
+                <a:solidFill>
+                  <a:srgbClr val="000000"/>
+                </a:solidFill>
+                <a:latin typeface="Arial Unicode MS"/>
+                <a:ea typeface="Arial Unicode MS"/>
+                <a:cs typeface="Arial Unicode MS"/>
+              </a:rPr>
+              <a:t>過斑馬線的人，正好是側面對著雷達。
+</a:t>
+            </a:r>
+          </a:p>
+          <a:p>
+            <a:pPr algn="l">
+              <a:spcBef>
+                <a:spcPts val="0"/>
+              </a:spcBef>
+              <a:spcAft>
+                <a:spcPts val="133"/>
+              </a:spcAft>
+            </a:pPr>
+            <a:r>
+              <a:rPr sz="800" lang="zh-TW" dirty="0">
+                <a:solidFill>
+                  <a:srgbClr val="000000"/>
+                </a:solidFill>
+                <a:latin typeface="Arial Unicode MS"/>
+                <a:ea typeface="Arial Unicode MS"/>
+                <a:cs typeface="Arial Unicode MS"/>
+              </a:rPr>
+              <a:t>回來的太弱，會怎樣？雷達有一個門檻，比門檻弱的回波，它當成雜訊，不報。我把這一格的原始資料打開來看，七個人裡面，</a:t>
+            </a:r>
+            <a:r>
+              <a:rPr sz="800" b="1" lang="zh-TW" dirty="0">
+                <a:solidFill>
+                  <a:srgbClr val="000000"/>
+                </a:solidFill>
+                <a:latin typeface="Arial Unicode MS"/>
+                <a:ea typeface="Arial Unicode MS"/>
+                <a:cs typeface="Arial Unicode MS"/>
+              </a:rPr>
+              <a:t>六個連一個原始的點都沒有</a:t>
+            </a:r>
+            <a:r>
+              <a:rPr sz="800" lang="zh-TW" dirty="0">
+                <a:solidFill>
+                  <a:srgbClr val="000000"/>
+                </a:solidFill>
+                <a:latin typeface="Arial Unicode MS"/>
+                <a:ea typeface="Arial Unicode MS"/>
+                <a:cs typeface="Arial Unicode MS"/>
+              </a:rPr>
+              <a:t>，就是被門檻擋掉了。
+</a:t>
+            </a:r>
+          </a:p>
+          <a:p>
+            <a:pPr algn="l">
+              <a:spcBef>
+                <a:spcPts val="0"/>
+              </a:spcBef>
+              <a:spcAft>
+                <a:spcPts val="133"/>
+              </a:spcAft>
+            </a:pPr>
+            <a:r>
+              <a:rPr sz="800" lang="zh-TW" dirty="0">
+                <a:solidFill>
+                  <a:srgbClr val="000000"/>
+                </a:solidFill>
+                <a:latin typeface="Arial Unicode MS"/>
+                <a:ea typeface="Arial Unicode MS"/>
+                <a:cs typeface="Arial Unicode MS"/>
+              </a:rPr>
+              <a:t>剩下那一個，正前方九點四公尺、正在橫越的那個人，雷達其實收到了一個回波。可是雷達量速度，量的是「朝我來、還是離我去」的那一段速度，上週講都卜勒的時候講過。這個人橫著走，每秒走一公尺多，朝雷達的那一段速度卻只有每秒零點二公尺，幾乎是零，在雷達眼裡跟停著的東西差不多。ARS 408 把這個點標成「停下來的物體」，nuScenes 預設的過濾規則會把這一類點丟掉，所以圖上也沒有它。
+</a:t>
+            </a:r>
+          </a:p>
+          <a:p>
+            <a:pPr algn="l">
+              <a:spcBef>
+                <a:spcPts val="0"/>
+              </a:spcBef>
+              <a:spcAft>
+                <a:spcPts val="133"/>
+              </a:spcAft>
+            </a:pPr>
+            <a:r>
+              <a:rPr sz="800" lang="zh-TW" dirty="0">
+                <a:solidFill>
+                  <a:srgbClr val="000000"/>
+                </a:solidFill>
+                <a:latin typeface="Arial Unicode MS"/>
+                <a:ea typeface="Arial Unicode MS"/>
+                <a:cs typeface="Arial Unicode MS"/>
+              </a:rPr>
+              <a:t>同學可能會覺得：</a:t>
+            </a:r>
+            <a:r>
+              <a:rPr sz="800" b="1" lang="zh-TW" dirty="0">
+                <a:solidFill>
+                  <a:srgbClr val="000000"/>
+                </a:solidFill>
+                <a:latin typeface="Arial Unicode MS"/>
+                <a:ea typeface="Arial Unicode MS"/>
+                <a:cs typeface="Arial Unicode MS"/>
+              </a:rPr>
+              <a:t>雷達這麼難看到人？不太可能吧。</a:t>
+            </a:r>
+            <a:r>
+              <a:rPr sz="800" lang="zh-TW" dirty="0">
+                <a:solidFill>
+                  <a:srgbClr val="000000"/>
+                </a:solidFill>
+                <a:latin typeface="Arial Unicode MS"/>
+                <a:ea typeface="Arial Unicode MS"/>
+                <a:cs typeface="Arial Unicode MS"/>
+              </a:rPr>
+              <a:t>這個懷疑很好。答案是：</a:t>
+            </a:r>
+            <a:r>
+              <a:rPr sz="800" b="1" lang="zh-TW" dirty="0">
+                <a:solidFill>
+                  <a:srgbClr val="000000"/>
+                </a:solidFill>
+                <a:latin typeface="Arial Unicode MS"/>
+                <a:ea typeface="Arial Unicode MS"/>
+                <a:cs typeface="Arial Unicode MS"/>
+              </a:rPr>
+              <a:t>不是看不到，是看得很不穩。</a:t>
+            </a:r>
+            <a:r>
+              <a:rPr sz="800" lang="zh-TW" dirty="0">
+                <a:solidFill>
+                  <a:srgbClr val="000000"/>
+                </a:solidFill>
+                <a:latin typeface="Arial Unicode MS"/>
+                <a:ea typeface="Arial Unicode MS"/>
+                <a:cs typeface="Arial Unicode MS"/>
+              </a:rPr>
+              <a:t>我把 mini 版裡，十五公尺內、光達看得到的行人全部算了一遍。八十八個人，跟著每個人走一段，有六十四個，大約七成，</a:t>
+            </a:r>
+            <a:r>
+              <a:rPr sz="800" b="1" lang="zh-TW" dirty="0">
+                <a:solidFill>
+                  <a:srgbClr val="000000"/>
+                </a:solidFill>
+                <a:latin typeface="Arial Unicode MS"/>
+                <a:ea typeface="Arial Unicode MS"/>
+                <a:cs typeface="Arial Unicode MS"/>
+              </a:rPr>
+              <a:t>至少被雷達抓到過一次</a:t>
+            </a:r>
+            <a:r>
+              <a:rPr sz="800" lang="zh-TW" dirty="0">
+                <a:solidFill>
+                  <a:srgbClr val="000000"/>
+                </a:solidFill>
+                <a:latin typeface="Arial Unicode MS"/>
+                <a:ea typeface="Arial Unicode MS"/>
+                <a:cs typeface="Arial Unicode MS"/>
+              </a:rPr>
+              <a:t>。可是在任何一個瞬間，抓得到的只有兩到三成；車子在同樣的距離，大約六成。一個人走過去，雷達這一下有、下一下沒有，</a:t>
+            </a:r>
+            <a:r>
+              <a:rPr sz="800" b="1" lang="zh-TW" dirty="0">
+                <a:solidFill>
+                  <a:srgbClr val="000000"/>
+                </a:solidFill>
+                <a:latin typeface="Arial Unicode MS"/>
+                <a:ea typeface="Arial Unicode MS"/>
+                <a:cs typeface="Arial Unicode MS"/>
+              </a:rPr>
+              <a:t>像接觸不良的燈泡，一閃一閃的。</a:t>
+            </a:r>
+            <a:r>
+              <a:rPr sz="800" lang="zh-TW" dirty="0">
+                <a:solidFill>
+                  <a:srgbClr val="000000"/>
+                </a:solidFill>
+                <a:latin typeface="Arial Unicode MS"/>
+                <a:ea typeface="Arial Unicode MS"/>
+                <a:cs typeface="Arial Unicode MS"/>
+              </a:rPr>
+              <a:t>
+</a:t>
+            </a:r>
+          </a:p>
+          <a:p>
+            <a:pPr algn="l">
+              <a:spcBef>
+                <a:spcPts val="0"/>
+              </a:spcBef>
+              <a:spcAft>
+                <a:spcPts val="133"/>
+              </a:spcAft>
+            </a:pPr>
+            <a:r>
+              <a:rPr sz="800" lang="zh-TW" dirty="0">
+                <a:solidFill>
+                  <a:srgbClr val="000000"/>
+                </a:solidFill>
+                <a:latin typeface="Arial Unicode MS"/>
+                <a:ea typeface="Arial Unicode MS"/>
+                <a:cs typeface="Arial Unicode MS"/>
+              </a:rPr>
+              <a:t>為什麼一閃一閃？剛剛那篇論文說：人走路的時候，姿勢、方向、手腳的角度一直在變，所以人的反射強度比車子跳得厲害得多。論文裡還提到一件跟毛衣例子剛好對上的事：穿羊毛衣服的人，反射更弱。
+</a:t>
+            </a:r>
+          </a:p>
+          <a:p>
+            <a:pPr algn="l">
+              <a:spcBef>
+                <a:spcPts val="0"/>
+              </a:spcBef>
+              <a:spcAft>
+                <a:spcPts val="133"/>
+              </a:spcAft>
+            </a:pPr>
+            <a:r>
+              <a:rPr sz="800" lang="zh-TW" dirty="0">
+                <a:solidFill>
+                  <a:srgbClr val="000000"/>
+                </a:solidFill>
+                <a:latin typeface="Arial Unicode MS"/>
+                <a:ea typeface="Arial Unicode MS"/>
+                <a:cs typeface="Arial Unicode MS"/>
+              </a:rPr>
+              <a:t>那雷達還能不能用來看行人？下一張講。
+</a:t>
+            </a:r>
+          </a:p>
+          <a:p>
+            <a:pPr algn="l">
+              <a:spcBef>
+                <a:spcPts val="0"/>
+              </a:spcBef>
+              <a:spcAft>
+                <a:spcPts val="133"/>
+              </a:spcAft>
+            </a:pPr>
+            <a:r>
+              <a:rPr sz="800" lang="zh-TW" dirty="0">
+                <a:solidFill>
+                  <a:srgbClr val="000000"/>
+                </a:solidFill>
+                <a:latin typeface="Arial Unicode MS"/>
+                <a:ea typeface="Arial Unicode MS"/>
+                <a:cs typeface="Arial Unicode MS"/>
+              </a:rPr>
+              <a:t>為什麼不把雷達點畫在相機畫面上？因為雷達量不出高度，所有的點只能畫在同一個高度，遠處的點擠在地平線附近，會疊在近處的人身上，看起來好像打到人，其實是後面幾十公尺的東西。畫在地上，前後距離才分得清楚。</a:t>
             </a:r>
           </a:p>
         </p:txBody>
@@ -2984,41 +2996,19 @@
                 <a:spcPts val="0"/>
               </a:spcBef>
               <a:spcAft>
-                <a:spcPts val="200"/>
+                <a:spcPts val="175"/>
               </a:spcAft>
             </a:pPr>
             <a:r>
-              <a:rPr sz="1200" lang="zh-TW" dirty="0">
-                <a:solidFill>
-                  <a:srgbClr val="000000"/>
-                </a:solidFill>
-                <a:latin typeface="Arial Unicode MS"/>
-                <a:ea typeface="Arial Unicode MS"/>
-                <a:cs typeface="Arial Unicode MS"/>
-              </a:rPr>
-              <a:t>最後回到第四張那三種壞法，收在最危險的那一種：</a:t>
-            </a:r>
-            <a:r>
-              <a:rPr sz="1200" b="1" lang="zh-TW" dirty="0">
-                <a:solidFill>
-                  <a:srgbClr val="000000"/>
-                </a:solidFill>
-                <a:latin typeface="Arial Unicode MS"/>
-                <a:ea typeface="Arial Unicode MS"/>
-                <a:cs typeface="Arial Unicode MS"/>
-              </a:rPr>
-              <a:t>看不到，卻說沒事。</a:t>
-            </a:r>
-            <a:r>
-              <a:rPr sz="1200" lang="zh-TW" dirty="0">
-                <a:solidFill>
-                  <a:srgbClr val="000000"/>
-                </a:solidFill>
-                <a:latin typeface="Arial Unicode MS"/>
-                <a:ea typeface="Arial Unicode MS"/>
-                <a:cs typeface="Arial Unicode MS"/>
-              </a:rPr>
-              <a:t>
+              <a:rPr sz="1050" lang="zh-TW" dirty="0">
+                <a:solidFill>
+                  <a:srgbClr val="000000"/>
+                </a:solidFill>
+                <a:latin typeface="Arial Unicode MS"/>
+                <a:ea typeface="Arial Unicode MS"/>
+                <a:cs typeface="Arial Unicode MS"/>
+              </a:rPr>
+              <a:t>剛剛那張看起來，雷達看人好像很差。各位不要因此覺得雷達不適合看人。新一代的雷達，專門為「人」做了好幾件事，第八週會細講，今天先知道有這四招。
 </a:t>
             </a:r>
           </a:p>
@@ -3028,41 +3018,30 @@
                 <a:spcPts val="0"/>
               </a:spcBef>
               <a:spcAft>
-                <a:spcPts val="200"/>
+                <a:spcPts val="175"/>
               </a:spcAft>
             </a:pPr>
             <a:r>
-              <a:rPr sz="1200" lang="zh-TW" dirty="0">
-                <a:solidFill>
-                  <a:srgbClr val="000000"/>
-                </a:solidFill>
-                <a:latin typeface="Arial Unicode MS"/>
-                <a:ea typeface="Arial Unicode MS"/>
-                <a:cs typeface="Arial Unicode MS"/>
-              </a:rPr>
-              <a:t>這是剛剛那個路口的照片，斑馬線上的人看得清清楚楚。可是雷達交出去的報告是：前面八到十公尺，</a:t>
-            </a:r>
-            <a:r>
-              <a:rPr sz="1200" b="1" lang="zh-TW" dirty="0">
-                <a:solidFill>
-                  <a:srgbClr val="000000"/>
-                </a:solidFill>
-                <a:latin typeface="Arial Unicode MS"/>
-                <a:ea typeface="Arial Unicode MS"/>
-                <a:cs typeface="Arial Unicode MS"/>
-              </a:rPr>
-              <a:t>什麼都沒有。</a:t>
-            </a:r>
-            <a:r>
-              <a:rPr sz="1200" lang="zh-TW" dirty="0">
-                <a:solidFill>
-                  <a:srgbClr val="000000"/>
-                </a:solidFill>
-                <a:latin typeface="Arial Unicode MS"/>
-                <a:ea typeface="Arial Unicode MS"/>
-                <a:cs typeface="Arial Unicode MS"/>
-              </a:rPr>
-              <a:t>
+              <a:rPr sz="1050" b="1" lang="zh-TW" dirty="0">
+                <a:solidFill>
+                  <a:srgbClr val="000000"/>
+                </a:solidFill>
+                <a:latin typeface="Arial Unicode MS"/>
+                <a:ea typeface="Arial Unicode MS"/>
+                <a:cs typeface="Arial Unicode MS"/>
+              </a:rPr>
+              <a:t>第一招，點更多。</a:t>
+            </a:r>
+            <a:r>
+              <a:rPr sz="1050" lang="zh-TW" dirty="0">
+                <a:solidFill>
+                  <a:srgbClr val="000000"/>
+                </a:solidFill>
+                <a:latin typeface="Arial Unicode MS"/>
+                <a:ea typeface="Arial Unicode MS"/>
+                <a:cs typeface="Arial Unicode MS"/>
+              </a:rPr>
+              <a:t>就是上週講的 4D 雷達。天線從 408 的二十四個，變成 548 的一百九十二個，角度分得更細，一個人身上能分到好幾個點，不會跟旁邊、後面的東西混在一起；又量得出高度，人是瘦高的，車是矮寬的，多一個分辨的線索。
 </a:t>
             </a:r>
           </a:p>
@@ -3072,63 +3051,52 @@
                 <a:spcPts val="0"/>
               </a:spcBef>
               <a:spcAft>
-                <a:spcPts val="200"/>
+                <a:spcPts val="175"/>
               </a:spcAft>
             </a:pPr>
             <a:r>
-              <a:rPr sz="1200" lang="zh-TW" dirty="0">
-                <a:solidFill>
-                  <a:srgbClr val="000000"/>
-                </a:solidFill>
-                <a:latin typeface="Arial Unicode MS"/>
-                <a:ea typeface="Arial Unicode MS"/>
-                <a:cs typeface="Arial Unicode MS"/>
-              </a:rPr>
-              <a:t>請注意雷達做了什麼：它</a:t>
-            </a:r>
-            <a:r>
-              <a:rPr sz="1200" b="1" lang="zh-TW" dirty="0">
-                <a:solidFill>
-                  <a:srgbClr val="000000"/>
-                </a:solidFill>
-                <a:latin typeface="Arial Unicode MS"/>
-                <a:ea typeface="Arial Unicode MS"/>
-                <a:cs typeface="Arial Unicode MS"/>
-              </a:rPr>
-              <a:t>沒有說「我看不到」</a:t>
-            </a:r>
-            <a:r>
-              <a:rPr sz="1200" lang="zh-TW" dirty="0">
-                <a:solidFill>
-                  <a:srgbClr val="000000"/>
-                </a:solidFill>
-                <a:latin typeface="Arial Unicode MS"/>
-                <a:ea typeface="Arial Unicode MS"/>
-                <a:cs typeface="Arial Unicode MS"/>
-              </a:rPr>
-              <a:t>，它只是什麼都沒報。回波太弱被門檻擋掉也好，被過濾規則丟掉也好，對後面的程式來說，結果都一樣：</a:t>
-            </a:r>
-            <a:r>
-              <a:rPr sz="1200" b="1" lang="zh-TW" dirty="0">
-                <a:solidFill>
-                  <a:srgbClr val="000000"/>
-                </a:solidFill>
-                <a:latin typeface="Arial Unicode MS"/>
-                <a:ea typeface="Arial Unicode MS"/>
-                <a:cs typeface="Arial Unicode MS"/>
-              </a:rPr>
-              <a:t>沒有點，就是那裡沒有東西。</a:t>
-            </a:r>
-            <a:r>
-              <a:rPr sz="1200" lang="zh-TW" dirty="0">
-                <a:solidFill>
-                  <a:srgbClr val="000000"/>
-                </a:solidFill>
-                <a:latin typeface="Arial Unicode MS"/>
-                <a:ea typeface="Arial Unicode MS"/>
-                <a:cs typeface="Arial Unicode MS"/>
-              </a:rPr>
-              <a:t>
+              <a:rPr sz="1050" b="1" lang="zh-TW" dirty="0">
+                <a:solidFill>
+                  <a:srgbClr val="000000"/>
+                </a:solidFill>
+                <a:latin typeface="Arial Unicode MS"/>
+                <a:ea typeface="Arial Unicode MS"/>
+                <a:cs typeface="Arial Unicode MS"/>
+              </a:rPr>
+              <a:t>第二招，看動作。</a:t>
+            </a:r>
+            <a:r>
+              <a:rPr sz="1050" lang="zh-TW" dirty="0">
+                <a:solidFill>
+                  <a:srgbClr val="000000"/>
+                </a:solidFill>
+                <a:latin typeface="Arial Unicode MS"/>
+                <a:ea typeface="Arial Unicode MS"/>
+                <a:cs typeface="Arial Unicode MS"/>
+              </a:rPr>
+              <a:t>看左邊這張照片，一個正在過馬路的人。一根電線桿，整根都是同一個速度，零。一個人走路，身體往前，手和腳卻一前一後地擺，有的部位快、有的慢、有的往回。雷達量得到這種「同一個東西裡，有好幾種速度，而且有節奏」的特徵，英文叫 micro-Doppler，</a:t>
+            </a:r>
+            <a:r>
+              <a:rPr sz="1050" b="1" lang="zh-TW" dirty="0">
+                <a:solidFill>
+                  <a:srgbClr val="000000"/>
+                </a:solidFill>
+                <a:latin typeface="Arial Unicode MS"/>
+                <a:ea typeface="Arial Unicode MS"/>
+                <a:cs typeface="Arial Unicode MS"/>
+              </a:rPr>
+              <a:t>微都卜勒</a:t>
+            </a:r>
+            <a:r>
+              <a:rPr sz="1050" lang="zh-TW" dirty="0">
+                <a:solidFill>
+                  <a:srgbClr val="000000"/>
+                </a:solidFill>
+                <a:latin typeface="Arial Unicode MS"/>
+                <a:ea typeface="Arial Unicode MS"/>
+                <a:cs typeface="Arial Unicode MS"/>
+              </a:rPr>
+              <a:t>，可以用來分辨行人、腳踏車和桿子。這是雷達研究裡很成熟的方向，不過量產車用到什麼程度，我沒有資料可以講。
 </a:t>
             </a:r>
           </a:p>
@@ -3138,85 +3106,30 @@
                 <a:spcPts val="0"/>
               </a:spcBef>
               <a:spcAft>
-                <a:spcPts val="200"/>
+                <a:spcPts val="175"/>
               </a:spcAft>
             </a:pPr>
             <a:r>
-              <a:rPr sz="1200" lang="zh-TW" dirty="0">
-                <a:solidFill>
-                  <a:srgbClr val="000000"/>
-                </a:solidFill>
-                <a:latin typeface="Arial Unicode MS"/>
-                <a:ea typeface="Arial Unicode MS"/>
-                <a:cs typeface="Arial Unicode MS"/>
-              </a:rPr>
-              <a:t>這種壞法還有三個例子，前兩週和今天都提過。</a:t>
-            </a:r>
-            <a:r>
-              <a:rPr sz="1200" b="1" lang="zh-TW" dirty="0">
-                <a:solidFill>
-                  <a:srgbClr val="000000"/>
-                </a:solidFill>
-                <a:latin typeface="Arial Unicode MS"/>
-                <a:ea typeface="Arial Unicode MS"/>
-                <a:cs typeface="Arial Unicode MS"/>
-              </a:rPr>
-              <a:t>HC-SR04</a:t>
-            </a:r>
-            <a:r>
-              <a:rPr sz="1200" lang="zh-TW" dirty="0">
-                <a:solidFill>
-                  <a:srgbClr val="000000"/>
-                </a:solidFill>
-                <a:latin typeface="Arial Unicode MS"/>
-                <a:ea typeface="Arial Unicode MS"/>
-                <a:cs typeface="Arial Unicode MS"/>
-              </a:rPr>
-              <a:t> 被泥巴蓋住，照樣回報「前面沒東西」。</a:t>
-            </a:r>
-            <a:r>
-              <a:rPr sz="1200" b="1" lang="zh-TW" dirty="0">
-                <a:solidFill>
-                  <a:srgbClr val="000000"/>
-                </a:solidFill>
-                <a:latin typeface="Arial Unicode MS"/>
-                <a:ea typeface="Arial Unicode MS"/>
-                <a:cs typeface="Arial Unicode MS"/>
-              </a:rPr>
-              <a:t>衛星定位</a:t>
-            </a:r>
-            <a:r>
-              <a:rPr sz="1200" lang="zh-TW" dirty="0">
-                <a:solidFill>
-                  <a:srgbClr val="000000"/>
-                </a:solidFill>
-                <a:latin typeface="Arial Unicode MS"/>
-                <a:ea typeface="Arial Unicode MS"/>
-                <a:cs typeface="Arial Unicode MS"/>
-              </a:rPr>
-              <a:t>在窄巷裡被反射騙了，偏了幾十公尺，還是很有把握地告訴你一個位置。</a:t>
-            </a:r>
-            <a:r>
-              <a:rPr sz="1200" b="1" lang="zh-TW" dirty="0">
-                <a:solidFill>
-                  <a:srgbClr val="000000"/>
-                </a:solidFill>
-                <a:latin typeface="Arial Unicode MS"/>
-                <a:ea typeface="Arial Unicode MS"/>
-                <a:cs typeface="Arial Unicode MS"/>
-              </a:rPr>
-              <a:t>雷達</a:t>
-            </a:r>
-            <a:r>
-              <a:rPr sz="1200" lang="zh-TW" dirty="0">
-                <a:solidFill>
-                  <a:srgbClr val="000000"/>
-                </a:solidFill>
-                <a:latin typeface="Arial Unicode MS"/>
-                <a:ea typeface="Arial Unicode MS"/>
-                <a:cs typeface="Arial Unicode MS"/>
-              </a:rPr>
-              <a:t>把停在路肩的消防車當成路邊的東西丟掉，上週講雷達的時候提過，也就是剛剛第九張說的「丟太多」；相機剛好也沒認出那是一台車，兩顆各自都「正常」，合起來就出事了。
+              <a:rPr sz="1050" b="1" lang="zh-TW" dirty="0">
+                <a:solidFill>
+                  <a:srgbClr val="000000"/>
+                </a:solidFill>
+                <a:latin typeface="Arial Unicode MS"/>
+                <a:ea typeface="Arial Unicode MS"/>
+                <a:cs typeface="Arial Unicode MS"/>
+              </a:rPr>
+              <a:t>第三招，看久一點。</a:t>
+            </a:r>
+            <a:r>
+              <a:rPr sz="1050" lang="zh-TW" dirty="0">
+                <a:solidFill>
+                  <a:srgbClr val="000000"/>
+                </a:solidFill>
+                <a:latin typeface="Arial Unicode MS"/>
+                <a:ea typeface="Arial Unicode MS"/>
+                <a:cs typeface="Arial Unicode MS"/>
+              </a:rPr>
+              <a:t>剛剛說雷達看人一閃一閃。可是雷達每秒更新十幾次，一瞬間只抓到兩三成，一秒鐘裡還是會抓到好幾次。把連續幾次的掃描疊起來一起看，再用追蹤把一閃一閃的點串成一條線，中間的空檔先用預測補，下一節會講。荷蘭一份公開資料集的論文也寫到：加上高度、再把連續幾次掃描疊起來，雷達和光達的差距就縮小了。
 </a:t>
             </a:r>
           </a:p>
@@ -3226,19 +3139,52 @@
                 <a:spcPts val="0"/>
               </a:spcBef>
               <a:spcAft>
-                <a:spcPts val="200"/>
+                <a:spcPts val="175"/>
               </a:spcAft>
             </a:pPr>
             <a:r>
-              <a:rPr sz="1200" lang="zh-TW" dirty="0">
-                <a:solidFill>
-                  <a:srgbClr val="000000"/>
-                </a:solidFill>
-                <a:latin typeface="Arial Unicode MS"/>
-                <a:ea typeface="Arial Unicode MS"/>
-                <a:cs typeface="Arial Unicode MS"/>
-              </a:rPr>
-              <a:t>這幾個例子，都像那個壞掉卻一直顯示滿格的油表。
+              <a:rPr sz="1050" b="1" lang="zh-TW" dirty="0">
+                <a:solidFill>
+                  <a:srgbClr val="000000"/>
+                </a:solidFill>
+                <a:latin typeface="Arial Unicode MS"/>
+                <a:ea typeface="Arial Unicode MS"/>
+                <a:cs typeface="Arial Unicode MS"/>
+              </a:rPr>
+              <a:t>第四招，跟別人一起看。</a:t>
+            </a:r>
+            <a:r>
+              <a:rPr sz="1050" lang="zh-TW" dirty="0">
+                <a:solidFill>
+                  <a:srgbClr val="000000"/>
+                </a:solidFill>
+                <a:latin typeface="Arial Unicode MS"/>
+                <a:ea typeface="Arial Unicode MS"/>
+                <a:cs typeface="Arial Unicode MS"/>
+              </a:rPr>
+              <a:t>這是量產車最常見的做法。雷達抓到人的時候，距離和接近的速度量得很準，晚上、下雨也照樣量，這正是相機最弱的地方；它做不到的，是</a:t>
+            </a:r>
+            <a:r>
+              <a:rPr sz="1050" b="1" lang="zh-TW" dirty="0">
+                <a:solidFill>
+                  <a:srgbClr val="000000"/>
+                </a:solidFill>
+                <a:latin typeface="Arial Unicode MS"/>
+                <a:ea typeface="Arial Unicode MS"/>
+                <a:cs typeface="Arial Unicode MS"/>
+              </a:rPr>
+              <a:t>認出那是一個人</a:t>
+            </a:r>
+            <a:r>
+              <a:rPr sz="1050" lang="zh-TW" dirty="0">
+                <a:solidFill>
+                  <a:srgbClr val="000000"/>
+                </a:solidFill>
+                <a:latin typeface="Arial Unicode MS"/>
+                <a:ea typeface="Arial Unicode MS"/>
+                <a:cs typeface="Arial Unicode MS"/>
+              </a:rPr>
+              <a:t>，那要靠相機。所以像 Toyota 的預防碰撞系統，就是相機加毫米波雷達一起看行人。晚上也有人用熱像儀加雷達：人的身體是熱的，在熱像裡特別明顯。
 </a:t>
             </a:r>
           </a:p>
@@ -3248,41 +3194,19 @@
                 <a:spcPts val="0"/>
               </a:spcBef>
               <a:spcAft>
-                <a:spcPts val="200"/>
+                <a:spcPts val="175"/>
               </a:spcAft>
             </a:pPr>
             <a:r>
-              <a:rPr sz="1200" lang="zh-TW" dirty="0">
-                <a:solidFill>
-                  <a:srgbClr val="000000"/>
-                </a:solidFill>
-                <a:latin typeface="Arial Unicode MS"/>
-                <a:ea typeface="Arial Unicode MS"/>
-                <a:cs typeface="Arial Unicode MS"/>
-              </a:rPr>
-              <a:t>所以今天的結論是：每一顆感測器，不只要量得準，還要能說一句「</a:t>
-            </a:r>
-            <a:r>
-              <a:rPr sz="1200" b="1" lang="zh-TW" dirty="0">
-                <a:solidFill>
-                  <a:srgbClr val="000000"/>
-                </a:solidFill>
-                <a:latin typeface="Arial Unicode MS"/>
-                <a:ea typeface="Arial Unicode MS"/>
-                <a:cs typeface="Arial Unicode MS"/>
-              </a:rPr>
-              <a:t>我現在不可靠</a:t>
-            </a:r>
-            <a:r>
-              <a:rPr sz="1200" lang="zh-TW" dirty="0">
-                <a:solidFill>
-                  <a:srgbClr val="000000"/>
-                </a:solidFill>
-                <a:latin typeface="Arial Unicode MS"/>
-                <a:ea typeface="Arial Unicode MS"/>
-                <a:cs typeface="Arial Unicode MS"/>
-              </a:rPr>
-              <a:t>」。它一說，車子就知道那幾秒要改聽別人的。剛剛那六個人，雷達說不出來，就要靠光達和相機來補。
+              <a:rPr sz="1050" lang="zh-TW" dirty="0">
+                <a:solidFill>
+                  <a:srgbClr val="000000"/>
+                </a:solidFill>
+                <a:latin typeface="Arial Unicode MS"/>
+                <a:ea typeface="Arial Unicode MS"/>
+                <a:cs typeface="Arial Unicode MS"/>
+              </a:rPr>
+              <a:t>這些新做法有沒有用？剛剛那份荷蘭的資料集，二〇二二年公開，用的是新一代 4D 雷達：車子正前方的行人，大約一半找得到，比我們今天這顆二〇一八年的 ARS 408 好，但行人還是最難找的那一類；加上相機，分數再往上。
 </a:t>
             </a:r>
           </a:p>
@@ -3292,19 +3216,30 @@
                 <a:spcPts val="0"/>
               </a:spcBef>
               <a:spcAft>
-                <a:spcPts val="200"/>
+                <a:spcPts val="175"/>
               </a:spcAft>
             </a:pPr>
             <a:r>
-              <a:rPr sz="1200" lang="zh-TW" dirty="0">
-                <a:solidFill>
-                  <a:srgbClr val="000000"/>
-                </a:solidFill>
-                <a:latin typeface="Arial Unicode MS"/>
-                <a:ea typeface="Arial Unicode MS"/>
-                <a:cs typeface="Arial Unicode MS"/>
-              </a:rPr>
-              <a:t>那「改聽別人的」要怎麼做？兩顆說的不一樣，要聽誰的？這就是下一節：融合。</a:t>
+              <a:rPr sz="1050" lang="zh-TW" dirty="0">
+                <a:solidFill>
+                  <a:srgbClr val="000000"/>
+                </a:solidFill>
+                <a:latin typeface="Arial Unicode MS"/>
+                <a:ea typeface="Arial Unicode MS"/>
+                <a:cs typeface="Arial Unicode MS"/>
+              </a:rPr>
+              <a:t>所以結論是：</a:t>
+            </a:r>
+            <a:r>
+              <a:rPr sz="1050" b="1" lang="zh-TW" dirty="0">
+                <a:solidFill>
+                  <a:srgbClr val="000000"/>
+                </a:solidFill>
+                <a:latin typeface="Arial Unicode MS"/>
+                <a:ea typeface="Arial Unicode MS"/>
+                <a:cs typeface="Arial Unicode MS"/>
+              </a:rPr>
+              <a:t>雷達不是不適合看人，是不能單獨看人。</a:t>
             </a:r>
           </a:p>
         </p:txBody>
@@ -3425,7 +3360,29 @@
                 <a:ea typeface="Arial Unicode MS"/>
                 <a:cs typeface="Arial Unicode MS"/>
               </a:rPr>
-              <a:t>三句話。
+              <a:t>最後回到第四張那三種壞法，收在最危險的那一種：</a:t>
+            </a:r>
+            <a:r>
+              <a:rPr sz="1200" b="1" lang="zh-TW" dirty="0">
+                <a:solidFill>
+                  <a:srgbClr val="000000"/>
+                </a:solidFill>
+                <a:latin typeface="Arial Unicode MS"/>
+                <a:ea typeface="Arial Unicode MS"/>
+                <a:cs typeface="Arial Unicode MS"/>
+              </a:rPr>
+              <a:t>看不到，卻說沒事。</a:t>
+            </a:r>
+            <a:r>
+              <a:rPr sz="1200" lang="zh-TW" dirty="0">
+                <a:solidFill>
+                  <a:srgbClr val="000000"/>
+                </a:solidFill>
+                <a:latin typeface="Arial Unicode MS"/>
+                <a:ea typeface="Arial Unicode MS"/>
+                <a:cs typeface="Arial Unicode MS"/>
+              </a:rPr>
+              <a:t>
 </a:t>
             </a:r>
           </a:p>
@@ -3439,6 +3396,17 @@
               </a:spcAft>
             </a:pPr>
             <a:r>
+              <a:rPr sz="1200" lang="zh-TW" dirty="0">
+                <a:solidFill>
+                  <a:srgbClr val="000000"/>
+                </a:solidFill>
+                <a:latin typeface="Arial Unicode MS"/>
+                <a:ea typeface="Arial Unicode MS"/>
+                <a:cs typeface="Arial Unicode MS"/>
+              </a:rPr>
+              <a:t>這是剛剛那個路口的照片，斑馬線上的人看得清清楚楚。可是雷達交出去的報告是：前面八到十公尺，</a:t>
+            </a:r>
+            <a:r>
               <a:rPr sz="1200" b="1" lang="zh-TW" dirty="0">
                 <a:solidFill>
                   <a:srgbClr val="000000"/>
@@ -3447,7 +3415,7 @@
                 <a:ea typeface="Arial Unicode MS"/>
                 <a:cs typeface="Arial Unicode MS"/>
               </a:rPr>
-              <a:t>第一句，三種壞法。</a:t>
+              <a:t>什麼都沒有。</a:t>
             </a:r>
             <a:r>
               <a:rPr sz="1200" lang="zh-TW" dirty="0">
@@ -3458,7 +3426,7 @@
                 <a:ea typeface="Arial Unicode MS"/>
                 <a:cs typeface="Arial Unicode MS"/>
               </a:rPr>
-              <a:t>看不到、看錯、看不到卻不說。第三種最危險，像壞掉還顯示滿格的油表。
+              <a:t>
 </a:t>
             </a:r>
           </a:p>
@@ -3472,6 +3440,17 @@
               </a:spcAft>
             </a:pPr>
             <a:r>
+              <a:rPr sz="1200" lang="zh-TW" dirty="0">
+                <a:solidFill>
+                  <a:srgbClr val="000000"/>
+                </a:solidFill>
+                <a:latin typeface="Arial Unicode MS"/>
+                <a:ea typeface="Arial Unicode MS"/>
+                <a:cs typeface="Arial Unicode MS"/>
+              </a:rPr>
+              <a:t>請注意雷達做了什麼：它</a:t>
+            </a:r>
+            <a:r>
               <a:rPr sz="1200" b="1" lang="zh-TW" dirty="0">
                 <a:solidFill>
                   <a:srgbClr val="000000"/>
@@ -3480,7 +3459,7 @@
                 <a:ea typeface="Arial Unicode MS"/>
                 <a:cs typeface="Arial Unicode MS"/>
               </a:rPr>
-              <a:t>第二句，失效對照表沒有一欄全是勾。</a:t>
+              <a:t>沒有說「我看不到」</a:t>
             </a:r>
             <a:r>
               <a:rPr sz="1200" lang="zh-TW" dirty="0">
@@ -3491,7 +3470,29 @@
                 <a:ea typeface="Arial Unicode MS"/>
                 <a:cs typeface="Arial Unicode MS"/>
               </a:rPr>
-              <a:t>下雨害相機，遠處的人和機車害雷達，隧道害衛星定位。
+              <a:t>，它只是什麼都沒報。回波太弱被門檻擋掉也好，被過濾規則丟掉也好，對後面的程式來說，結果都一樣：</a:t>
+            </a:r>
+            <a:r>
+              <a:rPr sz="1200" b="1" lang="zh-TW" dirty="0">
+                <a:solidFill>
+                  <a:srgbClr val="000000"/>
+                </a:solidFill>
+                <a:latin typeface="Arial Unicode MS"/>
+                <a:ea typeface="Arial Unicode MS"/>
+                <a:cs typeface="Arial Unicode MS"/>
+              </a:rPr>
+              <a:t>沒有點，就是那裡沒有東西。</a:t>
+            </a:r>
+            <a:r>
+              <a:rPr sz="1200" lang="zh-TW" dirty="0">
+                <a:solidFill>
+                  <a:srgbClr val="000000"/>
+                </a:solidFill>
+                <a:latin typeface="Arial Unicode MS"/>
+                <a:ea typeface="Arial Unicode MS"/>
+                <a:cs typeface="Arial Unicode MS"/>
+              </a:rPr>
+              <a:t>
 </a:t>
             </a:r>
           </a:p>
@@ -3505,6 +3506,17 @@
               </a:spcAft>
             </a:pPr>
             <a:r>
+              <a:rPr sz="1200" lang="zh-TW" dirty="0">
+                <a:solidFill>
+                  <a:srgbClr val="000000"/>
+                </a:solidFill>
+                <a:latin typeface="Arial Unicode MS"/>
+                <a:ea typeface="Arial Unicode MS"/>
+                <a:cs typeface="Arial Unicode MS"/>
+              </a:rPr>
+              <a:t>這種壞法還有三個例子，前兩週和今天都提過。</a:t>
+            </a:r>
+            <a:r>
               <a:rPr sz="1200" b="1" lang="zh-TW" dirty="0">
                 <a:solidFill>
                   <a:srgbClr val="000000"/>
@@ -3513,7 +3525,7 @@
                 <a:ea typeface="Arial Unicode MS"/>
                 <a:cs typeface="Arial Unicode MS"/>
               </a:rPr>
-              <a:t>第三句，今天第一次看真的資料。</a:t>
+              <a:t>HC-SR04</a:t>
             </a:r>
             <a:r>
               <a:rPr sz="1200" lang="zh-TW" dirty="0">
@@ -3524,7 +3536,51 @@
                 <a:ea typeface="Arial Unicode MS"/>
                 <a:cs typeface="Arial Unicode MS"/>
               </a:rPr>
-              <a:t>雷達的點全部在同一個高度；行人看得到，可是抓不穩，一瞬間只有兩三成抓得到，要靠相機一起看；光達三十公尺外，一台車身上只剩兩個點。
+              <a:t> 被泥巴蓋住，照樣回報「前面沒東西」。</a:t>
+            </a:r>
+            <a:r>
+              <a:rPr sz="1200" b="1" lang="zh-TW" dirty="0">
+                <a:solidFill>
+                  <a:srgbClr val="000000"/>
+                </a:solidFill>
+                <a:latin typeface="Arial Unicode MS"/>
+                <a:ea typeface="Arial Unicode MS"/>
+                <a:cs typeface="Arial Unicode MS"/>
+              </a:rPr>
+              <a:t>衛星定位</a:t>
+            </a:r>
+            <a:r>
+              <a:rPr sz="1200" lang="zh-TW" dirty="0">
+                <a:solidFill>
+                  <a:srgbClr val="000000"/>
+                </a:solidFill>
+                <a:latin typeface="Arial Unicode MS"/>
+                <a:ea typeface="Arial Unicode MS"/>
+                <a:cs typeface="Arial Unicode MS"/>
+              </a:rPr>
+              <a:t>在窄巷裡被反射騙了，偏了幾十公尺，還是很有把握地告訴你一個位置。</a:t>
+            </a:r>
+            <a:r>
+              <a:rPr sz="1200" b="1" lang="zh-TW" dirty="0">
+                <a:solidFill>
+                  <a:srgbClr val="000000"/>
+                </a:solidFill>
+                <a:latin typeface="Arial Unicode MS"/>
+                <a:ea typeface="Arial Unicode MS"/>
+                <a:cs typeface="Arial Unicode MS"/>
+              </a:rPr>
+              <a:t>雷達</a:t>
+            </a:r>
+            <a:r>
+              <a:rPr sz="1200" lang="zh-TW" dirty="0">
+                <a:solidFill>
+                  <a:srgbClr val="000000"/>
+                </a:solidFill>
+                <a:latin typeface="Arial Unicode MS"/>
+                <a:ea typeface="Arial Unicode MS"/>
+                <a:cs typeface="Arial Unicode MS"/>
+              </a:rPr>
+              <a:t>把停在路肩的消防車當成路邊的東西丟掉，上週講雷達的時候提過，也就是剛剛第九張說的「丟太多」；相機剛好也沒認出那是一台車，兩顆各自都「正常」，合起來就出事了。
 </a:t>
             </a:r>
           </a:p>
@@ -3546,7 +3602,73 @@
                 <a:ea typeface="Arial Unicode MS"/>
                 <a:cs typeface="Arial Unicode MS"/>
               </a:rPr>
-              <a:t>下課十分鐘。下一節：每一顆都會壞，那要怎麼合起來？</a:t>
+              <a:t>這幾個例子，都像那個壞掉卻一直顯示滿格的油表。
+</a:t>
+            </a:r>
+          </a:p>
+          <a:p>
+            <a:pPr algn="l">
+              <a:spcBef>
+                <a:spcPts val="0"/>
+              </a:spcBef>
+              <a:spcAft>
+                <a:spcPts val="200"/>
+              </a:spcAft>
+            </a:pPr>
+            <a:r>
+              <a:rPr sz="1200" lang="zh-TW" dirty="0">
+                <a:solidFill>
+                  <a:srgbClr val="000000"/>
+                </a:solidFill>
+                <a:latin typeface="Arial Unicode MS"/>
+                <a:ea typeface="Arial Unicode MS"/>
+                <a:cs typeface="Arial Unicode MS"/>
+              </a:rPr>
+              <a:t>所以今天的結論是：每一顆感測器，不只要量得準，還要能說一句「</a:t>
+            </a:r>
+            <a:r>
+              <a:rPr sz="1200" b="1" lang="zh-TW" dirty="0">
+                <a:solidFill>
+                  <a:srgbClr val="000000"/>
+                </a:solidFill>
+                <a:latin typeface="Arial Unicode MS"/>
+                <a:ea typeface="Arial Unicode MS"/>
+                <a:cs typeface="Arial Unicode MS"/>
+              </a:rPr>
+              <a:t>我現在不可靠</a:t>
+            </a:r>
+            <a:r>
+              <a:rPr sz="1200" lang="zh-TW" dirty="0">
+                <a:solidFill>
+                  <a:srgbClr val="000000"/>
+                </a:solidFill>
+                <a:latin typeface="Arial Unicode MS"/>
+                <a:ea typeface="Arial Unicode MS"/>
+                <a:cs typeface="Arial Unicode MS"/>
+              </a:rPr>
+              <a:t>」。它一說，車子就知道那幾秒要改聽別人的。剛剛那六個人，雷達說不出來，就要靠光達和相機來補。
+</a:t>
+            </a:r>
+          </a:p>
+          <a:p>
+            <a:pPr algn="l">
+              <a:spcBef>
+                <a:spcPts val="0"/>
+              </a:spcBef>
+              <a:spcAft>
+                <a:spcPts val="200"/>
+              </a:spcAft>
+            </a:pPr>
+            <a:r>
+              <a:rPr sz="1200" lang="zh-TW" dirty="0">
+                <a:solidFill>
+                  <a:srgbClr val="000000"/>
+                </a:solidFill>
+                <a:latin typeface="Arial Unicode MS"/>
+                <a:ea typeface="Arial Unicode MS"/>
+                <a:cs typeface="Arial Unicode MS"/>
+              </a:rPr>
+              <a:t>那「改聽別人的」要怎麼做？兩顆說的不一樣，要聽誰的？這就是下一節：融合。</a:t>
             </a:r>
           </a:p>
         </p:txBody>
@@ -3589,6 +3711,248 @@
                 <a:cs typeface="Arial Unicode MS"/>
               </a:rPr>
               <a:t>17</a:t>
+            </a:r>
+          </a:p>
+        </p:txBody>
+      </p:sp>
+    </p:spTree>
+  </p:cSld>
+  <p:clrMapOvr>
+    <a:masterClrMapping/>
+  </p:clrMapOvr>
+</p:notes>
+</file>
+
+<file path=ppt/notesSlides/notesSlide18.xml><?xml version="1.0" encoding="utf-8"?>
+<p:notes xmlns:a="http://schemas.openxmlformats.org/drawingml/2006/main" xmlns:p="http://schemas.openxmlformats.org/presentationml/2006/main">
+  <p:cSld>
+    <p:spTree>
+      <p:nvGrpSpPr>
+        <p:cNvPr id="1" name=""/>
+        <p:cNvGrpSpPr/>
+        <p:nvPr/>
+      </p:nvGrpSpPr>
+      <p:grpSpPr>
+        <a:xfrm/>
+      </p:grpSpPr>
+      <p:sp>
+        <p:nvSpPr>
+          <p:cNvPr id="2" name="Slide Image Placeholder 1"/>
+          <p:cNvSpPr>
+            <a:spLocks noGrp="1"/>
+          </p:cNvSpPr>
+          <p:nvPr>
+            <p:ph type="sldImg" idx="2"/>
+          </p:nvPr>
+        </p:nvSpPr>
+        <p:spPr>
+          <a:xfrm>
+            <a:off x="540000" y="540000"/>
+            <a:ext cx="6480000" cy="3645000"/>
+          </a:xfrm>
+        </p:spPr>
+      </p:sp>
+      <p:sp>
+        <p:nvSpPr>
+          <p:cNvPr id="3" name="Notes Placeholder 2"/>
+          <p:cNvSpPr>
+            <a:spLocks noGrp="1"/>
+          </p:cNvSpPr>
+          <p:nvPr>
+            <p:ph type="body" idx="3"/>
+          </p:nvPr>
+        </p:nvSpPr>
+        <p:spPr>
+          <a:xfrm>
+            <a:off x="540000" y="4440000"/>
+            <a:ext cx="6480000" cy="5500000"/>
+          </a:xfrm>
+        </p:spPr>
+        <p:txBody>
+          <a:bodyPr vert="horz" wrap="square" anchor="t" lIns="91440" rIns="91440" tIns="45720" bIns="45720"/>
+          <a:lstStyle/>
+          <a:p>
+            <a:pPr algn="l">
+              <a:spcBef>
+                <a:spcPts val="0"/>
+              </a:spcBef>
+              <a:spcAft>
+                <a:spcPts val="200"/>
+              </a:spcAft>
+            </a:pPr>
+            <a:r>
+              <a:rPr sz="1200" lang="zh-TW" dirty="0">
+                <a:solidFill>
+                  <a:srgbClr val="000000"/>
+                </a:solidFill>
+                <a:latin typeface="Arial Unicode MS"/>
+                <a:ea typeface="Arial Unicode MS"/>
+                <a:cs typeface="Arial Unicode MS"/>
+              </a:rPr>
+              <a:t>三句話。
+</a:t>
+            </a:r>
+          </a:p>
+          <a:p>
+            <a:pPr algn="l">
+              <a:spcBef>
+                <a:spcPts val="0"/>
+              </a:spcBef>
+              <a:spcAft>
+                <a:spcPts val="200"/>
+              </a:spcAft>
+            </a:pPr>
+            <a:r>
+              <a:rPr sz="1200" b="1" lang="zh-TW" dirty="0">
+                <a:solidFill>
+                  <a:srgbClr val="000000"/>
+                </a:solidFill>
+                <a:latin typeface="Arial Unicode MS"/>
+                <a:ea typeface="Arial Unicode MS"/>
+                <a:cs typeface="Arial Unicode MS"/>
+              </a:rPr>
+              <a:t>第一句，三種壞法。</a:t>
+            </a:r>
+            <a:r>
+              <a:rPr sz="1200" lang="zh-TW" dirty="0">
+                <a:solidFill>
+                  <a:srgbClr val="000000"/>
+                </a:solidFill>
+                <a:latin typeface="Arial Unicode MS"/>
+                <a:ea typeface="Arial Unicode MS"/>
+                <a:cs typeface="Arial Unicode MS"/>
+              </a:rPr>
+              <a:t>看不到、看錯、看不到卻不說。第三種最危險，像壞掉還顯示滿格的油表。
+</a:t>
+            </a:r>
+          </a:p>
+          <a:p>
+            <a:pPr algn="l">
+              <a:spcBef>
+                <a:spcPts val="0"/>
+              </a:spcBef>
+              <a:spcAft>
+                <a:spcPts val="200"/>
+              </a:spcAft>
+            </a:pPr>
+            <a:r>
+              <a:rPr sz="1200" b="1" lang="zh-TW" dirty="0">
+                <a:solidFill>
+                  <a:srgbClr val="000000"/>
+                </a:solidFill>
+                <a:latin typeface="Arial Unicode MS"/>
+                <a:ea typeface="Arial Unicode MS"/>
+                <a:cs typeface="Arial Unicode MS"/>
+              </a:rPr>
+              <a:t>第二句，失效對照表沒有一欄全是勾。</a:t>
+            </a:r>
+            <a:r>
+              <a:rPr sz="1200" lang="zh-TW" dirty="0">
+                <a:solidFill>
+                  <a:srgbClr val="000000"/>
+                </a:solidFill>
+                <a:latin typeface="Arial Unicode MS"/>
+                <a:ea typeface="Arial Unicode MS"/>
+                <a:cs typeface="Arial Unicode MS"/>
+              </a:rPr>
+              <a:t>下雨害相機，遠處的人和機車害雷達，隧道害衛星定位。
+</a:t>
+            </a:r>
+          </a:p>
+          <a:p>
+            <a:pPr algn="l">
+              <a:spcBef>
+                <a:spcPts val="0"/>
+              </a:spcBef>
+              <a:spcAft>
+                <a:spcPts val="200"/>
+              </a:spcAft>
+            </a:pPr>
+            <a:r>
+              <a:rPr sz="1200" b="1" lang="zh-TW" dirty="0">
+                <a:solidFill>
+                  <a:srgbClr val="000000"/>
+                </a:solidFill>
+                <a:latin typeface="Arial Unicode MS"/>
+                <a:ea typeface="Arial Unicode MS"/>
+                <a:cs typeface="Arial Unicode MS"/>
+              </a:rPr>
+              <a:t>第三句，今天第一次看真的資料。</a:t>
+            </a:r>
+            <a:r>
+              <a:rPr sz="1200" lang="zh-TW" dirty="0">
+                <a:solidFill>
+                  <a:srgbClr val="000000"/>
+                </a:solidFill>
+                <a:latin typeface="Arial Unicode MS"/>
+                <a:ea typeface="Arial Unicode MS"/>
+                <a:cs typeface="Arial Unicode MS"/>
+              </a:rPr>
+              <a:t>雷達的點全部在同一個高度；行人看得到，可是抓不穩，一瞬間只有兩三成抓得到，要靠相機一起看；光達三十公尺外，一台車身上只剩兩個點。
+</a:t>
+            </a:r>
+          </a:p>
+          <a:p>
+            <a:pPr algn="l">
+              <a:spcBef>
+                <a:spcPts val="0"/>
+              </a:spcBef>
+              <a:spcAft>
+                <a:spcPts val="200"/>
+              </a:spcAft>
+            </a:pPr>
+            <a:r>
+              <a:rPr sz="1200" lang="zh-TW" dirty="0">
+                <a:solidFill>
+                  <a:srgbClr val="000000"/>
+                </a:solidFill>
+                <a:latin typeface="Arial Unicode MS"/>
+                <a:ea typeface="Arial Unicode MS"/>
+                <a:cs typeface="Arial Unicode MS"/>
+              </a:rPr>
+              <a:t>下課十分鐘。下一節：每一顆都會壞，那要怎麼合起來？</a:t>
+            </a:r>
+          </a:p>
+        </p:txBody>
+      </p:sp>
+      <p:sp>
+        <p:nvSpPr>
+          <p:cNvPr id="4" name="Slide Number Placeholder 3"/>
+          <p:cNvSpPr>
+            <a:spLocks noGrp="1"/>
+          </p:cNvSpPr>
+          <p:nvPr>
+            <p:ph type="sldNum" idx="5"/>
+          </p:nvPr>
+        </p:nvSpPr>
+        <p:spPr>
+          <a:xfrm>
+            <a:off x="6500000" y="10200000"/>
+            <a:ext cx="500000" cy="300000"/>
+          </a:xfrm>
+        </p:spPr>
+        <p:txBody>
+          <a:bodyPr vert="horz" wrap="square" anchor="t" lIns="91440" rIns="91440" tIns="45720" bIns="45720"/>
+          <a:lstStyle/>
+          <a:p>
+            <a:pPr algn="l">
+              <a:spcBef>
+                <a:spcPts val="0"/>
+              </a:spcBef>
+              <a:spcAft>
+                <a:spcPts val="167"/>
+              </a:spcAft>
+            </a:pPr>
+            <a:r>
+              <a:rPr sz="1000" lang="zh-TW" dirty="0">
+                <a:solidFill>
+                  <a:srgbClr val="000000"/>
+                </a:solidFill>
+                <a:latin typeface="Arial Unicode MS"/>
+                <a:ea typeface="Arial Unicode MS"/>
+                <a:cs typeface="Arial Unicode MS"/>
+              </a:rPr>
+              <a:t>18</a:t>
             </a:r>
           </a:p>
         </p:txBody>
@@ -7148,6 +7512,1019 @@
       </p:nvGrpSpPr>
       <p:grpSpPr>
         <a:xfrm>
+          <a:off x="0" y="0"/>
+          <a:ext cx="1" cy="1"/>
+          <a:chOff x="0" y="0"/>
+          <a:chExt cx="0" cy="0"/>
+        </a:xfrm>
+      </p:grpSpPr>
+      <p:sp>
+        <p:nvSpPr>
+          <p:cNvPr id="2" name="Text 0"/>
+          <p:cNvSpPr txBox="1"/>
+          <p:nvPr/>
+        </p:nvSpPr>
+        <p:spPr>
+          <a:xfrm>
+            <a:off x="502920" y="365760"/>
+            <a:ext cx="8138160" cy="274320"/>
+          </a:xfrm>
+          <a:prstGeom prst="rect">
+            <a:avLst/>
+          </a:prstGeom>
+          <a:noFill/>
+          <a:ln/>
+        </p:spPr>
+        <p:txBody>
+          <a:bodyPr wrap="square" lIns="0" tIns="0" rIns="0" bIns="0" rtlCol="0" anchor="ctr"/>
+          <a:lstStyle/>
+          <a:p>
+            <a:pPr indent="0" marL="0">
+              <a:buNone/>
+            </a:pPr>
+            <a:r>
+              <a:rPr lang="en-US" sz="1300" b="1" dirty="0">
+                <a:solidFill>
+                  <a:srgbClr val="007F72"/>
+                </a:solidFill>
+                <a:latin typeface="Arial" pitchFamily="34" charset="0"/>
+                <a:ea typeface="Arial" pitchFamily="34" charset="-122"/>
+                <a:cs typeface="Arial" pitchFamily="34" charset="-120"/>
+              </a:rPr>
+              <a:t>Lidar · 先看真的：同樣是一台車</a:t>
+            </a:r>
+            <a:endParaRPr lang="en-US" sz="1300" dirty="0"/>
+          </a:p>
+        </p:txBody>
+      </p:sp>
+      <p:sp>
+        <p:nvSpPr>
+          <p:cNvPr id="3" name="Text 1"/>
+          <p:cNvSpPr txBox="1"/>
+          <p:nvPr/>
+        </p:nvSpPr>
+        <p:spPr>
+          <a:xfrm>
+            <a:off x="502920" y="676656"/>
+            <a:ext cx="8138160" cy="560684"/>
+          </a:xfrm>
+          <a:prstGeom prst="rect">
+            <a:avLst/>
+          </a:prstGeom>
+          <a:noFill/>
+          <a:ln/>
+        </p:spPr>
+        <p:txBody>
+          <a:bodyPr wrap="square" lIns="0" tIns="0" rIns="0" bIns="0" rtlCol="0" anchor="t"/>
+          <a:lstStyle/>
+          <a:p>
+            <a:pPr indent="0" marL="0">
+              <a:lnSpc>
+                <a:spcPct val="116000"/>
+              </a:lnSpc>
+              <a:buNone/>
+            </a:pPr>
+            <a:r>
+              <a:rPr lang="en-US" sz="1700" b="1" dirty="0">
+                <a:solidFill>
+                  <a:srgbClr val="0B1F3A"/>
+                </a:solidFill>
+                <a:latin typeface="Arial" pitchFamily="34" charset="0"/>
+                <a:ea typeface="Arial" pitchFamily="34" charset="-122"/>
+                <a:cs typeface="Arial" pitchFamily="34" charset="-120"/>
+              </a:rPr>
+              <a:t>Cùng là một chiếc xe: 10 m có 421 điểm lidar, 41 m chỉ còn 2</a:t>
+            </a:r>
+            <a:endParaRPr lang="en-US" sz="1700" dirty="0"/>
+          </a:p>
+          <a:p>
+            <a:pPr indent="0" marL="0">
+              <a:lnSpc>
+                <a:spcPct val="116000"/>
+              </a:lnSpc>
+              <a:buNone/>
+            </a:pPr>
+            <a:r>
+              <a:rPr lang="en-US" sz="1250" dirty="0">
+                <a:solidFill>
+                  <a:srgbClr val="5F7183"/>
+                </a:solidFill>
+                <a:latin typeface="微軟正黑體" pitchFamily="34" charset="0"/>
+                <a:ea typeface="微軟正黑體" pitchFamily="34" charset="-122"/>
+                <a:cs typeface="微軟正黑體" pitchFamily="34" charset="-120"/>
+              </a:rPr>
+              <a:t>同樣是一台車：10 公尺 421 個光達點，41 公尺只剩 2 個</a:t>
+            </a:r>
+            <a:endParaRPr lang="en-US" sz="1700" dirty="0"/>
+          </a:p>
+        </p:txBody>
+      </p:sp>
+      <p:sp>
+        <p:nvSpPr>
+          <p:cNvPr id="4" name="Shape 2"/>
+          <p:cNvSpPr/>
+          <p:nvPr/>
+        </p:nvSpPr>
+        <p:spPr>
+          <a:xfrm>
+            <a:off x="502920" y="1310492"/>
+            <a:ext cx="1828800" cy="2039053"/>
+          </a:xfrm>
+          <a:prstGeom prst="roundRect">
+            <a:avLst>
+              <a:gd name="adj" fmla="val 5000"/>
+            </a:avLst>
+          </a:prstGeom>
+          <a:solidFill>
+            <a:srgbClr val="FFFFFF"/>
+          </a:solidFill>
+          <a:ln w="12700">
+            <a:solidFill>
+              <a:srgbClr val="DBE3EA"/>
+            </a:solidFill>
+            <a:prstDash val="solid"/>
+          </a:ln>
+        </p:spPr>
+      </p:sp>
+      <p:sp>
+        <p:nvSpPr>
+          <p:cNvPr id="5" name="Shape 3"/>
+          <p:cNvSpPr/>
+          <p:nvPr/>
+        </p:nvSpPr>
+        <p:spPr>
+          <a:xfrm>
+            <a:off x="594360" y="1401932"/>
+            <a:ext cx="1645920" cy="347413"/>
+          </a:xfrm>
+          <a:prstGeom prst="roundRect">
+            <a:avLst>
+              <a:gd name="adj" fmla="val 13160"/>
+            </a:avLst>
+          </a:prstGeom>
+          <a:solidFill>
+            <a:srgbClr val="0B1F3A"/>
+          </a:solidFill>
+          <a:ln/>
+        </p:spPr>
+      </p:sp>
+      <p:sp>
+        <p:nvSpPr>
+          <p:cNvPr id="6" name="Text 4"/>
+          <p:cNvSpPr txBox="1"/>
+          <p:nvPr/>
+        </p:nvSpPr>
+        <p:spPr>
+          <a:xfrm>
+            <a:off x="667512" y="1429364"/>
+            <a:ext cx="1499616" cy="310837"/>
+          </a:xfrm>
+          <a:prstGeom prst="rect">
+            <a:avLst/>
+          </a:prstGeom>
+          <a:noFill/>
+          <a:ln/>
+        </p:spPr>
+        <p:txBody>
+          <a:bodyPr wrap="square" lIns="0" tIns="0" rIns="0" bIns="0" rtlCol="0" anchor="t"/>
+          <a:lstStyle/>
+          <a:p>
+            <a:pPr algn="ctr" indent="0" marL="0">
+              <a:lnSpc>
+                <a:spcPct val="104000"/>
+              </a:lnSpc>
+              <a:buNone/>
+            </a:pPr>
+            <a:r>
+              <a:rPr lang="en-US" sz="950" b="1" dirty="0">
+                <a:solidFill>
+                  <a:srgbClr val="FFFFFF"/>
+                </a:solidFill>
+                <a:latin typeface="Arial" pitchFamily="34" charset="0"/>
+                <a:ea typeface="Arial" pitchFamily="34" charset="-122"/>
+                <a:cs typeface="Arial" pitchFamily="34" charset="-120"/>
+              </a:rPr>
+              <a:t>10 m · 421 điểm</a:t>
+            </a:r>
+            <a:endParaRPr lang="en-US" sz="950" dirty="0"/>
+          </a:p>
+          <a:p>
+            <a:pPr algn="ctr" indent="0" marL="0">
+              <a:lnSpc>
+                <a:spcPct val="104000"/>
+              </a:lnSpc>
+              <a:buNone/>
+            </a:pPr>
+            <a:r>
+              <a:rPr lang="en-US" sz="850" dirty="0">
+                <a:solidFill>
+                  <a:srgbClr val="FFFFFF"/>
+                </a:solidFill>
+                <a:latin typeface="微軟正黑體" pitchFamily="34" charset="0"/>
+                <a:ea typeface="微軟正黑體" pitchFamily="34" charset="-122"/>
+                <a:cs typeface="微軟正黑體" pitchFamily="34" charset="-120"/>
+              </a:rPr>
+              <a:t>10 公尺・421 點</a:t>
+            </a:r>
+            <a:endParaRPr lang="en-US" sz="950" dirty="0"/>
+          </a:p>
+        </p:txBody>
+      </p:sp>
+      <p:pic>
+        <p:nvPicPr>
+          <p:cNvPr id="7" name="Image 0" descr="/Users/tsengchenghsun/Class/carClass/Claude outputs/第七週(10-22)/src/img/w7_far1.jpg">    </p:cNvPr>
+          <p:cNvPicPr>
+            <a:picLocks noChangeAspect="1"/>
+          </p:cNvPicPr>
+          <p:nvPr/>
+        </p:nvPicPr>
+        <p:blipFill>
+          <a:blip r:embed="rId1"/>
+          <a:stretch>
+            <a:fillRect/>
+          </a:stretch>
+        </p:blipFill>
+        <p:spPr>
+          <a:xfrm>
+            <a:off x="594360" y="1804209"/>
+            <a:ext cx="1645920" cy="1234440"/>
+          </a:xfrm>
+          <a:prstGeom prst="rect">
+            <a:avLst/>
+          </a:prstGeom>
+        </p:spPr>
+      </p:pic>
+      <p:sp>
+        <p:nvSpPr>
+          <p:cNvPr id="8" name="Text 5"/>
+          <p:cNvSpPr txBox="1"/>
+          <p:nvPr/>
+        </p:nvSpPr>
+        <p:spPr>
+          <a:xfrm>
+            <a:off x="594360" y="3056937"/>
+            <a:ext cx="1645920" cy="182880"/>
+          </a:xfrm>
+          <a:prstGeom prst="rect">
+            <a:avLst/>
+          </a:prstGeom>
+          <a:noFill/>
+          <a:ln/>
+        </p:spPr>
+        <p:txBody>
+          <a:bodyPr wrap="square" lIns="0" tIns="0" rIns="0" bIns="0" rtlCol="0" anchor="ctr"/>
+          <a:lstStyle/>
+          <a:p>
+            <a:pPr algn="ctr" indent="0" marL="0">
+              <a:buNone/>
+            </a:pPr>
+            <a:r>
+              <a:rPr lang="en-US" sz="700" dirty="0">
+                <a:solidFill>
+                  <a:srgbClr val="5F7183"/>
+                </a:solidFill>
+                <a:latin typeface="Arial" pitchFamily="34" charset="0"/>
+                <a:ea typeface="Arial" pitchFamily="34" charset="-122"/>
+                <a:cs typeface="Arial" pitchFamily="34" charset="-120"/>
+              </a:rPr>
+              <a:t>nuScenes scene-0061（新加坡）</a:t>
+            </a:r>
+            <a:endParaRPr lang="en-US" sz="700" dirty="0"/>
+          </a:p>
+        </p:txBody>
+      </p:sp>
+      <p:sp>
+        <p:nvSpPr>
+          <p:cNvPr id="9" name="Shape 6"/>
+          <p:cNvSpPr/>
+          <p:nvPr/>
+        </p:nvSpPr>
+        <p:spPr>
+          <a:xfrm>
+            <a:off x="2606040" y="1310492"/>
+            <a:ext cx="1828800" cy="2039053"/>
+          </a:xfrm>
+          <a:prstGeom prst="roundRect">
+            <a:avLst>
+              <a:gd name="adj" fmla="val 5000"/>
+            </a:avLst>
+          </a:prstGeom>
+          <a:solidFill>
+            <a:srgbClr val="FFFFFF"/>
+          </a:solidFill>
+          <a:ln w="12700">
+            <a:solidFill>
+              <a:srgbClr val="DBE3EA"/>
+            </a:solidFill>
+            <a:prstDash val="solid"/>
+          </a:ln>
+        </p:spPr>
+      </p:sp>
+      <p:sp>
+        <p:nvSpPr>
+          <p:cNvPr id="10" name="Shape 7"/>
+          <p:cNvSpPr/>
+          <p:nvPr/>
+        </p:nvSpPr>
+        <p:spPr>
+          <a:xfrm>
+            <a:off x="2697480" y="1401932"/>
+            <a:ext cx="1645920" cy="347413"/>
+          </a:xfrm>
+          <a:prstGeom prst="roundRect">
+            <a:avLst>
+              <a:gd name="adj" fmla="val 13160"/>
+            </a:avLst>
+          </a:prstGeom>
+          <a:solidFill>
+            <a:srgbClr val="007F72"/>
+          </a:solidFill>
+          <a:ln/>
+        </p:spPr>
+      </p:sp>
+      <p:sp>
+        <p:nvSpPr>
+          <p:cNvPr id="11" name="Text 8"/>
+          <p:cNvSpPr txBox="1"/>
+          <p:nvPr/>
+        </p:nvSpPr>
+        <p:spPr>
+          <a:xfrm>
+            <a:off x="2770632" y="1429364"/>
+            <a:ext cx="1499616" cy="310837"/>
+          </a:xfrm>
+          <a:prstGeom prst="rect">
+            <a:avLst/>
+          </a:prstGeom>
+          <a:noFill/>
+          <a:ln/>
+        </p:spPr>
+        <p:txBody>
+          <a:bodyPr wrap="square" lIns="0" tIns="0" rIns="0" bIns="0" rtlCol="0" anchor="t"/>
+          <a:lstStyle/>
+          <a:p>
+            <a:pPr algn="ctr" indent="0" marL="0">
+              <a:lnSpc>
+                <a:spcPct val="104000"/>
+              </a:lnSpc>
+              <a:buNone/>
+            </a:pPr>
+            <a:r>
+              <a:rPr lang="en-US" sz="950" b="1" dirty="0">
+                <a:solidFill>
+                  <a:srgbClr val="FFFFFF"/>
+                </a:solidFill>
+                <a:latin typeface="Arial" pitchFamily="34" charset="0"/>
+                <a:ea typeface="Arial" pitchFamily="34" charset="-122"/>
+                <a:cs typeface="Arial" pitchFamily="34" charset="-120"/>
+              </a:rPr>
+              <a:t>17 m · 64 điểm</a:t>
+            </a:r>
+            <a:endParaRPr lang="en-US" sz="950" dirty="0"/>
+          </a:p>
+          <a:p>
+            <a:pPr algn="ctr" indent="0" marL="0">
+              <a:lnSpc>
+                <a:spcPct val="104000"/>
+              </a:lnSpc>
+              <a:buNone/>
+            </a:pPr>
+            <a:r>
+              <a:rPr lang="en-US" sz="850" dirty="0">
+                <a:solidFill>
+                  <a:srgbClr val="FFFFFF"/>
+                </a:solidFill>
+                <a:latin typeface="微軟正黑體" pitchFamily="34" charset="0"/>
+                <a:ea typeface="微軟正黑體" pitchFamily="34" charset="-122"/>
+                <a:cs typeface="微軟正黑體" pitchFamily="34" charset="-120"/>
+              </a:rPr>
+              <a:t>17 公尺・64 點</a:t>
+            </a:r>
+            <a:endParaRPr lang="en-US" sz="950" dirty="0"/>
+          </a:p>
+        </p:txBody>
+      </p:sp>
+      <p:pic>
+        <p:nvPicPr>
+          <p:cNvPr id="12" name="Image 1" descr="/Users/tsengchenghsun/Class/carClass/Claude outputs/第七週(10-22)/src/img/w7_far2.jpg">    </p:cNvPr>
+          <p:cNvPicPr>
+            <a:picLocks noChangeAspect="1"/>
+          </p:cNvPicPr>
+          <p:nvPr/>
+        </p:nvPicPr>
+        <p:blipFill>
+          <a:blip r:embed="rId2"/>
+          <a:stretch>
+            <a:fillRect/>
+          </a:stretch>
+        </p:blipFill>
+        <p:spPr>
+          <a:xfrm>
+            <a:off x="2697480" y="1804209"/>
+            <a:ext cx="1645920" cy="1234440"/>
+          </a:xfrm>
+          <a:prstGeom prst="rect">
+            <a:avLst/>
+          </a:prstGeom>
+        </p:spPr>
+      </p:pic>
+      <p:sp>
+        <p:nvSpPr>
+          <p:cNvPr id="13" name="Text 9"/>
+          <p:cNvSpPr txBox="1"/>
+          <p:nvPr/>
+        </p:nvSpPr>
+        <p:spPr>
+          <a:xfrm>
+            <a:off x="2697480" y="3056937"/>
+            <a:ext cx="1645920" cy="182880"/>
+          </a:xfrm>
+          <a:prstGeom prst="rect">
+            <a:avLst/>
+          </a:prstGeom>
+          <a:noFill/>
+          <a:ln/>
+        </p:spPr>
+        <p:txBody>
+          <a:bodyPr wrap="square" lIns="0" tIns="0" rIns="0" bIns="0" rtlCol="0" anchor="ctr"/>
+          <a:lstStyle/>
+          <a:p>
+            <a:pPr algn="ctr" indent="0" marL="0">
+              <a:buNone/>
+            </a:pPr>
+            <a:r>
+              <a:rPr lang="en-US" sz="700" dirty="0">
+                <a:solidFill>
+                  <a:srgbClr val="5F7183"/>
+                </a:solidFill>
+                <a:latin typeface="Arial" pitchFamily="34" charset="0"/>
+                <a:ea typeface="Arial" pitchFamily="34" charset="-122"/>
+                <a:cs typeface="Arial" pitchFamily="34" charset="-120"/>
+              </a:rPr>
+              <a:t>scene-0103（波士頓）</a:t>
+            </a:r>
+            <a:endParaRPr lang="en-US" sz="700" dirty="0"/>
+          </a:p>
+        </p:txBody>
+      </p:sp>
+      <p:sp>
+        <p:nvSpPr>
+          <p:cNvPr id="14" name="Shape 10"/>
+          <p:cNvSpPr/>
+          <p:nvPr/>
+        </p:nvSpPr>
+        <p:spPr>
+          <a:xfrm>
+            <a:off x="4709160" y="1310492"/>
+            <a:ext cx="1828800" cy="2039053"/>
+          </a:xfrm>
+          <a:prstGeom prst="roundRect">
+            <a:avLst>
+              <a:gd name="adj" fmla="val 5000"/>
+            </a:avLst>
+          </a:prstGeom>
+          <a:solidFill>
+            <a:srgbClr val="FFFFFF"/>
+          </a:solidFill>
+          <a:ln w="12700">
+            <a:solidFill>
+              <a:srgbClr val="DBE3EA"/>
+            </a:solidFill>
+            <a:prstDash val="solid"/>
+          </a:ln>
+        </p:spPr>
+      </p:sp>
+      <p:sp>
+        <p:nvSpPr>
+          <p:cNvPr id="15" name="Shape 11"/>
+          <p:cNvSpPr/>
+          <p:nvPr/>
+        </p:nvSpPr>
+        <p:spPr>
+          <a:xfrm>
+            <a:off x="4800600" y="1401932"/>
+            <a:ext cx="1645920" cy="347413"/>
+          </a:xfrm>
+          <a:prstGeom prst="roundRect">
+            <a:avLst>
+              <a:gd name="adj" fmla="val 13160"/>
+            </a:avLst>
+          </a:prstGeom>
+          <a:solidFill>
+            <a:srgbClr val="0B1F3A"/>
+          </a:solidFill>
+          <a:ln/>
+        </p:spPr>
+      </p:sp>
+      <p:sp>
+        <p:nvSpPr>
+          <p:cNvPr id="16" name="Text 12"/>
+          <p:cNvSpPr txBox="1"/>
+          <p:nvPr/>
+        </p:nvSpPr>
+        <p:spPr>
+          <a:xfrm>
+            <a:off x="4873752" y="1429364"/>
+            <a:ext cx="1499616" cy="310837"/>
+          </a:xfrm>
+          <a:prstGeom prst="rect">
+            <a:avLst/>
+          </a:prstGeom>
+          <a:noFill/>
+          <a:ln/>
+        </p:spPr>
+        <p:txBody>
+          <a:bodyPr wrap="square" lIns="0" tIns="0" rIns="0" bIns="0" rtlCol="0" anchor="t"/>
+          <a:lstStyle/>
+          <a:p>
+            <a:pPr algn="ctr" indent="0" marL="0">
+              <a:lnSpc>
+                <a:spcPct val="104000"/>
+              </a:lnSpc>
+              <a:buNone/>
+            </a:pPr>
+            <a:r>
+              <a:rPr lang="en-US" sz="950" b="1" dirty="0">
+                <a:solidFill>
+                  <a:srgbClr val="FFFFFF"/>
+                </a:solidFill>
+                <a:latin typeface="Arial" pitchFamily="34" charset="0"/>
+                <a:ea typeface="Arial" pitchFamily="34" charset="-122"/>
+                <a:cs typeface="Arial" pitchFamily="34" charset="-120"/>
+              </a:rPr>
+              <a:t>24 m · 12 điểm</a:t>
+            </a:r>
+            <a:endParaRPr lang="en-US" sz="950" dirty="0"/>
+          </a:p>
+          <a:p>
+            <a:pPr algn="ctr" indent="0" marL="0">
+              <a:lnSpc>
+                <a:spcPct val="104000"/>
+              </a:lnSpc>
+              <a:buNone/>
+            </a:pPr>
+            <a:r>
+              <a:rPr lang="en-US" sz="850" dirty="0">
+                <a:solidFill>
+                  <a:srgbClr val="FFFFFF"/>
+                </a:solidFill>
+                <a:latin typeface="微軟正黑體" pitchFamily="34" charset="0"/>
+                <a:ea typeface="微軟正黑體" pitchFamily="34" charset="-122"/>
+                <a:cs typeface="微軟正黑體" pitchFamily="34" charset="-120"/>
+              </a:rPr>
+              <a:t>24 公尺・12 點</a:t>
+            </a:r>
+            <a:endParaRPr lang="en-US" sz="950" dirty="0"/>
+          </a:p>
+        </p:txBody>
+      </p:sp>
+      <p:pic>
+        <p:nvPicPr>
+          <p:cNvPr id="17" name="Image 2" descr="/Users/tsengchenghsun/Class/carClass/Claude outputs/第七週(10-22)/src/img/w7_far3.jpg">    </p:cNvPr>
+          <p:cNvPicPr>
+            <a:picLocks noChangeAspect="1"/>
+          </p:cNvPicPr>
+          <p:nvPr/>
+        </p:nvPicPr>
+        <p:blipFill>
+          <a:blip r:embed="rId3"/>
+          <a:stretch>
+            <a:fillRect/>
+          </a:stretch>
+        </p:blipFill>
+        <p:spPr>
+          <a:xfrm>
+            <a:off x="4800600" y="1804209"/>
+            <a:ext cx="1645920" cy="1234440"/>
+          </a:xfrm>
+          <a:prstGeom prst="rect">
+            <a:avLst/>
+          </a:prstGeom>
+        </p:spPr>
+      </p:pic>
+      <p:sp>
+        <p:nvSpPr>
+          <p:cNvPr id="18" name="Text 13"/>
+          <p:cNvSpPr txBox="1"/>
+          <p:nvPr/>
+        </p:nvSpPr>
+        <p:spPr>
+          <a:xfrm>
+            <a:off x="4800600" y="3056937"/>
+            <a:ext cx="1645920" cy="182880"/>
+          </a:xfrm>
+          <a:prstGeom prst="rect">
+            <a:avLst/>
+          </a:prstGeom>
+          <a:noFill/>
+          <a:ln/>
+        </p:spPr>
+        <p:txBody>
+          <a:bodyPr wrap="square" lIns="0" tIns="0" rIns="0" bIns="0" rtlCol="0" anchor="ctr"/>
+          <a:lstStyle/>
+          <a:p>
+            <a:pPr algn="ctr" indent="0" marL="0">
+              <a:buNone/>
+            </a:pPr>
+            <a:r>
+              <a:rPr lang="en-US" sz="700" dirty="0">
+                <a:solidFill>
+                  <a:srgbClr val="5F7183"/>
+                </a:solidFill>
+                <a:latin typeface="Arial" pitchFamily="34" charset="0"/>
+                <a:ea typeface="Arial" pitchFamily="34" charset="-122"/>
+                <a:cs typeface="Arial" pitchFamily="34" charset="-120"/>
+              </a:rPr>
+              <a:t>scene-0103（波士頓）</a:t>
+            </a:r>
+            <a:endParaRPr lang="en-US" sz="700" dirty="0"/>
+          </a:p>
+        </p:txBody>
+      </p:sp>
+      <p:sp>
+        <p:nvSpPr>
+          <p:cNvPr id="19" name="Shape 14"/>
+          <p:cNvSpPr/>
+          <p:nvPr/>
+        </p:nvSpPr>
+        <p:spPr>
+          <a:xfrm>
+            <a:off x="6812280" y="1310492"/>
+            <a:ext cx="1828800" cy="2039053"/>
+          </a:xfrm>
+          <a:prstGeom prst="roundRect">
+            <a:avLst>
+              <a:gd name="adj" fmla="val 5000"/>
+            </a:avLst>
+          </a:prstGeom>
+          <a:solidFill>
+            <a:srgbClr val="FFFFFF"/>
+          </a:solidFill>
+          <a:ln w="12700">
+            <a:solidFill>
+              <a:srgbClr val="DBE3EA"/>
+            </a:solidFill>
+            <a:prstDash val="solid"/>
+          </a:ln>
+        </p:spPr>
+      </p:sp>
+      <p:sp>
+        <p:nvSpPr>
+          <p:cNvPr id="20" name="Shape 15"/>
+          <p:cNvSpPr/>
+          <p:nvPr/>
+        </p:nvSpPr>
+        <p:spPr>
+          <a:xfrm>
+            <a:off x="6903720" y="1401932"/>
+            <a:ext cx="1645920" cy="347413"/>
+          </a:xfrm>
+          <a:prstGeom prst="roundRect">
+            <a:avLst>
+              <a:gd name="adj" fmla="val 13160"/>
+            </a:avLst>
+          </a:prstGeom>
+          <a:solidFill>
+            <a:srgbClr val="0B1F3A"/>
+          </a:solidFill>
+          <a:ln/>
+        </p:spPr>
+      </p:sp>
+      <p:sp>
+        <p:nvSpPr>
+          <p:cNvPr id="21" name="Text 16"/>
+          <p:cNvSpPr txBox="1"/>
+          <p:nvPr/>
+        </p:nvSpPr>
+        <p:spPr>
+          <a:xfrm>
+            <a:off x="6976872" y="1429364"/>
+            <a:ext cx="1499616" cy="310837"/>
+          </a:xfrm>
+          <a:prstGeom prst="rect">
+            <a:avLst/>
+          </a:prstGeom>
+          <a:noFill/>
+          <a:ln/>
+        </p:spPr>
+        <p:txBody>
+          <a:bodyPr wrap="square" lIns="0" tIns="0" rIns="0" bIns="0" rtlCol="0" anchor="t"/>
+          <a:lstStyle/>
+          <a:p>
+            <a:pPr algn="ctr" indent="0" marL="0">
+              <a:lnSpc>
+                <a:spcPct val="104000"/>
+              </a:lnSpc>
+              <a:buNone/>
+            </a:pPr>
+            <a:r>
+              <a:rPr lang="en-US" sz="950" b="1" dirty="0">
+                <a:solidFill>
+                  <a:srgbClr val="FFFFFF"/>
+                </a:solidFill>
+                <a:latin typeface="Arial" pitchFamily="34" charset="0"/>
+                <a:ea typeface="Arial" pitchFamily="34" charset="-122"/>
+                <a:cs typeface="Arial" pitchFamily="34" charset="-120"/>
+              </a:rPr>
+              <a:t>41 m · 2 điểm</a:t>
+            </a:r>
+            <a:endParaRPr lang="en-US" sz="950" dirty="0"/>
+          </a:p>
+          <a:p>
+            <a:pPr algn="ctr" indent="0" marL="0">
+              <a:lnSpc>
+                <a:spcPct val="104000"/>
+              </a:lnSpc>
+              <a:buNone/>
+            </a:pPr>
+            <a:r>
+              <a:rPr lang="en-US" sz="850" dirty="0">
+                <a:solidFill>
+                  <a:srgbClr val="FFFFFF"/>
+                </a:solidFill>
+                <a:latin typeface="微軟正黑體" pitchFamily="34" charset="0"/>
+                <a:ea typeface="微軟正黑體" pitchFamily="34" charset="-122"/>
+                <a:cs typeface="微軟正黑體" pitchFamily="34" charset="-120"/>
+              </a:rPr>
+              <a:t>41 公尺・2 點</a:t>
+            </a:r>
+            <a:endParaRPr lang="en-US" sz="950" dirty="0"/>
+          </a:p>
+        </p:txBody>
+      </p:sp>
+      <p:pic>
+        <p:nvPicPr>
+          <p:cNvPr id="22" name="Image 3" descr="/Users/tsengchenghsun/Class/carClass/Claude outputs/第七週(10-22)/src/img/w7_far4.jpg">    </p:cNvPr>
+          <p:cNvPicPr>
+            <a:picLocks noChangeAspect="1"/>
+          </p:cNvPicPr>
+          <p:nvPr/>
+        </p:nvPicPr>
+        <p:blipFill>
+          <a:blip r:embed="rId4"/>
+          <a:stretch>
+            <a:fillRect/>
+          </a:stretch>
+        </p:blipFill>
+        <p:spPr>
+          <a:xfrm>
+            <a:off x="6903720" y="1804209"/>
+            <a:ext cx="1645920" cy="1234440"/>
+          </a:xfrm>
+          <a:prstGeom prst="rect">
+            <a:avLst/>
+          </a:prstGeom>
+        </p:spPr>
+      </p:pic>
+      <p:sp>
+        <p:nvSpPr>
+          <p:cNvPr id="23" name="Text 17"/>
+          <p:cNvSpPr txBox="1"/>
+          <p:nvPr/>
+        </p:nvSpPr>
+        <p:spPr>
+          <a:xfrm>
+            <a:off x="6903720" y="3056937"/>
+            <a:ext cx="1645920" cy="182880"/>
+          </a:xfrm>
+          <a:prstGeom prst="rect">
+            <a:avLst/>
+          </a:prstGeom>
+          <a:noFill/>
+          <a:ln/>
+        </p:spPr>
+        <p:txBody>
+          <a:bodyPr wrap="square" lIns="0" tIns="0" rIns="0" bIns="0" rtlCol="0" anchor="ctr"/>
+          <a:lstStyle/>
+          <a:p>
+            <a:pPr algn="ctr" indent="0" marL="0">
+              <a:buNone/>
+            </a:pPr>
+            <a:r>
+              <a:rPr lang="en-US" sz="700" dirty="0">
+                <a:solidFill>
+                  <a:srgbClr val="5F7183"/>
+                </a:solidFill>
+                <a:latin typeface="Arial" pitchFamily="34" charset="0"/>
+                <a:ea typeface="Arial" pitchFamily="34" charset="-122"/>
+                <a:cs typeface="Arial" pitchFamily="34" charset="-120"/>
+              </a:rPr>
+              <a:t>scene-0103 · CC BY-NC-SA 4.0</a:t>
+            </a:r>
+            <a:endParaRPr lang="en-US" sz="700" dirty="0"/>
+          </a:p>
+        </p:txBody>
+      </p:sp>
+      <p:sp>
+        <p:nvSpPr>
+          <p:cNvPr id="24" name="Shape 18"/>
+          <p:cNvSpPr/>
+          <p:nvPr/>
+        </p:nvSpPr>
+        <p:spPr>
+          <a:xfrm>
+            <a:off x="502920" y="3495849"/>
+            <a:ext cx="8138160" cy="566928"/>
+          </a:xfrm>
+          <a:prstGeom prst="roundRect">
+            <a:avLst>
+              <a:gd name="adj" fmla="val 14516"/>
+            </a:avLst>
+          </a:prstGeom>
+          <a:solidFill>
+            <a:srgbClr val="FFF6E3"/>
+          </a:solidFill>
+          <a:ln w="12700">
+            <a:solidFill>
+              <a:srgbClr val="FFB020"/>
+            </a:solidFill>
+            <a:prstDash val="solid"/>
+          </a:ln>
+        </p:spPr>
+      </p:sp>
+      <p:sp>
+        <p:nvSpPr>
+          <p:cNvPr id="25" name="Text 19"/>
+          <p:cNvSpPr txBox="1"/>
+          <p:nvPr/>
+        </p:nvSpPr>
+        <p:spPr>
+          <a:xfrm>
+            <a:off x="685800" y="3559857"/>
+            <a:ext cx="7772400" cy="457200"/>
+          </a:xfrm>
+          <a:prstGeom prst="rect">
+            <a:avLst/>
+          </a:prstGeom>
+          <a:noFill/>
+          <a:ln/>
+        </p:spPr>
+        <p:txBody>
+          <a:bodyPr wrap="square" lIns="0" tIns="0" rIns="0" bIns="0" rtlCol="0" anchor="t"/>
+          <a:lstStyle/>
+          <a:p>
+            <a:pPr indent="0" marL="0">
+              <a:lnSpc>
+                <a:spcPct val="116000"/>
+              </a:lnSpc>
+              <a:buNone/>
+            </a:pPr>
+            <a:r>
+              <a:rPr lang="en-US" sz="1200" b="1" dirty="0">
+                <a:solidFill>
+                  <a:srgbClr val="7A4E00"/>
+                </a:solidFill>
+                <a:latin typeface="Arial" pitchFamily="34" charset="0"/>
+                <a:ea typeface="Arial" pitchFamily="34" charset="-122"/>
+                <a:cs typeface="Arial" pitchFamily="34" charset="-120"/>
+              </a:rPr>
+              <a:t>Cắt và phóng to cho xe cỡ như nhau; chấm cam = điểm lidar trên thân xe.</a:t>
+            </a:r>
+            <a:endParaRPr lang="en-US" sz="1200" dirty="0"/>
+          </a:p>
+          <a:p>
+            <a:pPr indent="0" marL="0">
+              <a:lnSpc>
+                <a:spcPct val="116000"/>
+              </a:lnSpc>
+              <a:buNone/>
+            </a:pPr>
+            <a:r>
+              <a:rPr lang="en-US" sz="1100" dirty="0">
+                <a:solidFill>
+                  <a:srgbClr val="7A4E00"/>
+                </a:solidFill>
+                <a:latin typeface="微軟正黑體" pitchFamily="34" charset="0"/>
+                <a:ea typeface="微軟正黑體" pitchFamily="34" charset="-122"/>
+                <a:cs typeface="微軟正黑體" pitchFamily="34" charset="-120"/>
+              </a:rPr>
+              <a:t>每張都裁出來放大到車子差不多大；橘點＝打在車身上的光達點。</a:t>
+            </a:r>
+            <a:endParaRPr lang="en-US" sz="1200" dirty="0"/>
+          </a:p>
+        </p:txBody>
+      </p:sp>
+      <p:pic>
+        <p:nvPicPr>
+          <p:cNvPr id="27" name="Image 4" descr="/Users/tsengchenghsun/Class/carClass/Claude outputs/第七週(10-22)/src/logo.png">    </p:cNvPr>
+          <p:cNvPicPr>
+            <a:picLocks noChangeAspect="1"/>
+          </p:cNvPicPr>
+          <p:nvPr/>
+        </p:nvPicPr>
+        <p:blipFill>
+          <a:blip r:embed="rId5"/>
+          <a:stretch>
+            <a:fillRect/>
+          </a:stretch>
+        </p:blipFill>
+        <p:spPr>
+          <a:xfrm>
+            <a:off x="7882128" y="109728"/>
+            <a:ext cx="1097280" cy="242439"/>
+          </a:xfrm>
+          <a:prstGeom prst="rect">
+            <a:avLst/>
+          </a:prstGeom>
+        </p:spPr>
+      </p:pic>
+      <p:sp>
+        <p:nvSpPr>
+          <p:cNvPr id="28" name="Text 20"/>
+          <p:cNvSpPr txBox="1"/>
+          <p:nvPr/>
+        </p:nvSpPr>
+        <p:spPr>
+          <a:xfrm>
+            <a:off x="109728" y="128016"/>
+            <a:ext cx="822960" cy="256032"/>
+          </a:xfrm>
+          <a:prstGeom prst="rect">
+            <a:avLst/>
+          </a:prstGeom>
+          <a:noFill/>
+          <a:ln/>
+        </p:spPr>
+        <p:txBody>
+          <a:bodyPr wrap="square" lIns="0" tIns="0" rIns="0" bIns="0" rtlCol="0" anchor="ctr"/>
+          <a:lstStyle/>
+          <a:p>
+            <a:pPr indent="0" marL="0">
+              <a:buNone/>
+            </a:pPr>
+            <a:r>
+              <a:rPr lang="en-US" sz="900" dirty="0">
+                <a:solidFill>
+                  <a:srgbClr val="5F7183"/>
+                </a:solidFill>
+                <a:latin typeface="Arial" pitchFamily="34" charset="0"/>
+                <a:ea typeface="Arial" pitchFamily="34" charset="-122"/>
+                <a:cs typeface="Arial" pitchFamily="34" charset="-120"/>
+              </a:rPr>
+              <a:t>10 / 18</a:t>
+            </a:r>
+            <a:endParaRPr lang="en-US" sz="900" dirty="0"/>
+          </a:p>
+        </p:txBody>
+      </p:sp>
+      <p:sp>
+        <p:nvSpPr>
+          <p:cNvPr id="29" name="Text 21"/>
+          <p:cNvSpPr txBox="1"/>
+          <p:nvPr/>
+        </p:nvSpPr>
+        <p:spPr>
+          <a:xfrm>
+            <a:off x="960120" y="128016"/>
+            <a:ext cx="2011680" cy="256032"/>
+          </a:xfrm>
+          <a:prstGeom prst="rect">
+            <a:avLst/>
+          </a:prstGeom>
+          <a:noFill/>
+          <a:ln/>
+        </p:spPr>
+        <p:txBody>
+          <a:bodyPr wrap="square" lIns="0" tIns="0" rIns="0" bIns="0" rtlCol="0" anchor="ctr"/>
+          <a:lstStyle/>
+          <a:p>
+            <a:pPr indent="0" marL="0">
+              <a:buNone/>
+            </a:pPr>
+            <a:r>
+              <a:rPr lang="en-US" sz="900" dirty="0">
+                <a:solidFill>
+                  <a:srgbClr val="5F7183"/>
+                </a:solidFill>
+                <a:latin typeface="Arial" pitchFamily="34" charset="0"/>
+                <a:ea typeface="Arial" pitchFamily="34" charset="-122"/>
+                <a:cs typeface="Arial" pitchFamily="34" charset="-120"/>
+              </a:rPr>
+              <a:t>Tiết 1 · 第 1 節</a:t>
+            </a:r>
+            <a:endParaRPr lang="en-US" sz="900" dirty="0"/>
+          </a:p>
+        </p:txBody>
+      </p:sp>
+    </p:spTree>
+  </p:cSld>
+  <p:clrMapOvr>
+    <a:masterClrMapping/>
+  </p:clrMapOvr>
+</p:sld>
+</file>
+
+<file path=ppt/slides/slide11.xml><?xml version="1.0" encoding="utf-8"?>
+<p:sld xmlns:a="http://schemas.openxmlformats.org/drawingml/2006/main" xmlns:r="http://schemas.openxmlformats.org/officeDocument/2006/relationships" xmlns:p="http://schemas.openxmlformats.org/presentationml/2006/main">
+  <p:cSld name="Slide 11">
+    <p:spTree>
+      <p:nvGrpSpPr>
+        <p:cNvPr id="1" name=""/>
+        <p:cNvGrpSpPr/>
+        <p:nvPr/>
+      </p:nvGrpSpPr>
+      <p:grpSpPr>
+        <a:xfrm>
           <a:off x="206446" y="0"/>
           <a:ext cx="1" cy="1"/>
           <a:chOff x="0" y="0"/>
@@ -7302,7 +8679,7 @@
       </p:sp>
       <p:graphicFrame>
         <p:nvGraphicFramePr>
-          <p:cNvPr id="11" name="Table 0"/>
+          <p:cNvPr id="12" name="Table 0"/>
           <p:cNvGraphicFramePr>
             <a:graphicFrameLocks noGrp="1"/>
           </p:cNvGraphicFramePr>
@@ -9155,7 +10532,7 @@
                 <a:ea typeface="Arial" pitchFamily="34" charset="-122"/>
                 <a:cs typeface="Arial" pitchFamily="34" charset="-120"/>
               </a:rPr>
-              <a:t>10 / 17</a:t>
+              <a:t>11 / 18</a:t>
             </a:r>
             <a:endParaRPr lang="en-US" sz="860" dirty="0"/>
           </a:p>
@@ -9197,579 +10574,6 @@
               <a:t>Tiết 1 · 第 1 節</a:t>
             </a:r>
             <a:endParaRPr lang="en-US" sz="860" dirty="0"/>
-          </a:p>
-        </p:txBody>
-      </p:sp>
-    </p:spTree>
-  </p:cSld>
-  <p:clrMapOvr>
-    <a:masterClrMapping/>
-  </p:clrMapOvr>
-</p:sld>
-</file>
-
-<file path=ppt/slides/slide11.xml><?xml version="1.0" encoding="utf-8"?>
-<p:sld xmlns:a="http://schemas.openxmlformats.org/drawingml/2006/main" xmlns:r="http://schemas.openxmlformats.org/officeDocument/2006/relationships" xmlns:p="http://schemas.openxmlformats.org/presentationml/2006/main">
-  <p:cSld name="Slide 11">
-    <p:spTree>
-      <p:nvGrpSpPr>
-        <p:cNvPr id="1" name=""/>
-        <p:cNvGrpSpPr/>
-        <p:nvPr/>
-      </p:nvGrpSpPr>
-      <p:grpSpPr>
-        <a:xfrm>
-          <a:off x="0" y="0"/>
-          <a:ext cx="1" cy="1"/>
-          <a:chOff x="0" y="0"/>
-          <a:chExt cx="0" cy="0"/>
-        </a:xfrm>
-      </p:grpSpPr>
-      <p:sp>
-        <p:nvSpPr>
-          <p:cNvPr id="2" name="Text 0"/>
-          <p:cNvSpPr txBox="1"/>
-          <p:nvPr/>
-        </p:nvSpPr>
-        <p:spPr>
-          <a:xfrm>
-            <a:off x="502920" y="420624"/>
-            <a:ext cx="8138160" cy="274320"/>
-          </a:xfrm>
-          <a:prstGeom prst="rect">
-            <a:avLst/>
-          </a:prstGeom>
-          <a:noFill/>
-          <a:ln/>
-        </p:spPr>
-        <p:txBody>
-          <a:bodyPr wrap="square" lIns="0" tIns="0" rIns="0" bIns="0" rtlCol="0" anchor="ctr"/>
-          <a:lstStyle/>
-          <a:p>
-            <a:pPr indent="0" marL="0">
-              <a:buNone/>
-            </a:pPr>
-            <a:r>
-              <a:rPr lang="en-US" sz="1250" b="1" dirty="0">
-                <a:solidFill>
-                  <a:srgbClr val="007F72"/>
-                </a:solidFill>
-                <a:latin typeface="Arial" pitchFamily="34" charset="0"/>
-                <a:ea typeface="Arial" pitchFamily="34" charset="-122"/>
-                <a:cs typeface="Arial" pitchFamily="34" charset="-120"/>
-              </a:rPr>
-              <a:t>Bề mặt và địa hình · 會騙人的表面和地形</a:t>
-            </a:r>
-            <a:endParaRPr lang="en-US" sz="1250" dirty="0"/>
-          </a:p>
-        </p:txBody>
-      </p:sp>
-      <p:sp>
-        <p:nvSpPr>
-          <p:cNvPr id="3" name="Shape 1"/>
-          <p:cNvSpPr/>
-          <p:nvPr/>
-        </p:nvSpPr>
-        <p:spPr>
-          <a:xfrm>
-            <a:off x="502920" y="1101852"/>
-            <a:ext cx="3305556" cy="2514600"/>
-          </a:xfrm>
-          <a:prstGeom prst="roundRect">
-            <a:avLst>
-              <a:gd name="adj" fmla="val 4364"/>
-            </a:avLst>
-          </a:prstGeom>
-          <a:solidFill>
-            <a:srgbClr val="FFFFFF"/>
-          </a:solidFill>
-          <a:ln w="12700">
-            <a:solidFill>
-              <a:srgbClr val="DBE3EA"/>
-            </a:solidFill>
-            <a:prstDash val="solid"/>
-          </a:ln>
-        </p:spPr>
-      </p:sp>
-      <p:pic>
-        <p:nvPicPr>
-          <p:cNvPr id="4" name="Image 0" descr="/Users/tsengchenghsun/Class/carClass/Claude outputs/第七週(10-22)/src/img/w5_s12_mirror.gif">    </p:cNvPr>
-          <p:cNvPicPr>
-            <a:picLocks noChangeAspect="1"/>
-          </p:cNvPicPr>
-          <p:nvPr/>
-        </p:nvPicPr>
-        <p:blipFill>
-          <a:blip r:embed="rId1"/>
-          <a:stretch>
-            <a:fillRect/>
-          </a:stretch>
-        </p:blipFill>
-        <p:spPr>
-          <a:xfrm>
-            <a:off x="576072" y="1214628"/>
-            <a:ext cx="3159252" cy="2106168"/>
-          </a:xfrm>
-          <a:prstGeom prst="rect">
-            <a:avLst/>
-          </a:prstGeom>
-        </p:spPr>
-      </p:pic>
-      <p:sp>
-        <p:nvSpPr>
-          <p:cNvPr id="5" name="Text 2"/>
-          <p:cNvSpPr txBox="1"/>
-          <p:nvPr/>
-        </p:nvSpPr>
-        <p:spPr>
-          <a:xfrm>
-            <a:off x="576072" y="3396996"/>
-            <a:ext cx="3159252" cy="182880"/>
-          </a:xfrm>
-          <a:prstGeom prst="rect">
-            <a:avLst/>
-          </a:prstGeom>
-          <a:noFill/>
-          <a:ln/>
-        </p:spPr>
-        <p:txBody>
-          <a:bodyPr wrap="square" lIns="0" tIns="0" rIns="0" bIns="0" rtlCol="0" anchor="ctr"/>
-          <a:lstStyle/>
-          <a:p>
-            <a:pPr algn="ctr" indent="0" marL="0">
-              <a:buNone/>
-            </a:pPr>
-            <a:r>
-              <a:rPr lang="en-US" sz="700" dirty="0">
-                <a:solidFill>
-                  <a:srgbClr val="5F7183"/>
-                </a:solidFill>
-                <a:latin typeface="Arial" pitchFamily="34" charset="0"/>
-                <a:ea typeface="Arial" pitchFamily="34" charset="-122"/>
-                <a:cs typeface="Arial" pitchFamily="34" charset="-120"/>
-              </a:rPr>
-              <a:t>示意動畫：第五週第二節（課程自製）</a:t>
-            </a:r>
-            <a:endParaRPr lang="en-US" sz="700" dirty="0"/>
-          </a:p>
-        </p:txBody>
-      </p:sp>
-      <p:sp>
-        <p:nvSpPr>
-          <p:cNvPr id="6" name="Text 3"/>
-          <p:cNvSpPr txBox="1"/>
-          <p:nvPr/>
-        </p:nvSpPr>
-        <p:spPr>
-          <a:xfrm>
-            <a:off x="4119372" y="914400"/>
-            <a:ext cx="4521708" cy="2889504"/>
-          </a:xfrm>
-          <a:prstGeom prst="rect">
-            <a:avLst/>
-          </a:prstGeom>
-          <a:noFill/>
-          <a:ln/>
-        </p:spPr>
-        <p:txBody>
-          <a:bodyPr wrap="square" lIns="0" tIns="0" rIns="0" bIns="0" rtlCol="0" anchor="ctr"/>
-          <a:lstStyle/>
-          <a:p>
-            <a:pPr indent="0" marL="0">
-              <a:lnSpc>
-                <a:spcPct val="120000"/>
-              </a:lnSpc>
-              <a:buNone/>
-            </a:pPr>
-            <a:r>
-              <a:rPr lang="en-US" sz="2300" b="1" dirty="0">
-                <a:solidFill>
-                  <a:srgbClr val="0B1F3A"/>
-                </a:solidFill>
-                <a:latin typeface="Arial" pitchFamily="34" charset="0"/>
-                <a:ea typeface="Arial" pitchFamily="34" charset="-122"/>
-                <a:cs typeface="Arial" pitchFamily="34" charset="-120"/>
-              </a:rPr>
-              <a:t>Bề mặt và địa hình đánh lừa: lidar sợ gương, kính; GNSS sợ nhà cao phản xạ</a:t>
-            </a:r>
-            <a:endParaRPr lang="en-US" sz="2300" dirty="0"/>
-          </a:p>
-          <a:p>
-            <a:pPr indent="0" marL="0">
-              <a:lnSpc>
-                <a:spcPct val="120000"/>
-              </a:lnSpc>
-              <a:buNone/>
-            </a:pPr>
-            <a:r>
-              <a:rPr lang="en-US" sz="1400" b="1" dirty="0">
-                <a:solidFill>
-                  <a:srgbClr val="007F72"/>
-                </a:solidFill>
-                <a:latin typeface="微軟正黑體" pitchFamily="34" charset="0"/>
-                <a:ea typeface="微軟正黑體" pitchFamily="34" charset="-122"/>
-                <a:cs typeface="微軟正黑體" pitchFamily="34" charset="-120"/>
-              </a:rPr>
-              <a:t>會騙人的表面和地形：光達怕鏡面玻璃，衛星定位怕高樓反射</a:t>
-            </a:r>
-            <a:endParaRPr lang="en-US" sz="2300" dirty="0"/>
-          </a:p>
-          <a:p>
-            <a:pPr indent="0" marL="0">
-              <a:lnSpc>
-                <a:spcPct val="120000"/>
-              </a:lnSpc>
-              <a:spcBef>
-                <a:spcPts val="1440"/>
-              </a:spcBef>
-              <a:buNone/>
-            </a:pPr>
-            <a:r>
-              <a:rPr lang="en-US" sz="1250" dirty="0">
-                <a:solidFill>
-                  <a:srgbClr val="5F7183"/>
-                </a:solidFill>
-                <a:latin typeface="Arial" pitchFamily="34" charset="0"/>
-                <a:ea typeface="Arial" pitchFamily="34" charset="-122"/>
-                <a:cs typeface="Arial" pitchFamily="34" charset="-120"/>
-              </a:rPr>
-              <a:t>Lidar: kính hắt tia đi, gương tạo điểm ma (tuần 5). GNSS: tín hiệu dội tường, lệch vài chục mét mà không biết (tuần 6).</a:t>
-            </a:r>
-            <a:endParaRPr lang="en-US" sz="2300" dirty="0"/>
-          </a:p>
-          <a:p>
-            <a:pPr indent="0" marL="0">
-              <a:lnSpc>
-                <a:spcPct val="120000"/>
-              </a:lnSpc>
-              <a:buNone/>
-            </a:pPr>
-            <a:r>
-              <a:rPr lang="en-US" sz="1150" dirty="0">
-                <a:solidFill>
-                  <a:srgbClr val="5F7183"/>
-                </a:solidFill>
-                <a:latin typeface="微軟正黑體" pitchFamily="34" charset="0"/>
-                <a:ea typeface="微軟正黑體" pitchFamily="34" charset="-122"/>
-                <a:cs typeface="微軟正黑體" pitchFamily="34" charset="-120"/>
-              </a:rPr>
-              <a:t>光達：玻璃把光反射走，鏡面造出鬼點（第五週）。衛星定位：訊號從牆上反射，偏幾十公尺還不自知（第六週）。</a:t>
-            </a:r>
-            <a:endParaRPr lang="en-US" sz="2300" dirty="0"/>
-          </a:p>
-        </p:txBody>
-      </p:sp>
-      <p:sp>
-        <p:nvSpPr>
-          <p:cNvPr id="7" name="Shape 4"/>
-          <p:cNvSpPr/>
-          <p:nvPr/>
-        </p:nvSpPr>
-        <p:spPr>
-          <a:xfrm>
-            <a:off x="502920" y="3913632"/>
-            <a:ext cx="8138160" cy="621792"/>
-          </a:xfrm>
-          <a:prstGeom prst="roundRect">
-            <a:avLst>
-              <a:gd name="adj" fmla="val 13235"/>
-            </a:avLst>
-          </a:prstGeom>
-          <a:solidFill>
-            <a:srgbClr val="FFF6E3"/>
-          </a:solidFill>
-          <a:ln w="12700">
-            <a:solidFill>
-              <a:srgbClr val="FFB020"/>
-            </a:solidFill>
-            <a:prstDash val="solid"/>
-          </a:ln>
-        </p:spPr>
-      </p:sp>
-      <p:sp>
-        <p:nvSpPr>
-          <p:cNvPr id="8" name="Text 5"/>
-          <p:cNvSpPr txBox="1"/>
-          <p:nvPr/>
-        </p:nvSpPr>
-        <p:spPr>
-          <a:xfrm>
-            <a:off x="685800" y="3986784"/>
-            <a:ext cx="7772400" cy="493776"/>
-          </a:xfrm>
-          <a:prstGeom prst="rect">
-            <a:avLst/>
-          </a:prstGeom>
-          <a:noFill/>
-          <a:ln/>
-        </p:spPr>
-        <p:txBody>
-          <a:bodyPr wrap="square" lIns="0" tIns="0" rIns="0" bIns="0" rtlCol="0" anchor="t"/>
-          <a:lstStyle/>
-          <a:p>
-            <a:pPr indent="0" marL="0">
-              <a:lnSpc>
-                <a:spcPct val="116000"/>
-              </a:lnSpc>
-              <a:buNone/>
-            </a:pPr>
-            <a:r>
-              <a:rPr lang="en-US" sz="1250" b="1" dirty="0">
-                <a:solidFill>
-                  <a:srgbClr val="7A4E00"/>
-                </a:solidFill>
-                <a:latin typeface="Arial" pitchFamily="34" charset="0"/>
-                <a:ea typeface="Arial" pitchFamily="34" charset="-122"/>
-                <a:cs typeface="Arial" pitchFamily="34" charset="-120"/>
-              </a:rPr>
-              <a:t>Cả hai đều là kiểu 2: có trả lời, nhưng sai — và rất tự tin.</a:t>
-            </a:r>
-            <a:endParaRPr lang="en-US" sz="1250" dirty="0"/>
-          </a:p>
-          <a:p>
-            <a:pPr indent="0" marL="0">
-              <a:lnSpc>
-                <a:spcPct val="116000"/>
-              </a:lnSpc>
-              <a:buNone/>
-            </a:pPr>
-            <a:r>
-              <a:rPr lang="en-US" sz="1150" dirty="0">
-                <a:solidFill>
-                  <a:srgbClr val="7A4E00"/>
-                </a:solidFill>
-                <a:latin typeface="微軟正黑體" pitchFamily="34" charset="0"/>
-                <a:ea typeface="微軟正黑體" pitchFamily="34" charset="-122"/>
-                <a:cs typeface="微軟正黑體" pitchFamily="34" charset="-120"/>
-              </a:rPr>
-              <a:t>兩個都是第二種壞法：有答案，但是錯的，而且很有把握。</a:t>
-            </a:r>
-            <a:endParaRPr lang="en-US" sz="1250" dirty="0"/>
-          </a:p>
-        </p:txBody>
-      </p:sp>
-      <p:sp>
-        <p:nvSpPr>
-          <p:cNvPr id="9" name="Shape 6"/>
-          <p:cNvSpPr/>
-          <p:nvPr/>
-        </p:nvSpPr>
-        <p:spPr>
-          <a:xfrm>
-            <a:off x="5228050" y="365760"/>
-            <a:ext cx="3413030" cy="310896"/>
-          </a:xfrm>
-          <a:prstGeom prst="roundRect">
-            <a:avLst>
-              <a:gd name="adj" fmla="val 20588"/>
-            </a:avLst>
-          </a:prstGeom>
-          <a:solidFill>
-            <a:srgbClr val="EAF6F4"/>
-          </a:solidFill>
-          <a:ln w="9525">
-            <a:solidFill>
-              <a:srgbClr val="9FD6CE"/>
-            </a:solidFill>
-            <a:prstDash val="solid"/>
-          </a:ln>
-        </p:spPr>
-      </p:sp>
-      <p:sp>
-        <p:nvSpPr>
-          <p:cNvPr id="10" name="Text 7"/>
-          <p:cNvSpPr txBox="1"/>
-          <p:nvPr/>
-        </p:nvSpPr>
-        <p:spPr>
-          <a:xfrm>
-            <a:off x="5356066" y="384048"/>
-            <a:ext cx="3230150" cy="274320"/>
-          </a:xfrm>
-          <a:prstGeom prst="rect">
-            <a:avLst/>
-          </a:prstGeom>
-          <a:noFill/>
-          <a:ln/>
-        </p:spPr>
-        <p:txBody>
-          <a:bodyPr wrap="square" lIns="0" tIns="0" rIns="0" bIns="0" rtlCol="0" anchor="ctr"/>
-          <a:lstStyle/>
-          <a:p>
-            <a:pPr indent="0" marL="0">
-              <a:lnSpc>
-                <a:spcPct val="100000"/>
-              </a:lnSpc>
-              <a:buNone/>
-            </a:pPr>
-            <a:r>
-              <a:rPr lang="en-US" sz="950" b="1" dirty="0">
-                <a:solidFill>
-                  <a:srgbClr val="007F72"/>
-                </a:solidFill>
-                <a:latin typeface="Arial" pitchFamily="34" charset="0"/>
-                <a:ea typeface="Arial" pitchFamily="34" charset="-122"/>
-                <a:cs typeface="Arial" pitchFamily="34" charset="-120"/>
-              </a:rPr>
-              <a:t>Ví dụ · </a:t>
-            </a:r>
-            <a:pPr indent="0" marL="0">
-              <a:lnSpc>
-                <a:spcPct val="100000"/>
-              </a:lnSpc>
-              <a:buNone/>
-            </a:pPr>
-            <a:r>
-              <a:rPr lang="en-US" sz="950" dirty="0">
-                <a:solidFill>
-                  <a:srgbClr val="1A2733"/>
-                </a:solidFill>
-                <a:latin typeface="Arial" pitchFamily="34" charset="0"/>
-                <a:ea typeface="Arial" pitchFamily="34" charset="-122"/>
-                <a:cs typeface="Arial" pitchFamily="34" charset="-120"/>
-              </a:rPr>
-              <a:t>nhìn người trong gương, tưởng họ đứng sau gương</a:t>
-            </a:r>
-            <a:endParaRPr lang="en-US" sz="950" dirty="0"/>
-          </a:p>
-          <a:p>
-            <a:pPr indent="0" marL="0">
-              <a:lnSpc>
-                <a:spcPct val="100000"/>
-              </a:lnSpc>
-              <a:buNone/>
-            </a:pPr>
-            <a:r>
-              <a:rPr lang="en-US" sz="900" b="1" dirty="0">
-                <a:solidFill>
-                  <a:srgbClr val="007F72"/>
-                </a:solidFill>
-                <a:latin typeface="微軟正黑體" pitchFamily="34" charset="0"/>
-                <a:ea typeface="微軟正黑體" pitchFamily="34" charset="-122"/>
-                <a:cs typeface="微軟正黑體" pitchFamily="34" charset="-120"/>
-              </a:rPr>
-              <a:t>例子・</a:t>
-            </a:r>
-            <a:pPr indent="0" marL="0">
-              <a:lnSpc>
-                <a:spcPct val="100000"/>
-              </a:lnSpc>
-              <a:buNone/>
-            </a:pPr>
-            <a:r>
-              <a:rPr lang="en-US" sz="900" dirty="0">
-                <a:solidFill>
-                  <a:srgbClr val="5F7183"/>
-                </a:solidFill>
-                <a:latin typeface="微軟正黑體" pitchFamily="34" charset="0"/>
-                <a:ea typeface="微軟正黑體" pitchFamily="34" charset="-122"/>
-                <a:cs typeface="微軟正黑體" pitchFamily="34" charset="-120"/>
-              </a:rPr>
-              <a:t>看鏡子裡的人，以為他在鏡子後面</a:t>
-            </a:r>
-            <a:endParaRPr lang="en-US" sz="950" dirty="0"/>
-          </a:p>
-        </p:txBody>
-      </p:sp>
-      <p:pic>
-        <p:nvPicPr>
-          <p:cNvPr id="12" name="Image 1" descr="/Users/tsengchenghsun/Class/carClass/Claude outputs/第七週(10-22)/src/logo.png">    </p:cNvPr>
-          <p:cNvPicPr>
-            <a:picLocks noChangeAspect="1"/>
-          </p:cNvPicPr>
-          <p:nvPr/>
-        </p:nvPicPr>
-        <p:blipFill>
-          <a:blip r:embed="rId2"/>
-          <a:stretch>
-            <a:fillRect/>
-          </a:stretch>
-        </p:blipFill>
-        <p:spPr>
-          <a:xfrm>
-            <a:off x="7882128" y="109728"/>
-            <a:ext cx="1097280" cy="242439"/>
-          </a:xfrm>
-          <a:prstGeom prst="rect">
-            <a:avLst/>
-          </a:prstGeom>
-        </p:spPr>
-      </p:pic>
-      <p:sp>
-        <p:nvSpPr>
-          <p:cNvPr id="13" name="Text 8"/>
-          <p:cNvSpPr txBox="1"/>
-          <p:nvPr/>
-        </p:nvSpPr>
-        <p:spPr>
-          <a:xfrm>
-            <a:off x="109728" y="128016"/>
-            <a:ext cx="822960" cy="256032"/>
-          </a:xfrm>
-          <a:prstGeom prst="rect">
-            <a:avLst/>
-          </a:prstGeom>
-          <a:noFill/>
-          <a:ln/>
-        </p:spPr>
-        <p:txBody>
-          <a:bodyPr wrap="square" lIns="0" tIns="0" rIns="0" bIns="0" rtlCol="0" anchor="ctr"/>
-          <a:lstStyle/>
-          <a:p>
-            <a:pPr indent="0" marL="0">
-              <a:buNone/>
-            </a:pPr>
-            <a:r>
-              <a:rPr lang="en-US" sz="900" dirty="0">
-                <a:solidFill>
-                  <a:srgbClr val="5F7183"/>
-                </a:solidFill>
-                <a:latin typeface="Arial" pitchFamily="34" charset="0"/>
-                <a:ea typeface="Arial" pitchFamily="34" charset="-122"/>
-                <a:cs typeface="Arial" pitchFamily="34" charset="-120"/>
-              </a:rPr>
-              <a:t>11 / 17</a:t>
-            </a:r>
-            <a:endParaRPr lang="en-US" sz="900" dirty="0"/>
-          </a:p>
-        </p:txBody>
-      </p:sp>
-      <p:sp>
-        <p:nvSpPr>
-          <p:cNvPr id="14" name="Text 9"/>
-          <p:cNvSpPr txBox="1"/>
-          <p:nvPr/>
-        </p:nvSpPr>
-        <p:spPr>
-          <a:xfrm>
-            <a:off x="960120" y="128016"/>
-            <a:ext cx="2011680" cy="256032"/>
-          </a:xfrm>
-          <a:prstGeom prst="rect">
-            <a:avLst/>
-          </a:prstGeom>
-          <a:noFill/>
-          <a:ln/>
-        </p:spPr>
-        <p:txBody>
-          <a:bodyPr wrap="square" lIns="0" tIns="0" rIns="0" bIns="0" rtlCol="0" anchor="ctr"/>
-          <a:lstStyle/>
-          <a:p>
-            <a:pPr indent="0" marL="0">
-              <a:buNone/>
-            </a:pPr>
-            <a:r>
-              <a:rPr lang="en-US" sz="900" dirty="0">
-                <a:solidFill>
-                  <a:srgbClr val="5F7183"/>
-                </a:solidFill>
-                <a:latin typeface="Arial" pitchFamily="34" charset="0"/>
-                <a:ea typeface="Arial" pitchFamily="34" charset="-122"/>
-                <a:cs typeface="Arial" pitchFamily="34" charset="-120"/>
-              </a:rPr>
-              <a:t>Tiết 1 · 第 1 節</a:t>
-            </a:r>
-            <a:endParaRPr lang="en-US" sz="900" dirty="0"/>
           </a:p>
         </p:txBody>
       </p:sp>
@@ -9831,7 +10635,7 @@
                 <a:ea typeface="Arial" pitchFamily="34" charset="-122"/>
                 <a:cs typeface="Arial" pitchFamily="34" charset="-120"/>
               </a:rPr>
-              <a:t>Bị che, bị bẩn · 被蓋住、弄髒</a:t>
+              <a:t>Bề mặt và địa hình · 會騙人的表面和地形</a:t>
             </a:r>
             <a:endParaRPr lang="en-US" sz="1250" dirty="0"/>
           </a:p>
@@ -9845,16 +10649,16 @@
         </p:nvSpPr>
         <p:spPr>
           <a:xfrm>
-            <a:off x="502920" y="937260"/>
-            <a:ext cx="2468880" cy="2514600"/>
+            <a:off x="502920" y="1101852"/>
+            <a:ext cx="3305556" cy="2514600"/>
           </a:xfrm>
           <a:prstGeom prst="roundRect">
             <a:avLst>
-              <a:gd name="adj" fmla="val 4444"/>
+              <a:gd name="adj" fmla="val 4364"/>
             </a:avLst>
           </a:prstGeom>
           <a:solidFill>
-            <a:srgbClr val="F4F7FA"/>
+            <a:srgbClr val="FFFFFF"/>
           </a:solidFill>
           <a:ln w="12700">
             <a:solidFill>
@@ -9864,105 +10668,79 @@
           </a:ln>
         </p:spPr>
       </p:sp>
-      <p:sp>
-        <p:nvSpPr>
-          <p:cNvPr id="4" name="Shape 2"/>
-          <p:cNvSpPr/>
-          <p:nvPr/>
-        </p:nvSpPr>
-        <p:spPr>
-          <a:xfrm>
-            <a:off x="1085393" y="1882750"/>
-            <a:ext cx="1303934" cy="623621"/>
-          </a:xfrm>
-          <a:prstGeom prst="ellipse">
+      <p:pic>
+        <p:nvPicPr>
+          <p:cNvPr id="4" name="Image 0" descr="/Users/tsengchenghsun/Class/carClass/Claude outputs/第七週(10-22)/src/img/w5_s12_mirror.gif">    </p:cNvPr>
+          <p:cNvPicPr>
+            <a:picLocks noChangeAspect="1"/>
+          </p:cNvPicPr>
+          <p:nvPr/>
+        </p:nvPicPr>
+        <p:blipFill>
+          <a:blip r:embed="rId1"/>
+          <a:stretch>
+            <a:fillRect/>
+          </a:stretch>
+        </p:blipFill>
+        <p:spPr>
+          <a:xfrm>
+            <a:off x="576072" y="1214628"/>
+            <a:ext cx="3159252" cy="2106168"/>
+          </a:xfrm>
+          <a:prstGeom prst="rect">
             <a:avLst/>
           </a:prstGeom>
-          <a:solidFill>
-            <a:srgbClr val="1F6F5C">
-              <a:alpha val="28000"/>
-            </a:srgbClr>
-          </a:solidFill>
+        </p:spPr>
+      </p:pic>
+      <p:sp>
+        <p:nvSpPr>
+          <p:cNvPr id="5" name="Text 2"/>
+          <p:cNvSpPr txBox="1"/>
+          <p:nvPr/>
+        </p:nvSpPr>
+        <p:spPr>
+          <a:xfrm>
+            <a:off x="576072" y="3396996"/>
+            <a:ext cx="3159252" cy="182880"/>
+          </a:xfrm>
+          <a:prstGeom prst="rect">
+            <a:avLst/>
+          </a:prstGeom>
+          <a:noFill/>
           <a:ln/>
         </p:spPr>
-      </p:sp>
-      <p:sp>
-        <p:nvSpPr>
-          <p:cNvPr id="5" name="Shape 3"/>
-          <p:cNvSpPr/>
-          <p:nvPr/>
-        </p:nvSpPr>
-        <p:spPr>
-          <a:xfrm>
-            <a:off x="1085393" y="1882750"/>
-            <a:ext cx="1303934" cy="623621"/>
-          </a:xfrm>
-          <a:prstGeom prst="ellipse">
-            <a:avLst/>
-          </a:prstGeom>
-          <a:solidFill>
-            <a:srgbClr val="FFFFFF">
-              <a:alpha val="0"/>
-            </a:srgbClr>
-          </a:solidFill>
-          <a:ln w="31750">
-            <a:solidFill>
-              <a:srgbClr val="1F6F5C"/>
-            </a:solidFill>
-            <a:prstDash val="solid"/>
-          </a:ln>
-        </p:spPr>
-      </p:sp>
-      <p:sp>
-        <p:nvSpPr>
-          <p:cNvPr id="6" name="Shape 4"/>
-          <p:cNvSpPr/>
-          <p:nvPr/>
-        </p:nvSpPr>
-        <p:spPr>
-          <a:xfrm>
-            <a:off x="1538935" y="1953616"/>
-            <a:ext cx="396850" cy="481889"/>
-          </a:xfrm>
-          <a:prstGeom prst="ellipse">
-            <a:avLst/>
-          </a:prstGeom>
-          <a:solidFill>
-            <a:srgbClr val="1F6F5C"/>
-          </a:solidFill>
-          <a:ln/>
-        </p:spPr>
-      </p:sp>
-      <p:sp>
-        <p:nvSpPr>
-          <p:cNvPr id="7" name="Shape 5"/>
-          <p:cNvSpPr/>
-          <p:nvPr/>
-        </p:nvSpPr>
-        <p:spPr>
-          <a:xfrm>
-            <a:off x="1652321" y="2067001"/>
-            <a:ext cx="170078" cy="226771"/>
-          </a:xfrm>
-          <a:prstGeom prst="ellipse">
-            <a:avLst/>
-          </a:prstGeom>
-          <a:solidFill>
-            <a:srgbClr val="FFFFFF"/>
-          </a:solidFill>
-          <a:ln/>
-        </p:spPr>
-      </p:sp>
-      <p:sp>
-        <p:nvSpPr>
-          <p:cNvPr id="8" name="Text 6"/>
+        <p:txBody>
+          <a:bodyPr wrap="square" lIns="0" tIns="0" rIns="0" bIns="0" rtlCol="0" anchor="ctr"/>
+          <a:lstStyle/>
+          <a:p>
+            <a:pPr algn="ctr" indent="0" marL="0">
+              <a:buNone/>
+            </a:pPr>
+            <a:r>
+              <a:rPr lang="en-US" sz="700" dirty="0">
+                <a:solidFill>
+                  <a:srgbClr val="5F7183"/>
+                </a:solidFill>
+                <a:latin typeface="Arial" pitchFamily="34" charset="0"/>
+                <a:ea typeface="Arial" pitchFamily="34" charset="-122"/>
+                <a:cs typeface="Arial" pitchFamily="34" charset="-120"/>
+              </a:rPr>
+              <a:t>示意動畫：第五週第二節（課程自製）</a:t>
+            </a:r>
+            <a:endParaRPr lang="en-US" sz="700" dirty="0"/>
+          </a:p>
+        </p:txBody>
+      </p:sp>
+      <p:sp>
+        <p:nvSpPr>
+          <p:cNvPr id="6" name="Text 3"/>
           <p:cNvSpPr txBox="1"/>
           <p:nvPr/>
         </p:nvSpPr>
         <p:spPr>
           <a:xfrm>
-            <a:off x="3429000" y="914400"/>
-            <a:ext cx="5212080" cy="2560320"/>
+            <a:off x="4119372" y="914400"/>
+            <a:ext cx="4521708" cy="2889504"/>
           </a:xfrm>
           <a:prstGeom prst="rect">
             <a:avLst/>
@@ -9981,7 +10759,7 @@
               <a:buNone/>
             </a:pPr>
             <a:r>
-              <a:rPr lang="en-US" sz="2000" b="1" dirty="0">
+              <a:rPr lang="en-US" sz="2300" b="1" dirty="0">
                 <a:solidFill>
                   <a:srgbClr val="0B1F3A"/>
                 </a:solidFill>
@@ -9989,9 +10767,9 @@
                 <a:ea typeface="Arial" pitchFamily="34" charset="-122"/>
                 <a:cs typeface="Arial" pitchFamily="34" charset="-120"/>
               </a:rPr>
-              <a:t>Bị bẩn, bị che: mọi cảm biến nhìn ra ngoài đều sợ — loại cho ô tô phải tự phát hiện và tự làm sạch</a:t>
-            </a:r>
-            <a:endParaRPr lang="en-US" sz="2000" dirty="0"/>
+              <a:t>Bề mặt và địa hình đánh lừa: lidar sợ gương, kính; GNSS sợ nhà cao phản xạ</a:t>
+            </a:r>
+            <a:endParaRPr lang="en-US" sz="2300" dirty="0"/>
           </a:p>
           <a:p>
             <a:pPr indent="0" marL="0">
@@ -10009,9 +10787,9 @@
                 <a:ea typeface="微軟正黑體" pitchFamily="34" charset="-122"/>
                 <a:cs typeface="微軟正黑體" pitchFamily="34" charset="-120"/>
               </a:rPr>
-              <a:t>髒了、被蓋住：每一種往外看的感測器都怕——車用的要會自己發現、自己清</a:t>
-            </a:r>
-            <a:endParaRPr lang="en-US" sz="2000" dirty="0"/>
+              <a:t>會騙人的表面和地形：光達怕鏡面玻璃，衛星定位怕高樓反射</a:t>
+            </a:r>
+            <a:endParaRPr lang="en-US" sz="2300" dirty="0"/>
           </a:p>
           <a:p>
             <a:pPr indent="0" marL="0">
@@ -10032,9 +10810,9 @@
                 <a:ea typeface="Arial" pitchFamily="34" charset="-122"/>
                 <a:cs typeface="Arial" pitchFamily="34" charset="-120"/>
               </a:rPr>
-              <a:t>Bùn, tuyết, muối, côn trùng, giọt mưa. Bosch USS có Blindness detection (tuần 6).</a:t>
-            </a:r>
-            <a:endParaRPr lang="en-US" sz="2000" dirty="0"/>
+              <a:t>Lidar: kính hắt tia đi, gương tạo điểm ma (tuần 5). GNSS: tín hiệu dội tường, lệch vài chục mét mà không biết (tuần 6).</a:t>
+            </a:r>
+            <a:endParaRPr lang="en-US" sz="2300" dirty="0"/>
           </a:p>
           <a:p>
             <a:pPr indent="0" marL="0">
@@ -10052,171 +10830,15 @@
                 <a:ea typeface="微軟正黑體" pitchFamily="34" charset="-122"/>
                 <a:cs typeface="微軟正黑體" pitchFamily="34" charset="-120"/>
               </a:rPr>
-              <a:t>泥巴、雪、鹽、昆蟲、雨滴。Bosch 超音波有 Blindness detection（第六週）。</a:t>
-            </a:r>
-            <a:endParaRPr lang="en-US" sz="2000" dirty="0"/>
+              <a:t>光達：玻璃把光反射走，鏡面造出鬼點（第五週）。衛星定位：訊號從牆上反射，偏幾十公尺還不自知（第六週）。</a:t>
+            </a:r>
+            <a:endParaRPr lang="en-US" sz="2300" dirty="0"/>
           </a:p>
         </p:txBody>
       </p:sp>
       <p:sp>
         <p:nvSpPr>
-          <p:cNvPr id="9" name="Shape 7"/>
-          <p:cNvSpPr/>
-          <p:nvPr/>
-        </p:nvSpPr>
-        <p:spPr>
-          <a:xfrm>
-            <a:off x="539496" y="3557016"/>
-            <a:ext cx="219456" cy="219456"/>
-          </a:xfrm>
-          <a:prstGeom prst="ellipse">
-            <a:avLst/>
-          </a:prstGeom>
-          <a:solidFill>
-            <a:srgbClr val="D9463E"/>
-          </a:solidFill>
-          <a:ln/>
-        </p:spPr>
-      </p:sp>
-      <p:sp>
-        <p:nvSpPr>
-          <p:cNvPr id="10" name="Text 8"/>
-          <p:cNvSpPr txBox="1"/>
-          <p:nvPr/>
-        </p:nvSpPr>
-        <p:spPr>
-          <a:xfrm>
-            <a:off x="539496" y="3584448"/>
-            <a:ext cx="219456" cy="164592"/>
-          </a:xfrm>
-          <a:prstGeom prst="rect">
-            <a:avLst/>
-          </a:prstGeom>
-          <a:noFill/>
-          <a:ln/>
-        </p:spPr>
-        <p:txBody>
-          <a:bodyPr wrap="square" lIns="0" tIns="0" rIns="0" bIns="0" rtlCol="0" anchor="ctr"/>
-          <a:lstStyle/>
-          <a:p>
-            <a:pPr algn="ctr" indent="0" marL="0">
-              <a:buNone/>
-            </a:pPr>
-            <a:r>
-              <a:rPr lang="en-US" sz="750" b="1" dirty="0">
-                <a:solidFill>
-                  <a:srgbClr val="FFFFFF"/>
-                </a:solidFill>
-                <a:latin typeface="Arial" pitchFamily="34" charset="0"/>
-                <a:ea typeface="Arial" pitchFamily="34" charset="-122"/>
-                <a:cs typeface="Arial" pitchFamily="34" charset="-120"/>
-              </a:rPr>
-              <a:t>▶</a:t>
-            </a:r>
-            <a:endParaRPr lang="en-US" sz="750" dirty="0"/>
-          </a:p>
-        </p:txBody>
-      </p:sp>
-      <p:sp>
-        <p:nvSpPr>
-          <p:cNvPr id="11" name="Text 9"/>
-          <p:cNvSpPr txBox="1"/>
-          <p:nvPr/>
-        </p:nvSpPr>
-        <p:spPr>
-          <a:xfrm>
-            <a:off x="832104" y="3529584"/>
-            <a:ext cx="7808976" cy="274320"/>
-          </a:xfrm>
-          <a:prstGeom prst="rect">
-            <a:avLst/>
-          </a:prstGeom>
-          <a:noFill/>
-          <a:ln/>
-        </p:spPr>
-        <p:txBody>
-          <a:bodyPr wrap="square" lIns="0" tIns="0" rIns="0" bIns="0" rtlCol="0" anchor="ctr"/>
-          <a:lstStyle/>
-          <a:p>
-            <a:pPr indent="0" marL="0">
-              <a:lnSpc>
-                <a:spcPct val="100000"/>
-              </a:lnSpc>
-              <a:buNone/>
-            </a:pPr>
-            <a:r>
-              <a:rPr lang="en-US" sz="900" b="1" u="sng" dirty="0">
-                <a:solidFill>
-                  <a:srgbClr val="0B1F3A"/>
-                </a:solidFill>
-                <a:latin typeface="Arial" pitchFamily="34" charset="0"/>
-                <a:ea typeface="Arial" pitchFamily="34" charset="-122"/>
-                <a:cs typeface="Arial" pitchFamily="34" charset="-120"/>
-                <a:hlinkClick r:id="rId1" invalidUrl="" action="" tgtFrame="" tooltip="" history="1" highlightClick="0" endSnd="0">
-                  <a:extLst>
-                    <a:ext uri="{A12FA001-AC4F-418D-AE19-62706E023703}">
-                      <ahyp:hlinkClr xmlns:ahyp="http://schemas.microsoft.com/office/drawing/2018/hyperlinkcolor" val="tx"/>
-                    </a:ext>
-                  </a:extLst>
-                </a:hlinkClick>
-              </a:rPr>
-              <a:t>Video: vì sao cảm biến phải được làm sạch (Valeo) · </a:t>
-            </a:r>
-            <a:pPr indent="0" marL="0">
-              <a:lnSpc>
-                <a:spcPct val="100000"/>
-              </a:lnSpc>
-              <a:buNone/>
-            </a:pPr>
-            <a:r>
-              <a:rPr lang="en-US" sz="900" b="1" u="sng" dirty="0">
-                <a:solidFill>
-                  <a:srgbClr val="0B1F3A"/>
-                </a:solidFill>
-                <a:latin typeface="微軟正黑體" pitchFamily="34" charset="0"/>
-                <a:ea typeface="微軟正黑體" pitchFamily="34" charset="-122"/>
-                <a:cs typeface="微軟正黑體" pitchFamily="34" charset="-120"/>
-                <a:hlinkClick r:id="rId1" invalidUrl="" action="" tgtFrame="" tooltip="" history="1" highlightClick="0" endSnd="0">
-                  <a:extLst>
-                    <a:ext uri="{A12FA001-AC4F-418D-AE19-62706E023703}">
-                      <ahyp:hlinkClr xmlns:ahyp="http://schemas.microsoft.com/office/drawing/2018/hyperlinkcolor" val="tx"/>
-                    </a:ext>
-                  </a:extLst>
-                </a:hlinkClick>
-              </a:rPr>
-              <a:t>影片：感測器為什麼要清潔（Valeo）　1:29　</a:t>
-            </a:r>
-            <a:pPr indent="0" marL="0">
-              <a:lnSpc>
-                <a:spcPct val="100000"/>
-              </a:lnSpc>
-              <a:buNone/>
-            </a:pPr>
-            <a:r>
-              <a:rPr lang="en-US" sz="900" u="sng" dirty="0">
-                <a:solidFill>
-                  <a:srgbClr val="1F6FBF"/>
-                </a:solidFill>
-                <a:latin typeface="Arial" pitchFamily="34" charset="0"/>
-                <a:ea typeface="Arial" pitchFamily="34" charset="-122"/>
-                <a:cs typeface="Arial" pitchFamily="34" charset="-120"/>
-                <a:hlinkClick r:id="rId1" invalidUrl="" action="" tgtFrame="" tooltip="" history="1" highlightClick="0" endSnd="0">
-                  <a:extLst>
-                    <a:ext uri="{A12FA001-AC4F-418D-AE19-62706E023703}">
-                      <ahyp:hlinkClr xmlns:ahyp="http://schemas.microsoft.com/office/drawing/2018/hyperlinkcolor" val="tx"/>
-                    </a:ext>
-                  </a:extLst>
-                </a:hlinkClick>
-              </a:rPr>
-              <a:t>youtu.be/vhjFmzcD-iQ</a:t>
-            </a:r>
-            <a:endParaRPr lang="en-US" sz="900" dirty="0"/>
-          </a:p>
-        </p:txBody>
-      </p:sp>
-      <p:sp>
-        <p:nvSpPr>
-          <p:cNvPr id="12" name="Shape 10"/>
+          <p:cNvPr id="7" name="Shape 4"/>
           <p:cNvSpPr/>
           <p:nvPr/>
         </p:nvSpPr>
@@ -10243,7 +10865,7 @@
       </p:sp>
       <p:sp>
         <p:nvSpPr>
-          <p:cNvPr id="13" name="Text 11"/>
+          <p:cNvPr id="8" name="Text 5"/>
           <p:cNvSpPr txBox="1"/>
           <p:nvPr/>
         </p:nvSpPr>
@@ -10277,7 +10899,7 @@
                 <a:ea typeface="Arial" pitchFamily="34" charset="-122"/>
                 <a:cs typeface="Arial" pitchFamily="34" charset="-120"/>
               </a:rPr>
-              <a:t>Phát hiện mình bị che là biến kiểu 3 thành kiểu 1.</a:t>
+              <a:t>Cả hai đều là kiểu 2: có trả lời, nhưng sai — và rất tự tin.</a:t>
             </a:r>
             <a:endParaRPr lang="en-US" sz="1250" dirty="0"/>
           </a:p>
@@ -10297,7 +10919,7 @@
                 <a:ea typeface="微軟正黑體" pitchFamily="34" charset="-122"/>
                 <a:cs typeface="微軟正黑體" pitchFamily="34" charset="-120"/>
               </a:rPr>
-              <a:t>會發現自己被蓋住，就把第三種壞法變成第一種。</a:t>
+              <a:t>兩個都是第二種壞法：有答案，但是錯的，而且很有把握。</a:t>
             </a:r>
             <a:endParaRPr lang="en-US" sz="1250" dirty="0"/>
           </a:p>
@@ -10305,14 +10927,14 @@
       </p:sp>
       <p:sp>
         <p:nvSpPr>
-          <p:cNvPr id="14" name="Shape 12"/>
+          <p:cNvPr id="9" name="Shape 6"/>
           <p:cNvSpPr/>
           <p:nvPr/>
         </p:nvSpPr>
         <p:spPr>
           <a:xfrm>
-            <a:off x="6825939" y="365760"/>
-            <a:ext cx="1815141" cy="310896"/>
+            <a:off x="5228050" y="365760"/>
+            <a:ext cx="3413030" cy="310896"/>
           </a:xfrm>
           <a:prstGeom prst="roundRect">
             <a:avLst>
@@ -10332,14 +10954,14 @@
       </p:sp>
       <p:sp>
         <p:nvSpPr>
-          <p:cNvPr id="15" name="Text 13"/>
+          <p:cNvPr id="10" name="Text 7"/>
           <p:cNvSpPr txBox="1"/>
           <p:nvPr/>
         </p:nvSpPr>
         <p:spPr>
           <a:xfrm>
-            <a:off x="6953955" y="384048"/>
-            <a:ext cx="1632261" cy="274320"/>
+            <a:off x="5356066" y="384048"/>
+            <a:ext cx="3230150" cy="274320"/>
           </a:xfrm>
           <a:prstGeom prst="rect">
             <a:avLst/>
@@ -10383,7 +11005,7 @@
                 <a:ea typeface="Arial" pitchFamily="34" charset="-122"/>
                 <a:cs typeface="Arial" pitchFamily="34" charset="-120"/>
               </a:rPr>
-              <a:t>kính đeo mắt bị bẩn</a:t>
+              <a:t>nhìn người trong gương, tưởng họ đứng sau gương</a:t>
             </a:r>
             <a:endParaRPr lang="en-US" sz="950" dirty="0"/>
           </a:p>
@@ -10420,7 +11042,7 @@
                 <a:ea typeface="微軟正黑體" pitchFamily="34" charset="-122"/>
                 <a:cs typeface="微軟正黑體" pitchFamily="34" charset="-120"/>
               </a:rPr>
-              <a:t>眼鏡髒了</a:t>
+              <a:t>看鏡子裡的人，以為他在鏡子後面</a:t>
             </a:r>
             <a:endParaRPr lang="en-US" sz="950" dirty="0"/>
           </a:p>
@@ -10428,7 +11050,7 @@
       </p:sp>
       <p:pic>
         <p:nvPicPr>
-          <p:cNvPr id="17" name="Image 0" descr="/Users/tsengchenghsun/Class/carClass/Claude outputs/第七週(10-22)/src/logo.png">    </p:cNvPr>
+          <p:cNvPr id="12" name="Image 1" descr="/Users/tsengchenghsun/Class/carClass/Claude outputs/第七週(10-22)/src/logo.png">    </p:cNvPr>
           <p:cNvPicPr>
             <a:picLocks noChangeAspect="1"/>
           </p:cNvPicPr>
@@ -10452,7 +11074,7 @@
       </p:pic>
       <p:sp>
         <p:nvSpPr>
-          <p:cNvPr id="18" name="Text 14"/>
+          <p:cNvPr id="13" name="Text 8"/>
           <p:cNvSpPr txBox="1"/>
           <p:nvPr/>
         </p:nvSpPr>
@@ -10483,7 +11105,7 @@
                 <a:ea typeface="Arial" pitchFamily="34" charset="-122"/>
                 <a:cs typeface="Arial" pitchFamily="34" charset="-120"/>
               </a:rPr>
-              <a:t>12 / 17</a:t>
+              <a:t>12 / 18</a:t>
             </a:r>
             <a:endParaRPr lang="en-US" sz="900" dirty="0"/>
           </a:p>
@@ -10491,7 +11113,7 @@
       </p:sp>
       <p:sp>
         <p:nvSpPr>
-          <p:cNvPr id="19" name="Text 15"/>
+          <p:cNvPr id="14" name="Text 9"/>
           <p:cNvSpPr txBox="1"/>
           <p:nvPr/>
         </p:nvSpPr>
@@ -10586,7 +11208,7 @@
                 <a:ea typeface="Arial" pitchFamily="34" charset="-122"/>
                 <a:cs typeface="Arial" pitchFamily="34" charset="-120"/>
               </a:rPr>
-              <a:t>Thời gian · 撐太久也會壞</a:t>
+              <a:t>Bị che, bị bẩn · 被蓋住、弄髒</a:t>
             </a:r>
             <a:endParaRPr lang="en-US" sz="1250" dirty="0"/>
           </a:p>
@@ -10600,16 +11222,16 @@
         </p:nvSpPr>
         <p:spPr>
           <a:xfrm>
-            <a:off x="502920" y="1101852"/>
-            <a:ext cx="3305556" cy="2514600"/>
+            <a:off x="502920" y="937260"/>
+            <a:ext cx="2468880" cy="2514600"/>
           </a:xfrm>
           <a:prstGeom prst="roundRect">
             <a:avLst>
-              <a:gd name="adj" fmla="val 4364"/>
+              <a:gd name="adj" fmla="val 4444"/>
             </a:avLst>
           </a:prstGeom>
           <a:solidFill>
-            <a:srgbClr val="FFFFFF"/>
+            <a:srgbClr val="F4F7FA"/>
           </a:solidFill>
           <a:ln w="12700">
             <a:solidFill>
@@ -10619,79 +11241,105 @@
           </a:ln>
         </p:spPr>
       </p:sp>
-      <p:pic>
-        <p:nvPicPr>
-          <p:cNvPr id="4" name="Image 0" descr="/Users/tsengchenghsun/Class/carClass/Claude outputs/第七週(10-22)/src/img/w6_l2_drift.png">    </p:cNvPr>
-          <p:cNvPicPr>
-            <a:picLocks noChangeAspect="1"/>
-          </p:cNvPicPr>
-          <p:nvPr/>
-        </p:nvPicPr>
-        <p:blipFill>
-          <a:blip r:embed="rId1"/>
-          <a:stretch>
-            <a:fillRect/>
-          </a:stretch>
-        </p:blipFill>
-        <p:spPr>
-          <a:xfrm>
-            <a:off x="576072" y="1214628"/>
-            <a:ext cx="3159252" cy="2106168"/>
-          </a:xfrm>
-          <a:prstGeom prst="rect">
+      <p:sp>
+        <p:nvSpPr>
+          <p:cNvPr id="4" name="Shape 2"/>
+          <p:cNvSpPr/>
+          <p:nvPr/>
+        </p:nvSpPr>
+        <p:spPr>
+          <a:xfrm>
+            <a:off x="1085393" y="1882750"/>
+            <a:ext cx="1303934" cy="623621"/>
+          </a:xfrm>
+          <a:prstGeom prst="ellipse">
             <a:avLst/>
           </a:prstGeom>
-        </p:spPr>
-      </p:pic>
-      <p:sp>
-        <p:nvSpPr>
-          <p:cNvPr id="5" name="Text 2"/>
+          <a:solidFill>
+            <a:srgbClr val="1F6F5C">
+              <a:alpha val="28000"/>
+            </a:srgbClr>
+          </a:solidFill>
+          <a:ln/>
+        </p:spPr>
+      </p:sp>
+      <p:sp>
+        <p:nvSpPr>
+          <p:cNvPr id="5" name="Shape 3"/>
+          <p:cNvSpPr/>
+          <p:nvPr/>
+        </p:nvSpPr>
+        <p:spPr>
+          <a:xfrm>
+            <a:off x="1085393" y="1882750"/>
+            <a:ext cx="1303934" cy="623621"/>
+          </a:xfrm>
+          <a:prstGeom prst="ellipse">
+            <a:avLst/>
+          </a:prstGeom>
+          <a:solidFill>
+            <a:srgbClr val="FFFFFF">
+              <a:alpha val="0"/>
+            </a:srgbClr>
+          </a:solidFill>
+          <a:ln w="31750">
+            <a:solidFill>
+              <a:srgbClr val="1F6F5C"/>
+            </a:solidFill>
+            <a:prstDash val="solid"/>
+          </a:ln>
+        </p:spPr>
+      </p:sp>
+      <p:sp>
+        <p:nvSpPr>
+          <p:cNvPr id="6" name="Shape 4"/>
+          <p:cNvSpPr/>
+          <p:nvPr/>
+        </p:nvSpPr>
+        <p:spPr>
+          <a:xfrm>
+            <a:off x="1538935" y="1953616"/>
+            <a:ext cx="396850" cy="481889"/>
+          </a:xfrm>
+          <a:prstGeom prst="ellipse">
+            <a:avLst/>
+          </a:prstGeom>
+          <a:solidFill>
+            <a:srgbClr val="1F6F5C"/>
+          </a:solidFill>
+          <a:ln/>
+        </p:spPr>
+      </p:sp>
+      <p:sp>
+        <p:nvSpPr>
+          <p:cNvPr id="7" name="Shape 5"/>
+          <p:cNvSpPr/>
+          <p:nvPr/>
+        </p:nvSpPr>
+        <p:spPr>
+          <a:xfrm>
+            <a:off x="1652321" y="2067001"/>
+            <a:ext cx="170078" cy="226771"/>
+          </a:xfrm>
+          <a:prstGeom prst="ellipse">
+            <a:avLst/>
+          </a:prstGeom>
+          <a:solidFill>
+            <a:srgbClr val="FFFFFF"/>
+          </a:solidFill>
+          <a:ln/>
+        </p:spPr>
+      </p:sp>
+      <p:sp>
+        <p:nvSpPr>
+          <p:cNvPr id="8" name="Text 6"/>
           <p:cNvSpPr txBox="1"/>
           <p:nvPr/>
         </p:nvSpPr>
         <p:spPr>
           <a:xfrm>
-            <a:off x="576072" y="3396996"/>
-            <a:ext cx="3159252" cy="182880"/>
-          </a:xfrm>
-          <a:prstGeom prst="rect">
-            <a:avLst/>
-          </a:prstGeom>
-          <a:noFill/>
-          <a:ln/>
-        </p:spPr>
-        <p:txBody>
-          <a:bodyPr wrap="square" lIns="0" tIns="0" rIns="0" bIns="0" rtlCol="0" anchor="ctr"/>
-          <a:lstStyle/>
-          <a:p>
-            <a:pPr algn="ctr" indent="0" marL="0">
-              <a:buNone/>
-            </a:pPr>
-            <a:r>
-              <a:rPr lang="en-US" sz="700" dirty="0">
-                <a:solidFill>
-                  <a:srgbClr val="5F7183"/>
-                </a:solidFill>
-                <a:latin typeface="Arial" pitchFamily="34" charset="0"/>
-                <a:ea typeface="Arial" pitchFamily="34" charset="-122"/>
-                <a:cs typeface="Arial" pitchFamily="34" charset="-120"/>
-              </a:rPr>
-              <a:t>第六週第二節的圖：時速 80、衛星斷掉後的橫向偏移</a:t>
-            </a:r>
-            <a:endParaRPr lang="en-US" sz="700" dirty="0"/>
-          </a:p>
-        </p:txBody>
-      </p:sp>
-      <p:sp>
-        <p:nvSpPr>
-          <p:cNvPr id="6" name="Text 3"/>
-          <p:cNvSpPr txBox="1"/>
-          <p:nvPr/>
-        </p:nvSpPr>
-        <p:spPr>
-          <a:xfrm>
-            <a:off x="4119372" y="914400"/>
-            <a:ext cx="4521708" cy="2889504"/>
+            <a:off x="3429000" y="914400"/>
+            <a:ext cx="5212080" cy="2560320"/>
           </a:xfrm>
           <a:prstGeom prst="rect">
             <a:avLst/>
@@ -10710,7 +11358,7 @@
               <a:buNone/>
             </a:pPr>
             <a:r>
-              <a:rPr lang="en-US" sz="2300" b="1" dirty="0">
+              <a:rPr lang="en-US" sz="2000" b="1" dirty="0">
                 <a:solidFill>
                   <a:srgbClr val="0B1F3A"/>
                 </a:solidFill>
@@ -10718,9 +11366,9 @@
                 <a:ea typeface="Arial" pitchFamily="34" charset="-122"/>
                 <a:cs typeface="Arial" pitchFamily="34" charset="-120"/>
               </a:rPr>
-              <a:t>Kéo dài quá cũng hỏng: IMU trôi dần, GNSS bị mất</a:t>
-            </a:r>
-            <a:endParaRPr lang="en-US" sz="2300" dirty="0"/>
+              <a:t>Bị bẩn, bị che: mọi cảm biến nhìn ra ngoài đều sợ — loại cho ô tô phải tự phát hiện và tự làm sạch</a:t>
+            </a:r>
+            <a:endParaRPr lang="en-US" sz="2000" dirty="0"/>
           </a:p>
           <a:p>
             <a:pPr indent="0" marL="0">
@@ -10738,9 +11386,9 @@
                 <a:ea typeface="微軟正黑體" pitchFamily="34" charset="-122"/>
                 <a:cs typeface="微軟正黑體" pitchFamily="34" charset="-120"/>
               </a:rPr>
-              <a:t>撐太久也會壞：IMU 會飄，衛星會斷</a:t>
-            </a:r>
-            <a:endParaRPr lang="en-US" sz="2300" dirty="0"/>
+              <a:t>髒了、被蓋住：每一種往外看的感測器都怕——車用的要會自己發現、自己清</a:t>
+            </a:r>
+            <a:endParaRPr lang="en-US" sz="2000" dirty="0"/>
           </a:p>
           <a:p>
             <a:pPr indent="0" marL="0">
@@ -10761,9 +11409,9 @@
                 <a:ea typeface="Arial" pitchFamily="34" charset="-122"/>
                 <a:cs typeface="Arial" pitchFamily="34" charset="-120"/>
               </a:rPr>
-              <a:t>IMU công nghiệp 8 °/h ở 80 km/h: 34 s đã lệch 0,5 m. Hầm Tuyết Sơn cần 580 s. Mỗi cái tự nó không đủ; ghép lại mới nối được.</a:t>
-            </a:r>
-            <a:endParaRPr lang="en-US" sz="2300" dirty="0"/>
+              <a:t>Bùn, tuyết, muối, côn trùng, giọt mưa. Bosch USS có Blindness detection (tuần 6).</a:t>
+            </a:r>
+            <a:endParaRPr lang="en-US" sz="2000" dirty="0"/>
           </a:p>
           <a:p>
             <a:pPr indent="0" marL="0">
@@ -10781,15 +11429,171 @@
                 <a:ea typeface="微軟正黑體" pitchFamily="34" charset="-122"/>
                 <a:cs typeface="微軟正黑體" pitchFamily="34" charset="-120"/>
               </a:rPr>
-              <a:t>工業級 IMU 8 °/h、時速 80：34 秒就偏 0.5 公尺。雪山隧道要 580 秒。各自都不夠，合起來才接得上。</a:t>
-            </a:r>
-            <a:endParaRPr lang="en-US" sz="2300" dirty="0"/>
+              <a:t>泥巴、雪、鹽、昆蟲、雨滴。Bosch 超音波有 Blindness detection（第六週）。</a:t>
+            </a:r>
+            <a:endParaRPr lang="en-US" sz="2000" dirty="0"/>
           </a:p>
         </p:txBody>
       </p:sp>
       <p:sp>
         <p:nvSpPr>
-          <p:cNvPr id="7" name="Shape 4"/>
+          <p:cNvPr id="9" name="Shape 7"/>
+          <p:cNvSpPr/>
+          <p:nvPr/>
+        </p:nvSpPr>
+        <p:spPr>
+          <a:xfrm>
+            <a:off x="539496" y="3557016"/>
+            <a:ext cx="219456" cy="219456"/>
+          </a:xfrm>
+          <a:prstGeom prst="ellipse">
+            <a:avLst/>
+          </a:prstGeom>
+          <a:solidFill>
+            <a:srgbClr val="D9463E"/>
+          </a:solidFill>
+          <a:ln/>
+        </p:spPr>
+      </p:sp>
+      <p:sp>
+        <p:nvSpPr>
+          <p:cNvPr id="10" name="Text 8"/>
+          <p:cNvSpPr txBox="1"/>
+          <p:nvPr/>
+        </p:nvSpPr>
+        <p:spPr>
+          <a:xfrm>
+            <a:off x="539496" y="3584448"/>
+            <a:ext cx="219456" cy="164592"/>
+          </a:xfrm>
+          <a:prstGeom prst="rect">
+            <a:avLst/>
+          </a:prstGeom>
+          <a:noFill/>
+          <a:ln/>
+        </p:spPr>
+        <p:txBody>
+          <a:bodyPr wrap="square" lIns="0" tIns="0" rIns="0" bIns="0" rtlCol="0" anchor="ctr"/>
+          <a:lstStyle/>
+          <a:p>
+            <a:pPr algn="ctr" indent="0" marL="0">
+              <a:buNone/>
+            </a:pPr>
+            <a:r>
+              <a:rPr lang="en-US" sz="750" b="1" dirty="0">
+                <a:solidFill>
+                  <a:srgbClr val="FFFFFF"/>
+                </a:solidFill>
+                <a:latin typeface="Arial" pitchFamily="34" charset="0"/>
+                <a:ea typeface="Arial" pitchFamily="34" charset="-122"/>
+                <a:cs typeface="Arial" pitchFamily="34" charset="-120"/>
+              </a:rPr>
+              <a:t>▶</a:t>
+            </a:r>
+            <a:endParaRPr lang="en-US" sz="750" dirty="0"/>
+          </a:p>
+        </p:txBody>
+      </p:sp>
+      <p:sp>
+        <p:nvSpPr>
+          <p:cNvPr id="11" name="Text 9"/>
+          <p:cNvSpPr txBox="1"/>
+          <p:nvPr/>
+        </p:nvSpPr>
+        <p:spPr>
+          <a:xfrm>
+            <a:off x="832104" y="3529584"/>
+            <a:ext cx="7808976" cy="274320"/>
+          </a:xfrm>
+          <a:prstGeom prst="rect">
+            <a:avLst/>
+          </a:prstGeom>
+          <a:noFill/>
+          <a:ln/>
+        </p:spPr>
+        <p:txBody>
+          <a:bodyPr wrap="square" lIns="0" tIns="0" rIns="0" bIns="0" rtlCol="0" anchor="ctr"/>
+          <a:lstStyle/>
+          <a:p>
+            <a:pPr indent="0" marL="0">
+              <a:lnSpc>
+                <a:spcPct val="100000"/>
+              </a:lnSpc>
+              <a:buNone/>
+            </a:pPr>
+            <a:r>
+              <a:rPr lang="en-US" sz="900" b="1" u="sng" dirty="0">
+                <a:solidFill>
+                  <a:srgbClr val="0B1F3A"/>
+                </a:solidFill>
+                <a:latin typeface="Arial" pitchFamily="34" charset="0"/>
+                <a:ea typeface="Arial" pitchFamily="34" charset="-122"/>
+                <a:cs typeface="Arial" pitchFamily="34" charset="-120"/>
+                <a:hlinkClick r:id="rId1" invalidUrl="" action="" tgtFrame="" tooltip="" history="1" highlightClick="0" endSnd="0">
+                  <a:extLst>
+                    <a:ext uri="{A12FA001-AC4F-418D-AE19-62706E023703}">
+                      <ahyp:hlinkClr xmlns:ahyp="http://schemas.microsoft.com/office/drawing/2018/hyperlinkcolor" val="tx"/>
+                    </a:ext>
+                  </a:extLst>
+                </a:hlinkClick>
+              </a:rPr>
+              <a:t>Video: vì sao cảm biến phải được làm sạch (Valeo) · </a:t>
+            </a:r>
+            <a:pPr indent="0" marL="0">
+              <a:lnSpc>
+                <a:spcPct val="100000"/>
+              </a:lnSpc>
+              <a:buNone/>
+            </a:pPr>
+            <a:r>
+              <a:rPr lang="en-US" sz="900" b="1" u="sng" dirty="0">
+                <a:solidFill>
+                  <a:srgbClr val="0B1F3A"/>
+                </a:solidFill>
+                <a:latin typeface="微軟正黑體" pitchFamily="34" charset="0"/>
+                <a:ea typeface="微軟正黑體" pitchFamily="34" charset="-122"/>
+                <a:cs typeface="微軟正黑體" pitchFamily="34" charset="-120"/>
+                <a:hlinkClick r:id="rId1" invalidUrl="" action="" tgtFrame="" tooltip="" history="1" highlightClick="0" endSnd="0">
+                  <a:extLst>
+                    <a:ext uri="{A12FA001-AC4F-418D-AE19-62706E023703}">
+                      <ahyp:hlinkClr xmlns:ahyp="http://schemas.microsoft.com/office/drawing/2018/hyperlinkcolor" val="tx"/>
+                    </a:ext>
+                  </a:extLst>
+                </a:hlinkClick>
+              </a:rPr>
+              <a:t>影片：感測器為什麼要清潔（Valeo）　1:29　</a:t>
+            </a:r>
+            <a:pPr indent="0" marL="0">
+              <a:lnSpc>
+                <a:spcPct val="100000"/>
+              </a:lnSpc>
+              <a:buNone/>
+            </a:pPr>
+            <a:r>
+              <a:rPr lang="en-US" sz="900" u="sng" dirty="0">
+                <a:solidFill>
+                  <a:srgbClr val="1F6FBF"/>
+                </a:solidFill>
+                <a:latin typeface="Arial" pitchFamily="34" charset="0"/>
+                <a:ea typeface="Arial" pitchFamily="34" charset="-122"/>
+                <a:cs typeface="Arial" pitchFamily="34" charset="-120"/>
+                <a:hlinkClick r:id="rId1" invalidUrl="" action="" tgtFrame="" tooltip="" history="1" highlightClick="0" endSnd="0">
+                  <a:extLst>
+                    <a:ext uri="{A12FA001-AC4F-418D-AE19-62706E023703}">
+                      <ahyp:hlinkClr xmlns:ahyp="http://schemas.microsoft.com/office/drawing/2018/hyperlinkcolor" val="tx"/>
+                    </a:ext>
+                  </a:extLst>
+                </a:hlinkClick>
+              </a:rPr>
+              <a:t>youtu.be/vhjFmzcD-iQ</a:t>
+            </a:r>
+            <a:endParaRPr lang="en-US" sz="900" dirty="0"/>
+          </a:p>
+        </p:txBody>
+      </p:sp>
+      <p:sp>
+        <p:nvSpPr>
+          <p:cNvPr id="12" name="Shape 10"/>
           <p:cNvSpPr/>
           <p:nvPr/>
         </p:nvSpPr>
@@ -10816,7 +11620,7 @@
       </p:sp>
       <p:sp>
         <p:nvSpPr>
-          <p:cNvPr id="8" name="Text 5"/>
+          <p:cNvPr id="13" name="Text 11"/>
           <p:cNvSpPr txBox="1"/>
           <p:nvPr/>
         </p:nvSpPr>
@@ -10850,7 +11654,7 @@
                 <a:ea typeface="Arial" pitchFamily="34" charset="-122"/>
                 <a:cs typeface="Arial" pitchFamily="34" charset="-120"/>
               </a:rPr>
-              <a:t>IMU hỏng từ từ, GNSS hỏng đột ngột — tính cách ngược nhau, nên bù được cho nhau.</a:t>
+              <a:t>Phát hiện mình bị che là biến kiểu 3 thành kiểu 1.</a:t>
             </a:r>
             <a:endParaRPr lang="en-US" sz="1250" dirty="0"/>
           </a:p>
@@ -10870,7 +11674,7 @@
                 <a:ea typeface="微軟正黑體" pitchFamily="34" charset="-122"/>
                 <a:cs typeface="微軟正黑體" pitchFamily="34" charset="-120"/>
               </a:rPr>
-              <a:t>IMU 慢慢壞，衛星突然壞——個性剛好相反，所以補得起來。</a:t>
+              <a:t>會發現自己被蓋住，就把第三種壞法變成第一種。</a:t>
             </a:r>
             <a:endParaRPr lang="en-US" sz="1250" dirty="0"/>
           </a:p>
@@ -10878,14 +11682,14 @@
       </p:sp>
       <p:sp>
         <p:nvSpPr>
-          <p:cNvPr id="9" name="Shape 6"/>
+          <p:cNvPr id="14" name="Shape 12"/>
           <p:cNvSpPr/>
           <p:nvPr/>
         </p:nvSpPr>
         <p:spPr>
           <a:xfrm>
-            <a:off x="6026995" y="365760"/>
-            <a:ext cx="2614085" cy="310896"/>
+            <a:off x="6825939" y="365760"/>
+            <a:ext cx="1815141" cy="310896"/>
           </a:xfrm>
           <a:prstGeom prst="roundRect">
             <a:avLst>
@@ -10905,14 +11709,14 @@
       </p:sp>
       <p:sp>
         <p:nvSpPr>
-          <p:cNvPr id="10" name="Text 7"/>
+          <p:cNvPr id="15" name="Text 13"/>
           <p:cNvSpPr txBox="1"/>
           <p:nvPr/>
         </p:nvSpPr>
         <p:spPr>
           <a:xfrm>
-            <a:off x="6155011" y="384048"/>
-            <a:ext cx="2431205" cy="274320"/>
+            <a:off x="6953955" y="384048"/>
+            <a:ext cx="1632261" cy="274320"/>
           </a:xfrm>
           <a:prstGeom prst="rect">
             <a:avLst/>
@@ -10956,7 +11760,7 @@
                 <a:ea typeface="Arial" pitchFamily="34" charset="-122"/>
                 <a:cs typeface="Arial" pitchFamily="34" charset="-120"/>
               </a:rPr>
-              <a:t>nhắm mắt đi bộ: càng đi càng lệch</a:t>
+              <a:t>kính đeo mắt bị bẩn</a:t>
             </a:r>
             <a:endParaRPr lang="en-US" sz="950" dirty="0"/>
           </a:p>
@@ -10993,7 +11797,7 @@
                 <a:ea typeface="微軟正黑體" pitchFamily="34" charset="-122"/>
                 <a:cs typeface="微軟正黑體" pitchFamily="34" charset="-120"/>
               </a:rPr>
-              <a:t>閉著眼睛走路，愈走愈歪</a:t>
+              <a:t>眼鏡髒了</a:t>
             </a:r>
             <a:endParaRPr lang="en-US" sz="950" dirty="0"/>
           </a:p>
@@ -11001,7 +11805,7 @@
       </p:sp>
       <p:pic>
         <p:nvPicPr>
-          <p:cNvPr id="12" name="Image 1" descr="/Users/tsengchenghsun/Class/carClass/Claude outputs/第七週(10-22)/src/logo.png">    </p:cNvPr>
+          <p:cNvPr id="17" name="Image 0" descr="/Users/tsengchenghsun/Class/carClass/Claude outputs/第七週(10-22)/src/logo.png">    </p:cNvPr>
           <p:cNvPicPr>
             <a:picLocks noChangeAspect="1"/>
           </p:cNvPicPr>
@@ -11025,7 +11829,7 @@
       </p:pic>
       <p:sp>
         <p:nvSpPr>
-          <p:cNvPr id="13" name="Text 8"/>
+          <p:cNvPr id="18" name="Text 14"/>
           <p:cNvSpPr txBox="1"/>
           <p:nvPr/>
         </p:nvSpPr>
@@ -11056,7 +11860,7 @@
                 <a:ea typeface="Arial" pitchFamily="34" charset="-122"/>
                 <a:cs typeface="Arial" pitchFamily="34" charset="-120"/>
               </a:rPr>
-              <a:t>13 / 17</a:t>
+              <a:t>13 / 18</a:t>
             </a:r>
             <a:endParaRPr lang="en-US" sz="900" dirty="0"/>
           </a:p>
@@ -11064,7 +11868,7 @@
       </p:sp>
       <p:sp>
         <p:nvSpPr>
-          <p:cNvPr id="14" name="Text 9"/>
+          <p:cNvPr id="19" name="Text 15"/>
           <p:cNvSpPr txBox="1"/>
           <p:nvPr/>
         </p:nvSpPr>
@@ -11134,7 +11938,7 @@
         </p:nvSpPr>
         <p:spPr>
           <a:xfrm>
-            <a:off x="502920" y="365760"/>
+            <a:off x="502920" y="420624"/>
             <a:ext cx="8138160" cy="274320"/>
           </a:xfrm>
           <a:prstGeom prst="rect">
@@ -11151,7 +11955,7 @@
               <a:buNone/>
             </a:pPr>
             <a:r>
-              <a:rPr lang="en-US" sz="1300" b="1" dirty="0">
+              <a:rPr lang="en-US" sz="1250" b="1" dirty="0">
                 <a:solidFill>
                   <a:srgbClr val="007F72"/>
                 </a:solidFill>
@@ -11159,88 +11963,26 @@
                 <a:ea typeface="Arial" pitchFamily="34" charset="-122"/>
                 <a:cs typeface="Arial" pitchFamily="34" charset="-120"/>
               </a:rPr>
-              <a:t>Radar · 雷達看人：看得到，抓不穩</a:t>
-            </a:r>
-            <a:endParaRPr lang="en-US" sz="1300" dirty="0"/>
+              <a:t>Thời gian · 撐太久也會壞</a:t>
+            </a:r>
+            <a:endParaRPr lang="en-US" sz="1250" dirty="0"/>
           </a:p>
         </p:txBody>
       </p:sp>
       <p:sp>
         <p:nvSpPr>
-          <p:cNvPr id="3" name="Text 1"/>
-          <p:cNvSpPr txBox="1"/>
-          <p:nvPr/>
-        </p:nvSpPr>
-        <p:spPr>
-          <a:xfrm>
-            <a:off x="502920" y="676656"/>
-            <a:ext cx="8138160" cy="560684"/>
-          </a:xfrm>
-          <a:prstGeom prst="rect">
-            <a:avLst/>
-          </a:prstGeom>
-          <a:noFill/>
-          <a:ln/>
-        </p:spPr>
-        <p:txBody>
-          <a:bodyPr wrap="square" lIns="0" tIns="0" rIns="0" bIns="0" rtlCol="0" anchor="t"/>
-          <a:lstStyle/>
-          <a:p>
-            <a:pPr indent="0" marL="0">
-              <a:lnSpc>
-                <a:spcPct val="116000"/>
-              </a:lnSpc>
-              <a:buNone/>
-            </a:pPr>
-            <a:r>
-              <a:rPr lang="en-US" sz="1700" b="1" dirty="0">
-                <a:solidFill>
-                  <a:srgbClr val="0B1F3A"/>
-                </a:solidFill>
-                <a:latin typeface="Arial" pitchFamily="34" charset="0"/>
-                <a:ea typeface="Arial" pitchFamily="34" charset="-122"/>
-                <a:cs typeface="Arial" pitchFamily="34" charset="-120"/>
-              </a:rPr>
-              <a:t>Radar thấy được người, nhưng không ổn định</a:t>
-            </a:r>
-            <a:endParaRPr lang="en-US" sz="1700" dirty="0"/>
-          </a:p>
-          <a:p>
-            <a:pPr indent="0" marL="0">
-              <a:lnSpc>
-                <a:spcPct val="116000"/>
-              </a:lnSpc>
-              <a:buNone/>
-            </a:pPr>
-            <a:r>
-              <a:rPr lang="en-US" sz="1250" dirty="0">
-                <a:solidFill>
-                  <a:srgbClr val="5F7183"/>
-                </a:solidFill>
-                <a:latin typeface="微軟正黑體" pitchFamily="34" charset="0"/>
-                <a:ea typeface="微軟正黑體" pitchFamily="34" charset="-122"/>
-                <a:cs typeface="微軟正黑體" pitchFamily="34" charset="-120"/>
-              </a:rPr>
-              <a:t>雷達看得到人，但抓不穩：人反射弱，又會一閃一閃</a:t>
-            </a:r>
-            <a:endParaRPr lang="en-US" sz="1700" dirty="0"/>
-          </a:p>
-        </p:txBody>
-      </p:sp>
-      <p:sp>
-        <p:nvSpPr>
-          <p:cNvPr id="4" name="Shape 2"/>
+          <p:cNvPr id="3" name="Shape 1"/>
           <p:cNvSpPr/>
           <p:nvPr/>
         </p:nvSpPr>
         <p:spPr>
           <a:xfrm>
-            <a:off x="721277" y="1310492"/>
-            <a:ext cx="3217702" cy="2511700"/>
+            <a:off x="502920" y="1101852"/>
+            <a:ext cx="3305556" cy="2514600"/>
           </a:xfrm>
           <a:prstGeom prst="roundRect">
             <a:avLst>
-              <a:gd name="adj" fmla="val 3641"/>
+              <a:gd name="adj" fmla="val 4364"/>
             </a:avLst>
           </a:prstGeom>
           <a:solidFill>
@@ -11254,93 +11996,9 @@
           </a:ln>
         </p:spPr>
       </p:sp>
-      <p:sp>
-        <p:nvSpPr>
-          <p:cNvPr id="5" name="Shape 3"/>
-          <p:cNvSpPr/>
-          <p:nvPr/>
-        </p:nvSpPr>
-        <p:spPr>
-          <a:xfrm>
-            <a:off x="812717" y="1401932"/>
-            <a:ext cx="3034822" cy="347413"/>
-          </a:xfrm>
-          <a:prstGeom prst="roundRect">
-            <a:avLst>
-              <a:gd name="adj" fmla="val 13160"/>
-            </a:avLst>
-          </a:prstGeom>
-          <a:solidFill>
-            <a:srgbClr val="8A5A00"/>
-          </a:solidFill>
-          <a:ln/>
-        </p:spPr>
-      </p:sp>
-      <p:sp>
-        <p:nvSpPr>
-          <p:cNvPr id="6" name="Text 4"/>
-          <p:cNvSpPr txBox="1"/>
-          <p:nvPr/>
-        </p:nvSpPr>
-        <p:spPr>
-          <a:xfrm>
-            <a:off x="885869" y="1429364"/>
-            <a:ext cx="2888518" cy="310837"/>
-          </a:xfrm>
-          <a:prstGeom prst="rect">
-            <a:avLst/>
-          </a:prstGeom>
-          <a:noFill/>
-          <a:ln/>
-        </p:spPr>
-        <p:txBody>
-          <a:bodyPr wrap="square" lIns="0" tIns="0" rIns="0" bIns="0" rtlCol="0" anchor="t"/>
-          <a:lstStyle/>
-          <a:p>
-            <a:pPr algn="ctr" indent="0" marL="0">
-              <a:lnSpc>
-                <a:spcPct val="104000"/>
-              </a:lnSpc>
-              <a:buNone/>
-            </a:pPr>
-            <a:r>
-              <a:rPr lang="en-US" sz="950" b="1" dirty="0">
-                <a:solidFill>
-                  <a:srgbClr val="FFFFFF"/>
-                </a:solidFill>
-                <a:latin typeface="Arial" pitchFamily="34" charset="0"/>
-                <a:ea typeface="Arial" pitchFamily="34" charset="-122"/>
-                <a:cs typeface="Arial" pitchFamily="34" charset="-120"/>
-              </a:rPr>
-              <a:t>Quạt = vùng radar trước: người ở trong, 0 điểm</a:t>
-            </a:r>
-            <a:endParaRPr lang="en-US" sz="950" dirty="0"/>
-          </a:p>
-          <a:p>
-            <a:pPr algn="ctr" indent="0" marL="0">
-              <a:lnSpc>
-                <a:spcPct val="104000"/>
-              </a:lnSpc>
-              <a:buNone/>
-            </a:pPr>
-            <a:r>
-              <a:rPr lang="en-US" sz="850" dirty="0">
-                <a:solidFill>
-                  <a:srgbClr val="FFFFFF"/>
-                </a:solidFill>
-                <a:latin typeface="微軟正黑體" pitchFamily="34" charset="0"/>
-                <a:ea typeface="微軟正黑體" pitchFamily="34" charset="-122"/>
-                <a:cs typeface="微軟正黑體" pitchFamily="34" charset="-120"/>
-              </a:rPr>
-              <a:t>扇形＝前雷達照得到的範圍：行人都在裡面，0 個點</a:t>
-            </a:r>
-            <a:endParaRPr lang="en-US" sz="950" dirty="0"/>
-          </a:p>
-        </p:txBody>
-      </p:sp>
       <p:pic>
         <p:nvPicPr>
-          <p:cNvPr id="7" name="Image 0" descr="/Users/tsengchenghsun/Class/carClass/Claude outputs/第七週(10-22)/src/img/w7_silent_bev.jpg">    </p:cNvPr>
+          <p:cNvPr id="4" name="Image 0" descr="/Users/tsengchenghsun/Class/carClass/Claude outputs/第七週(10-22)/src/img/w6_l2_drift.png">    </p:cNvPr>
           <p:cNvPicPr>
             <a:picLocks noChangeAspect="1"/>
           </p:cNvPicPr>
@@ -11354,8 +12012,8 @@
         </p:blipFill>
         <p:spPr>
           <a:xfrm>
-            <a:off x="812717" y="1804209"/>
-            <a:ext cx="3034822" cy="1707087"/>
+            <a:off x="576072" y="1214628"/>
+            <a:ext cx="3159252" cy="2106168"/>
           </a:xfrm>
           <a:prstGeom prst="rect">
             <a:avLst/>
@@ -11364,14 +12022,14 @@
       </p:pic>
       <p:sp>
         <p:nvSpPr>
-          <p:cNvPr id="8" name="Text 5"/>
+          <p:cNvPr id="5" name="Text 2"/>
           <p:cNvSpPr txBox="1"/>
           <p:nvPr/>
         </p:nvSpPr>
         <p:spPr>
           <a:xfrm>
-            <a:off x="812717" y="3529584"/>
-            <a:ext cx="3034822" cy="182880"/>
+            <a:off x="576072" y="3396996"/>
+            <a:ext cx="3159252" cy="182880"/>
           </a:xfrm>
           <a:prstGeom prst="rect">
             <a:avLst/>
@@ -11395,7 +12053,7 @@
                 <a:ea typeface="Arial" pitchFamily="34" charset="-122"/>
                 <a:cs typeface="Arial" pitchFamily="34" charset="-120"/>
               </a:rPr>
-              <a:t>nuScenes scene-0553（波士頓）· CC BY-NC-SA 4.0</a:t>
+              <a:t>第六週第二節的圖：時速 80、衛星斷掉後的橫向偏移</a:t>
             </a:r>
             <a:endParaRPr lang="en-US" sz="700" dirty="0"/>
           </a:p>
@@ -11403,63 +12061,14 @@
       </p:sp>
       <p:sp>
         <p:nvSpPr>
-          <p:cNvPr id="9" name="Shape 6"/>
-          <p:cNvSpPr/>
-          <p:nvPr/>
-        </p:nvSpPr>
-        <p:spPr>
-          <a:xfrm>
-            <a:off x="4213298" y="1310492"/>
-            <a:ext cx="4209425" cy="2511700"/>
-          </a:xfrm>
-          <a:prstGeom prst="roundRect">
-            <a:avLst>
-              <a:gd name="adj" fmla="val 3641"/>
-            </a:avLst>
-          </a:prstGeom>
-          <a:solidFill>
-            <a:srgbClr val="FFFFFF"/>
-          </a:solidFill>
-          <a:ln w="12700">
-            <a:solidFill>
-              <a:srgbClr val="DBE3EA"/>
-            </a:solidFill>
-            <a:prstDash val="solid"/>
-          </a:ln>
-        </p:spPr>
-      </p:sp>
-      <p:sp>
-        <p:nvSpPr>
-          <p:cNvPr id="10" name="Shape 7"/>
-          <p:cNvSpPr/>
-          <p:nvPr/>
-        </p:nvSpPr>
-        <p:spPr>
-          <a:xfrm>
-            <a:off x="4304738" y="1401932"/>
-            <a:ext cx="4026545" cy="347413"/>
-          </a:xfrm>
-          <a:prstGeom prst="roundRect">
-            <a:avLst>
-              <a:gd name="adj" fmla="val 13160"/>
-            </a:avLst>
-          </a:prstGeom>
-          <a:solidFill>
-            <a:srgbClr val="007F72"/>
-          </a:solidFill>
-          <a:ln/>
-        </p:spPr>
-      </p:sp>
-      <p:sp>
-        <p:nvSpPr>
-          <p:cNvPr id="11" name="Text 8"/>
+          <p:cNvPr id="6" name="Text 3"/>
           <p:cNvSpPr txBox="1"/>
           <p:nvPr/>
         </p:nvSpPr>
         <p:spPr>
           <a:xfrm>
-            <a:off x="4377890" y="1429364"/>
-            <a:ext cx="3880241" cy="310837"/>
+            <a:off x="4119372" y="914400"/>
+            <a:ext cx="4521708" cy="2889504"/>
           </a:xfrm>
           <a:prstGeom prst="rect">
             <a:avLst/>
@@ -11468,100 +12077,60 @@
           <a:ln/>
         </p:spPr>
         <p:txBody>
-          <a:bodyPr wrap="square" lIns="0" tIns="0" rIns="0" bIns="0" rtlCol="0" anchor="t"/>
+          <a:bodyPr wrap="square" lIns="0" tIns="0" rIns="0" bIns="0" rtlCol="0" anchor="ctr"/>
           <a:lstStyle/>
           <a:p>
-            <a:pPr algn="ctr" indent="0" marL="0">
+            <a:pPr indent="0" marL="0">
               <a:lnSpc>
-                <a:spcPct val="104000"/>
+                <a:spcPct val="120000"/>
               </a:lnSpc>
               <a:buNone/>
             </a:pPr>
             <a:r>
-              <a:rPr lang="en-US" sz="950" b="1" dirty="0">
-                <a:solidFill>
-                  <a:srgbClr val="FFFFFF"/>
+              <a:rPr lang="en-US" sz="2300" b="1" dirty="0">
+                <a:solidFill>
+                  <a:srgbClr val="0B1F3A"/>
                 </a:solidFill>
                 <a:latin typeface="Arial" pitchFamily="34" charset="0"/>
                 <a:ea typeface="Arial" pitchFamily="34" charset="-122"/>
                 <a:cs typeface="Arial" pitchFamily="34" charset="-120"/>
               </a:rPr>
-              <a:t>Lidar: người nào cũng có điểm</a:t>
-            </a:r>
-            <a:endParaRPr lang="en-US" sz="950" dirty="0"/>
-          </a:p>
-          <a:p>
-            <a:pPr algn="ctr" indent="0" marL="0">
+              <a:t>Kéo dài quá cũng hỏng: IMU trôi dần, GNSS bị mất</a:t>
+            </a:r>
+            <a:endParaRPr lang="en-US" sz="2300" dirty="0"/>
+          </a:p>
+          <a:p>
+            <a:pPr indent="0" marL="0">
               <a:lnSpc>
-                <a:spcPct val="104000"/>
+                <a:spcPct val="120000"/>
               </a:lnSpc>
               <a:buNone/>
             </a:pPr>
             <a:r>
-              <a:rPr lang="en-US" sz="850" dirty="0">
-                <a:solidFill>
-                  <a:srgbClr val="FFFFFF"/>
+              <a:rPr lang="en-US" sz="1400" b="1" dirty="0">
+                <a:solidFill>
+                  <a:srgbClr val="007F72"/>
                 </a:solidFill>
                 <a:latin typeface="微軟正黑體" pitchFamily="34" charset="0"/>
                 <a:ea typeface="微軟正黑體" pitchFamily="34" charset="-122"/>
                 <a:cs typeface="微軟正黑體" pitchFamily="34" charset="-120"/>
               </a:rPr>
-              <a:t>光達：每個人身上都有點</a:t>
-            </a:r>
-            <a:endParaRPr lang="en-US" sz="950" dirty="0"/>
-          </a:p>
-        </p:txBody>
-      </p:sp>
-      <p:pic>
-        <p:nvPicPr>
-          <p:cNvPr id="12" name="Image 1" descr="/Users/tsengchenghsun/Class/carClass/Claude outputs/第七週(10-22)/src/img/w7_silent_lidar.jpg">    </p:cNvPr>
-          <p:cNvPicPr>
-            <a:picLocks noChangeAspect="1"/>
-          </p:cNvPicPr>
-          <p:nvPr/>
-        </p:nvPicPr>
-        <p:blipFill>
-          <a:blip r:embed="rId2"/>
-          <a:stretch>
-            <a:fillRect/>
-          </a:stretch>
-        </p:blipFill>
-        <p:spPr>
-          <a:xfrm>
-            <a:off x="4304738" y="1804209"/>
-            <a:ext cx="4026545" cy="1707087"/>
-          </a:xfrm>
-          <a:prstGeom prst="rect">
-            <a:avLst/>
-          </a:prstGeom>
-        </p:spPr>
-      </p:pic>
-      <p:sp>
-        <p:nvSpPr>
-          <p:cNvPr id="13" name="Text 9"/>
-          <p:cNvSpPr txBox="1"/>
-          <p:nvPr/>
-        </p:nvSpPr>
-        <p:spPr>
-          <a:xfrm>
-            <a:off x="4304738" y="3529584"/>
-            <a:ext cx="4026545" cy="182880"/>
-          </a:xfrm>
-          <a:prstGeom prst="rect">
-            <a:avLst/>
-          </a:prstGeom>
-          <a:noFill/>
-          <a:ln/>
-        </p:spPr>
-        <p:txBody>
-          <a:bodyPr wrap="square" lIns="0" tIns="0" rIns="0" bIns="0" rtlCol="0" anchor="ctr"/>
-          <a:lstStyle/>
-          <a:p>
-            <a:pPr algn="ctr" indent="0" marL="0">
-              <a:buNone/>
-            </a:pPr>
-            <a:r>
-              <a:rPr lang="en-US" sz="700" dirty="0">
+              <a:t>撐太久也會壞：IMU 會飄，衛星會斷</a:t>
+            </a:r>
+            <a:endParaRPr lang="en-US" sz="2300" dirty="0"/>
+          </a:p>
+          <a:p>
+            <a:pPr indent="0" marL="0">
+              <a:lnSpc>
+                <a:spcPct val="120000"/>
+              </a:lnSpc>
+              <a:spcBef>
+                <a:spcPts val="1440"/>
+              </a:spcBef>
+              <a:buNone/>
+            </a:pPr>
+            <a:r>
+              <a:rPr lang="en-US" sz="1250" dirty="0">
                 <a:solidFill>
                   <a:srgbClr val="5F7183"/>
                 </a:solidFill>
@@ -11569,26 +12138,46 @@
                 <a:ea typeface="Arial" pitchFamily="34" charset="-122"/>
                 <a:cs typeface="Arial" pitchFamily="34" charset="-120"/>
               </a:rPr>
-              <a:t>框：官方標註，黃框＝框裡雷達點 0 個</a:t>
-            </a:r>
-            <a:endParaRPr lang="en-US" sz="700" dirty="0"/>
+              <a:t>IMU công nghiệp 8 °/h ở 80 km/h: 34 s đã lệch 0,5 m. Hầm Tuyết Sơn cần 580 s. Mỗi cái tự nó không đủ; ghép lại mới nối được.</a:t>
+            </a:r>
+            <a:endParaRPr lang="en-US" sz="2300" dirty="0"/>
+          </a:p>
+          <a:p>
+            <a:pPr indent="0" marL="0">
+              <a:lnSpc>
+                <a:spcPct val="120000"/>
+              </a:lnSpc>
+              <a:buNone/>
+            </a:pPr>
+            <a:r>
+              <a:rPr lang="en-US" sz="1150" dirty="0">
+                <a:solidFill>
+                  <a:srgbClr val="5F7183"/>
+                </a:solidFill>
+                <a:latin typeface="微軟正黑體" pitchFamily="34" charset="0"/>
+                <a:ea typeface="微軟正黑體" pitchFamily="34" charset="-122"/>
+                <a:cs typeface="微軟正黑體" pitchFamily="34" charset="-120"/>
+              </a:rPr>
+              <a:t>工業級 IMU 8 °/h、時速 80：34 秒就偏 0.5 公尺。雪山隧道要 580 秒。各自都不夠，合起來才接得上。</a:t>
+            </a:r>
+            <a:endParaRPr lang="en-US" sz="2300" dirty="0"/>
           </a:p>
         </p:txBody>
       </p:sp>
       <p:sp>
         <p:nvSpPr>
-          <p:cNvPr id="14" name="Shape 10"/>
+          <p:cNvPr id="7" name="Shape 4"/>
           <p:cNvSpPr/>
           <p:nvPr/>
         </p:nvSpPr>
         <p:spPr>
           <a:xfrm>
-            <a:off x="502920" y="3931920"/>
-            <a:ext cx="8138160" cy="566928"/>
+            <a:off x="502920" y="3913632"/>
+            <a:ext cx="8138160" cy="621792"/>
           </a:xfrm>
           <a:prstGeom prst="roundRect">
             <a:avLst>
-              <a:gd name="adj" fmla="val 14516"/>
+              <a:gd name="adj" fmla="val 13235"/>
             </a:avLst>
           </a:prstGeom>
           <a:solidFill>
@@ -11604,14 +12193,14 @@
       </p:sp>
       <p:sp>
         <p:nvSpPr>
-          <p:cNvPr id="15" name="Text 11"/>
+          <p:cNvPr id="8" name="Text 5"/>
           <p:cNvSpPr txBox="1"/>
           <p:nvPr/>
         </p:nvSpPr>
         <p:spPr>
           <a:xfrm>
-            <a:off x="685800" y="3995928"/>
-            <a:ext cx="7772400" cy="457200"/>
+            <a:off x="685800" y="3986784"/>
+            <a:ext cx="7772400" cy="493776"/>
           </a:xfrm>
           <a:prstGeom prst="rect">
             <a:avLst/>
@@ -11630,7 +12219,7 @@
               <a:buNone/>
             </a:pPr>
             <a:r>
-              <a:rPr lang="en-US" sz="1200" b="1" dirty="0">
+              <a:rPr lang="en-US" sz="1250" b="1" dirty="0">
                 <a:solidFill>
                   <a:srgbClr val="7A4E00"/>
                 </a:solidFill>
@@ -11638,9 +12227,9 @@
                 <a:ea typeface="Arial" pitchFamily="34" charset="-122"/>
                 <a:cs typeface="Arial" pitchFamily="34" charset="-120"/>
               </a:rPr>
-              <a:t>7/10 người bị bắt ít nhất một lần, nhưng mỗi lúc chỉ 2–3/10. Dùng được, nhưng không dùng một mình.</a:t>
-            </a:r>
-            <a:endParaRPr lang="en-US" sz="1200" dirty="0"/>
+              <a:t>IMU hỏng từ từ, GNSS hỏng đột ngột — tính cách ngược nhau, nên bù được cho nhau.</a:t>
+            </a:r>
+            <a:endParaRPr lang="en-US" sz="1250" dirty="0"/>
           </a:p>
           <a:p>
             <a:pPr indent="0" marL="0">
@@ -11650,7 +12239,7 @@
               <a:buNone/>
             </a:pPr>
             <a:r>
-              <a:rPr lang="en-US" sz="1100" dirty="0">
+              <a:rPr lang="en-US" sz="1150" dirty="0">
                 <a:solidFill>
                   <a:srgbClr val="7A4E00"/>
                 </a:solidFill>
@@ -11658,22 +12247,22 @@
                 <a:ea typeface="微軟正黑體" pitchFamily="34" charset="-122"/>
                 <a:cs typeface="微軟正黑體" pitchFamily="34" charset="-120"/>
               </a:rPr>
-              <a:t>七成的人至少被抓到一次，但每一瞬間只有兩到三成。不是不能用，是不能單獨用。</a:t>
-            </a:r>
-            <a:endParaRPr lang="en-US" sz="1200" dirty="0"/>
+              <a:t>IMU 慢慢壞，衛星突然壞——個性剛好相反，所以補得起來。</a:t>
+            </a:r>
+            <a:endParaRPr lang="en-US" sz="1250" dirty="0"/>
           </a:p>
         </p:txBody>
       </p:sp>
       <p:sp>
         <p:nvSpPr>
-          <p:cNvPr id="16" name="Shape 12"/>
+          <p:cNvPr id="9" name="Shape 6"/>
           <p:cNvSpPr/>
           <p:nvPr/>
         </p:nvSpPr>
         <p:spPr>
           <a:xfrm>
-            <a:off x="5912860" y="365760"/>
-            <a:ext cx="2728220" cy="310896"/>
+            <a:off x="6026995" y="365760"/>
+            <a:ext cx="2614085" cy="310896"/>
           </a:xfrm>
           <a:prstGeom prst="roundRect">
             <a:avLst>
@@ -11693,14 +12282,14 @@
       </p:sp>
       <p:sp>
         <p:nvSpPr>
-          <p:cNvPr id="17" name="Text 13"/>
+          <p:cNvPr id="10" name="Text 7"/>
           <p:cNvSpPr txBox="1"/>
           <p:nvPr/>
         </p:nvSpPr>
         <p:spPr>
           <a:xfrm>
-            <a:off x="6040876" y="384048"/>
-            <a:ext cx="2545340" cy="274320"/>
+            <a:off x="6155011" y="384048"/>
+            <a:ext cx="2431205" cy="274320"/>
           </a:xfrm>
           <a:prstGeom prst="rect">
             <a:avLst/>
@@ -11744,7 +12333,7 @@
                 <a:ea typeface="Arial" pitchFamily="34" charset="-122"/>
                 <a:cs typeface="Arial" pitchFamily="34" charset="-120"/>
               </a:rPr>
-              <a:t>đèn pin chiếu gương và chiếu áo len</a:t>
+              <a:t>nhắm mắt đi bộ: càng đi càng lệch</a:t>
             </a:r>
             <a:endParaRPr lang="en-US" sz="950" dirty="0"/>
           </a:p>
@@ -11781,7 +12370,7 @@
                 <a:ea typeface="微軟正黑體" pitchFamily="34" charset="-122"/>
                 <a:cs typeface="微軟正黑體" pitchFamily="34" charset="-120"/>
               </a:rPr>
-              <a:t>手電筒照鏡子、照毛衣</a:t>
+              <a:t>閉著眼睛走路，愈走愈歪</a:t>
             </a:r>
             <a:endParaRPr lang="en-US" sz="950" dirty="0"/>
           </a:p>
@@ -11789,14 +12378,14 @@
       </p:sp>
       <p:pic>
         <p:nvPicPr>
-          <p:cNvPr id="19" name="Image 2" descr="/Users/tsengchenghsun/Class/carClass/Claude outputs/第七週(10-22)/src/logo.png">    </p:cNvPr>
+          <p:cNvPr id="12" name="Image 1" descr="/Users/tsengchenghsun/Class/carClass/Claude outputs/第七週(10-22)/src/logo.png">    </p:cNvPr>
           <p:cNvPicPr>
             <a:picLocks noChangeAspect="1"/>
           </p:cNvPicPr>
           <p:nvPr/>
         </p:nvPicPr>
         <p:blipFill>
-          <a:blip r:embed="rId3"/>
+          <a:blip r:embed="rId2"/>
           <a:stretch>
             <a:fillRect/>
           </a:stretch>
@@ -11813,7 +12402,7 @@
       </p:pic>
       <p:sp>
         <p:nvSpPr>
-          <p:cNvPr id="20" name="Text 14"/>
+          <p:cNvPr id="13" name="Text 8"/>
           <p:cNvSpPr txBox="1"/>
           <p:nvPr/>
         </p:nvSpPr>
@@ -11844,7 +12433,7 @@
                 <a:ea typeface="Arial" pitchFamily="34" charset="-122"/>
                 <a:cs typeface="Arial" pitchFamily="34" charset="-120"/>
               </a:rPr>
-              <a:t>14 / 17</a:t>
+              <a:t>14 / 18</a:t>
             </a:r>
             <a:endParaRPr lang="en-US" sz="900" dirty="0"/>
           </a:p>
@@ -11852,7 +12441,7 @@
       </p:sp>
       <p:sp>
         <p:nvSpPr>
-          <p:cNvPr id="21" name="Text 15"/>
+          <p:cNvPr id="14" name="Text 9"/>
           <p:cNvSpPr txBox="1"/>
           <p:nvPr/>
         </p:nvSpPr>
@@ -11922,7 +12511,7 @@
         </p:nvSpPr>
         <p:spPr>
           <a:xfrm>
-            <a:off x="502920" y="420624"/>
+            <a:off x="502920" y="365760"/>
             <a:ext cx="8138160" cy="274320"/>
           </a:xfrm>
           <a:prstGeom prst="rect">
@@ -11939,7 +12528,7 @@
               <a:buNone/>
             </a:pPr>
             <a:r>
-              <a:rPr lang="en-US" sz="1250" b="1" dirty="0">
+              <a:rPr lang="en-US" sz="1300" b="1" dirty="0">
                 <a:solidFill>
                   <a:srgbClr val="007F72"/>
                 </a:solidFill>
@@ -11947,26 +12536,88 @@
                 <a:ea typeface="Arial" pitchFamily="34" charset="-122"/>
                 <a:cs typeface="Arial" pitchFamily="34" charset="-120"/>
               </a:rPr>
-              <a:t>Radar · 新一代雷達怎麼看人</a:t>
-            </a:r>
-            <a:endParaRPr lang="en-US" sz="1250" dirty="0"/>
+              <a:t>Radar · 雷達看人：看得到，抓不穩</a:t>
+            </a:r>
+            <a:endParaRPr lang="en-US" sz="1300" dirty="0"/>
           </a:p>
         </p:txBody>
       </p:sp>
       <p:sp>
         <p:nvSpPr>
-          <p:cNvPr id="3" name="Shape 1"/>
+          <p:cNvPr id="3" name="Text 1"/>
+          <p:cNvSpPr txBox="1"/>
+          <p:nvPr/>
+        </p:nvSpPr>
+        <p:spPr>
+          <a:xfrm>
+            <a:off x="502920" y="676656"/>
+            <a:ext cx="8138160" cy="560684"/>
+          </a:xfrm>
+          <a:prstGeom prst="rect">
+            <a:avLst/>
+          </a:prstGeom>
+          <a:noFill/>
+          <a:ln/>
+        </p:spPr>
+        <p:txBody>
+          <a:bodyPr wrap="square" lIns="0" tIns="0" rIns="0" bIns="0" rtlCol="0" anchor="t"/>
+          <a:lstStyle/>
+          <a:p>
+            <a:pPr indent="0" marL="0">
+              <a:lnSpc>
+                <a:spcPct val="116000"/>
+              </a:lnSpc>
+              <a:buNone/>
+            </a:pPr>
+            <a:r>
+              <a:rPr lang="en-US" sz="1700" b="1" dirty="0">
+                <a:solidFill>
+                  <a:srgbClr val="0B1F3A"/>
+                </a:solidFill>
+                <a:latin typeface="Arial" pitchFamily="34" charset="0"/>
+                <a:ea typeface="Arial" pitchFamily="34" charset="-122"/>
+                <a:cs typeface="Arial" pitchFamily="34" charset="-120"/>
+              </a:rPr>
+              <a:t>Radar thấy được người, nhưng không ổn định</a:t>
+            </a:r>
+            <a:endParaRPr lang="en-US" sz="1700" dirty="0"/>
+          </a:p>
+          <a:p>
+            <a:pPr indent="0" marL="0">
+              <a:lnSpc>
+                <a:spcPct val="116000"/>
+              </a:lnSpc>
+              <a:buNone/>
+            </a:pPr>
+            <a:r>
+              <a:rPr lang="en-US" sz="1250" dirty="0">
+                <a:solidFill>
+                  <a:srgbClr val="5F7183"/>
+                </a:solidFill>
+                <a:latin typeface="微軟正黑體" pitchFamily="34" charset="0"/>
+                <a:ea typeface="微軟正黑體" pitchFamily="34" charset="-122"/>
+                <a:cs typeface="微軟正黑體" pitchFamily="34" charset="-120"/>
+              </a:rPr>
+              <a:t>雷達看得到人，但抓不穩：人反射弱，又會一閃一閃</a:t>
+            </a:r>
+            <a:endParaRPr lang="en-US" sz="1700" dirty="0"/>
+          </a:p>
+        </p:txBody>
+      </p:sp>
+      <p:sp>
+        <p:nvSpPr>
+          <p:cNvPr id="4" name="Shape 2"/>
           <p:cNvSpPr/>
           <p:nvPr/>
         </p:nvSpPr>
         <p:spPr>
           <a:xfrm>
-            <a:off x="502920" y="1101852"/>
-            <a:ext cx="1796323" cy="2514600"/>
+            <a:off x="721277" y="1310492"/>
+            <a:ext cx="3217702" cy="2511700"/>
           </a:xfrm>
           <a:prstGeom prst="roundRect">
             <a:avLst>
-              <a:gd name="adj" fmla="val 6108"/>
+              <a:gd name="adj" fmla="val 3641"/>
             </a:avLst>
           </a:prstGeom>
           <a:solidFill>
@@ -11980,9 +12631,93 @@
           </a:ln>
         </p:spPr>
       </p:sp>
+      <p:sp>
+        <p:nvSpPr>
+          <p:cNvPr id="5" name="Shape 3"/>
+          <p:cNvSpPr/>
+          <p:nvPr/>
+        </p:nvSpPr>
+        <p:spPr>
+          <a:xfrm>
+            <a:off x="812717" y="1401932"/>
+            <a:ext cx="3034822" cy="347413"/>
+          </a:xfrm>
+          <a:prstGeom prst="roundRect">
+            <a:avLst>
+              <a:gd name="adj" fmla="val 13160"/>
+            </a:avLst>
+          </a:prstGeom>
+          <a:solidFill>
+            <a:srgbClr val="8A5A00"/>
+          </a:solidFill>
+          <a:ln/>
+        </p:spPr>
+      </p:sp>
+      <p:sp>
+        <p:nvSpPr>
+          <p:cNvPr id="6" name="Text 4"/>
+          <p:cNvSpPr txBox="1"/>
+          <p:nvPr/>
+        </p:nvSpPr>
+        <p:spPr>
+          <a:xfrm>
+            <a:off x="885869" y="1429364"/>
+            <a:ext cx="2888518" cy="310837"/>
+          </a:xfrm>
+          <a:prstGeom prst="rect">
+            <a:avLst/>
+          </a:prstGeom>
+          <a:noFill/>
+          <a:ln/>
+        </p:spPr>
+        <p:txBody>
+          <a:bodyPr wrap="square" lIns="0" tIns="0" rIns="0" bIns="0" rtlCol="0" anchor="t"/>
+          <a:lstStyle/>
+          <a:p>
+            <a:pPr algn="ctr" indent="0" marL="0">
+              <a:lnSpc>
+                <a:spcPct val="104000"/>
+              </a:lnSpc>
+              <a:buNone/>
+            </a:pPr>
+            <a:r>
+              <a:rPr lang="en-US" sz="950" b="1" dirty="0">
+                <a:solidFill>
+                  <a:srgbClr val="FFFFFF"/>
+                </a:solidFill>
+                <a:latin typeface="Arial" pitchFamily="34" charset="0"/>
+                <a:ea typeface="Arial" pitchFamily="34" charset="-122"/>
+                <a:cs typeface="Arial" pitchFamily="34" charset="-120"/>
+              </a:rPr>
+              <a:t>Quạt = vùng radar trước: người ở trong, 0 điểm</a:t>
+            </a:r>
+            <a:endParaRPr lang="en-US" sz="950" dirty="0"/>
+          </a:p>
+          <a:p>
+            <a:pPr algn="ctr" indent="0" marL="0">
+              <a:lnSpc>
+                <a:spcPct val="104000"/>
+              </a:lnSpc>
+              <a:buNone/>
+            </a:pPr>
+            <a:r>
+              <a:rPr lang="en-US" sz="850" dirty="0">
+                <a:solidFill>
+                  <a:srgbClr val="FFFFFF"/>
+                </a:solidFill>
+                <a:latin typeface="微軟正黑體" pitchFamily="34" charset="0"/>
+                <a:ea typeface="微軟正黑體" pitchFamily="34" charset="-122"/>
+                <a:cs typeface="微軟正黑體" pitchFamily="34" charset="-120"/>
+              </a:rPr>
+              <a:t>扇形＝前雷達照得到的範圍：行人都在裡面，0 個點</a:t>
+            </a:r>
+            <a:endParaRPr lang="en-US" sz="950" dirty="0"/>
+          </a:p>
+        </p:txBody>
+      </p:sp>
       <p:pic>
         <p:nvPicPr>
-          <p:cNvPr id="4" name="Image 0" descr="/Users/tsengchenghsun/Class/carClass/Claude outputs/第七週(10-22)/src/img/w7_walker.jpg">    </p:cNvPr>
+          <p:cNvPr id="7" name="Image 0" descr="/Users/tsengchenghsun/Class/carClass/Claude outputs/第七週(10-22)/src/img/w7_silent_bev.jpg">    </p:cNvPr>
           <p:cNvPicPr>
             <a:picLocks noChangeAspect="1"/>
           </p:cNvPicPr>
@@ -11996,8 +12731,8 @@
         </p:blipFill>
         <p:spPr>
           <a:xfrm>
-            <a:off x="576072" y="1255602"/>
-            <a:ext cx="1650019" cy="2024220"/>
+            <a:off x="812717" y="1804209"/>
+            <a:ext cx="3034822" cy="1707087"/>
           </a:xfrm>
           <a:prstGeom prst="rect">
             <a:avLst/>
@@ -12006,14 +12741,14 @@
       </p:pic>
       <p:sp>
         <p:nvSpPr>
-          <p:cNvPr id="5" name="Text 2"/>
+          <p:cNvPr id="8" name="Text 5"/>
           <p:cNvSpPr txBox="1"/>
           <p:nvPr/>
         </p:nvSpPr>
         <p:spPr>
           <a:xfrm>
-            <a:off x="576072" y="3396996"/>
-            <a:ext cx="1650019" cy="182880"/>
+            <a:off x="812717" y="3529584"/>
+            <a:ext cx="3034822" cy="182880"/>
           </a:xfrm>
           <a:prstGeom prst="rect">
             <a:avLst/>
@@ -12037,7 +12772,7 @@
                 <a:ea typeface="Arial" pitchFamily="34" charset="-122"/>
                 <a:cs typeface="Arial" pitchFamily="34" charset="-120"/>
               </a:rPr>
-              <a:t>nuScenes · CC BY-NC-SA 4.0</a:t>
+              <a:t>nuScenes scene-0553（波士頓）· CC BY-NC-SA 4.0</a:t>
             </a:r>
             <a:endParaRPr lang="en-US" sz="700" dirty="0"/>
           </a:p>
@@ -12045,14 +12780,149 @@
       </p:sp>
       <p:sp>
         <p:nvSpPr>
-          <p:cNvPr id="6" name="Text 3"/>
+          <p:cNvPr id="9" name="Shape 6"/>
+          <p:cNvSpPr/>
+          <p:nvPr/>
+        </p:nvSpPr>
+        <p:spPr>
+          <a:xfrm>
+            <a:off x="4213298" y="1310492"/>
+            <a:ext cx="4209425" cy="2511700"/>
+          </a:xfrm>
+          <a:prstGeom prst="roundRect">
+            <a:avLst>
+              <a:gd name="adj" fmla="val 3641"/>
+            </a:avLst>
+          </a:prstGeom>
+          <a:solidFill>
+            <a:srgbClr val="FFFFFF"/>
+          </a:solidFill>
+          <a:ln w="12700">
+            <a:solidFill>
+              <a:srgbClr val="DBE3EA"/>
+            </a:solidFill>
+            <a:prstDash val="solid"/>
+          </a:ln>
+        </p:spPr>
+      </p:sp>
+      <p:sp>
+        <p:nvSpPr>
+          <p:cNvPr id="10" name="Shape 7"/>
+          <p:cNvSpPr/>
+          <p:nvPr/>
+        </p:nvSpPr>
+        <p:spPr>
+          <a:xfrm>
+            <a:off x="4304738" y="1401932"/>
+            <a:ext cx="4026545" cy="347413"/>
+          </a:xfrm>
+          <a:prstGeom prst="roundRect">
+            <a:avLst>
+              <a:gd name="adj" fmla="val 13160"/>
+            </a:avLst>
+          </a:prstGeom>
+          <a:solidFill>
+            <a:srgbClr val="007F72"/>
+          </a:solidFill>
+          <a:ln/>
+        </p:spPr>
+      </p:sp>
+      <p:sp>
+        <p:nvSpPr>
+          <p:cNvPr id="11" name="Text 8"/>
           <p:cNvSpPr txBox="1"/>
           <p:nvPr/>
         </p:nvSpPr>
         <p:spPr>
           <a:xfrm>
-            <a:off x="2610139" y="914400"/>
-            <a:ext cx="6030941" cy="2889504"/>
+            <a:off x="4377890" y="1429364"/>
+            <a:ext cx="3880241" cy="310837"/>
+          </a:xfrm>
+          <a:prstGeom prst="rect">
+            <a:avLst/>
+          </a:prstGeom>
+          <a:noFill/>
+          <a:ln/>
+        </p:spPr>
+        <p:txBody>
+          <a:bodyPr wrap="square" lIns="0" tIns="0" rIns="0" bIns="0" rtlCol="0" anchor="t"/>
+          <a:lstStyle/>
+          <a:p>
+            <a:pPr algn="ctr" indent="0" marL="0">
+              <a:lnSpc>
+                <a:spcPct val="104000"/>
+              </a:lnSpc>
+              <a:buNone/>
+            </a:pPr>
+            <a:r>
+              <a:rPr lang="en-US" sz="950" b="1" dirty="0">
+                <a:solidFill>
+                  <a:srgbClr val="FFFFFF"/>
+                </a:solidFill>
+                <a:latin typeface="Arial" pitchFamily="34" charset="0"/>
+                <a:ea typeface="Arial" pitchFamily="34" charset="-122"/>
+                <a:cs typeface="Arial" pitchFamily="34" charset="-120"/>
+              </a:rPr>
+              <a:t>Lidar: người nào cũng có điểm</a:t>
+            </a:r>
+            <a:endParaRPr lang="en-US" sz="950" dirty="0"/>
+          </a:p>
+          <a:p>
+            <a:pPr algn="ctr" indent="0" marL="0">
+              <a:lnSpc>
+                <a:spcPct val="104000"/>
+              </a:lnSpc>
+              <a:buNone/>
+            </a:pPr>
+            <a:r>
+              <a:rPr lang="en-US" sz="850" dirty="0">
+                <a:solidFill>
+                  <a:srgbClr val="FFFFFF"/>
+                </a:solidFill>
+                <a:latin typeface="微軟正黑體" pitchFamily="34" charset="0"/>
+                <a:ea typeface="微軟正黑體" pitchFamily="34" charset="-122"/>
+                <a:cs typeface="微軟正黑體" pitchFamily="34" charset="-120"/>
+              </a:rPr>
+              <a:t>光達：每個人身上都有點</a:t>
+            </a:r>
+            <a:endParaRPr lang="en-US" sz="950" dirty="0"/>
+          </a:p>
+        </p:txBody>
+      </p:sp>
+      <p:pic>
+        <p:nvPicPr>
+          <p:cNvPr id="12" name="Image 1" descr="/Users/tsengchenghsun/Class/carClass/Claude outputs/第七週(10-22)/src/img/w7_silent_lidar.jpg">    </p:cNvPr>
+          <p:cNvPicPr>
+            <a:picLocks noChangeAspect="1"/>
+          </p:cNvPicPr>
+          <p:nvPr/>
+        </p:nvPicPr>
+        <p:blipFill>
+          <a:blip r:embed="rId2"/>
+          <a:stretch>
+            <a:fillRect/>
+          </a:stretch>
+        </p:blipFill>
+        <p:spPr>
+          <a:xfrm>
+            <a:off x="4304738" y="1804209"/>
+            <a:ext cx="4026545" cy="1707087"/>
+          </a:xfrm>
+          <a:prstGeom prst="rect">
+            <a:avLst/>
+          </a:prstGeom>
+        </p:spPr>
+      </p:pic>
+      <p:sp>
+        <p:nvSpPr>
+          <p:cNvPr id="13" name="Text 9"/>
+          <p:cNvSpPr txBox="1"/>
+          <p:nvPr/>
+        </p:nvSpPr>
+        <p:spPr>
+          <a:xfrm>
+            <a:off x="4304738" y="3529584"/>
+            <a:ext cx="4026545" cy="182880"/>
           </a:xfrm>
           <a:prstGeom prst="rect">
             <a:avLst/>
@@ -12064,104 +12934,38 @@
           <a:bodyPr wrap="square" lIns="0" tIns="0" rIns="0" bIns="0" rtlCol="0" anchor="ctr"/>
           <a:lstStyle/>
           <a:p>
-            <a:pPr indent="0" marL="0">
-              <a:lnSpc>
-                <a:spcPct val="120000"/>
-              </a:lnSpc>
-              <a:buNone/>
-            </a:pPr>
-            <a:r>
-              <a:rPr lang="en-US" sz="2300" b="1" dirty="0">
-                <a:solidFill>
-                  <a:srgbClr val="0B1F3A"/>
+            <a:pPr algn="ctr" indent="0" marL="0">
+              <a:buNone/>
+            </a:pPr>
+            <a:r>
+              <a:rPr lang="en-US" sz="700" dirty="0">
+                <a:solidFill>
+                  <a:srgbClr val="5F7183"/>
                 </a:solidFill>
                 <a:latin typeface="Arial" pitchFamily="34" charset="0"/>
                 <a:ea typeface="Arial" pitchFamily="34" charset="-122"/>
                 <a:cs typeface="Arial" pitchFamily="34" charset="-120"/>
               </a:rPr>
-              <a:t>Radar mới nhìn người: nhiều điểm hơn, xem chuyển động, xem lâu hơn, ghép với camera</a:t>
-            </a:r>
-            <a:endParaRPr lang="en-US" sz="2300" dirty="0"/>
-          </a:p>
-          <a:p>
-            <a:pPr indent="0" marL="0">
-              <a:lnSpc>
-                <a:spcPct val="120000"/>
-              </a:lnSpc>
-              <a:buNone/>
-            </a:pPr>
-            <a:r>
-              <a:rPr lang="en-US" sz="1400" b="1" dirty="0">
-                <a:solidFill>
-                  <a:srgbClr val="007F72"/>
-                </a:solidFill>
-                <a:latin typeface="微軟正黑體" pitchFamily="34" charset="0"/>
-                <a:ea typeface="微軟正黑體" pitchFamily="34" charset="-122"/>
-                <a:cs typeface="微軟正黑體" pitchFamily="34" charset="-120"/>
-              </a:rPr>
-              <a:t>新一代雷達怎麼看人：點更多、看動作、看久一點、跟相機一起看</a:t>
-            </a:r>
-            <a:endParaRPr lang="en-US" sz="2300" dirty="0"/>
-          </a:p>
-          <a:p>
-            <a:pPr indent="0" marL="0">
-              <a:lnSpc>
-                <a:spcPct val="120000"/>
-              </a:lnSpc>
-              <a:spcBef>
-                <a:spcPts val="1440"/>
-              </a:spcBef>
-              <a:buNone/>
-            </a:pPr>
-            <a:r>
-              <a:rPr lang="en-US" sz="1250" dirty="0">
-                <a:solidFill>
-                  <a:srgbClr val="5F7183"/>
-                </a:solidFill>
-                <a:latin typeface="Arial" pitchFamily="34" charset="0"/>
-                <a:ea typeface="Arial" pitchFamily="34" charset="-122"/>
-                <a:cs typeface="Arial" pitchFamily="34" charset="-120"/>
-              </a:rPr>
-              <a:t>① 4D: nhiều anten, góc mịn hơn, đo được độ cao. ② Micro-Doppler: tay chân đung đưa. ③ Cộng nhiều lần quét, bám theo. ④ Ghép với camera (hoặc ảnh nhiệt).</a:t>
-            </a:r>
-            <a:endParaRPr lang="en-US" sz="2300" dirty="0"/>
-          </a:p>
-          <a:p>
-            <a:pPr indent="0" marL="0">
-              <a:lnSpc>
-                <a:spcPct val="120000"/>
-              </a:lnSpc>
-              <a:buNone/>
-            </a:pPr>
-            <a:r>
-              <a:rPr lang="en-US" sz="1150" dirty="0">
-                <a:solidFill>
-                  <a:srgbClr val="5F7183"/>
-                </a:solidFill>
-                <a:latin typeface="微軟正黑體" pitchFamily="34" charset="0"/>
-                <a:ea typeface="微軟正黑體" pitchFamily="34" charset="-122"/>
-                <a:cs typeface="微軟正黑體" pitchFamily="34" charset="-120"/>
-              </a:rPr>
-              <a:t>① 4D：天線多、角度細、量得出高度。② 微都卜勒：手腳一前一後擺的速度節奏。③ 好幾次掃描疊起來，再追蹤。④ 跟相機（或熱像）合起來。</a:t>
-            </a:r>
-            <a:endParaRPr lang="en-US" sz="2300" dirty="0"/>
+              <a:t>框：官方標註，黃框＝框裡雷達點 0 個</a:t>
+            </a:r>
+            <a:endParaRPr lang="en-US" sz="700" dirty="0"/>
           </a:p>
         </p:txBody>
       </p:sp>
       <p:sp>
         <p:nvSpPr>
-          <p:cNvPr id="7" name="Shape 4"/>
+          <p:cNvPr id="14" name="Shape 10"/>
           <p:cNvSpPr/>
           <p:nvPr/>
         </p:nvSpPr>
         <p:spPr>
           <a:xfrm>
-            <a:off x="502920" y="3913632"/>
-            <a:ext cx="8138160" cy="621792"/>
+            <a:off x="502920" y="3931920"/>
+            <a:ext cx="8138160" cy="566928"/>
           </a:xfrm>
           <a:prstGeom prst="roundRect">
             <a:avLst>
-              <a:gd name="adj" fmla="val 13235"/>
+              <a:gd name="adj" fmla="val 14516"/>
             </a:avLst>
           </a:prstGeom>
           <a:solidFill>
@@ -12177,14 +12981,14 @@
       </p:sp>
       <p:sp>
         <p:nvSpPr>
-          <p:cNvPr id="8" name="Text 5"/>
+          <p:cNvPr id="15" name="Text 11"/>
           <p:cNvSpPr txBox="1"/>
           <p:nvPr/>
         </p:nvSpPr>
         <p:spPr>
           <a:xfrm>
-            <a:off x="685800" y="3986784"/>
-            <a:ext cx="7772400" cy="493776"/>
+            <a:off x="685800" y="3995928"/>
+            <a:ext cx="7772400" cy="457200"/>
           </a:xfrm>
           <a:prstGeom prst="rect">
             <a:avLst/>
@@ -12203,7 +13007,7 @@
               <a:buNone/>
             </a:pPr>
             <a:r>
-              <a:rPr lang="en-US" sz="1250" b="1" dirty="0">
+              <a:rPr lang="en-US" sz="1200" b="1" dirty="0">
                 <a:solidFill>
                   <a:srgbClr val="7A4E00"/>
                 </a:solidFill>
@@ -12211,9 +13015,9 @@
                 <a:ea typeface="Arial" pitchFamily="34" charset="-122"/>
                 <a:cs typeface="Arial" pitchFamily="34" charset="-120"/>
               </a:rPr>
-              <a:t>Radar không phải không hợp để nhìn người — chỉ là không nhìn một mình.</a:t>
-            </a:r>
-            <a:endParaRPr lang="en-US" sz="1250" dirty="0"/>
+              <a:t>7/10 người bị bắt ít nhất một lần, nhưng mỗi lúc chỉ 2–3/10. Dùng được, nhưng không dùng một mình.</a:t>
+            </a:r>
+            <a:endParaRPr lang="en-US" sz="1200" dirty="0"/>
           </a:p>
           <a:p>
             <a:pPr indent="0" marL="0">
@@ -12223,7 +13027,7 @@
               <a:buNone/>
             </a:pPr>
             <a:r>
-              <a:rPr lang="en-US" sz="1150" dirty="0">
+              <a:rPr lang="en-US" sz="1100" dirty="0">
                 <a:solidFill>
                   <a:srgbClr val="7A4E00"/>
                 </a:solidFill>
@@ -12231,22 +13035,22 @@
                 <a:ea typeface="微軟正黑體" pitchFamily="34" charset="-122"/>
                 <a:cs typeface="微軟正黑體" pitchFamily="34" charset="-120"/>
               </a:rPr>
-              <a:t>雷達不是不適合看人，是不能單獨看人。</a:t>
-            </a:r>
-            <a:endParaRPr lang="en-US" sz="1250" dirty="0"/>
+              <a:t>七成的人至少被抓到一次，但每一瞬間只有兩到三成。不是不能用，是不能單獨用。</a:t>
+            </a:r>
+            <a:endParaRPr lang="en-US" sz="1200" dirty="0"/>
           </a:p>
         </p:txBody>
       </p:sp>
       <p:sp>
         <p:nvSpPr>
-          <p:cNvPr id="9" name="Shape 6"/>
+          <p:cNvPr id="16" name="Shape 12"/>
           <p:cNvSpPr/>
           <p:nvPr/>
         </p:nvSpPr>
         <p:spPr>
           <a:xfrm>
-            <a:off x="6141129" y="365760"/>
-            <a:ext cx="2499951" cy="310896"/>
+            <a:off x="5912860" y="365760"/>
+            <a:ext cx="2728220" cy="310896"/>
           </a:xfrm>
           <a:prstGeom prst="roundRect">
             <a:avLst>
@@ -12266,14 +13070,14 @@
       </p:sp>
       <p:sp>
         <p:nvSpPr>
-          <p:cNvPr id="10" name="Text 7"/>
+          <p:cNvPr id="17" name="Text 13"/>
           <p:cNvSpPr txBox="1"/>
           <p:nvPr/>
         </p:nvSpPr>
         <p:spPr>
           <a:xfrm>
-            <a:off x="6269145" y="384048"/>
-            <a:ext cx="2317071" cy="274320"/>
+            <a:off x="6040876" y="384048"/>
+            <a:ext cx="2545340" cy="274320"/>
           </a:xfrm>
           <a:prstGeom prst="rect">
             <a:avLst/>
@@ -12317,7 +13121,7 @@
                 <a:ea typeface="Arial" pitchFamily="34" charset="-122"/>
                 <a:cs typeface="Arial" pitchFamily="34" charset="-120"/>
               </a:rPr>
-              <a:t>nhìn dáng đi: tay chân đung đưa</a:t>
+              <a:t>đèn pin chiếu gương và chiếu áo len</a:t>
             </a:r>
             <a:endParaRPr lang="en-US" sz="950" dirty="0"/>
           </a:p>
@@ -12354,7 +13158,7 @@
                 <a:ea typeface="微軟正黑體" pitchFamily="34" charset="-122"/>
                 <a:cs typeface="微軟正黑體" pitchFamily="34" charset="-120"/>
               </a:rPr>
-              <a:t>看一個人走路：手腳一前一後</a:t>
+              <a:t>手電筒照鏡子、照毛衣</a:t>
             </a:r>
             <a:endParaRPr lang="en-US" sz="950" dirty="0"/>
           </a:p>
@@ -12362,14 +13166,14 @@
       </p:sp>
       <p:pic>
         <p:nvPicPr>
-          <p:cNvPr id="12" name="Image 1" descr="/Users/tsengchenghsun/Class/carClass/Claude outputs/第七週(10-22)/src/logo.png">    </p:cNvPr>
+          <p:cNvPr id="19" name="Image 2" descr="/Users/tsengchenghsun/Class/carClass/Claude outputs/第七週(10-22)/src/logo.png">    </p:cNvPr>
           <p:cNvPicPr>
             <a:picLocks noChangeAspect="1"/>
           </p:cNvPicPr>
           <p:nvPr/>
         </p:nvPicPr>
         <p:blipFill>
-          <a:blip r:embed="rId2"/>
+          <a:blip r:embed="rId3"/>
           <a:stretch>
             <a:fillRect/>
           </a:stretch>
@@ -12386,7 +13190,7 @@
       </p:pic>
       <p:sp>
         <p:nvSpPr>
-          <p:cNvPr id="13" name="Text 8"/>
+          <p:cNvPr id="20" name="Text 14"/>
           <p:cNvSpPr txBox="1"/>
           <p:nvPr/>
         </p:nvSpPr>
@@ -12417,7 +13221,7 @@
                 <a:ea typeface="Arial" pitchFamily="34" charset="-122"/>
                 <a:cs typeface="Arial" pitchFamily="34" charset="-120"/>
               </a:rPr>
-              <a:t>15 / 17</a:t>
+              <a:t>15 / 18</a:t>
             </a:r>
             <a:endParaRPr lang="en-US" sz="900" dirty="0"/>
           </a:p>
@@ -12425,7 +13229,7 @@
       </p:sp>
       <p:sp>
         <p:nvSpPr>
-          <p:cNvPr id="14" name="Text 9"/>
+          <p:cNvPr id="21" name="Text 15"/>
           <p:cNvSpPr txBox="1"/>
           <p:nvPr/>
         </p:nvSpPr>
@@ -12520,7 +13324,7 @@
                 <a:ea typeface="Arial" pitchFamily="34" charset="-122"/>
                 <a:cs typeface="Arial" pitchFamily="34" charset="-120"/>
               </a:rPr>
-              <a:t>Nguy hiểm nhất · 最危險的那一種</a:t>
+              <a:t>Radar · 新一代雷達怎麼看人</a:t>
             </a:r>
             <a:endParaRPr lang="en-US" sz="1250" dirty="0"/>
           </a:p>
@@ -12535,11 +13339,11 @@
         <p:spPr>
           <a:xfrm>
             <a:off x="502920" y="1101852"/>
-            <a:ext cx="3977640" cy="2514600"/>
+            <a:ext cx="1796323" cy="2514600"/>
           </a:xfrm>
           <a:prstGeom prst="roundRect">
             <a:avLst>
-              <a:gd name="adj" fmla="val 4364"/>
+              <a:gd name="adj" fmla="val 6108"/>
             </a:avLst>
           </a:prstGeom>
           <a:solidFill>
@@ -12555,7 +13359,7 @@
       </p:sp>
       <p:pic>
         <p:nvPicPr>
-          <p:cNvPr id="4" name="Image 0" descr="/Users/tsengchenghsun/Class/carClass/Claude outputs/第七週(10-22)/src/img/w7_silent_cam.jpg">    </p:cNvPr>
+          <p:cNvPr id="4" name="Image 0" descr="/Users/tsengchenghsun/Class/carClass/Claude outputs/第七週(10-22)/src/img/w7_walker.jpg">    </p:cNvPr>
           <p:cNvPicPr>
             <a:picLocks noChangeAspect="1"/>
           </p:cNvPicPr>
@@ -12569,8 +13373,8 @@
         </p:blipFill>
         <p:spPr>
           <a:xfrm>
-            <a:off x="576072" y="1317860"/>
-            <a:ext cx="3831336" cy="1899704"/>
+            <a:off x="576072" y="1255602"/>
+            <a:ext cx="1650019" cy="2024220"/>
           </a:xfrm>
           <a:prstGeom prst="rect">
             <a:avLst/>
@@ -12586,7 +13390,7 @@
         <p:spPr>
           <a:xfrm>
             <a:off x="576072" y="3396996"/>
-            <a:ext cx="3831336" cy="182880"/>
+            <a:ext cx="1650019" cy="182880"/>
           </a:xfrm>
           <a:prstGeom prst="rect">
             <a:avLst/>
@@ -12610,7 +13414,7 @@
                 <a:ea typeface="Arial" pitchFamily="34" charset="-122"/>
                 <a:cs typeface="Arial" pitchFamily="34" charset="-120"/>
               </a:rPr>
-              <a:t>nuScenes scene-0553（波士頓）· CC BY-NC-SA 4.0</a:t>
+              <a:t>nuScenes · CC BY-NC-SA 4.0</a:t>
             </a:r>
             <a:endParaRPr lang="en-US" sz="700" dirty="0"/>
           </a:p>
@@ -12624,8 +13428,8 @@
         </p:nvSpPr>
         <p:spPr>
           <a:xfrm>
-            <a:off x="4791456" y="914400"/>
-            <a:ext cx="3849624" cy="2889504"/>
+            <a:off x="2610139" y="914400"/>
+            <a:ext cx="6030941" cy="2889504"/>
           </a:xfrm>
           <a:prstGeom prst="rect">
             <a:avLst/>
@@ -12652,7 +13456,7 @@
                 <a:ea typeface="Arial" pitchFamily="34" charset="-122"/>
                 <a:cs typeface="Arial" pitchFamily="34" charset="-120"/>
               </a:rPr>
-              <a:t>Nguy hiểm nhất: không thấy mà báo «không sao»</a:t>
+              <a:t>Radar mới nhìn người: nhiều điểm hơn, xem chuyển động, xem lâu hơn, ghép với camera</a:t>
             </a:r>
             <a:endParaRPr lang="en-US" sz="2300" dirty="0"/>
           </a:p>
@@ -12672,7 +13476,7 @@
                 <a:ea typeface="微軟正黑體" pitchFamily="34" charset="-122"/>
                 <a:cs typeface="微軟正黑體" pitchFamily="34" charset="-120"/>
               </a:rPr>
-              <a:t>最危險的不是看不到，是看不到卻說沒事</a:t>
+              <a:t>新一代雷達怎麼看人：點更多、看動作、看久一點、跟相機一起看</a:t>
             </a:r>
             <a:endParaRPr lang="en-US" sz="2300" dirty="0"/>
           </a:p>
@@ -12695,7 +13499,7 @@
                 <a:ea typeface="Arial" pitchFamily="34" charset="-122"/>
                 <a:cs typeface="Arial" pitchFamily="34" charset="-120"/>
               </a:rPr>
-              <a:t>Radar không nói «tôi không thấy», nó báo «không có gì». Cùng kiểu: HC-SR04 bị bùn che, GNSS đa đường, xe cứu hoả đứng yên.</a:t>
+              <a:t>① 4D: nhiều anten, góc mịn hơn, đo được độ cao. ② Micro-Doppler: tay chân đung đưa. ③ Cộng nhiều lần quét, bám theo. ④ Ghép với camera (hoặc ảnh nhiệt).</a:t>
             </a:r>
             <a:endParaRPr lang="en-US" sz="2300" dirty="0"/>
           </a:p>
@@ -12715,7 +13519,7 @@
                 <a:ea typeface="微軟正黑體" pitchFamily="34" charset="-122"/>
                 <a:cs typeface="微軟正黑體" pitchFamily="34" charset="-120"/>
               </a:rPr>
-              <a:t>雷達不會說「我看不到」，它說「沒東西」。同一種壞法：HC-SR04 被泥巴蓋住、衛星多路徑、停著的消防車。</a:t>
+              <a:t>① 4D：天線多、角度細、量得出高度。② 微都卜勒：手腳一前一後擺的速度節奏。③ 好幾次掃描疊起來，再追蹤。④ 跟相機（或熱像）合起來。</a:t>
             </a:r>
             <a:endParaRPr lang="en-US" sz="2300" dirty="0"/>
           </a:p>
@@ -12784,7 +13588,7 @@
                 <a:ea typeface="Arial" pitchFamily="34" charset="-122"/>
                 <a:cs typeface="Arial" pitchFamily="34" charset="-120"/>
               </a:rPr>
-              <a:t>Vì vậy mỗi cảm biến phải nói được «lúc này tôi không đáng tin» — đó là tiết sau: hợp nhất.</a:t>
+              <a:t>Radar không phải không hợp để nhìn người — chỉ là không nhìn một mình.</a:t>
             </a:r>
             <a:endParaRPr lang="en-US" sz="1250" dirty="0"/>
           </a:p>
@@ -12804,7 +13608,7 @@
                 <a:ea typeface="微軟正黑體" pitchFamily="34" charset="-122"/>
                 <a:cs typeface="微軟正黑體" pitchFamily="34" charset="-120"/>
               </a:rPr>
-              <a:t>所以每一顆都要能說「我現在不可靠」——這就是下一節的融合。</a:t>
+              <a:t>雷達不是不適合看人，是不能單獨看人。</a:t>
             </a:r>
             <a:endParaRPr lang="en-US" sz="1250" dirty="0"/>
           </a:p>
@@ -12818,8 +13622,8 @@
         </p:nvSpPr>
         <p:spPr>
           <a:xfrm>
-            <a:off x="5798725" y="365760"/>
-            <a:ext cx="2842355" cy="310896"/>
+            <a:off x="6141129" y="365760"/>
+            <a:ext cx="2499951" cy="310896"/>
           </a:xfrm>
           <a:prstGeom prst="roundRect">
             <a:avLst>
@@ -12845,8 +13649,8 @@
         </p:nvSpPr>
         <p:spPr>
           <a:xfrm>
-            <a:off x="5926741" y="384048"/>
-            <a:ext cx="2659475" cy="274320"/>
+            <a:off x="6269145" y="384048"/>
+            <a:ext cx="2317071" cy="274320"/>
           </a:xfrm>
           <a:prstGeom prst="rect">
             <a:avLst/>
@@ -12890,7 +13694,7 @@
                 <a:ea typeface="Arial" pitchFamily="34" charset="-122"/>
                 <a:cs typeface="Arial" pitchFamily="34" charset="-120"/>
               </a:rPr>
-              <a:t>đồng hồ xăng hỏng mà vẫn chỉ đầy bình</a:t>
+              <a:t>nhìn dáng đi: tay chân đung đưa</a:t>
             </a:r>
             <a:endParaRPr lang="en-US" sz="950" dirty="0"/>
           </a:p>
@@ -12927,7 +13731,7 @@
                 <a:ea typeface="微軟正黑體" pitchFamily="34" charset="-122"/>
                 <a:cs typeface="微軟正黑體" pitchFamily="34" charset="-120"/>
               </a:rPr>
-              <a:t>油表壞了，還一直顯示滿格</a:t>
+              <a:t>看一個人走路：手腳一前一後</a:t>
             </a:r>
             <a:endParaRPr lang="en-US" sz="950" dirty="0"/>
           </a:p>
@@ -12990,7 +13794,7 @@
                 <a:ea typeface="Arial" pitchFamily="34" charset="-122"/>
                 <a:cs typeface="Arial" pitchFamily="34" charset="-120"/>
               </a:rPr>
-              <a:t>16 / 17</a:t>
+              <a:t>16 / 18</a:t>
             </a:r>
             <a:endParaRPr lang="en-US" sz="900" dirty="0"/>
           </a:p>
@@ -13046,6 +13850,579 @@
 <file path=ppt/slides/slide17.xml><?xml version="1.0" encoding="utf-8"?>
 <p:sld xmlns:a="http://schemas.openxmlformats.org/drawingml/2006/main" xmlns:r="http://schemas.openxmlformats.org/officeDocument/2006/relationships" xmlns:p="http://schemas.openxmlformats.org/presentationml/2006/main">
   <p:cSld name="Slide 17">
+    <p:spTree>
+      <p:nvGrpSpPr>
+        <p:cNvPr id="1" name=""/>
+        <p:cNvGrpSpPr/>
+        <p:nvPr/>
+      </p:nvGrpSpPr>
+      <p:grpSpPr>
+        <a:xfrm>
+          <a:off x="0" y="0"/>
+          <a:ext cx="1" cy="1"/>
+          <a:chOff x="0" y="0"/>
+          <a:chExt cx="0" cy="0"/>
+        </a:xfrm>
+      </p:grpSpPr>
+      <p:sp>
+        <p:nvSpPr>
+          <p:cNvPr id="2" name="Text 0"/>
+          <p:cNvSpPr txBox="1"/>
+          <p:nvPr/>
+        </p:nvSpPr>
+        <p:spPr>
+          <a:xfrm>
+            <a:off x="502920" y="420624"/>
+            <a:ext cx="8138160" cy="274320"/>
+          </a:xfrm>
+          <a:prstGeom prst="rect">
+            <a:avLst/>
+          </a:prstGeom>
+          <a:noFill/>
+          <a:ln/>
+        </p:spPr>
+        <p:txBody>
+          <a:bodyPr wrap="square" lIns="0" tIns="0" rIns="0" bIns="0" rtlCol="0" anchor="ctr"/>
+          <a:lstStyle/>
+          <a:p>
+            <a:pPr indent="0" marL="0">
+              <a:buNone/>
+            </a:pPr>
+            <a:r>
+              <a:rPr lang="en-US" sz="1250" b="1" dirty="0">
+                <a:solidFill>
+                  <a:srgbClr val="007F72"/>
+                </a:solidFill>
+                <a:latin typeface="Arial" pitchFamily="34" charset="0"/>
+                <a:ea typeface="Arial" pitchFamily="34" charset="-122"/>
+                <a:cs typeface="Arial" pitchFamily="34" charset="-120"/>
+              </a:rPr>
+              <a:t>Nguy hiểm nhất · 最危險的那一種</a:t>
+            </a:r>
+            <a:endParaRPr lang="en-US" sz="1250" dirty="0"/>
+          </a:p>
+        </p:txBody>
+      </p:sp>
+      <p:sp>
+        <p:nvSpPr>
+          <p:cNvPr id="3" name="Shape 1"/>
+          <p:cNvSpPr/>
+          <p:nvPr/>
+        </p:nvSpPr>
+        <p:spPr>
+          <a:xfrm>
+            <a:off x="502920" y="1101852"/>
+            <a:ext cx="3977640" cy="2514600"/>
+          </a:xfrm>
+          <a:prstGeom prst="roundRect">
+            <a:avLst>
+              <a:gd name="adj" fmla="val 4364"/>
+            </a:avLst>
+          </a:prstGeom>
+          <a:solidFill>
+            <a:srgbClr val="FFFFFF"/>
+          </a:solidFill>
+          <a:ln w="12700">
+            <a:solidFill>
+              <a:srgbClr val="DBE3EA"/>
+            </a:solidFill>
+            <a:prstDash val="solid"/>
+          </a:ln>
+        </p:spPr>
+      </p:sp>
+      <p:pic>
+        <p:nvPicPr>
+          <p:cNvPr id="4" name="Image 0" descr="/Users/tsengchenghsun/Class/carClass/Claude outputs/第七週(10-22)/src/img/w7_silent_cam.jpg">    </p:cNvPr>
+          <p:cNvPicPr>
+            <a:picLocks noChangeAspect="1"/>
+          </p:cNvPicPr>
+          <p:nvPr/>
+        </p:nvPicPr>
+        <p:blipFill>
+          <a:blip r:embed="rId1"/>
+          <a:stretch>
+            <a:fillRect/>
+          </a:stretch>
+        </p:blipFill>
+        <p:spPr>
+          <a:xfrm>
+            <a:off x="576072" y="1317860"/>
+            <a:ext cx="3831336" cy="1899704"/>
+          </a:xfrm>
+          <a:prstGeom prst="rect">
+            <a:avLst/>
+          </a:prstGeom>
+        </p:spPr>
+      </p:pic>
+      <p:sp>
+        <p:nvSpPr>
+          <p:cNvPr id="5" name="Text 2"/>
+          <p:cNvSpPr txBox="1"/>
+          <p:nvPr/>
+        </p:nvSpPr>
+        <p:spPr>
+          <a:xfrm>
+            <a:off x="576072" y="3396996"/>
+            <a:ext cx="3831336" cy="182880"/>
+          </a:xfrm>
+          <a:prstGeom prst="rect">
+            <a:avLst/>
+          </a:prstGeom>
+          <a:noFill/>
+          <a:ln/>
+        </p:spPr>
+        <p:txBody>
+          <a:bodyPr wrap="square" lIns="0" tIns="0" rIns="0" bIns="0" rtlCol="0" anchor="ctr"/>
+          <a:lstStyle/>
+          <a:p>
+            <a:pPr algn="ctr" indent="0" marL="0">
+              <a:buNone/>
+            </a:pPr>
+            <a:r>
+              <a:rPr lang="en-US" sz="700" dirty="0">
+                <a:solidFill>
+                  <a:srgbClr val="5F7183"/>
+                </a:solidFill>
+                <a:latin typeface="Arial" pitchFamily="34" charset="0"/>
+                <a:ea typeface="Arial" pitchFamily="34" charset="-122"/>
+                <a:cs typeface="Arial" pitchFamily="34" charset="-120"/>
+              </a:rPr>
+              <a:t>nuScenes scene-0553（波士頓）· CC BY-NC-SA 4.0</a:t>
+            </a:r>
+            <a:endParaRPr lang="en-US" sz="700" dirty="0"/>
+          </a:p>
+        </p:txBody>
+      </p:sp>
+      <p:sp>
+        <p:nvSpPr>
+          <p:cNvPr id="6" name="Text 3"/>
+          <p:cNvSpPr txBox="1"/>
+          <p:nvPr/>
+        </p:nvSpPr>
+        <p:spPr>
+          <a:xfrm>
+            <a:off x="4791456" y="914400"/>
+            <a:ext cx="3849624" cy="2889504"/>
+          </a:xfrm>
+          <a:prstGeom prst="rect">
+            <a:avLst/>
+          </a:prstGeom>
+          <a:noFill/>
+          <a:ln/>
+        </p:spPr>
+        <p:txBody>
+          <a:bodyPr wrap="square" lIns="0" tIns="0" rIns="0" bIns="0" rtlCol="0" anchor="ctr"/>
+          <a:lstStyle/>
+          <a:p>
+            <a:pPr indent="0" marL="0">
+              <a:lnSpc>
+                <a:spcPct val="120000"/>
+              </a:lnSpc>
+              <a:buNone/>
+            </a:pPr>
+            <a:r>
+              <a:rPr lang="en-US" sz="2300" b="1" dirty="0">
+                <a:solidFill>
+                  <a:srgbClr val="0B1F3A"/>
+                </a:solidFill>
+                <a:latin typeface="Arial" pitchFamily="34" charset="0"/>
+                <a:ea typeface="Arial" pitchFamily="34" charset="-122"/>
+                <a:cs typeface="Arial" pitchFamily="34" charset="-120"/>
+              </a:rPr>
+              <a:t>Nguy hiểm nhất: không thấy mà báo «không sao»</a:t>
+            </a:r>
+            <a:endParaRPr lang="en-US" sz="2300" dirty="0"/>
+          </a:p>
+          <a:p>
+            <a:pPr indent="0" marL="0">
+              <a:lnSpc>
+                <a:spcPct val="120000"/>
+              </a:lnSpc>
+              <a:buNone/>
+            </a:pPr>
+            <a:r>
+              <a:rPr lang="en-US" sz="1400" b="1" dirty="0">
+                <a:solidFill>
+                  <a:srgbClr val="007F72"/>
+                </a:solidFill>
+                <a:latin typeface="微軟正黑體" pitchFamily="34" charset="0"/>
+                <a:ea typeface="微軟正黑體" pitchFamily="34" charset="-122"/>
+                <a:cs typeface="微軟正黑體" pitchFamily="34" charset="-120"/>
+              </a:rPr>
+              <a:t>最危險的不是看不到，是看不到卻說沒事</a:t>
+            </a:r>
+            <a:endParaRPr lang="en-US" sz="2300" dirty="0"/>
+          </a:p>
+          <a:p>
+            <a:pPr indent="0" marL="0">
+              <a:lnSpc>
+                <a:spcPct val="120000"/>
+              </a:lnSpc>
+              <a:spcBef>
+                <a:spcPts val="1440"/>
+              </a:spcBef>
+              <a:buNone/>
+            </a:pPr>
+            <a:r>
+              <a:rPr lang="en-US" sz="1250" dirty="0">
+                <a:solidFill>
+                  <a:srgbClr val="5F7183"/>
+                </a:solidFill>
+                <a:latin typeface="Arial" pitchFamily="34" charset="0"/>
+                <a:ea typeface="Arial" pitchFamily="34" charset="-122"/>
+                <a:cs typeface="Arial" pitchFamily="34" charset="-120"/>
+              </a:rPr>
+              <a:t>Radar không nói «tôi không thấy», nó báo «không có gì». Cùng kiểu: HC-SR04 bị bùn che, GNSS đa đường, xe cứu hoả đứng yên.</a:t>
+            </a:r>
+            <a:endParaRPr lang="en-US" sz="2300" dirty="0"/>
+          </a:p>
+          <a:p>
+            <a:pPr indent="0" marL="0">
+              <a:lnSpc>
+                <a:spcPct val="120000"/>
+              </a:lnSpc>
+              <a:buNone/>
+            </a:pPr>
+            <a:r>
+              <a:rPr lang="en-US" sz="1150" dirty="0">
+                <a:solidFill>
+                  <a:srgbClr val="5F7183"/>
+                </a:solidFill>
+                <a:latin typeface="微軟正黑體" pitchFamily="34" charset="0"/>
+                <a:ea typeface="微軟正黑體" pitchFamily="34" charset="-122"/>
+                <a:cs typeface="微軟正黑體" pitchFamily="34" charset="-120"/>
+              </a:rPr>
+              <a:t>雷達不會說「我看不到」，它說「沒東西」。同一種壞法：HC-SR04 被泥巴蓋住、衛星多路徑、停著的消防車。</a:t>
+            </a:r>
+            <a:endParaRPr lang="en-US" sz="2300" dirty="0"/>
+          </a:p>
+        </p:txBody>
+      </p:sp>
+      <p:sp>
+        <p:nvSpPr>
+          <p:cNvPr id="7" name="Shape 4"/>
+          <p:cNvSpPr/>
+          <p:nvPr/>
+        </p:nvSpPr>
+        <p:spPr>
+          <a:xfrm>
+            <a:off x="502920" y="3913632"/>
+            <a:ext cx="8138160" cy="621792"/>
+          </a:xfrm>
+          <a:prstGeom prst="roundRect">
+            <a:avLst>
+              <a:gd name="adj" fmla="val 13235"/>
+            </a:avLst>
+          </a:prstGeom>
+          <a:solidFill>
+            <a:srgbClr val="FFF6E3"/>
+          </a:solidFill>
+          <a:ln w="12700">
+            <a:solidFill>
+              <a:srgbClr val="FFB020"/>
+            </a:solidFill>
+            <a:prstDash val="solid"/>
+          </a:ln>
+        </p:spPr>
+      </p:sp>
+      <p:sp>
+        <p:nvSpPr>
+          <p:cNvPr id="8" name="Text 5"/>
+          <p:cNvSpPr txBox="1"/>
+          <p:nvPr/>
+        </p:nvSpPr>
+        <p:spPr>
+          <a:xfrm>
+            <a:off x="685800" y="3986784"/>
+            <a:ext cx="7772400" cy="493776"/>
+          </a:xfrm>
+          <a:prstGeom prst="rect">
+            <a:avLst/>
+          </a:prstGeom>
+          <a:noFill/>
+          <a:ln/>
+        </p:spPr>
+        <p:txBody>
+          <a:bodyPr wrap="square" lIns="0" tIns="0" rIns="0" bIns="0" rtlCol="0" anchor="t"/>
+          <a:lstStyle/>
+          <a:p>
+            <a:pPr indent="0" marL="0">
+              <a:lnSpc>
+                <a:spcPct val="116000"/>
+              </a:lnSpc>
+              <a:buNone/>
+            </a:pPr>
+            <a:r>
+              <a:rPr lang="en-US" sz="1250" b="1" dirty="0">
+                <a:solidFill>
+                  <a:srgbClr val="7A4E00"/>
+                </a:solidFill>
+                <a:latin typeface="Arial" pitchFamily="34" charset="0"/>
+                <a:ea typeface="Arial" pitchFamily="34" charset="-122"/>
+                <a:cs typeface="Arial" pitchFamily="34" charset="-120"/>
+              </a:rPr>
+              <a:t>Vì vậy mỗi cảm biến phải nói được «lúc này tôi không đáng tin» — đó là tiết sau: hợp nhất.</a:t>
+            </a:r>
+            <a:endParaRPr lang="en-US" sz="1250" dirty="0"/>
+          </a:p>
+          <a:p>
+            <a:pPr indent="0" marL="0">
+              <a:lnSpc>
+                <a:spcPct val="116000"/>
+              </a:lnSpc>
+              <a:buNone/>
+            </a:pPr>
+            <a:r>
+              <a:rPr lang="en-US" sz="1150" dirty="0">
+                <a:solidFill>
+                  <a:srgbClr val="7A4E00"/>
+                </a:solidFill>
+                <a:latin typeface="微軟正黑體" pitchFamily="34" charset="0"/>
+                <a:ea typeface="微軟正黑體" pitchFamily="34" charset="-122"/>
+                <a:cs typeface="微軟正黑體" pitchFamily="34" charset="-120"/>
+              </a:rPr>
+              <a:t>所以每一顆都要能說「我現在不可靠」——這就是下一節的融合。</a:t>
+            </a:r>
+            <a:endParaRPr lang="en-US" sz="1250" dirty="0"/>
+          </a:p>
+        </p:txBody>
+      </p:sp>
+      <p:sp>
+        <p:nvSpPr>
+          <p:cNvPr id="9" name="Shape 6"/>
+          <p:cNvSpPr/>
+          <p:nvPr/>
+        </p:nvSpPr>
+        <p:spPr>
+          <a:xfrm>
+            <a:off x="5798725" y="365760"/>
+            <a:ext cx="2842355" cy="310896"/>
+          </a:xfrm>
+          <a:prstGeom prst="roundRect">
+            <a:avLst>
+              <a:gd name="adj" fmla="val 20588"/>
+            </a:avLst>
+          </a:prstGeom>
+          <a:solidFill>
+            <a:srgbClr val="EAF6F4"/>
+          </a:solidFill>
+          <a:ln w="9525">
+            <a:solidFill>
+              <a:srgbClr val="9FD6CE"/>
+            </a:solidFill>
+            <a:prstDash val="solid"/>
+          </a:ln>
+        </p:spPr>
+      </p:sp>
+      <p:sp>
+        <p:nvSpPr>
+          <p:cNvPr id="10" name="Text 7"/>
+          <p:cNvSpPr txBox="1"/>
+          <p:nvPr/>
+        </p:nvSpPr>
+        <p:spPr>
+          <a:xfrm>
+            <a:off x="5926741" y="384048"/>
+            <a:ext cx="2659475" cy="274320"/>
+          </a:xfrm>
+          <a:prstGeom prst="rect">
+            <a:avLst/>
+          </a:prstGeom>
+          <a:noFill/>
+          <a:ln/>
+        </p:spPr>
+        <p:txBody>
+          <a:bodyPr wrap="square" lIns="0" tIns="0" rIns="0" bIns="0" rtlCol="0" anchor="ctr"/>
+          <a:lstStyle/>
+          <a:p>
+            <a:pPr indent="0" marL="0">
+              <a:lnSpc>
+                <a:spcPct val="100000"/>
+              </a:lnSpc>
+              <a:buNone/>
+            </a:pPr>
+            <a:r>
+              <a:rPr lang="en-US" sz="950" b="1" dirty="0">
+                <a:solidFill>
+                  <a:srgbClr val="007F72"/>
+                </a:solidFill>
+                <a:latin typeface="Arial" pitchFamily="34" charset="0"/>
+                <a:ea typeface="Arial" pitchFamily="34" charset="-122"/>
+                <a:cs typeface="Arial" pitchFamily="34" charset="-120"/>
+              </a:rPr>
+              <a:t>Ví dụ · </a:t>
+            </a:r>
+            <a:pPr indent="0" marL="0">
+              <a:lnSpc>
+                <a:spcPct val="100000"/>
+              </a:lnSpc>
+              <a:buNone/>
+            </a:pPr>
+            <a:r>
+              <a:rPr lang="en-US" sz="950" dirty="0">
+                <a:solidFill>
+                  <a:srgbClr val="1A2733"/>
+                </a:solidFill>
+                <a:latin typeface="Arial" pitchFamily="34" charset="0"/>
+                <a:ea typeface="Arial" pitchFamily="34" charset="-122"/>
+                <a:cs typeface="Arial" pitchFamily="34" charset="-120"/>
+              </a:rPr>
+              <a:t>đồng hồ xăng hỏng mà vẫn chỉ đầy bình</a:t>
+            </a:r>
+            <a:endParaRPr lang="en-US" sz="950" dirty="0"/>
+          </a:p>
+          <a:p>
+            <a:pPr indent="0" marL="0">
+              <a:lnSpc>
+                <a:spcPct val="100000"/>
+              </a:lnSpc>
+              <a:buNone/>
+            </a:pPr>
+            <a:r>
+              <a:rPr lang="en-US" sz="900" b="1" dirty="0">
+                <a:solidFill>
+                  <a:srgbClr val="007F72"/>
+                </a:solidFill>
+                <a:latin typeface="微軟正黑體" pitchFamily="34" charset="0"/>
+                <a:ea typeface="微軟正黑體" pitchFamily="34" charset="-122"/>
+                <a:cs typeface="微軟正黑體" pitchFamily="34" charset="-120"/>
+              </a:rPr>
+              <a:t>例子・</a:t>
+            </a:r>
+            <a:pPr indent="0" marL="0">
+              <a:lnSpc>
+                <a:spcPct val="100000"/>
+              </a:lnSpc>
+              <a:buNone/>
+            </a:pPr>
+            <a:r>
+              <a:rPr lang="en-US" sz="900" dirty="0">
+                <a:solidFill>
+                  <a:srgbClr val="5F7183"/>
+                </a:solidFill>
+                <a:latin typeface="微軟正黑體" pitchFamily="34" charset="0"/>
+                <a:ea typeface="微軟正黑體" pitchFamily="34" charset="-122"/>
+                <a:cs typeface="微軟正黑體" pitchFamily="34" charset="-120"/>
+              </a:rPr>
+              <a:t>油表壞了，還一直顯示滿格</a:t>
+            </a:r>
+            <a:endParaRPr lang="en-US" sz="950" dirty="0"/>
+          </a:p>
+        </p:txBody>
+      </p:sp>
+      <p:pic>
+        <p:nvPicPr>
+          <p:cNvPr id="12" name="Image 1" descr="/Users/tsengchenghsun/Class/carClass/Claude outputs/第七週(10-22)/src/logo.png">    </p:cNvPr>
+          <p:cNvPicPr>
+            <a:picLocks noChangeAspect="1"/>
+          </p:cNvPicPr>
+          <p:nvPr/>
+        </p:nvPicPr>
+        <p:blipFill>
+          <a:blip r:embed="rId2"/>
+          <a:stretch>
+            <a:fillRect/>
+          </a:stretch>
+        </p:blipFill>
+        <p:spPr>
+          <a:xfrm>
+            <a:off x="7882128" y="109728"/>
+            <a:ext cx="1097280" cy="242439"/>
+          </a:xfrm>
+          <a:prstGeom prst="rect">
+            <a:avLst/>
+          </a:prstGeom>
+        </p:spPr>
+      </p:pic>
+      <p:sp>
+        <p:nvSpPr>
+          <p:cNvPr id="13" name="Text 8"/>
+          <p:cNvSpPr txBox="1"/>
+          <p:nvPr/>
+        </p:nvSpPr>
+        <p:spPr>
+          <a:xfrm>
+            <a:off x="109728" y="128016"/>
+            <a:ext cx="822960" cy="256032"/>
+          </a:xfrm>
+          <a:prstGeom prst="rect">
+            <a:avLst/>
+          </a:prstGeom>
+          <a:noFill/>
+          <a:ln/>
+        </p:spPr>
+        <p:txBody>
+          <a:bodyPr wrap="square" lIns="0" tIns="0" rIns="0" bIns="0" rtlCol="0" anchor="ctr"/>
+          <a:lstStyle/>
+          <a:p>
+            <a:pPr indent="0" marL="0">
+              <a:buNone/>
+            </a:pPr>
+            <a:r>
+              <a:rPr lang="en-US" sz="900" dirty="0">
+                <a:solidFill>
+                  <a:srgbClr val="5F7183"/>
+                </a:solidFill>
+                <a:latin typeface="Arial" pitchFamily="34" charset="0"/>
+                <a:ea typeface="Arial" pitchFamily="34" charset="-122"/>
+                <a:cs typeface="Arial" pitchFamily="34" charset="-120"/>
+              </a:rPr>
+              <a:t>17 / 18</a:t>
+            </a:r>
+            <a:endParaRPr lang="en-US" sz="900" dirty="0"/>
+          </a:p>
+        </p:txBody>
+      </p:sp>
+      <p:sp>
+        <p:nvSpPr>
+          <p:cNvPr id="14" name="Text 9"/>
+          <p:cNvSpPr txBox="1"/>
+          <p:nvPr/>
+        </p:nvSpPr>
+        <p:spPr>
+          <a:xfrm>
+            <a:off x="960120" y="128016"/>
+            <a:ext cx="2011680" cy="256032"/>
+          </a:xfrm>
+          <a:prstGeom prst="rect">
+            <a:avLst/>
+          </a:prstGeom>
+          <a:noFill/>
+          <a:ln/>
+        </p:spPr>
+        <p:txBody>
+          <a:bodyPr wrap="square" lIns="0" tIns="0" rIns="0" bIns="0" rtlCol="0" anchor="ctr"/>
+          <a:lstStyle/>
+          <a:p>
+            <a:pPr indent="0" marL="0">
+              <a:buNone/>
+            </a:pPr>
+            <a:r>
+              <a:rPr lang="en-US" sz="900" dirty="0">
+                <a:solidFill>
+                  <a:srgbClr val="5F7183"/>
+                </a:solidFill>
+                <a:latin typeface="Arial" pitchFamily="34" charset="0"/>
+                <a:ea typeface="Arial" pitchFamily="34" charset="-122"/>
+                <a:cs typeface="Arial" pitchFamily="34" charset="-120"/>
+              </a:rPr>
+              <a:t>Tiết 1 · 第 1 節</a:t>
+            </a:r>
+            <a:endParaRPr lang="en-US" sz="900" dirty="0"/>
+          </a:p>
+        </p:txBody>
+      </p:sp>
+    </p:spTree>
+  </p:cSld>
+  <p:clrMapOvr>
+    <a:masterClrMapping/>
+  </p:clrMapOvr>
+</p:sld>
+</file>
+
+<file path=ppt/slides/slide18.xml><?xml version="1.0" encoding="utf-8"?>
+<p:sld xmlns:a="http://schemas.openxmlformats.org/drawingml/2006/main" xmlns:r="http://schemas.openxmlformats.org/officeDocument/2006/relationships" xmlns:p="http://schemas.openxmlformats.org/presentationml/2006/main">
+  <p:cSld name="Slide 18">
     <p:bg>
       <p:bgPr>
         <a:solidFill>
@@ -13494,7 +14871,7 @@
                 <a:ea typeface="Arial" pitchFamily="34" charset="-122"/>
                 <a:cs typeface="Arial" pitchFamily="34" charset="-120"/>
               </a:rPr>
-              <a:t>17 / 17</a:t>
+              <a:t>18 / 18</a:t>
             </a:r>
             <a:endParaRPr lang="en-US" sz="900" dirty="0"/>
           </a:p>
@@ -14730,7 +16107,7 @@
                 <a:ea typeface="Arial" pitchFamily="34" charset="-122"/>
                 <a:cs typeface="Arial" pitchFamily="34" charset="-120"/>
               </a:rPr>
-              <a:t>2 / 17</a:t>
+              <a:t>2 / 18</a:t>
             </a:r>
             <a:endParaRPr lang="en-US" sz="900" dirty="0"/>
           </a:p>
@@ -15300,7 +16677,7 @@
                 <a:ea typeface="Arial" pitchFamily="34" charset="-122"/>
                 <a:cs typeface="Arial" pitchFamily="34" charset="-120"/>
               </a:rPr>
-              <a:t>3 / 17</a:t>
+              <a:t>3 / 18</a:t>
             </a:r>
             <a:endParaRPr lang="en-US" sz="900" dirty="0"/>
           </a:p>
@@ -16400,7 +17777,7 @@
                 <a:ea typeface="Arial" pitchFamily="34" charset="-122"/>
                 <a:cs typeface="Arial" pitchFamily="34" charset="-120"/>
               </a:rPr>
-              <a:t>4 / 17</a:t>
+              <a:t>4 / 18</a:t>
             </a:r>
             <a:endParaRPr lang="en-US" sz="900" dirty="0"/>
           </a:p>
@@ -20823,7 +22200,7 @@
                 <a:ea typeface="Arial" pitchFamily="34" charset="-122"/>
                 <a:cs typeface="Arial" pitchFamily="34" charset="-120"/>
               </a:rPr>
-              <a:t>5 / 17</a:t>
+              <a:t>5 / 18</a:t>
             </a:r>
             <a:endParaRPr lang="en-US" sz="790" dirty="0"/>
           </a:p>
@@ -21714,7 +23091,7 @@
                 <a:ea typeface="Arial" pitchFamily="34" charset="-122"/>
                 <a:cs typeface="Arial" pitchFamily="34" charset="-120"/>
               </a:rPr>
-              <a:t>6 / 17</a:t>
+              <a:t>6 / 18</a:t>
             </a:r>
             <a:endParaRPr lang="en-US" sz="900" dirty="0"/>
           </a:p>
@@ -22379,7 +23756,7 @@
                 <a:ea typeface="Arial" pitchFamily="34" charset="-122"/>
                 <a:cs typeface="Arial" pitchFamily="34" charset="-120"/>
               </a:rPr>
-              <a:t>7 / 17</a:t>
+              <a:t>7 / 18</a:t>
             </a:r>
             <a:endParaRPr lang="en-US" sz="900" dirty="0"/>
           </a:p>
@@ -23044,7 +24421,7 @@
                 <a:ea typeface="Arial" pitchFamily="34" charset="-122"/>
                 <a:cs typeface="Arial" pitchFamily="34" charset="-120"/>
               </a:rPr>
-              <a:t>8 / 17</a:t>
+              <a:t>8 / 18</a:t>
             </a:r>
             <a:endParaRPr lang="en-US" sz="900" dirty="0"/>
           </a:p>
@@ -23709,7 +25086,7 @@
                 <a:ea typeface="Arial" pitchFamily="34" charset="-122"/>
                 <a:cs typeface="Arial" pitchFamily="34" charset="-120"/>
               </a:rPr>
-              <a:t>9 / 17</a:t>
+              <a:t>9 / 18</a:t>
             </a:r>
             <a:endParaRPr lang="en-US" sz="900" dirty="0"/>
           </a:p>

--- a/第七週(10-22)/第七週_第1節_簡報.pptx
+++ b/第七週(10-22)/第七週_第1節_簡報.pptx
@@ -6252,11 +6252,11 @@
                 <a:spcPts val="0"/>
               </a:spcBef>
               <a:spcAft>
-                <a:spcPts val="200"/>
+                <a:spcPts val="142"/>
               </a:spcAft>
             </a:pPr>
             <a:r>
-              <a:rPr sz="1200" lang="zh-TW" dirty="0">
+              <a:rPr sz="850" lang="zh-TW" dirty="0">
                 <a:solidFill>
                   <a:srgbClr val="000000"/>
                 </a:solidFill>
@@ -6274,11 +6274,11 @@
                 <a:spcPts val="0"/>
               </a:spcBef>
               <a:spcAft>
-                <a:spcPts val="200"/>
+                <a:spcPts val="142"/>
               </a:spcAft>
             </a:pPr>
             <a:r>
-              <a:rPr sz="1200" b="1" lang="zh-TW" dirty="0">
+              <a:rPr sz="850" b="1" lang="zh-TW" dirty="0">
                 <a:solidFill>
                   <a:srgbClr val="000000"/>
                 </a:solidFill>
@@ -6289,7 +6289,7 @@
               <a:t>左邊，光達。</a:t>
             </a:r>
             <a:r>
-              <a:rPr sz="1200" lang="zh-TW" dirty="0">
+              <a:rPr sz="850" lang="zh-TW" dirty="0">
                 <a:solidFill>
                   <a:srgbClr val="000000"/>
                 </a:solidFill>
@@ -6307,11 +6307,11 @@
                 <a:spcPts val="0"/>
               </a:spcBef>
               <a:spcAft>
-                <a:spcPts val="200"/>
+                <a:spcPts val="142"/>
               </a:spcAft>
             </a:pPr>
             <a:r>
-              <a:rPr sz="1200" b="1" lang="zh-TW" dirty="0">
+              <a:rPr sz="850" b="1" lang="zh-TW" dirty="0">
                 <a:solidFill>
                   <a:srgbClr val="000000"/>
                 </a:solidFill>
@@ -6322,7 +6322,7 @@
               <a:t>右邊，雷達。</a:t>
             </a:r>
             <a:r>
-              <a:rPr sz="1200" lang="zh-TW" dirty="0">
+              <a:rPr sz="850" lang="zh-TW" dirty="0">
                 <a:solidFill>
                   <a:srgbClr val="000000"/>
                 </a:solidFill>
@@ -6340,11 +6340,11 @@
                 <a:spcPts val="0"/>
               </a:spcBef>
               <a:spcAft>
-                <a:spcPts val="200"/>
+                <a:spcPts val="142"/>
               </a:spcAft>
             </a:pPr>
             <a:r>
-              <a:rPr sz="1200" lang="zh-TW" dirty="0">
+              <a:rPr sz="850" lang="zh-TW" dirty="0">
                 <a:solidFill>
                   <a:srgbClr val="000000"/>
                 </a:solidFill>
@@ -6355,7 +6355,7 @@
               <a:t>請各位看紅圈的位置：</a:t>
             </a:r>
             <a:r>
-              <a:rPr sz="1200" b="1" lang="zh-TW" dirty="0">
+              <a:rPr sz="850" b="1" lang="zh-TW" dirty="0">
                 <a:solidFill>
                   <a:srgbClr val="000000"/>
                 </a:solidFill>
@@ -6366,7 +6366,7 @@
               <a:t>全部都在很低的地方。</a:t>
             </a:r>
             <a:r>
-              <a:rPr sz="1200" lang="zh-TW" dirty="0">
+              <a:rPr sz="850" lang="zh-TW" dirty="0">
                 <a:solidFill>
                   <a:srgbClr val="000000"/>
                 </a:solidFill>
@@ -6384,11 +6384,11 @@
                 <a:spcPts val="0"/>
               </a:spcBef>
               <a:spcAft>
-                <a:spcPts val="200"/>
+                <a:spcPts val="142"/>
               </a:spcAft>
             </a:pPr>
             <a:r>
-              <a:rPr sz="1200" lang="zh-TW" dirty="0">
+              <a:rPr sz="850" lang="zh-TW" dirty="0">
                 <a:solidFill>
                   <a:srgbClr val="000000"/>
                 </a:solidFill>
@@ -6406,11 +6406,11 @@
                 <a:spcPts val="0"/>
               </a:spcBef>
               <a:spcAft>
-                <a:spcPts val="200"/>
+                <a:spcPts val="142"/>
               </a:spcAft>
             </a:pPr>
             <a:r>
-              <a:rPr sz="1200" lang="zh-TW" dirty="0">
+              <a:rPr sz="850" lang="zh-TW" dirty="0">
                 <a:solidFill>
                   <a:srgbClr val="000000"/>
                 </a:solidFill>
@@ -6428,41 +6428,173 @@
                 <a:spcPts val="0"/>
               </a:spcBef>
               <a:spcAft>
-                <a:spcPts val="200"/>
+                <a:spcPts val="142"/>
               </a:spcAft>
             </a:pPr>
             <a:r>
-              <a:rPr sz="1200" lang="zh-TW" dirty="0">
-                <a:solidFill>
-                  <a:srgbClr val="000000"/>
-                </a:solidFill>
-                <a:latin typeface="Arial Unicode MS"/>
-                <a:ea typeface="Arial Unicode MS"/>
-                <a:cs typeface="Arial Unicode MS"/>
-              </a:rPr>
-              <a:t>另一件事，上週同一張也講過：</a:t>
-            </a:r>
-            <a:r>
-              <a:rPr sz="1200" b="1" lang="zh-TW" dirty="0">
-                <a:solidFill>
-                  <a:srgbClr val="000000"/>
-                </a:solidFill>
-                <a:latin typeface="Arial Unicode MS"/>
-                <a:ea typeface="Arial Unicode MS"/>
-                <a:cs typeface="Arial Unicode MS"/>
-              </a:rPr>
-              <a:t>靜止的東西常常被丟掉。</a:t>
-            </a:r>
-            <a:r>
-              <a:rPr sz="1200" lang="zh-TW" dirty="0">
-                <a:solidFill>
-                  <a:srgbClr val="000000"/>
-                </a:solidFill>
-                <a:latin typeface="Arial Unicode MS"/>
-                <a:ea typeface="Arial Unicode MS"/>
-                <a:cs typeface="Arial Unicode MS"/>
-              </a:rPr>
-              <a:t>右圖路邊有一些紅圈，可是不是每一棵樹、每一根電線桿都有。這些過濾是軟體做的，規格表上看不到。</a:t>
+              <a:rPr sz="850" lang="zh-TW" dirty="0">
+                <a:solidFill>
+                  <a:srgbClr val="000000"/>
+                </a:solidFill>
+                <a:latin typeface="Arial Unicode MS"/>
+                <a:ea typeface="Arial Unicode MS"/>
+                <a:cs typeface="Arial Unicode MS"/>
+              </a:rPr>
+              <a:t>另一件事：</a:t>
+            </a:r>
+            <a:r>
+              <a:rPr sz="850" b="1" lang="zh-TW" dirty="0">
+                <a:solidFill>
+                  <a:srgbClr val="000000"/>
+                </a:solidFill>
+                <a:latin typeface="Arial Unicode MS"/>
+                <a:ea typeface="Arial Unicode MS"/>
+                <a:cs typeface="Arial Unicode MS"/>
+              </a:rPr>
+              <a:t>雷達怎麼知道一個東西是靜止的？</a:t>
+            </a:r>
+            <a:r>
+              <a:rPr sz="850" lang="zh-TW" dirty="0">
+                <a:solidFill>
+                  <a:srgbClr val="000000"/>
+                </a:solidFill>
+                <a:latin typeface="Arial Unicode MS"/>
+                <a:ea typeface="Arial Unicode MS"/>
+                <a:cs typeface="Arial Unicode MS"/>
+              </a:rPr>
+              <a:t>它不是看那個東西本身，是拿量到的速度，</a:t>
+            </a:r>
+            <a:r>
+              <a:rPr sz="850" b="1" lang="zh-TW" dirty="0">
+                <a:solidFill>
+                  <a:srgbClr val="000000"/>
+                </a:solidFill>
+                <a:latin typeface="Arial Unicode MS"/>
+                <a:ea typeface="Arial Unicode MS"/>
+                <a:cs typeface="Arial Unicode MS"/>
+              </a:rPr>
+              <a:t>扣掉自己的車速</a:t>
+            </a:r>
+            <a:r>
+              <a:rPr sz="850" lang="zh-TW" dirty="0">
+                <a:solidFill>
+                  <a:srgbClr val="000000"/>
+                </a:solidFill>
+                <a:latin typeface="Arial Unicode MS"/>
+                <a:ea typeface="Arial Unicode MS"/>
+                <a:cs typeface="Arial Unicode MS"/>
+              </a:rPr>
+              <a:t>。
+</a:t>
+            </a:r>
+          </a:p>
+          <a:p>
+            <a:pPr algn="l">
+              <a:spcBef>
+                <a:spcPts val="0"/>
+              </a:spcBef>
+              <a:spcAft>
+                <a:spcPts val="142"/>
+              </a:spcAft>
+            </a:pPr>
+            <a:r>
+              <a:rPr sz="850" lang="zh-TW" dirty="0">
+                <a:solidFill>
+                  <a:srgbClr val="000000"/>
+                </a:solidFill>
+                <a:latin typeface="Arial Unicode MS"/>
+                <a:ea typeface="Arial Unicode MS"/>
+                <a:cs typeface="Arial Unicode MS"/>
+              </a:rPr>
+              <a:t>想像坐在火車上看窗外，路邊的電線桿一根一根往後退。電線桿沒動，是你在動。雷達也一樣：這台車時速大約四十三公里，路邊每一棵樹、每一根桿子，在雷達看來都在朝它靠近。車子會把自己的車速和轉彎的快慢送給雷達，雷達算出「如果那個東西不動，我應該量到多少」，量到的跟它一樣，就判定是靜止的。
+</a:t>
+            </a:r>
+          </a:p>
+          <a:p>
+            <a:pPr algn="l">
+              <a:spcBef>
+                <a:spcPts val="0"/>
+              </a:spcBef>
+              <a:spcAft>
+                <a:spcPts val="142"/>
+              </a:spcAft>
+            </a:pPr>
+            <a:r>
+              <a:rPr sz="850" lang="zh-TW" dirty="0">
+                <a:solidFill>
+                  <a:srgbClr val="000000"/>
+                </a:solidFill>
+                <a:latin typeface="Arial Unicode MS"/>
+                <a:ea typeface="Arial Unicode MS"/>
+                <a:cs typeface="Arial Unicode MS"/>
+              </a:rPr>
+              <a:t>我查了這一格的資料：前方那顆雷達，被標成「靜止」的點，原始量到的速度中間值是</a:t>
+            </a:r>
+            <a:r>
+              <a:rPr sz="850" b="1" lang="zh-TW" dirty="0">
+                <a:solidFill>
+                  <a:srgbClr val="000000"/>
+                </a:solidFill>
+                <a:latin typeface="Arial Unicode MS"/>
+                <a:ea typeface="Arial Unicode MS"/>
+                <a:cs typeface="Arial Unicode MS"/>
+              </a:rPr>
+              <a:t>每小時負三十九點九公里</a:t>
+            </a:r>
+            <a:r>
+              <a:rPr sz="850" lang="zh-TW" dirty="0">
+                <a:solidFill>
+                  <a:srgbClr val="000000"/>
+                </a:solidFill>
+                <a:latin typeface="Arial Unicode MS"/>
+                <a:ea typeface="Arial Unicode MS"/>
+                <a:cs typeface="Arial Unicode MS"/>
+              </a:rPr>
+              <a:t>，就是朝雷達靠近；照本車的車速和方向，靜止的東西應該量到負三十九點八。兩個幾乎一樣，扣掉以後接近零。這一格前雷達一百二十五個點裡，五十九個被判定靜止、五十二個「可能是靜止」，真正在動的只有少數。
+</a:t>
+            </a:r>
+          </a:p>
+          <a:p>
+            <a:pPr algn="l">
+              <a:spcBef>
+                <a:spcPts val="0"/>
+              </a:spcBef>
+              <a:spcAft>
+                <a:spcPts val="142"/>
+              </a:spcAft>
+            </a:pPr>
+            <a:r>
+              <a:rPr sz="850" lang="zh-TW" dirty="0">
+                <a:solidFill>
+                  <a:srgbClr val="000000"/>
+                </a:solidFill>
+                <a:latin typeface="Arial Unicode MS"/>
+                <a:ea typeface="Arial Unicode MS"/>
+                <a:cs typeface="Arial Unicode MS"/>
+              </a:rPr>
+              <a:t>所以右圖路邊這些紅圈，大多是靜止的東西，而且都留下來了。那為什麼不是每一棵樹都有紅圈？雷達每一輪只回報夠強的回波，樹葉反射弱，常常就沒有點。
+</a:t>
+            </a:r>
+          </a:p>
+          <a:p>
+            <a:pPr algn="l">
+              <a:spcBef>
+                <a:spcPts val="0"/>
+              </a:spcBef>
+              <a:spcAft>
+                <a:spcPts val="142"/>
+              </a:spcAft>
+            </a:pPr>
+            <a:r>
+              <a:rPr sz="850" lang="zh-TW" dirty="0">
+                <a:solidFill>
+                  <a:srgbClr val="000000"/>
+                </a:solidFill>
+                <a:latin typeface="Arial Unicode MS"/>
+                <a:ea typeface="Arial Unicode MS"/>
+                <a:cs typeface="Arial Unicode MS"/>
+              </a:rPr>
+              <a:t>真正會「不理靜止物」的，是後面的跟車、緊急煞車軟體。路上靜止的東西太多，護欄、桿子、路牌、人孔蓋、天橋，雷達又量不出高度，分不出頭頂的路牌和路上停著的車；如果每一個都煞車，就是幽靈煞車。所以很多系統對靜止目標特別保守，代價就是上週講的：停在路上的消防車被當成路邊的東西。這一段是軟體的選擇，規格表上看不到。</a:t>
             </a:r>
           </a:p>
         </p:txBody>

--- a/第七週(10-22)/第七週_第1節_簡報.pptx
+++ b/第七週(10-22)/第七週_第1節_簡報.pptx
@@ -448,6 +448,39 @@
               </a:spcAft>
             </a:pPr>
             <a:r>
+              <a:rPr sz="1200" b="1" lang="zh-TW" dirty="0">
+                <a:solidFill>
+                  <a:srgbClr val="000000"/>
+                </a:solidFill>
+                <a:latin typeface="Arial Unicode MS"/>
+                <a:ea typeface="Arial Unicode MS"/>
+                <a:cs typeface="Arial Unicode MS"/>
+              </a:rPr>
+              <a:t>這一節的目的：</a:t>
+            </a:r>
+            <a:r>
+              <a:rPr sz="1200" lang="zh-TW" dirty="0">
+                <a:solidFill>
+                  <a:srgbClr val="000000"/>
+                </a:solidFill>
+                <a:latin typeface="Arial Unicode MS"/>
+                <a:ea typeface="Arial Unicode MS"/>
+                <a:cs typeface="Arial Unicode MS"/>
+              </a:rPr>
+              <a:t>讓大家知道，每一種感測器都會壞，而且壞的方式不一樣；最怕的是壞了不說。
+</a:t>
+            </a:r>
+          </a:p>
+          <a:p>
+            <a:pPr algn="l">
+              <a:spcBef>
+                <a:spcPts val="0"/>
+              </a:spcBef>
+              <a:spcAft>
+                <a:spcPts val="200"/>
+              </a:spcAft>
+            </a:pPr>
+            <a:r>
               <a:rPr sz="1200" lang="zh-TW" dirty="0">
                 <a:solidFill>
                   <a:srgbClr val="000000"/>
@@ -745,6 +778,39 @@
               </a:spcAft>
             </a:pPr>
             <a:r>
+              <a:rPr sz="1200" b="1" lang="zh-TW" dirty="0">
+                <a:solidFill>
+                  <a:srgbClr val="000000"/>
+                </a:solidFill>
+                <a:latin typeface="Arial Unicode MS"/>
+                <a:ea typeface="Arial Unicode MS"/>
+                <a:cs typeface="Arial Unicode MS"/>
+              </a:rPr>
+              <a:t>這一張的目的：</a:t>
+            </a:r>
+            <a:r>
+              <a:rPr sz="1200" lang="zh-TW" dirty="0">
+                <a:solidFill>
+                  <a:srgbClr val="000000"/>
+                </a:solidFill>
+                <a:latin typeface="Arial Unicode MS"/>
+                <a:ea typeface="Arial Unicode MS"/>
+                <a:cs typeface="Arial Unicode MS"/>
+              </a:rPr>
+              <a:t>讓大家親眼看到，同一台車，距離一遠，光達打到的點就急速變少。
+</a:t>
+            </a:r>
+          </a:p>
+          <a:p>
+            <a:pPr algn="l">
+              <a:spcBef>
+                <a:spcPts val="0"/>
+              </a:spcBef>
+              <a:spcAft>
+                <a:spcPts val="200"/>
+              </a:spcAft>
+            </a:pPr>
+            <a:r>
               <a:rPr sz="1200" lang="zh-TW" dirty="0">
                 <a:solidFill>
                   <a:srgbClr val="000000"/>
@@ -1108,6 +1174,39 @@
               </a:spcAft>
             </a:pPr>
             <a:r>
+              <a:rPr sz="1200" b="1" lang="zh-TW" dirty="0">
+                <a:solidFill>
+                  <a:srgbClr val="000000"/>
+                </a:solidFill>
+                <a:latin typeface="Arial Unicode MS"/>
+                <a:ea typeface="Arial Unicode MS"/>
+                <a:cs typeface="Arial Unicode MS"/>
+              </a:rPr>
+              <a:t>這一張的目的：</a:t>
+            </a:r>
+            <a:r>
+              <a:rPr sz="1200" lang="zh-TW" dirty="0">
+                <a:solidFill>
+                  <a:srgbClr val="000000"/>
+                </a:solidFill>
+                <a:latin typeface="Arial Unicode MS"/>
+                <a:ea typeface="Arial Unicode MS"/>
+                <a:cs typeface="Arial Unicode MS"/>
+              </a:rPr>
+              <a:t>讓大家知道，上一張不是特例，整份資料統計都一樣；而且雷達抓得到車，抓不太到人和機車。
+</a:t>
+            </a:r>
+          </a:p>
+          <a:p>
+            <a:pPr algn="l">
+              <a:spcBef>
+                <a:spcPts val="0"/>
+              </a:spcBef>
+              <a:spcAft>
+                <a:spcPts val="200"/>
+              </a:spcAft>
+            </a:pPr>
+            <a:r>
               <a:rPr sz="1200" lang="zh-TW" dirty="0">
                 <a:solidFill>
                   <a:srgbClr val="000000"/>
@@ -1405,6 +1504,39 @@
               </a:spcAft>
             </a:pPr>
             <a:r>
+              <a:rPr sz="1200" b="1" lang="zh-TW" dirty="0">
+                <a:solidFill>
+                  <a:srgbClr val="000000"/>
+                </a:solidFill>
+                <a:latin typeface="Arial Unicode MS"/>
+                <a:ea typeface="Arial Unicode MS"/>
+                <a:cs typeface="Arial Unicode MS"/>
+              </a:rPr>
+              <a:t>這一張的目的：</a:t>
+            </a:r>
+            <a:r>
+              <a:rPr sz="1200" lang="zh-TW" dirty="0">
+                <a:solidFill>
+                  <a:srgbClr val="000000"/>
+                </a:solidFill>
+                <a:latin typeface="Arial Unicode MS"/>
+                <a:ea typeface="Arial Unicode MS"/>
+                <a:cs typeface="Arial Unicode MS"/>
+              </a:rPr>
+              <a:t>讓大家知道，有些表面和地形會讓感測器「看錯」，而且它自己很有把握，這是第二種壞法。
+</a:t>
+            </a:r>
+          </a:p>
+          <a:p>
+            <a:pPr algn="l">
+              <a:spcBef>
+                <a:spcPts val="0"/>
+              </a:spcBef>
+              <a:spcAft>
+                <a:spcPts val="200"/>
+              </a:spcAft>
+            </a:pPr>
+            <a:r>
               <a:rPr sz="1200" lang="zh-TW" dirty="0">
                 <a:solidFill>
                   <a:srgbClr val="000000"/>
@@ -1702,6 +1834,39 @@
               </a:spcAft>
             </a:pPr>
             <a:r>
+              <a:rPr sz="1200" b="1" lang="zh-TW" dirty="0">
+                <a:solidFill>
+                  <a:srgbClr val="000000"/>
+                </a:solidFill>
+                <a:latin typeface="Arial Unicode MS"/>
+                <a:ea typeface="Arial Unicode MS"/>
+                <a:cs typeface="Arial Unicode MS"/>
+              </a:rPr>
+              <a:t>這一張的目的：</a:t>
+            </a:r>
+            <a:r>
+              <a:rPr sz="1200" lang="zh-TW" dirty="0">
+                <a:solidFill>
+                  <a:srgbClr val="000000"/>
+                </a:solidFill>
+                <a:latin typeface="Arial Unicode MS"/>
+                <a:ea typeface="Arial Unicode MS"/>
+                <a:cs typeface="Arial Unicode MS"/>
+              </a:rPr>
+              <a:t>讓大家知道，髒污和遮蔽是最日常的失效，好的車用感測器要能發現自己被蓋住。
+</a:t>
+            </a:r>
+          </a:p>
+          <a:p>
+            <a:pPr algn="l">
+              <a:spcBef>
+                <a:spcPts val="0"/>
+              </a:spcBef>
+              <a:spcAft>
+                <a:spcPts val="200"/>
+              </a:spcAft>
+            </a:pPr>
+            <a:r>
               <a:rPr sz="1200" lang="zh-TW" dirty="0">
                 <a:solidFill>
                   <a:srgbClr val="000000"/>
@@ -1999,6 +2164,39 @@
               </a:spcAft>
             </a:pPr>
             <a:r>
+              <a:rPr sz="1200" b="1" lang="zh-TW" dirty="0">
+                <a:solidFill>
+                  <a:srgbClr val="000000"/>
+                </a:solidFill>
+                <a:latin typeface="Arial Unicode MS"/>
+                <a:ea typeface="Arial Unicode MS"/>
+                <a:cs typeface="Arial Unicode MS"/>
+              </a:rPr>
+              <a:t>這一張的目的：</a:t>
+            </a:r>
+            <a:r>
+              <a:rPr sz="1200" lang="zh-TW" dirty="0">
+                <a:solidFill>
+                  <a:srgbClr val="000000"/>
+                </a:solidFill>
+                <a:latin typeface="Arial Unicode MS"/>
+                <a:ea typeface="Arial Unicode MS"/>
+                <a:cs typeface="Arial Unicode MS"/>
+              </a:rPr>
+              <a:t>讓大家知道，IMU 是慢慢壞、衛星是突然壞，個性相反，所以可以互補。
+</a:t>
+            </a:r>
+          </a:p>
+          <a:p>
+            <a:pPr algn="l">
+              <a:spcBef>
+                <a:spcPts val="0"/>
+              </a:spcBef>
+              <a:spcAft>
+                <a:spcPts val="200"/>
+              </a:spcAft>
+            </a:pPr>
+            <a:r>
               <a:rPr sz="1200" lang="zh-TW" dirty="0">
                 <a:solidFill>
                   <a:srgbClr val="000000"/>
@@ -2296,6 +2494,39 @@
               </a:spcAft>
             </a:pPr>
             <a:r>
+              <a:rPr sz="800" b="1" lang="zh-TW" dirty="0">
+                <a:solidFill>
+                  <a:srgbClr val="000000"/>
+                </a:solidFill>
+                <a:latin typeface="Arial Unicode MS"/>
+                <a:ea typeface="Arial Unicode MS"/>
+                <a:cs typeface="Arial Unicode MS"/>
+              </a:rPr>
+              <a:t>這一張的目的：</a:t>
+            </a:r>
+            <a:r>
+              <a:rPr sz="800" lang="zh-TW" dirty="0">
+                <a:solidFill>
+                  <a:srgbClr val="000000"/>
+                </a:solidFill>
+                <a:latin typeface="Arial Unicode MS"/>
+                <a:ea typeface="Arial Unicode MS"/>
+                <a:cs typeface="Arial Unicode MS"/>
+              </a:rPr>
+              <a:t>讓大家知道，雷達看得到人，但抓不穩；原因是人反射弱，橫著走又像靜止的東西。
+</a:t>
+            </a:r>
+          </a:p>
+          <a:p>
+            <a:pPr algn="l">
+              <a:spcBef>
+                <a:spcPts val="0"/>
+              </a:spcBef>
+              <a:spcAft>
+                <a:spcPts val="133"/>
+              </a:spcAft>
+            </a:pPr>
+            <a:r>
               <a:rPr sz="800" lang="zh-TW" dirty="0">
                 <a:solidFill>
                   <a:srgbClr val="000000"/>
@@ -2996,19 +3227,30 @@
                 <a:spcPts val="0"/>
               </a:spcBef>
               <a:spcAft>
-                <a:spcPts val="175"/>
+                <a:spcPts val="167"/>
               </a:spcAft>
             </a:pPr>
             <a:r>
-              <a:rPr sz="1050" lang="zh-TW" dirty="0">
-                <a:solidFill>
-                  <a:srgbClr val="000000"/>
-                </a:solidFill>
-                <a:latin typeface="Arial Unicode MS"/>
-                <a:ea typeface="Arial Unicode MS"/>
-                <a:cs typeface="Arial Unicode MS"/>
-              </a:rPr>
-              <a:t>剛剛那張看起來，雷達看人好像很差。各位不要因此覺得雷達不適合看人。新一代的雷達，專門為「人」做了好幾件事，第八週會細講，今天先知道有這四招。
+              <a:rPr sz="1000" b="1" lang="zh-TW" dirty="0">
+                <a:solidFill>
+                  <a:srgbClr val="000000"/>
+                </a:solidFill>
+                <a:latin typeface="Arial Unicode MS"/>
+                <a:ea typeface="Arial Unicode MS"/>
+                <a:cs typeface="Arial Unicode MS"/>
+              </a:rPr>
+              <a:t>這一張的目的：</a:t>
+            </a:r>
+            <a:r>
+              <a:rPr sz="1000" lang="zh-TW" dirty="0">
+                <a:solidFill>
+                  <a:srgbClr val="000000"/>
+                </a:solidFill>
+                <a:latin typeface="Arial Unicode MS"/>
+                <a:ea typeface="Arial Unicode MS"/>
+                <a:cs typeface="Arial Unicode MS"/>
+              </a:rPr>
+              <a:t>讓大家知道，雷達不是不適合看人，是不能單獨看人；新一代雷達有四招改善。
 </a:t>
             </a:r>
           </a:p>
@@ -3018,30 +3260,19 @@
                 <a:spcPts val="0"/>
               </a:spcBef>
               <a:spcAft>
-                <a:spcPts val="175"/>
+                <a:spcPts val="167"/>
               </a:spcAft>
             </a:pPr>
             <a:r>
-              <a:rPr sz="1050" b="1" lang="zh-TW" dirty="0">
-                <a:solidFill>
-                  <a:srgbClr val="000000"/>
-                </a:solidFill>
-                <a:latin typeface="Arial Unicode MS"/>
-                <a:ea typeface="Arial Unicode MS"/>
-                <a:cs typeface="Arial Unicode MS"/>
-              </a:rPr>
-              <a:t>第一招，點更多。</a:t>
-            </a:r>
-            <a:r>
-              <a:rPr sz="1050" lang="zh-TW" dirty="0">
-                <a:solidFill>
-                  <a:srgbClr val="000000"/>
-                </a:solidFill>
-                <a:latin typeface="Arial Unicode MS"/>
-                <a:ea typeface="Arial Unicode MS"/>
-                <a:cs typeface="Arial Unicode MS"/>
-              </a:rPr>
-              <a:t>就是上週講的 4D 雷達。天線從 408 的二十四個，變成 548 的一百九十二個，角度分得更細，一個人身上能分到好幾個點，不會跟旁邊、後面的東西混在一起；又量得出高度，人是瘦高的，車是矮寬的，多一個分辨的線索。
+              <a:rPr sz="1000" lang="zh-TW" dirty="0">
+                <a:solidFill>
+                  <a:srgbClr val="000000"/>
+                </a:solidFill>
+                <a:latin typeface="Arial Unicode MS"/>
+                <a:ea typeface="Arial Unicode MS"/>
+                <a:cs typeface="Arial Unicode MS"/>
+              </a:rPr>
+              <a:t>剛剛那張看起來，雷達看人好像很差。各位不要因此覺得雷達不適合看人。新一代的雷達，專門為「人」做了好幾件事，第八週會細講，今天先知道有這四招。
 </a:t>
             </a:r>
           </a:p>
@@ -3051,52 +3282,30 @@
                 <a:spcPts val="0"/>
               </a:spcBef>
               <a:spcAft>
-                <a:spcPts val="175"/>
+                <a:spcPts val="167"/>
               </a:spcAft>
             </a:pPr>
             <a:r>
-              <a:rPr sz="1050" b="1" lang="zh-TW" dirty="0">
-                <a:solidFill>
-                  <a:srgbClr val="000000"/>
-                </a:solidFill>
-                <a:latin typeface="Arial Unicode MS"/>
-                <a:ea typeface="Arial Unicode MS"/>
-                <a:cs typeface="Arial Unicode MS"/>
-              </a:rPr>
-              <a:t>第二招，看動作。</a:t>
-            </a:r>
-            <a:r>
-              <a:rPr sz="1050" lang="zh-TW" dirty="0">
-                <a:solidFill>
-                  <a:srgbClr val="000000"/>
-                </a:solidFill>
-                <a:latin typeface="Arial Unicode MS"/>
-                <a:ea typeface="Arial Unicode MS"/>
-                <a:cs typeface="Arial Unicode MS"/>
-              </a:rPr>
-              <a:t>看左邊這張照片，一個正在過馬路的人。一根電線桿，整根都是同一個速度，零。一個人走路，身體往前，手和腳卻一前一後地擺，有的部位快、有的慢、有的往回。雷達量得到這種「同一個東西裡，有好幾種速度，而且有節奏」的特徵，英文叫 micro-Doppler，</a:t>
-            </a:r>
-            <a:r>
-              <a:rPr sz="1050" b="1" lang="zh-TW" dirty="0">
-                <a:solidFill>
-                  <a:srgbClr val="000000"/>
-                </a:solidFill>
-                <a:latin typeface="Arial Unicode MS"/>
-                <a:ea typeface="Arial Unicode MS"/>
-                <a:cs typeface="Arial Unicode MS"/>
-              </a:rPr>
-              <a:t>微都卜勒</a:t>
-            </a:r>
-            <a:r>
-              <a:rPr sz="1050" lang="zh-TW" dirty="0">
-                <a:solidFill>
-                  <a:srgbClr val="000000"/>
-                </a:solidFill>
-                <a:latin typeface="Arial Unicode MS"/>
-                <a:ea typeface="Arial Unicode MS"/>
-                <a:cs typeface="Arial Unicode MS"/>
-              </a:rPr>
-              <a:t>，可以用來分辨行人、腳踏車和桿子。這是雷達研究裡很成熟的方向，不過量產車用到什麼程度，我沒有資料可以講。
+              <a:rPr sz="1000" b="1" lang="zh-TW" dirty="0">
+                <a:solidFill>
+                  <a:srgbClr val="000000"/>
+                </a:solidFill>
+                <a:latin typeface="Arial Unicode MS"/>
+                <a:ea typeface="Arial Unicode MS"/>
+                <a:cs typeface="Arial Unicode MS"/>
+              </a:rPr>
+              <a:t>第一招，點更多。</a:t>
+            </a:r>
+            <a:r>
+              <a:rPr sz="1000" lang="zh-TW" dirty="0">
+                <a:solidFill>
+                  <a:srgbClr val="000000"/>
+                </a:solidFill>
+                <a:latin typeface="Arial Unicode MS"/>
+                <a:ea typeface="Arial Unicode MS"/>
+                <a:cs typeface="Arial Unicode MS"/>
+              </a:rPr>
+              <a:t>就是上週講的 4D 雷達。天線從 408 的二十四個，變成 548 的一百九十二個，角度分得更細，一個人身上能分到好幾個點，不會跟旁邊、後面的東西混在一起；又量得出高度，人是瘦高的，車是矮寬的，多一個分辨的線索。
 </a:t>
             </a:r>
           </a:p>
@@ -3106,30 +3315,52 @@
                 <a:spcPts val="0"/>
               </a:spcBef>
               <a:spcAft>
-                <a:spcPts val="175"/>
+                <a:spcPts val="167"/>
               </a:spcAft>
             </a:pPr>
             <a:r>
-              <a:rPr sz="1050" b="1" lang="zh-TW" dirty="0">
-                <a:solidFill>
-                  <a:srgbClr val="000000"/>
-                </a:solidFill>
-                <a:latin typeface="Arial Unicode MS"/>
-                <a:ea typeface="Arial Unicode MS"/>
-                <a:cs typeface="Arial Unicode MS"/>
-              </a:rPr>
-              <a:t>第三招，看久一點。</a:t>
-            </a:r>
-            <a:r>
-              <a:rPr sz="1050" lang="zh-TW" dirty="0">
-                <a:solidFill>
-                  <a:srgbClr val="000000"/>
-                </a:solidFill>
-                <a:latin typeface="Arial Unicode MS"/>
-                <a:ea typeface="Arial Unicode MS"/>
-                <a:cs typeface="Arial Unicode MS"/>
-              </a:rPr>
-              <a:t>剛剛說雷達看人一閃一閃。可是雷達每秒更新十幾次，一瞬間只抓到兩三成，一秒鐘裡還是會抓到好幾次。把連續幾次的掃描疊起來一起看，再用追蹤把一閃一閃的點串成一條線，中間的空檔先用預測補，下一節會講。荷蘭一份公開資料集的論文也寫到：加上高度、再把連續幾次掃描疊起來，雷達和光達的差距就縮小了。
+              <a:rPr sz="1000" b="1" lang="zh-TW" dirty="0">
+                <a:solidFill>
+                  <a:srgbClr val="000000"/>
+                </a:solidFill>
+                <a:latin typeface="Arial Unicode MS"/>
+                <a:ea typeface="Arial Unicode MS"/>
+                <a:cs typeface="Arial Unicode MS"/>
+              </a:rPr>
+              <a:t>第二招，看動作。</a:t>
+            </a:r>
+            <a:r>
+              <a:rPr sz="1000" lang="zh-TW" dirty="0">
+                <a:solidFill>
+                  <a:srgbClr val="000000"/>
+                </a:solidFill>
+                <a:latin typeface="Arial Unicode MS"/>
+                <a:ea typeface="Arial Unicode MS"/>
+                <a:cs typeface="Arial Unicode MS"/>
+              </a:rPr>
+              <a:t>看左邊這張照片，一個正在過馬路的人。一根電線桿，整根都是同一個速度，零。一個人走路，身體往前，手和腳卻一前一後地擺，有的部位快、有的慢、有的往回。雷達量得到這種「同一個東西裡，有好幾種速度，而且有節奏」的特徵，英文叫 micro-Doppler，</a:t>
+            </a:r>
+            <a:r>
+              <a:rPr sz="1000" b="1" lang="zh-TW" dirty="0">
+                <a:solidFill>
+                  <a:srgbClr val="000000"/>
+                </a:solidFill>
+                <a:latin typeface="Arial Unicode MS"/>
+                <a:ea typeface="Arial Unicode MS"/>
+                <a:cs typeface="Arial Unicode MS"/>
+              </a:rPr>
+              <a:t>微都卜勒</a:t>
+            </a:r>
+            <a:r>
+              <a:rPr sz="1000" lang="zh-TW" dirty="0">
+                <a:solidFill>
+                  <a:srgbClr val="000000"/>
+                </a:solidFill>
+                <a:latin typeface="Arial Unicode MS"/>
+                <a:ea typeface="Arial Unicode MS"/>
+                <a:cs typeface="Arial Unicode MS"/>
+              </a:rPr>
+              <a:t>，可以用來分辨行人、腳踏車和桿子。這是雷達研究裡很成熟的方向，不過量產車用到什麼程度，我沒有資料可以講。
 </a:t>
             </a:r>
           </a:p>
@@ -3139,52 +3370,30 @@
                 <a:spcPts val="0"/>
               </a:spcBef>
               <a:spcAft>
-                <a:spcPts val="175"/>
+                <a:spcPts val="167"/>
               </a:spcAft>
             </a:pPr>
             <a:r>
-              <a:rPr sz="1050" b="1" lang="zh-TW" dirty="0">
-                <a:solidFill>
-                  <a:srgbClr val="000000"/>
-                </a:solidFill>
-                <a:latin typeface="Arial Unicode MS"/>
-                <a:ea typeface="Arial Unicode MS"/>
-                <a:cs typeface="Arial Unicode MS"/>
-              </a:rPr>
-              <a:t>第四招，跟別人一起看。</a:t>
-            </a:r>
-            <a:r>
-              <a:rPr sz="1050" lang="zh-TW" dirty="0">
-                <a:solidFill>
-                  <a:srgbClr val="000000"/>
-                </a:solidFill>
-                <a:latin typeface="Arial Unicode MS"/>
-                <a:ea typeface="Arial Unicode MS"/>
-                <a:cs typeface="Arial Unicode MS"/>
-              </a:rPr>
-              <a:t>這是量產車最常見的做法。雷達抓到人的時候，距離和接近的速度量得很準，晚上、下雨也照樣量，這正是相機最弱的地方；它做不到的，是</a:t>
-            </a:r>
-            <a:r>
-              <a:rPr sz="1050" b="1" lang="zh-TW" dirty="0">
-                <a:solidFill>
-                  <a:srgbClr val="000000"/>
-                </a:solidFill>
-                <a:latin typeface="Arial Unicode MS"/>
-                <a:ea typeface="Arial Unicode MS"/>
-                <a:cs typeface="Arial Unicode MS"/>
-              </a:rPr>
-              <a:t>認出那是一個人</a:t>
-            </a:r>
-            <a:r>
-              <a:rPr sz="1050" lang="zh-TW" dirty="0">
-                <a:solidFill>
-                  <a:srgbClr val="000000"/>
-                </a:solidFill>
-                <a:latin typeface="Arial Unicode MS"/>
-                <a:ea typeface="Arial Unicode MS"/>
-                <a:cs typeface="Arial Unicode MS"/>
-              </a:rPr>
-              <a:t>，那要靠相機。所以像 Toyota 的預防碰撞系統，就是相機加毫米波雷達一起看行人。晚上也有人用熱像儀加雷達：人的身體是熱的，在熱像裡特別明顯。
+              <a:rPr sz="1000" b="1" lang="zh-TW" dirty="0">
+                <a:solidFill>
+                  <a:srgbClr val="000000"/>
+                </a:solidFill>
+                <a:latin typeface="Arial Unicode MS"/>
+                <a:ea typeface="Arial Unicode MS"/>
+                <a:cs typeface="Arial Unicode MS"/>
+              </a:rPr>
+              <a:t>第三招，看久一點。</a:t>
+            </a:r>
+            <a:r>
+              <a:rPr sz="1000" lang="zh-TW" dirty="0">
+                <a:solidFill>
+                  <a:srgbClr val="000000"/>
+                </a:solidFill>
+                <a:latin typeface="Arial Unicode MS"/>
+                <a:ea typeface="Arial Unicode MS"/>
+                <a:cs typeface="Arial Unicode MS"/>
+              </a:rPr>
+              <a:t>剛剛說雷達看人一閃一閃。可是雷達每秒更新十幾次，一瞬間只抓到兩三成，一秒鐘裡還是會抓到好幾次。把連續幾次的掃描疊起來一起看，再用追蹤把一閃一閃的點串成一條線，中間的空檔先用預測補，下一節會講。荷蘭一份公開資料集的論文也寫到：加上高度、再把連續幾次掃描疊起來，雷達和光達的差距就縮小了。
 </a:t>
             </a:r>
           </a:p>
@@ -3194,19 +3403,52 @@
                 <a:spcPts val="0"/>
               </a:spcBef>
               <a:spcAft>
-                <a:spcPts val="175"/>
+                <a:spcPts val="167"/>
               </a:spcAft>
             </a:pPr>
             <a:r>
-              <a:rPr sz="1050" lang="zh-TW" dirty="0">
-                <a:solidFill>
-                  <a:srgbClr val="000000"/>
-                </a:solidFill>
-                <a:latin typeface="Arial Unicode MS"/>
-                <a:ea typeface="Arial Unicode MS"/>
-                <a:cs typeface="Arial Unicode MS"/>
-              </a:rPr>
-              <a:t>這些新做法有沒有用？剛剛那份荷蘭的資料集，二〇二二年公開，用的是新一代 4D 雷達：車子正前方的行人，大約一半找得到，比我們今天這顆二〇一八年的 ARS 408 好，但行人還是最難找的那一類；加上相機，分數再往上。
+              <a:rPr sz="1000" b="1" lang="zh-TW" dirty="0">
+                <a:solidFill>
+                  <a:srgbClr val="000000"/>
+                </a:solidFill>
+                <a:latin typeface="Arial Unicode MS"/>
+                <a:ea typeface="Arial Unicode MS"/>
+                <a:cs typeface="Arial Unicode MS"/>
+              </a:rPr>
+              <a:t>第四招，跟別人一起看。</a:t>
+            </a:r>
+            <a:r>
+              <a:rPr sz="1000" lang="zh-TW" dirty="0">
+                <a:solidFill>
+                  <a:srgbClr val="000000"/>
+                </a:solidFill>
+                <a:latin typeface="Arial Unicode MS"/>
+                <a:ea typeface="Arial Unicode MS"/>
+                <a:cs typeface="Arial Unicode MS"/>
+              </a:rPr>
+              <a:t>這是量產車最常見的做法。雷達抓到人的時候，距離和接近的速度量得很準，晚上、下雨也照樣量，這正是相機最弱的地方；它做不到的，是</a:t>
+            </a:r>
+            <a:r>
+              <a:rPr sz="1000" b="1" lang="zh-TW" dirty="0">
+                <a:solidFill>
+                  <a:srgbClr val="000000"/>
+                </a:solidFill>
+                <a:latin typeface="Arial Unicode MS"/>
+                <a:ea typeface="Arial Unicode MS"/>
+                <a:cs typeface="Arial Unicode MS"/>
+              </a:rPr>
+              <a:t>認出那是一個人</a:t>
+            </a:r>
+            <a:r>
+              <a:rPr sz="1000" lang="zh-TW" dirty="0">
+                <a:solidFill>
+                  <a:srgbClr val="000000"/>
+                </a:solidFill>
+                <a:latin typeface="Arial Unicode MS"/>
+                <a:ea typeface="Arial Unicode MS"/>
+                <a:cs typeface="Arial Unicode MS"/>
+              </a:rPr>
+              <a:t>，那要靠相機。所以像 Toyota 的預防碰撞系統，就是相機加毫米波雷達一起看行人。晚上也有人用熱像儀加雷達：人的身體是熱的，在熱像裡特別明顯。
 </a:t>
             </a:r>
           </a:p>
@@ -3216,11 +3458,33 @@
                 <a:spcPts val="0"/>
               </a:spcBef>
               <a:spcAft>
-                <a:spcPts val="175"/>
+                <a:spcPts val="167"/>
               </a:spcAft>
             </a:pPr>
             <a:r>
-              <a:rPr sz="1050" lang="zh-TW" dirty="0">
+              <a:rPr sz="1000" lang="zh-TW" dirty="0">
+                <a:solidFill>
+                  <a:srgbClr val="000000"/>
+                </a:solidFill>
+                <a:latin typeface="Arial Unicode MS"/>
+                <a:ea typeface="Arial Unicode MS"/>
+                <a:cs typeface="Arial Unicode MS"/>
+              </a:rPr>
+              <a:t>這些新做法有沒有用？剛剛那份荷蘭的資料集，二〇二二年公開，用的是新一代 4D 雷達：車子正前方的行人，大約一半找得到，比我們今天這顆二〇一八年的 ARS 408 好，但行人還是最難找的那一類；加上相機，分數再往上。
+</a:t>
+            </a:r>
+          </a:p>
+          <a:p>
+            <a:pPr algn="l">
+              <a:spcBef>
+                <a:spcPts val="0"/>
+              </a:spcBef>
+              <a:spcAft>
+                <a:spcPts val="167"/>
+              </a:spcAft>
+            </a:pPr>
+            <a:r>
+              <a:rPr sz="1000" lang="zh-TW" dirty="0">
                 <a:solidFill>
                   <a:srgbClr val="000000"/>
                 </a:solidFill>
@@ -3231,7 +3495,7 @@
               <a:t>所以結論是：</a:t>
             </a:r>
             <a:r>
-              <a:rPr sz="1050" b="1" lang="zh-TW" dirty="0">
+              <a:rPr sz="1000" b="1" lang="zh-TW" dirty="0">
                 <a:solidFill>
                   <a:srgbClr val="000000"/>
                 </a:solidFill>
@@ -3352,6 +3616,39 @@
               </a:spcAft>
             </a:pPr>
             <a:r>
+              <a:rPr sz="1200" b="1" lang="zh-TW" dirty="0">
+                <a:solidFill>
+                  <a:srgbClr val="000000"/>
+                </a:solidFill>
+                <a:latin typeface="Arial Unicode MS"/>
+                <a:ea typeface="Arial Unicode MS"/>
+                <a:cs typeface="Arial Unicode MS"/>
+              </a:rPr>
+              <a:t>這一張的目的：</a:t>
+            </a:r>
+            <a:r>
+              <a:rPr sz="1200" lang="zh-TW" dirty="0">
+                <a:solidFill>
+                  <a:srgbClr val="000000"/>
+                </a:solidFill>
+                <a:latin typeface="Arial Unicode MS"/>
+                <a:ea typeface="Arial Unicode MS"/>
+                <a:cs typeface="Arial Unicode MS"/>
+              </a:rPr>
+              <a:t>讓大家記住，最危險的是看不到卻說沒事，所以每一顆都要能說「我現在不可靠」；這也引出下一節的融合。
+</a:t>
+            </a:r>
+          </a:p>
+          <a:p>
+            <a:pPr algn="l">
+              <a:spcBef>
+                <a:spcPts val="0"/>
+              </a:spcBef>
+              <a:spcAft>
+                <a:spcPts val="200"/>
+              </a:spcAft>
+            </a:pPr>
+            <a:r>
               <a:rPr sz="1200" lang="zh-TW" dirty="0">
                 <a:solidFill>
                   <a:srgbClr val="000000"/>
@@ -3781,6 +4078,39 @@
               </a:spcAft>
             </a:pPr>
             <a:r>
+              <a:rPr sz="1200" b="1" lang="zh-TW" dirty="0">
+                <a:solidFill>
+                  <a:srgbClr val="000000"/>
+                </a:solidFill>
+                <a:latin typeface="Arial Unicode MS"/>
+                <a:ea typeface="Arial Unicode MS"/>
+                <a:cs typeface="Arial Unicode MS"/>
+              </a:rPr>
+              <a:t>這一張的目的：</a:t>
+            </a:r>
+            <a:r>
+              <a:rPr sz="1200" lang="zh-TW" dirty="0">
+                <a:solidFill>
+                  <a:srgbClr val="000000"/>
+                </a:solidFill>
+                <a:latin typeface="Arial Unicode MS"/>
+                <a:ea typeface="Arial Unicode MS"/>
+                <a:cs typeface="Arial Unicode MS"/>
+              </a:rPr>
+              <a:t>把這一節收成三句話，讓大家帶走。
+</a:t>
+            </a:r>
+          </a:p>
+          <a:p>
+            <a:pPr algn="l">
+              <a:spcBef>
+                <a:spcPts val="0"/>
+              </a:spcBef>
+              <a:spcAft>
+                <a:spcPts val="200"/>
+              </a:spcAft>
+            </a:pPr>
+            <a:r>
               <a:rPr sz="1200" lang="zh-TW" dirty="0">
                 <a:solidFill>
                   <a:srgbClr val="000000"/>
@@ -4019,19 +4349,30 @@
                 <a:spcPts val="0"/>
               </a:spcBef>
               <a:spcAft>
-                <a:spcPts val="200"/>
+                <a:spcPts val="192"/>
               </a:spcAft>
             </a:pPr>
             <a:r>
-              <a:rPr sz="1200" lang="zh-TW" dirty="0">
-                <a:solidFill>
-                  <a:srgbClr val="000000"/>
-                </a:solidFill>
-                <a:latin typeface="Arial Unicode MS"/>
-                <a:ea typeface="Arial Unicode MS"/>
-                <a:cs typeface="Arial Unicode MS"/>
-              </a:rPr>
-              <a:t>開始之前，先把前四週的結論，一週一句，串起來。
+              <a:rPr sz="1150" b="1" lang="zh-TW" dirty="0">
+                <a:solidFill>
+                  <a:srgbClr val="000000"/>
+                </a:solidFill>
+                <a:latin typeface="Arial Unicode MS"/>
+                <a:ea typeface="Arial Unicode MS"/>
+                <a:cs typeface="Arial Unicode MS"/>
+              </a:rPr>
+              <a:t>這一張的目的：</a:t>
+            </a:r>
+            <a:r>
+              <a:rPr sz="1150" lang="zh-TW" dirty="0">
+                <a:solidFill>
+                  <a:srgbClr val="000000"/>
+                </a:solidFill>
+                <a:latin typeface="Arial Unicode MS"/>
+                <a:ea typeface="Arial Unicode MS"/>
+                <a:cs typeface="Arial Unicode MS"/>
+              </a:rPr>
+              <a:t>把前四週串起來：每一種感測器各有長短，今天就從「它們什麼時候輸」接下去。
 </a:t>
             </a:r>
           </a:p>
@@ -4041,52 +4382,19 @@
                 <a:spcPts val="0"/>
               </a:spcBef>
               <a:spcAft>
-                <a:spcPts val="200"/>
+                <a:spcPts val="192"/>
               </a:spcAft>
             </a:pPr>
             <a:r>
-              <a:rPr sz="1200" b="1" lang="zh-TW" dirty="0">
-                <a:solidFill>
-                  <a:srgbClr val="000000"/>
-                </a:solidFill>
-                <a:latin typeface="Arial Unicode MS"/>
-                <a:ea typeface="Arial Unicode MS"/>
-                <a:cs typeface="Arial Unicode MS"/>
-              </a:rPr>
-              <a:t>第三週</a:t>
-            </a:r>
-            <a:r>
-              <a:rPr sz="1200" lang="zh-TW" dirty="0">
-                <a:solidFill>
-                  <a:srgbClr val="000000"/>
-                </a:solidFill>
-                <a:latin typeface="Arial Unicode MS"/>
-                <a:ea typeface="Arial Unicode MS"/>
-                <a:cs typeface="Arial Unicode MS"/>
-              </a:rPr>
-              <a:t>，我們第一次把六種感測器排在一起，用感測器實驗室玩。結論是：</a:t>
-            </a:r>
-            <a:r>
-              <a:rPr sz="1200" b="1" lang="zh-TW" dirty="0">
-                <a:solidFill>
-                  <a:srgbClr val="000000"/>
-                </a:solidFill>
-                <a:latin typeface="Arial Unicode MS"/>
-                <a:ea typeface="Arial Unicode MS"/>
-                <a:cs typeface="Arial Unicode MS"/>
-              </a:rPr>
-              <a:t>每一種量的東西不一樣</a:t>
-            </a:r>
-            <a:r>
-              <a:rPr sz="1200" lang="zh-TW" dirty="0">
-                <a:solidFill>
-                  <a:srgbClr val="000000"/>
-                </a:solidFill>
-                <a:latin typeface="Arial Unicode MS"/>
-                <a:ea typeface="Arial Unicode MS"/>
-                <a:cs typeface="Arial Unicode MS"/>
-              </a:rPr>
-              <a:t>，不是同一件事誰比較準。量得到距離，不等於知道那是什麼。還有一個數字要記得：距離變兩倍，相機的誤差變四倍，光達打到身上的點剩四分之一。
+              <a:rPr sz="1150" lang="zh-TW" dirty="0">
+                <a:solidFill>
+                  <a:srgbClr val="000000"/>
+                </a:solidFill>
+                <a:latin typeface="Arial Unicode MS"/>
+                <a:ea typeface="Arial Unicode MS"/>
+                <a:cs typeface="Arial Unicode MS"/>
+              </a:rPr>
+              <a:t>開始之前，先把前四週的結論，一週一句，串起來。
 </a:t>
             </a:r>
           </a:p>
@@ -4096,30 +4404,52 @@
                 <a:spcPts val="0"/>
               </a:spcBef>
               <a:spcAft>
-                <a:spcPts val="200"/>
+                <a:spcPts val="192"/>
               </a:spcAft>
             </a:pPr>
             <a:r>
-              <a:rPr sz="1200" b="1" lang="zh-TW" dirty="0">
-                <a:solidFill>
-                  <a:srgbClr val="000000"/>
-                </a:solidFill>
-                <a:latin typeface="Arial Unicode MS"/>
-                <a:ea typeface="Arial Unicode MS"/>
-                <a:cs typeface="Arial Unicode MS"/>
-              </a:rPr>
-              <a:t>第四週</a:t>
-            </a:r>
-            <a:r>
-              <a:rPr sz="1200" lang="zh-TW" dirty="0">
-                <a:solidFill>
-                  <a:srgbClr val="000000"/>
-                </a:solidFill>
-                <a:latin typeface="Arial Unicode MS"/>
-                <a:ea typeface="Arial Unicode MS"/>
-                <a:cs typeface="Arial Unicode MS"/>
-              </a:rPr>
-              <a:t>，我們把感測器裝到會跑的車上，用模擬器。三個滑桿，就是規格表上三行：射線數是解析度、長度是測距、張角是視野。時速五十，射線至少要二十五公尺，不然來不及停。模擬是篩子，通過只是拿到上真車的門票。
+              <a:rPr sz="1150" b="1" lang="zh-TW" dirty="0">
+                <a:solidFill>
+                  <a:srgbClr val="000000"/>
+                </a:solidFill>
+                <a:latin typeface="Arial Unicode MS"/>
+                <a:ea typeface="Arial Unicode MS"/>
+                <a:cs typeface="Arial Unicode MS"/>
+              </a:rPr>
+              <a:t>第三週</a:t>
+            </a:r>
+            <a:r>
+              <a:rPr sz="1150" lang="zh-TW" dirty="0">
+                <a:solidFill>
+                  <a:srgbClr val="000000"/>
+                </a:solidFill>
+                <a:latin typeface="Arial Unicode MS"/>
+                <a:ea typeface="Arial Unicode MS"/>
+                <a:cs typeface="Arial Unicode MS"/>
+              </a:rPr>
+              <a:t>，我們第一次把六種感測器排在一起，用感測器實驗室玩。結論是：</a:t>
+            </a:r>
+            <a:r>
+              <a:rPr sz="1150" b="1" lang="zh-TW" dirty="0">
+                <a:solidFill>
+                  <a:srgbClr val="000000"/>
+                </a:solidFill>
+                <a:latin typeface="Arial Unicode MS"/>
+                <a:ea typeface="Arial Unicode MS"/>
+                <a:cs typeface="Arial Unicode MS"/>
+              </a:rPr>
+              <a:t>每一種量的東西不一樣</a:t>
+            </a:r>
+            <a:r>
+              <a:rPr sz="1150" lang="zh-TW" dirty="0">
+                <a:solidFill>
+                  <a:srgbClr val="000000"/>
+                </a:solidFill>
+                <a:latin typeface="Arial Unicode MS"/>
+                <a:ea typeface="Arial Unicode MS"/>
+                <a:cs typeface="Arial Unicode MS"/>
+              </a:rPr>
+              <a:t>，不是同一件事誰比較準。量得到距離，不等於知道那是什麼。還有一個數字要記得：距離變兩倍，相機的誤差變四倍，光達打到身上的點剩四分之一。
 </a:t>
             </a:r>
           </a:p>
@@ -4129,52 +4459,30 @@
                 <a:spcPts val="0"/>
               </a:spcBef>
               <a:spcAft>
-                <a:spcPts val="200"/>
+                <a:spcPts val="192"/>
               </a:spcAft>
             </a:pPr>
             <a:r>
-              <a:rPr sz="1200" b="1" lang="zh-TW" dirty="0">
-                <a:solidFill>
-                  <a:srgbClr val="000000"/>
-                </a:solidFill>
-                <a:latin typeface="Arial Unicode MS"/>
-                <a:ea typeface="Arial Unicode MS"/>
-                <a:cs typeface="Arial Unicode MS"/>
-              </a:rPr>
-              <a:t>第五週</a:t>
-            </a:r>
-            <a:r>
-              <a:rPr sz="1200" lang="zh-TW" dirty="0">
-                <a:solidFill>
-                  <a:srgbClr val="000000"/>
-                </a:solidFill>
-                <a:latin typeface="Arial Unicode MS"/>
-                <a:ea typeface="Arial Unicode MS"/>
-                <a:cs typeface="Arial Unicode MS"/>
-              </a:rPr>
-              <a:t>，開始讀真的規格表，相機和光達。看到測距一定要追問：</a:t>
-            </a:r>
-            <a:r>
-              <a:rPr sz="1200" b="1" lang="zh-TW" dirty="0">
-                <a:solidFill>
-                  <a:srgbClr val="000000"/>
-                </a:solidFill>
-                <a:latin typeface="Arial Unicode MS"/>
-                <a:ea typeface="Arial Unicode MS"/>
-                <a:cs typeface="Arial Unicode MS"/>
-              </a:rPr>
-              <a:t>對多少反射率量的</a:t>
-            </a:r>
-            <a:r>
-              <a:rPr sz="1200" lang="zh-TW" dirty="0">
-                <a:solidFill>
-                  <a:srgbClr val="000000"/>
-                </a:solidFill>
-                <a:latin typeface="Arial Unicode MS"/>
-                <a:ea typeface="Arial Unicode MS"/>
-                <a:cs typeface="Arial Unicode MS"/>
-              </a:rPr>
-              <a:t>。同一顆 OS1，白色的東西一百七十公尺，黑色的只有九十。還有：兩顆好的感測器合起來不一定對，差一度，五十公尺外就差將近一公尺。
+              <a:rPr sz="1150" b="1" lang="zh-TW" dirty="0">
+                <a:solidFill>
+                  <a:srgbClr val="000000"/>
+                </a:solidFill>
+                <a:latin typeface="Arial Unicode MS"/>
+                <a:ea typeface="Arial Unicode MS"/>
+                <a:cs typeface="Arial Unicode MS"/>
+              </a:rPr>
+              <a:t>第四週</a:t>
+            </a:r>
+            <a:r>
+              <a:rPr sz="1150" lang="zh-TW" dirty="0">
+                <a:solidFill>
+                  <a:srgbClr val="000000"/>
+                </a:solidFill>
+                <a:latin typeface="Arial Unicode MS"/>
+                <a:ea typeface="Arial Unicode MS"/>
+                <a:cs typeface="Arial Unicode MS"/>
+              </a:rPr>
+              <a:t>，我們把感測器裝到會跑的車上，用模擬器。三個滑桿，就是規格表上三行：射線數是解析度、長度是測距、張角是視野。時速五十，射線至少要二十五公尺，不然來不及停。模擬是篩子，通過只是拿到上真車的門票。
 </a:t>
             </a:r>
           </a:p>
@@ -4184,74 +4492,52 @@
                 <a:spcPts val="0"/>
               </a:spcBef>
               <a:spcAft>
-                <a:spcPts val="200"/>
+                <a:spcPts val="192"/>
               </a:spcAft>
             </a:pPr>
             <a:r>
-              <a:rPr sz="1200" b="1" lang="zh-TW" dirty="0">
-                <a:solidFill>
-                  <a:srgbClr val="000000"/>
-                </a:solidFill>
-                <a:latin typeface="Arial Unicode MS"/>
-                <a:ea typeface="Arial Unicode MS"/>
-                <a:cs typeface="Arial Unicode MS"/>
-              </a:rPr>
-              <a:t>第六週</a:t>
-            </a:r>
-            <a:r>
-              <a:rPr sz="1200" lang="zh-TW" dirty="0">
-                <a:solidFill>
-                  <a:srgbClr val="000000"/>
-                </a:solidFill>
-                <a:latin typeface="Arial Unicode MS"/>
-                <a:ea typeface="Arial Unicode MS"/>
-                <a:cs typeface="Arial Unicode MS"/>
-              </a:rPr>
-              <a:t>，上週，雷達、超音波、衛星定位、IMU。大家在作業頁上填了四張小表：雷達、超音波、衛星定位、IMU 各兩顆型號，放進幾個情境，每一格判斷「這顆在這裡夠不夠用」。雷達三個情境、超音波兩個、衛星定位三個、IMU 三個，乘上兩顆，總共</a:t>
-            </a:r>
-            <a:r>
-              <a:rPr sz="1200" b="1" lang="zh-TW" dirty="0">
-                <a:solidFill>
-                  <a:srgbClr val="000000"/>
-                </a:solidFill>
-                <a:latin typeface="Arial Unicode MS"/>
-                <a:ea typeface="Arial Unicode MS"/>
-                <a:cs typeface="Arial Unicode MS"/>
-              </a:rPr>
-              <a:t>二十二格</a:t>
-            </a:r>
-            <a:r>
-              <a:rPr sz="1200" lang="zh-TW" dirty="0">
-                <a:solidFill>
-                  <a:srgbClr val="000000"/>
-                </a:solidFill>
-                <a:latin typeface="Arial Unicode MS"/>
-                <a:ea typeface="Arial Unicode MS"/>
-                <a:cs typeface="Arial Unicode MS"/>
-              </a:rPr>
-              <a:t>。判斷下來：雷達直接量速度，超音波是停車場的王，衛星定位在高樓會偏、在隧道會斷，IMU 會飄。結論是：</a:t>
-            </a:r>
-            <a:r>
-              <a:rPr sz="1200" b="1" lang="zh-TW" dirty="0">
-                <a:solidFill>
-                  <a:srgbClr val="000000"/>
-                </a:solidFill>
-                <a:latin typeface="Arial Unicode MS"/>
-                <a:ea typeface="Arial Unicode MS"/>
-                <a:cs typeface="Arial Unicode MS"/>
-              </a:rPr>
-              <a:t>沒有一種感測器，五個情境都贏。</a:t>
-            </a:r>
-            <a:r>
-              <a:rPr sz="1200" lang="zh-TW" dirty="0">
-                <a:solidFill>
-                  <a:srgbClr val="000000"/>
-                </a:solidFill>
-                <a:latin typeface="Arial Unicode MS"/>
-                <a:ea typeface="Arial Unicode MS"/>
-                <a:cs typeface="Arial Unicode MS"/>
-              </a:rPr>
-              <a:t>
+              <a:rPr sz="1150" b="1" lang="zh-TW" dirty="0">
+                <a:solidFill>
+                  <a:srgbClr val="000000"/>
+                </a:solidFill>
+                <a:latin typeface="Arial Unicode MS"/>
+                <a:ea typeface="Arial Unicode MS"/>
+                <a:cs typeface="Arial Unicode MS"/>
+              </a:rPr>
+              <a:t>第五週</a:t>
+            </a:r>
+            <a:r>
+              <a:rPr sz="1150" lang="zh-TW" dirty="0">
+                <a:solidFill>
+                  <a:srgbClr val="000000"/>
+                </a:solidFill>
+                <a:latin typeface="Arial Unicode MS"/>
+                <a:ea typeface="Arial Unicode MS"/>
+                <a:cs typeface="Arial Unicode MS"/>
+              </a:rPr>
+              <a:t>，開始讀真的規格表，相機和光達。看到測距一定要追問：</a:t>
+            </a:r>
+            <a:r>
+              <a:rPr sz="1150" b="1" lang="zh-TW" dirty="0">
+                <a:solidFill>
+                  <a:srgbClr val="000000"/>
+                </a:solidFill>
+                <a:latin typeface="Arial Unicode MS"/>
+                <a:ea typeface="Arial Unicode MS"/>
+                <a:cs typeface="Arial Unicode MS"/>
+              </a:rPr>
+              <a:t>對多少反射率量的</a:t>
+            </a:r>
+            <a:r>
+              <a:rPr sz="1150" lang="zh-TW" dirty="0">
+                <a:solidFill>
+                  <a:srgbClr val="000000"/>
+                </a:solidFill>
+                <a:latin typeface="Arial Unicode MS"/>
+                <a:ea typeface="Arial Unicode MS"/>
+                <a:cs typeface="Arial Unicode MS"/>
+              </a:rPr>
+              <a:t>。同一顆 OS1，白色的東西一百七十公尺，黑色的只有九十。還有：兩顆好的感測器合起來不一定對，差一度，五十公尺外就差將近一公尺。
 </a:t>
             </a:r>
           </a:p>
@@ -4261,11 +4547,88 @@
                 <a:spcPts val="0"/>
               </a:spcBef>
               <a:spcAft>
-                <a:spcPts val="200"/>
+                <a:spcPts val="192"/>
               </a:spcAft>
             </a:pPr>
             <a:r>
-              <a:rPr sz="1200" lang="zh-TW" dirty="0">
+              <a:rPr sz="1150" b="1" lang="zh-TW" dirty="0">
+                <a:solidFill>
+                  <a:srgbClr val="000000"/>
+                </a:solidFill>
+                <a:latin typeface="Arial Unicode MS"/>
+                <a:ea typeface="Arial Unicode MS"/>
+                <a:cs typeface="Arial Unicode MS"/>
+              </a:rPr>
+              <a:t>第六週</a:t>
+            </a:r>
+            <a:r>
+              <a:rPr sz="1150" lang="zh-TW" dirty="0">
+                <a:solidFill>
+                  <a:srgbClr val="000000"/>
+                </a:solidFill>
+                <a:latin typeface="Arial Unicode MS"/>
+                <a:ea typeface="Arial Unicode MS"/>
+                <a:cs typeface="Arial Unicode MS"/>
+              </a:rPr>
+              <a:t>，上週，雷達、超音波、衛星定位、IMU。大家在作業頁上填了四張小表：雷達、超音波、衛星定位、IMU 各兩顆型號，放進幾個情境，每一格判斷「這顆在這裡夠不夠用」。雷達三個情境、超音波兩個、衛星定位三個、IMU 三個，乘上兩顆，總共</a:t>
+            </a:r>
+            <a:r>
+              <a:rPr sz="1150" b="1" lang="zh-TW" dirty="0">
+                <a:solidFill>
+                  <a:srgbClr val="000000"/>
+                </a:solidFill>
+                <a:latin typeface="Arial Unicode MS"/>
+                <a:ea typeface="Arial Unicode MS"/>
+                <a:cs typeface="Arial Unicode MS"/>
+              </a:rPr>
+              <a:t>二十二格</a:t>
+            </a:r>
+            <a:r>
+              <a:rPr sz="1150" lang="zh-TW" dirty="0">
+                <a:solidFill>
+                  <a:srgbClr val="000000"/>
+                </a:solidFill>
+                <a:latin typeface="Arial Unicode MS"/>
+                <a:ea typeface="Arial Unicode MS"/>
+                <a:cs typeface="Arial Unicode MS"/>
+              </a:rPr>
+              <a:t>。判斷下來：雷達直接量速度，超音波是停車場的王，衛星定位在高樓會偏、在隧道會斷，IMU 會飄。結論是：</a:t>
+            </a:r>
+            <a:r>
+              <a:rPr sz="1150" b="1" lang="zh-TW" dirty="0">
+                <a:solidFill>
+                  <a:srgbClr val="000000"/>
+                </a:solidFill>
+                <a:latin typeface="Arial Unicode MS"/>
+                <a:ea typeface="Arial Unicode MS"/>
+                <a:cs typeface="Arial Unicode MS"/>
+              </a:rPr>
+              <a:t>沒有一種感測器，五個情境都贏。</a:t>
+            </a:r>
+            <a:r>
+              <a:rPr sz="1150" lang="zh-TW" dirty="0">
+                <a:solidFill>
+                  <a:srgbClr val="000000"/>
+                </a:solidFill>
+                <a:latin typeface="Arial Unicode MS"/>
+                <a:ea typeface="Arial Unicode MS"/>
+                <a:cs typeface="Arial Unicode MS"/>
+              </a:rPr>
+              <a:t>
+</a:t>
+            </a:r>
+          </a:p>
+          <a:p>
+            <a:pPr algn="l">
+              <a:spcBef>
+                <a:spcPts val="0"/>
+              </a:spcBef>
+              <a:spcAft>
+                <a:spcPts val="192"/>
+              </a:spcAft>
+            </a:pPr>
+            <a:r>
+              <a:rPr sz="1150" lang="zh-TW" dirty="0">
                 <a:solidFill>
                   <a:srgbClr val="000000"/>
                 </a:solidFill>
@@ -4276,7 +4639,7 @@
               <a:t>四週下來，其實是同一個意思：</a:t>
             </a:r>
             <a:r>
-              <a:rPr sz="1200" b="1" lang="zh-TW" dirty="0">
+              <a:rPr sz="1150" b="1" lang="zh-TW" dirty="0">
                 <a:solidFill>
                   <a:srgbClr val="000000"/>
                 </a:solidFill>
@@ -4287,7 +4650,7 @@
               <a:t>每一種感測器，都有它看不到、量不準的時候。</a:t>
             </a:r>
             <a:r>
-              <a:rPr sz="1200" lang="zh-TW" dirty="0">
+              <a:rPr sz="1150" lang="zh-TW" dirty="0">
                 <a:solidFill>
                   <a:srgbClr val="000000"/>
                 </a:solidFill>
@@ -4408,6 +4771,39 @@
               </a:spcAft>
             </a:pPr>
             <a:r>
+              <a:rPr sz="1200" b="1" lang="zh-TW" dirty="0">
+                <a:solidFill>
+                  <a:srgbClr val="000000"/>
+                </a:solidFill>
+                <a:latin typeface="Arial Unicode MS"/>
+                <a:ea typeface="Arial Unicode MS"/>
+                <a:cs typeface="Arial Unicode MS"/>
+              </a:rPr>
+              <a:t>這一張的目的：</a:t>
+            </a:r>
+            <a:r>
+              <a:rPr sz="1200" lang="zh-TW" dirty="0">
+                <a:solidFill>
+                  <a:srgbClr val="000000"/>
+                </a:solidFill>
+                <a:latin typeface="Arial Unicode MS"/>
+                <a:ea typeface="Arial Unicode MS"/>
+                <a:cs typeface="Arial Unicode MS"/>
+              </a:rPr>
+              <a:t>提出今天要回答的三個問題：在什麼條件下壞、壞成什麼樣子、壞了會不會說。
+</a:t>
+            </a:r>
+          </a:p>
+          <a:p>
+            <a:pPr algn="l">
+              <a:spcBef>
+                <a:spcPts val="0"/>
+              </a:spcBef>
+              <a:spcAft>
+                <a:spcPts val="200"/>
+              </a:spcAft>
+            </a:pPr>
+            <a:r>
               <a:rPr sz="1200" lang="zh-TW" dirty="0">
                 <a:solidFill>
                   <a:srgbClr val="000000"/>
@@ -4705,6 +5101,39 @@
               </a:spcAft>
             </a:pPr>
             <a:r>
+              <a:rPr sz="1200" b="1" lang="zh-TW" dirty="0">
+                <a:solidFill>
+                  <a:srgbClr val="000000"/>
+                </a:solidFill>
+                <a:latin typeface="Arial Unicode MS"/>
+                <a:ea typeface="Arial Unicode MS"/>
+                <a:cs typeface="Arial Unicode MS"/>
+              </a:rPr>
+              <a:t>這一張的目的：</a:t>
+            </a:r>
+            <a:r>
+              <a:rPr sz="1200" lang="zh-TW" dirty="0">
+                <a:solidFill>
+                  <a:srgbClr val="000000"/>
+                </a:solidFill>
+                <a:latin typeface="Arial Unicode MS"/>
+                <a:ea typeface="Arial Unicode MS"/>
+                <a:cs typeface="Arial Unicode MS"/>
+              </a:rPr>
+              <a:t>讓大家分得出三種壞法，並記住第三種「看不到卻說沒事」最危險。
+</a:t>
+            </a:r>
+          </a:p>
+          <a:p>
+            <a:pPr algn="l">
+              <a:spcBef>
+                <a:spcPts val="0"/>
+              </a:spcBef>
+              <a:spcAft>
+                <a:spcPts val="200"/>
+              </a:spcAft>
+            </a:pPr>
+            <a:r>
               <a:rPr sz="1200" lang="zh-TW" dirty="0">
                 <a:solidFill>
                   <a:srgbClr val="000000"/>
@@ -4991,6 +5420,39 @@
               </a:spcAft>
             </a:pPr>
             <a:r>
+              <a:rPr sz="800" b="1" lang="zh-TW" dirty="0">
+                <a:solidFill>
+                  <a:srgbClr val="000000"/>
+                </a:solidFill>
+                <a:latin typeface="Arial Unicode MS"/>
+                <a:ea typeface="Arial Unicode MS"/>
+                <a:cs typeface="Arial Unicode MS"/>
+              </a:rPr>
+              <a:t>這一張的目的：</a:t>
+            </a:r>
+            <a:r>
+              <a:rPr sz="800" lang="zh-TW" dirty="0">
+                <a:solidFill>
+                  <a:srgbClr val="000000"/>
+                </a:solidFill>
+                <a:latin typeface="Arial Unicode MS"/>
+                <a:ea typeface="Arial Unicode MS"/>
+                <a:cs typeface="Arial Unicode MS"/>
+              </a:rPr>
+              <a:t>讓大家會讀失效對照表，每一種感測器怕的條件不一樣，沒有一欄全是打勾。
+</a:t>
+            </a:r>
+          </a:p>
+          <a:p>
+            <a:pPr algn="l">
+              <a:spcBef>
+                <a:spcPts val="0"/>
+              </a:spcBef>
+              <a:spcAft>
+                <a:spcPts val="133"/>
+              </a:spcAft>
+            </a:pPr>
+            <a:r>
               <a:rPr sz="800" lang="zh-TW" dirty="0">
                 <a:solidFill>
                   <a:srgbClr val="000000"/>
@@ -5416,63 +5878,30 @@
                 <a:spcPts val="0"/>
               </a:spcBef>
               <a:spcAft>
-                <a:spcPts val="150"/>
+                <a:spcPts val="142"/>
               </a:spcAft>
             </a:pPr>
             <a:r>
-              <a:rPr sz="900" lang="zh-TW" dirty="0">
-                <a:solidFill>
-                  <a:srgbClr val="000000"/>
-                </a:solidFill>
-                <a:latin typeface="Arial Unicode MS"/>
-                <a:ea typeface="Arial Unicode MS"/>
-                <a:cs typeface="Arial Unicode MS"/>
-              </a:rPr>
-              <a:t>先講天氣。先看左邊兩張照片。</a:t>
-            </a:r>
-            <a:r>
-              <a:rPr sz="900" b="1" lang="zh-TW" dirty="0">
-                <a:solidFill>
-                  <a:srgbClr val="000000"/>
-                </a:solidFill>
-                <a:latin typeface="Arial Unicode MS"/>
-                <a:ea typeface="Arial Unicode MS"/>
-                <a:cs typeface="Arial Unicode MS"/>
-              </a:rPr>
-              <a:t>左邊，雨天從擋風玻璃看出去</a:t>
-            </a:r>
-            <a:r>
-              <a:rPr sz="900" lang="zh-TW" dirty="0">
-                <a:solidFill>
-                  <a:srgbClr val="000000"/>
-                </a:solidFill>
-                <a:latin typeface="Arial Unicode MS"/>
-                <a:ea typeface="Arial Unicode MS"/>
-                <a:cs typeface="Arial Unicode MS"/>
-              </a:rPr>
-              <a:t>，前面那台車只剩一團模糊的影子。車上的相機大多也裝在擋風玻璃後面，下雨的時候，它看到的就是這個樣子，雨刷刷過去的那一下才清楚一點。</a:t>
-            </a:r>
-            <a:r>
-              <a:rPr sz="900" b="1" lang="zh-TW" dirty="0">
-                <a:solidFill>
-                  <a:srgbClr val="000000"/>
-                </a:solidFill>
-                <a:latin typeface="Arial Unicode MS"/>
-                <a:ea typeface="Arial Unicode MS"/>
-                <a:cs typeface="Arial Unicode MS"/>
-              </a:rPr>
-              <a:t>右邊，起霧的彎道</a:t>
-            </a:r>
-            <a:r>
-              <a:rPr sz="900" lang="zh-TW" dirty="0">
-                <a:solidFill>
-                  <a:srgbClr val="000000"/>
-                </a:solidFill>
-                <a:latin typeface="Arial Unicode MS"/>
-                <a:ea typeface="Arial Unicode MS"/>
-                <a:cs typeface="Arial Unicode MS"/>
-              </a:rPr>
-              <a:t>，對面來了一台車，只看得到兩盞車燈，車身幾乎整個不見了。人的眼睛是這樣，相機也是這樣。
+              <a:rPr sz="850" b="1" lang="zh-TW" dirty="0">
+                <a:solidFill>
+                  <a:srgbClr val="000000"/>
+                </a:solidFill>
+                <a:latin typeface="Arial Unicode MS"/>
+                <a:ea typeface="Arial Unicode MS"/>
+                <a:cs typeface="Arial Unicode MS"/>
+              </a:rPr>
+              <a:t>這一張的目的：</a:t>
+            </a:r>
+            <a:r>
+              <a:rPr sz="850" lang="zh-TW" dirty="0">
+                <a:solidFill>
+                  <a:srgbClr val="000000"/>
+                </a:solidFill>
+                <a:latin typeface="Arial Unicode MS"/>
+                <a:ea typeface="Arial Unicode MS"/>
+                <a:cs typeface="Arial Unicode MS"/>
+              </a:rPr>
+              <a:t>讓大家看到，下雨起霧時相機最先吃虧，光達變差但沒有全瞎，雷達幾乎不受影響；原因是波長。
 </a:t>
             </a:r>
           </a:p>
@@ -5482,41 +5911,63 @@
                 <a:spcPts val="0"/>
               </a:spcBef>
               <a:spcAft>
-                <a:spcPts val="150"/>
+                <a:spcPts val="142"/>
               </a:spcAft>
             </a:pPr>
             <a:r>
-              <a:rPr sz="900" lang="zh-TW" dirty="0">
-                <a:solidFill>
-                  <a:srgbClr val="000000"/>
-                </a:solidFill>
-                <a:latin typeface="Arial Unicode MS"/>
-                <a:ea typeface="Arial Unicode MS"/>
-                <a:cs typeface="Arial Unicode MS"/>
-              </a:rPr>
-              <a:t>第六週講過一個規則：</a:t>
-            </a:r>
-            <a:r>
-              <a:rPr sz="900" b="1" lang="zh-TW" dirty="0">
-                <a:solidFill>
-                  <a:srgbClr val="000000"/>
-                </a:solidFill>
-                <a:latin typeface="Arial Unicode MS"/>
-                <a:ea typeface="Arial Unicode MS"/>
-                <a:cs typeface="Arial Unicode MS"/>
-              </a:rPr>
-              <a:t>波長比障礙物大，就繞過去；比障礙物小，就被擋住、被打散。</a:t>
-            </a:r>
-            <a:r>
-              <a:rPr sz="900" lang="zh-TW" dirty="0">
-                <a:solidFill>
-                  <a:srgbClr val="000000"/>
-                </a:solidFill>
-                <a:latin typeface="Arial Unicode MS"/>
-                <a:ea typeface="Arial Unicode MS"/>
-                <a:cs typeface="Arial Unicode MS"/>
-              </a:rPr>
-              <a:t>雷達四公釐，雨滴一公釐，繞過去；光達的雷射不到千分之一公釐，碰到雨滴就被打散。相機更直接：它靠的是光線，雨霧把光線打散了，畫面就糊了。就像霧裡看路燈，只剩一團光暈。
+              <a:rPr sz="850" lang="zh-TW" dirty="0">
+                <a:solidFill>
+                  <a:srgbClr val="000000"/>
+                </a:solidFill>
+                <a:latin typeface="Arial Unicode MS"/>
+                <a:ea typeface="Arial Unicode MS"/>
+                <a:cs typeface="Arial Unicode MS"/>
+              </a:rPr>
+              <a:t>先講天氣。先看左邊兩張照片。</a:t>
+            </a:r>
+            <a:r>
+              <a:rPr sz="850" b="1" lang="zh-TW" dirty="0">
+                <a:solidFill>
+                  <a:srgbClr val="000000"/>
+                </a:solidFill>
+                <a:latin typeface="Arial Unicode MS"/>
+                <a:ea typeface="Arial Unicode MS"/>
+                <a:cs typeface="Arial Unicode MS"/>
+              </a:rPr>
+              <a:t>左邊，雨天從擋風玻璃看出去</a:t>
+            </a:r>
+            <a:r>
+              <a:rPr sz="850" lang="zh-TW" dirty="0">
+                <a:solidFill>
+                  <a:srgbClr val="000000"/>
+                </a:solidFill>
+                <a:latin typeface="Arial Unicode MS"/>
+                <a:ea typeface="Arial Unicode MS"/>
+                <a:cs typeface="Arial Unicode MS"/>
+              </a:rPr>
+              <a:t>，前面那台車只剩一團模糊的影子。車上的相機大多也裝在擋風玻璃後面，下雨的時候，它看到的就是這個樣子，雨刷刷過去的那一下才清楚一點。</a:t>
+            </a:r>
+            <a:r>
+              <a:rPr sz="850" b="1" lang="zh-TW" dirty="0">
+                <a:solidFill>
+                  <a:srgbClr val="000000"/>
+                </a:solidFill>
+                <a:latin typeface="Arial Unicode MS"/>
+                <a:ea typeface="Arial Unicode MS"/>
+                <a:cs typeface="Arial Unicode MS"/>
+              </a:rPr>
+              <a:t>右邊，起霧的彎道</a:t>
+            </a:r>
+            <a:r>
+              <a:rPr sz="850" lang="zh-TW" dirty="0">
+                <a:solidFill>
+                  <a:srgbClr val="000000"/>
+                </a:solidFill>
+                <a:latin typeface="Arial Unicode MS"/>
+                <a:ea typeface="Arial Unicode MS"/>
+                <a:cs typeface="Arial Unicode MS"/>
+              </a:rPr>
+              <a:t>，對面來了一台車，只看得到兩盞車燈，車身幾乎整個不見了。人的眼睛是這樣，相機也是這樣。
 </a:t>
             </a:r>
           </a:p>
@@ -5526,19 +5977,41 @@
                 <a:spcPts val="0"/>
               </a:spcBef>
               <a:spcAft>
-                <a:spcPts val="150"/>
+                <a:spcPts val="142"/>
               </a:spcAft>
             </a:pPr>
             <a:r>
-              <a:rPr sz="900" lang="zh-TW" dirty="0">
-                <a:solidFill>
-                  <a:srgbClr val="000000"/>
-                </a:solidFill>
-                <a:latin typeface="Arial Unicode MS"/>
-                <a:ea typeface="Arial Unicode MS"/>
-                <a:cs typeface="Arial Unicode MS"/>
-              </a:rPr>
-              <a:t>看兩支影片。
+              <a:rPr sz="850" lang="zh-TW" dirty="0">
+                <a:solidFill>
+                  <a:srgbClr val="000000"/>
+                </a:solidFill>
+                <a:latin typeface="Arial Unicode MS"/>
+                <a:ea typeface="Arial Unicode MS"/>
+                <a:cs typeface="Arial Unicode MS"/>
+              </a:rPr>
+              <a:t>第六週講過一個規則：</a:t>
+            </a:r>
+            <a:r>
+              <a:rPr sz="850" b="1" lang="zh-TW" dirty="0">
+                <a:solidFill>
+                  <a:srgbClr val="000000"/>
+                </a:solidFill>
+                <a:latin typeface="Arial Unicode MS"/>
+                <a:ea typeface="Arial Unicode MS"/>
+                <a:cs typeface="Arial Unicode MS"/>
+              </a:rPr>
+              <a:t>波長比障礙物大，就繞過去；比障礙物小，就被擋住、被打散。</a:t>
+            </a:r>
+            <a:r>
+              <a:rPr sz="850" lang="zh-TW" dirty="0">
+                <a:solidFill>
+                  <a:srgbClr val="000000"/>
+                </a:solidFill>
+                <a:latin typeface="Arial Unicode MS"/>
+                <a:ea typeface="Arial Unicode MS"/>
+                <a:cs typeface="Arial Unicode MS"/>
+              </a:rPr>
+              <a:t>雷達四公釐，雨滴一公釐，繞過去；光達的雷射不到千分之一公釐，碰到雨滴就被打散。相機更直接：它靠的是光線，雨霧把光線打散了，畫面就糊了。就像霧裡看路燈，只剩一團光暈。
 </a:t>
             </a:r>
           </a:p>
@@ -5548,30 +6021,19 @@
                 <a:spcPts val="0"/>
               </a:spcBef>
               <a:spcAft>
-                <a:spcPts val="150"/>
+                <a:spcPts val="142"/>
               </a:spcAft>
             </a:pPr>
             <a:r>
-              <a:rPr sz="900" b="1" lang="zh-TW" dirty="0">
-                <a:solidFill>
-                  <a:srgbClr val="000000"/>
-                </a:solidFill>
-                <a:latin typeface="Arial Unicode MS"/>
-                <a:ea typeface="Arial Unicode MS"/>
-                <a:cs typeface="Arial Unicode MS"/>
-              </a:rPr>
-              <a:t>左邊那支，從 11:18 播到 13:20。</a:t>
-            </a:r>
-            <a:r>
-              <a:rPr sz="900" lang="zh-TW" dirty="0">
-                <a:solidFill>
-                  <a:srgbClr val="000000"/>
-                </a:solidFill>
-                <a:latin typeface="Arial Unicode MS"/>
-                <a:ea typeface="Arial Unicode MS"/>
-                <a:cs typeface="Arial Unicode MS"/>
-              </a:rPr>
-              <a:t>美國一位很有名的工程師 YouTuber，Mark Rober，拿兩台車做測試：一台只靠相機（Tesla，開輔助駕駛），一台裝了光達。路中間站一個小孩的假人。
+              <a:rPr sz="850" lang="zh-TW" dirty="0">
+                <a:solidFill>
+                  <a:srgbClr val="000000"/>
+                </a:solidFill>
+                <a:latin typeface="Arial Unicode MS"/>
+                <a:ea typeface="Arial Unicode MS"/>
+                <a:cs typeface="Arial Unicode MS"/>
+              </a:rPr>
+              <a:t>看兩支影片。
 </a:t>
             </a:r>
           </a:p>
@@ -5581,52 +6043,30 @@
                 <a:spcPts val="0"/>
               </a:spcBef>
               <a:spcAft>
-                <a:spcPts val="150"/>
+                <a:spcPts val="142"/>
               </a:spcAft>
             </a:pPr>
             <a:r>
-              <a:rPr sz="900" b="1" lang="zh-TW" dirty="0">
-                <a:solidFill>
-                  <a:srgbClr val="000000"/>
-                </a:solidFill>
-                <a:latin typeface="Arial Unicode MS"/>
-                <a:ea typeface="Arial Unicode MS"/>
-                <a:cs typeface="Arial Unicode MS"/>
-              </a:rPr>
-              <a:t>11:18 霧那一關。</a:t>
-            </a:r>
-            <a:r>
-              <a:rPr sz="900" lang="zh-TW" dirty="0">
-                <a:solidFill>
-                  <a:srgbClr val="000000"/>
-                </a:solidFill>
-                <a:latin typeface="Arial Unicode MS"/>
-                <a:ea typeface="Arial Unicode MS"/>
-                <a:cs typeface="Arial Unicode MS"/>
-              </a:rPr>
-              <a:t>他自己說，用眼睛已經看不到霧後面有小孩，光達那台照樣急煞，假人沒被撞到。換相機那台，</a:t>
-            </a:r>
-            <a:r>
-              <a:rPr sz="900" b="1" lang="zh-TW" dirty="0">
-                <a:solidFill>
-                  <a:srgbClr val="000000"/>
-                </a:solidFill>
-                <a:latin typeface="Arial Unicode MS"/>
-                <a:ea typeface="Arial Unicode MS"/>
-                <a:cs typeface="Arial Unicode MS"/>
-              </a:rPr>
-              <a:t>12:11</a:t>
-            </a:r>
-            <a:r>
-              <a:rPr sz="900" lang="zh-TW" dirty="0">
-                <a:solidFill>
-                  <a:srgbClr val="000000"/>
-                </a:solidFill>
-                <a:latin typeface="Arial Unicode MS"/>
-                <a:ea typeface="Arial Unicode MS"/>
-                <a:cs typeface="Arial Unicode MS"/>
-              </a:rPr>
-              <a:t> 他說相機那台連煞車都沒踩，直接撞上去。
+              <a:rPr sz="850" b="1" lang="zh-TW" dirty="0">
+                <a:solidFill>
+                  <a:srgbClr val="000000"/>
+                </a:solidFill>
+                <a:latin typeface="Arial Unicode MS"/>
+                <a:ea typeface="Arial Unicode MS"/>
+                <a:cs typeface="Arial Unicode MS"/>
+              </a:rPr>
+              <a:t>左邊那支，從 11:18 播到 13:20。</a:t>
+            </a:r>
+            <a:r>
+              <a:rPr sz="850" lang="zh-TW" dirty="0">
+                <a:solidFill>
+                  <a:srgbClr val="000000"/>
+                </a:solidFill>
+                <a:latin typeface="Arial Unicode MS"/>
+                <a:ea typeface="Arial Unicode MS"/>
+                <a:cs typeface="Arial Unicode MS"/>
+              </a:rPr>
+              <a:t>美國一位很有名的工程師 YouTuber，Mark Rober，拿兩台車做測試：一台只靠相機（Tesla，開輔助駕駛），一台裝了光達。路中間站一個小孩的假人。
 </a:t>
             </a:r>
           </a:p>
@@ -5636,52 +6076,52 @@
                 <a:spcPts val="0"/>
               </a:spcBef>
               <a:spcAft>
-                <a:spcPts val="150"/>
+                <a:spcPts val="142"/>
               </a:spcAft>
             </a:pPr>
             <a:r>
-              <a:rPr sz="900" b="1" lang="zh-TW" dirty="0">
-                <a:solidFill>
-                  <a:srgbClr val="000000"/>
-                </a:solidFill>
-                <a:latin typeface="Arial Unicode MS"/>
-                <a:ea typeface="Arial Unicode MS"/>
-                <a:cs typeface="Arial Unicode MS"/>
-              </a:rPr>
-              <a:t>12:21 雨那一關。</a:t>
-            </a:r>
-            <a:r>
-              <a:rPr sz="900" lang="zh-TW" dirty="0">
-                <a:solidFill>
-                  <a:srgbClr val="000000"/>
-                </a:solidFill>
-                <a:latin typeface="Arial Unicode MS"/>
-                <a:ea typeface="Arial Unicode MS"/>
-                <a:cs typeface="Arial Unicode MS"/>
-              </a:rPr>
-              <a:t>用水車灑出一道很大的水牆。他說相機那台，一開始下雨，小孩就從畫面上不見了。光達那台「直到最後一刻才煞住」，也算過關；</a:t>
-            </a:r>
-            <a:r>
-              <a:rPr sz="900" b="1" lang="zh-TW" dirty="0">
-                <a:solidFill>
-                  <a:srgbClr val="000000"/>
-                </a:solidFill>
-                <a:latin typeface="Arial Unicode MS"/>
-                <a:ea typeface="Arial Unicode MS"/>
-                <a:cs typeface="Arial Unicode MS"/>
-              </a:rPr>
-              <a:t>13:15</a:t>
-            </a:r>
-            <a:r>
-              <a:rPr sz="900" lang="zh-TW" dirty="0">
-                <a:solidFill>
-                  <a:srgbClr val="000000"/>
-                </a:solidFill>
-                <a:latin typeface="Arial Unicode MS"/>
-                <a:ea typeface="Arial Unicode MS"/>
-                <a:cs typeface="Arial Unicode MS"/>
-              </a:rPr>
-              <a:t> 相機那台沒有停。
+              <a:rPr sz="850" b="1" lang="zh-TW" dirty="0">
+                <a:solidFill>
+                  <a:srgbClr val="000000"/>
+                </a:solidFill>
+                <a:latin typeface="Arial Unicode MS"/>
+                <a:ea typeface="Arial Unicode MS"/>
+                <a:cs typeface="Arial Unicode MS"/>
+              </a:rPr>
+              <a:t>11:18 霧那一關。</a:t>
+            </a:r>
+            <a:r>
+              <a:rPr sz="850" lang="zh-TW" dirty="0">
+                <a:solidFill>
+                  <a:srgbClr val="000000"/>
+                </a:solidFill>
+                <a:latin typeface="Arial Unicode MS"/>
+                <a:ea typeface="Arial Unicode MS"/>
+                <a:cs typeface="Arial Unicode MS"/>
+              </a:rPr>
+              <a:t>他自己說，用眼睛已經看不到霧後面有小孩，光達那台照樣急煞，假人沒被撞到。換相機那台，</a:t>
+            </a:r>
+            <a:r>
+              <a:rPr sz="850" b="1" lang="zh-TW" dirty="0">
+                <a:solidFill>
+                  <a:srgbClr val="000000"/>
+                </a:solidFill>
+                <a:latin typeface="Arial Unicode MS"/>
+                <a:ea typeface="Arial Unicode MS"/>
+                <a:cs typeface="Arial Unicode MS"/>
+              </a:rPr>
+              <a:t>12:11</a:t>
+            </a:r>
+            <a:r>
+              <a:rPr sz="850" lang="zh-TW" dirty="0">
+                <a:solidFill>
+                  <a:srgbClr val="000000"/>
+                </a:solidFill>
+                <a:latin typeface="Arial Unicode MS"/>
+                <a:ea typeface="Arial Unicode MS"/>
+                <a:cs typeface="Arial Unicode MS"/>
+              </a:rPr>
+              <a:t> 他說相機那台連煞車都沒踩，直接撞上去。
 </a:t>
             </a:r>
           </a:p>
@@ -5691,63 +6131,52 @@
                 <a:spcPts val="0"/>
               </a:spcBef>
               <a:spcAft>
-                <a:spcPts val="150"/>
+                <a:spcPts val="142"/>
               </a:spcAft>
             </a:pPr>
             <a:r>
-              <a:rPr sz="900" lang="zh-TW" dirty="0">
-                <a:solidFill>
-                  <a:srgbClr val="000000"/>
-                </a:solidFill>
-                <a:latin typeface="Arial Unicode MS"/>
-                <a:ea typeface="Arial Unicode MS"/>
-                <a:cs typeface="Arial Unicode MS"/>
-              </a:rPr>
-              <a:t>這支影片要提醒各位兩件事。第一，它是</a:t>
-            </a:r>
-            <a:r>
-              <a:rPr sz="900" b="1" lang="zh-TW" dirty="0">
-                <a:solidFill>
-                  <a:srgbClr val="000000"/>
-                </a:solidFill>
-                <a:latin typeface="Arial Unicode MS"/>
-                <a:ea typeface="Arial Unicode MS"/>
-                <a:cs typeface="Arial Unicode MS"/>
-              </a:rPr>
-              <a:t>公開示範，不是正式的科學實驗</a:t>
-            </a:r>
-            <a:r>
-              <a:rPr sz="900" lang="zh-TW" dirty="0">
-                <a:solidFill>
-                  <a:srgbClr val="000000"/>
-                </a:solidFill>
-                <a:latin typeface="Arial Unicode MS"/>
-                <a:ea typeface="Arial Unicode MS"/>
-                <a:cs typeface="Arial Unicode MS"/>
-              </a:rPr>
-              <a:t>：光達那台車上有人穿著光達廠商 Luminar 的衣服，網路上對測試方法也有很多討論。第二，它</a:t>
-            </a:r>
-            <a:r>
-              <a:rPr sz="900" b="1" lang="zh-TW" dirty="0">
-                <a:solidFill>
-                  <a:srgbClr val="000000"/>
-                </a:solidFill>
-                <a:latin typeface="Arial Unicode MS"/>
-                <a:ea typeface="Arial Unicode MS"/>
-                <a:cs typeface="Arial Unicode MS"/>
-              </a:rPr>
-              <a:t>只比相機和光達，沒有測雷達</a:t>
-            </a:r>
-            <a:r>
-              <a:rPr sz="900" lang="zh-TW" dirty="0">
-                <a:solidFill>
-                  <a:srgbClr val="000000"/>
-                </a:solidFill>
-                <a:latin typeface="Arial Unicode MS"/>
-                <a:ea typeface="Arial Unicode MS"/>
-                <a:cs typeface="Arial Unicode MS"/>
-              </a:rPr>
-              <a:t>。所以各位記住的是「霧和雨裡，相機最先吃虧」，不是「光達永遠贏」。
+              <a:rPr sz="850" b="1" lang="zh-TW" dirty="0">
+                <a:solidFill>
+                  <a:srgbClr val="000000"/>
+                </a:solidFill>
+                <a:latin typeface="Arial Unicode MS"/>
+                <a:ea typeface="Arial Unicode MS"/>
+                <a:cs typeface="Arial Unicode MS"/>
+              </a:rPr>
+              <a:t>12:21 雨那一關。</a:t>
+            </a:r>
+            <a:r>
+              <a:rPr sz="850" lang="zh-TW" dirty="0">
+                <a:solidFill>
+                  <a:srgbClr val="000000"/>
+                </a:solidFill>
+                <a:latin typeface="Arial Unicode MS"/>
+                <a:ea typeface="Arial Unicode MS"/>
+                <a:cs typeface="Arial Unicode MS"/>
+              </a:rPr>
+              <a:t>用水車灑出一道很大的水牆。他說相機那台，一開始下雨，小孩就從畫面上不見了。光達那台「直到最後一刻才煞住」，也算過關；</a:t>
+            </a:r>
+            <a:r>
+              <a:rPr sz="850" b="1" lang="zh-TW" dirty="0">
+                <a:solidFill>
+                  <a:srgbClr val="000000"/>
+                </a:solidFill>
+                <a:latin typeface="Arial Unicode MS"/>
+                <a:ea typeface="Arial Unicode MS"/>
+                <a:cs typeface="Arial Unicode MS"/>
+              </a:rPr>
+              <a:t>13:15</a:t>
+            </a:r>
+            <a:r>
+              <a:rPr sz="850" lang="zh-TW" dirty="0">
+                <a:solidFill>
+                  <a:srgbClr val="000000"/>
+                </a:solidFill>
+                <a:latin typeface="Arial Unicode MS"/>
+                <a:ea typeface="Arial Unicode MS"/>
+                <a:cs typeface="Arial Unicode MS"/>
+              </a:rPr>
+              <a:t> 相機那台沒有停。
 </a:t>
             </a:r>
           </a:p>
@@ -5757,30 +6186,63 @@
                 <a:spcPts val="0"/>
               </a:spcBef>
               <a:spcAft>
-                <a:spcPts val="150"/>
+                <a:spcPts val="142"/>
               </a:spcAft>
             </a:pPr>
             <a:r>
-              <a:rPr sz="900" b="1" lang="zh-TW" dirty="0">
-                <a:solidFill>
-                  <a:srgbClr val="000000"/>
-                </a:solidFill>
-                <a:latin typeface="Arial Unicode MS"/>
-                <a:ea typeface="Arial Unicode MS"/>
-                <a:cs typeface="Arial Unicode MS"/>
-              </a:rPr>
-              <a:t>右邊那支，從 0:00 播到 1:00。</a:t>
-            </a:r>
-            <a:r>
-              <a:rPr sz="900" lang="zh-TW" dirty="0">
-                <a:solidFill>
-                  <a:srgbClr val="000000"/>
-                </a:solidFill>
-                <a:latin typeface="Arial Unicode MS"/>
-                <a:ea typeface="Arial Unicode MS"/>
-                <a:cs typeface="Arial Unicode MS"/>
-              </a:rPr>
-              <a:t>這是台灣的路：工研院（ITRI）2021 年 8 月 4 日在新竹台 68 線快速道路上，暴雨中錄下的光達和相機資料。沒有聲音，我邊播邊講。
+              <a:rPr sz="850" lang="zh-TW" dirty="0">
+                <a:solidFill>
+                  <a:srgbClr val="000000"/>
+                </a:solidFill>
+                <a:latin typeface="Arial Unicode MS"/>
+                <a:ea typeface="Arial Unicode MS"/>
+                <a:cs typeface="Arial Unicode MS"/>
+              </a:rPr>
+              <a:t>這支影片要提醒各位兩件事。第一，它是</a:t>
+            </a:r>
+            <a:r>
+              <a:rPr sz="850" b="1" lang="zh-TW" dirty="0">
+                <a:solidFill>
+                  <a:srgbClr val="000000"/>
+                </a:solidFill>
+                <a:latin typeface="Arial Unicode MS"/>
+                <a:ea typeface="Arial Unicode MS"/>
+                <a:cs typeface="Arial Unicode MS"/>
+              </a:rPr>
+              <a:t>公開示範，不是正式的科學實驗</a:t>
+            </a:r>
+            <a:r>
+              <a:rPr sz="850" lang="zh-TW" dirty="0">
+                <a:solidFill>
+                  <a:srgbClr val="000000"/>
+                </a:solidFill>
+                <a:latin typeface="Arial Unicode MS"/>
+                <a:ea typeface="Arial Unicode MS"/>
+                <a:cs typeface="Arial Unicode MS"/>
+              </a:rPr>
+              <a:t>：光達那台車上有人穿著光達廠商 Luminar 的衣服，網路上對測試方法也有很多討論。第二，它</a:t>
+            </a:r>
+            <a:r>
+              <a:rPr sz="850" b="1" lang="zh-TW" dirty="0">
+                <a:solidFill>
+                  <a:srgbClr val="000000"/>
+                </a:solidFill>
+                <a:latin typeface="Arial Unicode MS"/>
+                <a:ea typeface="Arial Unicode MS"/>
+                <a:cs typeface="Arial Unicode MS"/>
+              </a:rPr>
+              <a:t>只比相機和光達，沒有測雷達</a:t>
+            </a:r>
+            <a:r>
+              <a:rPr sz="850" lang="zh-TW" dirty="0">
+                <a:solidFill>
+                  <a:srgbClr val="000000"/>
+                </a:solidFill>
+                <a:latin typeface="Arial Unicode MS"/>
+                <a:ea typeface="Arial Unicode MS"/>
+                <a:cs typeface="Arial Unicode MS"/>
+              </a:rPr>
+              <a:t>。所以各位記住的是「霧和雨裡，相機最先吃虧」，不是「光達永遠贏」。
 </a:t>
             </a:r>
           </a:p>
@@ -5790,41 +6252,30 @@
                 <a:spcPts val="0"/>
               </a:spcBef>
               <a:spcAft>
-                <a:spcPts val="150"/>
+                <a:spcPts val="142"/>
               </a:spcAft>
             </a:pPr>
             <a:r>
-              <a:rPr sz="900" lang="zh-TW" dirty="0">
-                <a:solidFill>
-                  <a:srgbClr val="000000"/>
-                </a:solidFill>
-                <a:latin typeface="Arial Unicode MS"/>
-                <a:ea typeface="Arial Unicode MS"/>
-                <a:cs typeface="Arial Unicode MS"/>
-              </a:rPr>
-              <a:t>畫面大的那一塊是光達點雲，從上往下看；右上角的小格是相機。請各位比兩邊：相機那一格，雨刷一直在刷，畫面一片灰綠，前面的車只剩模糊的影子；光達那一塊，</a:t>
-            </a:r>
-            <a:r>
-              <a:rPr sz="900" b="1" lang="zh-TW" dirty="0">
-                <a:solidFill>
-                  <a:srgbClr val="000000"/>
-                </a:solidFill>
-                <a:latin typeface="Arial Unicode MS"/>
-                <a:ea typeface="Arial Unicode MS"/>
-                <a:cs typeface="Arial Unicode MS"/>
-              </a:rPr>
-              <a:t>護欄和車道線還是一條一條畫得出來</a:t>
-            </a:r>
-            <a:r>
-              <a:rPr sz="900" lang="zh-TW" dirty="0">
-                <a:solidFill>
-                  <a:srgbClr val="000000"/>
-                </a:solidFill>
-                <a:latin typeface="Arial Unicode MS"/>
-                <a:ea typeface="Arial Unicode MS"/>
-                <a:cs typeface="Arial Unicode MS"/>
-              </a:rPr>
-              <a:t>，只是車子周圍多了一些零散的點，遠處的點也變少了。
+              <a:rPr sz="850" b="1" lang="zh-TW" dirty="0">
+                <a:solidFill>
+                  <a:srgbClr val="000000"/>
+                </a:solidFill>
+                <a:latin typeface="Arial Unicode MS"/>
+                <a:ea typeface="Arial Unicode MS"/>
+                <a:cs typeface="Arial Unicode MS"/>
+              </a:rPr>
+              <a:t>右邊那支，從 0:00 播到 1:00。</a:t>
+            </a:r>
+            <a:r>
+              <a:rPr sz="850" lang="zh-TW" dirty="0">
+                <a:solidFill>
+                  <a:srgbClr val="000000"/>
+                </a:solidFill>
+                <a:latin typeface="Arial Unicode MS"/>
+                <a:ea typeface="Arial Unicode MS"/>
+                <a:cs typeface="Arial Unicode MS"/>
+              </a:rPr>
+              <a:t>這是台灣的路：工研院（ITRI）2021 年 8 月 4 日在新竹台 68 線快速道路上，暴雨中錄下的光達和相機資料。沒有聲音，我邊播邊講。
 </a:t>
             </a:r>
           </a:p>
@@ -5834,11 +6285,55 @@
                 <a:spcPts val="0"/>
               </a:spcBef>
               <a:spcAft>
-                <a:spcPts val="150"/>
+                <a:spcPts val="142"/>
               </a:spcAft>
             </a:pPr>
             <a:r>
-              <a:rPr sz="900" lang="zh-TW" dirty="0">
+              <a:rPr sz="850" lang="zh-TW" dirty="0">
+                <a:solidFill>
+                  <a:srgbClr val="000000"/>
+                </a:solidFill>
+                <a:latin typeface="Arial Unicode MS"/>
+                <a:ea typeface="Arial Unicode MS"/>
+                <a:cs typeface="Arial Unicode MS"/>
+              </a:rPr>
+              <a:t>畫面大的那一塊是光達點雲，從上往下看；右上角的小格是相機。請各位比兩邊：相機那一格，雨刷一直在刷，畫面一片灰綠，前面的車只剩模糊的影子；光達那一塊，</a:t>
+            </a:r>
+            <a:r>
+              <a:rPr sz="850" b="1" lang="zh-TW" dirty="0">
+                <a:solidFill>
+                  <a:srgbClr val="000000"/>
+                </a:solidFill>
+                <a:latin typeface="Arial Unicode MS"/>
+                <a:ea typeface="Arial Unicode MS"/>
+                <a:cs typeface="Arial Unicode MS"/>
+              </a:rPr>
+              <a:t>護欄和車道線還是一條一條畫得出來</a:t>
+            </a:r>
+            <a:r>
+              <a:rPr sz="850" lang="zh-TW" dirty="0">
+                <a:solidFill>
+                  <a:srgbClr val="000000"/>
+                </a:solidFill>
+                <a:latin typeface="Arial Unicode MS"/>
+                <a:ea typeface="Arial Unicode MS"/>
+                <a:cs typeface="Arial Unicode MS"/>
+              </a:rPr>
+              <a:t>，只是車子周圍多了一些零散的點，遠處的點也變少了。
+</a:t>
+            </a:r>
+          </a:p>
+          <a:p>
+            <a:pPr algn="l">
+              <a:spcBef>
+                <a:spcPts val="0"/>
+              </a:spcBef>
+              <a:spcAft>
+                <a:spcPts val="142"/>
+              </a:spcAft>
+            </a:pPr>
+            <a:r>
+              <a:rPr sz="850" lang="zh-TW" dirty="0">
                 <a:solidFill>
                   <a:srgbClr val="000000"/>
                 </a:solidFill>
@@ -5849,7 +6344,7 @@
               <a:t>所以這一列的結論是：</a:t>
             </a:r>
             <a:r>
-              <a:rPr sz="900" b="1" lang="zh-TW" dirty="0">
+              <a:rPr sz="850" b="1" lang="zh-TW" dirty="0">
                 <a:solidFill>
                   <a:srgbClr val="000000"/>
                 </a:solidFill>
@@ -5860,7 +6355,7 @@
               <a:t>光達會變差，但不是全瞎</a:t>
             </a:r>
             <a:r>
-              <a:rPr sz="900" lang="zh-TW" dirty="0">
+              <a:rPr sz="850" lang="zh-TW" dirty="0">
                 <a:solidFill>
                   <a:srgbClr val="000000"/>
                 </a:solidFill>
@@ -5981,6 +6476,39 @@
               </a:spcAft>
             </a:pPr>
             <a:r>
+              <a:rPr sz="1200" b="1" lang="zh-TW" dirty="0">
+                <a:solidFill>
+                  <a:srgbClr val="000000"/>
+                </a:solidFill>
+                <a:latin typeface="Arial Unicode MS"/>
+                <a:ea typeface="Arial Unicode MS"/>
+                <a:cs typeface="Arial Unicode MS"/>
+              </a:rPr>
+              <a:t>這一張的目的：</a:t>
+            </a:r>
+            <a:r>
+              <a:rPr sz="1200" lang="zh-TW" dirty="0">
+                <a:solidFill>
+                  <a:srgbClr val="000000"/>
+                </a:solidFill>
+                <a:latin typeface="Arial Unicode MS"/>
+                <a:ea typeface="Arial Unicode MS"/>
+                <a:cs typeface="Arial Unicode MS"/>
+              </a:rPr>
+              <a:t>讓大家看到，天黑對相機有影響，對光達沒有，因為光達自己發光。
+</a:t>
+            </a:r>
+          </a:p>
+          <a:p>
+            <a:pPr algn="l">
+              <a:spcBef>
+                <a:spcPts val="0"/>
+              </a:spcBef>
+              <a:spcAft>
+                <a:spcPts val="200"/>
+              </a:spcAft>
+            </a:pPr>
+            <a:r>
               <a:rPr sz="1200" lang="zh-TW" dirty="0">
                 <a:solidFill>
                   <a:srgbClr val="000000"/>
@@ -6252,19 +6780,30 @@
                 <a:spcPts val="0"/>
               </a:spcBef>
               <a:spcAft>
-                <a:spcPts val="142"/>
+                <a:spcPts val="200"/>
               </a:spcAft>
             </a:pPr>
             <a:r>
-              <a:rPr sz="850" lang="zh-TW" dirty="0">
-                <a:solidFill>
-                  <a:srgbClr val="000000"/>
-                </a:solidFill>
-                <a:latin typeface="Arial Unicode MS"/>
-                <a:ea typeface="Arial Unicode MS"/>
-                <a:cs typeface="Arial Unicode MS"/>
-              </a:rPr>
-              <a:t>這是新加坡白天的一條路，同一個瞬間。左邊疊光達，右邊疊雷達。
+              <a:rPr sz="1200" b="1" lang="zh-TW" dirty="0">
+                <a:solidFill>
+                  <a:srgbClr val="000000"/>
+                </a:solidFill>
+                <a:latin typeface="Arial Unicode MS"/>
+                <a:ea typeface="Arial Unicode MS"/>
+                <a:cs typeface="Arial Unicode MS"/>
+              </a:rPr>
+              <a:t>這一張的目的：</a:t>
+            </a:r>
+            <a:r>
+              <a:rPr sz="1200" lang="zh-TW" dirty="0">
+                <a:solidFill>
+                  <a:srgbClr val="000000"/>
+                </a:solidFill>
+                <a:latin typeface="Arial Unicode MS"/>
+                <a:ea typeface="Arial Unicode MS"/>
+                <a:cs typeface="Arial Unicode MS"/>
+              </a:rPr>
+              <a:t>讓大家用真的資料看到雷達的兩個先天限制：點很少，而且量不出高度。
 </a:t>
             </a:r>
           </a:p>
@@ -6274,30 +6813,19 @@
                 <a:spcPts val="0"/>
               </a:spcBef>
               <a:spcAft>
-                <a:spcPts val="142"/>
+                <a:spcPts val="200"/>
               </a:spcAft>
             </a:pPr>
             <a:r>
-              <a:rPr sz="850" b="1" lang="zh-TW" dirty="0">
-                <a:solidFill>
-                  <a:srgbClr val="000000"/>
-                </a:solidFill>
-                <a:latin typeface="Arial Unicode MS"/>
-                <a:ea typeface="Arial Unicode MS"/>
-                <a:cs typeface="Arial Unicode MS"/>
-              </a:rPr>
-              <a:t>左邊，光達。</a:t>
-            </a:r>
-            <a:r>
-              <a:rPr sz="850" lang="zh-TW" dirty="0">
-                <a:solidFill>
-                  <a:srgbClr val="000000"/>
-                </a:solidFill>
-                <a:latin typeface="Arial Unicode MS"/>
-                <a:ea typeface="Arial Unicode MS"/>
-                <a:cs typeface="Arial Unicode MS"/>
-              </a:rPr>
-              <a:t>一條一條的橫線，就是第五週講的線束：這顆光達有三十二條。前方相機的畫面裡，大約有三千一百個點。
+              <a:rPr sz="1200" lang="zh-TW" dirty="0">
+                <a:solidFill>
+                  <a:srgbClr val="000000"/>
+                </a:solidFill>
+                <a:latin typeface="Arial Unicode MS"/>
+                <a:ea typeface="Arial Unicode MS"/>
+                <a:cs typeface="Arial Unicode MS"/>
+              </a:rPr>
+              <a:t>這是新加坡白天的一條路，同一個瞬間。左邊疊光達，右邊疊雷達。
 </a:t>
             </a:r>
           </a:p>
@@ -6307,30 +6835,30 @@
                 <a:spcPts val="0"/>
               </a:spcBef>
               <a:spcAft>
-                <a:spcPts val="142"/>
+                <a:spcPts val="200"/>
               </a:spcAft>
             </a:pPr>
             <a:r>
-              <a:rPr sz="850" b="1" lang="zh-TW" dirty="0">
-                <a:solidFill>
-                  <a:srgbClr val="000000"/>
-                </a:solidFill>
-                <a:latin typeface="Arial Unicode MS"/>
-                <a:ea typeface="Arial Unicode MS"/>
-                <a:cs typeface="Arial Unicode MS"/>
-              </a:rPr>
-              <a:t>右邊，雷達。</a:t>
-            </a:r>
-            <a:r>
-              <a:rPr sz="850" lang="zh-TW" dirty="0">
-                <a:solidFill>
-                  <a:srgbClr val="000000"/>
-                </a:solidFill>
-                <a:latin typeface="Arial Unicode MS"/>
-                <a:ea typeface="Arial Unicode MS"/>
-                <a:cs typeface="Arial Unicode MS"/>
-              </a:rPr>
-              <a:t>紅圈是雷達點，車頭三顆雷達加起來，大約六十個，比光達少了五十倍。
+              <a:rPr sz="1200" b="1" lang="zh-TW" dirty="0">
+                <a:solidFill>
+                  <a:srgbClr val="000000"/>
+                </a:solidFill>
+                <a:latin typeface="Arial Unicode MS"/>
+                <a:ea typeface="Arial Unicode MS"/>
+                <a:cs typeface="Arial Unicode MS"/>
+              </a:rPr>
+              <a:t>左邊，光達。</a:t>
+            </a:r>
+            <a:r>
+              <a:rPr sz="1200" lang="zh-TW" dirty="0">
+                <a:solidFill>
+                  <a:srgbClr val="000000"/>
+                </a:solidFill>
+                <a:latin typeface="Arial Unicode MS"/>
+                <a:ea typeface="Arial Unicode MS"/>
+                <a:cs typeface="Arial Unicode MS"/>
+              </a:rPr>
+              <a:t>一條一條的橫線，就是第五週講的線束：這顆光達有三十二條。前方相機的畫面裡，大約有三千一百個點。
 </a:t>
             </a:r>
           </a:p>
@@ -6340,41 +6868,30 @@
                 <a:spcPts val="0"/>
               </a:spcBef>
               <a:spcAft>
-                <a:spcPts val="142"/>
+                <a:spcPts val="200"/>
               </a:spcAft>
             </a:pPr>
             <a:r>
-              <a:rPr sz="850" lang="zh-TW" dirty="0">
-                <a:solidFill>
-                  <a:srgbClr val="000000"/>
-                </a:solidFill>
-                <a:latin typeface="Arial Unicode MS"/>
-                <a:ea typeface="Arial Unicode MS"/>
-                <a:cs typeface="Arial Unicode MS"/>
-              </a:rPr>
-              <a:t>請各位看紅圈的位置：</a:t>
-            </a:r>
-            <a:r>
-              <a:rPr sz="850" b="1" lang="zh-TW" dirty="0">
-                <a:solidFill>
-                  <a:srgbClr val="000000"/>
-                </a:solidFill>
-                <a:latin typeface="Arial Unicode MS"/>
-                <a:ea typeface="Arial Unicode MS"/>
-                <a:cs typeface="Arial Unicode MS"/>
-              </a:rPr>
-              <a:t>全部都在很低的地方。</a:t>
-            </a:r>
-            <a:r>
-              <a:rPr sz="850" lang="zh-TW" dirty="0">
-                <a:solidFill>
-                  <a:srgbClr val="000000"/>
-                </a:solidFill>
-                <a:latin typeface="Arial Unicode MS"/>
-                <a:ea typeface="Arial Unicode MS"/>
-                <a:cs typeface="Arial Unicode MS"/>
-              </a:rPr>
-              <a:t>遠處的紅圈貼著地平線，左邊草地上比較近的紅圈低一點；樹幹底下有紅圈，可是樹冠上、牌子上，一個都沒有。為什麼？我打開資料看，每一個雷達點的「高度」那一欄，數字全部是零：所有的點都被放在雷達自己的高度，離地大約半公尺。路邊的樹、遠處的牌子打回來的點，也都被畫在這個高度。
+              <a:rPr sz="1200" b="1" lang="zh-TW" dirty="0">
+                <a:solidFill>
+                  <a:srgbClr val="000000"/>
+                </a:solidFill>
+                <a:latin typeface="Arial Unicode MS"/>
+                <a:ea typeface="Arial Unicode MS"/>
+                <a:cs typeface="Arial Unicode MS"/>
+              </a:rPr>
+              <a:t>右邊，雷達。</a:t>
+            </a:r>
+            <a:r>
+              <a:rPr sz="1200" lang="zh-TW" dirty="0">
+                <a:solidFill>
+                  <a:srgbClr val="000000"/>
+                </a:solidFill>
+                <a:latin typeface="Arial Unicode MS"/>
+                <a:ea typeface="Arial Unicode MS"/>
+                <a:cs typeface="Arial Unicode MS"/>
+              </a:rPr>
+              <a:t>紅圈是雷達點，車頭三顆雷達加起來，大約六十個，比光達少了五十倍。
 </a:t>
             </a:r>
           </a:p>
@@ -6384,19 +6901,41 @@
                 <a:spcPts val="0"/>
               </a:spcBef>
               <a:spcAft>
-                <a:spcPts val="142"/>
+                <a:spcPts val="200"/>
               </a:spcAft>
             </a:pPr>
             <a:r>
-              <a:rPr sz="850" lang="zh-TW" dirty="0">
-                <a:solidFill>
-                  <a:srgbClr val="000000"/>
-                </a:solidFill>
-                <a:latin typeface="Arial Unicode MS"/>
-                <a:ea typeface="Arial Unicode MS"/>
-                <a:cs typeface="Arial Unicode MS"/>
-              </a:rPr>
-              <a:t>同一個高度，為什麼在照片上有高有低？跟站在路上看地上的斑馬線一樣：近的在腳下，畫面下方；遠的擠到地平線附近。這是透視，不是雷達量到的高度。
+              <a:rPr sz="1200" lang="zh-TW" dirty="0">
+                <a:solidFill>
+                  <a:srgbClr val="000000"/>
+                </a:solidFill>
+                <a:latin typeface="Arial Unicode MS"/>
+                <a:ea typeface="Arial Unicode MS"/>
+                <a:cs typeface="Arial Unicode MS"/>
+              </a:rPr>
+              <a:t>請各位看紅圈的位置：</a:t>
+            </a:r>
+            <a:r>
+              <a:rPr sz="1200" b="1" lang="zh-TW" dirty="0">
+                <a:solidFill>
+                  <a:srgbClr val="000000"/>
+                </a:solidFill>
+                <a:latin typeface="Arial Unicode MS"/>
+                <a:ea typeface="Arial Unicode MS"/>
+                <a:cs typeface="Arial Unicode MS"/>
+              </a:rPr>
+              <a:t>全部都在很低的地方。</a:t>
+            </a:r>
+            <a:r>
+              <a:rPr sz="1200" lang="zh-TW" dirty="0">
+                <a:solidFill>
+                  <a:srgbClr val="000000"/>
+                </a:solidFill>
+                <a:latin typeface="Arial Unicode MS"/>
+                <a:ea typeface="Arial Unicode MS"/>
+                <a:cs typeface="Arial Unicode MS"/>
+              </a:rPr>
+              <a:t>遠處的紅圈貼著地平線，左邊草地上比較近的紅圈低一點；樹幹底下有紅圈，可是樹冠上、牌子上，一個都沒有。為什麼？我打開資料看，每一個雷達點的「高度」那一欄，數字全部是零：所有的點都被放在雷達自己的高度，離地大約半公尺。路邊的樹、遠處的牌子打回來的點，也都被畫在這個高度。
 </a:t>
             </a:r>
           </a:p>
@@ -6406,19 +6945,19 @@
                 <a:spcPts val="0"/>
               </a:spcBef>
               <a:spcAft>
-                <a:spcPts val="142"/>
+                <a:spcPts val="200"/>
               </a:spcAft>
             </a:pPr>
             <a:r>
-              <a:rPr sz="850" lang="zh-TW" dirty="0">
-                <a:solidFill>
-                  <a:srgbClr val="000000"/>
-                </a:solidFill>
-                <a:latin typeface="Arial Unicode MS"/>
-                <a:ea typeface="Arial Unicode MS"/>
-                <a:cs typeface="Arial Unicode MS"/>
-              </a:rPr>
-              <a:t>這就是上週講雷達弱點那一張說的「ARS 408 沒有高度」。上週是在規格表上讀到，今天是在真的資料裡看到。它分不出前面那個東西是在路上，還是在頭頂上。所以天橋、高架的路牌，對它來說都跟路上的車在同一個平面。
+              <a:rPr sz="1200" lang="zh-TW" dirty="0">
+                <a:solidFill>
+                  <a:srgbClr val="000000"/>
+                </a:solidFill>
+                <a:latin typeface="Arial Unicode MS"/>
+                <a:ea typeface="Arial Unicode MS"/>
+                <a:cs typeface="Arial Unicode MS"/>
+              </a:rPr>
+              <a:t>同一個高度，為什麼在照片上有高有低？跟站在路上看地上的斑馬線一樣：近的在腳下，畫面下方；遠的擠到地平線附近。這是透視，不是雷達量到的高度。
 </a:t>
             </a:r>
           </a:p>
@@ -6428,63 +6967,19 @@
                 <a:spcPts val="0"/>
               </a:spcBef>
               <a:spcAft>
-                <a:spcPts val="142"/>
+                <a:spcPts val="200"/>
               </a:spcAft>
             </a:pPr>
             <a:r>
-              <a:rPr sz="850" lang="zh-TW" dirty="0">
-                <a:solidFill>
-                  <a:srgbClr val="000000"/>
-                </a:solidFill>
-                <a:latin typeface="Arial Unicode MS"/>
-                <a:ea typeface="Arial Unicode MS"/>
-                <a:cs typeface="Arial Unicode MS"/>
-              </a:rPr>
-              <a:t>另一件事：</a:t>
-            </a:r>
-            <a:r>
-              <a:rPr sz="850" b="1" lang="zh-TW" dirty="0">
-                <a:solidFill>
-                  <a:srgbClr val="000000"/>
-                </a:solidFill>
-                <a:latin typeface="Arial Unicode MS"/>
-                <a:ea typeface="Arial Unicode MS"/>
-                <a:cs typeface="Arial Unicode MS"/>
-              </a:rPr>
-              <a:t>雷達怎麼知道一個東西是靜止的？</a:t>
-            </a:r>
-            <a:r>
-              <a:rPr sz="850" lang="zh-TW" dirty="0">
-                <a:solidFill>
-                  <a:srgbClr val="000000"/>
-                </a:solidFill>
-                <a:latin typeface="Arial Unicode MS"/>
-                <a:ea typeface="Arial Unicode MS"/>
-                <a:cs typeface="Arial Unicode MS"/>
-              </a:rPr>
-              <a:t>它不是看那個東西本身，是拿量到的速度，</a:t>
-            </a:r>
-            <a:r>
-              <a:rPr sz="850" b="1" lang="zh-TW" dirty="0">
-                <a:solidFill>
-                  <a:srgbClr val="000000"/>
-                </a:solidFill>
-                <a:latin typeface="Arial Unicode MS"/>
-                <a:ea typeface="Arial Unicode MS"/>
-                <a:cs typeface="Arial Unicode MS"/>
-              </a:rPr>
-              <a:t>扣掉自己的車速</a:t>
-            </a:r>
-            <a:r>
-              <a:rPr sz="850" lang="zh-TW" dirty="0">
-                <a:solidFill>
-                  <a:srgbClr val="000000"/>
-                </a:solidFill>
-                <a:latin typeface="Arial Unicode MS"/>
-                <a:ea typeface="Arial Unicode MS"/>
-                <a:cs typeface="Arial Unicode MS"/>
-              </a:rPr>
-              <a:t>。
+              <a:rPr sz="1200" lang="zh-TW" dirty="0">
+                <a:solidFill>
+                  <a:srgbClr val="000000"/>
+                </a:solidFill>
+                <a:latin typeface="Arial Unicode MS"/>
+                <a:ea typeface="Arial Unicode MS"/>
+                <a:cs typeface="Arial Unicode MS"/>
+              </a:rPr>
+              <a:t>這就是上週講雷達弱點那一張說的「ARS 408 沒有高度」。上週是在規格表上讀到，今天是在真的資料裡看到。它分不出前面那個東西是在路上，還是在頭頂上。所以天橋、高架的路牌，對它來說都跟路上的車在同一個平面。
 </a:t>
             </a:r>
           </a:p>
@@ -6494,107 +6989,30 @@
                 <a:spcPts val="0"/>
               </a:spcBef>
               <a:spcAft>
-                <a:spcPts val="142"/>
+                <a:spcPts val="200"/>
               </a:spcAft>
             </a:pPr>
             <a:r>
-              <a:rPr sz="850" lang="zh-TW" dirty="0">
-                <a:solidFill>
-                  <a:srgbClr val="000000"/>
-                </a:solidFill>
-                <a:latin typeface="Arial Unicode MS"/>
-                <a:ea typeface="Arial Unicode MS"/>
-                <a:cs typeface="Arial Unicode MS"/>
-              </a:rPr>
-              <a:t>想像坐在火車上看窗外，路邊的電線桿一根一根往後退。電線桿沒動，是你在動。雷達也一樣：這台車時速大約四十三公里，路邊每一棵樹、每一根桿子，在雷達看來都在朝它靠近。車子會把自己的車速和轉彎的快慢送給雷達，雷達算出「如果那個東西不動，我應該量到多少」，量到的跟它一樣，就判定是靜止的。
-</a:t>
-            </a:r>
-          </a:p>
-          <a:p>
-            <a:pPr algn="l">
-              <a:spcBef>
-                <a:spcPts val="0"/>
-              </a:spcBef>
-              <a:spcAft>
-                <a:spcPts val="142"/>
-              </a:spcAft>
-            </a:pPr>
-            <a:r>
-              <a:rPr sz="850" lang="zh-TW" dirty="0">
-                <a:solidFill>
-                  <a:srgbClr val="000000"/>
-                </a:solidFill>
-                <a:latin typeface="Arial Unicode MS"/>
-                <a:ea typeface="Arial Unicode MS"/>
-                <a:cs typeface="Arial Unicode MS"/>
-              </a:rPr>
-              <a:t>我查了這一格的資料：前方那顆雷達，被標成「靜止」的點，原始量到的速度中間值是</a:t>
-            </a:r>
-            <a:r>
-              <a:rPr sz="850" b="1" lang="zh-TW" dirty="0">
-                <a:solidFill>
-                  <a:srgbClr val="000000"/>
-                </a:solidFill>
-                <a:latin typeface="Arial Unicode MS"/>
-                <a:ea typeface="Arial Unicode MS"/>
-                <a:cs typeface="Arial Unicode MS"/>
-              </a:rPr>
-              <a:t>每小時負三十九點九公里</a:t>
-            </a:r>
-            <a:r>
-              <a:rPr sz="850" lang="zh-TW" dirty="0">
-                <a:solidFill>
-                  <a:srgbClr val="000000"/>
-                </a:solidFill>
-                <a:latin typeface="Arial Unicode MS"/>
-                <a:ea typeface="Arial Unicode MS"/>
-                <a:cs typeface="Arial Unicode MS"/>
-              </a:rPr>
-              <a:t>，就是朝雷達靠近；照本車的車速和方向，靜止的東西應該量到負三十九點八。兩個幾乎一樣，扣掉以後接近零。這一格前雷達一百二十五個點裡，五十九個被判定靜止、五十二個「可能是靜止」，真正在動的只有少數。
-</a:t>
-            </a:r>
-          </a:p>
-          <a:p>
-            <a:pPr algn="l">
-              <a:spcBef>
-                <a:spcPts val="0"/>
-              </a:spcBef>
-              <a:spcAft>
-                <a:spcPts val="142"/>
-              </a:spcAft>
-            </a:pPr>
-            <a:r>
-              <a:rPr sz="850" lang="zh-TW" dirty="0">
-                <a:solidFill>
-                  <a:srgbClr val="000000"/>
-                </a:solidFill>
-                <a:latin typeface="Arial Unicode MS"/>
-                <a:ea typeface="Arial Unicode MS"/>
-                <a:cs typeface="Arial Unicode MS"/>
-              </a:rPr>
-              <a:t>所以右圖路邊這些紅圈，大多是靜止的東西，而且都留下來了。那為什麼不是每一棵樹都有紅圈？雷達每一輪只回報夠強的回波，樹葉反射弱，常常就沒有點。
-</a:t>
-            </a:r>
-          </a:p>
-          <a:p>
-            <a:pPr algn="l">
-              <a:spcBef>
-                <a:spcPts val="0"/>
-              </a:spcBef>
-              <a:spcAft>
-                <a:spcPts val="142"/>
-              </a:spcAft>
-            </a:pPr>
-            <a:r>
-              <a:rPr sz="850" lang="zh-TW" dirty="0">
-                <a:solidFill>
-                  <a:srgbClr val="000000"/>
-                </a:solidFill>
-                <a:latin typeface="Arial Unicode MS"/>
-                <a:ea typeface="Arial Unicode MS"/>
-                <a:cs typeface="Arial Unicode MS"/>
-              </a:rPr>
-              <a:t>真正會「不理靜止物」的，是後面的跟車、緊急煞車軟體。路上靜止的東西太多，護欄、桿子、路牌、人孔蓋、天橋，雷達又量不出高度，分不出頭頂的路牌和路上停著的車；如果每一個都煞車，就是幽靈煞車。所以很多系統對靜止目標特別保守，代價就是上週講的：停在路上的消防車被當成路邊的東西。這一段是軟體的選擇，規格表上看不到。</a:t>
+              <a:rPr sz="1200" b="1" lang="zh-TW" dirty="0">
+                <a:solidFill>
+                  <a:srgbClr val="000000"/>
+                </a:solidFill>
+                <a:latin typeface="Arial Unicode MS"/>
+                <a:ea typeface="Arial Unicode MS"/>
+                <a:cs typeface="Arial Unicode MS"/>
+              </a:rPr>
+              <a:t>記住這兩件事：點很少，而且量不出高度。</a:t>
+            </a:r>
+            <a:r>
+              <a:rPr sz="1200" lang="zh-TW" dirty="0">
+                <a:solidFill>
+                  <a:srgbClr val="000000"/>
+                </a:solidFill>
+                <a:latin typeface="Arial Unicode MS"/>
+                <a:ea typeface="Arial Unicode MS"/>
+                <a:cs typeface="Arial Unicode MS"/>
+              </a:rPr>
+              <a:t>下一張看這些點都落在哪裡。</a:t>
             </a:r>
           </a:p>
         </p:txBody>
@@ -6703,41 +7121,30 @@
                 <a:spcPts val="0"/>
               </a:spcBef>
               <a:spcAft>
-                <a:spcPts val="200"/>
+                <a:spcPts val="150"/>
               </a:spcAft>
             </a:pPr>
             <a:r>
-              <a:rPr sz="1200" lang="zh-TW" dirty="0">
-                <a:solidFill>
-                  <a:srgbClr val="000000"/>
-                </a:solidFill>
-                <a:latin typeface="Arial Unicode MS"/>
-                <a:ea typeface="Arial Unicode MS"/>
-                <a:cs typeface="Arial Unicode MS"/>
-              </a:rPr>
-              <a:t>再看一格，波士頓的一個路口。</a:t>
-            </a:r>
-            <a:r>
-              <a:rPr sz="1200" b="1" lang="zh-TW" dirty="0">
-                <a:solidFill>
-                  <a:srgbClr val="000000"/>
-                </a:solidFill>
-                <a:latin typeface="Arial Unicode MS"/>
-                <a:ea typeface="Arial Unicode MS"/>
-                <a:cs typeface="Arial Unicode MS"/>
-              </a:rPr>
-              <a:t>左邊是相機畫面</a:t>
-            </a:r>
-            <a:r>
-              <a:rPr sz="1200" lang="zh-TW" dirty="0">
-                <a:solidFill>
-                  <a:srgbClr val="000000"/>
-                </a:solidFill>
-                <a:latin typeface="Arial Unicode MS"/>
-                <a:ea typeface="Arial Unicode MS"/>
-                <a:cs typeface="Arial Unicode MS"/>
-              </a:rPr>
-              <a:t>，前面有三台車正在過路口。
+              <a:rPr sz="900" b="1" lang="zh-TW" dirty="0">
+                <a:solidFill>
+                  <a:srgbClr val="000000"/>
+                </a:solidFill>
+                <a:latin typeface="Arial Unicode MS"/>
+                <a:ea typeface="Arial Unicode MS"/>
+                <a:cs typeface="Arial Unicode MS"/>
+              </a:rPr>
+              <a:t>這一張的目的：</a:t>
+            </a:r>
+            <a:r>
+              <a:rPr sz="900" lang="zh-TW" dirty="0">
+                <a:solidFill>
+                  <a:srgbClr val="000000"/>
+                </a:solidFill>
+                <a:latin typeface="Arial Unicode MS"/>
+                <a:ea typeface="Arial Unicode MS"/>
+                <a:cs typeface="Arial Unicode MS"/>
+              </a:rPr>
+              <a:t>讓大家知道，雷達的點大多不在車上，雷達要自己判斷哪些是靜止的、哪些可以不理；判斷不好，就會幽靈煞車，或漏掉停著的車。
 </a:t>
             </a:r>
           </a:p>
@@ -6747,41 +7154,41 @@
                 <a:spcPts val="0"/>
               </a:spcBef>
               <a:spcAft>
-                <a:spcPts val="200"/>
+                <a:spcPts val="150"/>
               </a:spcAft>
             </a:pPr>
             <a:r>
-              <a:rPr sz="1200" lang="zh-TW" dirty="0">
-                <a:solidFill>
-                  <a:srgbClr val="000000"/>
-                </a:solidFill>
-                <a:latin typeface="Arial Unicode MS"/>
-                <a:ea typeface="Arial Unicode MS"/>
-                <a:cs typeface="Arial Unicode MS"/>
-              </a:rPr>
-              <a:t>雷達點這次不畫在相機畫面上。剛剛說過，雷達量不出高度，所有的點都畫在同一個高度，遠處的點擠在地平線附近，會疊在近處的車身上，看起來好像打到車，其實是車子後面更遠的東西。所以改成</a:t>
-            </a:r>
-            <a:r>
-              <a:rPr sz="1200" b="1" lang="zh-TW" dirty="0">
-                <a:solidFill>
-                  <a:srgbClr val="000000"/>
-                </a:solidFill>
-                <a:latin typeface="Arial Unicode MS"/>
-                <a:ea typeface="Arial Unicode MS"/>
-                <a:cs typeface="Arial Unicode MS"/>
-              </a:rPr>
-              <a:t>從上往下看</a:t>
-            </a:r>
-            <a:r>
-              <a:rPr sz="1200" lang="zh-TW" dirty="0">
-                <a:solidFill>
-                  <a:srgbClr val="000000"/>
-                </a:solidFill>
-                <a:latin typeface="Arial Unicode MS"/>
-                <a:ea typeface="Arial Unicode MS"/>
-                <a:cs typeface="Arial Unicode MS"/>
-              </a:rPr>
-              <a:t>，前後距離才分得清楚。
+              <a:rPr sz="900" lang="zh-TW" dirty="0">
+                <a:solidFill>
+                  <a:srgbClr val="000000"/>
+                </a:solidFill>
+                <a:latin typeface="Arial Unicode MS"/>
+                <a:ea typeface="Arial Unicode MS"/>
+                <a:cs typeface="Arial Unicode MS"/>
+              </a:rPr>
+              <a:t>再看一格，波士頓的一個路口。</a:t>
+            </a:r>
+            <a:r>
+              <a:rPr sz="900" b="1" lang="zh-TW" dirty="0">
+                <a:solidFill>
+                  <a:srgbClr val="000000"/>
+                </a:solidFill>
+                <a:latin typeface="Arial Unicode MS"/>
+                <a:ea typeface="Arial Unicode MS"/>
+                <a:cs typeface="Arial Unicode MS"/>
+              </a:rPr>
+              <a:t>左邊是相機畫面</a:t>
+            </a:r>
+            <a:r>
+              <a:rPr sz="900" lang="zh-TW" dirty="0">
+                <a:solidFill>
+                  <a:srgbClr val="000000"/>
+                </a:solidFill>
+                <a:latin typeface="Arial Unicode MS"/>
+                <a:ea typeface="Arial Unicode MS"/>
+                <a:cs typeface="Arial Unicode MS"/>
+              </a:rPr>
+              <a:t>，前面有三台車正在過路口。
 </a:t>
             </a:r>
           </a:p>
@@ -6791,52 +7198,41 @@
                 <a:spcPts val="0"/>
               </a:spcBef>
               <a:spcAft>
-                <a:spcPts val="200"/>
+                <a:spcPts val="150"/>
               </a:spcAft>
             </a:pPr>
             <a:r>
-              <a:rPr sz="1200" b="1" lang="zh-TW" dirty="0">
-                <a:solidFill>
-                  <a:srgbClr val="000000"/>
-                </a:solidFill>
-                <a:latin typeface="Arial Unicode MS"/>
-                <a:ea typeface="Arial Unicode MS"/>
-                <a:cs typeface="Arial Unicode MS"/>
-              </a:rPr>
-              <a:t>右邊，同一個瞬間，把雷達點畫在地上。</a:t>
-            </a:r>
-            <a:r>
-              <a:rPr sz="1200" lang="zh-TW" dirty="0">
-                <a:solidFill>
-                  <a:srgbClr val="000000"/>
-                </a:solidFill>
-                <a:latin typeface="Arial Unicode MS"/>
-                <a:ea typeface="Arial Unicode MS"/>
-                <a:cs typeface="Arial Unicode MS"/>
-              </a:rPr>
-              <a:t>自己的車在最下面中間，綠色的小長方形，車頭朝上；保險桿上的橘色小方塊是前雷達，淡綠色扇形是它水平往前打出去照得到的範圍。灰色的線是光達掃到的牆和路緣，白框是標註的車。雷達點分兩種顏色：</a:t>
-            </a:r>
-            <a:r>
-              <a:rPr sz="1200" b="1" lang="zh-TW" dirty="0">
-                <a:solidFill>
-                  <a:srgbClr val="000000"/>
-                </a:solidFill>
-                <a:latin typeface="Arial Unicode MS"/>
-                <a:ea typeface="Arial Unicode MS"/>
-                <a:cs typeface="Arial Unicode MS"/>
-              </a:rPr>
-              <a:t>落在車上的畫綠色，不在車上的畫紅色。</a:t>
-            </a:r>
-            <a:r>
-              <a:rPr sz="1200" lang="zh-TW" dirty="0">
-                <a:solidFill>
-                  <a:srgbClr val="000000"/>
-                </a:solidFill>
-                <a:latin typeface="Arial Unicode MS"/>
-                <a:ea typeface="Arial Unicode MS"/>
-                <a:cs typeface="Arial Unicode MS"/>
-              </a:rPr>
-              <a:t>綠圈都在白框裡；紅圈有的沿著灰色的牆和路緣排，有的落在一片空地上，光達在那裡什麼都沒掃到，可能是反射造成的假點。扇形外面那些紅圈，是車子側面另外兩顆雷達打到的。
+              <a:rPr sz="900" lang="zh-TW" dirty="0">
+                <a:solidFill>
+                  <a:srgbClr val="000000"/>
+                </a:solidFill>
+                <a:latin typeface="Arial Unicode MS"/>
+                <a:ea typeface="Arial Unicode MS"/>
+                <a:cs typeface="Arial Unicode MS"/>
+              </a:rPr>
+              <a:t>雷達點這次不畫在相機畫面上。剛剛說過，雷達量不出高度，所有的點都畫在同一個高度，遠處的點擠在地平線附近，會疊在近處的車身上，看起來好像打到車，其實是車子後面更遠的東西。所以改成</a:t>
+            </a:r>
+            <a:r>
+              <a:rPr sz="900" b="1" lang="zh-TW" dirty="0">
+                <a:solidFill>
+                  <a:srgbClr val="000000"/>
+                </a:solidFill>
+                <a:latin typeface="Arial Unicode MS"/>
+                <a:ea typeface="Arial Unicode MS"/>
+                <a:cs typeface="Arial Unicode MS"/>
+              </a:rPr>
+              <a:t>從上往下看</a:t>
+            </a:r>
+            <a:r>
+              <a:rPr sz="900" lang="zh-TW" dirty="0">
+                <a:solidFill>
+                  <a:srgbClr val="000000"/>
+                </a:solidFill>
+                <a:latin typeface="Arial Unicode MS"/>
+                <a:ea typeface="Arial Unicode MS"/>
+                <a:cs typeface="Arial Unicode MS"/>
+              </a:rPr>
+              <a:t>，前後距離才分得清楚。
 </a:t>
             </a:r>
           </a:p>
@@ -6846,41 +7242,52 @@
                 <a:spcPts val="0"/>
               </a:spcBef>
               <a:spcAft>
-                <a:spcPts val="200"/>
+                <a:spcPts val="150"/>
               </a:spcAft>
             </a:pPr>
             <a:r>
-              <a:rPr sz="1200" lang="zh-TW" dirty="0">
-                <a:solidFill>
-                  <a:srgbClr val="000000"/>
-                </a:solidFill>
-                <a:latin typeface="Arial Unicode MS"/>
-                <a:ea typeface="Arial Unicode MS"/>
-                <a:cs typeface="Arial Unicode MS"/>
-              </a:rPr>
-              <a:t>數一下：這一格，前方相機看得到的範圍裡有五十三個雷達點，落在車上的二十二個。這一格算多的。</a:t>
-            </a:r>
-            <a:r>
-              <a:rPr sz="1200" b="1" lang="zh-TW" dirty="0">
-                <a:solidFill>
-                  <a:srgbClr val="000000"/>
-                </a:solidFill>
-                <a:latin typeface="Arial Unicode MS"/>
-                <a:ea typeface="Arial Unicode MS"/>
-                <a:cs typeface="Arial Unicode MS"/>
-              </a:rPr>
-              <a:t>整個 mini 版十段場景平均，不到兩成。</a:t>
-            </a:r>
-            <a:r>
-              <a:rPr sz="1200" lang="zh-TW" dirty="0">
-                <a:solidFill>
-                  <a:srgbClr val="000000"/>
-                </a:solidFill>
-                <a:latin typeface="Arial Unicode MS"/>
-                <a:ea typeface="Arial Unicode MS"/>
-                <a:cs typeface="Arial Unicode MS"/>
-              </a:rPr>
-              <a:t>就算把車的框放寬到兩公尺，也只有兩成多。
+              <a:rPr sz="900" b="1" lang="zh-TW" dirty="0">
+                <a:solidFill>
+                  <a:srgbClr val="000000"/>
+                </a:solidFill>
+                <a:latin typeface="Arial Unicode MS"/>
+                <a:ea typeface="Arial Unicode MS"/>
+                <a:cs typeface="Arial Unicode MS"/>
+              </a:rPr>
+              <a:t>右邊，同一個瞬間，把雷達點畫在地上。</a:t>
+            </a:r>
+            <a:r>
+              <a:rPr sz="900" lang="zh-TW" dirty="0">
+                <a:solidFill>
+                  <a:srgbClr val="000000"/>
+                </a:solidFill>
+                <a:latin typeface="Arial Unicode MS"/>
+                <a:ea typeface="Arial Unicode MS"/>
+                <a:cs typeface="Arial Unicode MS"/>
+              </a:rPr>
+              <a:t>自己的車在最下面中間，綠色的小長方形，車頭朝上；保險桿上的橘色小方塊是前雷達，淡綠色扇形是它水平往前打出去照得到的範圍。灰色的線是光達掃到的牆和路緣，白框是標註的車。雷達點分兩種顏色：</a:t>
+            </a:r>
+            <a:r>
+              <a:rPr sz="900" b="1" lang="zh-TW" dirty="0">
+                <a:solidFill>
+                  <a:srgbClr val="000000"/>
+                </a:solidFill>
+                <a:latin typeface="Arial Unicode MS"/>
+                <a:ea typeface="Arial Unicode MS"/>
+                <a:cs typeface="Arial Unicode MS"/>
+              </a:rPr>
+              <a:t>落在車上的畫綠色，不在車上的畫紅色。</a:t>
+            </a:r>
+            <a:r>
+              <a:rPr sz="900" lang="zh-TW" dirty="0">
+                <a:solidFill>
+                  <a:srgbClr val="000000"/>
+                </a:solidFill>
+                <a:latin typeface="Arial Unicode MS"/>
+                <a:ea typeface="Arial Unicode MS"/>
+                <a:cs typeface="Arial Unicode MS"/>
+              </a:rPr>
+              <a:t>綠圈都在白框裡；紅圈有的沿著灰色的牆和路緣排，有的落在一片空地上，光達在那裡什麼都沒掃到，可能是反射造成的假點。扇形外面那些紅圈，是車子側面另外兩顆雷達打到的。
 </a:t>
             </a:r>
           </a:p>
@@ -6890,41 +7297,261 @@
                 <a:spcPts val="0"/>
               </a:spcBef>
               <a:spcAft>
-                <a:spcPts val="200"/>
+                <a:spcPts val="150"/>
               </a:spcAft>
             </a:pPr>
             <a:r>
-              <a:rPr sz="1200" lang="zh-TW" dirty="0">
-                <a:solidFill>
-                  <a:srgbClr val="000000"/>
-                </a:solidFill>
-                <a:latin typeface="Arial Unicode MS"/>
-                <a:ea typeface="Arial Unicode MS"/>
-                <a:cs typeface="Arial Unicode MS"/>
-              </a:rPr>
-              <a:t>所以雷達每一秒都要做一件事：</a:t>
-            </a:r>
-            <a:r>
-              <a:rPr sz="1200" b="1" lang="zh-TW" dirty="0">
-                <a:solidFill>
-                  <a:srgbClr val="000000"/>
-                </a:solidFill>
-                <a:latin typeface="Arial Unicode MS"/>
-                <a:ea typeface="Arial Unicode MS"/>
-                <a:cs typeface="Arial Unicode MS"/>
-              </a:rPr>
-              <a:t>這一堆點裡，哪些可以不理。</a:t>
-            </a:r>
-            <a:r>
-              <a:rPr sz="1200" lang="zh-TW" dirty="0">
-                <a:solidFill>
-                  <a:srgbClr val="000000"/>
-                </a:solidFill>
-                <a:latin typeface="Arial Unicode MS"/>
-                <a:ea typeface="Arial Unicode MS"/>
-                <a:cs typeface="Arial Unicode MS"/>
-              </a:rPr>
-              <a:t>它又量不出高度，頭頂的路牌和路上停著的車，在它眼裡長得一樣。丟太少，就是幽靈煞車；丟太多，就可能把真的停在路上的車也丟掉。這一張後面還會再用到。</a:t>
+              <a:rPr sz="900" lang="zh-TW" dirty="0">
+                <a:solidFill>
+                  <a:srgbClr val="000000"/>
+                </a:solidFill>
+                <a:latin typeface="Arial Unicode MS"/>
+                <a:ea typeface="Arial Unicode MS"/>
+                <a:cs typeface="Arial Unicode MS"/>
+              </a:rPr>
+              <a:t>數一下：這一格，前方相機看得到的範圍裡有五十三個雷達點，落在車上的二十二個。這一格算多的。</a:t>
+            </a:r>
+            <a:r>
+              <a:rPr sz="900" b="1" lang="zh-TW" dirty="0">
+                <a:solidFill>
+                  <a:srgbClr val="000000"/>
+                </a:solidFill>
+                <a:latin typeface="Arial Unicode MS"/>
+                <a:ea typeface="Arial Unicode MS"/>
+                <a:cs typeface="Arial Unicode MS"/>
+              </a:rPr>
+              <a:t>整個 mini 版十段場景平均，不到兩成。</a:t>
+            </a:r>
+            <a:r>
+              <a:rPr sz="900" lang="zh-TW" dirty="0">
+                <a:solidFill>
+                  <a:srgbClr val="000000"/>
+                </a:solidFill>
+                <a:latin typeface="Arial Unicode MS"/>
+                <a:ea typeface="Arial Unicode MS"/>
+                <a:cs typeface="Arial Unicode MS"/>
+              </a:rPr>
+              <a:t>就算把車的框放寬到兩公尺，也只有兩成多。
+</a:t>
+            </a:r>
+          </a:p>
+          <a:p>
+            <a:pPr algn="l">
+              <a:spcBef>
+                <a:spcPts val="0"/>
+              </a:spcBef>
+              <a:spcAft>
+                <a:spcPts val="150"/>
+              </a:spcAft>
+            </a:pPr>
+            <a:r>
+              <a:rPr sz="900" lang="zh-TW" dirty="0">
+                <a:solidFill>
+                  <a:srgbClr val="000000"/>
+                </a:solidFill>
+                <a:latin typeface="Arial Unicode MS"/>
+                <a:ea typeface="Arial Unicode MS"/>
+                <a:cs typeface="Arial Unicode MS"/>
+              </a:rPr>
+              <a:t>這些不在車上的點，大多是</a:t>
+            </a:r>
+            <a:r>
+              <a:rPr sz="900" b="1" lang="zh-TW" dirty="0">
+                <a:solidFill>
+                  <a:srgbClr val="000000"/>
+                </a:solidFill>
+                <a:latin typeface="Arial Unicode MS"/>
+                <a:ea typeface="Arial Unicode MS"/>
+                <a:cs typeface="Arial Unicode MS"/>
+              </a:rPr>
+              <a:t>靜止的東西</a:t>
+            </a:r>
+            <a:r>
+              <a:rPr sz="900" lang="zh-TW" dirty="0">
+                <a:solidFill>
+                  <a:srgbClr val="000000"/>
+                </a:solidFill>
+                <a:latin typeface="Arial Unicode MS"/>
+                <a:ea typeface="Arial Unicode MS"/>
+                <a:cs typeface="Arial Unicode MS"/>
+              </a:rPr>
+              <a:t>。雷達怎麼知道一個東西是靜止的？它不是看那個東西本身，是拿量到的速度，</a:t>
+            </a:r>
+            <a:r>
+              <a:rPr sz="900" b="1" lang="zh-TW" dirty="0">
+                <a:solidFill>
+                  <a:srgbClr val="000000"/>
+                </a:solidFill>
+                <a:latin typeface="Arial Unicode MS"/>
+                <a:ea typeface="Arial Unicode MS"/>
+                <a:cs typeface="Arial Unicode MS"/>
+              </a:rPr>
+              <a:t>扣掉自己的車速</a:t>
+            </a:r>
+            <a:r>
+              <a:rPr sz="900" lang="zh-TW" dirty="0">
+                <a:solidFill>
+                  <a:srgbClr val="000000"/>
+                </a:solidFill>
+                <a:latin typeface="Arial Unicode MS"/>
+                <a:ea typeface="Arial Unicode MS"/>
+                <a:cs typeface="Arial Unicode MS"/>
+              </a:rPr>
+              <a:t>。
+</a:t>
+            </a:r>
+          </a:p>
+          <a:p>
+            <a:pPr algn="l">
+              <a:spcBef>
+                <a:spcPts val="0"/>
+              </a:spcBef>
+              <a:spcAft>
+                <a:spcPts val="150"/>
+              </a:spcAft>
+            </a:pPr>
+            <a:r>
+              <a:rPr sz="900" lang="zh-TW" dirty="0">
+                <a:solidFill>
+                  <a:srgbClr val="000000"/>
+                </a:solidFill>
+                <a:latin typeface="Arial Unicode MS"/>
+                <a:ea typeface="Arial Unicode MS"/>
+                <a:cs typeface="Arial Unicode MS"/>
+              </a:rPr>
+              <a:t>想像坐在火車上看窗外，路邊的電線桿一根一根往後退。電線桿沒動，是你在動。雷達也一樣：車子會把自己的車速和轉彎的快慢送給雷達，雷達算出「如果那個東西不動，我應該量到多少」，量到的跟它一樣，就判定是靜止的。
+</a:t>
+            </a:r>
+          </a:p>
+          <a:p>
+            <a:pPr algn="l">
+              <a:spcBef>
+                <a:spcPts val="0"/>
+              </a:spcBef>
+              <a:spcAft>
+                <a:spcPts val="150"/>
+              </a:spcAft>
+            </a:pPr>
+            <a:r>
+              <a:rPr sz="900" lang="zh-TW" dirty="0">
+                <a:solidFill>
+                  <a:srgbClr val="000000"/>
+                </a:solidFill>
+                <a:latin typeface="Arial Unicode MS"/>
+                <a:ea typeface="Arial Unicode MS"/>
+                <a:cs typeface="Arial Unicode MS"/>
+              </a:rPr>
+              <a:t>我查了兩格資料。</a:t>
+            </a:r>
+            <a:r>
+              <a:rPr sz="900" b="1" lang="zh-TW" dirty="0">
+                <a:solidFill>
+                  <a:srgbClr val="000000"/>
+                </a:solidFill>
+                <a:latin typeface="Arial Unicode MS"/>
+                <a:ea typeface="Arial Unicode MS"/>
+                <a:cs typeface="Arial Unicode MS"/>
+              </a:rPr>
+              <a:t>這一格</a:t>
+            </a:r>
+            <a:r>
+              <a:rPr sz="900" lang="zh-TW" dirty="0">
+                <a:solidFill>
+                  <a:srgbClr val="000000"/>
+                </a:solidFill>
+                <a:latin typeface="Arial Unicode MS"/>
+                <a:ea typeface="Arial Unicode MS"/>
+                <a:cs typeface="Arial Unicode MS"/>
+              </a:rPr>
+              <a:t>，車子停在路口等，時速零，靜止的東西量到的速度本來就是零；前雷達一百一十九個點裡，五十三個判定靜止、二十三個「可能是靜止」。</a:t>
+            </a:r>
+            <a:r>
+              <a:rPr sz="900" b="1" lang="zh-TW" dirty="0">
+                <a:solidFill>
+                  <a:srgbClr val="000000"/>
+                </a:solidFill>
+                <a:latin typeface="Arial Unicode MS"/>
+                <a:ea typeface="Arial Unicode MS"/>
+                <a:cs typeface="Arial Unicode MS"/>
+              </a:rPr>
+              <a:t>上一張那條路</a:t>
+            </a:r>
+            <a:r>
+              <a:rPr sz="900" lang="zh-TW" dirty="0">
+                <a:solidFill>
+                  <a:srgbClr val="000000"/>
+                </a:solidFill>
+                <a:latin typeface="Arial Unicode MS"/>
+                <a:ea typeface="Arial Unicode MS"/>
+                <a:cs typeface="Arial Unicode MS"/>
+              </a:rPr>
+              <a:t>，車子時速大約四十三公里，靜止的點原始量到的速度中間值是每小時負三十九點九公里，就是朝雷達靠近；照車速和方向，靜止的東西應該量到負三十九點八。兩個幾乎一樣，扣掉以後接近零。
+</a:t>
+            </a:r>
+          </a:p>
+          <a:p>
+            <a:pPr algn="l">
+              <a:spcBef>
+                <a:spcPts val="0"/>
+              </a:spcBef>
+              <a:spcAft>
+                <a:spcPts val="150"/>
+              </a:spcAft>
+            </a:pPr>
+            <a:r>
+              <a:rPr sz="900" lang="zh-TW" dirty="0">
+                <a:solidFill>
+                  <a:srgbClr val="000000"/>
+                </a:solidFill>
+                <a:latin typeface="Arial Unicode MS"/>
+                <a:ea typeface="Arial Unicode MS"/>
+                <a:cs typeface="Arial Unicode MS"/>
+              </a:rPr>
+              <a:t>所以雷達每一秒都要決定：</a:t>
+            </a:r>
+            <a:r>
+              <a:rPr sz="900" b="1" lang="zh-TW" dirty="0">
+                <a:solidFill>
+                  <a:srgbClr val="000000"/>
+                </a:solidFill>
+                <a:latin typeface="Arial Unicode MS"/>
+                <a:ea typeface="Arial Unicode MS"/>
+                <a:cs typeface="Arial Unicode MS"/>
+              </a:rPr>
+              <a:t>這一堆靜止的點，哪些可以不理。</a:t>
+            </a:r>
+            <a:r>
+              <a:rPr sz="900" lang="zh-TW" dirty="0">
+                <a:solidFill>
+                  <a:srgbClr val="000000"/>
+                </a:solidFill>
+                <a:latin typeface="Arial Unicode MS"/>
+                <a:ea typeface="Arial Unicode MS"/>
+                <a:cs typeface="Arial Unicode MS"/>
+              </a:rPr>
+              <a:t>路上靜止的東西太多，護欄、桿子、路牌、人孔蓋、天橋，它又量不出高度，頭頂的路牌和路上停著的車長得一樣。丟太少，每一個都煞車，就是幽靈煞車；丟太多，就可能把真的停在路上的車也丟掉，上週講的消防車事故就是這樣。很多跟車、緊急煞車的軟體，對靜止目標特別保守，這是軟體的選擇，規格表上看不到。
+</a:t>
+            </a:r>
+          </a:p>
+          <a:p>
+            <a:pPr algn="l">
+              <a:spcBef>
+                <a:spcPts val="0"/>
+              </a:spcBef>
+              <a:spcAft>
+                <a:spcPts val="150"/>
+              </a:spcAft>
+            </a:pPr>
+            <a:r>
+              <a:rPr sz="900" lang="zh-TW" dirty="0">
+                <a:solidFill>
+                  <a:srgbClr val="000000"/>
+                </a:solidFill>
+                <a:latin typeface="Arial Unicode MS"/>
+                <a:ea typeface="Arial Unicode MS"/>
+                <a:cs typeface="Arial Unicode MS"/>
+              </a:rPr>
+              <a:t>順便回答一個問題：路邊為什麼不是每一棵樹都有紅圈？雷達每一輪只回報夠強的回波，樹葉反射弱，常常就沒有點。這一張後面還會再用到。</a:t>
             </a:r>
           </a:p>
         </p:txBody>

--- a/第七週(10-22)/第七週_第1節_簡報.pptx
+++ b/第七週(10-22)/第七週_第1節_簡報.pptx
@@ -5,7 +5,7 @@
     <p:sldMasterId id="2147483648" r:id="rId1"/>
   </p:sldMasterIdLst>
   <p:notesMasterIdLst>
-    <p:notesMasterId r:id="rId20"/>
+    <p:notesMasterId r:id="rId21"/>
   </p:notesMasterIdLst>
   <p:sldIdLst>
     <p:sldId id="256" r:id="rId2"/>
@@ -26,6 +26,7 @@
     <p:sldId id="271" r:id="rId17"/>
     <p:sldId id="272" r:id="rId18"/>
     <p:sldId id="273" r:id="rId19"/>
+    <p:sldId id="274" r:id="rId20"/>
   </p:sldIdLst>
   <p:sldSz cx="9144000" cy="5143500"/>
   <p:notesSz cx="7560000" cy="10692000"/>
@@ -2744,7 +2745,51 @@
                 <a:ea typeface="Arial Unicode MS"/>
                 <a:cs typeface="Arial Unicode MS"/>
               </a:rPr>
-              <a:t>左右兩邊和右下角那幾個紅圈在扇形外面，是車子側面另外兩顆雷達打到的東西，離這群人十五公尺以上。
+              <a:t>
+</a:t>
+            </a:r>
+          </a:p>
+          <a:p>
+            <a:pPr algn="l">
+              <a:spcBef>
+                <a:spcPts val="0"/>
+              </a:spcBef>
+              <a:spcAft>
+                <a:spcPts val="133"/>
+              </a:spcAft>
+            </a:pPr>
+            <a:r>
+              <a:rPr sz="800" lang="zh-TW" dirty="0">
+                <a:solidFill>
+                  <a:srgbClr val="000000"/>
+                </a:solidFill>
+                <a:latin typeface="Arial Unicode MS"/>
+                <a:ea typeface="Arial Unicode MS"/>
+                <a:cs typeface="Arial Unicode MS"/>
+              </a:rPr>
+              <a:t>先說清楚：</a:t>
+            </a:r>
+            <a:r>
+              <a:rPr sz="800" b="1" lang="zh-TW" dirty="0">
+                <a:solidFill>
+                  <a:srgbClr val="000000"/>
+                </a:solidFill>
+                <a:latin typeface="Arial Unicode MS"/>
+                <a:ea typeface="Arial Unicode MS"/>
+                <a:cs typeface="Arial Unicode MS"/>
+              </a:rPr>
+              <a:t>這是我挑出來、剛好七個人同時都沒有點的一個瞬間</a:t>
+            </a:r>
+            <a:r>
+              <a:rPr sz="800" lang="zh-TW" dirty="0">
+                <a:solidFill>
+                  <a:srgbClr val="000000"/>
+                </a:solidFill>
+                <a:latin typeface="Arial Unicode MS"/>
+                <a:ea typeface="Arial Unicode MS"/>
+                <a:cs typeface="Arial Unicode MS"/>
+              </a:rPr>
+              <a:t>，不是每一刻都這樣。下一張會看這群人前後十五秒的情形。左右兩邊和右下角那幾個紅圈在扇形外面，是車子側面另外兩顆雷達打到的東西，離這群人十五公尺以上。
 </a:t>
             </a:r>
           </a:p>
@@ -3227,11 +3272,11 @@
                 <a:spcPts val="0"/>
               </a:spcBef>
               <a:spcAft>
-                <a:spcPts val="167"/>
+                <a:spcPts val="200"/>
               </a:spcAft>
             </a:pPr>
             <a:r>
-              <a:rPr sz="1000" b="1" lang="zh-TW" dirty="0">
+              <a:rPr sz="1200" b="1" lang="zh-TW" dirty="0">
                 <a:solidFill>
                   <a:srgbClr val="000000"/>
                 </a:solidFill>
@@ -3242,15 +3287,15 @@
               <a:t>這一張的目的：</a:t>
             </a:r>
             <a:r>
-              <a:rPr sz="1000" lang="zh-TW" dirty="0">
-                <a:solidFill>
-                  <a:srgbClr val="000000"/>
-                </a:solidFill>
-                <a:latin typeface="Arial Unicode MS"/>
-                <a:ea typeface="Arial Unicode MS"/>
-                <a:cs typeface="Arial Unicode MS"/>
-              </a:rPr>
-              <a:t>讓大家知道，雷達不是不適合看人，是不能單獨看人；新一代雷達有四招改善。
+              <a:rPr sz="1200" lang="zh-TW" dirty="0">
+                <a:solidFill>
+                  <a:srgbClr val="000000"/>
+                </a:solidFill>
+                <a:latin typeface="Arial Unicode MS"/>
+                <a:ea typeface="Arial Unicode MS"/>
+                <a:cs typeface="Arial Unicode MS"/>
+              </a:rPr>
+              <a:t>讓大家知道，上一張是一個極端的瞬間；雷達看人不是完全看不到，是一閃一閃、抓不穩。
 </a:t>
             </a:r>
           </a:p>
@@ -3260,19 +3305,41 @@
                 <a:spcPts val="0"/>
               </a:spcBef>
               <a:spcAft>
-                <a:spcPts val="167"/>
+                <a:spcPts val="200"/>
               </a:spcAft>
             </a:pPr>
             <a:r>
-              <a:rPr sz="1000" lang="zh-TW" dirty="0">
-                <a:solidFill>
-                  <a:srgbClr val="000000"/>
-                </a:solidFill>
-                <a:latin typeface="Arial Unicode MS"/>
-                <a:ea typeface="Arial Unicode MS"/>
-                <a:cs typeface="Arial Unicode MS"/>
-              </a:rPr>
-              <a:t>剛剛那張看起來，雷達看人好像很差。各位不要因此覺得雷達不適合看人。新一代的雷達，專門為「人」做了好幾件事，第八週會細講，今天先知道有這四招。
+              <a:rPr sz="1200" lang="zh-TW" dirty="0">
+                <a:solidFill>
+                  <a:srgbClr val="000000"/>
+                </a:solidFill>
+                <a:latin typeface="Arial Unicode MS"/>
+                <a:ea typeface="Arial Unicode MS"/>
+                <a:cs typeface="Arial Unicode MS"/>
+              </a:rPr>
+              <a:t>上一張那七個人，我把他們前後十五秒，從第十格到第三十九格，一格一格查了一遍。每一橫排是一個人，每一個小格是零點五秒。</a:t>
+            </a:r>
+            <a:r>
+              <a:rPr sz="1200" b="1" lang="zh-TW" dirty="0">
+                <a:solidFill>
+                  <a:srgbClr val="000000"/>
+                </a:solidFill>
+                <a:latin typeface="Arial Unicode MS"/>
+                <a:ea typeface="Arial Unicode MS"/>
+                <a:cs typeface="Arial Unicode MS"/>
+              </a:rPr>
+              <a:t>綠色是那一刻他身上有雷達點，灰色是零個點，空白是那一刻他不在十五公尺內，或被別的東西擋住。</a:t>
+            </a:r>
+            <a:r>
+              <a:rPr sz="1200" lang="zh-TW" dirty="0">
+                <a:solidFill>
+                  <a:srgbClr val="000000"/>
+                </a:solidFill>
+                <a:latin typeface="Arial Unicode MS"/>
+                <a:ea typeface="Arial Unicode MS"/>
+                <a:cs typeface="Arial Unicode MS"/>
+              </a:rPr>
+              <a:t>
 </a:t>
             </a:r>
           </a:p>
@@ -3282,30 +3349,30 @@
                 <a:spcPts val="0"/>
               </a:spcBef>
               <a:spcAft>
-                <a:spcPts val="167"/>
+                <a:spcPts val="200"/>
               </a:spcAft>
             </a:pPr>
             <a:r>
-              <a:rPr sz="1000" b="1" lang="zh-TW" dirty="0">
-                <a:solidFill>
-                  <a:srgbClr val="000000"/>
-                </a:solidFill>
-                <a:latin typeface="Arial Unicode MS"/>
-                <a:ea typeface="Arial Unicode MS"/>
-                <a:cs typeface="Arial Unicode MS"/>
-              </a:rPr>
-              <a:t>第一招，點更多。</a:t>
-            </a:r>
-            <a:r>
-              <a:rPr sz="1000" lang="zh-TW" dirty="0">
-                <a:solidFill>
-                  <a:srgbClr val="000000"/>
-                </a:solidFill>
-                <a:latin typeface="Arial Unicode MS"/>
-                <a:ea typeface="Arial Unicode MS"/>
-                <a:cs typeface="Arial Unicode MS"/>
-              </a:rPr>
-              <a:t>就是上週講的 4D 雷達。天線從 408 的二十四個，變成 548 的一百九十二個，角度分得更細，一個人身上能分到好幾個點，不會跟旁邊、後面的東西混在一起；又量得出高度，人是瘦高的，車是矮寬的，多一個分辨的線索。
+              <a:rPr sz="1200" b="1" lang="zh-TW" dirty="0">
+                <a:solidFill>
+                  <a:srgbClr val="000000"/>
+                </a:solidFill>
+                <a:latin typeface="Arial Unicode MS"/>
+                <a:ea typeface="Arial Unicode MS"/>
+                <a:cs typeface="Arial Unicode MS"/>
+              </a:rPr>
+              <a:t>橘色框那一欄，就是上一張的瞬間</a:t>
+            </a:r>
+            <a:r>
+              <a:rPr sz="1200" lang="zh-TW" dirty="0">
+                <a:solidFill>
+                  <a:srgbClr val="000000"/>
+                </a:solidFill>
+                <a:latin typeface="Arial Unicode MS"/>
+                <a:ea typeface="Arial Unicode MS"/>
+                <a:cs typeface="Arial Unicode MS"/>
+              </a:rPr>
+              <a:t>：七格全是灰的，剛好七個人同時都沒有點。可是往左、往右看，到處都有綠格。
 </a:t>
             </a:r>
           </a:p>
@@ -3315,52 +3382,63 @@
                 <a:spcPts val="0"/>
               </a:spcBef>
               <a:spcAft>
-                <a:spcPts val="167"/>
+                <a:spcPts val="200"/>
               </a:spcAft>
             </a:pPr>
             <a:r>
-              <a:rPr sz="1000" b="1" lang="zh-TW" dirty="0">
-                <a:solidFill>
-                  <a:srgbClr val="000000"/>
-                </a:solidFill>
-                <a:latin typeface="Arial Unicode MS"/>
-                <a:ea typeface="Arial Unicode MS"/>
-                <a:cs typeface="Arial Unicode MS"/>
-              </a:rPr>
-              <a:t>第二招，看動作。</a:t>
-            </a:r>
-            <a:r>
-              <a:rPr sz="1000" lang="zh-TW" dirty="0">
-                <a:solidFill>
-                  <a:srgbClr val="000000"/>
-                </a:solidFill>
-                <a:latin typeface="Arial Unicode MS"/>
-                <a:ea typeface="Arial Unicode MS"/>
-                <a:cs typeface="Arial Unicode MS"/>
-              </a:rPr>
-              <a:t>看左邊這張照片，一個正在過馬路的人。一根電線桿，整根都是同一個速度，零。一個人走路，身體往前，手和腳卻一前一後地擺，有的部位快、有的慢、有的往回。雷達量得到這種「同一個東西裡，有好幾種速度，而且有節奏」的特徵，英文叫 micro-Doppler，</a:t>
-            </a:r>
-            <a:r>
-              <a:rPr sz="1000" b="1" lang="zh-TW" dirty="0">
-                <a:solidFill>
-                  <a:srgbClr val="000000"/>
-                </a:solidFill>
-                <a:latin typeface="Arial Unicode MS"/>
-                <a:ea typeface="Arial Unicode MS"/>
-                <a:cs typeface="Arial Unicode MS"/>
-              </a:rPr>
-              <a:t>微都卜勒</a:t>
-            </a:r>
-            <a:r>
-              <a:rPr sz="1000" lang="zh-TW" dirty="0">
-                <a:solidFill>
-                  <a:srgbClr val="000000"/>
-                </a:solidFill>
-                <a:latin typeface="Arial Unicode MS"/>
-                <a:ea typeface="Arial Unicode MS"/>
-                <a:cs typeface="Arial Unicode MS"/>
-              </a:rPr>
-              <a:t>，可以用來分辨行人、腳踏車和桿子。這是雷達研究裡很成熟的方向，不過量產車用到什麼程度，我沒有資料可以講。
+              <a:rPr sz="1200" lang="zh-TW" dirty="0">
+                <a:solidFill>
+                  <a:srgbClr val="000000"/>
+                </a:solidFill>
+                <a:latin typeface="Arial Unicode MS"/>
+                <a:ea typeface="Arial Unicode MS"/>
+                <a:cs typeface="Arial Unicode MS"/>
+              </a:rPr>
+              <a:t>橫著讀一排。</a:t>
+            </a:r>
+            <a:r>
+              <a:rPr sz="1200" b="1" lang="zh-TW" dirty="0">
+                <a:solidFill>
+                  <a:srgbClr val="000000"/>
+                </a:solidFill>
+                <a:latin typeface="Arial Unicode MS"/>
+                <a:ea typeface="Arial Unicode MS"/>
+                <a:cs typeface="Arial Unicode MS"/>
+              </a:rPr>
+              <a:t>行人一</a:t>
+            </a:r>
+            <a:r>
+              <a:rPr sz="1200" lang="zh-TW" dirty="0">
+                <a:solidFill>
+                  <a:srgbClr val="000000"/>
+                </a:solidFill>
+                <a:latin typeface="Arial Unicode MS"/>
+                <a:ea typeface="Arial Unicode MS"/>
+                <a:cs typeface="Arial Unicode MS"/>
+              </a:rPr>
+              <a:t>，二十八次裡有十九次抓得到，算是常被看到的；</a:t>
+            </a:r>
+            <a:r>
+              <a:rPr sz="1200" b="1" lang="zh-TW" dirty="0">
+                <a:solidFill>
+                  <a:srgbClr val="000000"/>
+                </a:solidFill>
+                <a:latin typeface="Arial Unicode MS"/>
+                <a:ea typeface="Arial Unicode MS"/>
+                <a:cs typeface="Arial Unicode MS"/>
+              </a:rPr>
+              <a:t>行人七</a:t>
+            </a:r>
+            <a:r>
+              <a:rPr sz="1200" lang="zh-TW" dirty="0">
+                <a:solidFill>
+                  <a:srgbClr val="000000"/>
+                </a:solidFill>
+                <a:latin typeface="Arial Unicode MS"/>
+                <a:ea typeface="Arial Unicode MS"/>
+                <a:cs typeface="Arial Unicode MS"/>
+              </a:rPr>
+              <a:t>，二十五次只抓到一次。差這麼多，跟每個人穿什麼、朝哪個方向走、離雷達多遠都有關係：上一張講過，側面對著雷達比正面弱。
 </a:t>
             </a:r>
           </a:p>
@@ -3370,30 +3448,63 @@
                 <a:spcPts val="0"/>
               </a:spcBef>
               <a:spcAft>
-                <a:spcPts val="167"/>
+                <a:spcPts val="200"/>
               </a:spcAft>
             </a:pPr>
             <a:r>
-              <a:rPr sz="1000" b="1" lang="zh-TW" dirty="0">
-                <a:solidFill>
-                  <a:srgbClr val="000000"/>
-                </a:solidFill>
-                <a:latin typeface="Arial Unicode MS"/>
-                <a:ea typeface="Arial Unicode MS"/>
-                <a:cs typeface="Arial Unicode MS"/>
-              </a:rPr>
-              <a:t>第三招，看久一點。</a:t>
-            </a:r>
-            <a:r>
-              <a:rPr sz="1000" lang="zh-TW" dirty="0">
-                <a:solidFill>
-                  <a:srgbClr val="000000"/>
-                </a:solidFill>
-                <a:latin typeface="Arial Unicode MS"/>
-                <a:ea typeface="Arial Unicode MS"/>
-                <a:cs typeface="Arial Unicode MS"/>
-              </a:rPr>
-              <a:t>剛剛說雷達看人一閃一閃。可是雷達每秒更新十幾次，一瞬間只抓到兩三成，一秒鐘裡還是會抓到好幾次。把連續幾次的掃描疊起來一起看，再用追蹤把一閃一閃的點串成一條線，中間的空檔先用預測補，下一節會講。荷蘭一份公開資料集的論文也寫到：加上高度、再把連續幾次掃描疊起來，雷達和光達的差距就縮小了。
+              <a:rPr sz="1200" lang="zh-TW" dirty="0">
+                <a:solidFill>
+                  <a:srgbClr val="000000"/>
+                </a:solidFill>
+                <a:latin typeface="Arial Unicode MS"/>
+                <a:ea typeface="Arial Unicode MS"/>
+                <a:cs typeface="Arial Unicode MS"/>
+              </a:rPr>
+              <a:t>加起來：這七個人一共出現一百八十四次，</a:t>
+            </a:r>
+            <a:r>
+              <a:rPr sz="1200" b="1" lang="zh-TW" dirty="0">
+                <a:solidFill>
+                  <a:srgbClr val="000000"/>
+                </a:solidFill>
+                <a:latin typeface="Arial Unicode MS"/>
+                <a:ea typeface="Arial Unicode MS"/>
+                <a:cs typeface="Arial Unicode MS"/>
+              </a:rPr>
+              <a:t>五十五次有雷達點，大約三成</a:t>
+            </a:r>
+            <a:r>
+              <a:rPr sz="1200" lang="zh-TW" dirty="0">
+                <a:solidFill>
+                  <a:srgbClr val="000000"/>
+                </a:solidFill>
+                <a:latin typeface="Arial Unicode MS"/>
+                <a:ea typeface="Arial Unicode MS"/>
+                <a:cs typeface="Arial Unicode MS"/>
+              </a:rPr>
+              <a:t>；而且</a:t>
+            </a:r>
+            <a:r>
+              <a:rPr sz="1200" b="1" lang="zh-TW" dirty="0">
+                <a:solidFill>
+                  <a:srgbClr val="000000"/>
+                </a:solidFill>
+                <a:latin typeface="Arial Unicode MS"/>
+                <a:ea typeface="Arial Unicode MS"/>
+                <a:cs typeface="Arial Unicode MS"/>
+              </a:rPr>
+              <a:t>七個人都至少被抓到過一次</a:t>
+            </a:r>
+            <a:r>
+              <a:rPr sz="1200" lang="zh-TW" dirty="0">
+                <a:solidFill>
+                  <a:srgbClr val="000000"/>
+                </a:solidFill>
+                <a:latin typeface="Arial Unicode MS"/>
+                <a:ea typeface="Arial Unicode MS"/>
+                <a:cs typeface="Arial Unicode MS"/>
+              </a:rPr>
+              <a:t>。可是每一次，身上最多只有一兩個點。
 </a:t>
             </a:r>
           </a:p>
@@ -3403,107 +3514,41 @@
                 <a:spcPts val="0"/>
               </a:spcBef>
               <a:spcAft>
-                <a:spcPts val="167"/>
+                <a:spcPts val="200"/>
               </a:spcAft>
             </a:pPr>
             <a:r>
-              <a:rPr sz="1000" b="1" lang="zh-TW" dirty="0">
-                <a:solidFill>
-                  <a:srgbClr val="000000"/>
-                </a:solidFill>
-                <a:latin typeface="Arial Unicode MS"/>
-                <a:ea typeface="Arial Unicode MS"/>
-                <a:cs typeface="Arial Unicode MS"/>
-              </a:rPr>
-              <a:t>第四招，跟別人一起看。</a:t>
-            </a:r>
-            <a:r>
-              <a:rPr sz="1000" lang="zh-TW" dirty="0">
-                <a:solidFill>
-                  <a:srgbClr val="000000"/>
-                </a:solidFill>
-                <a:latin typeface="Arial Unicode MS"/>
-                <a:ea typeface="Arial Unicode MS"/>
-                <a:cs typeface="Arial Unicode MS"/>
-              </a:rPr>
-              <a:t>這是量產車最常見的做法。雷達抓到人的時候，距離和接近的速度量得很準，晚上、下雨也照樣量，這正是相機最弱的地方；它做不到的，是</a:t>
-            </a:r>
-            <a:r>
-              <a:rPr sz="1000" b="1" lang="zh-TW" dirty="0">
-                <a:solidFill>
-                  <a:srgbClr val="000000"/>
-                </a:solidFill>
-                <a:latin typeface="Arial Unicode MS"/>
-                <a:ea typeface="Arial Unicode MS"/>
-                <a:cs typeface="Arial Unicode MS"/>
-              </a:rPr>
-              <a:t>認出那是一個人</a:t>
-            </a:r>
-            <a:r>
-              <a:rPr sz="1000" lang="zh-TW" dirty="0">
-                <a:solidFill>
-                  <a:srgbClr val="000000"/>
-                </a:solidFill>
-                <a:latin typeface="Arial Unicode MS"/>
-                <a:ea typeface="Arial Unicode MS"/>
-                <a:cs typeface="Arial Unicode MS"/>
-              </a:rPr>
-              <a:t>，那要靠相機。所以像 Toyota 的預防碰撞系統，就是相機加毫米波雷達一起看行人。晚上也有人用熱像儀加雷達：人的身體是熱的，在熱像裡特別明顯。
-</a:t>
-            </a:r>
-          </a:p>
-          <a:p>
-            <a:pPr algn="l">
-              <a:spcBef>
-                <a:spcPts val="0"/>
-              </a:spcBef>
-              <a:spcAft>
-                <a:spcPts val="167"/>
-              </a:spcAft>
-            </a:pPr>
-            <a:r>
-              <a:rPr sz="1000" lang="zh-TW" dirty="0">
-                <a:solidFill>
-                  <a:srgbClr val="000000"/>
-                </a:solidFill>
-                <a:latin typeface="Arial Unicode MS"/>
-                <a:ea typeface="Arial Unicode MS"/>
-                <a:cs typeface="Arial Unicode MS"/>
-              </a:rPr>
-              <a:t>這些新做法有沒有用？剛剛那份荷蘭的資料集，二〇二二年公開，用的是新一代 4D 雷達：車子正前方的行人，大約一半找得到，比我們今天這顆二〇一八年的 ARS 408 好，但行人還是最難找的那一類；加上相機，分數再往上。
-</a:t>
-            </a:r>
-          </a:p>
-          <a:p>
-            <a:pPr algn="l">
-              <a:spcBef>
-                <a:spcPts val="0"/>
-              </a:spcBef>
-              <a:spcAft>
-                <a:spcPts val="167"/>
-              </a:spcAft>
-            </a:pPr>
-            <a:r>
-              <a:rPr sz="1000" lang="zh-TW" dirty="0">
-                <a:solidFill>
-                  <a:srgbClr val="000000"/>
-                </a:solidFill>
-                <a:latin typeface="Arial Unicode MS"/>
-                <a:ea typeface="Arial Unicode MS"/>
-                <a:cs typeface="Arial Unicode MS"/>
-              </a:rPr>
-              <a:t>所以結論是：</a:t>
-            </a:r>
-            <a:r>
-              <a:rPr sz="1000" b="1" lang="zh-TW" dirty="0">
-                <a:solidFill>
-                  <a:srgbClr val="000000"/>
-                </a:solidFill>
-                <a:latin typeface="Arial Unicode MS"/>
-                <a:ea typeface="Arial Unicode MS"/>
-                <a:cs typeface="Arial Unicode MS"/>
-              </a:rPr>
-              <a:t>雷達不是不適合看人，是不能單獨看人。</a:t>
+              <a:rPr sz="1200" lang="zh-TW" dirty="0">
+                <a:solidFill>
+                  <a:srgbClr val="000000"/>
+                </a:solidFill>
+                <a:latin typeface="Arial Unicode MS"/>
+                <a:ea typeface="Arial Unicode MS"/>
+                <a:cs typeface="Arial Unicode MS"/>
+              </a:rPr>
+              <a:t>所以比較正確的說法是：雷達</a:t>
+            </a:r>
+            <a:r>
+              <a:rPr sz="1200" b="1" lang="zh-TW" dirty="0">
+                <a:solidFill>
+                  <a:srgbClr val="000000"/>
+                </a:solidFill>
+                <a:latin typeface="Arial Unicode MS"/>
+                <a:ea typeface="Arial Unicode MS"/>
+                <a:cs typeface="Arial Unicode MS"/>
+              </a:rPr>
+              <a:t>看得到人，但抓不穩</a:t>
+            </a:r>
+            <a:r>
+              <a:rPr sz="1200" lang="zh-TW" dirty="0">
+                <a:solidFill>
+                  <a:srgbClr val="000000"/>
+                </a:solidFill>
+                <a:latin typeface="Arial Unicode MS"/>
+                <a:ea typeface="Arial Unicode MS"/>
+                <a:cs typeface="Arial Unicode MS"/>
+              </a:rPr>
+              <a:t>，像接觸不良的燈泡，一閃一閃。要煞車的那一秒剛好是灰格，就來不及了。這也是為什麼下一張要講，新一代雷達怎麼改善，以及為什麼看人一定要跟相機合起來。</a:t>
             </a:r>
           </a:p>
         </p:txBody>
@@ -3612,11 +3657,11 @@
                 <a:spcPts val="0"/>
               </a:spcBef>
               <a:spcAft>
-                <a:spcPts val="200"/>
+                <a:spcPts val="167"/>
               </a:spcAft>
             </a:pPr>
             <a:r>
-              <a:rPr sz="1200" b="1" lang="zh-TW" dirty="0">
+              <a:rPr sz="1000" b="1" lang="zh-TW" dirty="0">
                 <a:solidFill>
                   <a:srgbClr val="000000"/>
                 </a:solidFill>
@@ -3627,15 +3672,15 @@
               <a:t>這一張的目的：</a:t>
             </a:r>
             <a:r>
-              <a:rPr sz="1200" lang="zh-TW" dirty="0">
-                <a:solidFill>
-                  <a:srgbClr val="000000"/>
-                </a:solidFill>
-                <a:latin typeface="Arial Unicode MS"/>
-                <a:ea typeface="Arial Unicode MS"/>
-                <a:cs typeface="Arial Unicode MS"/>
-              </a:rPr>
-              <a:t>讓大家記住，最危險的是看不到卻說沒事，所以每一顆都要能說「我現在不可靠」；這也引出下一節的融合。
+              <a:rPr sz="1000" lang="zh-TW" dirty="0">
+                <a:solidFill>
+                  <a:srgbClr val="000000"/>
+                </a:solidFill>
+                <a:latin typeface="Arial Unicode MS"/>
+                <a:ea typeface="Arial Unicode MS"/>
+                <a:cs typeface="Arial Unicode MS"/>
+              </a:rPr>
+              <a:t>讓大家知道，雷達不是不適合看人，是不能單獨看人；新一代雷達有四招改善。
 </a:t>
             </a:r>
           </a:p>
@@ -3645,41 +3690,19 @@
                 <a:spcPts val="0"/>
               </a:spcBef>
               <a:spcAft>
-                <a:spcPts val="200"/>
+                <a:spcPts val="167"/>
               </a:spcAft>
             </a:pPr>
             <a:r>
-              <a:rPr sz="1200" lang="zh-TW" dirty="0">
-                <a:solidFill>
-                  <a:srgbClr val="000000"/>
-                </a:solidFill>
-                <a:latin typeface="Arial Unicode MS"/>
-                <a:ea typeface="Arial Unicode MS"/>
-                <a:cs typeface="Arial Unicode MS"/>
-              </a:rPr>
-              <a:t>最後回到第四張那三種壞法，收在最危險的那一種：</a:t>
-            </a:r>
-            <a:r>
-              <a:rPr sz="1200" b="1" lang="zh-TW" dirty="0">
-                <a:solidFill>
-                  <a:srgbClr val="000000"/>
-                </a:solidFill>
-                <a:latin typeface="Arial Unicode MS"/>
-                <a:ea typeface="Arial Unicode MS"/>
-                <a:cs typeface="Arial Unicode MS"/>
-              </a:rPr>
-              <a:t>看不到，卻說沒事。</a:t>
-            </a:r>
-            <a:r>
-              <a:rPr sz="1200" lang="zh-TW" dirty="0">
-                <a:solidFill>
-                  <a:srgbClr val="000000"/>
-                </a:solidFill>
-                <a:latin typeface="Arial Unicode MS"/>
-                <a:ea typeface="Arial Unicode MS"/>
-                <a:cs typeface="Arial Unicode MS"/>
-              </a:rPr>
-              <a:t>
+              <a:rPr sz="1000" lang="zh-TW" dirty="0">
+                <a:solidFill>
+                  <a:srgbClr val="000000"/>
+                </a:solidFill>
+                <a:latin typeface="Arial Unicode MS"/>
+                <a:ea typeface="Arial Unicode MS"/>
+                <a:cs typeface="Arial Unicode MS"/>
+              </a:rPr>
+              <a:t>剛剛那張看起來，雷達看人好像很差。各位不要因此覺得雷達不適合看人。新一代的雷達，專門為「人」做了好幾件事，第八週會細講，今天先知道有這四招。
 </a:t>
             </a:r>
           </a:p>
@@ -3689,41 +3712,30 @@
                 <a:spcPts val="0"/>
               </a:spcBef>
               <a:spcAft>
-                <a:spcPts val="200"/>
+                <a:spcPts val="167"/>
               </a:spcAft>
             </a:pPr>
             <a:r>
-              <a:rPr sz="1200" lang="zh-TW" dirty="0">
-                <a:solidFill>
-                  <a:srgbClr val="000000"/>
-                </a:solidFill>
-                <a:latin typeface="Arial Unicode MS"/>
-                <a:ea typeface="Arial Unicode MS"/>
-                <a:cs typeface="Arial Unicode MS"/>
-              </a:rPr>
-              <a:t>這是剛剛那個路口的照片，斑馬線上的人看得清清楚楚。可是雷達交出去的報告是：前面八到十公尺，</a:t>
-            </a:r>
-            <a:r>
-              <a:rPr sz="1200" b="1" lang="zh-TW" dirty="0">
-                <a:solidFill>
-                  <a:srgbClr val="000000"/>
-                </a:solidFill>
-                <a:latin typeface="Arial Unicode MS"/>
-                <a:ea typeface="Arial Unicode MS"/>
-                <a:cs typeface="Arial Unicode MS"/>
-              </a:rPr>
-              <a:t>什麼都沒有。</a:t>
-            </a:r>
-            <a:r>
-              <a:rPr sz="1200" lang="zh-TW" dirty="0">
-                <a:solidFill>
-                  <a:srgbClr val="000000"/>
-                </a:solidFill>
-                <a:latin typeface="Arial Unicode MS"/>
-                <a:ea typeface="Arial Unicode MS"/>
-                <a:cs typeface="Arial Unicode MS"/>
-              </a:rPr>
-              <a:t>
+              <a:rPr sz="1000" b="1" lang="zh-TW" dirty="0">
+                <a:solidFill>
+                  <a:srgbClr val="000000"/>
+                </a:solidFill>
+                <a:latin typeface="Arial Unicode MS"/>
+                <a:ea typeface="Arial Unicode MS"/>
+                <a:cs typeface="Arial Unicode MS"/>
+              </a:rPr>
+              <a:t>第一招，點更多。</a:t>
+            </a:r>
+            <a:r>
+              <a:rPr sz="1000" lang="zh-TW" dirty="0">
+                <a:solidFill>
+                  <a:srgbClr val="000000"/>
+                </a:solidFill>
+                <a:latin typeface="Arial Unicode MS"/>
+                <a:ea typeface="Arial Unicode MS"/>
+                <a:cs typeface="Arial Unicode MS"/>
+              </a:rPr>
+              <a:t>就是上週講的 4D 雷達。天線從 408 的二十四個，變成 548 的一百九十二個，角度分得更細，一個人身上能分到好幾個點，不會跟旁邊、後面的東西混在一起；又量得出高度，人是瘦高的，車是矮寬的，多一個分辨的線索。
 </a:t>
             </a:r>
           </a:p>
@@ -3733,63 +3745,52 @@
                 <a:spcPts val="0"/>
               </a:spcBef>
               <a:spcAft>
-                <a:spcPts val="200"/>
+                <a:spcPts val="167"/>
               </a:spcAft>
             </a:pPr>
             <a:r>
-              <a:rPr sz="1200" lang="zh-TW" dirty="0">
-                <a:solidFill>
-                  <a:srgbClr val="000000"/>
-                </a:solidFill>
-                <a:latin typeface="Arial Unicode MS"/>
-                <a:ea typeface="Arial Unicode MS"/>
-                <a:cs typeface="Arial Unicode MS"/>
-              </a:rPr>
-              <a:t>請注意雷達做了什麼：它</a:t>
-            </a:r>
-            <a:r>
-              <a:rPr sz="1200" b="1" lang="zh-TW" dirty="0">
-                <a:solidFill>
-                  <a:srgbClr val="000000"/>
-                </a:solidFill>
-                <a:latin typeface="Arial Unicode MS"/>
-                <a:ea typeface="Arial Unicode MS"/>
-                <a:cs typeface="Arial Unicode MS"/>
-              </a:rPr>
-              <a:t>沒有說「我看不到」</a:t>
-            </a:r>
-            <a:r>
-              <a:rPr sz="1200" lang="zh-TW" dirty="0">
-                <a:solidFill>
-                  <a:srgbClr val="000000"/>
-                </a:solidFill>
-                <a:latin typeface="Arial Unicode MS"/>
-                <a:ea typeface="Arial Unicode MS"/>
-                <a:cs typeface="Arial Unicode MS"/>
-              </a:rPr>
-              <a:t>，它只是什麼都沒報。回波太弱被門檻擋掉也好，被過濾規則丟掉也好，對後面的程式來說，結果都一樣：</a:t>
-            </a:r>
-            <a:r>
-              <a:rPr sz="1200" b="1" lang="zh-TW" dirty="0">
-                <a:solidFill>
-                  <a:srgbClr val="000000"/>
-                </a:solidFill>
-                <a:latin typeface="Arial Unicode MS"/>
-                <a:ea typeface="Arial Unicode MS"/>
-                <a:cs typeface="Arial Unicode MS"/>
-              </a:rPr>
-              <a:t>沒有點，就是那裡沒有東西。</a:t>
-            </a:r>
-            <a:r>
-              <a:rPr sz="1200" lang="zh-TW" dirty="0">
-                <a:solidFill>
-                  <a:srgbClr val="000000"/>
-                </a:solidFill>
-                <a:latin typeface="Arial Unicode MS"/>
-                <a:ea typeface="Arial Unicode MS"/>
-                <a:cs typeface="Arial Unicode MS"/>
-              </a:rPr>
-              <a:t>
+              <a:rPr sz="1000" b="1" lang="zh-TW" dirty="0">
+                <a:solidFill>
+                  <a:srgbClr val="000000"/>
+                </a:solidFill>
+                <a:latin typeface="Arial Unicode MS"/>
+                <a:ea typeface="Arial Unicode MS"/>
+                <a:cs typeface="Arial Unicode MS"/>
+              </a:rPr>
+              <a:t>第二招，看動作。</a:t>
+            </a:r>
+            <a:r>
+              <a:rPr sz="1000" lang="zh-TW" dirty="0">
+                <a:solidFill>
+                  <a:srgbClr val="000000"/>
+                </a:solidFill>
+                <a:latin typeface="Arial Unicode MS"/>
+                <a:ea typeface="Arial Unicode MS"/>
+                <a:cs typeface="Arial Unicode MS"/>
+              </a:rPr>
+              <a:t>看左邊這張照片，一個正在過馬路的人。一根電線桿，整根都是同一個速度，零。一個人走路，身體往前，手和腳卻一前一後地擺，有的部位快、有的慢、有的往回。雷達量得到這種「同一個東西裡，有好幾種速度，而且有節奏」的特徵，英文叫 micro-Doppler，</a:t>
+            </a:r>
+            <a:r>
+              <a:rPr sz="1000" b="1" lang="zh-TW" dirty="0">
+                <a:solidFill>
+                  <a:srgbClr val="000000"/>
+                </a:solidFill>
+                <a:latin typeface="Arial Unicode MS"/>
+                <a:ea typeface="Arial Unicode MS"/>
+                <a:cs typeface="Arial Unicode MS"/>
+              </a:rPr>
+              <a:t>微都卜勒</a:t>
+            </a:r>
+            <a:r>
+              <a:rPr sz="1000" lang="zh-TW" dirty="0">
+                <a:solidFill>
+                  <a:srgbClr val="000000"/>
+                </a:solidFill>
+                <a:latin typeface="Arial Unicode MS"/>
+                <a:ea typeface="Arial Unicode MS"/>
+                <a:cs typeface="Arial Unicode MS"/>
+              </a:rPr>
+              <a:t>，可以用來分辨行人、腳踏車和桿子。這是雷達研究裡很成熟的方向，不過量產車用到什麼程度，我沒有資料可以講。
 </a:t>
             </a:r>
           </a:p>
@@ -3799,85 +3800,30 @@
                 <a:spcPts val="0"/>
               </a:spcBef>
               <a:spcAft>
-                <a:spcPts val="200"/>
+                <a:spcPts val="167"/>
               </a:spcAft>
             </a:pPr>
             <a:r>
-              <a:rPr sz="1200" lang="zh-TW" dirty="0">
-                <a:solidFill>
-                  <a:srgbClr val="000000"/>
-                </a:solidFill>
-                <a:latin typeface="Arial Unicode MS"/>
-                <a:ea typeface="Arial Unicode MS"/>
-                <a:cs typeface="Arial Unicode MS"/>
-              </a:rPr>
-              <a:t>這種壞法還有三個例子，前兩週和今天都提過。</a:t>
-            </a:r>
-            <a:r>
-              <a:rPr sz="1200" b="1" lang="zh-TW" dirty="0">
-                <a:solidFill>
-                  <a:srgbClr val="000000"/>
-                </a:solidFill>
-                <a:latin typeface="Arial Unicode MS"/>
-                <a:ea typeface="Arial Unicode MS"/>
-                <a:cs typeface="Arial Unicode MS"/>
-              </a:rPr>
-              <a:t>HC-SR04</a:t>
-            </a:r>
-            <a:r>
-              <a:rPr sz="1200" lang="zh-TW" dirty="0">
-                <a:solidFill>
-                  <a:srgbClr val="000000"/>
-                </a:solidFill>
-                <a:latin typeface="Arial Unicode MS"/>
-                <a:ea typeface="Arial Unicode MS"/>
-                <a:cs typeface="Arial Unicode MS"/>
-              </a:rPr>
-              <a:t> 被泥巴蓋住，照樣回報「前面沒東西」。</a:t>
-            </a:r>
-            <a:r>
-              <a:rPr sz="1200" b="1" lang="zh-TW" dirty="0">
-                <a:solidFill>
-                  <a:srgbClr val="000000"/>
-                </a:solidFill>
-                <a:latin typeface="Arial Unicode MS"/>
-                <a:ea typeface="Arial Unicode MS"/>
-                <a:cs typeface="Arial Unicode MS"/>
-              </a:rPr>
-              <a:t>衛星定位</a:t>
-            </a:r>
-            <a:r>
-              <a:rPr sz="1200" lang="zh-TW" dirty="0">
-                <a:solidFill>
-                  <a:srgbClr val="000000"/>
-                </a:solidFill>
-                <a:latin typeface="Arial Unicode MS"/>
-                <a:ea typeface="Arial Unicode MS"/>
-                <a:cs typeface="Arial Unicode MS"/>
-              </a:rPr>
-              <a:t>在窄巷裡被反射騙了，偏了幾十公尺，還是很有把握地告訴你一個位置。</a:t>
-            </a:r>
-            <a:r>
-              <a:rPr sz="1200" b="1" lang="zh-TW" dirty="0">
-                <a:solidFill>
-                  <a:srgbClr val="000000"/>
-                </a:solidFill>
-                <a:latin typeface="Arial Unicode MS"/>
-                <a:ea typeface="Arial Unicode MS"/>
-                <a:cs typeface="Arial Unicode MS"/>
-              </a:rPr>
-              <a:t>雷達</a:t>
-            </a:r>
-            <a:r>
-              <a:rPr sz="1200" lang="zh-TW" dirty="0">
-                <a:solidFill>
-                  <a:srgbClr val="000000"/>
-                </a:solidFill>
-                <a:latin typeface="Arial Unicode MS"/>
-                <a:ea typeface="Arial Unicode MS"/>
-                <a:cs typeface="Arial Unicode MS"/>
-              </a:rPr>
-              <a:t>把停在路肩的消防車當成路邊的東西丟掉，上週講雷達的時候提過，也就是剛剛第九張說的「丟太多」；相機剛好也沒認出那是一台車，兩顆各自都「正常」，合起來就出事了。
+              <a:rPr sz="1000" b="1" lang="zh-TW" dirty="0">
+                <a:solidFill>
+                  <a:srgbClr val="000000"/>
+                </a:solidFill>
+                <a:latin typeface="Arial Unicode MS"/>
+                <a:ea typeface="Arial Unicode MS"/>
+                <a:cs typeface="Arial Unicode MS"/>
+              </a:rPr>
+              <a:t>第三招，看久一點。</a:t>
+            </a:r>
+            <a:r>
+              <a:rPr sz="1000" lang="zh-TW" dirty="0">
+                <a:solidFill>
+                  <a:srgbClr val="000000"/>
+                </a:solidFill>
+                <a:latin typeface="Arial Unicode MS"/>
+                <a:ea typeface="Arial Unicode MS"/>
+                <a:cs typeface="Arial Unicode MS"/>
+              </a:rPr>
+              <a:t>剛剛說雷達看人一閃一閃。可是雷達每秒更新十幾次，一瞬間只抓到兩三成，一秒鐘裡還是會抓到好幾次。把連續幾次的掃描疊起來一起看，再用追蹤把一閃一閃的點串成一條線，中間的空檔先用預測補，下一節會講。荷蘭一份公開資料集的論文也寫到：加上高度、再把連續幾次掃描疊起來，雷達和光達的差距就縮小了。
 </a:t>
             </a:r>
           </a:p>
@@ -3887,19 +3833,52 @@
                 <a:spcPts val="0"/>
               </a:spcBef>
               <a:spcAft>
-                <a:spcPts val="200"/>
+                <a:spcPts val="167"/>
               </a:spcAft>
             </a:pPr>
             <a:r>
-              <a:rPr sz="1200" lang="zh-TW" dirty="0">
-                <a:solidFill>
-                  <a:srgbClr val="000000"/>
-                </a:solidFill>
-                <a:latin typeface="Arial Unicode MS"/>
-                <a:ea typeface="Arial Unicode MS"/>
-                <a:cs typeface="Arial Unicode MS"/>
-              </a:rPr>
-              <a:t>這幾個例子，都像那個壞掉卻一直顯示滿格的油表。
+              <a:rPr sz="1000" b="1" lang="zh-TW" dirty="0">
+                <a:solidFill>
+                  <a:srgbClr val="000000"/>
+                </a:solidFill>
+                <a:latin typeface="Arial Unicode MS"/>
+                <a:ea typeface="Arial Unicode MS"/>
+                <a:cs typeface="Arial Unicode MS"/>
+              </a:rPr>
+              <a:t>第四招，跟別人一起看。</a:t>
+            </a:r>
+            <a:r>
+              <a:rPr sz="1000" lang="zh-TW" dirty="0">
+                <a:solidFill>
+                  <a:srgbClr val="000000"/>
+                </a:solidFill>
+                <a:latin typeface="Arial Unicode MS"/>
+                <a:ea typeface="Arial Unicode MS"/>
+                <a:cs typeface="Arial Unicode MS"/>
+              </a:rPr>
+              <a:t>這是量產車最常見的做法。雷達抓到人的時候，距離和接近的速度量得很準，晚上、下雨也照樣量，這正是相機最弱的地方；它做不到的，是</a:t>
+            </a:r>
+            <a:r>
+              <a:rPr sz="1000" b="1" lang="zh-TW" dirty="0">
+                <a:solidFill>
+                  <a:srgbClr val="000000"/>
+                </a:solidFill>
+                <a:latin typeface="Arial Unicode MS"/>
+                <a:ea typeface="Arial Unicode MS"/>
+                <a:cs typeface="Arial Unicode MS"/>
+              </a:rPr>
+              <a:t>認出那是一個人</a:t>
+            </a:r>
+            <a:r>
+              <a:rPr sz="1000" lang="zh-TW" dirty="0">
+                <a:solidFill>
+                  <a:srgbClr val="000000"/>
+                </a:solidFill>
+                <a:latin typeface="Arial Unicode MS"/>
+                <a:ea typeface="Arial Unicode MS"/>
+                <a:cs typeface="Arial Unicode MS"/>
+              </a:rPr>
+              <a:t>，那要靠相機。所以像 Toyota 的預防碰撞系統，就是相機加毫米波雷達一起看行人。晚上也有人用熱像儀加雷達：人的身體是熱的，在熱像裡特別明顯。
 </a:t>
             </a:r>
           </a:p>
@@ -3909,41 +3888,19 @@
                 <a:spcPts val="0"/>
               </a:spcBef>
               <a:spcAft>
-                <a:spcPts val="200"/>
+                <a:spcPts val="167"/>
               </a:spcAft>
             </a:pPr>
             <a:r>
-              <a:rPr sz="1200" lang="zh-TW" dirty="0">
-                <a:solidFill>
-                  <a:srgbClr val="000000"/>
-                </a:solidFill>
-                <a:latin typeface="Arial Unicode MS"/>
-                <a:ea typeface="Arial Unicode MS"/>
-                <a:cs typeface="Arial Unicode MS"/>
-              </a:rPr>
-              <a:t>所以今天的結論是：每一顆感測器，不只要量得準，還要能說一句「</a:t>
-            </a:r>
-            <a:r>
-              <a:rPr sz="1200" b="1" lang="zh-TW" dirty="0">
-                <a:solidFill>
-                  <a:srgbClr val="000000"/>
-                </a:solidFill>
-                <a:latin typeface="Arial Unicode MS"/>
-                <a:ea typeface="Arial Unicode MS"/>
-                <a:cs typeface="Arial Unicode MS"/>
-              </a:rPr>
-              <a:t>我現在不可靠</a:t>
-            </a:r>
-            <a:r>
-              <a:rPr sz="1200" lang="zh-TW" dirty="0">
-                <a:solidFill>
-                  <a:srgbClr val="000000"/>
-                </a:solidFill>
-                <a:latin typeface="Arial Unicode MS"/>
-                <a:ea typeface="Arial Unicode MS"/>
-                <a:cs typeface="Arial Unicode MS"/>
-              </a:rPr>
-              <a:t>」。它一說，車子就知道那幾秒要改聽別人的。剛剛那六個人，雷達說不出來，就要靠光達和相機來補。
+              <a:rPr sz="1000" lang="zh-TW" dirty="0">
+                <a:solidFill>
+                  <a:srgbClr val="000000"/>
+                </a:solidFill>
+                <a:latin typeface="Arial Unicode MS"/>
+                <a:ea typeface="Arial Unicode MS"/>
+                <a:cs typeface="Arial Unicode MS"/>
+              </a:rPr>
+              <a:t>這些新做法有沒有用？剛剛那份荷蘭的資料集，二〇二二年公開，用的是新一代 4D 雷達：車子正前方的行人，大約一半找得到，比我們今天這顆二〇一八年的 ARS 408 好，但行人還是最難找的那一類；加上相機，分數再往上。
 </a:t>
             </a:r>
           </a:p>
@@ -3953,19 +3910,30 @@
                 <a:spcPts val="0"/>
               </a:spcBef>
               <a:spcAft>
-                <a:spcPts val="200"/>
+                <a:spcPts val="167"/>
               </a:spcAft>
             </a:pPr>
             <a:r>
-              <a:rPr sz="1200" lang="zh-TW" dirty="0">
-                <a:solidFill>
-                  <a:srgbClr val="000000"/>
-                </a:solidFill>
-                <a:latin typeface="Arial Unicode MS"/>
-                <a:ea typeface="Arial Unicode MS"/>
-                <a:cs typeface="Arial Unicode MS"/>
-              </a:rPr>
-              <a:t>那「改聽別人的」要怎麼做？兩顆說的不一樣，要聽誰的？這就是下一節：融合。</a:t>
+              <a:rPr sz="1000" lang="zh-TW" dirty="0">
+                <a:solidFill>
+                  <a:srgbClr val="000000"/>
+                </a:solidFill>
+                <a:latin typeface="Arial Unicode MS"/>
+                <a:ea typeface="Arial Unicode MS"/>
+                <a:cs typeface="Arial Unicode MS"/>
+              </a:rPr>
+              <a:t>所以結論是：</a:t>
+            </a:r>
+            <a:r>
+              <a:rPr sz="1000" b="1" lang="zh-TW" dirty="0">
+                <a:solidFill>
+                  <a:srgbClr val="000000"/>
+                </a:solidFill>
+                <a:latin typeface="Arial Unicode MS"/>
+                <a:ea typeface="Arial Unicode MS"/>
+                <a:cs typeface="Arial Unicode MS"/>
+              </a:rPr>
+              <a:t>雷達不是不適合看人，是不能單獨看人。</a:t>
             </a:r>
           </a:p>
         </p:txBody>
@@ -4097,7 +4065,7 @@
                 <a:ea typeface="Arial Unicode MS"/>
                 <a:cs typeface="Arial Unicode MS"/>
               </a:rPr>
-              <a:t>把這一節收成三句話，讓大家帶走。
+              <a:t>讓大家記住，最危險的是看不到卻說沒事，所以每一顆都要能說「我現在不可靠」；這也引出下一節的融合。
 </a:t>
             </a:r>
           </a:p>
@@ -4119,7 +4087,29 @@
                 <a:ea typeface="Arial Unicode MS"/>
                 <a:cs typeface="Arial Unicode MS"/>
               </a:rPr>
-              <a:t>三句話。
+              <a:t>最後回到第四張那三種壞法，收在最危險的那一種：</a:t>
+            </a:r>
+            <a:r>
+              <a:rPr sz="1200" b="1" lang="zh-TW" dirty="0">
+                <a:solidFill>
+                  <a:srgbClr val="000000"/>
+                </a:solidFill>
+                <a:latin typeface="Arial Unicode MS"/>
+                <a:ea typeface="Arial Unicode MS"/>
+                <a:cs typeface="Arial Unicode MS"/>
+              </a:rPr>
+              <a:t>看不到，卻說沒事。</a:t>
+            </a:r>
+            <a:r>
+              <a:rPr sz="1200" lang="zh-TW" dirty="0">
+                <a:solidFill>
+                  <a:srgbClr val="000000"/>
+                </a:solidFill>
+                <a:latin typeface="Arial Unicode MS"/>
+                <a:ea typeface="Arial Unicode MS"/>
+                <a:cs typeface="Arial Unicode MS"/>
+              </a:rPr>
+              <a:t>
 </a:t>
             </a:r>
           </a:p>
@@ -4133,6 +4123,17 @@
               </a:spcAft>
             </a:pPr>
             <a:r>
+              <a:rPr sz="1200" lang="zh-TW" dirty="0">
+                <a:solidFill>
+                  <a:srgbClr val="000000"/>
+                </a:solidFill>
+                <a:latin typeface="Arial Unicode MS"/>
+                <a:ea typeface="Arial Unicode MS"/>
+                <a:cs typeface="Arial Unicode MS"/>
+              </a:rPr>
+              <a:t>這是剛剛那個路口的照片，斑馬線上的人看得清清楚楚。可是雷達交出去的報告是：前面八到十公尺，</a:t>
+            </a:r>
+            <a:r>
               <a:rPr sz="1200" b="1" lang="zh-TW" dirty="0">
                 <a:solidFill>
                   <a:srgbClr val="000000"/>
@@ -4141,7 +4142,7 @@
                 <a:ea typeface="Arial Unicode MS"/>
                 <a:cs typeface="Arial Unicode MS"/>
               </a:rPr>
-              <a:t>第一句，三種壞法。</a:t>
+              <a:t>什麼都沒有。</a:t>
             </a:r>
             <a:r>
               <a:rPr sz="1200" lang="zh-TW" dirty="0">
@@ -4152,7 +4153,7 @@
                 <a:ea typeface="Arial Unicode MS"/>
                 <a:cs typeface="Arial Unicode MS"/>
               </a:rPr>
-              <a:t>看不到、看錯、看不到卻不說。第三種最危險，像壞掉還顯示滿格的油表。
+              <a:t>
 </a:t>
             </a:r>
           </a:p>
@@ -4166,6 +4167,17 @@
               </a:spcAft>
             </a:pPr>
             <a:r>
+              <a:rPr sz="1200" lang="zh-TW" dirty="0">
+                <a:solidFill>
+                  <a:srgbClr val="000000"/>
+                </a:solidFill>
+                <a:latin typeface="Arial Unicode MS"/>
+                <a:ea typeface="Arial Unicode MS"/>
+                <a:cs typeface="Arial Unicode MS"/>
+              </a:rPr>
+              <a:t>請注意雷達做了什麼：它</a:t>
+            </a:r>
+            <a:r>
               <a:rPr sz="1200" b="1" lang="zh-TW" dirty="0">
                 <a:solidFill>
                   <a:srgbClr val="000000"/>
@@ -4174,7 +4186,7 @@
                 <a:ea typeface="Arial Unicode MS"/>
                 <a:cs typeface="Arial Unicode MS"/>
               </a:rPr>
-              <a:t>第二句，失效對照表沒有一欄全是勾。</a:t>
+              <a:t>沒有說「我看不到」</a:t>
             </a:r>
             <a:r>
               <a:rPr sz="1200" lang="zh-TW" dirty="0">
@@ -4185,7 +4197,29 @@
                 <a:ea typeface="Arial Unicode MS"/>
                 <a:cs typeface="Arial Unicode MS"/>
               </a:rPr>
-              <a:t>下雨害相機，遠處的人和機車害雷達，隧道害衛星定位。
+              <a:t>，它只是什麼都沒報。回波太弱被門檻擋掉也好，被過濾規則丟掉也好，對後面的程式來說，結果都一樣：</a:t>
+            </a:r>
+            <a:r>
+              <a:rPr sz="1200" b="1" lang="zh-TW" dirty="0">
+                <a:solidFill>
+                  <a:srgbClr val="000000"/>
+                </a:solidFill>
+                <a:latin typeface="Arial Unicode MS"/>
+                <a:ea typeface="Arial Unicode MS"/>
+                <a:cs typeface="Arial Unicode MS"/>
+              </a:rPr>
+              <a:t>沒有點，就是那裡沒有東西。</a:t>
+            </a:r>
+            <a:r>
+              <a:rPr sz="1200" lang="zh-TW" dirty="0">
+                <a:solidFill>
+                  <a:srgbClr val="000000"/>
+                </a:solidFill>
+                <a:latin typeface="Arial Unicode MS"/>
+                <a:ea typeface="Arial Unicode MS"/>
+                <a:cs typeface="Arial Unicode MS"/>
+              </a:rPr>
+              <a:t>
 </a:t>
             </a:r>
           </a:p>
@@ -4199,6 +4233,17 @@
               </a:spcAft>
             </a:pPr>
             <a:r>
+              <a:rPr sz="1200" lang="zh-TW" dirty="0">
+                <a:solidFill>
+                  <a:srgbClr val="000000"/>
+                </a:solidFill>
+                <a:latin typeface="Arial Unicode MS"/>
+                <a:ea typeface="Arial Unicode MS"/>
+                <a:cs typeface="Arial Unicode MS"/>
+              </a:rPr>
+              <a:t>這種壞法還有三個例子，前兩週和今天都提過。</a:t>
+            </a:r>
+            <a:r>
               <a:rPr sz="1200" b="1" lang="zh-TW" dirty="0">
                 <a:solidFill>
                   <a:srgbClr val="000000"/>
@@ -4207,7 +4252,7 @@
                 <a:ea typeface="Arial Unicode MS"/>
                 <a:cs typeface="Arial Unicode MS"/>
               </a:rPr>
-              <a:t>第三句，今天第一次看真的資料。</a:t>
+              <a:t>HC-SR04</a:t>
             </a:r>
             <a:r>
               <a:rPr sz="1200" lang="zh-TW" dirty="0">
@@ -4218,7 +4263,51 @@
                 <a:ea typeface="Arial Unicode MS"/>
                 <a:cs typeface="Arial Unicode MS"/>
               </a:rPr>
-              <a:t>雷達的點全部在同一個高度；行人看得到，可是抓不穩，一瞬間只有兩三成抓得到，要靠相機一起看；光達三十公尺外，一台車身上只剩兩個點。
+              <a:t> 被泥巴蓋住，照樣回報「前面沒東西」。</a:t>
+            </a:r>
+            <a:r>
+              <a:rPr sz="1200" b="1" lang="zh-TW" dirty="0">
+                <a:solidFill>
+                  <a:srgbClr val="000000"/>
+                </a:solidFill>
+                <a:latin typeface="Arial Unicode MS"/>
+                <a:ea typeface="Arial Unicode MS"/>
+                <a:cs typeface="Arial Unicode MS"/>
+              </a:rPr>
+              <a:t>衛星定位</a:t>
+            </a:r>
+            <a:r>
+              <a:rPr sz="1200" lang="zh-TW" dirty="0">
+                <a:solidFill>
+                  <a:srgbClr val="000000"/>
+                </a:solidFill>
+                <a:latin typeface="Arial Unicode MS"/>
+                <a:ea typeface="Arial Unicode MS"/>
+                <a:cs typeface="Arial Unicode MS"/>
+              </a:rPr>
+              <a:t>在窄巷裡被反射騙了，偏了幾十公尺，還是很有把握地告訴你一個位置。</a:t>
+            </a:r>
+            <a:r>
+              <a:rPr sz="1200" b="1" lang="zh-TW" dirty="0">
+                <a:solidFill>
+                  <a:srgbClr val="000000"/>
+                </a:solidFill>
+                <a:latin typeface="Arial Unicode MS"/>
+                <a:ea typeface="Arial Unicode MS"/>
+                <a:cs typeface="Arial Unicode MS"/>
+              </a:rPr>
+              <a:t>雷達</a:t>
+            </a:r>
+            <a:r>
+              <a:rPr sz="1200" lang="zh-TW" dirty="0">
+                <a:solidFill>
+                  <a:srgbClr val="000000"/>
+                </a:solidFill>
+                <a:latin typeface="Arial Unicode MS"/>
+                <a:ea typeface="Arial Unicode MS"/>
+                <a:cs typeface="Arial Unicode MS"/>
+              </a:rPr>
+              <a:t>把停在路肩的消防車當成路邊的東西丟掉，上週講雷達的時候提過，也就是剛剛第九張說的「丟太多」；相機剛好也沒認出那是一台車，兩顆各自都「正常」，合起來就出事了。
 </a:t>
             </a:r>
           </a:p>
@@ -4240,7 +4329,73 @@
                 <a:ea typeface="Arial Unicode MS"/>
                 <a:cs typeface="Arial Unicode MS"/>
               </a:rPr>
-              <a:t>下課十分鐘。下一節：每一顆都會壞，那要怎麼合起來？</a:t>
+              <a:t>這幾個例子，都像那個壞掉卻一直顯示滿格的油表。
+</a:t>
+            </a:r>
+          </a:p>
+          <a:p>
+            <a:pPr algn="l">
+              <a:spcBef>
+                <a:spcPts val="0"/>
+              </a:spcBef>
+              <a:spcAft>
+                <a:spcPts val="200"/>
+              </a:spcAft>
+            </a:pPr>
+            <a:r>
+              <a:rPr sz="1200" lang="zh-TW" dirty="0">
+                <a:solidFill>
+                  <a:srgbClr val="000000"/>
+                </a:solidFill>
+                <a:latin typeface="Arial Unicode MS"/>
+                <a:ea typeface="Arial Unicode MS"/>
+                <a:cs typeface="Arial Unicode MS"/>
+              </a:rPr>
+              <a:t>所以今天的結論是：每一顆感測器，不只要量得準，還要能說一句「</a:t>
+            </a:r>
+            <a:r>
+              <a:rPr sz="1200" b="1" lang="zh-TW" dirty="0">
+                <a:solidFill>
+                  <a:srgbClr val="000000"/>
+                </a:solidFill>
+                <a:latin typeface="Arial Unicode MS"/>
+                <a:ea typeface="Arial Unicode MS"/>
+                <a:cs typeface="Arial Unicode MS"/>
+              </a:rPr>
+              <a:t>我現在不可靠</a:t>
+            </a:r>
+            <a:r>
+              <a:rPr sz="1200" lang="zh-TW" dirty="0">
+                <a:solidFill>
+                  <a:srgbClr val="000000"/>
+                </a:solidFill>
+                <a:latin typeface="Arial Unicode MS"/>
+                <a:ea typeface="Arial Unicode MS"/>
+                <a:cs typeface="Arial Unicode MS"/>
+              </a:rPr>
+              <a:t>」。它一說，車子就知道那幾秒要改聽別人的。剛剛那六個人，雷達說不出來，就要靠光達和相機來補。
+</a:t>
+            </a:r>
+          </a:p>
+          <a:p>
+            <a:pPr algn="l">
+              <a:spcBef>
+                <a:spcPts val="0"/>
+              </a:spcBef>
+              <a:spcAft>
+                <a:spcPts val="200"/>
+              </a:spcAft>
+            </a:pPr>
+            <a:r>
+              <a:rPr sz="1200" lang="zh-TW" dirty="0">
+                <a:solidFill>
+                  <a:srgbClr val="000000"/>
+                </a:solidFill>
+                <a:latin typeface="Arial Unicode MS"/>
+                <a:ea typeface="Arial Unicode MS"/>
+                <a:cs typeface="Arial Unicode MS"/>
+              </a:rPr>
+              <a:t>那「改聽別人的」要怎麼做？兩顆說的不一樣，要聽誰的？這就是下一節：融合。</a:t>
             </a:r>
           </a:p>
         </p:txBody>
@@ -4283,6 +4438,281 @@
                 <a:cs typeface="Arial Unicode MS"/>
               </a:rPr>
               <a:t>18</a:t>
+            </a:r>
+          </a:p>
+        </p:txBody>
+      </p:sp>
+    </p:spTree>
+  </p:cSld>
+  <p:clrMapOvr>
+    <a:masterClrMapping/>
+  </p:clrMapOvr>
+</p:notes>
+</file>
+
+<file path=ppt/notesSlides/notesSlide19.xml><?xml version="1.0" encoding="utf-8"?>
+<p:notes xmlns:a="http://schemas.openxmlformats.org/drawingml/2006/main" xmlns:p="http://schemas.openxmlformats.org/presentationml/2006/main">
+  <p:cSld>
+    <p:spTree>
+      <p:nvGrpSpPr>
+        <p:cNvPr id="1" name=""/>
+        <p:cNvGrpSpPr/>
+        <p:nvPr/>
+      </p:nvGrpSpPr>
+      <p:grpSpPr>
+        <a:xfrm/>
+      </p:grpSpPr>
+      <p:sp>
+        <p:nvSpPr>
+          <p:cNvPr id="2" name="Slide Image Placeholder 1"/>
+          <p:cNvSpPr>
+            <a:spLocks noGrp="1"/>
+          </p:cNvSpPr>
+          <p:nvPr>
+            <p:ph type="sldImg" idx="2"/>
+          </p:nvPr>
+        </p:nvSpPr>
+        <p:spPr>
+          <a:xfrm>
+            <a:off x="540000" y="540000"/>
+            <a:ext cx="6480000" cy="3645000"/>
+          </a:xfrm>
+        </p:spPr>
+      </p:sp>
+      <p:sp>
+        <p:nvSpPr>
+          <p:cNvPr id="3" name="Notes Placeholder 2"/>
+          <p:cNvSpPr>
+            <a:spLocks noGrp="1"/>
+          </p:cNvSpPr>
+          <p:nvPr>
+            <p:ph type="body" idx="3"/>
+          </p:nvPr>
+        </p:nvSpPr>
+        <p:spPr>
+          <a:xfrm>
+            <a:off x="540000" y="4440000"/>
+            <a:ext cx="6480000" cy="5500000"/>
+          </a:xfrm>
+        </p:spPr>
+        <p:txBody>
+          <a:bodyPr vert="horz" wrap="square" anchor="t" lIns="91440" rIns="91440" tIns="45720" bIns="45720"/>
+          <a:lstStyle/>
+          <a:p>
+            <a:pPr algn="l">
+              <a:spcBef>
+                <a:spcPts val="0"/>
+              </a:spcBef>
+              <a:spcAft>
+                <a:spcPts val="200"/>
+              </a:spcAft>
+            </a:pPr>
+            <a:r>
+              <a:rPr sz="1200" b="1" lang="zh-TW" dirty="0">
+                <a:solidFill>
+                  <a:srgbClr val="000000"/>
+                </a:solidFill>
+                <a:latin typeface="Arial Unicode MS"/>
+                <a:ea typeface="Arial Unicode MS"/>
+                <a:cs typeface="Arial Unicode MS"/>
+              </a:rPr>
+              <a:t>這一張的目的：</a:t>
+            </a:r>
+            <a:r>
+              <a:rPr sz="1200" lang="zh-TW" dirty="0">
+                <a:solidFill>
+                  <a:srgbClr val="000000"/>
+                </a:solidFill>
+                <a:latin typeface="Arial Unicode MS"/>
+                <a:ea typeface="Arial Unicode MS"/>
+                <a:cs typeface="Arial Unicode MS"/>
+              </a:rPr>
+              <a:t>把這一節收成三句話，讓大家帶走。
+</a:t>
+            </a:r>
+          </a:p>
+          <a:p>
+            <a:pPr algn="l">
+              <a:spcBef>
+                <a:spcPts val="0"/>
+              </a:spcBef>
+              <a:spcAft>
+                <a:spcPts val="200"/>
+              </a:spcAft>
+            </a:pPr>
+            <a:r>
+              <a:rPr sz="1200" lang="zh-TW" dirty="0">
+                <a:solidFill>
+                  <a:srgbClr val="000000"/>
+                </a:solidFill>
+                <a:latin typeface="Arial Unicode MS"/>
+                <a:ea typeface="Arial Unicode MS"/>
+                <a:cs typeface="Arial Unicode MS"/>
+              </a:rPr>
+              <a:t>三句話。
+</a:t>
+            </a:r>
+          </a:p>
+          <a:p>
+            <a:pPr algn="l">
+              <a:spcBef>
+                <a:spcPts val="0"/>
+              </a:spcBef>
+              <a:spcAft>
+                <a:spcPts val="200"/>
+              </a:spcAft>
+            </a:pPr>
+            <a:r>
+              <a:rPr sz="1200" b="1" lang="zh-TW" dirty="0">
+                <a:solidFill>
+                  <a:srgbClr val="000000"/>
+                </a:solidFill>
+                <a:latin typeface="Arial Unicode MS"/>
+                <a:ea typeface="Arial Unicode MS"/>
+                <a:cs typeface="Arial Unicode MS"/>
+              </a:rPr>
+              <a:t>第一句，三種壞法。</a:t>
+            </a:r>
+            <a:r>
+              <a:rPr sz="1200" lang="zh-TW" dirty="0">
+                <a:solidFill>
+                  <a:srgbClr val="000000"/>
+                </a:solidFill>
+                <a:latin typeface="Arial Unicode MS"/>
+                <a:ea typeface="Arial Unicode MS"/>
+                <a:cs typeface="Arial Unicode MS"/>
+              </a:rPr>
+              <a:t>看不到、看錯、看不到卻不說。第三種最危險，像壞掉還顯示滿格的油表。
+</a:t>
+            </a:r>
+          </a:p>
+          <a:p>
+            <a:pPr algn="l">
+              <a:spcBef>
+                <a:spcPts val="0"/>
+              </a:spcBef>
+              <a:spcAft>
+                <a:spcPts val="200"/>
+              </a:spcAft>
+            </a:pPr>
+            <a:r>
+              <a:rPr sz="1200" b="1" lang="zh-TW" dirty="0">
+                <a:solidFill>
+                  <a:srgbClr val="000000"/>
+                </a:solidFill>
+                <a:latin typeface="Arial Unicode MS"/>
+                <a:ea typeface="Arial Unicode MS"/>
+                <a:cs typeface="Arial Unicode MS"/>
+              </a:rPr>
+              <a:t>第二句，失效對照表沒有一欄全是勾。</a:t>
+            </a:r>
+            <a:r>
+              <a:rPr sz="1200" lang="zh-TW" dirty="0">
+                <a:solidFill>
+                  <a:srgbClr val="000000"/>
+                </a:solidFill>
+                <a:latin typeface="Arial Unicode MS"/>
+                <a:ea typeface="Arial Unicode MS"/>
+                <a:cs typeface="Arial Unicode MS"/>
+              </a:rPr>
+              <a:t>下雨害相機，遠處的人和機車害雷達，隧道害衛星定位。
+</a:t>
+            </a:r>
+          </a:p>
+          <a:p>
+            <a:pPr algn="l">
+              <a:spcBef>
+                <a:spcPts val="0"/>
+              </a:spcBef>
+              <a:spcAft>
+                <a:spcPts val="200"/>
+              </a:spcAft>
+            </a:pPr>
+            <a:r>
+              <a:rPr sz="1200" b="1" lang="zh-TW" dirty="0">
+                <a:solidFill>
+                  <a:srgbClr val="000000"/>
+                </a:solidFill>
+                <a:latin typeface="Arial Unicode MS"/>
+                <a:ea typeface="Arial Unicode MS"/>
+                <a:cs typeface="Arial Unicode MS"/>
+              </a:rPr>
+              <a:t>第三句，今天第一次看真的資料。</a:t>
+            </a:r>
+            <a:r>
+              <a:rPr sz="1200" lang="zh-TW" dirty="0">
+                <a:solidFill>
+                  <a:srgbClr val="000000"/>
+                </a:solidFill>
+                <a:latin typeface="Arial Unicode MS"/>
+                <a:ea typeface="Arial Unicode MS"/>
+                <a:cs typeface="Arial Unicode MS"/>
+              </a:rPr>
+              <a:t>雷達的點全部在同一個高度；行人看得到，可是抓不穩，一瞬間只有兩三成抓得到，要靠相機一起看；光達三十公尺外，一台車身上只剩兩個點。
+</a:t>
+            </a:r>
+          </a:p>
+          <a:p>
+            <a:pPr algn="l">
+              <a:spcBef>
+                <a:spcPts val="0"/>
+              </a:spcBef>
+              <a:spcAft>
+                <a:spcPts val="200"/>
+              </a:spcAft>
+            </a:pPr>
+            <a:r>
+              <a:rPr sz="1200" lang="zh-TW" dirty="0">
+                <a:solidFill>
+                  <a:srgbClr val="000000"/>
+                </a:solidFill>
+                <a:latin typeface="Arial Unicode MS"/>
+                <a:ea typeface="Arial Unicode MS"/>
+                <a:cs typeface="Arial Unicode MS"/>
+              </a:rPr>
+              <a:t>下課十分鐘。下一節：每一顆都會壞，那要怎麼合起來？</a:t>
+            </a:r>
+          </a:p>
+        </p:txBody>
+      </p:sp>
+      <p:sp>
+        <p:nvSpPr>
+          <p:cNvPr id="4" name="Slide Number Placeholder 3"/>
+          <p:cNvSpPr>
+            <a:spLocks noGrp="1"/>
+          </p:cNvSpPr>
+          <p:nvPr>
+            <p:ph type="sldNum" idx="5"/>
+          </p:nvPr>
+        </p:nvSpPr>
+        <p:spPr>
+          <a:xfrm>
+            <a:off x="6500000" y="10200000"/>
+            <a:ext cx="500000" cy="300000"/>
+          </a:xfrm>
+        </p:spPr>
+        <p:txBody>
+          <a:bodyPr vert="horz" wrap="square" anchor="t" lIns="91440" rIns="91440" tIns="45720" bIns="45720"/>
+          <a:lstStyle/>
+          <a:p>
+            <a:pPr algn="l">
+              <a:spcBef>
+                <a:spcPts val="0"/>
+              </a:spcBef>
+              <a:spcAft>
+                <a:spcPts val="167"/>
+              </a:spcAft>
+            </a:pPr>
+            <a:r>
+              <a:rPr sz="1000" lang="zh-TW" dirty="0">
+                <a:solidFill>
+                  <a:srgbClr val="000000"/>
+                </a:solidFill>
+                <a:latin typeface="Arial Unicode MS"/>
+                <a:ea typeface="Arial Unicode MS"/>
+                <a:cs typeface="Arial Unicode MS"/>
+              </a:rPr>
+              <a:t>19</a:t>
             </a:r>
           </a:p>
         </p:txBody>
@@ -9220,7 +9650,7 @@
                 <a:ea typeface="Arial" pitchFamily="34" charset="-122"/>
                 <a:cs typeface="Arial" pitchFamily="34" charset="-120"/>
               </a:rPr>
-              <a:t>10 / 18</a:t>
+              <a:t>10 / 19</a:t>
             </a:r>
             <a:endParaRPr lang="en-US" sz="900" dirty="0"/>
           </a:p>
@@ -11291,7 +11721,7 @@
                 <a:ea typeface="Arial" pitchFamily="34" charset="-122"/>
                 <a:cs typeface="Arial" pitchFamily="34" charset="-120"/>
               </a:rPr>
-              <a:t>11 / 18</a:t>
+              <a:t>11 / 19</a:t>
             </a:r>
             <a:endParaRPr lang="en-US" sz="860" dirty="0"/>
           </a:p>
@@ -11864,7 +12294,7 @@
                 <a:ea typeface="Arial" pitchFamily="34" charset="-122"/>
                 <a:cs typeface="Arial" pitchFamily="34" charset="-120"/>
               </a:rPr>
-              <a:t>12 / 18</a:t>
+              <a:t>12 / 19</a:t>
             </a:r>
             <a:endParaRPr lang="en-US" sz="900" dirty="0"/>
           </a:p>
@@ -12619,7 +13049,7 @@
                 <a:ea typeface="Arial" pitchFamily="34" charset="-122"/>
                 <a:cs typeface="Arial" pitchFamily="34" charset="-120"/>
               </a:rPr>
-              <a:t>13 / 18</a:t>
+              <a:t>13 / 19</a:t>
             </a:r>
             <a:endParaRPr lang="en-US" sz="900" dirty="0"/>
           </a:p>
@@ -13192,7 +13622,7 @@
                 <a:ea typeface="Arial" pitchFamily="34" charset="-122"/>
                 <a:cs typeface="Arial" pitchFamily="34" charset="-120"/>
               </a:rPr>
-              <a:t>14 / 18</a:t>
+              <a:t>14 / 19</a:t>
             </a:r>
             <a:endParaRPr lang="en-US" sz="900" dirty="0"/>
           </a:p>
@@ -13980,7 +14410,7 @@
                 <a:ea typeface="Arial" pitchFamily="34" charset="-122"/>
                 <a:cs typeface="Arial" pitchFamily="34" charset="-120"/>
               </a:rPr>
-              <a:t>15 / 18</a:t>
+              <a:t>15 / 19</a:t>
             </a:r>
             <a:endParaRPr lang="en-US" sz="900" dirty="0"/>
           </a:p>
@@ -14058,7 +14488,7 @@
         </p:nvSpPr>
         <p:spPr>
           <a:xfrm>
-            <a:off x="502920" y="420624"/>
+            <a:off x="502920" y="365760"/>
             <a:ext cx="8138160" cy="274320"/>
           </a:xfrm>
           <a:prstGeom prst="rect">
@@ -14075,7 +14505,7 @@
               <a:buNone/>
             </a:pPr>
             <a:r>
-              <a:rPr lang="en-US" sz="1250" b="1" dirty="0">
+              <a:rPr lang="en-US" sz="1300" b="1" dirty="0">
                 <a:solidFill>
                   <a:srgbClr val="007F72"/>
                 </a:solidFill>
@@ -14083,26 +14513,88 @@
                 <a:ea typeface="Arial" pitchFamily="34" charset="-122"/>
                 <a:cs typeface="Arial" pitchFamily="34" charset="-120"/>
               </a:rPr>
-              <a:t>Radar · 新一代雷達怎麼看人</a:t>
-            </a:r>
-            <a:endParaRPr lang="en-US" sz="1250" dirty="0"/>
+              <a:t>Radar · 同一群人，前後 15 秒</a:t>
+            </a:r>
+            <a:endParaRPr lang="en-US" sz="1300" dirty="0"/>
           </a:p>
         </p:txBody>
       </p:sp>
       <p:sp>
         <p:nvSpPr>
-          <p:cNvPr id="3" name="Shape 1"/>
+          <p:cNvPr id="3" name="Text 1"/>
+          <p:cNvSpPr txBox="1"/>
+          <p:nvPr/>
+        </p:nvSpPr>
+        <p:spPr>
+          <a:xfrm>
+            <a:off x="502920" y="676656"/>
+            <a:ext cx="8138160" cy="560684"/>
+          </a:xfrm>
+          <a:prstGeom prst="rect">
+            <a:avLst/>
+          </a:prstGeom>
+          <a:noFill/>
+          <a:ln/>
+        </p:spPr>
+        <p:txBody>
+          <a:bodyPr wrap="square" lIns="0" tIns="0" rIns="0" bIns="0" rtlCol="0" anchor="t"/>
+          <a:lstStyle/>
+          <a:p>
+            <a:pPr indent="0" marL="0">
+              <a:lnSpc>
+                <a:spcPct val="116000"/>
+              </a:lnSpc>
+              <a:buNone/>
+            </a:pPr>
+            <a:r>
+              <a:rPr lang="en-US" sz="1700" b="1" dirty="0">
+                <a:solidFill>
+                  <a:srgbClr val="0B1F3A"/>
+                </a:solidFill>
+                <a:latin typeface="Arial" pitchFamily="34" charset="0"/>
+                <a:ea typeface="Arial" pitchFamily="34" charset="-122"/>
+                <a:cs typeface="Arial" pitchFamily="34" charset="-120"/>
+              </a:rPr>
+              <a:t>Cùng nhóm người, 15 giây: radar lúc có lúc không</a:t>
+            </a:r>
+            <a:endParaRPr lang="en-US" sz="1700" dirty="0"/>
+          </a:p>
+          <a:p>
+            <a:pPr indent="0" marL="0">
+              <a:lnSpc>
+                <a:spcPct val="116000"/>
+              </a:lnSpc>
+              <a:buNone/>
+            </a:pPr>
+            <a:r>
+              <a:rPr lang="en-US" sz="1250" dirty="0">
+                <a:solidFill>
+                  <a:srgbClr val="5F7183"/>
+                </a:solidFill>
+                <a:latin typeface="微軟正黑體" pitchFamily="34" charset="0"/>
+                <a:ea typeface="微軟正黑體" pitchFamily="34" charset="-122"/>
+                <a:cs typeface="微軟正黑體" pitchFamily="34" charset="-120"/>
+              </a:rPr>
+              <a:t>同一群人，前後 15 秒：雷達一下有、一下沒有</a:t>
+            </a:r>
+            <a:endParaRPr lang="en-US" sz="1700" dirty="0"/>
+          </a:p>
+        </p:txBody>
+      </p:sp>
+      <p:sp>
+        <p:nvSpPr>
+          <p:cNvPr id="4" name="Shape 2"/>
           <p:cNvSpPr/>
           <p:nvPr/>
         </p:nvSpPr>
         <p:spPr>
           <a:xfrm>
-            <a:off x="502920" y="1101852"/>
-            <a:ext cx="1796323" cy="2514600"/>
+            <a:off x="2199928" y="1310492"/>
+            <a:ext cx="4744145" cy="2511700"/>
           </a:xfrm>
           <a:prstGeom prst="roundRect">
             <a:avLst>
-              <a:gd name="adj" fmla="val 6108"/>
+              <a:gd name="adj" fmla="val 3641"/>
             </a:avLst>
           </a:prstGeom>
           <a:solidFill>
@@ -14116,9 +14608,93 @@
           </a:ln>
         </p:spPr>
       </p:sp>
+      <p:sp>
+        <p:nvSpPr>
+          <p:cNvPr id="5" name="Shape 3"/>
+          <p:cNvSpPr/>
+          <p:nvPr/>
+        </p:nvSpPr>
+        <p:spPr>
+          <a:xfrm>
+            <a:off x="2291368" y="1401932"/>
+            <a:ext cx="4561265" cy="347413"/>
+          </a:xfrm>
+          <a:prstGeom prst="roundRect">
+            <a:avLst>
+              <a:gd name="adj" fmla="val 13160"/>
+            </a:avLst>
+          </a:prstGeom>
+          <a:solidFill>
+            <a:srgbClr val="0B1F3A"/>
+          </a:solidFill>
+          <a:ln/>
+        </p:spPr>
+      </p:sp>
+      <p:sp>
+        <p:nvSpPr>
+          <p:cNvPr id="6" name="Text 4"/>
+          <p:cNvSpPr txBox="1"/>
+          <p:nvPr/>
+        </p:nvSpPr>
+        <p:spPr>
+          <a:xfrm>
+            <a:off x="2364520" y="1429364"/>
+            <a:ext cx="4414961" cy="310837"/>
+          </a:xfrm>
+          <a:prstGeom prst="rect">
+            <a:avLst/>
+          </a:prstGeom>
+          <a:noFill/>
+          <a:ln/>
+        </p:spPr>
+        <p:txBody>
+          <a:bodyPr wrap="square" lIns="0" tIns="0" rIns="0" bIns="0" rtlCol="0" anchor="t"/>
+          <a:lstStyle/>
+          <a:p>
+            <a:pPr algn="ctr" indent="0" marL="0">
+              <a:lnSpc>
+                <a:spcPct val="104000"/>
+              </a:lnSpc>
+              <a:buNone/>
+            </a:pPr>
+            <a:r>
+              <a:rPr lang="en-US" sz="950" b="1" dirty="0">
+                <a:solidFill>
+                  <a:srgbClr val="FFFFFF"/>
+                </a:solidFill>
+                <a:latin typeface="Arial" pitchFamily="34" charset="0"/>
+                <a:ea typeface="Arial" pitchFamily="34" charset="-122"/>
+                <a:cs typeface="Arial" pitchFamily="34" charset="-120"/>
+              </a:rPr>
+              <a:t>Mỗi ô = 0,5 giây; xanh = có điểm radar trên người đó</a:t>
+            </a:r>
+            <a:endParaRPr lang="en-US" sz="950" dirty="0"/>
+          </a:p>
+          <a:p>
+            <a:pPr algn="ctr" indent="0" marL="0">
+              <a:lnSpc>
+                <a:spcPct val="104000"/>
+              </a:lnSpc>
+              <a:buNone/>
+            </a:pPr>
+            <a:r>
+              <a:rPr lang="en-US" sz="850" dirty="0">
+                <a:solidFill>
+                  <a:srgbClr val="FFFFFF"/>
+                </a:solidFill>
+                <a:latin typeface="微軟正黑體" pitchFamily="34" charset="0"/>
+                <a:ea typeface="微軟正黑體" pitchFamily="34" charset="-122"/>
+                <a:cs typeface="微軟正黑體" pitchFamily="34" charset="-120"/>
+              </a:rPr>
+              <a:t>每一格＝0.5 秒；綠色＝那個人身上有雷達點</a:t>
+            </a:r>
+            <a:endParaRPr lang="en-US" sz="950" dirty="0"/>
+          </a:p>
+        </p:txBody>
+      </p:sp>
       <p:pic>
         <p:nvPicPr>
-          <p:cNvPr id="4" name="Image 0" descr="/Users/tsengchenghsun/Class/carClass/Claude outputs/第七週(10-22)/src/img/w7_walker.jpg">    </p:cNvPr>
+          <p:cNvPr id="7" name="Image 0" descr="/Users/tsengchenghsun/Class/carClass/Claude outputs/第七週(10-22)/src/img/w7_ped_timeline.png">    </p:cNvPr>
           <p:cNvPicPr>
             <a:picLocks noChangeAspect="1"/>
           </p:cNvPicPr>
@@ -14132,8 +14708,8 @@
         </p:blipFill>
         <p:spPr>
           <a:xfrm>
-            <a:off x="576072" y="1255602"/>
-            <a:ext cx="1650019" cy="2024220"/>
+            <a:off x="2291368" y="1804209"/>
+            <a:ext cx="4561265" cy="1707087"/>
           </a:xfrm>
           <a:prstGeom prst="rect">
             <a:avLst/>
@@ -14142,14 +14718,14 @@
       </p:pic>
       <p:sp>
         <p:nvSpPr>
-          <p:cNvPr id="5" name="Text 2"/>
+          <p:cNvPr id="8" name="Text 5"/>
           <p:cNvSpPr txBox="1"/>
           <p:nvPr/>
         </p:nvSpPr>
         <p:spPr>
           <a:xfrm>
-            <a:off x="576072" y="3396996"/>
-            <a:ext cx="1650019" cy="182880"/>
+            <a:off x="2291368" y="3529584"/>
+            <a:ext cx="4561265" cy="182880"/>
           </a:xfrm>
           <a:prstGeom prst="rect">
             <a:avLst/>
@@ -14173,7 +14749,7 @@
                 <a:ea typeface="Arial" pitchFamily="34" charset="-122"/>
                 <a:cs typeface="Arial" pitchFamily="34" charset="-120"/>
               </a:rPr>
-              <a:t>nuScenes · CC BY-NC-SA 4.0</a:t>
+              <a:t>nuScenes scene-0553（波士頓）官方標註 · CC BY-NC-SA 4.0</a:t>
             </a:r>
             <a:endParaRPr lang="en-US" sz="700" dirty="0"/>
           </a:p>
@@ -14181,123 +14757,18 @@
       </p:sp>
       <p:sp>
         <p:nvSpPr>
-          <p:cNvPr id="6" name="Text 3"/>
-          <p:cNvSpPr txBox="1"/>
-          <p:nvPr/>
-        </p:nvSpPr>
-        <p:spPr>
-          <a:xfrm>
-            <a:off x="2610139" y="914400"/>
-            <a:ext cx="6030941" cy="2889504"/>
-          </a:xfrm>
-          <a:prstGeom prst="rect">
-            <a:avLst/>
-          </a:prstGeom>
-          <a:noFill/>
-          <a:ln/>
-        </p:spPr>
-        <p:txBody>
-          <a:bodyPr wrap="square" lIns="0" tIns="0" rIns="0" bIns="0" rtlCol="0" anchor="ctr"/>
-          <a:lstStyle/>
-          <a:p>
-            <a:pPr indent="0" marL="0">
-              <a:lnSpc>
-                <a:spcPct val="120000"/>
-              </a:lnSpc>
-              <a:buNone/>
-            </a:pPr>
-            <a:r>
-              <a:rPr lang="en-US" sz="2300" b="1" dirty="0">
-                <a:solidFill>
-                  <a:srgbClr val="0B1F3A"/>
-                </a:solidFill>
-                <a:latin typeface="Arial" pitchFamily="34" charset="0"/>
-                <a:ea typeface="Arial" pitchFamily="34" charset="-122"/>
-                <a:cs typeface="Arial" pitchFamily="34" charset="-120"/>
-              </a:rPr>
-              <a:t>Radar mới nhìn người: nhiều điểm hơn, xem chuyển động, xem lâu hơn, ghép với camera</a:t>
-            </a:r>
-            <a:endParaRPr lang="en-US" sz="2300" dirty="0"/>
-          </a:p>
-          <a:p>
-            <a:pPr indent="0" marL="0">
-              <a:lnSpc>
-                <a:spcPct val="120000"/>
-              </a:lnSpc>
-              <a:buNone/>
-            </a:pPr>
-            <a:r>
-              <a:rPr lang="en-US" sz="1400" b="1" dirty="0">
-                <a:solidFill>
-                  <a:srgbClr val="007F72"/>
-                </a:solidFill>
-                <a:latin typeface="微軟正黑體" pitchFamily="34" charset="0"/>
-                <a:ea typeface="微軟正黑體" pitchFamily="34" charset="-122"/>
-                <a:cs typeface="微軟正黑體" pitchFamily="34" charset="-120"/>
-              </a:rPr>
-              <a:t>新一代雷達怎麼看人：點更多、看動作、看久一點、跟相機一起看</a:t>
-            </a:r>
-            <a:endParaRPr lang="en-US" sz="2300" dirty="0"/>
-          </a:p>
-          <a:p>
-            <a:pPr indent="0" marL="0">
-              <a:lnSpc>
-                <a:spcPct val="120000"/>
-              </a:lnSpc>
-              <a:spcBef>
-                <a:spcPts val="1440"/>
-              </a:spcBef>
-              <a:buNone/>
-            </a:pPr>
-            <a:r>
-              <a:rPr lang="en-US" sz="1250" dirty="0">
-                <a:solidFill>
-                  <a:srgbClr val="5F7183"/>
-                </a:solidFill>
-                <a:latin typeface="Arial" pitchFamily="34" charset="0"/>
-                <a:ea typeface="Arial" pitchFamily="34" charset="-122"/>
-                <a:cs typeface="Arial" pitchFamily="34" charset="-120"/>
-              </a:rPr>
-              <a:t>① 4D: nhiều anten, góc mịn hơn, đo được độ cao. ② Micro-Doppler: tay chân đung đưa. ③ Cộng nhiều lần quét, bám theo. ④ Ghép với camera (hoặc ảnh nhiệt).</a:t>
-            </a:r>
-            <a:endParaRPr lang="en-US" sz="2300" dirty="0"/>
-          </a:p>
-          <a:p>
-            <a:pPr indent="0" marL="0">
-              <a:lnSpc>
-                <a:spcPct val="120000"/>
-              </a:lnSpc>
-              <a:buNone/>
-            </a:pPr>
-            <a:r>
-              <a:rPr lang="en-US" sz="1150" dirty="0">
-                <a:solidFill>
-                  <a:srgbClr val="5F7183"/>
-                </a:solidFill>
-                <a:latin typeface="微軟正黑體" pitchFamily="34" charset="0"/>
-                <a:ea typeface="微軟正黑體" pitchFamily="34" charset="-122"/>
-                <a:cs typeface="微軟正黑體" pitchFamily="34" charset="-120"/>
-              </a:rPr>
-              <a:t>① 4D：天線多、角度細、量得出高度。② 微都卜勒：手腳一前一後擺的速度節奏。③ 好幾次掃描疊起來，再追蹤。④ 跟相機（或熱像）合起來。</a:t>
-            </a:r>
-            <a:endParaRPr lang="en-US" sz="2300" dirty="0"/>
-          </a:p>
-        </p:txBody>
-      </p:sp>
-      <p:sp>
-        <p:nvSpPr>
-          <p:cNvPr id="7" name="Shape 4"/>
+          <p:cNvPr id="9" name="Shape 6"/>
           <p:cNvSpPr/>
           <p:nvPr/>
         </p:nvSpPr>
         <p:spPr>
           <a:xfrm>
-            <a:off x="502920" y="3913632"/>
-            <a:ext cx="8138160" cy="621792"/>
+            <a:off x="502920" y="3931920"/>
+            <a:ext cx="8138160" cy="566928"/>
           </a:xfrm>
           <a:prstGeom prst="roundRect">
             <a:avLst>
-              <a:gd name="adj" fmla="val 13235"/>
+              <a:gd name="adj" fmla="val 14516"/>
             </a:avLst>
           </a:prstGeom>
           <a:solidFill>
@@ -14313,14 +14784,14 @@
       </p:sp>
       <p:sp>
         <p:nvSpPr>
-          <p:cNvPr id="8" name="Text 5"/>
+          <p:cNvPr id="10" name="Text 7"/>
           <p:cNvSpPr txBox="1"/>
           <p:nvPr/>
         </p:nvSpPr>
         <p:spPr>
           <a:xfrm>
-            <a:off x="685800" y="3986784"/>
-            <a:ext cx="7772400" cy="493776"/>
+            <a:off x="685800" y="3995928"/>
+            <a:ext cx="7772400" cy="457200"/>
           </a:xfrm>
           <a:prstGeom prst="rect">
             <a:avLst/>
@@ -14339,7 +14810,7 @@
               <a:buNone/>
             </a:pPr>
             <a:r>
-              <a:rPr lang="en-US" sz="1250" b="1" dirty="0">
+              <a:rPr lang="en-US" sz="1200" b="1" dirty="0">
                 <a:solidFill>
                   <a:srgbClr val="7A4E00"/>
                 </a:solidFill>
@@ -14347,9 +14818,9 @@
                 <a:ea typeface="Arial" pitchFamily="34" charset="-122"/>
                 <a:cs typeface="Arial" pitchFamily="34" charset="-120"/>
               </a:rPr>
-              <a:t>Radar không phải không hợp để nhìn người — chỉ là không nhìn một mình.</a:t>
-            </a:r>
-            <a:endParaRPr lang="en-US" sz="1250" dirty="0"/>
+              <a:t>184 lần, 55 lần có điểm (3/10); cả 7 người đều bị bắt ít nhất một lần, mỗi lần chỉ 1–2 điểm.</a:t>
+            </a:r>
+            <a:endParaRPr lang="en-US" sz="1200" dirty="0"/>
           </a:p>
           <a:p>
             <a:pPr indent="0" marL="0">
@@ -14359,7 +14830,7 @@
               <a:buNone/>
             </a:pPr>
             <a:r>
-              <a:rPr lang="en-US" sz="1150" dirty="0">
+              <a:rPr lang="en-US" sz="1100" dirty="0">
                 <a:solidFill>
                   <a:srgbClr val="7A4E00"/>
                 </a:solidFill>
@@ -14367,132 +14838,9 @@
                 <a:ea typeface="微軟正黑體" pitchFamily="34" charset="-122"/>
                 <a:cs typeface="微軟正黑體" pitchFamily="34" charset="-120"/>
               </a:rPr>
-              <a:t>雷達不是不適合看人，是不能單獨看人。</a:t>
-            </a:r>
-            <a:endParaRPr lang="en-US" sz="1250" dirty="0"/>
-          </a:p>
-        </p:txBody>
-      </p:sp>
-      <p:sp>
-        <p:nvSpPr>
-          <p:cNvPr id="9" name="Shape 6"/>
-          <p:cNvSpPr/>
-          <p:nvPr/>
-        </p:nvSpPr>
-        <p:spPr>
-          <a:xfrm>
-            <a:off x="6141129" y="365760"/>
-            <a:ext cx="2499951" cy="310896"/>
-          </a:xfrm>
-          <a:prstGeom prst="roundRect">
-            <a:avLst>
-              <a:gd name="adj" fmla="val 20588"/>
-            </a:avLst>
-          </a:prstGeom>
-          <a:solidFill>
-            <a:srgbClr val="EAF6F4"/>
-          </a:solidFill>
-          <a:ln w="9525">
-            <a:solidFill>
-              <a:srgbClr val="9FD6CE"/>
-            </a:solidFill>
-            <a:prstDash val="solid"/>
-          </a:ln>
-        </p:spPr>
-      </p:sp>
-      <p:sp>
-        <p:nvSpPr>
-          <p:cNvPr id="10" name="Text 7"/>
-          <p:cNvSpPr txBox="1"/>
-          <p:nvPr/>
-        </p:nvSpPr>
-        <p:spPr>
-          <a:xfrm>
-            <a:off x="6269145" y="384048"/>
-            <a:ext cx="2317071" cy="274320"/>
-          </a:xfrm>
-          <a:prstGeom prst="rect">
-            <a:avLst/>
-          </a:prstGeom>
-          <a:noFill/>
-          <a:ln/>
-        </p:spPr>
-        <p:txBody>
-          <a:bodyPr wrap="square" lIns="0" tIns="0" rIns="0" bIns="0" rtlCol="0" anchor="ctr"/>
-          <a:lstStyle/>
-          <a:p>
-            <a:pPr indent="0" marL="0">
-              <a:lnSpc>
-                <a:spcPct val="100000"/>
-              </a:lnSpc>
-              <a:buNone/>
-            </a:pPr>
-            <a:r>
-              <a:rPr lang="en-US" sz="950" b="1" dirty="0">
-                <a:solidFill>
-                  <a:srgbClr val="007F72"/>
-                </a:solidFill>
-                <a:latin typeface="Arial" pitchFamily="34" charset="0"/>
-                <a:ea typeface="Arial" pitchFamily="34" charset="-122"/>
-                <a:cs typeface="Arial" pitchFamily="34" charset="-120"/>
-              </a:rPr>
-              <a:t>Ví dụ · </a:t>
-            </a:r>
-            <a:pPr indent="0" marL="0">
-              <a:lnSpc>
-                <a:spcPct val="100000"/>
-              </a:lnSpc>
-              <a:buNone/>
-            </a:pPr>
-            <a:r>
-              <a:rPr lang="en-US" sz="950" dirty="0">
-                <a:solidFill>
-                  <a:srgbClr val="1A2733"/>
-                </a:solidFill>
-                <a:latin typeface="Arial" pitchFamily="34" charset="0"/>
-                <a:ea typeface="Arial" pitchFamily="34" charset="-122"/>
-                <a:cs typeface="Arial" pitchFamily="34" charset="-120"/>
-              </a:rPr>
-              <a:t>nhìn dáng đi: tay chân đung đưa</a:t>
-            </a:r>
-            <a:endParaRPr lang="en-US" sz="950" dirty="0"/>
-          </a:p>
-          <a:p>
-            <a:pPr indent="0" marL="0">
-              <a:lnSpc>
-                <a:spcPct val="100000"/>
-              </a:lnSpc>
-              <a:buNone/>
-            </a:pPr>
-            <a:r>
-              <a:rPr lang="en-US" sz="900" b="1" dirty="0">
-                <a:solidFill>
-                  <a:srgbClr val="007F72"/>
-                </a:solidFill>
-                <a:latin typeface="微軟正黑體" pitchFamily="34" charset="0"/>
-                <a:ea typeface="微軟正黑體" pitchFamily="34" charset="-122"/>
-                <a:cs typeface="微軟正黑體" pitchFamily="34" charset="-120"/>
-              </a:rPr>
-              <a:t>例子・</a:t>
-            </a:r>
-            <a:pPr indent="0" marL="0">
-              <a:lnSpc>
-                <a:spcPct val="100000"/>
-              </a:lnSpc>
-              <a:buNone/>
-            </a:pPr>
-            <a:r>
-              <a:rPr lang="en-US" sz="900" dirty="0">
-                <a:solidFill>
-                  <a:srgbClr val="5F7183"/>
-                </a:solidFill>
-                <a:latin typeface="微軟正黑體" pitchFamily="34" charset="0"/>
-                <a:ea typeface="微軟正黑體" pitchFamily="34" charset="-122"/>
-                <a:cs typeface="微軟正黑體" pitchFamily="34" charset="-120"/>
-              </a:rPr>
-              <a:t>看一個人走路：手腳一前一後</a:t>
-            </a:r>
-            <a:endParaRPr lang="en-US" sz="950" dirty="0"/>
+              <a:t>184 次裡 55 次有雷達點（三成）；7 個人都被抓到過，可是每次只有一兩個點。</a:t>
+            </a:r>
+            <a:endParaRPr lang="en-US" sz="1200" dirty="0"/>
           </a:p>
         </p:txBody>
       </p:sp>
@@ -14553,7 +14901,7 @@
                 <a:ea typeface="Arial" pitchFamily="34" charset="-122"/>
                 <a:cs typeface="Arial" pitchFamily="34" charset="-120"/>
               </a:rPr>
-              <a:t>16 / 18</a:t>
+              <a:t>16 / 19</a:t>
             </a:r>
             <a:endParaRPr lang="en-US" sz="900" dirty="0"/>
           </a:p>
@@ -14656,7 +15004,7 @@
                 <a:ea typeface="Arial" pitchFamily="34" charset="-122"/>
                 <a:cs typeface="Arial" pitchFamily="34" charset="-120"/>
               </a:rPr>
-              <a:t>Nguy hiểm nhất · 最危險的那一種</a:t>
+              <a:t>Radar · 新一代雷達怎麼看人</a:t>
             </a:r>
             <a:endParaRPr lang="en-US" sz="1250" dirty="0"/>
           </a:p>
@@ -14671,11 +15019,11 @@
         <p:spPr>
           <a:xfrm>
             <a:off x="502920" y="1101852"/>
-            <a:ext cx="3977640" cy="2514600"/>
+            <a:ext cx="1796323" cy="2514600"/>
           </a:xfrm>
           <a:prstGeom prst="roundRect">
             <a:avLst>
-              <a:gd name="adj" fmla="val 4364"/>
+              <a:gd name="adj" fmla="val 6108"/>
             </a:avLst>
           </a:prstGeom>
           <a:solidFill>
@@ -14691,7 +15039,7 @@
       </p:sp>
       <p:pic>
         <p:nvPicPr>
-          <p:cNvPr id="4" name="Image 0" descr="/Users/tsengchenghsun/Class/carClass/Claude outputs/第七週(10-22)/src/img/w7_silent_cam.jpg">    </p:cNvPr>
+          <p:cNvPr id="4" name="Image 0" descr="/Users/tsengchenghsun/Class/carClass/Claude outputs/第七週(10-22)/src/img/w7_walker.jpg">    </p:cNvPr>
           <p:cNvPicPr>
             <a:picLocks noChangeAspect="1"/>
           </p:cNvPicPr>
@@ -14705,8 +15053,8 @@
         </p:blipFill>
         <p:spPr>
           <a:xfrm>
-            <a:off x="576072" y="1317860"/>
-            <a:ext cx="3831336" cy="1899704"/>
+            <a:off x="576072" y="1255602"/>
+            <a:ext cx="1650019" cy="2024220"/>
           </a:xfrm>
           <a:prstGeom prst="rect">
             <a:avLst/>
@@ -14722,7 +15070,7 @@
         <p:spPr>
           <a:xfrm>
             <a:off x="576072" y="3396996"/>
-            <a:ext cx="3831336" cy="182880"/>
+            <a:ext cx="1650019" cy="182880"/>
           </a:xfrm>
           <a:prstGeom prst="rect">
             <a:avLst/>
@@ -14746,7 +15094,7 @@
                 <a:ea typeface="Arial" pitchFamily="34" charset="-122"/>
                 <a:cs typeface="Arial" pitchFamily="34" charset="-120"/>
               </a:rPr>
-              <a:t>nuScenes scene-0553（波士頓）· CC BY-NC-SA 4.0</a:t>
+              <a:t>nuScenes · CC BY-NC-SA 4.0</a:t>
             </a:r>
             <a:endParaRPr lang="en-US" sz="700" dirty="0"/>
           </a:p>
@@ -14760,8 +15108,8 @@
         </p:nvSpPr>
         <p:spPr>
           <a:xfrm>
-            <a:off x="4791456" y="914400"/>
-            <a:ext cx="3849624" cy="2889504"/>
+            <a:off x="2610139" y="914400"/>
+            <a:ext cx="6030941" cy="2889504"/>
           </a:xfrm>
           <a:prstGeom prst="rect">
             <a:avLst/>
@@ -14788,7 +15136,7 @@
                 <a:ea typeface="Arial" pitchFamily="34" charset="-122"/>
                 <a:cs typeface="Arial" pitchFamily="34" charset="-120"/>
               </a:rPr>
-              <a:t>Nguy hiểm nhất: không thấy mà báo «không sao»</a:t>
+              <a:t>Radar mới nhìn người: nhiều điểm hơn, xem chuyển động, xem lâu hơn, ghép với camera</a:t>
             </a:r>
             <a:endParaRPr lang="en-US" sz="2300" dirty="0"/>
           </a:p>
@@ -14808,7 +15156,7 @@
                 <a:ea typeface="微軟正黑體" pitchFamily="34" charset="-122"/>
                 <a:cs typeface="微軟正黑體" pitchFamily="34" charset="-120"/>
               </a:rPr>
-              <a:t>最危險的不是看不到，是看不到卻說沒事</a:t>
+              <a:t>新一代雷達怎麼看人：點更多、看動作、看久一點、跟相機一起看</a:t>
             </a:r>
             <a:endParaRPr lang="en-US" sz="2300" dirty="0"/>
           </a:p>
@@ -14831,7 +15179,7 @@
                 <a:ea typeface="Arial" pitchFamily="34" charset="-122"/>
                 <a:cs typeface="Arial" pitchFamily="34" charset="-120"/>
               </a:rPr>
-              <a:t>Radar không nói «tôi không thấy», nó báo «không có gì». Cùng kiểu: HC-SR04 bị bùn che, GNSS đa đường, xe cứu hoả đứng yên.</a:t>
+              <a:t>① 4D: nhiều anten, góc mịn hơn, đo được độ cao. ② Micro-Doppler: tay chân đung đưa. ③ Cộng nhiều lần quét, bám theo. ④ Ghép với camera (hoặc ảnh nhiệt).</a:t>
             </a:r>
             <a:endParaRPr lang="en-US" sz="2300" dirty="0"/>
           </a:p>
@@ -14851,7 +15199,7 @@
                 <a:ea typeface="微軟正黑體" pitchFamily="34" charset="-122"/>
                 <a:cs typeface="微軟正黑體" pitchFamily="34" charset="-120"/>
               </a:rPr>
-              <a:t>雷達不會說「我看不到」，它說「沒東西」。同一種壞法：HC-SR04 被泥巴蓋住、衛星多路徑、停著的消防車。</a:t>
+              <a:t>① 4D：天線多、角度細、量得出高度。② 微都卜勒：手腳一前一後擺的速度節奏。③ 好幾次掃描疊起來，再追蹤。④ 跟相機（或熱像）合起來。</a:t>
             </a:r>
             <a:endParaRPr lang="en-US" sz="2300" dirty="0"/>
           </a:p>
@@ -14920,7 +15268,7 @@
                 <a:ea typeface="Arial" pitchFamily="34" charset="-122"/>
                 <a:cs typeface="Arial" pitchFamily="34" charset="-120"/>
               </a:rPr>
-              <a:t>Vì vậy mỗi cảm biến phải nói được «lúc này tôi không đáng tin» — đó là tiết sau: hợp nhất.</a:t>
+              <a:t>Radar không phải không hợp để nhìn người — chỉ là không nhìn một mình.</a:t>
             </a:r>
             <a:endParaRPr lang="en-US" sz="1250" dirty="0"/>
           </a:p>
@@ -14940,7 +15288,7 @@
                 <a:ea typeface="微軟正黑體" pitchFamily="34" charset="-122"/>
                 <a:cs typeface="微軟正黑體" pitchFamily="34" charset="-120"/>
               </a:rPr>
-              <a:t>所以每一顆都要能說「我現在不可靠」——這就是下一節的融合。</a:t>
+              <a:t>雷達不是不適合看人，是不能單獨看人。</a:t>
             </a:r>
             <a:endParaRPr lang="en-US" sz="1250" dirty="0"/>
           </a:p>
@@ -14954,8 +15302,8 @@
         </p:nvSpPr>
         <p:spPr>
           <a:xfrm>
-            <a:off x="5798725" y="365760"/>
-            <a:ext cx="2842355" cy="310896"/>
+            <a:off x="6141129" y="365760"/>
+            <a:ext cx="2499951" cy="310896"/>
           </a:xfrm>
           <a:prstGeom prst="roundRect">
             <a:avLst>
@@ -14981,8 +15329,8 @@
         </p:nvSpPr>
         <p:spPr>
           <a:xfrm>
-            <a:off x="5926741" y="384048"/>
-            <a:ext cx="2659475" cy="274320"/>
+            <a:off x="6269145" y="384048"/>
+            <a:ext cx="2317071" cy="274320"/>
           </a:xfrm>
           <a:prstGeom prst="rect">
             <a:avLst/>
@@ -15026,7 +15374,7 @@
                 <a:ea typeface="Arial" pitchFamily="34" charset="-122"/>
                 <a:cs typeface="Arial" pitchFamily="34" charset="-120"/>
               </a:rPr>
-              <a:t>đồng hồ xăng hỏng mà vẫn chỉ đầy bình</a:t>
+              <a:t>nhìn dáng đi: tay chân đung đưa</a:t>
             </a:r>
             <a:endParaRPr lang="en-US" sz="950" dirty="0"/>
           </a:p>
@@ -15063,7 +15411,7 @@
                 <a:ea typeface="微軟正黑體" pitchFamily="34" charset="-122"/>
                 <a:cs typeface="微軟正黑體" pitchFamily="34" charset="-120"/>
               </a:rPr>
-              <a:t>油表壞了，還一直顯示滿格</a:t>
+              <a:t>看一個人走路：手腳一前一後</a:t>
             </a:r>
             <a:endParaRPr lang="en-US" sz="950" dirty="0"/>
           </a:p>
@@ -15126,7 +15474,7 @@
                 <a:ea typeface="Arial" pitchFamily="34" charset="-122"/>
                 <a:cs typeface="Arial" pitchFamily="34" charset="-120"/>
               </a:rPr>
-              <a:t>17 / 18</a:t>
+              <a:t>17 / 19</a:t>
             </a:r>
             <a:endParaRPr lang="en-US" sz="900" dirty="0"/>
           </a:p>
@@ -15182,6 +15530,579 @@
 <file path=ppt/slides/slide18.xml><?xml version="1.0" encoding="utf-8"?>
 <p:sld xmlns:a="http://schemas.openxmlformats.org/drawingml/2006/main" xmlns:r="http://schemas.openxmlformats.org/officeDocument/2006/relationships" xmlns:p="http://schemas.openxmlformats.org/presentationml/2006/main">
   <p:cSld name="Slide 18">
+    <p:spTree>
+      <p:nvGrpSpPr>
+        <p:cNvPr id="1" name=""/>
+        <p:cNvGrpSpPr/>
+        <p:nvPr/>
+      </p:nvGrpSpPr>
+      <p:grpSpPr>
+        <a:xfrm>
+          <a:off x="0" y="0"/>
+          <a:ext cx="1" cy="1"/>
+          <a:chOff x="0" y="0"/>
+          <a:chExt cx="0" cy="0"/>
+        </a:xfrm>
+      </p:grpSpPr>
+      <p:sp>
+        <p:nvSpPr>
+          <p:cNvPr id="2" name="Text 0"/>
+          <p:cNvSpPr txBox="1"/>
+          <p:nvPr/>
+        </p:nvSpPr>
+        <p:spPr>
+          <a:xfrm>
+            <a:off x="502920" y="420624"/>
+            <a:ext cx="8138160" cy="274320"/>
+          </a:xfrm>
+          <a:prstGeom prst="rect">
+            <a:avLst/>
+          </a:prstGeom>
+          <a:noFill/>
+          <a:ln/>
+        </p:spPr>
+        <p:txBody>
+          <a:bodyPr wrap="square" lIns="0" tIns="0" rIns="0" bIns="0" rtlCol="0" anchor="ctr"/>
+          <a:lstStyle/>
+          <a:p>
+            <a:pPr indent="0" marL="0">
+              <a:buNone/>
+            </a:pPr>
+            <a:r>
+              <a:rPr lang="en-US" sz="1250" b="1" dirty="0">
+                <a:solidFill>
+                  <a:srgbClr val="007F72"/>
+                </a:solidFill>
+                <a:latin typeface="Arial" pitchFamily="34" charset="0"/>
+                <a:ea typeface="Arial" pitchFamily="34" charset="-122"/>
+                <a:cs typeface="Arial" pitchFamily="34" charset="-120"/>
+              </a:rPr>
+              <a:t>Nguy hiểm nhất · 最危險的那一種</a:t>
+            </a:r>
+            <a:endParaRPr lang="en-US" sz="1250" dirty="0"/>
+          </a:p>
+        </p:txBody>
+      </p:sp>
+      <p:sp>
+        <p:nvSpPr>
+          <p:cNvPr id="3" name="Shape 1"/>
+          <p:cNvSpPr/>
+          <p:nvPr/>
+        </p:nvSpPr>
+        <p:spPr>
+          <a:xfrm>
+            <a:off x="502920" y="1101852"/>
+            <a:ext cx="3977640" cy="2514600"/>
+          </a:xfrm>
+          <a:prstGeom prst="roundRect">
+            <a:avLst>
+              <a:gd name="adj" fmla="val 4364"/>
+            </a:avLst>
+          </a:prstGeom>
+          <a:solidFill>
+            <a:srgbClr val="FFFFFF"/>
+          </a:solidFill>
+          <a:ln w="12700">
+            <a:solidFill>
+              <a:srgbClr val="DBE3EA"/>
+            </a:solidFill>
+            <a:prstDash val="solid"/>
+          </a:ln>
+        </p:spPr>
+      </p:sp>
+      <p:pic>
+        <p:nvPicPr>
+          <p:cNvPr id="4" name="Image 0" descr="/Users/tsengchenghsun/Class/carClass/Claude outputs/第七週(10-22)/src/img/w7_silent_cam.jpg">    </p:cNvPr>
+          <p:cNvPicPr>
+            <a:picLocks noChangeAspect="1"/>
+          </p:cNvPicPr>
+          <p:nvPr/>
+        </p:nvPicPr>
+        <p:blipFill>
+          <a:blip r:embed="rId1"/>
+          <a:stretch>
+            <a:fillRect/>
+          </a:stretch>
+        </p:blipFill>
+        <p:spPr>
+          <a:xfrm>
+            <a:off x="576072" y="1317860"/>
+            <a:ext cx="3831336" cy="1899704"/>
+          </a:xfrm>
+          <a:prstGeom prst="rect">
+            <a:avLst/>
+          </a:prstGeom>
+        </p:spPr>
+      </p:pic>
+      <p:sp>
+        <p:nvSpPr>
+          <p:cNvPr id="5" name="Text 2"/>
+          <p:cNvSpPr txBox="1"/>
+          <p:nvPr/>
+        </p:nvSpPr>
+        <p:spPr>
+          <a:xfrm>
+            <a:off x="576072" y="3396996"/>
+            <a:ext cx="3831336" cy="182880"/>
+          </a:xfrm>
+          <a:prstGeom prst="rect">
+            <a:avLst/>
+          </a:prstGeom>
+          <a:noFill/>
+          <a:ln/>
+        </p:spPr>
+        <p:txBody>
+          <a:bodyPr wrap="square" lIns="0" tIns="0" rIns="0" bIns="0" rtlCol="0" anchor="ctr"/>
+          <a:lstStyle/>
+          <a:p>
+            <a:pPr algn="ctr" indent="0" marL="0">
+              <a:buNone/>
+            </a:pPr>
+            <a:r>
+              <a:rPr lang="en-US" sz="700" dirty="0">
+                <a:solidFill>
+                  <a:srgbClr val="5F7183"/>
+                </a:solidFill>
+                <a:latin typeface="Arial" pitchFamily="34" charset="0"/>
+                <a:ea typeface="Arial" pitchFamily="34" charset="-122"/>
+                <a:cs typeface="Arial" pitchFamily="34" charset="-120"/>
+              </a:rPr>
+              <a:t>nuScenes scene-0553（波士頓）· CC BY-NC-SA 4.0</a:t>
+            </a:r>
+            <a:endParaRPr lang="en-US" sz="700" dirty="0"/>
+          </a:p>
+        </p:txBody>
+      </p:sp>
+      <p:sp>
+        <p:nvSpPr>
+          <p:cNvPr id="6" name="Text 3"/>
+          <p:cNvSpPr txBox="1"/>
+          <p:nvPr/>
+        </p:nvSpPr>
+        <p:spPr>
+          <a:xfrm>
+            <a:off x="4791456" y="914400"/>
+            <a:ext cx="3849624" cy="2889504"/>
+          </a:xfrm>
+          <a:prstGeom prst="rect">
+            <a:avLst/>
+          </a:prstGeom>
+          <a:noFill/>
+          <a:ln/>
+        </p:spPr>
+        <p:txBody>
+          <a:bodyPr wrap="square" lIns="0" tIns="0" rIns="0" bIns="0" rtlCol="0" anchor="ctr"/>
+          <a:lstStyle/>
+          <a:p>
+            <a:pPr indent="0" marL="0">
+              <a:lnSpc>
+                <a:spcPct val="120000"/>
+              </a:lnSpc>
+              <a:buNone/>
+            </a:pPr>
+            <a:r>
+              <a:rPr lang="en-US" sz="2300" b="1" dirty="0">
+                <a:solidFill>
+                  <a:srgbClr val="0B1F3A"/>
+                </a:solidFill>
+                <a:latin typeface="Arial" pitchFamily="34" charset="0"/>
+                <a:ea typeface="Arial" pitchFamily="34" charset="-122"/>
+                <a:cs typeface="Arial" pitchFamily="34" charset="-120"/>
+              </a:rPr>
+              <a:t>Nguy hiểm nhất: không thấy mà báo «không sao»</a:t>
+            </a:r>
+            <a:endParaRPr lang="en-US" sz="2300" dirty="0"/>
+          </a:p>
+          <a:p>
+            <a:pPr indent="0" marL="0">
+              <a:lnSpc>
+                <a:spcPct val="120000"/>
+              </a:lnSpc>
+              <a:buNone/>
+            </a:pPr>
+            <a:r>
+              <a:rPr lang="en-US" sz="1400" b="1" dirty="0">
+                <a:solidFill>
+                  <a:srgbClr val="007F72"/>
+                </a:solidFill>
+                <a:latin typeface="微軟正黑體" pitchFamily="34" charset="0"/>
+                <a:ea typeface="微軟正黑體" pitchFamily="34" charset="-122"/>
+                <a:cs typeface="微軟正黑體" pitchFamily="34" charset="-120"/>
+              </a:rPr>
+              <a:t>最危險的不是看不到，是看不到卻說沒事</a:t>
+            </a:r>
+            <a:endParaRPr lang="en-US" sz="2300" dirty="0"/>
+          </a:p>
+          <a:p>
+            <a:pPr indent="0" marL="0">
+              <a:lnSpc>
+                <a:spcPct val="120000"/>
+              </a:lnSpc>
+              <a:spcBef>
+                <a:spcPts val="1440"/>
+              </a:spcBef>
+              <a:buNone/>
+            </a:pPr>
+            <a:r>
+              <a:rPr lang="en-US" sz="1250" dirty="0">
+                <a:solidFill>
+                  <a:srgbClr val="5F7183"/>
+                </a:solidFill>
+                <a:latin typeface="Arial" pitchFamily="34" charset="0"/>
+                <a:ea typeface="Arial" pitchFamily="34" charset="-122"/>
+                <a:cs typeface="Arial" pitchFamily="34" charset="-120"/>
+              </a:rPr>
+              <a:t>Radar không nói «tôi không thấy», nó báo «không có gì». Cùng kiểu: HC-SR04 bị bùn che, GNSS đa đường, xe cứu hoả đứng yên.</a:t>
+            </a:r>
+            <a:endParaRPr lang="en-US" sz="2300" dirty="0"/>
+          </a:p>
+          <a:p>
+            <a:pPr indent="0" marL="0">
+              <a:lnSpc>
+                <a:spcPct val="120000"/>
+              </a:lnSpc>
+              <a:buNone/>
+            </a:pPr>
+            <a:r>
+              <a:rPr lang="en-US" sz="1150" dirty="0">
+                <a:solidFill>
+                  <a:srgbClr val="5F7183"/>
+                </a:solidFill>
+                <a:latin typeface="微軟正黑體" pitchFamily="34" charset="0"/>
+                <a:ea typeface="微軟正黑體" pitchFamily="34" charset="-122"/>
+                <a:cs typeface="微軟正黑體" pitchFamily="34" charset="-120"/>
+              </a:rPr>
+              <a:t>雷達不會說「我看不到」，它說「沒東西」。同一種壞法：HC-SR04 被泥巴蓋住、衛星多路徑、停著的消防車。</a:t>
+            </a:r>
+            <a:endParaRPr lang="en-US" sz="2300" dirty="0"/>
+          </a:p>
+        </p:txBody>
+      </p:sp>
+      <p:sp>
+        <p:nvSpPr>
+          <p:cNvPr id="7" name="Shape 4"/>
+          <p:cNvSpPr/>
+          <p:nvPr/>
+        </p:nvSpPr>
+        <p:spPr>
+          <a:xfrm>
+            <a:off x="502920" y="3913632"/>
+            <a:ext cx="8138160" cy="621792"/>
+          </a:xfrm>
+          <a:prstGeom prst="roundRect">
+            <a:avLst>
+              <a:gd name="adj" fmla="val 13235"/>
+            </a:avLst>
+          </a:prstGeom>
+          <a:solidFill>
+            <a:srgbClr val="FFF6E3"/>
+          </a:solidFill>
+          <a:ln w="12700">
+            <a:solidFill>
+              <a:srgbClr val="FFB020"/>
+            </a:solidFill>
+            <a:prstDash val="solid"/>
+          </a:ln>
+        </p:spPr>
+      </p:sp>
+      <p:sp>
+        <p:nvSpPr>
+          <p:cNvPr id="8" name="Text 5"/>
+          <p:cNvSpPr txBox="1"/>
+          <p:nvPr/>
+        </p:nvSpPr>
+        <p:spPr>
+          <a:xfrm>
+            <a:off x="685800" y="3986784"/>
+            <a:ext cx="7772400" cy="493776"/>
+          </a:xfrm>
+          <a:prstGeom prst="rect">
+            <a:avLst/>
+          </a:prstGeom>
+          <a:noFill/>
+          <a:ln/>
+        </p:spPr>
+        <p:txBody>
+          <a:bodyPr wrap="square" lIns="0" tIns="0" rIns="0" bIns="0" rtlCol="0" anchor="t"/>
+          <a:lstStyle/>
+          <a:p>
+            <a:pPr indent="0" marL="0">
+              <a:lnSpc>
+                <a:spcPct val="116000"/>
+              </a:lnSpc>
+              <a:buNone/>
+            </a:pPr>
+            <a:r>
+              <a:rPr lang="en-US" sz="1250" b="1" dirty="0">
+                <a:solidFill>
+                  <a:srgbClr val="7A4E00"/>
+                </a:solidFill>
+                <a:latin typeface="Arial" pitchFamily="34" charset="0"/>
+                <a:ea typeface="Arial" pitchFamily="34" charset="-122"/>
+                <a:cs typeface="Arial" pitchFamily="34" charset="-120"/>
+              </a:rPr>
+              <a:t>Vì vậy mỗi cảm biến phải nói được «lúc này tôi không đáng tin» — đó là tiết sau: hợp nhất.</a:t>
+            </a:r>
+            <a:endParaRPr lang="en-US" sz="1250" dirty="0"/>
+          </a:p>
+          <a:p>
+            <a:pPr indent="0" marL="0">
+              <a:lnSpc>
+                <a:spcPct val="116000"/>
+              </a:lnSpc>
+              <a:buNone/>
+            </a:pPr>
+            <a:r>
+              <a:rPr lang="en-US" sz="1150" dirty="0">
+                <a:solidFill>
+                  <a:srgbClr val="7A4E00"/>
+                </a:solidFill>
+                <a:latin typeface="微軟正黑體" pitchFamily="34" charset="0"/>
+                <a:ea typeface="微軟正黑體" pitchFamily="34" charset="-122"/>
+                <a:cs typeface="微軟正黑體" pitchFamily="34" charset="-120"/>
+              </a:rPr>
+              <a:t>所以每一顆都要能說「我現在不可靠」——這就是下一節的融合。</a:t>
+            </a:r>
+            <a:endParaRPr lang="en-US" sz="1250" dirty="0"/>
+          </a:p>
+        </p:txBody>
+      </p:sp>
+      <p:sp>
+        <p:nvSpPr>
+          <p:cNvPr id="9" name="Shape 6"/>
+          <p:cNvSpPr/>
+          <p:nvPr/>
+        </p:nvSpPr>
+        <p:spPr>
+          <a:xfrm>
+            <a:off x="5798725" y="365760"/>
+            <a:ext cx="2842355" cy="310896"/>
+          </a:xfrm>
+          <a:prstGeom prst="roundRect">
+            <a:avLst>
+              <a:gd name="adj" fmla="val 20588"/>
+            </a:avLst>
+          </a:prstGeom>
+          <a:solidFill>
+            <a:srgbClr val="EAF6F4"/>
+          </a:solidFill>
+          <a:ln w="9525">
+            <a:solidFill>
+              <a:srgbClr val="9FD6CE"/>
+            </a:solidFill>
+            <a:prstDash val="solid"/>
+          </a:ln>
+        </p:spPr>
+      </p:sp>
+      <p:sp>
+        <p:nvSpPr>
+          <p:cNvPr id="10" name="Text 7"/>
+          <p:cNvSpPr txBox="1"/>
+          <p:nvPr/>
+        </p:nvSpPr>
+        <p:spPr>
+          <a:xfrm>
+            <a:off x="5926741" y="384048"/>
+            <a:ext cx="2659475" cy="274320"/>
+          </a:xfrm>
+          <a:prstGeom prst="rect">
+            <a:avLst/>
+          </a:prstGeom>
+          <a:noFill/>
+          <a:ln/>
+        </p:spPr>
+        <p:txBody>
+          <a:bodyPr wrap="square" lIns="0" tIns="0" rIns="0" bIns="0" rtlCol="0" anchor="ctr"/>
+          <a:lstStyle/>
+          <a:p>
+            <a:pPr indent="0" marL="0">
+              <a:lnSpc>
+                <a:spcPct val="100000"/>
+              </a:lnSpc>
+              <a:buNone/>
+            </a:pPr>
+            <a:r>
+              <a:rPr lang="en-US" sz="950" b="1" dirty="0">
+                <a:solidFill>
+                  <a:srgbClr val="007F72"/>
+                </a:solidFill>
+                <a:latin typeface="Arial" pitchFamily="34" charset="0"/>
+                <a:ea typeface="Arial" pitchFamily="34" charset="-122"/>
+                <a:cs typeface="Arial" pitchFamily="34" charset="-120"/>
+              </a:rPr>
+              <a:t>Ví dụ · </a:t>
+            </a:r>
+            <a:pPr indent="0" marL="0">
+              <a:lnSpc>
+                <a:spcPct val="100000"/>
+              </a:lnSpc>
+              <a:buNone/>
+            </a:pPr>
+            <a:r>
+              <a:rPr lang="en-US" sz="950" dirty="0">
+                <a:solidFill>
+                  <a:srgbClr val="1A2733"/>
+                </a:solidFill>
+                <a:latin typeface="Arial" pitchFamily="34" charset="0"/>
+                <a:ea typeface="Arial" pitchFamily="34" charset="-122"/>
+                <a:cs typeface="Arial" pitchFamily="34" charset="-120"/>
+              </a:rPr>
+              <a:t>đồng hồ xăng hỏng mà vẫn chỉ đầy bình</a:t>
+            </a:r>
+            <a:endParaRPr lang="en-US" sz="950" dirty="0"/>
+          </a:p>
+          <a:p>
+            <a:pPr indent="0" marL="0">
+              <a:lnSpc>
+                <a:spcPct val="100000"/>
+              </a:lnSpc>
+              <a:buNone/>
+            </a:pPr>
+            <a:r>
+              <a:rPr lang="en-US" sz="900" b="1" dirty="0">
+                <a:solidFill>
+                  <a:srgbClr val="007F72"/>
+                </a:solidFill>
+                <a:latin typeface="微軟正黑體" pitchFamily="34" charset="0"/>
+                <a:ea typeface="微軟正黑體" pitchFamily="34" charset="-122"/>
+                <a:cs typeface="微軟正黑體" pitchFamily="34" charset="-120"/>
+              </a:rPr>
+              <a:t>例子・</a:t>
+            </a:r>
+            <a:pPr indent="0" marL="0">
+              <a:lnSpc>
+                <a:spcPct val="100000"/>
+              </a:lnSpc>
+              <a:buNone/>
+            </a:pPr>
+            <a:r>
+              <a:rPr lang="en-US" sz="900" dirty="0">
+                <a:solidFill>
+                  <a:srgbClr val="5F7183"/>
+                </a:solidFill>
+                <a:latin typeface="微軟正黑體" pitchFamily="34" charset="0"/>
+                <a:ea typeface="微軟正黑體" pitchFamily="34" charset="-122"/>
+                <a:cs typeface="微軟正黑體" pitchFamily="34" charset="-120"/>
+              </a:rPr>
+              <a:t>油表壞了，還一直顯示滿格</a:t>
+            </a:r>
+            <a:endParaRPr lang="en-US" sz="950" dirty="0"/>
+          </a:p>
+        </p:txBody>
+      </p:sp>
+      <p:pic>
+        <p:nvPicPr>
+          <p:cNvPr id="12" name="Image 1" descr="/Users/tsengchenghsun/Class/carClass/Claude outputs/第七週(10-22)/src/logo.png">    </p:cNvPr>
+          <p:cNvPicPr>
+            <a:picLocks noChangeAspect="1"/>
+          </p:cNvPicPr>
+          <p:nvPr/>
+        </p:nvPicPr>
+        <p:blipFill>
+          <a:blip r:embed="rId2"/>
+          <a:stretch>
+            <a:fillRect/>
+          </a:stretch>
+        </p:blipFill>
+        <p:spPr>
+          <a:xfrm>
+            <a:off x="7882128" y="109728"/>
+            <a:ext cx="1097280" cy="242439"/>
+          </a:xfrm>
+          <a:prstGeom prst="rect">
+            <a:avLst/>
+          </a:prstGeom>
+        </p:spPr>
+      </p:pic>
+      <p:sp>
+        <p:nvSpPr>
+          <p:cNvPr id="13" name="Text 8"/>
+          <p:cNvSpPr txBox="1"/>
+          <p:nvPr/>
+        </p:nvSpPr>
+        <p:spPr>
+          <a:xfrm>
+            <a:off x="109728" y="128016"/>
+            <a:ext cx="822960" cy="256032"/>
+          </a:xfrm>
+          <a:prstGeom prst="rect">
+            <a:avLst/>
+          </a:prstGeom>
+          <a:noFill/>
+          <a:ln/>
+        </p:spPr>
+        <p:txBody>
+          <a:bodyPr wrap="square" lIns="0" tIns="0" rIns="0" bIns="0" rtlCol="0" anchor="ctr"/>
+          <a:lstStyle/>
+          <a:p>
+            <a:pPr indent="0" marL="0">
+              <a:buNone/>
+            </a:pPr>
+            <a:r>
+              <a:rPr lang="en-US" sz="900" dirty="0">
+                <a:solidFill>
+                  <a:srgbClr val="5F7183"/>
+                </a:solidFill>
+                <a:latin typeface="Arial" pitchFamily="34" charset="0"/>
+                <a:ea typeface="Arial" pitchFamily="34" charset="-122"/>
+                <a:cs typeface="Arial" pitchFamily="34" charset="-120"/>
+              </a:rPr>
+              <a:t>18 / 19</a:t>
+            </a:r>
+            <a:endParaRPr lang="en-US" sz="900" dirty="0"/>
+          </a:p>
+        </p:txBody>
+      </p:sp>
+      <p:sp>
+        <p:nvSpPr>
+          <p:cNvPr id="14" name="Text 9"/>
+          <p:cNvSpPr txBox="1"/>
+          <p:nvPr/>
+        </p:nvSpPr>
+        <p:spPr>
+          <a:xfrm>
+            <a:off x="960120" y="128016"/>
+            <a:ext cx="2011680" cy="256032"/>
+          </a:xfrm>
+          <a:prstGeom prst="rect">
+            <a:avLst/>
+          </a:prstGeom>
+          <a:noFill/>
+          <a:ln/>
+        </p:spPr>
+        <p:txBody>
+          <a:bodyPr wrap="square" lIns="0" tIns="0" rIns="0" bIns="0" rtlCol="0" anchor="ctr"/>
+          <a:lstStyle/>
+          <a:p>
+            <a:pPr indent="0" marL="0">
+              <a:buNone/>
+            </a:pPr>
+            <a:r>
+              <a:rPr lang="en-US" sz="900" dirty="0">
+                <a:solidFill>
+                  <a:srgbClr val="5F7183"/>
+                </a:solidFill>
+                <a:latin typeface="Arial" pitchFamily="34" charset="0"/>
+                <a:ea typeface="Arial" pitchFamily="34" charset="-122"/>
+                <a:cs typeface="Arial" pitchFamily="34" charset="-120"/>
+              </a:rPr>
+              <a:t>Tiết 1 · 第 1 節</a:t>
+            </a:r>
+            <a:endParaRPr lang="en-US" sz="900" dirty="0"/>
+          </a:p>
+        </p:txBody>
+      </p:sp>
+    </p:spTree>
+  </p:cSld>
+  <p:clrMapOvr>
+    <a:masterClrMapping/>
+  </p:clrMapOvr>
+</p:sld>
+</file>
+
+<file path=ppt/slides/slide19.xml><?xml version="1.0" encoding="utf-8"?>
+<p:sld xmlns:a="http://schemas.openxmlformats.org/drawingml/2006/main" xmlns:r="http://schemas.openxmlformats.org/officeDocument/2006/relationships" xmlns:p="http://schemas.openxmlformats.org/presentationml/2006/main">
+  <p:cSld name="Slide 19">
     <p:bg>
       <p:bgPr>
         <a:solidFill>
@@ -15630,7 +16551,7 @@
                 <a:ea typeface="Arial" pitchFamily="34" charset="-122"/>
                 <a:cs typeface="Arial" pitchFamily="34" charset="-120"/>
               </a:rPr>
-              <a:t>18 / 18</a:t>
+              <a:t>19 / 19</a:t>
             </a:r>
             <a:endParaRPr lang="en-US" sz="900" dirty="0"/>
           </a:p>
@@ -16866,7 +17787,7 @@
                 <a:ea typeface="Arial" pitchFamily="34" charset="-122"/>
                 <a:cs typeface="Arial" pitchFamily="34" charset="-120"/>
               </a:rPr>
-              <a:t>2 / 18</a:t>
+              <a:t>2 / 19</a:t>
             </a:r>
             <a:endParaRPr lang="en-US" sz="900" dirty="0"/>
           </a:p>
@@ -17436,7 +18357,7 @@
                 <a:ea typeface="Arial" pitchFamily="34" charset="-122"/>
                 <a:cs typeface="Arial" pitchFamily="34" charset="-120"/>
               </a:rPr>
-              <a:t>3 / 18</a:t>
+              <a:t>3 / 19</a:t>
             </a:r>
             <a:endParaRPr lang="en-US" sz="900" dirty="0"/>
           </a:p>
@@ -18536,7 +19457,7 @@
                 <a:ea typeface="Arial" pitchFamily="34" charset="-122"/>
                 <a:cs typeface="Arial" pitchFamily="34" charset="-120"/>
               </a:rPr>
-              <a:t>4 / 18</a:t>
+              <a:t>4 / 19</a:t>
             </a:r>
             <a:endParaRPr lang="en-US" sz="900" dirty="0"/>
           </a:p>
@@ -22959,7 +23880,7 @@
                 <a:ea typeface="Arial" pitchFamily="34" charset="-122"/>
                 <a:cs typeface="Arial" pitchFamily="34" charset="-120"/>
               </a:rPr>
-              <a:t>5 / 18</a:t>
+              <a:t>5 / 19</a:t>
             </a:r>
             <a:endParaRPr lang="en-US" sz="790" dirty="0"/>
           </a:p>
@@ -23850,7 +24771,7 @@
                 <a:ea typeface="Arial" pitchFamily="34" charset="-122"/>
                 <a:cs typeface="Arial" pitchFamily="34" charset="-120"/>
               </a:rPr>
-              <a:t>6 / 18</a:t>
+              <a:t>6 / 19</a:t>
             </a:r>
             <a:endParaRPr lang="en-US" sz="900" dirty="0"/>
           </a:p>
@@ -24515,7 +25436,7 @@
                 <a:ea typeface="Arial" pitchFamily="34" charset="-122"/>
                 <a:cs typeface="Arial" pitchFamily="34" charset="-120"/>
               </a:rPr>
-              <a:t>7 / 18</a:t>
+              <a:t>7 / 19</a:t>
             </a:r>
             <a:endParaRPr lang="en-US" sz="900" dirty="0"/>
           </a:p>
@@ -25180,7 +26101,7 @@
                 <a:ea typeface="Arial" pitchFamily="34" charset="-122"/>
                 <a:cs typeface="Arial" pitchFamily="34" charset="-120"/>
               </a:rPr>
-              <a:t>8 / 18</a:t>
+              <a:t>8 / 19</a:t>
             </a:r>
             <a:endParaRPr lang="en-US" sz="900" dirty="0"/>
           </a:p>
@@ -25845,7 +26766,7 @@
                 <a:ea typeface="Arial" pitchFamily="34" charset="-122"/>
                 <a:cs typeface="Arial" pitchFamily="34" charset="-120"/>
               </a:rPr>
-              <a:t>9 / 18</a:t>
+              <a:t>9 / 19</a:t>
             </a:r>
             <a:endParaRPr lang="en-US" sz="900" dirty="0"/>
           </a:p>

--- a/第七週(10-22)/第七週_第1節_簡報.pptx
+++ b/第七週(10-22)/第七週_第1節_簡報.pptx
@@ -159,8 +159,8 @@
         </p:nvSpPr>
         <p:spPr>
           <a:xfrm>
-            <a:off x="540000" y="540000"/>
-            <a:ext cx="6480000" cy="3645000"/>
+            <a:off x="1620000" y="380000"/>
+            <a:ext cx="4320000" cy="2430000"/>
           </a:xfrm>
           <a:prstGeom prst="rect">
             <a:avLst/>
@@ -210,8 +210,8 @@
         </p:nvSpPr>
         <p:spPr>
           <a:xfrm>
-            <a:off x="540000" y="4440000"/>
-            <a:ext cx="6480000" cy="5500000"/>
+            <a:off x="540000" y="2990000"/>
+            <a:ext cx="6480000" cy="7060000"/>
           </a:xfrm>
           <a:prstGeom prst="rect">
             <a:avLst/>
@@ -415,8 +415,8 @@
         </p:nvSpPr>
         <p:spPr>
           <a:xfrm>
-            <a:off x="540000" y="540000"/>
-            <a:ext cx="6480000" cy="3645000"/>
+            <a:off x="1620000" y="380000"/>
+            <a:ext cx="4320000" cy="2430000"/>
           </a:xfrm>
         </p:spPr>
       </p:sp>
@@ -432,8 +432,8 @@
         </p:nvSpPr>
         <p:spPr>
           <a:xfrm>
-            <a:off x="540000" y="4440000"/>
-            <a:ext cx="6480000" cy="5500000"/>
+            <a:off x="540000" y="2990000"/>
+            <a:ext cx="6480000" cy="7060000"/>
           </a:xfrm>
         </p:spPr>
         <p:txBody>
@@ -445,11 +445,11 @@
                 <a:spcPts val="0"/>
               </a:spcBef>
               <a:spcAft>
-                <a:spcPts val="200"/>
+                <a:spcPts val="267"/>
               </a:spcAft>
             </a:pPr>
             <a:r>
-              <a:rPr sz="1200" b="1" lang="zh-TW" dirty="0">
+              <a:rPr sz="1600" b="1" lang="zh-TW" dirty="0">
                 <a:solidFill>
                   <a:srgbClr val="000000"/>
                 </a:solidFill>
@@ -460,7 +460,7 @@
               <a:t>這一節的目的：</a:t>
             </a:r>
             <a:r>
-              <a:rPr sz="1200" lang="zh-TW" dirty="0">
+              <a:rPr sz="1600" lang="zh-TW" dirty="0">
                 <a:solidFill>
                   <a:srgbClr val="000000"/>
                 </a:solidFill>
@@ -478,11 +478,11 @@
                 <a:spcPts val="0"/>
               </a:spcBef>
               <a:spcAft>
-                <a:spcPts val="200"/>
+                <a:spcPts val="267"/>
               </a:spcAft>
             </a:pPr>
             <a:r>
-              <a:rPr sz="1200" lang="zh-TW" dirty="0">
+              <a:rPr sz="1600" lang="zh-TW" dirty="0">
                 <a:solidFill>
                   <a:srgbClr val="000000"/>
                 </a:solidFill>
@@ -500,11 +500,11 @@
                 <a:spcPts val="0"/>
               </a:spcBef>
               <a:spcAft>
-                <a:spcPts val="200"/>
+                <a:spcPts val="267"/>
               </a:spcAft>
             </a:pPr>
             <a:r>
-              <a:rPr sz="1200" lang="zh-TW" dirty="0">
+              <a:rPr sz="1600" lang="zh-TW" dirty="0">
                 <a:solidFill>
                   <a:srgbClr val="000000"/>
                 </a:solidFill>
@@ -522,11 +522,11 @@
                 <a:spcPts val="0"/>
               </a:spcBef>
               <a:spcAft>
-                <a:spcPts val="200"/>
+                <a:spcPts val="267"/>
               </a:spcAft>
             </a:pPr>
             <a:r>
-              <a:rPr sz="1200" lang="zh-TW" dirty="0">
+              <a:rPr sz="1600" lang="zh-TW" dirty="0">
                 <a:solidFill>
                   <a:srgbClr val="000000"/>
                 </a:solidFill>
@@ -537,7 +537,7 @@
               <a:t>上週最後的結論是：</a:t>
             </a:r>
             <a:r>
-              <a:rPr sz="1200" b="1" lang="zh-TW" dirty="0">
+              <a:rPr sz="1600" b="1" lang="zh-TW" dirty="0">
                 <a:solidFill>
                   <a:srgbClr val="000000"/>
                 </a:solidFill>
@@ -548,7 +548,7 @@
               <a:t>沒有一種感測器五個情境都贏。</a:t>
             </a:r>
             <a:r>
-              <a:rPr sz="1200" lang="zh-TW" dirty="0">
+              <a:rPr sz="1600" lang="zh-TW" dirty="0">
                 <a:solidFill>
                   <a:srgbClr val="000000"/>
                 </a:solidFill>
@@ -566,11 +566,11 @@
                 <a:spcPts val="0"/>
               </a:spcBef>
               <a:spcAft>
-                <a:spcPts val="200"/>
+                <a:spcPts val="267"/>
               </a:spcAft>
             </a:pPr>
             <a:r>
-              <a:rPr sz="1200" lang="zh-TW" dirty="0">
+              <a:rPr sz="1600" lang="zh-TW" dirty="0">
                 <a:solidFill>
                   <a:srgbClr val="000000"/>
                 </a:solidFill>
@@ -581,7 +581,7 @@
               <a:t>這週要再往前一步。第一節問：</a:t>
             </a:r>
             <a:r>
-              <a:rPr sz="1200" b="1" lang="zh-TW" dirty="0">
+              <a:rPr sz="1600" b="1" lang="zh-TW" dirty="0">
                 <a:solidFill>
                   <a:srgbClr val="000000"/>
                 </a:solidFill>
@@ -592,7 +592,7 @@
               <a:t>它們什麼時候會壞、怎麼壞、壞了會不會說。</a:t>
             </a:r>
             <a:r>
-              <a:rPr sz="1200" lang="zh-TW" dirty="0">
+              <a:rPr sz="1600" lang="zh-TW" dirty="0">
                 <a:solidFill>
                   <a:srgbClr val="000000"/>
                 </a:solidFill>
@@ -603,7 +603,7 @@
               <a:t>第二節問：既然每一顆都會壞，</a:t>
             </a:r>
             <a:r>
-              <a:rPr sz="1200" b="1" lang="zh-TW" dirty="0">
+              <a:rPr sz="1600" b="1" lang="zh-TW" dirty="0">
                 <a:solidFill>
                   <a:srgbClr val="000000"/>
                 </a:solidFill>
@@ -614,7 +614,7 @@
               <a:t>要怎麼把它們合起來</a:t>
             </a:r>
             <a:r>
-              <a:rPr sz="1200" lang="zh-TW" dirty="0">
+              <a:rPr sz="1600" lang="zh-TW" dirty="0">
                 <a:solidFill>
                   <a:srgbClr val="000000"/>
                 </a:solidFill>
@@ -632,11 +632,11 @@
                 <a:spcPts val="0"/>
               </a:spcBef>
               <a:spcAft>
-                <a:spcPts val="200"/>
+                <a:spcPts val="267"/>
               </a:spcAft>
             </a:pPr>
             <a:r>
-              <a:rPr sz="1200" lang="zh-TW" dirty="0">
+              <a:rPr sz="1600" lang="zh-TW" dirty="0">
                 <a:solidFill>
                   <a:srgbClr val="000000"/>
                 </a:solidFill>
@@ -647,7 +647,7 @@
               <a:t>今天的資料不是我畫的，是一家自駕公司公開的真實資料，叫 nuScenes，在新加坡和美國波士頓錄的。它開放給非商業使用，投影片上每一張都註明了出處和授權。裡面的雷達，就是上週各位讀過規格表的那一顆：</a:t>
             </a:r>
             <a:r>
-              <a:rPr sz="1200" b="1" lang="zh-TW" dirty="0">
+              <a:rPr sz="1600" b="1" lang="zh-TW" dirty="0">
                 <a:solidFill>
                   <a:srgbClr val="000000"/>
                 </a:solidFill>
@@ -658,7 +658,7 @@
               <a:t>Continental ARS 408-21</a:t>
             </a:r>
             <a:r>
-              <a:rPr sz="1200" lang="zh-TW" dirty="0">
+              <a:rPr sz="1600" lang="zh-TW" dirty="0">
                 <a:solidFill>
                   <a:srgbClr val="000000"/>
                 </a:solidFill>
@@ -745,8 +745,8 @@
         </p:nvSpPr>
         <p:spPr>
           <a:xfrm>
-            <a:off x="540000" y="540000"/>
-            <a:ext cx="6480000" cy="3645000"/>
+            <a:off x="1620000" y="380000"/>
+            <a:ext cx="4320000" cy="2430000"/>
           </a:xfrm>
         </p:spPr>
       </p:sp>
@@ -762,8 +762,8 @@
         </p:nvSpPr>
         <p:spPr>
           <a:xfrm>
-            <a:off x="540000" y="4440000"/>
-            <a:ext cx="6480000" cy="5500000"/>
+            <a:off x="540000" y="2990000"/>
+            <a:ext cx="6480000" cy="7060000"/>
           </a:xfrm>
         </p:spPr>
         <p:txBody>
@@ -775,11 +775,11 @@
                 <a:spcPts val="0"/>
               </a:spcBef>
               <a:spcAft>
-                <a:spcPts val="200"/>
+                <a:spcPts val="225"/>
               </a:spcAft>
             </a:pPr>
             <a:r>
-              <a:rPr sz="1200" b="1" lang="zh-TW" dirty="0">
+              <a:rPr sz="1350" b="1" lang="zh-TW" dirty="0">
                 <a:solidFill>
                   <a:srgbClr val="000000"/>
                 </a:solidFill>
@@ -790,7 +790,7 @@
               <a:t>這一張的目的：</a:t>
             </a:r>
             <a:r>
-              <a:rPr sz="1200" lang="zh-TW" dirty="0">
+              <a:rPr sz="1350" lang="zh-TW" dirty="0">
                 <a:solidFill>
                   <a:srgbClr val="000000"/>
                 </a:solidFill>
@@ -808,11 +808,11 @@
                 <a:spcPts val="0"/>
               </a:spcBef>
               <a:spcAft>
-                <a:spcPts val="200"/>
+                <a:spcPts val="225"/>
               </a:spcAft>
             </a:pPr>
             <a:r>
-              <a:rPr sz="1200" lang="zh-TW" dirty="0">
+              <a:rPr sz="1350" lang="zh-TW" dirty="0">
                 <a:solidFill>
                   <a:srgbClr val="000000"/>
                 </a:solidFill>
@@ -830,11 +830,11 @@
                 <a:spcPts val="0"/>
               </a:spcBef>
               <a:spcAft>
-                <a:spcPts val="200"/>
+                <a:spcPts val="225"/>
               </a:spcAft>
             </a:pPr>
             <a:r>
-              <a:rPr sz="1200" lang="zh-TW" dirty="0">
+              <a:rPr sz="1350" lang="zh-TW" dirty="0">
                 <a:solidFill>
                   <a:srgbClr val="000000"/>
                 </a:solidFill>
@@ -845,7 +845,7 @@
               <a:t>這四台車，都是 nuScenes 裡完整出現在前方相機畫面裡的車。我把每一台裁出來，放大到看起來差不多大，然後只畫</a:t>
             </a:r>
             <a:r>
-              <a:rPr sz="1200" b="1" lang="zh-TW" dirty="0">
+              <a:rPr sz="1350" b="1" lang="zh-TW" dirty="0">
                 <a:solidFill>
                   <a:srgbClr val="000000"/>
                 </a:solidFill>
@@ -856,7 +856,7 @@
               <a:t>打在車身上的光達點</a:t>
             </a:r>
             <a:r>
-              <a:rPr sz="1200" lang="zh-TW" dirty="0">
+              <a:rPr sz="1350" lang="zh-TW" dirty="0">
                 <a:solidFill>
                   <a:srgbClr val="000000"/>
                 </a:solidFill>
@@ -874,11 +874,11 @@
                 <a:spcPts val="0"/>
               </a:spcBef>
               <a:spcAft>
-                <a:spcPts val="200"/>
+                <a:spcPts val="225"/>
               </a:spcAft>
             </a:pPr>
             <a:r>
-              <a:rPr sz="1200" b="1" lang="zh-TW" dirty="0">
+              <a:rPr sz="1350" b="1" lang="zh-TW" dirty="0">
                 <a:solidFill>
                   <a:srgbClr val="000000"/>
                 </a:solidFill>
@@ -889,7 +889,7 @@
               <a:t>最左邊，十公尺</a:t>
             </a:r>
             <a:r>
-              <a:rPr sz="1200" lang="zh-TW" dirty="0">
+              <a:rPr sz="1350" lang="zh-TW" dirty="0">
                 <a:solidFill>
                   <a:srgbClr val="000000"/>
                 </a:solidFill>
@@ -907,11 +907,11 @@
                 <a:spcPts val="0"/>
               </a:spcBef>
               <a:spcAft>
-                <a:spcPts val="200"/>
+                <a:spcPts val="225"/>
               </a:spcAft>
             </a:pPr>
             <a:r>
-              <a:rPr sz="1200" b="1" lang="zh-TW" dirty="0">
+              <a:rPr sz="1350" b="1" lang="zh-TW" dirty="0">
                 <a:solidFill>
                   <a:srgbClr val="000000"/>
                 </a:solidFill>
@@ -922,7 +922,7 @@
               <a:t>十七公尺</a:t>
             </a:r>
             <a:r>
-              <a:rPr sz="1200" lang="zh-TW" dirty="0">
+              <a:rPr sz="1350" lang="zh-TW" dirty="0">
                 <a:solidFill>
                   <a:srgbClr val="000000"/>
                 </a:solidFill>
@@ -940,11 +940,11 @@
                 <a:spcPts val="0"/>
               </a:spcBef>
               <a:spcAft>
-                <a:spcPts val="200"/>
+                <a:spcPts val="225"/>
               </a:spcAft>
             </a:pPr>
             <a:r>
-              <a:rPr sz="1200" b="1" lang="zh-TW" dirty="0">
+              <a:rPr sz="1350" b="1" lang="zh-TW" dirty="0">
                 <a:solidFill>
                   <a:srgbClr val="000000"/>
                 </a:solidFill>
@@ -955,7 +955,7 @@
               <a:t>二十四公尺</a:t>
             </a:r>
             <a:r>
-              <a:rPr sz="1200" lang="zh-TW" dirty="0">
+              <a:rPr sz="1350" lang="zh-TW" dirty="0">
                 <a:solidFill>
                   <a:srgbClr val="000000"/>
                 </a:solidFill>
@@ -973,11 +973,11 @@
                 <a:spcPts val="0"/>
               </a:spcBef>
               <a:spcAft>
-                <a:spcPts val="200"/>
+                <a:spcPts val="225"/>
               </a:spcAft>
             </a:pPr>
             <a:r>
-              <a:rPr sz="1200" b="1" lang="zh-TW" dirty="0">
+              <a:rPr sz="1350" b="1" lang="zh-TW" dirty="0">
                 <a:solidFill>
                   <a:srgbClr val="000000"/>
                 </a:solidFill>
@@ -988,7 +988,7 @@
               <a:t>最右邊，四十一公尺</a:t>
             </a:r>
             <a:r>
-              <a:rPr sz="1200" lang="zh-TW" dirty="0">
+              <a:rPr sz="1350" lang="zh-TW" dirty="0">
                 <a:solidFill>
                   <a:srgbClr val="000000"/>
                 </a:solidFill>
@@ -999,7 +999,7 @@
               <a:t>，</a:t>
             </a:r>
             <a:r>
-              <a:rPr sz="1200" b="1" lang="zh-TW" dirty="0">
+              <a:rPr sz="1350" b="1" lang="zh-TW" dirty="0">
                 <a:solidFill>
                   <a:srgbClr val="000000"/>
                 </a:solidFill>
@@ -1010,7 +1010,7 @@
               <a:t>只剩兩個點</a:t>
             </a:r>
             <a:r>
-              <a:rPr sz="1200" lang="zh-TW" dirty="0">
+              <a:rPr sz="1350" lang="zh-TW" dirty="0">
                 <a:solidFill>
                   <a:srgbClr val="000000"/>
                 </a:solidFill>
@@ -1028,11 +1028,11 @@
                 <a:spcPts val="0"/>
               </a:spcBef>
               <a:spcAft>
-                <a:spcPts val="200"/>
+                <a:spcPts val="225"/>
               </a:spcAft>
             </a:pPr>
             <a:r>
-              <a:rPr sz="1200" lang="zh-TW" dirty="0">
+              <a:rPr sz="1350" lang="zh-TW" dirty="0">
                 <a:solidFill>
                   <a:srgbClr val="000000"/>
                 </a:solidFill>
@@ -1050,11 +1050,11 @@
                 <a:spcPts val="0"/>
               </a:spcBef>
               <a:spcAft>
-                <a:spcPts val="200"/>
+                <a:spcPts val="225"/>
               </a:spcAft>
             </a:pPr>
             <a:r>
-              <a:rPr sz="1200" lang="zh-TW" dirty="0">
+              <a:rPr sz="1350" lang="zh-TW" dirty="0">
                 <a:solidFill>
                   <a:srgbClr val="000000"/>
                 </a:solidFill>
@@ -1141,8 +1141,8 @@
         </p:nvSpPr>
         <p:spPr>
           <a:xfrm>
-            <a:off x="540000" y="540000"/>
-            <a:ext cx="6480000" cy="3645000"/>
+            <a:off x="1620000" y="380000"/>
+            <a:ext cx="4320000" cy="2430000"/>
           </a:xfrm>
         </p:spPr>
       </p:sp>
@@ -1158,8 +1158,8 @@
         </p:nvSpPr>
         <p:spPr>
           <a:xfrm>
-            <a:off x="540000" y="4440000"/>
-            <a:ext cx="6480000" cy="5500000"/>
+            <a:off x="540000" y="2990000"/>
+            <a:ext cx="6480000" cy="7060000"/>
           </a:xfrm>
         </p:spPr>
         <p:txBody>
@@ -1171,11 +1171,11 @@
                 <a:spcPts val="0"/>
               </a:spcBef>
               <a:spcAft>
-                <a:spcPts val="200"/>
+                <a:spcPts val="233"/>
               </a:spcAft>
             </a:pPr>
             <a:r>
-              <a:rPr sz="1200" b="1" lang="zh-TW" dirty="0">
+              <a:rPr sz="1400" b="1" lang="zh-TW" dirty="0">
                 <a:solidFill>
                   <a:srgbClr val="000000"/>
                 </a:solidFill>
@@ -1186,7 +1186,7 @@
               <a:t>這一張的目的：</a:t>
             </a:r>
             <a:r>
-              <a:rPr sz="1200" lang="zh-TW" dirty="0">
+              <a:rPr sz="1400" lang="zh-TW" dirty="0">
                 <a:solidFill>
                   <a:srgbClr val="000000"/>
                 </a:solidFill>
@@ -1204,11 +1204,11 @@
                 <a:spcPts val="0"/>
               </a:spcBef>
               <a:spcAft>
-                <a:spcPts val="200"/>
+                <a:spcPts val="233"/>
               </a:spcAft>
             </a:pPr>
             <a:r>
-              <a:rPr sz="1200" lang="zh-TW" dirty="0">
+              <a:rPr sz="1400" lang="zh-TW" dirty="0">
                 <a:solidFill>
                   <a:srgbClr val="000000"/>
                 </a:solidFill>
@@ -1226,11 +1226,11 @@
                 <a:spcPts val="0"/>
               </a:spcBef>
               <a:spcAft>
-                <a:spcPts val="200"/>
+                <a:spcPts val="233"/>
               </a:spcAft>
             </a:pPr>
             <a:r>
-              <a:rPr sz="1200" b="1" lang="zh-TW" dirty="0">
+              <a:rPr sz="1400" b="1" lang="zh-TW" dirty="0">
                 <a:solidFill>
                   <a:srgbClr val="000000"/>
                 </a:solidFill>
@@ -1241,7 +1241,7 @@
               <a:t>第二欄，車身上的光達點</a:t>
             </a:r>
             <a:r>
-              <a:rPr sz="1200" lang="zh-TW" dirty="0">
+              <a:rPr sz="1400" lang="zh-TW" dirty="0">
                 <a:solidFill>
                   <a:srgbClr val="000000"/>
                 </a:solidFill>
@@ -1259,11 +1259,11 @@
                 <a:spcPts val="0"/>
               </a:spcBef>
               <a:spcAft>
-                <a:spcPts val="200"/>
+                <a:spcPts val="233"/>
               </a:spcAft>
             </a:pPr>
             <a:r>
-              <a:rPr sz="1200" b="1" lang="zh-TW" dirty="0">
+              <a:rPr sz="1400" b="1" lang="zh-TW" dirty="0">
                 <a:solidFill>
                   <a:srgbClr val="000000"/>
                 </a:solidFill>
@@ -1274,7 +1274,7 @@
               <a:t>後面三欄，有沒有被雷達抓到</a:t>
             </a:r>
             <a:r>
-              <a:rPr sz="1200" lang="zh-TW" dirty="0">
+              <a:rPr sz="1400" lang="zh-TW" dirty="0">
                 <a:solidFill>
                   <a:srgbClr val="000000"/>
                 </a:solidFill>
@@ -1285,7 +1285,7 @@
               <a:t>，也就是框裡至少有一個雷達點的比例。車子，十公尺內將近七成，到三十公尺外還有四成多。機車和腳踏車，只有一到兩成。行人，</a:t>
             </a:r>
             <a:r>
-              <a:rPr sz="1200" b="1" lang="zh-TW" dirty="0">
+              <a:rPr sz="1400" b="1" lang="zh-TW" dirty="0">
                 <a:solidFill>
                   <a:srgbClr val="000000"/>
                 </a:solidFill>
@@ -1296,7 +1296,7 @@
               <a:t>十公尺內也只有兩成多</a:t>
             </a:r>
             <a:r>
-              <a:rPr sz="1200" lang="zh-TW" dirty="0">
+              <a:rPr sz="1400" lang="zh-TW" dirty="0">
                 <a:solidFill>
                   <a:srgbClr val="000000"/>
                 </a:solidFill>
@@ -1314,11 +1314,11 @@
                 <a:spcPts val="0"/>
               </a:spcBef>
               <a:spcAft>
-                <a:spcPts val="200"/>
+                <a:spcPts val="233"/>
               </a:spcAft>
             </a:pPr>
             <a:r>
-              <a:rPr sz="1200" lang="zh-TW" dirty="0">
+              <a:rPr sz="1400" lang="zh-TW" dirty="0">
                 <a:solidFill>
                   <a:srgbClr val="000000"/>
                 </a:solidFill>
@@ -1336,11 +1336,11 @@
                 <a:spcPts val="0"/>
               </a:spcBef>
               <a:spcAft>
-                <a:spcPts val="200"/>
+                <a:spcPts val="233"/>
               </a:spcAft>
             </a:pPr>
             <a:r>
-              <a:rPr sz="1200" lang="zh-TW" dirty="0">
+              <a:rPr sz="1400" lang="zh-TW" dirty="0">
                 <a:solidFill>
                   <a:srgbClr val="000000"/>
                 </a:solidFill>
@@ -1351,7 +1351,7 @@
               <a:t>這一格對河內很重要：滿街都是機車和行人，</a:t>
             </a:r>
             <a:r>
-              <a:rPr sz="1200" b="1" lang="zh-TW" dirty="0">
+              <a:rPr sz="1400" b="1" lang="zh-TW" dirty="0">
                 <a:solidFill>
                   <a:srgbClr val="000000"/>
                 </a:solidFill>
@@ -1362,7 +1362,7 @@
               <a:t>雷達最不擅長的，剛好是那裡最多的</a:t>
             </a:r>
             <a:r>
-              <a:rPr sz="1200" lang="zh-TW" dirty="0">
+              <a:rPr sz="1400" lang="zh-TW" dirty="0">
                 <a:solidFill>
                   <a:srgbClr val="000000"/>
                 </a:solidFill>
@@ -1380,11 +1380,11 @@
                 <a:spcPts val="0"/>
               </a:spcBef>
               <a:spcAft>
-                <a:spcPts val="200"/>
+                <a:spcPts val="233"/>
               </a:spcAft>
             </a:pPr>
             <a:r>
-              <a:rPr sz="1200" lang="zh-TW" dirty="0">
+              <a:rPr sz="1400" lang="zh-TW" dirty="0">
                 <a:solidFill>
                   <a:srgbClr val="000000"/>
                 </a:solidFill>
@@ -1471,8 +1471,8 @@
         </p:nvSpPr>
         <p:spPr>
           <a:xfrm>
-            <a:off x="540000" y="540000"/>
-            <a:ext cx="6480000" cy="3645000"/>
+            <a:off x="1620000" y="380000"/>
+            <a:ext cx="4320000" cy="2430000"/>
           </a:xfrm>
         </p:spPr>
       </p:sp>
@@ -1488,8 +1488,8 @@
         </p:nvSpPr>
         <p:spPr>
           <a:xfrm>
-            <a:off x="540000" y="4440000"/>
-            <a:ext cx="6480000" cy="5500000"/>
+            <a:off x="540000" y="2990000"/>
+            <a:ext cx="6480000" cy="7060000"/>
           </a:xfrm>
         </p:spPr>
         <p:txBody>
@@ -1501,11 +1501,11 @@
                 <a:spcPts val="0"/>
               </a:spcBef>
               <a:spcAft>
-                <a:spcPts val="200"/>
+                <a:spcPts val="250"/>
               </a:spcAft>
             </a:pPr>
             <a:r>
-              <a:rPr sz="1200" b="1" lang="zh-TW" dirty="0">
+              <a:rPr sz="1500" b="1" lang="zh-TW" dirty="0">
                 <a:solidFill>
                   <a:srgbClr val="000000"/>
                 </a:solidFill>
@@ -1516,7 +1516,7 @@
               <a:t>這一張的目的：</a:t>
             </a:r>
             <a:r>
-              <a:rPr sz="1200" lang="zh-TW" dirty="0">
+              <a:rPr sz="1500" lang="zh-TW" dirty="0">
                 <a:solidFill>
                   <a:srgbClr val="000000"/>
                 </a:solidFill>
@@ -1534,11 +1534,11 @@
                 <a:spcPts val="0"/>
               </a:spcBef>
               <a:spcAft>
-                <a:spcPts val="200"/>
+                <a:spcPts val="250"/>
               </a:spcAft>
             </a:pPr>
             <a:r>
-              <a:rPr sz="1200" lang="zh-TW" dirty="0">
+              <a:rPr sz="1500" lang="zh-TW" dirty="0">
                 <a:solidFill>
                   <a:srgbClr val="000000"/>
                 </a:solidFill>
@@ -1549,7 +1549,7 @@
               <a:t>接下來不是天氣，是</a:t>
             </a:r>
             <a:r>
-              <a:rPr sz="1200" b="1" lang="zh-TW" dirty="0">
+              <a:rPr sz="1500" b="1" lang="zh-TW" dirty="0">
                 <a:solidFill>
                   <a:srgbClr val="000000"/>
                 </a:solidFill>
@@ -1560,7 +1560,7 @@
               <a:t>表面和地形</a:t>
             </a:r>
             <a:r>
-              <a:rPr sz="1200" lang="zh-TW" dirty="0">
+              <a:rPr sz="1500" lang="zh-TW" dirty="0">
                 <a:solidFill>
                   <a:srgbClr val="000000"/>
                 </a:solidFill>
@@ -1578,11 +1578,11 @@
                 <a:spcPts val="0"/>
               </a:spcBef>
               <a:spcAft>
-                <a:spcPts val="200"/>
+                <a:spcPts val="250"/>
               </a:spcAft>
             </a:pPr>
             <a:r>
-              <a:rPr sz="1200" b="1" lang="zh-TW" dirty="0">
+              <a:rPr sz="1500" b="1" lang="zh-TW" dirty="0">
                 <a:solidFill>
                   <a:srgbClr val="000000"/>
                 </a:solidFill>
@@ -1593,7 +1593,7 @@
               <a:t>光達怕鏡面和玻璃。</a:t>
             </a:r>
             <a:r>
-              <a:rPr sz="1200" lang="zh-TW" dirty="0">
+              <a:rPr sz="1500" lang="zh-TW" dirty="0">
                 <a:solidFill>
                   <a:srgbClr val="000000"/>
                 </a:solidFill>
@@ -1611,11 +1611,11 @@
                 <a:spcPts val="0"/>
               </a:spcBef>
               <a:spcAft>
-                <a:spcPts val="200"/>
+                <a:spcPts val="250"/>
               </a:spcAft>
             </a:pPr>
             <a:r>
-              <a:rPr sz="1200" b="1" lang="zh-TW" dirty="0">
+              <a:rPr sz="1500" b="1" lang="zh-TW" dirty="0">
                 <a:solidFill>
                   <a:srgbClr val="000000"/>
                 </a:solidFill>
@@ -1626,7 +1626,7 @@
               <a:t>衛星定位怕高樓反射。</a:t>
             </a:r>
             <a:r>
-              <a:rPr sz="1200" lang="zh-TW" dirty="0">
+              <a:rPr sz="1500" lang="zh-TW" dirty="0">
                 <a:solidFill>
                   <a:srgbClr val="000000"/>
                 </a:solidFill>
@@ -1644,11 +1644,11 @@
                 <a:spcPts val="0"/>
               </a:spcBef>
               <a:spcAft>
-                <a:spcPts val="200"/>
+                <a:spcPts val="250"/>
               </a:spcAft>
             </a:pPr>
             <a:r>
-              <a:rPr sz="1200" lang="zh-TW" dirty="0">
+              <a:rPr sz="1500" lang="zh-TW" dirty="0">
                 <a:solidFill>
                   <a:srgbClr val="000000"/>
                 </a:solidFill>
@@ -1666,11 +1666,11 @@
                 <a:spcPts val="0"/>
               </a:spcBef>
               <a:spcAft>
-                <a:spcPts val="200"/>
+                <a:spcPts val="250"/>
               </a:spcAft>
             </a:pPr>
             <a:r>
-              <a:rPr sz="1200" lang="zh-TW" dirty="0">
+              <a:rPr sz="1500" lang="zh-TW" dirty="0">
                 <a:solidFill>
                   <a:srgbClr val="000000"/>
                 </a:solidFill>
@@ -1681,7 +1681,7 @@
               <a:t>這幾個有一個共同點，請各位想一想是第幾種壞法？</a:t>
             </a:r>
             <a:r>
-              <a:rPr sz="1200" b="1" lang="zh-TW" dirty="0">
+              <a:rPr sz="1500" b="1" lang="zh-TW" dirty="0">
                 <a:solidFill>
                   <a:srgbClr val="000000"/>
                 </a:solidFill>
@@ -1692,7 +1692,7 @@
               <a:t>第二種，看錯。</a:t>
             </a:r>
             <a:r>
-              <a:rPr sz="1200" lang="zh-TW" dirty="0">
+              <a:rPr sz="1500" lang="zh-TW" dirty="0">
                 <a:solidFill>
                   <a:srgbClr val="000000"/>
                 </a:solidFill>
@@ -1710,11 +1710,11 @@
                 <a:spcPts val="0"/>
               </a:spcBef>
               <a:spcAft>
-                <a:spcPts val="200"/>
+                <a:spcPts val="250"/>
               </a:spcAft>
             </a:pPr>
             <a:r>
-              <a:rPr sz="1200" lang="zh-TW" dirty="0">
+              <a:rPr sz="1500" lang="zh-TW" dirty="0">
                 <a:solidFill>
                   <a:srgbClr val="000000"/>
                 </a:solidFill>
@@ -1801,8 +1801,8 @@
         </p:nvSpPr>
         <p:spPr>
           <a:xfrm>
-            <a:off x="540000" y="540000"/>
-            <a:ext cx="6480000" cy="3645000"/>
+            <a:off x="1620000" y="380000"/>
+            <a:ext cx="4320000" cy="2430000"/>
           </a:xfrm>
         </p:spPr>
       </p:sp>
@@ -1818,8 +1818,8 @@
         </p:nvSpPr>
         <p:spPr>
           <a:xfrm>
-            <a:off x="540000" y="4440000"/>
-            <a:ext cx="6480000" cy="5500000"/>
+            <a:off x="540000" y="2990000"/>
+            <a:ext cx="6480000" cy="7060000"/>
           </a:xfrm>
         </p:spPr>
         <p:txBody>
@@ -1831,11 +1831,11 @@
                 <a:spcPts val="0"/>
               </a:spcBef>
               <a:spcAft>
-                <a:spcPts val="200"/>
+                <a:spcPts val="267"/>
               </a:spcAft>
             </a:pPr>
             <a:r>
-              <a:rPr sz="1200" b="1" lang="zh-TW" dirty="0">
+              <a:rPr sz="1600" b="1" lang="zh-TW" dirty="0">
                 <a:solidFill>
                   <a:srgbClr val="000000"/>
                 </a:solidFill>
@@ -1846,7 +1846,7 @@
               <a:t>這一張的目的：</a:t>
             </a:r>
             <a:r>
-              <a:rPr sz="1200" lang="zh-TW" dirty="0">
+              <a:rPr sz="1600" lang="zh-TW" dirty="0">
                 <a:solidFill>
                   <a:srgbClr val="000000"/>
                 </a:solidFill>
@@ -1864,11 +1864,11 @@
                 <a:spcPts val="0"/>
               </a:spcBef>
               <a:spcAft>
-                <a:spcPts val="200"/>
+                <a:spcPts val="267"/>
               </a:spcAft>
             </a:pPr>
             <a:r>
-              <a:rPr sz="1200" lang="zh-TW" dirty="0">
+              <a:rPr sz="1600" lang="zh-TW" dirty="0">
                 <a:solidFill>
                   <a:srgbClr val="000000"/>
                 </a:solidFill>
@@ -1879,7 +1879,7 @@
               <a:t>再來是最日常的一種：</a:t>
             </a:r>
             <a:r>
-              <a:rPr sz="1200" b="1" lang="zh-TW" dirty="0">
+              <a:rPr sz="1600" b="1" lang="zh-TW" dirty="0">
                 <a:solidFill>
                   <a:srgbClr val="000000"/>
                 </a:solidFill>
@@ -1890,7 +1890,7 @@
               <a:t>髒了、被蓋住。</a:t>
             </a:r>
             <a:r>
-              <a:rPr sz="1200" lang="zh-TW" dirty="0">
+              <a:rPr sz="1600" lang="zh-TW" dirty="0">
                 <a:solidFill>
                   <a:srgbClr val="000000"/>
                 </a:solidFill>
@@ -1908,11 +1908,11 @@
                 <a:spcPts val="0"/>
               </a:spcBef>
               <a:spcAft>
-                <a:spcPts val="200"/>
+                <a:spcPts val="267"/>
               </a:spcAft>
             </a:pPr>
             <a:r>
-              <a:rPr sz="1200" lang="zh-TW" dirty="0">
+              <a:rPr sz="1600" lang="zh-TW" dirty="0">
                 <a:solidFill>
                   <a:srgbClr val="000000"/>
                 </a:solidFill>
@@ -1930,11 +1930,11 @@
                 <a:spcPts val="0"/>
               </a:spcBef>
               <a:spcAft>
-                <a:spcPts val="200"/>
+                <a:spcPts val="267"/>
               </a:spcAft>
             </a:pPr>
             <a:r>
-              <a:rPr sz="1200" lang="zh-TW" dirty="0">
+              <a:rPr sz="1600" lang="zh-TW" dirty="0">
                 <a:solidFill>
                   <a:srgbClr val="000000"/>
                 </a:solidFill>
@@ -1945,7 +1945,7 @@
               <a:t>看一支一分半的動畫。這是法國汽車零件廠 Valeo 的宣傳片，它在賣清洗系統，所以最後是廣告。可是前面講的道理是對的。</a:t>
             </a:r>
             <a:r>
-              <a:rPr sz="1200" b="1" lang="zh-TW" dirty="0">
+              <a:rPr sz="1600" b="1" lang="zh-TW" dirty="0">
                 <a:solidFill>
                   <a:srgbClr val="000000"/>
                 </a:solidFill>
@@ -1956,7 +1956,7 @@
               <a:t>0:45</a:t>
             </a:r>
             <a:r>
-              <a:rPr sz="1200" lang="zh-TW" dirty="0">
+              <a:rPr sz="1600" lang="zh-TW" dirty="0">
                 <a:solidFill>
                   <a:srgbClr val="000000"/>
                 </a:solidFill>
@@ -1974,11 +1974,11 @@
                 <a:spcPts val="0"/>
               </a:spcBef>
               <a:spcAft>
-                <a:spcPts val="200"/>
+                <a:spcPts val="267"/>
               </a:spcAft>
             </a:pPr>
             <a:r>
-              <a:rPr sz="1200" lang="zh-TW" dirty="0">
+              <a:rPr sz="1600" lang="zh-TW" dirty="0">
                 <a:solidFill>
                   <a:srgbClr val="000000"/>
                 </a:solidFill>
@@ -1989,7 +1989,7 @@
               <a:t>這件事跟第四張的三種壞法有關。第六週那顆 Bosch 超音波，規格表上有一行 </a:t>
             </a:r>
             <a:r>
-              <a:rPr sz="1200" b="1" lang="zh-TW" dirty="0">
+              <a:rPr sz="1600" b="1" lang="zh-TW" dirty="0">
                 <a:solidFill>
                   <a:srgbClr val="000000"/>
                 </a:solidFill>
@@ -2000,7 +2000,7 @@
               <a:t>Blindness detection</a:t>
             </a:r>
             <a:r>
-              <a:rPr sz="1200" lang="zh-TW" dirty="0">
+              <a:rPr sz="1600" lang="zh-TW" dirty="0">
                 <a:solidFill>
                   <a:srgbClr val="000000"/>
                 </a:solidFill>
@@ -2018,11 +2018,11 @@
                 <a:spcPts val="0"/>
               </a:spcBef>
               <a:spcAft>
-                <a:spcPts val="200"/>
+                <a:spcPts val="267"/>
               </a:spcAft>
             </a:pPr>
             <a:r>
-              <a:rPr sz="1200" lang="zh-TW" dirty="0">
+              <a:rPr sz="1600" lang="zh-TW" dirty="0">
                 <a:solidFill>
                   <a:srgbClr val="000000"/>
                 </a:solidFill>
@@ -2033,7 +2033,7 @@
               <a:t>所以，</a:t>
             </a:r>
             <a:r>
-              <a:rPr sz="1200" b="1" lang="zh-TW" dirty="0">
+              <a:rPr sz="1600" b="1" lang="zh-TW" dirty="0">
                 <a:solidFill>
                   <a:srgbClr val="000000"/>
                 </a:solidFill>
@@ -2044,7 +2044,7 @@
               <a:t>會發現自己被蓋住，就把最危險的第三種壞法，變成最好處理的第一種。</a:t>
             </a:r>
             <a:r>
-              <a:rPr sz="1200" lang="zh-TW" dirty="0">
+              <a:rPr sz="1600" lang="zh-TW" dirty="0">
                 <a:solidFill>
                   <a:srgbClr val="000000"/>
                 </a:solidFill>
@@ -2131,8 +2131,8 @@
         </p:nvSpPr>
         <p:spPr>
           <a:xfrm>
-            <a:off x="540000" y="540000"/>
-            <a:ext cx="6480000" cy="3645000"/>
+            <a:off x="1620000" y="380000"/>
+            <a:ext cx="4320000" cy="2430000"/>
           </a:xfrm>
         </p:spPr>
       </p:sp>
@@ -2148,8 +2148,8 @@
         </p:nvSpPr>
         <p:spPr>
           <a:xfrm>
-            <a:off x="540000" y="4440000"/>
-            <a:ext cx="6480000" cy="5500000"/>
+            <a:off x="540000" y="2990000"/>
+            <a:ext cx="6480000" cy="7060000"/>
           </a:xfrm>
         </p:spPr>
         <p:txBody>
@@ -2161,11 +2161,11 @@
                 <a:spcPts val="0"/>
               </a:spcBef>
               <a:spcAft>
-                <a:spcPts val="200"/>
+                <a:spcPts val="267"/>
               </a:spcAft>
             </a:pPr>
             <a:r>
-              <a:rPr sz="1200" b="1" lang="zh-TW" dirty="0">
+              <a:rPr sz="1600" b="1" lang="zh-TW" dirty="0">
                 <a:solidFill>
                   <a:srgbClr val="000000"/>
                 </a:solidFill>
@@ -2176,7 +2176,7 @@
               <a:t>這一張的目的：</a:t>
             </a:r>
             <a:r>
-              <a:rPr sz="1200" lang="zh-TW" dirty="0">
+              <a:rPr sz="1600" lang="zh-TW" dirty="0">
                 <a:solidFill>
                   <a:srgbClr val="000000"/>
                 </a:solidFill>
@@ -2194,11 +2194,11 @@
                 <a:spcPts val="0"/>
               </a:spcBef>
               <a:spcAft>
-                <a:spcPts val="200"/>
+                <a:spcPts val="267"/>
               </a:spcAft>
             </a:pPr>
             <a:r>
-              <a:rPr sz="1200" lang="zh-TW" dirty="0">
+              <a:rPr sz="1600" lang="zh-TW" dirty="0">
                 <a:solidFill>
                   <a:srgbClr val="000000"/>
                 </a:solidFill>
@@ -2209,7 +2209,7 @@
               <a:t>最後一種條件是</a:t>
             </a:r>
             <a:r>
-              <a:rPr sz="1200" b="1" lang="zh-TW" dirty="0">
+              <a:rPr sz="1600" b="1" lang="zh-TW" dirty="0">
                 <a:solidFill>
                   <a:srgbClr val="000000"/>
                 </a:solidFill>
@@ -2220,7 +2220,7 @@
               <a:t>時間</a:t>
             </a:r>
             <a:r>
-              <a:rPr sz="1200" lang="zh-TW" dirty="0">
+              <a:rPr sz="1600" lang="zh-TW" dirty="0">
                 <a:solidFill>
                   <a:srgbClr val="000000"/>
                 </a:solidFill>
@@ -2238,11 +2238,11 @@
                 <a:spcPts val="0"/>
               </a:spcBef>
               <a:spcAft>
-                <a:spcPts val="200"/>
+                <a:spcPts val="267"/>
               </a:spcAft>
             </a:pPr>
             <a:r>
-              <a:rPr sz="1200" lang="zh-TW" dirty="0">
+              <a:rPr sz="1600" lang="zh-TW" dirty="0">
                 <a:solidFill>
                   <a:srgbClr val="000000"/>
                 </a:solidFill>
@@ -2253,7 +2253,7 @@
               <a:t>左邊這張圖第六週第二節看過：橫軸是衛星斷掉以後過了幾秒，縱軸是車子橫向偏了幾公尺。綠色那條是工業級的 IMU，每小時偏八度，時速八十，</a:t>
             </a:r>
             <a:r>
-              <a:rPr sz="1200" b="1" lang="zh-TW" dirty="0">
+              <a:rPr sz="1600" b="1" lang="zh-TW" dirty="0">
                 <a:solidFill>
                   <a:srgbClr val="000000"/>
                 </a:solidFill>
@@ -2264,7 +2264,7 @@
               <a:t>三十四秒</a:t>
             </a:r>
             <a:r>
-              <a:rPr sz="1200" lang="zh-TW" dirty="0">
+              <a:rPr sz="1600" lang="zh-TW" dirty="0">
                 <a:solidFill>
                   <a:srgbClr val="000000"/>
                 </a:solidFill>
@@ -2275,7 +2275,7 @@
               <a:t>就橫向偏零點五公尺，碰到紅線。手機等級的那條，兩秒就出去了。雪山隧道要開</a:t>
             </a:r>
             <a:r>
-              <a:rPr sz="1200" b="1" lang="zh-TW" dirty="0">
+              <a:rPr sz="1600" b="1" lang="zh-TW" dirty="0">
                 <a:solidFill>
                   <a:srgbClr val="000000"/>
                 </a:solidFill>
@@ -2286,7 +2286,7 @@
               <a:t>五百八十秒</a:t>
             </a:r>
             <a:r>
-              <a:rPr sz="1200" lang="zh-TW" dirty="0">
+              <a:rPr sz="1600" lang="zh-TW" dirty="0">
                 <a:solidFill>
                   <a:srgbClr val="000000"/>
                 </a:solidFill>
@@ -2304,11 +2304,11 @@
                 <a:spcPts val="0"/>
               </a:spcBef>
               <a:spcAft>
-                <a:spcPts val="200"/>
+                <a:spcPts val="267"/>
               </a:spcAft>
             </a:pPr>
             <a:r>
-              <a:rPr sz="1200" lang="zh-TW" dirty="0">
+              <a:rPr sz="1600" lang="zh-TW" dirty="0">
                 <a:solidFill>
                   <a:srgbClr val="000000"/>
                 </a:solidFill>
@@ -2319,7 +2319,7 @@
               <a:t>這兩種感測器的壞法，個性剛好相反。</a:t>
             </a:r>
             <a:r>
-              <a:rPr sz="1200" b="1" lang="zh-TW" dirty="0">
+              <a:rPr sz="1600" b="1" lang="zh-TW" dirty="0">
                 <a:solidFill>
                   <a:srgbClr val="000000"/>
                 </a:solidFill>
@@ -2330,7 +2330,7 @@
               <a:t>IMU 是慢慢壞</a:t>
             </a:r>
             <a:r>
-              <a:rPr sz="1200" lang="zh-TW" dirty="0">
+              <a:rPr sz="1600" lang="zh-TW" dirty="0">
                 <a:solidFill>
                   <a:srgbClr val="000000"/>
                 </a:solidFill>
@@ -2341,7 +2341,7 @@
               <a:t>：一開始很準，愈久愈歪，像閉著眼睛走路。</a:t>
             </a:r>
             <a:r>
-              <a:rPr sz="1200" b="1" lang="zh-TW" dirty="0">
+              <a:rPr sz="1600" b="1" lang="zh-TW" dirty="0">
                 <a:solidFill>
                   <a:srgbClr val="000000"/>
                 </a:solidFill>
@@ -2352,7 +2352,7 @@
               <a:t>衛星是突然壞</a:t>
             </a:r>
             <a:r>
-              <a:rPr sz="1200" lang="zh-TW" dirty="0">
+              <a:rPr sz="1600" lang="zh-TW" dirty="0">
                 <a:solidFill>
                   <a:srgbClr val="000000"/>
                 </a:solidFill>
@@ -2370,11 +2370,11 @@
                 <a:spcPts val="0"/>
               </a:spcBef>
               <a:spcAft>
-                <a:spcPts val="200"/>
+                <a:spcPts val="267"/>
               </a:spcAft>
             </a:pPr>
             <a:r>
-              <a:rPr sz="1200" lang="zh-TW" dirty="0">
+              <a:rPr sz="1600" lang="zh-TW" dirty="0">
                 <a:solidFill>
                   <a:srgbClr val="000000"/>
                 </a:solidFill>
@@ -2461,8 +2461,8 @@
         </p:nvSpPr>
         <p:spPr>
           <a:xfrm>
-            <a:off x="540000" y="540000"/>
-            <a:ext cx="6480000" cy="3645000"/>
+            <a:off x="1620000" y="380000"/>
+            <a:ext cx="4320000" cy="2430000"/>
           </a:xfrm>
         </p:spPr>
       </p:sp>
@@ -2478,8 +2478,8 @@
         </p:nvSpPr>
         <p:spPr>
           <a:xfrm>
-            <a:off x="540000" y="4440000"/>
-            <a:ext cx="6480000" cy="5500000"/>
+            <a:off x="540000" y="2990000"/>
+            <a:ext cx="6480000" cy="7060000"/>
           </a:xfrm>
         </p:spPr>
         <p:txBody>
@@ -3242,8 +3242,8 @@
         </p:nvSpPr>
         <p:spPr>
           <a:xfrm>
-            <a:off x="540000" y="540000"/>
-            <a:ext cx="6480000" cy="3645000"/>
+            <a:off x="1620000" y="380000"/>
+            <a:ext cx="4320000" cy="2430000"/>
           </a:xfrm>
         </p:spPr>
       </p:sp>
@@ -3259,8 +3259,8 @@
         </p:nvSpPr>
         <p:spPr>
           <a:xfrm>
-            <a:off x="540000" y="4440000"/>
-            <a:ext cx="6480000" cy="5500000"/>
+            <a:off x="540000" y="2990000"/>
+            <a:ext cx="6480000" cy="7060000"/>
           </a:xfrm>
         </p:spPr>
         <p:txBody>
@@ -3272,11 +3272,11 @@
                 <a:spcPts val="0"/>
               </a:spcBef>
               <a:spcAft>
-                <a:spcPts val="200"/>
+                <a:spcPts val="267"/>
               </a:spcAft>
             </a:pPr>
             <a:r>
-              <a:rPr sz="1200" b="1" lang="zh-TW" dirty="0">
+              <a:rPr sz="1600" b="1" lang="zh-TW" dirty="0">
                 <a:solidFill>
                   <a:srgbClr val="000000"/>
                 </a:solidFill>
@@ -3287,7 +3287,7 @@
               <a:t>這一張的目的：</a:t>
             </a:r>
             <a:r>
-              <a:rPr sz="1200" lang="zh-TW" dirty="0">
+              <a:rPr sz="1600" lang="zh-TW" dirty="0">
                 <a:solidFill>
                   <a:srgbClr val="000000"/>
                 </a:solidFill>
@@ -3305,11 +3305,11 @@
                 <a:spcPts val="0"/>
               </a:spcBef>
               <a:spcAft>
-                <a:spcPts val="200"/>
+                <a:spcPts val="267"/>
               </a:spcAft>
             </a:pPr>
             <a:r>
-              <a:rPr sz="1200" lang="zh-TW" dirty="0">
+              <a:rPr sz="1600" lang="zh-TW" dirty="0">
                 <a:solidFill>
                   <a:srgbClr val="000000"/>
                 </a:solidFill>
@@ -3320,7 +3320,7 @@
               <a:t>上一張那七個人，我把他們前後十五秒，從第十格到第三十九格，一格一格查了一遍。每一橫排是一個人，每一個小格是零點五秒。</a:t>
             </a:r>
             <a:r>
-              <a:rPr sz="1200" b="1" lang="zh-TW" dirty="0">
+              <a:rPr sz="1600" b="1" lang="zh-TW" dirty="0">
                 <a:solidFill>
                   <a:srgbClr val="000000"/>
                 </a:solidFill>
@@ -3331,7 +3331,7 @@
               <a:t>綠色是那一刻他身上有雷達點，灰色是零個點，空白是那一刻他不在十五公尺內，或被別的東西擋住。</a:t>
             </a:r>
             <a:r>
-              <a:rPr sz="1200" lang="zh-TW" dirty="0">
+              <a:rPr sz="1600" lang="zh-TW" dirty="0">
                 <a:solidFill>
                   <a:srgbClr val="000000"/>
                 </a:solidFill>
@@ -3349,11 +3349,11 @@
                 <a:spcPts val="0"/>
               </a:spcBef>
               <a:spcAft>
-                <a:spcPts val="200"/>
+                <a:spcPts val="267"/>
               </a:spcAft>
             </a:pPr>
             <a:r>
-              <a:rPr sz="1200" b="1" lang="zh-TW" dirty="0">
+              <a:rPr sz="1600" b="1" lang="zh-TW" dirty="0">
                 <a:solidFill>
                   <a:srgbClr val="000000"/>
                 </a:solidFill>
@@ -3364,7 +3364,7 @@
               <a:t>橘色框那一欄，就是上一張的瞬間</a:t>
             </a:r>
             <a:r>
-              <a:rPr sz="1200" lang="zh-TW" dirty="0">
+              <a:rPr sz="1600" lang="zh-TW" dirty="0">
                 <a:solidFill>
                   <a:srgbClr val="000000"/>
                 </a:solidFill>
@@ -3382,11 +3382,11 @@
                 <a:spcPts val="0"/>
               </a:spcBef>
               <a:spcAft>
-                <a:spcPts val="200"/>
+                <a:spcPts val="267"/>
               </a:spcAft>
             </a:pPr>
             <a:r>
-              <a:rPr sz="1200" lang="zh-TW" dirty="0">
+              <a:rPr sz="1600" lang="zh-TW" dirty="0">
                 <a:solidFill>
                   <a:srgbClr val="000000"/>
                 </a:solidFill>
@@ -3397,7 +3397,7 @@
               <a:t>橫著讀一排。</a:t>
             </a:r>
             <a:r>
-              <a:rPr sz="1200" b="1" lang="zh-TW" dirty="0">
+              <a:rPr sz="1600" b="1" lang="zh-TW" dirty="0">
                 <a:solidFill>
                   <a:srgbClr val="000000"/>
                 </a:solidFill>
@@ -3408,7 +3408,7 @@
               <a:t>行人一</a:t>
             </a:r>
             <a:r>
-              <a:rPr sz="1200" lang="zh-TW" dirty="0">
+              <a:rPr sz="1600" lang="zh-TW" dirty="0">
                 <a:solidFill>
                   <a:srgbClr val="000000"/>
                 </a:solidFill>
@@ -3419,7 +3419,7 @@
               <a:t>，二十八次裡有十九次抓得到，算是常被看到的；</a:t>
             </a:r>
             <a:r>
-              <a:rPr sz="1200" b="1" lang="zh-TW" dirty="0">
+              <a:rPr sz="1600" b="1" lang="zh-TW" dirty="0">
                 <a:solidFill>
                   <a:srgbClr val="000000"/>
                 </a:solidFill>
@@ -3430,7 +3430,7 @@
               <a:t>行人七</a:t>
             </a:r>
             <a:r>
-              <a:rPr sz="1200" lang="zh-TW" dirty="0">
+              <a:rPr sz="1600" lang="zh-TW" dirty="0">
                 <a:solidFill>
                   <a:srgbClr val="000000"/>
                 </a:solidFill>
@@ -3448,11 +3448,11 @@
                 <a:spcPts val="0"/>
               </a:spcBef>
               <a:spcAft>
-                <a:spcPts val="200"/>
+                <a:spcPts val="267"/>
               </a:spcAft>
             </a:pPr>
             <a:r>
-              <a:rPr sz="1200" lang="zh-TW" dirty="0">
+              <a:rPr sz="1600" lang="zh-TW" dirty="0">
                 <a:solidFill>
                   <a:srgbClr val="000000"/>
                 </a:solidFill>
@@ -3463,7 +3463,7 @@
               <a:t>加起來：這七個人一共出現一百八十四次，</a:t>
             </a:r>
             <a:r>
-              <a:rPr sz="1200" b="1" lang="zh-TW" dirty="0">
+              <a:rPr sz="1600" b="1" lang="zh-TW" dirty="0">
                 <a:solidFill>
                   <a:srgbClr val="000000"/>
                 </a:solidFill>
@@ -3474,7 +3474,7 @@
               <a:t>五十五次有雷達點，大約三成</a:t>
             </a:r>
             <a:r>
-              <a:rPr sz="1200" lang="zh-TW" dirty="0">
+              <a:rPr sz="1600" lang="zh-TW" dirty="0">
                 <a:solidFill>
                   <a:srgbClr val="000000"/>
                 </a:solidFill>
@@ -3485,7 +3485,7 @@
               <a:t>；而且</a:t>
             </a:r>
             <a:r>
-              <a:rPr sz="1200" b="1" lang="zh-TW" dirty="0">
+              <a:rPr sz="1600" b="1" lang="zh-TW" dirty="0">
                 <a:solidFill>
                   <a:srgbClr val="000000"/>
                 </a:solidFill>
@@ -3496,7 +3496,7 @@
               <a:t>七個人都至少被抓到過一次</a:t>
             </a:r>
             <a:r>
-              <a:rPr sz="1200" lang="zh-TW" dirty="0">
+              <a:rPr sz="1600" lang="zh-TW" dirty="0">
                 <a:solidFill>
                   <a:srgbClr val="000000"/>
                 </a:solidFill>
@@ -3514,11 +3514,11 @@
                 <a:spcPts val="0"/>
               </a:spcBef>
               <a:spcAft>
-                <a:spcPts val="200"/>
+                <a:spcPts val="267"/>
               </a:spcAft>
             </a:pPr>
             <a:r>
-              <a:rPr sz="1200" lang="zh-TW" dirty="0">
+              <a:rPr sz="1600" lang="zh-TW" dirty="0">
                 <a:solidFill>
                   <a:srgbClr val="000000"/>
                 </a:solidFill>
@@ -3529,7 +3529,7 @@
               <a:t>所以比較正確的說法是：雷達</a:t>
             </a:r>
             <a:r>
-              <a:rPr sz="1200" b="1" lang="zh-TW" dirty="0">
+              <a:rPr sz="1600" b="1" lang="zh-TW" dirty="0">
                 <a:solidFill>
                   <a:srgbClr val="000000"/>
                 </a:solidFill>
@@ -3540,7 +3540,7 @@
               <a:t>看得到人，但抓不穩</a:t>
             </a:r>
             <a:r>
-              <a:rPr sz="1200" lang="zh-TW" dirty="0">
+              <a:rPr sz="1600" lang="zh-TW" dirty="0">
                 <a:solidFill>
                   <a:srgbClr val="000000"/>
                 </a:solidFill>
@@ -3627,8 +3627,8 @@
         </p:nvSpPr>
         <p:spPr>
           <a:xfrm>
-            <a:off x="540000" y="540000"/>
-            <a:ext cx="6480000" cy="3645000"/>
+            <a:off x="1620000" y="380000"/>
+            <a:ext cx="4320000" cy="2430000"/>
           </a:xfrm>
         </p:spPr>
       </p:sp>
@@ -3644,8 +3644,8 @@
         </p:nvSpPr>
         <p:spPr>
           <a:xfrm>
-            <a:off x="540000" y="4440000"/>
-            <a:ext cx="6480000" cy="5500000"/>
+            <a:off x="540000" y="2990000"/>
+            <a:ext cx="6480000" cy="7060000"/>
           </a:xfrm>
         </p:spPr>
         <p:txBody>
@@ -3657,11 +3657,11 @@
                 <a:spcPts val="0"/>
               </a:spcBef>
               <a:spcAft>
-                <a:spcPts val="167"/>
+                <a:spcPts val="200"/>
               </a:spcAft>
             </a:pPr>
             <a:r>
-              <a:rPr sz="1000" b="1" lang="zh-TW" dirty="0">
+              <a:rPr sz="1200" b="1" lang="zh-TW" dirty="0">
                 <a:solidFill>
                   <a:srgbClr val="000000"/>
                 </a:solidFill>
@@ -3672,7 +3672,7 @@
               <a:t>這一張的目的：</a:t>
             </a:r>
             <a:r>
-              <a:rPr sz="1000" lang="zh-TW" dirty="0">
+              <a:rPr sz="1200" lang="zh-TW" dirty="0">
                 <a:solidFill>
                   <a:srgbClr val="000000"/>
                 </a:solidFill>
@@ -3690,11 +3690,11 @@
                 <a:spcPts val="0"/>
               </a:spcBef>
               <a:spcAft>
-                <a:spcPts val="167"/>
+                <a:spcPts val="200"/>
               </a:spcAft>
             </a:pPr>
             <a:r>
-              <a:rPr sz="1000" lang="zh-TW" dirty="0">
+              <a:rPr sz="1200" lang="zh-TW" dirty="0">
                 <a:solidFill>
                   <a:srgbClr val="000000"/>
                 </a:solidFill>
@@ -3712,11 +3712,11 @@
                 <a:spcPts val="0"/>
               </a:spcBef>
               <a:spcAft>
-                <a:spcPts val="167"/>
+                <a:spcPts val="200"/>
               </a:spcAft>
             </a:pPr>
             <a:r>
-              <a:rPr sz="1000" b="1" lang="zh-TW" dirty="0">
+              <a:rPr sz="1200" b="1" lang="zh-TW" dirty="0">
                 <a:solidFill>
                   <a:srgbClr val="000000"/>
                 </a:solidFill>
@@ -3727,7 +3727,7 @@
               <a:t>第一招，點更多。</a:t>
             </a:r>
             <a:r>
-              <a:rPr sz="1000" lang="zh-TW" dirty="0">
+              <a:rPr sz="1200" lang="zh-TW" dirty="0">
                 <a:solidFill>
                   <a:srgbClr val="000000"/>
                 </a:solidFill>
@@ -3745,11 +3745,11 @@
                 <a:spcPts val="0"/>
               </a:spcBef>
               <a:spcAft>
-                <a:spcPts val="167"/>
+                <a:spcPts val="200"/>
               </a:spcAft>
             </a:pPr>
             <a:r>
-              <a:rPr sz="1000" b="1" lang="zh-TW" dirty="0">
+              <a:rPr sz="1200" b="1" lang="zh-TW" dirty="0">
                 <a:solidFill>
                   <a:srgbClr val="000000"/>
                 </a:solidFill>
@@ -3760,7 +3760,7 @@
               <a:t>第二招，看動作。</a:t>
             </a:r>
             <a:r>
-              <a:rPr sz="1000" lang="zh-TW" dirty="0">
+              <a:rPr sz="1200" lang="zh-TW" dirty="0">
                 <a:solidFill>
                   <a:srgbClr val="000000"/>
                 </a:solidFill>
@@ -3771,7 +3771,7 @@
               <a:t>看左邊這張照片，一個正在過馬路的人。一根電線桿，整根都是同一個速度，零。一個人走路，身體往前，手和腳卻一前一後地擺，有的部位快、有的慢、有的往回。雷達量得到這種「同一個東西裡，有好幾種速度，而且有節奏」的特徵，英文叫 micro-Doppler，</a:t>
             </a:r>
             <a:r>
-              <a:rPr sz="1000" b="1" lang="zh-TW" dirty="0">
+              <a:rPr sz="1200" b="1" lang="zh-TW" dirty="0">
                 <a:solidFill>
                   <a:srgbClr val="000000"/>
                 </a:solidFill>
@@ -3782,7 +3782,7 @@
               <a:t>微都卜勒</a:t>
             </a:r>
             <a:r>
-              <a:rPr sz="1000" lang="zh-TW" dirty="0">
+              <a:rPr sz="1200" lang="zh-TW" dirty="0">
                 <a:solidFill>
                   <a:srgbClr val="000000"/>
                 </a:solidFill>
@@ -3800,11 +3800,11 @@
                 <a:spcPts val="0"/>
               </a:spcBef>
               <a:spcAft>
-                <a:spcPts val="167"/>
+                <a:spcPts val="200"/>
               </a:spcAft>
             </a:pPr>
             <a:r>
-              <a:rPr sz="1000" b="1" lang="zh-TW" dirty="0">
+              <a:rPr sz="1200" b="1" lang="zh-TW" dirty="0">
                 <a:solidFill>
                   <a:srgbClr val="000000"/>
                 </a:solidFill>
@@ -3815,7 +3815,7 @@
               <a:t>第三招，看久一點。</a:t>
             </a:r>
             <a:r>
-              <a:rPr sz="1000" lang="zh-TW" dirty="0">
+              <a:rPr sz="1200" lang="zh-TW" dirty="0">
                 <a:solidFill>
                   <a:srgbClr val="000000"/>
                 </a:solidFill>
@@ -3833,11 +3833,11 @@
                 <a:spcPts val="0"/>
               </a:spcBef>
               <a:spcAft>
-                <a:spcPts val="167"/>
+                <a:spcPts val="200"/>
               </a:spcAft>
             </a:pPr>
             <a:r>
-              <a:rPr sz="1000" b="1" lang="zh-TW" dirty="0">
+              <a:rPr sz="1200" b="1" lang="zh-TW" dirty="0">
                 <a:solidFill>
                   <a:srgbClr val="000000"/>
                 </a:solidFill>
@@ -3848,7 +3848,7 @@
               <a:t>第四招，跟別人一起看。</a:t>
             </a:r>
             <a:r>
-              <a:rPr sz="1000" lang="zh-TW" dirty="0">
+              <a:rPr sz="1200" lang="zh-TW" dirty="0">
                 <a:solidFill>
                   <a:srgbClr val="000000"/>
                 </a:solidFill>
@@ -3859,7 +3859,7 @@
               <a:t>這是量產車最常見的做法。雷達抓到人的時候，距離和接近的速度量得很準，晚上、下雨也照樣量，這正是相機最弱的地方；它做不到的，是</a:t>
             </a:r>
             <a:r>
-              <a:rPr sz="1000" b="1" lang="zh-TW" dirty="0">
+              <a:rPr sz="1200" b="1" lang="zh-TW" dirty="0">
                 <a:solidFill>
                   <a:srgbClr val="000000"/>
                 </a:solidFill>
@@ -3870,7 +3870,7 @@
               <a:t>認出那是一個人</a:t>
             </a:r>
             <a:r>
-              <a:rPr sz="1000" lang="zh-TW" dirty="0">
+              <a:rPr sz="1200" lang="zh-TW" dirty="0">
                 <a:solidFill>
                   <a:srgbClr val="000000"/>
                 </a:solidFill>
@@ -3888,11 +3888,11 @@
                 <a:spcPts val="0"/>
               </a:spcBef>
               <a:spcAft>
-                <a:spcPts val="167"/>
+                <a:spcPts val="200"/>
               </a:spcAft>
             </a:pPr>
             <a:r>
-              <a:rPr sz="1000" lang="zh-TW" dirty="0">
+              <a:rPr sz="1200" lang="zh-TW" dirty="0">
                 <a:solidFill>
                   <a:srgbClr val="000000"/>
                 </a:solidFill>
@@ -3910,11 +3910,11 @@
                 <a:spcPts val="0"/>
               </a:spcBef>
               <a:spcAft>
-                <a:spcPts val="167"/>
+                <a:spcPts val="200"/>
               </a:spcAft>
             </a:pPr>
             <a:r>
-              <a:rPr sz="1000" lang="zh-TW" dirty="0">
+              <a:rPr sz="1200" lang="zh-TW" dirty="0">
                 <a:solidFill>
                   <a:srgbClr val="000000"/>
                 </a:solidFill>
@@ -3925,7 +3925,7 @@
               <a:t>所以結論是：</a:t>
             </a:r>
             <a:r>
-              <a:rPr sz="1000" b="1" lang="zh-TW" dirty="0">
+              <a:rPr sz="1200" b="1" lang="zh-TW" dirty="0">
                 <a:solidFill>
                   <a:srgbClr val="000000"/>
                 </a:solidFill>
@@ -4012,8 +4012,8 @@
         </p:nvSpPr>
         <p:spPr>
           <a:xfrm>
-            <a:off x="540000" y="540000"/>
-            <a:ext cx="6480000" cy="3645000"/>
+            <a:off x="1620000" y="380000"/>
+            <a:ext cx="4320000" cy="2430000"/>
           </a:xfrm>
         </p:spPr>
       </p:sp>
@@ -4029,8 +4029,8 @@
         </p:nvSpPr>
         <p:spPr>
           <a:xfrm>
-            <a:off x="540000" y="4440000"/>
-            <a:ext cx="6480000" cy="5500000"/>
+            <a:off x="540000" y="2990000"/>
+            <a:ext cx="6480000" cy="7060000"/>
           </a:xfrm>
         </p:spPr>
         <p:txBody>
@@ -4042,11 +4042,11 @@
                 <a:spcPts val="0"/>
               </a:spcBef>
               <a:spcAft>
-                <a:spcPts val="200"/>
+                <a:spcPts val="233"/>
               </a:spcAft>
             </a:pPr>
             <a:r>
-              <a:rPr sz="1200" b="1" lang="zh-TW" dirty="0">
+              <a:rPr sz="1400" b="1" lang="zh-TW" dirty="0">
                 <a:solidFill>
                   <a:srgbClr val="000000"/>
                 </a:solidFill>
@@ -4057,7 +4057,7 @@
               <a:t>這一張的目的：</a:t>
             </a:r>
             <a:r>
-              <a:rPr sz="1200" lang="zh-TW" dirty="0">
+              <a:rPr sz="1400" lang="zh-TW" dirty="0">
                 <a:solidFill>
                   <a:srgbClr val="000000"/>
                 </a:solidFill>
@@ -4075,11 +4075,11 @@
                 <a:spcPts val="0"/>
               </a:spcBef>
               <a:spcAft>
-                <a:spcPts val="200"/>
+                <a:spcPts val="233"/>
               </a:spcAft>
             </a:pPr>
             <a:r>
-              <a:rPr sz="1200" lang="zh-TW" dirty="0">
+              <a:rPr sz="1400" lang="zh-TW" dirty="0">
                 <a:solidFill>
                   <a:srgbClr val="000000"/>
                 </a:solidFill>
@@ -4090,7 +4090,7 @@
               <a:t>最後回到第四張那三種壞法，收在最危險的那一種：</a:t>
             </a:r>
             <a:r>
-              <a:rPr sz="1200" b="1" lang="zh-TW" dirty="0">
+              <a:rPr sz="1400" b="1" lang="zh-TW" dirty="0">
                 <a:solidFill>
                   <a:srgbClr val="000000"/>
                 </a:solidFill>
@@ -4101,7 +4101,7 @@
               <a:t>看不到，卻說沒事。</a:t>
             </a:r>
             <a:r>
-              <a:rPr sz="1200" lang="zh-TW" dirty="0">
+              <a:rPr sz="1400" lang="zh-TW" dirty="0">
                 <a:solidFill>
                   <a:srgbClr val="000000"/>
                 </a:solidFill>
@@ -4119,11 +4119,11 @@
                 <a:spcPts val="0"/>
               </a:spcBef>
               <a:spcAft>
-                <a:spcPts val="200"/>
+                <a:spcPts val="233"/>
               </a:spcAft>
             </a:pPr>
             <a:r>
-              <a:rPr sz="1200" lang="zh-TW" dirty="0">
+              <a:rPr sz="1400" lang="zh-TW" dirty="0">
                 <a:solidFill>
                   <a:srgbClr val="000000"/>
                 </a:solidFill>
@@ -4134,7 +4134,7 @@
               <a:t>這是剛剛那個路口的照片，斑馬線上的人看得清清楚楚。可是雷達交出去的報告是：前面八到十公尺，</a:t>
             </a:r>
             <a:r>
-              <a:rPr sz="1200" b="1" lang="zh-TW" dirty="0">
+              <a:rPr sz="1400" b="1" lang="zh-TW" dirty="0">
                 <a:solidFill>
                   <a:srgbClr val="000000"/>
                 </a:solidFill>
@@ -4145,7 +4145,7 @@
               <a:t>什麼都沒有。</a:t>
             </a:r>
             <a:r>
-              <a:rPr sz="1200" lang="zh-TW" dirty="0">
+              <a:rPr sz="1400" lang="zh-TW" dirty="0">
                 <a:solidFill>
                   <a:srgbClr val="000000"/>
                 </a:solidFill>
@@ -4163,11 +4163,11 @@
                 <a:spcPts val="0"/>
               </a:spcBef>
               <a:spcAft>
-                <a:spcPts val="200"/>
+                <a:spcPts val="233"/>
               </a:spcAft>
             </a:pPr>
             <a:r>
-              <a:rPr sz="1200" lang="zh-TW" dirty="0">
+              <a:rPr sz="1400" lang="zh-TW" dirty="0">
                 <a:solidFill>
                   <a:srgbClr val="000000"/>
                 </a:solidFill>
@@ -4178,7 +4178,7 @@
               <a:t>請注意雷達做了什麼：它</a:t>
             </a:r>
             <a:r>
-              <a:rPr sz="1200" b="1" lang="zh-TW" dirty="0">
+              <a:rPr sz="1400" b="1" lang="zh-TW" dirty="0">
                 <a:solidFill>
                   <a:srgbClr val="000000"/>
                 </a:solidFill>
@@ -4189,7 +4189,7 @@
               <a:t>沒有說「我看不到」</a:t>
             </a:r>
             <a:r>
-              <a:rPr sz="1200" lang="zh-TW" dirty="0">
+              <a:rPr sz="1400" lang="zh-TW" dirty="0">
                 <a:solidFill>
                   <a:srgbClr val="000000"/>
                 </a:solidFill>
@@ -4200,7 +4200,7 @@
               <a:t>，它只是什麼都沒報。回波太弱被門檻擋掉也好，被過濾規則丟掉也好，對後面的程式來說，結果都一樣：</a:t>
             </a:r>
             <a:r>
-              <a:rPr sz="1200" b="1" lang="zh-TW" dirty="0">
+              <a:rPr sz="1400" b="1" lang="zh-TW" dirty="0">
                 <a:solidFill>
                   <a:srgbClr val="000000"/>
                 </a:solidFill>
@@ -4211,7 +4211,7 @@
               <a:t>沒有點，就是那裡沒有東西。</a:t>
             </a:r>
             <a:r>
-              <a:rPr sz="1200" lang="zh-TW" dirty="0">
+              <a:rPr sz="1400" lang="zh-TW" dirty="0">
                 <a:solidFill>
                   <a:srgbClr val="000000"/>
                 </a:solidFill>
@@ -4229,11 +4229,11 @@
                 <a:spcPts val="0"/>
               </a:spcBef>
               <a:spcAft>
-                <a:spcPts val="200"/>
+                <a:spcPts val="233"/>
               </a:spcAft>
             </a:pPr>
             <a:r>
-              <a:rPr sz="1200" lang="zh-TW" dirty="0">
+              <a:rPr sz="1400" lang="zh-TW" dirty="0">
                 <a:solidFill>
                   <a:srgbClr val="000000"/>
                 </a:solidFill>
@@ -4244,7 +4244,7 @@
               <a:t>這種壞法還有三個例子，前兩週和今天都提過。</a:t>
             </a:r>
             <a:r>
-              <a:rPr sz="1200" b="1" lang="zh-TW" dirty="0">
+              <a:rPr sz="1400" b="1" lang="zh-TW" dirty="0">
                 <a:solidFill>
                   <a:srgbClr val="000000"/>
                 </a:solidFill>
@@ -4255,7 +4255,7 @@
               <a:t>HC-SR04</a:t>
             </a:r>
             <a:r>
-              <a:rPr sz="1200" lang="zh-TW" dirty="0">
+              <a:rPr sz="1400" lang="zh-TW" dirty="0">
                 <a:solidFill>
                   <a:srgbClr val="000000"/>
                 </a:solidFill>
@@ -4266,7 +4266,7 @@
               <a:t> 被泥巴蓋住，照樣回報「前面沒東西」。</a:t>
             </a:r>
             <a:r>
-              <a:rPr sz="1200" b="1" lang="zh-TW" dirty="0">
+              <a:rPr sz="1400" b="1" lang="zh-TW" dirty="0">
                 <a:solidFill>
                   <a:srgbClr val="000000"/>
                 </a:solidFill>
@@ -4277,7 +4277,7 @@
               <a:t>衛星定位</a:t>
             </a:r>
             <a:r>
-              <a:rPr sz="1200" lang="zh-TW" dirty="0">
+              <a:rPr sz="1400" lang="zh-TW" dirty="0">
                 <a:solidFill>
                   <a:srgbClr val="000000"/>
                 </a:solidFill>
@@ -4288,7 +4288,7 @@
               <a:t>在窄巷裡被反射騙了，偏了幾十公尺，還是很有把握地告訴你一個位置。</a:t>
             </a:r>
             <a:r>
-              <a:rPr sz="1200" b="1" lang="zh-TW" dirty="0">
+              <a:rPr sz="1400" b="1" lang="zh-TW" dirty="0">
                 <a:solidFill>
                   <a:srgbClr val="000000"/>
                 </a:solidFill>
@@ -4299,7 +4299,7 @@
               <a:t>雷達</a:t>
             </a:r>
             <a:r>
-              <a:rPr sz="1200" lang="zh-TW" dirty="0">
+              <a:rPr sz="1400" lang="zh-TW" dirty="0">
                 <a:solidFill>
                   <a:srgbClr val="000000"/>
                 </a:solidFill>
@@ -4317,11 +4317,11 @@
                 <a:spcPts val="0"/>
               </a:spcBef>
               <a:spcAft>
-                <a:spcPts val="200"/>
+                <a:spcPts val="233"/>
               </a:spcAft>
             </a:pPr>
             <a:r>
-              <a:rPr sz="1200" lang="zh-TW" dirty="0">
+              <a:rPr sz="1400" lang="zh-TW" dirty="0">
                 <a:solidFill>
                   <a:srgbClr val="000000"/>
                 </a:solidFill>
@@ -4339,11 +4339,11 @@
                 <a:spcPts val="0"/>
               </a:spcBef>
               <a:spcAft>
-                <a:spcPts val="200"/>
+                <a:spcPts val="233"/>
               </a:spcAft>
             </a:pPr>
             <a:r>
-              <a:rPr sz="1200" lang="zh-TW" dirty="0">
+              <a:rPr sz="1400" lang="zh-TW" dirty="0">
                 <a:solidFill>
                   <a:srgbClr val="000000"/>
                 </a:solidFill>
@@ -4354,7 +4354,7 @@
               <a:t>所以今天的結論是：每一顆感測器，不只要量得準，還要能說一句「</a:t>
             </a:r>
             <a:r>
-              <a:rPr sz="1200" b="1" lang="zh-TW" dirty="0">
+              <a:rPr sz="1400" b="1" lang="zh-TW" dirty="0">
                 <a:solidFill>
                   <a:srgbClr val="000000"/>
                 </a:solidFill>
@@ -4365,7 +4365,7 @@
               <a:t>我現在不可靠</a:t>
             </a:r>
             <a:r>
-              <a:rPr sz="1200" lang="zh-TW" dirty="0">
+              <a:rPr sz="1400" lang="zh-TW" dirty="0">
                 <a:solidFill>
                   <a:srgbClr val="000000"/>
                 </a:solidFill>
@@ -4383,11 +4383,11 @@
                 <a:spcPts val="0"/>
               </a:spcBef>
               <a:spcAft>
-                <a:spcPts val="200"/>
+                <a:spcPts val="233"/>
               </a:spcAft>
             </a:pPr>
             <a:r>
-              <a:rPr sz="1200" lang="zh-TW" dirty="0">
+              <a:rPr sz="1400" lang="zh-TW" dirty="0">
                 <a:solidFill>
                   <a:srgbClr val="000000"/>
                 </a:solidFill>
@@ -4474,8 +4474,8 @@
         </p:nvSpPr>
         <p:spPr>
           <a:xfrm>
-            <a:off x="540000" y="540000"/>
-            <a:ext cx="6480000" cy="3645000"/>
+            <a:off x="1620000" y="380000"/>
+            <a:ext cx="4320000" cy="2430000"/>
           </a:xfrm>
         </p:spPr>
       </p:sp>
@@ -4491,8 +4491,8 @@
         </p:nvSpPr>
         <p:spPr>
           <a:xfrm>
-            <a:off x="540000" y="4440000"/>
-            <a:ext cx="6480000" cy="5500000"/>
+            <a:off x="540000" y="2990000"/>
+            <a:ext cx="6480000" cy="7060000"/>
           </a:xfrm>
         </p:spPr>
         <p:txBody>
@@ -4504,11 +4504,11 @@
                 <a:spcPts val="0"/>
               </a:spcBef>
               <a:spcAft>
-                <a:spcPts val="200"/>
+                <a:spcPts val="267"/>
               </a:spcAft>
             </a:pPr>
             <a:r>
-              <a:rPr sz="1200" b="1" lang="zh-TW" dirty="0">
+              <a:rPr sz="1600" b="1" lang="zh-TW" dirty="0">
                 <a:solidFill>
                   <a:srgbClr val="000000"/>
                 </a:solidFill>
@@ -4519,7 +4519,7 @@
               <a:t>這一張的目的：</a:t>
             </a:r>
             <a:r>
-              <a:rPr sz="1200" lang="zh-TW" dirty="0">
+              <a:rPr sz="1600" lang="zh-TW" dirty="0">
                 <a:solidFill>
                   <a:srgbClr val="000000"/>
                 </a:solidFill>
@@ -4537,11 +4537,11 @@
                 <a:spcPts val="0"/>
               </a:spcBef>
               <a:spcAft>
-                <a:spcPts val="200"/>
+                <a:spcPts val="267"/>
               </a:spcAft>
             </a:pPr>
             <a:r>
-              <a:rPr sz="1200" lang="zh-TW" dirty="0">
+              <a:rPr sz="1600" lang="zh-TW" dirty="0">
                 <a:solidFill>
                   <a:srgbClr val="000000"/>
                 </a:solidFill>
@@ -4559,11 +4559,11 @@
                 <a:spcPts val="0"/>
               </a:spcBef>
               <a:spcAft>
-                <a:spcPts val="200"/>
+                <a:spcPts val="267"/>
               </a:spcAft>
             </a:pPr>
             <a:r>
-              <a:rPr sz="1200" b="1" lang="zh-TW" dirty="0">
+              <a:rPr sz="1600" b="1" lang="zh-TW" dirty="0">
                 <a:solidFill>
                   <a:srgbClr val="000000"/>
                 </a:solidFill>
@@ -4574,7 +4574,7 @@
               <a:t>第一句，三種壞法。</a:t>
             </a:r>
             <a:r>
-              <a:rPr sz="1200" lang="zh-TW" dirty="0">
+              <a:rPr sz="1600" lang="zh-TW" dirty="0">
                 <a:solidFill>
                   <a:srgbClr val="000000"/>
                 </a:solidFill>
@@ -4592,11 +4592,11 @@
                 <a:spcPts val="0"/>
               </a:spcBef>
               <a:spcAft>
-                <a:spcPts val="200"/>
+                <a:spcPts val="267"/>
               </a:spcAft>
             </a:pPr>
             <a:r>
-              <a:rPr sz="1200" b="1" lang="zh-TW" dirty="0">
+              <a:rPr sz="1600" b="1" lang="zh-TW" dirty="0">
                 <a:solidFill>
                   <a:srgbClr val="000000"/>
                 </a:solidFill>
@@ -4607,7 +4607,7 @@
               <a:t>第二句，失效對照表沒有一欄全是勾。</a:t>
             </a:r>
             <a:r>
-              <a:rPr sz="1200" lang="zh-TW" dirty="0">
+              <a:rPr sz="1600" lang="zh-TW" dirty="0">
                 <a:solidFill>
                   <a:srgbClr val="000000"/>
                 </a:solidFill>
@@ -4625,11 +4625,11 @@
                 <a:spcPts val="0"/>
               </a:spcBef>
               <a:spcAft>
-                <a:spcPts val="200"/>
+                <a:spcPts val="267"/>
               </a:spcAft>
             </a:pPr>
             <a:r>
-              <a:rPr sz="1200" b="1" lang="zh-TW" dirty="0">
+              <a:rPr sz="1600" b="1" lang="zh-TW" dirty="0">
                 <a:solidFill>
                   <a:srgbClr val="000000"/>
                 </a:solidFill>
@@ -4640,7 +4640,7 @@
               <a:t>第三句，今天第一次看真的資料。</a:t>
             </a:r>
             <a:r>
-              <a:rPr sz="1200" lang="zh-TW" dirty="0">
+              <a:rPr sz="1600" lang="zh-TW" dirty="0">
                 <a:solidFill>
                   <a:srgbClr val="000000"/>
                 </a:solidFill>
@@ -4658,11 +4658,11 @@
                 <a:spcPts val="0"/>
               </a:spcBef>
               <a:spcAft>
-                <a:spcPts val="200"/>
+                <a:spcPts val="267"/>
               </a:spcAft>
             </a:pPr>
             <a:r>
-              <a:rPr sz="1200" lang="zh-TW" dirty="0">
+              <a:rPr sz="1600" lang="zh-TW" dirty="0">
                 <a:solidFill>
                   <a:srgbClr val="000000"/>
                 </a:solidFill>
@@ -4749,8 +4749,8 @@
         </p:nvSpPr>
         <p:spPr>
           <a:xfrm>
-            <a:off x="540000" y="540000"/>
-            <a:ext cx="6480000" cy="3645000"/>
+            <a:off x="1620000" y="380000"/>
+            <a:ext cx="4320000" cy="2430000"/>
           </a:xfrm>
         </p:spPr>
       </p:sp>
@@ -4766,8 +4766,8 @@
         </p:nvSpPr>
         <p:spPr>
           <a:xfrm>
-            <a:off x="540000" y="4440000"/>
-            <a:ext cx="6480000" cy="5500000"/>
+            <a:off x="540000" y="2990000"/>
+            <a:ext cx="6480000" cy="7060000"/>
           </a:xfrm>
         </p:spPr>
         <p:txBody>
@@ -4779,11 +4779,11 @@
                 <a:spcPts val="0"/>
               </a:spcBef>
               <a:spcAft>
-                <a:spcPts val="192"/>
+                <a:spcPts val="233"/>
               </a:spcAft>
             </a:pPr>
             <a:r>
-              <a:rPr sz="1150" b="1" lang="zh-TW" dirty="0">
+              <a:rPr sz="1400" b="1" lang="zh-TW" dirty="0">
                 <a:solidFill>
                   <a:srgbClr val="000000"/>
                 </a:solidFill>
@@ -4794,7 +4794,7 @@
               <a:t>這一張的目的：</a:t>
             </a:r>
             <a:r>
-              <a:rPr sz="1150" lang="zh-TW" dirty="0">
+              <a:rPr sz="1400" lang="zh-TW" dirty="0">
                 <a:solidFill>
                   <a:srgbClr val="000000"/>
                 </a:solidFill>
@@ -4812,11 +4812,11 @@
                 <a:spcPts val="0"/>
               </a:spcBef>
               <a:spcAft>
-                <a:spcPts val="192"/>
+                <a:spcPts val="233"/>
               </a:spcAft>
             </a:pPr>
             <a:r>
-              <a:rPr sz="1150" lang="zh-TW" dirty="0">
+              <a:rPr sz="1400" lang="zh-TW" dirty="0">
                 <a:solidFill>
                   <a:srgbClr val="000000"/>
                 </a:solidFill>
@@ -4834,11 +4834,11 @@
                 <a:spcPts val="0"/>
               </a:spcBef>
               <a:spcAft>
-                <a:spcPts val="192"/>
+                <a:spcPts val="233"/>
               </a:spcAft>
             </a:pPr>
             <a:r>
-              <a:rPr sz="1150" b="1" lang="zh-TW" dirty="0">
+              <a:rPr sz="1400" b="1" lang="zh-TW" dirty="0">
                 <a:solidFill>
                   <a:srgbClr val="000000"/>
                 </a:solidFill>
@@ -4849,7 +4849,7 @@
               <a:t>第三週</a:t>
             </a:r>
             <a:r>
-              <a:rPr sz="1150" lang="zh-TW" dirty="0">
+              <a:rPr sz="1400" lang="zh-TW" dirty="0">
                 <a:solidFill>
                   <a:srgbClr val="000000"/>
                 </a:solidFill>
@@ -4860,7 +4860,7 @@
               <a:t>，我們第一次把六種感測器排在一起，用感測器實驗室玩。結論是：</a:t>
             </a:r>
             <a:r>
-              <a:rPr sz="1150" b="1" lang="zh-TW" dirty="0">
+              <a:rPr sz="1400" b="1" lang="zh-TW" dirty="0">
                 <a:solidFill>
                   <a:srgbClr val="000000"/>
                 </a:solidFill>
@@ -4871,7 +4871,7 @@
               <a:t>每一種量的東西不一樣</a:t>
             </a:r>
             <a:r>
-              <a:rPr sz="1150" lang="zh-TW" dirty="0">
+              <a:rPr sz="1400" lang="zh-TW" dirty="0">
                 <a:solidFill>
                   <a:srgbClr val="000000"/>
                 </a:solidFill>
@@ -4889,11 +4889,11 @@
                 <a:spcPts val="0"/>
               </a:spcBef>
               <a:spcAft>
-                <a:spcPts val="192"/>
+                <a:spcPts val="233"/>
               </a:spcAft>
             </a:pPr>
             <a:r>
-              <a:rPr sz="1150" b="1" lang="zh-TW" dirty="0">
+              <a:rPr sz="1400" b="1" lang="zh-TW" dirty="0">
                 <a:solidFill>
                   <a:srgbClr val="000000"/>
                 </a:solidFill>
@@ -4904,7 +4904,7 @@
               <a:t>第四週</a:t>
             </a:r>
             <a:r>
-              <a:rPr sz="1150" lang="zh-TW" dirty="0">
+              <a:rPr sz="1400" lang="zh-TW" dirty="0">
                 <a:solidFill>
                   <a:srgbClr val="000000"/>
                 </a:solidFill>
@@ -4922,11 +4922,11 @@
                 <a:spcPts val="0"/>
               </a:spcBef>
               <a:spcAft>
-                <a:spcPts val="192"/>
+                <a:spcPts val="233"/>
               </a:spcAft>
             </a:pPr>
             <a:r>
-              <a:rPr sz="1150" b="1" lang="zh-TW" dirty="0">
+              <a:rPr sz="1400" b="1" lang="zh-TW" dirty="0">
                 <a:solidFill>
                   <a:srgbClr val="000000"/>
                 </a:solidFill>
@@ -4937,7 +4937,7 @@
               <a:t>第五週</a:t>
             </a:r>
             <a:r>
-              <a:rPr sz="1150" lang="zh-TW" dirty="0">
+              <a:rPr sz="1400" lang="zh-TW" dirty="0">
                 <a:solidFill>
                   <a:srgbClr val="000000"/>
                 </a:solidFill>
@@ -4948,7 +4948,7 @@
               <a:t>，開始讀真的規格表，相機和光達。看到測距一定要追問：</a:t>
             </a:r>
             <a:r>
-              <a:rPr sz="1150" b="1" lang="zh-TW" dirty="0">
+              <a:rPr sz="1400" b="1" lang="zh-TW" dirty="0">
                 <a:solidFill>
                   <a:srgbClr val="000000"/>
                 </a:solidFill>
@@ -4959,7 +4959,7 @@
               <a:t>對多少反射率量的</a:t>
             </a:r>
             <a:r>
-              <a:rPr sz="1150" lang="zh-TW" dirty="0">
+              <a:rPr sz="1400" lang="zh-TW" dirty="0">
                 <a:solidFill>
                   <a:srgbClr val="000000"/>
                 </a:solidFill>
@@ -4977,11 +4977,11 @@
                 <a:spcPts val="0"/>
               </a:spcBef>
               <a:spcAft>
-                <a:spcPts val="192"/>
+                <a:spcPts val="233"/>
               </a:spcAft>
             </a:pPr>
             <a:r>
-              <a:rPr sz="1150" b="1" lang="zh-TW" dirty="0">
+              <a:rPr sz="1400" b="1" lang="zh-TW" dirty="0">
                 <a:solidFill>
                   <a:srgbClr val="000000"/>
                 </a:solidFill>
@@ -4992,7 +4992,7 @@
               <a:t>第六週</a:t>
             </a:r>
             <a:r>
-              <a:rPr sz="1150" lang="zh-TW" dirty="0">
+              <a:rPr sz="1400" lang="zh-TW" dirty="0">
                 <a:solidFill>
                   <a:srgbClr val="000000"/>
                 </a:solidFill>
@@ -5003,7 +5003,7 @@
               <a:t>，上週，雷達、超音波、衛星定位、IMU。大家在作業頁上填了四張小表：雷達、超音波、衛星定位、IMU 各兩顆型號，放進幾個情境，每一格判斷「這顆在這裡夠不夠用」。雷達三個情境、超音波兩個、衛星定位三個、IMU 三個，乘上兩顆，總共</a:t>
             </a:r>
             <a:r>
-              <a:rPr sz="1150" b="1" lang="zh-TW" dirty="0">
+              <a:rPr sz="1400" b="1" lang="zh-TW" dirty="0">
                 <a:solidFill>
                   <a:srgbClr val="000000"/>
                 </a:solidFill>
@@ -5014,7 +5014,7 @@
               <a:t>二十二格</a:t>
             </a:r>
             <a:r>
-              <a:rPr sz="1150" lang="zh-TW" dirty="0">
+              <a:rPr sz="1400" lang="zh-TW" dirty="0">
                 <a:solidFill>
                   <a:srgbClr val="000000"/>
                 </a:solidFill>
@@ -5025,7 +5025,7 @@
               <a:t>。判斷下來：雷達直接量速度，超音波是停車場的王，衛星定位在高樓會偏、在隧道會斷，IMU 會飄。結論是：</a:t>
             </a:r>
             <a:r>
-              <a:rPr sz="1150" b="1" lang="zh-TW" dirty="0">
+              <a:rPr sz="1400" b="1" lang="zh-TW" dirty="0">
                 <a:solidFill>
                   <a:srgbClr val="000000"/>
                 </a:solidFill>
@@ -5036,7 +5036,7 @@
               <a:t>沒有一種感測器，五個情境都贏。</a:t>
             </a:r>
             <a:r>
-              <a:rPr sz="1150" lang="zh-TW" dirty="0">
+              <a:rPr sz="1400" lang="zh-TW" dirty="0">
                 <a:solidFill>
                   <a:srgbClr val="000000"/>
                 </a:solidFill>
@@ -5054,11 +5054,11 @@
                 <a:spcPts val="0"/>
               </a:spcBef>
               <a:spcAft>
-                <a:spcPts val="192"/>
+                <a:spcPts val="233"/>
               </a:spcAft>
             </a:pPr>
             <a:r>
-              <a:rPr sz="1150" lang="zh-TW" dirty="0">
+              <a:rPr sz="1400" lang="zh-TW" dirty="0">
                 <a:solidFill>
                   <a:srgbClr val="000000"/>
                 </a:solidFill>
@@ -5069,7 +5069,7 @@
               <a:t>四週下來，其實是同一個意思：</a:t>
             </a:r>
             <a:r>
-              <a:rPr sz="1150" b="1" lang="zh-TW" dirty="0">
+              <a:rPr sz="1400" b="1" lang="zh-TW" dirty="0">
                 <a:solidFill>
                   <a:srgbClr val="000000"/>
                 </a:solidFill>
@@ -5080,7 +5080,7 @@
               <a:t>每一種感測器，都有它看不到、量不準的時候。</a:t>
             </a:r>
             <a:r>
-              <a:rPr sz="1150" lang="zh-TW" dirty="0">
+              <a:rPr sz="1400" lang="zh-TW" dirty="0">
                 <a:solidFill>
                   <a:srgbClr val="000000"/>
                 </a:solidFill>
@@ -5167,8 +5167,8 @@
         </p:nvSpPr>
         <p:spPr>
           <a:xfrm>
-            <a:off x="540000" y="540000"/>
-            <a:ext cx="6480000" cy="3645000"/>
+            <a:off x="1620000" y="380000"/>
+            <a:ext cx="4320000" cy="2430000"/>
           </a:xfrm>
         </p:spPr>
       </p:sp>
@@ -5184,8 +5184,8 @@
         </p:nvSpPr>
         <p:spPr>
           <a:xfrm>
-            <a:off x="540000" y="4440000"/>
-            <a:ext cx="6480000" cy="5500000"/>
+            <a:off x="540000" y="2990000"/>
+            <a:ext cx="6480000" cy="7060000"/>
           </a:xfrm>
         </p:spPr>
         <p:txBody>
@@ -5197,11 +5197,11 @@
                 <a:spcPts val="0"/>
               </a:spcBef>
               <a:spcAft>
-                <a:spcPts val="200"/>
+                <a:spcPts val="267"/>
               </a:spcAft>
             </a:pPr>
             <a:r>
-              <a:rPr sz="1200" b="1" lang="zh-TW" dirty="0">
+              <a:rPr sz="1600" b="1" lang="zh-TW" dirty="0">
                 <a:solidFill>
                   <a:srgbClr val="000000"/>
                 </a:solidFill>
@@ -5212,7 +5212,7 @@
               <a:t>這一張的目的：</a:t>
             </a:r>
             <a:r>
-              <a:rPr sz="1200" lang="zh-TW" dirty="0">
+              <a:rPr sz="1600" lang="zh-TW" dirty="0">
                 <a:solidFill>
                   <a:srgbClr val="000000"/>
                 </a:solidFill>
@@ -5230,11 +5230,11 @@
                 <a:spcPts val="0"/>
               </a:spcBef>
               <a:spcAft>
-                <a:spcPts val="200"/>
+                <a:spcPts val="267"/>
               </a:spcAft>
             </a:pPr>
             <a:r>
-              <a:rPr sz="1200" lang="zh-TW" dirty="0">
+              <a:rPr sz="1600" lang="zh-TW" dirty="0">
                 <a:solidFill>
                   <a:srgbClr val="000000"/>
                 </a:solidFill>
@@ -5252,11 +5252,11 @@
                 <a:spcPts val="0"/>
               </a:spcBef>
               <a:spcAft>
-                <a:spcPts val="200"/>
+                <a:spcPts val="267"/>
               </a:spcAft>
             </a:pPr>
             <a:r>
-              <a:rPr sz="1200" lang="zh-TW" dirty="0">
+              <a:rPr sz="1600" lang="zh-TW" dirty="0">
                 <a:solidFill>
                   <a:srgbClr val="000000"/>
                 </a:solidFill>
@@ -5267,7 +5267,7 @@
               <a:t>可是「不夠」有很多種。測距不夠、解析度不夠，那是規格。今天要講的是另一種：</a:t>
             </a:r>
             <a:r>
-              <a:rPr sz="1200" b="1" lang="zh-TW" dirty="0">
+              <a:rPr sz="1600" b="1" lang="zh-TW" dirty="0">
                 <a:solidFill>
                   <a:srgbClr val="000000"/>
                 </a:solidFill>
@@ -5278,7 +5278,7 @@
               <a:t>本來夠，但在某些條件下突然不夠了。</a:t>
             </a:r>
             <a:r>
-              <a:rPr sz="1200" lang="zh-TW" dirty="0">
+              <a:rPr sz="1600" lang="zh-TW" dirty="0">
                 <a:solidFill>
                   <a:srgbClr val="000000"/>
                 </a:solidFill>
@@ -5296,11 +5296,11 @@
                 <a:spcPts val="0"/>
               </a:spcBef>
               <a:spcAft>
-                <a:spcPts val="200"/>
+                <a:spcPts val="267"/>
               </a:spcAft>
             </a:pPr>
             <a:r>
-              <a:rPr sz="1200" lang="zh-TW" dirty="0">
+              <a:rPr sz="1600" lang="zh-TW" dirty="0">
                 <a:solidFill>
                   <a:srgbClr val="000000"/>
                 </a:solidFill>
@@ -5311,7 +5311,7 @@
               <a:t>所以今天問三個問題。第一，</a:t>
             </a:r>
             <a:r>
-              <a:rPr sz="1200" b="1" lang="zh-TW" dirty="0">
+              <a:rPr sz="1600" b="1" lang="zh-TW" dirty="0">
                 <a:solidFill>
                   <a:srgbClr val="000000"/>
                 </a:solidFill>
@@ -5322,7 +5322,7 @@
               <a:t>在什麼條件下壞。</a:t>
             </a:r>
             <a:r>
-              <a:rPr sz="1200" lang="zh-TW" dirty="0">
+              <a:rPr sz="1600" lang="zh-TW" dirty="0">
                 <a:solidFill>
                   <a:srgbClr val="000000"/>
                 </a:solidFill>
@@ -5333,7 +5333,7 @@
               <a:t>第二，</a:t>
             </a:r>
             <a:r>
-              <a:rPr sz="1200" b="1" lang="zh-TW" dirty="0">
+              <a:rPr sz="1600" b="1" lang="zh-TW" dirty="0">
                 <a:solidFill>
                   <a:srgbClr val="000000"/>
                 </a:solidFill>
@@ -5344,7 +5344,7 @@
               <a:t>壞成什麼樣子</a:t>
             </a:r>
             <a:r>
-              <a:rPr sz="1200" lang="zh-TW" dirty="0">
+              <a:rPr sz="1600" lang="zh-TW" dirty="0">
                 <a:solidFill>
                   <a:srgbClr val="000000"/>
                 </a:solidFill>
@@ -5355,7 +5355,7 @@
               <a:t>：是什麼都看不到，還是看錯了。第三，</a:t>
             </a:r>
             <a:r>
-              <a:rPr sz="1200" b="1" lang="zh-TW" dirty="0">
+              <a:rPr sz="1600" b="1" lang="zh-TW" dirty="0">
                 <a:solidFill>
                   <a:srgbClr val="000000"/>
                 </a:solidFill>
@@ -5366,7 +5366,7 @@
               <a:t>壞了會不會說</a:t>
             </a:r>
             <a:r>
-              <a:rPr sz="1200" lang="zh-TW" dirty="0">
+              <a:rPr sz="1600" lang="zh-TW" dirty="0">
                 <a:solidFill>
                   <a:srgbClr val="000000"/>
                 </a:solidFill>
@@ -5384,11 +5384,11 @@
                 <a:spcPts val="0"/>
               </a:spcBef>
               <a:spcAft>
-                <a:spcPts val="200"/>
+                <a:spcPts val="267"/>
               </a:spcAft>
             </a:pPr>
             <a:r>
-              <a:rPr sz="1200" lang="zh-TW" dirty="0">
+              <a:rPr sz="1600" lang="zh-TW" dirty="0">
                 <a:solidFill>
                   <a:srgbClr val="000000"/>
                 </a:solidFill>
@@ -5399,7 +5399,7 @@
               <a:t>先想一個生活的例子。一個好的駕駛，不是眼睛特別好，是</a:t>
             </a:r>
             <a:r>
-              <a:rPr sz="1200" b="1" lang="zh-TW" dirty="0">
+              <a:rPr sz="1600" b="1" lang="zh-TW" dirty="0">
                 <a:solidFill>
                   <a:srgbClr val="000000"/>
                 </a:solidFill>
@@ -5410,7 +5410,7 @@
               <a:t>知道自己什麼時候看不清楚</a:t>
             </a:r>
             <a:r>
-              <a:rPr sz="1200" lang="zh-TW" dirty="0">
+              <a:rPr sz="1600" lang="zh-TW" dirty="0">
                 <a:solidFill>
                   <a:srgbClr val="000000"/>
                 </a:solidFill>
@@ -5497,8 +5497,8 @@
         </p:nvSpPr>
         <p:spPr>
           <a:xfrm>
-            <a:off x="540000" y="540000"/>
-            <a:ext cx="6480000" cy="3645000"/>
+            <a:off x="1620000" y="380000"/>
+            <a:ext cx="4320000" cy="2430000"/>
           </a:xfrm>
         </p:spPr>
       </p:sp>
@@ -5514,8 +5514,8 @@
         </p:nvSpPr>
         <p:spPr>
           <a:xfrm>
-            <a:off x="540000" y="4440000"/>
-            <a:ext cx="6480000" cy="5500000"/>
+            <a:off x="540000" y="2990000"/>
+            <a:ext cx="6480000" cy="7060000"/>
           </a:xfrm>
         </p:spPr>
         <p:txBody>
@@ -5527,11 +5527,11 @@
                 <a:spcPts val="0"/>
               </a:spcBef>
               <a:spcAft>
-                <a:spcPts val="200"/>
+                <a:spcPts val="233"/>
               </a:spcAft>
             </a:pPr>
             <a:r>
-              <a:rPr sz="1200" b="1" lang="zh-TW" dirty="0">
+              <a:rPr sz="1400" b="1" lang="zh-TW" dirty="0">
                 <a:solidFill>
                   <a:srgbClr val="000000"/>
                 </a:solidFill>
@@ -5542,7 +5542,7 @@
               <a:t>這一張的目的：</a:t>
             </a:r>
             <a:r>
-              <a:rPr sz="1200" lang="zh-TW" dirty="0">
+              <a:rPr sz="1400" lang="zh-TW" dirty="0">
                 <a:solidFill>
                   <a:srgbClr val="000000"/>
                 </a:solidFill>
@@ -5560,11 +5560,11 @@
                 <a:spcPts val="0"/>
               </a:spcBef>
               <a:spcAft>
-                <a:spcPts val="200"/>
+                <a:spcPts val="233"/>
               </a:spcAft>
             </a:pPr>
             <a:r>
-              <a:rPr sz="1200" lang="zh-TW" dirty="0">
+              <a:rPr sz="1400" lang="zh-TW" dirty="0">
                 <a:solidFill>
                   <a:srgbClr val="000000"/>
                 </a:solidFill>
@@ -5582,11 +5582,11 @@
                 <a:spcPts val="0"/>
               </a:spcBef>
               <a:spcAft>
-                <a:spcPts val="200"/>
+                <a:spcPts val="233"/>
               </a:spcAft>
             </a:pPr>
             <a:r>
-              <a:rPr sz="1200" b="1" lang="zh-TW" dirty="0">
+              <a:rPr sz="1400" b="1" lang="zh-TW" dirty="0">
                 <a:solidFill>
                   <a:srgbClr val="000000"/>
                 </a:solidFill>
@@ -5597,7 +5597,7 @@
               <a:t>第一種，看不到。</a:t>
             </a:r>
             <a:r>
-              <a:rPr sz="1200" lang="zh-TW" dirty="0">
+              <a:rPr sz="1400" lang="zh-TW" dirty="0">
                 <a:solidFill>
                   <a:srgbClr val="000000"/>
                 </a:solidFill>
@@ -5615,11 +5615,11 @@
                 <a:spcPts val="0"/>
               </a:spcBef>
               <a:spcAft>
-                <a:spcPts val="200"/>
+                <a:spcPts val="233"/>
               </a:spcAft>
             </a:pPr>
             <a:r>
-              <a:rPr sz="1200" b="1" lang="zh-TW" dirty="0">
+              <a:rPr sz="1400" b="1" lang="zh-TW" dirty="0">
                 <a:solidFill>
                   <a:srgbClr val="000000"/>
                 </a:solidFill>
@@ -5630,7 +5630,7 @@
               <a:t>第二種，看錯。</a:t>
             </a:r>
             <a:r>
-              <a:rPr sz="1200" lang="zh-TW" dirty="0">
+              <a:rPr sz="1400" lang="zh-TW" dirty="0">
                 <a:solidFill>
                   <a:srgbClr val="000000"/>
                 </a:solidFill>
@@ -5648,11 +5648,11 @@
                 <a:spcPts val="0"/>
               </a:spcBef>
               <a:spcAft>
-                <a:spcPts val="200"/>
+                <a:spcPts val="233"/>
               </a:spcAft>
             </a:pPr>
             <a:r>
-              <a:rPr sz="1200" b="1" lang="zh-TW" dirty="0">
+              <a:rPr sz="1400" b="1" lang="zh-TW" dirty="0">
                 <a:solidFill>
                   <a:srgbClr val="000000"/>
                 </a:solidFill>
@@ -5663,7 +5663,7 @@
               <a:t>第三種，看不到，卻不說。</a:t>
             </a:r>
             <a:r>
-              <a:rPr sz="1200" lang="zh-TW" dirty="0">
+              <a:rPr sz="1400" lang="zh-TW" dirty="0">
                 <a:solidFill>
                   <a:srgbClr val="000000"/>
                 </a:solidFill>
@@ -5681,11 +5681,11 @@
                 <a:spcPts val="0"/>
               </a:spcBef>
               <a:spcAft>
-                <a:spcPts val="200"/>
+                <a:spcPts val="233"/>
               </a:spcAft>
             </a:pPr>
             <a:r>
-              <a:rPr sz="1200" lang="zh-TW" dirty="0">
+              <a:rPr sz="1400" lang="zh-TW" dirty="0">
                 <a:solidFill>
                   <a:srgbClr val="000000"/>
                 </a:solidFill>
@@ -5696,7 +5696,7 @@
               <a:t>為什麼第三種最危險？打個比方：汽車的油表。沒油不可怕，油表會亮燈、你會去加油。可怕的是</a:t>
             </a:r>
             <a:r>
-              <a:rPr sz="1200" b="1" lang="zh-TW" dirty="0">
+              <a:rPr sz="1400" b="1" lang="zh-TW" dirty="0">
                 <a:solidFill>
                   <a:srgbClr val="000000"/>
                 </a:solidFill>
@@ -5707,7 +5707,7 @@
               <a:t>油表壞了，還一直顯示滿格</a:t>
             </a:r>
             <a:r>
-              <a:rPr sz="1200" lang="zh-TW" dirty="0">
+              <a:rPr sz="1400" lang="zh-TW" dirty="0">
                 <a:solidFill>
                   <a:srgbClr val="000000"/>
                 </a:solidFill>
@@ -5725,11 +5725,11 @@
                 <a:spcPts val="0"/>
               </a:spcBef>
               <a:spcAft>
-                <a:spcPts val="200"/>
+                <a:spcPts val="233"/>
               </a:spcAft>
             </a:pPr>
             <a:r>
-              <a:rPr sz="1200" lang="zh-TW" dirty="0">
+              <a:rPr sz="1400" lang="zh-TW" dirty="0">
                 <a:solidFill>
                   <a:srgbClr val="000000"/>
                 </a:solidFill>
@@ -5816,8 +5816,8 @@
         </p:nvSpPr>
         <p:spPr>
           <a:xfrm>
-            <a:off x="540000" y="540000"/>
-            <a:ext cx="6480000" cy="3645000"/>
+            <a:off x="1620000" y="380000"/>
+            <a:ext cx="4320000" cy="2430000"/>
           </a:xfrm>
         </p:spPr>
       </p:sp>
@@ -5833,8 +5833,8 @@
         </p:nvSpPr>
         <p:spPr>
           <a:xfrm>
-            <a:off x="540000" y="4440000"/>
-            <a:ext cx="6480000" cy="5500000"/>
+            <a:off x="540000" y="2990000"/>
+            <a:ext cx="6480000" cy="7060000"/>
           </a:xfrm>
         </p:spPr>
         <p:txBody>
@@ -5846,11 +5846,11 @@
                 <a:spcPts val="0"/>
               </a:spcBef>
               <a:spcAft>
-                <a:spcPts val="133"/>
+                <a:spcPts val="150"/>
               </a:spcAft>
             </a:pPr>
             <a:r>
-              <a:rPr sz="800" b="1" lang="zh-TW" dirty="0">
+              <a:rPr sz="900" b="1" lang="zh-TW" dirty="0">
                 <a:solidFill>
                   <a:srgbClr val="000000"/>
                 </a:solidFill>
@@ -5861,7 +5861,7 @@
               <a:t>這一張的目的：</a:t>
             </a:r>
             <a:r>
-              <a:rPr sz="800" lang="zh-TW" dirty="0">
+              <a:rPr sz="900" lang="zh-TW" dirty="0">
                 <a:solidFill>
                   <a:srgbClr val="000000"/>
                 </a:solidFill>
@@ -5879,11 +5879,11 @@
                 <a:spcPts val="0"/>
               </a:spcBef>
               <a:spcAft>
-                <a:spcPts val="133"/>
+                <a:spcPts val="150"/>
               </a:spcAft>
             </a:pPr>
             <a:r>
-              <a:rPr sz="800" lang="zh-TW" dirty="0">
+              <a:rPr sz="900" lang="zh-TW" dirty="0">
                 <a:solidFill>
                   <a:srgbClr val="000000"/>
                 </a:solidFill>
@@ -5901,11 +5901,11 @@
                 <a:spcPts val="0"/>
               </a:spcBef>
               <a:spcAft>
-                <a:spcPts val="133"/>
+                <a:spcPts val="150"/>
               </a:spcAft>
             </a:pPr>
             <a:r>
-              <a:rPr sz="800" b="1" lang="zh-TW" dirty="0">
+              <a:rPr sz="900" b="1" lang="zh-TW" dirty="0">
                 <a:solidFill>
                   <a:srgbClr val="000000"/>
                 </a:solidFill>
@@ -5916,7 +5916,7 @@
               <a:t>第一列，大雨、濃霧。</a:t>
             </a:r>
             <a:r>
-              <a:rPr sz="800" lang="zh-TW" dirty="0">
+              <a:rPr sz="900" lang="zh-TW" dirty="0">
                 <a:solidFill>
                   <a:srgbClr val="000000"/>
                 </a:solidFill>
@@ -5934,11 +5934,11 @@
                 <a:spcPts val="0"/>
               </a:spcBef>
               <a:spcAft>
-                <a:spcPts val="133"/>
+                <a:spcPts val="150"/>
               </a:spcAft>
             </a:pPr>
             <a:r>
-              <a:rPr sz="800" b="1" lang="zh-TW" dirty="0">
+              <a:rPr sz="900" b="1" lang="zh-TW" dirty="0">
                 <a:solidFill>
                   <a:srgbClr val="000000"/>
                 </a:solidFill>
@@ -5949,7 +5949,7 @@
               <a:t>第二列，夜間。</a:t>
             </a:r>
             <a:r>
-              <a:rPr sz="800" lang="zh-TW" dirty="0">
+              <a:rPr sz="900" lang="zh-TW" dirty="0">
                 <a:solidFill>
                   <a:srgbClr val="000000"/>
                 </a:solidFill>
@@ -5967,11 +5967,11 @@
                 <a:spcPts val="0"/>
               </a:spcBef>
               <a:spcAft>
-                <a:spcPts val="133"/>
+                <a:spcPts val="150"/>
               </a:spcAft>
             </a:pPr>
             <a:r>
-              <a:rPr sz="800" b="1" lang="zh-TW" dirty="0">
+              <a:rPr sz="900" b="1" lang="zh-TW" dirty="0">
                 <a:solidFill>
                   <a:srgbClr val="000000"/>
                 </a:solidFill>
@@ -5982,7 +5982,7 @@
               <a:t>第三列，逆光、隧道出口。</a:t>
             </a:r>
             <a:r>
-              <a:rPr sz="800" lang="zh-TW" dirty="0">
+              <a:rPr sz="900" lang="zh-TW" dirty="0">
                 <a:solidFill>
                   <a:srgbClr val="000000"/>
                 </a:solidFill>
@@ -6000,11 +6000,11 @@
                 <a:spcPts val="0"/>
               </a:spcBef>
               <a:spcAft>
-                <a:spcPts val="133"/>
+                <a:spcPts val="150"/>
               </a:spcAft>
             </a:pPr>
             <a:r>
-              <a:rPr sz="800" b="1" lang="zh-TW" dirty="0">
+              <a:rPr sz="900" b="1" lang="zh-TW" dirty="0">
                 <a:solidFill>
                   <a:srgbClr val="000000"/>
                 </a:solidFill>
@@ -6015,7 +6015,7 @@
               <a:t>第四列，黑車、玻璃、鏡面。</a:t>
             </a:r>
             <a:r>
-              <a:rPr sz="800" lang="zh-TW" dirty="0">
+              <a:rPr sz="900" lang="zh-TW" dirty="0">
                 <a:solidFill>
                   <a:srgbClr val="000000"/>
                 </a:solidFill>
@@ -6033,11 +6033,11 @@
                 <a:spcPts val="0"/>
               </a:spcBef>
               <a:spcAft>
-                <a:spcPts val="133"/>
+                <a:spcPts val="150"/>
               </a:spcAft>
             </a:pPr>
             <a:r>
-              <a:rPr sz="800" b="1" lang="zh-TW" dirty="0">
+              <a:rPr sz="900" b="1" lang="zh-TW" dirty="0">
                 <a:solidFill>
                   <a:srgbClr val="000000"/>
                 </a:solidFill>
@@ -6048,7 +6048,7 @@
               <a:t>第五列，靜止物、頭頂的橋。</a:t>
             </a:r>
             <a:r>
-              <a:rPr sz="800" lang="zh-TW" dirty="0">
+              <a:rPr sz="900" lang="zh-TW" dirty="0">
                 <a:solidFill>
                   <a:srgbClr val="000000"/>
                 </a:solidFill>
@@ -6066,11 +6066,11 @@
                 <a:spcPts val="0"/>
               </a:spcBef>
               <a:spcAft>
-                <a:spcPts val="133"/>
+                <a:spcPts val="150"/>
               </a:spcAft>
             </a:pPr>
             <a:r>
-              <a:rPr sz="800" b="1" lang="zh-TW" dirty="0">
+              <a:rPr sz="900" b="1" lang="zh-TW" dirty="0">
                 <a:solidFill>
                   <a:srgbClr val="000000"/>
                 </a:solidFill>
@@ -6081,7 +6081,7 @@
               <a:t>第六列，遠處的行人、機車。</a:t>
             </a:r>
             <a:r>
-              <a:rPr sz="800" lang="zh-TW" dirty="0">
+              <a:rPr sz="900" lang="zh-TW" dirty="0">
                 <a:solidFill>
                   <a:srgbClr val="000000"/>
                 </a:solidFill>
@@ -6099,11 +6099,11 @@
                 <a:spcPts val="0"/>
               </a:spcBef>
               <a:spcAft>
-                <a:spcPts val="133"/>
+                <a:spcPts val="150"/>
               </a:spcAft>
             </a:pPr>
             <a:r>
-              <a:rPr sz="800" b="1" lang="zh-TW" dirty="0">
+              <a:rPr sz="900" b="1" lang="zh-TW" dirty="0">
                 <a:solidFill>
                   <a:srgbClr val="000000"/>
                 </a:solidFill>
@@ -6114,7 +6114,7 @@
               <a:t>第七列，被泥巴、冰雪蓋住。</a:t>
             </a:r>
             <a:r>
-              <a:rPr sz="800" lang="zh-TW" dirty="0">
+              <a:rPr sz="900" lang="zh-TW" dirty="0">
                 <a:solidFill>
                   <a:srgbClr val="000000"/>
                 </a:solidFill>
@@ -6132,11 +6132,11 @@
                 <a:spcPts val="0"/>
               </a:spcBef>
               <a:spcAft>
-                <a:spcPts val="133"/>
+                <a:spcPts val="150"/>
               </a:spcAft>
             </a:pPr>
             <a:r>
-              <a:rPr sz="800" b="1" lang="zh-TW" dirty="0">
+              <a:rPr sz="900" b="1" lang="zh-TW" dirty="0">
                 <a:solidFill>
                   <a:srgbClr val="000000"/>
                 </a:solidFill>
@@ -6147,7 +6147,7 @@
               <a:t>第八列，高樓窄巷、隧道。</a:t>
             </a:r>
             <a:r>
-              <a:rPr sz="800" lang="zh-TW" dirty="0">
+              <a:rPr sz="900" lang="zh-TW" dirty="0">
                 <a:solidFill>
                   <a:srgbClr val="000000"/>
                 </a:solidFill>
@@ -6165,11 +6165,11 @@
                 <a:spcPts val="0"/>
               </a:spcBef>
               <a:spcAft>
-                <a:spcPts val="133"/>
+                <a:spcPts val="150"/>
               </a:spcAft>
             </a:pPr>
             <a:r>
-              <a:rPr sz="800" lang="zh-TW" dirty="0">
+              <a:rPr sz="900" lang="zh-TW" dirty="0">
                 <a:solidFill>
                   <a:srgbClr val="000000"/>
                 </a:solidFill>
@@ -6180,7 +6180,7 @@
               <a:t>最後請各位直著看，找一找：</a:t>
             </a:r>
             <a:r>
-              <a:rPr sz="800" b="1" lang="zh-TW" dirty="0">
+              <a:rPr sz="900" b="1" lang="zh-TW" dirty="0">
                 <a:solidFill>
                   <a:srgbClr val="000000"/>
                 </a:solidFill>
@@ -6191,7 +6191,7 @@
               <a:t>有沒有哪一欄全部是打勾？</a:t>
             </a:r>
             <a:r>
-              <a:rPr sz="800" lang="zh-TW" dirty="0">
+              <a:rPr sz="900" lang="zh-TW" dirty="0">
                 <a:solidFill>
                   <a:srgbClr val="000000"/>
                 </a:solidFill>
@@ -6278,8 +6278,8 @@
         </p:nvSpPr>
         <p:spPr>
           <a:xfrm>
-            <a:off x="540000" y="540000"/>
-            <a:ext cx="6480000" cy="3645000"/>
+            <a:off x="1620000" y="380000"/>
+            <a:ext cx="4320000" cy="2430000"/>
           </a:xfrm>
         </p:spPr>
       </p:sp>
@@ -6295,8 +6295,8 @@
         </p:nvSpPr>
         <p:spPr>
           <a:xfrm>
-            <a:off x="540000" y="4440000"/>
-            <a:ext cx="6480000" cy="5500000"/>
+            <a:off x="540000" y="2990000"/>
+            <a:ext cx="6480000" cy="7060000"/>
           </a:xfrm>
         </p:spPr>
         <p:txBody>
@@ -6308,11 +6308,11 @@
                 <a:spcPts val="0"/>
               </a:spcBef>
               <a:spcAft>
-                <a:spcPts val="142"/>
+                <a:spcPts val="175"/>
               </a:spcAft>
             </a:pPr>
             <a:r>
-              <a:rPr sz="850" b="1" lang="zh-TW" dirty="0">
+              <a:rPr sz="1050" b="1" lang="zh-TW" dirty="0">
                 <a:solidFill>
                   <a:srgbClr val="000000"/>
                 </a:solidFill>
@@ -6323,7 +6323,7 @@
               <a:t>這一張的目的：</a:t>
             </a:r>
             <a:r>
-              <a:rPr sz="850" lang="zh-TW" dirty="0">
+              <a:rPr sz="1050" lang="zh-TW" dirty="0">
                 <a:solidFill>
                   <a:srgbClr val="000000"/>
                 </a:solidFill>
@@ -6341,11 +6341,11 @@
                 <a:spcPts val="0"/>
               </a:spcBef>
               <a:spcAft>
-                <a:spcPts val="142"/>
+                <a:spcPts val="175"/>
               </a:spcAft>
             </a:pPr>
             <a:r>
-              <a:rPr sz="850" lang="zh-TW" dirty="0">
+              <a:rPr sz="1050" lang="zh-TW" dirty="0">
                 <a:solidFill>
                   <a:srgbClr val="000000"/>
                 </a:solidFill>
@@ -6356,7 +6356,7 @@
               <a:t>先講天氣。先看左邊兩張照片。</a:t>
             </a:r>
             <a:r>
-              <a:rPr sz="850" b="1" lang="zh-TW" dirty="0">
+              <a:rPr sz="1050" b="1" lang="zh-TW" dirty="0">
                 <a:solidFill>
                   <a:srgbClr val="000000"/>
                 </a:solidFill>
@@ -6367,7 +6367,7 @@
               <a:t>左邊，雨天從擋風玻璃看出去</a:t>
             </a:r>
             <a:r>
-              <a:rPr sz="850" lang="zh-TW" dirty="0">
+              <a:rPr sz="1050" lang="zh-TW" dirty="0">
                 <a:solidFill>
                   <a:srgbClr val="000000"/>
                 </a:solidFill>
@@ -6378,7 +6378,7 @@
               <a:t>，前面那台車只剩一團模糊的影子。車上的相機大多也裝在擋風玻璃後面，下雨的時候，它看到的就是這個樣子，雨刷刷過去的那一下才清楚一點。</a:t>
             </a:r>
             <a:r>
-              <a:rPr sz="850" b="1" lang="zh-TW" dirty="0">
+              <a:rPr sz="1050" b="1" lang="zh-TW" dirty="0">
                 <a:solidFill>
                   <a:srgbClr val="000000"/>
                 </a:solidFill>
@@ -6389,7 +6389,7 @@
               <a:t>右邊，起霧的彎道</a:t>
             </a:r>
             <a:r>
-              <a:rPr sz="850" lang="zh-TW" dirty="0">
+              <a:rPr sz="1050" lang="zh-TW" dirty="0">
                 <a:solidFill>
                   <a:srgbClr val="000000"/>
                 </a:solidFill>
@@ -6407,11 +6407,11 @@
                 <a:spcPts val="0"/>
               </a:spcBef>
               <a:spcAft>
-                <a:spcPts val="142"/>
+                <a:spcPts val="175"/>
               </a:spcAft>
             </a:pPr>
             <a:r>
-              <a:rPr sz="850" lang="zh-TW" dirty="0">
+              <a:rPr sz="1050" lang="zh-TW" dirty="0">
                 <a:solidFill>
                   <a:srgbClr val="000000"/>
                 </a:solidFill>
@@ -6422,7 +6422,7 @@
               <a:t>第六週講過一個規則：</a:t>
             </a:r>
             <a:r>
-              <a:rPr sz="850" b="1" lang="zh-TW" dirty="0">
+              <a:rPr sz="1050" b="1" lang="zh-TW" dirty="0">
                 <a:solidFill>
                   <a:srgbClr val="000000"/>
                 </a:solidFill>
@@ -6433,7 +6433,7 @@
               <a:t>波長比障礙物大，就繞過去；比障礙物小，就被擋住、被打散。</a:t>
             </a:r>
             <a:r>
-              <a:rPr sz="850" lang="zh-TW" dirty="0">
+              <a:rPr sz="1050" lang="zh-TW" dirty="0">
                 <a:solidFill>
                   <a:srgbClr val="000000"/>
                 </a:solidFill>
@@ -6451,11 +6451,11 @@
                 <a:spcPts val="0"/>
               </a:spcBef>
               <a:spcAft>
-                <a:spcPts val="142"/>
+                <a:spcPts val="175"/>
               </a:spcAft>
             </a:pPr>
             <a:r>
-              <a:rPr sz="850" lang="zh-TW" dirty="0">
+              <a:rPr sz="1050" lang="zh-TW" dirty="0">
                 <a:solidFill>
                   <a:srgbClr val="000000"/>
                 </a:solidFill>
@@ -6473,11 +6473,11 @@
                 <a:spcPts val="0"/>
               </a:spcBef>
               <a:spcAft>
-                <a:spcPts val="142"/>
+                <a:spcPts val="175"/>
               </a:spcAft>
             </a:pPr>
             <a:r>
-              <a:rPr sz="850" b="1" lang="zh-TW" dirty="0">
+              <a:rPr sz="1050" b="1" lang="zh-TW" dirty="0">
                 <a:solidFill>
                   <a:srgbClr val="000000"/>
                 </a:solidFill>
@@ -6488,7 +6488,7 @@
               <a:t>左邊那支，從 11:18 播到 13:20。</a:t>
             </a:r>
             <a:r>
-              <a:rPr sz="850" lang="zh-TW" dirty="0">
+              <a:rPr sz="1050" lang="zh-TW" dirty="0">
                 <a:solidFill>
                   <a:srgbClr val="000000"/>
                 </a:solidFill>
@@ -6506,11 +6506,11 @@
                 <a:spcPts val="0"/>
               </a:spcBef>
               <a:spcAft>
-                <a:spcPts val="142"/>
+                <a:spcPts val="175"/>
               </a:spcAft>
             </a:pPr>
             <a:r>
-              <a:rPr sz="850" b="1" lang="zh-TW" dirty="0">
+              <a:rPr sz="1050" b="1" lang="zh-TW" dirty="0">
                 <a:solidFill>
                   <a:srgbClr val="000000"/>
                 </a:solidFill>
@@ -6521,7 +6521,7 @@
               <a:t>11:18 霧那一關。</a:t>
             </a:r>
             <a:r>
-              <a:rPr sz="850" lang="zh-TW" dirty="0">
+              <a:rPr sz="1050" lang="zh-TW" dirty="0">
                 <a:solidFill>
                   <a:srgbClr val="000000"/>
                 </a:solidFill>
@@ -6532,7 +6532,7 @@
               <a:t>他自己說，用眼睛已經看不到霧後面有小孩，光達那台照樣急煞，假人沒被撞到。換相機那台，</a:t>
             </a:r>
             <a:r>
-              <a:rPr sz="850" b="1" lang="zh-TW" dirty="0">
+              <a:rPr sz="1050" b="1" lang="zh-TW" dirty="0">
                 <a:solidFill>
                   <a:srgbClr val="000000"/>
                 </a:solidFill>
@@ -6543,7 +6543,7 @@
               <a:t>12:11</a:t>
             </a:r>
             <a:r>
-              <a:rPr sz="850" lang="zh-TW" dirty="0">
+              <a:rPr sz="1050" lang="zh-TW" dirty="0">
                 <a:solidFill>
                   <a:srgbClr val="000000"/>
                 </a:solidFill>
@@ -6561,11 +6561,11 @@
                 <a:spcPts val="0"/>
               </a:spcBef>
               <a:spcAft>
-                <a:spcPts val="142"/>
+                <a:spcPts val="175"/>
               </a:spcAft>
             </a:pPr>
             <a:r>
-              <a:rPr sz="850" b="1" lang="zh-TW" dirty="0">
+              <a:rPr sz="1050" b="1" lang="zh-TW" dirty="0">
                 <a:solidFill>
                   <a:srgbClr val="000000"/>
                 </a:solidFill>
@@ -6576,7 +6576,7 @@
               <a:t>12:21 雨那一關。</a:t>
             </a:r>
             <a:r>
-              <a:rPr sz="850" lang="zh-TW" dirty="0">
+              <a:rPr sz="1050" lang="zh-TW" dirty="0">
                 <a:solidFill>
                   <a:srgbClr val="000000"/>
                 </a:solidFill>
@@ -6587,7 +6587,7 @@
               <a:t>用水車灑出一道很大的水牆。他說相機那台，一開始下雨，小孩就從畫面上不見了。光達那台「直到最後一刻才煞住」，也算過關；</a:t>
             </a:r>
             <a:r>
-              <a:rPr sz="850" b="1" lang="zh-TW" dirty="0">
+              <a:rPr sz="1050" b="1" lang="zh-TW" dirty="0">
                 <a:solidFill>
                   <a:srgbClr val="000000"/>
                 </a:solidFill>
@@ -6598,7 +6598,7 @@
               <a:t>13:15</a:t>
             </a:r>
             <a:r>
-              <a:rPr sz="850" lang="zh-TW" dirty="0">
+              <a:rPr sz="1050" lang="zh-TW" dirty="0">
                 <a:solidFill>
                   <a:srgbClr val="000000"/>
                 </a:solidFill>
@@ -6616,11 +6616,11 @@
                 <a:spcPts val="0"/>
               </a:spcBef>
               <a:spcAft>
-                <a:spcPts val="142"/>
+                <a:spcPts val="175"/>
               </a:spcAft>
             </a:pPr>
             <a:r>
-              <a:rPr sz="850" lang="zh-TW" dirty="0">
+              <a:rPr sz="1050" lang="zh-TW" dirty="0">
                 <a:solidFill>
                   <a:srgbClr val="000000"/>
                 </a:solidFill>
@@ -6631,7 +6631,7 @@
               <a:t>這支影片要提醒各位兩件事。第一，它是</a:t>
             </a:r>
             <a:r>
-              <a:rPr sz="850" b="1" lang="zh-TW" dirty="0">
+              <a:rPr sz="1050" b="1" lang="zh-TW" dirty="0">
                 <a:solidFill>
                   <a:srgbClr val="000000"/>
                 </a:solidFill>
@@ -6642,7 +6642,7 @@
               <a:t>公開示範，不是正式的科學實驗</a:t>
             </a:r>
             <a:r>
-              <a:rPr sz="850" lang="zh-TW" dirty="0">
+              <a:rPr sz="1050" lang="zh-TW" dirty="0">
                 <a:solidFill>
                   <a:srgbClr val="000000"/>
                 </a:solidFill>
@@ -6653,7 +6653,7 @@
               <a:t>：光達那台車上有人穿著光達廠商 Luminar 的衣服，網路上對測試方法也有很多討論。第二，它</a:t>
             </a:r>
             <a:r>
-              <a:rPr sz="850" b="1" lang="zh-TW" dirty="0">
+              <a:rPr sz="1050" b="1" lang="zh-TW" dirty="0">
                 <a:solidFill>
                   <a:srgbClr val="000000"/>
                 </a:solidFill>
@@ -6664,7 +6664,7 @@
               <a:t>只比相機和光達，沒有測雷達</a:t>
             </a:r>
             <a:r>
-              <a:rPr sz="850" lang="zh-TW" dirty="0">
+              <a:rPr sz="1050" lang="zh-TW" dirty="0">
                 <a:solidFill>
                   <a:srgbClr val="000000"/>
                 </a:solidFill>
@@ -6682,11 +6682,11 @@
                 <a:spcPts val="0"/>
               </a:spcBef>
               <a:spcAft>
-                <a:spcPts val="142"/>
+                <a:spcPts val="175"/>
               </a:spcAft>
             </a:pPr>
             <a:r>
-              <a:rPr sz="850" b="1" lang="zh-TW" dirty="0">
+              <a:rPr sz="1050" b="1" lang="zh-TW" dirty="0">
                 <a:solidFill>
                   <a:srgbClr val="000000"/>
                 </a:solidFill>
@@ -6697,7 +6697,7 @@
               <a:t>右邊那支，從 0:00 播到 1:00。</a:t>
             </a:r>
             <a:r>
-              <a:rPr sz="850" lang="zh-TW" dirty="0">
+              <a:rPr sz="1050" lang="zh-TW" dirty="0">
                 <a:solidFill>
                   <a:srgbClr val="000000"/>
                 </a:solidFill>
@@ -6715,11 +6715,11 @@
                 <a:spcPts val="0"/>
               </a:spcBef>
               <a:spcAft>
-                <a:spcPts val="142"/>
+                <a:spcPts val="175"/>
               </a:spcAft>
             </a:pPr>
             <a:r>
-              <a:rPr sz="850" lang="zh-TW" dirty="0">
+              <a:rPr sz="1050" lang="zh-TW" dirty="0">
                 <a:solidFill>
                   <a:srgbClr val="000000"/>
                 </a:solidFill>
@@ -6730,7 +6730,7 @@
               <a:t>畫面大的那一塊是光達點雲，從上往下看；右上角的小格是相機。請各位比兩邊：相機那一格，雨刷一直在刷，畫面一片灰綠，前面的車只剩模糊的影子；光達那一塊，</a:t>
             </a:r>
             <a:r>
-              <a:rPr sz="850" b="1" lang="zh-TW" dirty="0">
+              <a:rPr sz="1050" b="1" lang="zh-TW" dirty="0">
                 <a:solidFill>
                   <a:srgbClr val="000000"/>
                 </a:solidFill>
@@ -6741,7 +6741,7 @@
               <a:t>護欄和車道線還是一條一條畫得出來</a:t>
             </a:r>
             <a:r>
-              <a:rPr sz="850" lang="zh-TW" dirty="0">
+              <a:rPr sz="1050" lang="zh-TW" dirty="0">
                 <a:solidFill>
                   <a:srgbClr val="000000"/>
                 </a:solidFill>
@@ -6759,11 +6759,11 @@
                 <a:spcPts val="0"/>
               </a:spcBef>
               <a:spcAft>
-                <a:spcPts val="142"/>
+                <a:spcPts val="175"/>
               </a:spcAft>
             </a:pPr>
             <a:r>
-              <a:rPr sz="850" lang="zh-TW" dirty="0">
+              <a:rPr sz="1050" lang="zh-TW" dirty="0">
                 <a:solidFill>
                   <a:srgbClr val="000000"/>
                 </a:solidFill>
@@ -6774,7 +6774,7 @@
               <a:t>所以這一列的結論是：</a:t>
             </a:r>
             <a:r>
-              <a:rPr sz="850" b="1" lang="zh-TW" dirty="0">
+              <a:rPr sz="1050" b="1" lang="zh-TW" dirty="0">
                 <a:solidFill>
                   <a:srgbClr val="000000"/>
                 </a:solidFill>
@@ -6785,7 +6785,7 @@
               <a:t>光達會變差，但不是全瞎</a:t>
             </a:r>
             <a:r>
-              <a:rPr sz="850" lang="zh-TW" dirty="0">
+              <a:rPr sz="1050" lang="zh-TW" dirty="0">
                 <a:solidFill>
                   <a:srgbClr val="000000"/>
                 </a:solidFill>
@@ -6872,8 +6872,8 @@
         </p:nvSpPr>
         <p:spPr>
           <a:xfrm>
-            <a:off x="540000" y="540000"/>
-            <a:ext cx="6480000" cy="3645000"/>
+            <a:off x="1620000" y="380000"/>
+            <a:ext cx="4320000" cy="2430000"/>
           </a:xfrm>
         </p:spPr>
       </p:sp>
@@ -6889,8 +6889,8 @@
         </p:nvSpPr>
         <p:spPr>
           <a:xfrm>
-            <a:off x="540000" y="4440000"/>
-            <a:ext cx="6480000" cy="5500000"/>
+            <a:off x="540000" y="2990000"/>
+            <a:ext cx="6480000" cy="7060000"/>
           </a:xfrm>
         </p:spPr>
         <p:txBody>
@@ -6902,11 +6902,11 @@
                 <a:spcPts val="0"/>
               </a:spcBef>
               <a:spcAft>
-                <a:spcPts val="200"/>
+                <a:spcPts val="267"/>
               </a:spcAft>
             </a:pPr>
             <a:r>
-              <a:rPr sz="1200" b="1" lang="zh-TW" dirty="0">
+              <a:rPr sz="1600" b="1" lang="zh-TW" dirty="0">
                 <a:solidFill>
                   <a:srgbClr val="000000"/>
                 </a:solidFill>
@@ -6917,7 +6917,7 @@
               <a:t>這一張的目的：</a:t>
             </a:r>
             <a:r>
-              <a:rPr sz="1200" lang="zh-TW" dirty="0">
+              <a:rPr sz="1600" lang="zh-TW" dirty="0">
                 <a:solidFill>
                   <a:srgbClr val="000000"/>
                 </a:solidFill>
@@ -6935,11 +6935,11 @@
                 <a:spcPts val="0"/>
               </a:spcBef>
               <a:spcAft>
-                <a:spcPts val="200"/>
+                <a:spcPts val="267"/>
               </a:spcAft>
             </a:pPr>
             <a:r>
-              <a:rPr sz="1200" lang="zh-TW" dirty="0">
+              <a:rPr sz="1600" lang="zh-TW" dirty="0">
                 <a:solidFill>
                   <a:srgbClr val="000000"/>
                 </a:solidFill>
@@ -6957,11 +6957,11 @@
                 <a:spcPts val="0"/>
               </a:spcBef>
               <a:spcAft>
-                <a:spcPts val="200"/>
+                <a:spcPts val="267"/>
               </a:spcAft>
             </a:pPr>
             <a:r>
-              <a:rPr sz="1200" lang="zh-TW" dirty="0">
+              <a:rPr sz="1600" lang="zh-TW" dirty="0">
                 <a:solidFill>
                   <a:srgbClr val="000000"/>
                 </a:solidFill>
@@ -6972,7 +6972,7 @@
               <a:t>先看左邊。相機看得清楚的，都是</a:t>
             </a:r>
             <a:r>
-              <a:rPr sz="1200" b="1" lang="zh-TW" dirty="0">
+              <a:rPr sz="1600" b="1" lang="zh-TW" dirty="0">
                 <a:solidFill>
                   <a:srgbClr val="000000"/>
                 </a:solidFill>
@@ -6983,7 +6983,7 @@
               <a:t>有光的地方</a:t>
             </a:r>
             <a:r>
-              <a:rPr sz="1200" lang="zh-TW" dirty="0">
+              <a:rPr sz="1600" lang="zh-TW" dirty="0">
                 <a:solidFill>
                   <a:srgbClr val="000000"/>
                 </a:solidFill>
@@ -7001,11 +7001,11 @@
                 <a:spcPts val="0"/>
               </a:spcBef>
               <a:spcAft>
-                <a:spcPts val="200"/>
+                <a:spcPts val="267"/>
               </a:spcAft>
             </a:pPr>
             <a:r>
-              <a:rPr sz="1200" lang="zh-TW" dirty="0">
+              <a:rPr sz="1600" lang="zh-TW" dirty="0">
                 <a:solidFill>
                   <a:srgbClr val="000000"/>
                 </a:solidFill>
@@ -7016,7 +7016,7 @@
               <a:t>再看右邊同一塊。路面上一條一條的點照樣在，樹叢那些暗的地方也打得到。因為光達</a:t>
             </a:r>
             <a:r>
-              <a:rPr sz="1200" b="1" lang="zh-TW" dirty="0">
+              <a:rPr sz="1600" b="1" lang="zh-TW" dirty="0">
                 <a:solidFill>
                   <a:srgbClr val="000000"/>
                 </a:solidFill>
@@ -7027,7 +7027,7 @@
               <a:t>自己帶光源</a:t>
             </a:r>
             <a:r>
-              <a:rPr sz="1200" lang="zh-TW" dirty="0">
+              <a:rPr sz="1600" lang="zh-TW" dirty="0">
                 <a:solidFill>
                   <a:srgbClr val="000000"/>
                 </a:solidFill>
@@ -7045,11 +7045,11 @@
                 <a:spcPts val="0"/>
               </a:spcBef>
               <a:spcAft>
-                <a:spcPts val="200"/>
+                <a:spcPts val="267"/>
               </a:spcAft>
             </a:pPr>
             <a:r>
-              <a:rPr sz="1200" lang="zh-TW" dirty="0">
+              <a:rPr sz="1600" lang="zh-TW" dirty="0">
                 <a:solidFill>
                   <a:srgbClr val="000000"/>
                 </a:solidFill>
@@ -7060,7 +7060,7 @@
               <a:t>各位注意那台正在橫越路口的黑色轎車。第五週講過，黑色的東西反射率低，光達可能吃虧。這台車離我們大約十六公尺，官方標註裡，它身上有七十三個光達點；下一張統計表裡，十到二十公尺的車，中位數是六十五個。所以</a:t>
             </a:r>
             <a:r>
-              <a:rPr sz="1200" b="1" lang="zh-TW" dirty="0">
+              <a:rPr sz="1600" b="1" lang="zh-TW" dirty="0">
                 <a:solidFill>
                   <a:srgbClr val="000000"/>
                 </a:solidFill>
@@ -7071,7 +7071,7 @@
               <a:t>在這個距離，黑車沒有比較吃虧</a:t>
             </a:r>
             <a:r>
-              <a:rPr sz="1200" lang="zh-TW" dirty="0">
+              <a:rPr sz="1600" lang="zh-TW" dirty="0">
                 <a:solidFill>
                   <a:srgbClr val="000000"/>
                 </a:solidFill>
@@ -7089,11 +7089,11 @@
                 <a:spcPts val="0"/>
               </a:spcBef>
               <a:spcAft>
-                <a:spcPts val="200"/>
+                <a:spcPts val="267"/>
               </a:spcAft>
             </a:pPr>
             <a:r>
-              <a:rPr sz="1200" lang="zh-TW" dirty="0">
+              <a:rPr sz="1600" lang="zh-TW" dirty="0">
                 <a:solidFill>
                   <a:srgbClr val="000000"/>
                 </a:solidFill>
@@ -7180,8 +7180,8 @@
         </p:nvSpPr>
         <p:spPr>
           <a:xfrm>
-            <a:off x="540000" y="540000"/>
-            <a:ext cx="6480000" cy="3645000"/>
+            <a:off x="1620000" y="380000"/>
+            <a:ext cx="4320000" cy="2430000"/>
           </a:xfrm>
         </p:spPr>
       </p:sp>
@@ -7197,8 +7197,8 @@
         </p:nvSpPr>
         <p:spPr>
           <a:xfrm>
-            <a:off x="540000" y="4440000"/>
-            <a:ext cx="6480000" cy="5500000"/>
+            <a:off x="540000" y="2990000"/>
+            <a:ext cx="6480000" cy="7060000"/>
           </a:xfrm>
         </p:spPr>
         <p:txBody>
@@ -7210,11 +7210,11 @@
                 <a:spcPts val="0"/>
               </a:spcBef>
               <a:spcAft>
-                <a:spcPts val="200"/>
+                <a:spcPts val="233"/>
               </a:spcAft>
             </a:pPr>
             <a:r>
-              <a:rPr sz="1200" b="1" lang="zh-TW" dirty="0">
+              <a:rPr sz="1400" b="1" lang="zh-TW" dirty="0">
                 <a:solidFill>
                   <a:srgbClr val="000000"/>
                 </a:solidFill>
@@ -7225,7 +7225,7 @@
               <a:t>這一張的目的：</a:t>
             </a:r>
             <a:r>
-              <a:rPr sz="1200" lang="zh-TW" dirty="0">
+              <a:rPr sz="1400" lang="zh-TW" dirty="0">
                 <a:solidFill>
                   <a:srgbClr val="000000"/>
                 </a:solidFill>
@@ -7243,11 +7243,11 @@
                 <a:spcPts val="0"/>
               </a:spcBef>
               <a:spcAft>
-                <a:spcPts val="200"/>
+                <a:spcPts val="233"/>
               </a:spcAft>
             </a:pPr>
             <a:r>
-              <a:rPr sz="1200" lang="zh-TW" dirty="0">
+              <a:rPr sz="1400" lang="zh-TW" dirty="0">
                 <a:solidFill>
                   <a:srgbClr val="000000"/>
                 </a:solidFill>
@@ -7265,11 +7265,11 @@
                 <a:spcPts val="0"/>
               </a:spcBef>
               <a:spcAft>
-                <a:spcPts val="200"/>
+                <a:spcPts val="233"/>
               </a:spcAft>
             </a:pPr>
             <a:r>
-              <a:rPr sz="1200" b="1" lang="zh-TW" dirty="0">
+              <a:rPr sz="1400" b="1" lang="zh-TW" dirty="0">
                 <a:solidFill>
                   <a:srgbClr val="000000"/>
                 </a:solidFill>
@@ -7280,7 +7280,7 @@
               <a:t>左邊，光達。</a:t>
             </a:r>
             <a:r>
-              <a:rPr sz="1200" lang="zh-TW" dirty="0">
+              <a:rPr sz="1400" lang="zh-TW" dirty="0">
                 <a:solidFill>
                   <a:srgbClr val="000000"/>
                 </a:solidFill>
@@ -7298,11 +7298,11 @@
                 <a:spcPts val="0"/>
               </a:spcBef>
               <a:spcAft>
-                <a:spcPts val="200"/>
+                <a:spcPts val="233"/>
               </a:spcAft>
             </a:pPr>
             <a:r>
-              <a:rPr sz="1200" b="1" lang="zh-TW" dirty="0">
+              <a:rPr sz="1400" b="1" lang="zh-TW" dirty="0">
                 <a:solidFill>
                   <a:srgbClr val="000000"/>
                 </a:solidFill>
@@ -7313,7 +7313,7 @@
               <a:t>右邊，雷達。</a:t>
             </a:r>
             <a:r>
-              <a:rPr sz="1200" lang="zh-TW" dirty="0">
+              <a:rPr sz="1400" lang="zh-TW" dirty="0">
                 <a:solidFill>
                   <a:srgbClr val="000000"/>
                 </a:solidFill>
@@ -7331,11 +7331,11 @@
                 <a:spcPts val="0"/>
               </a:spcBef>
               <a:spcAft>
-                <a:spcPts val="200"/>
+                <a:spcPts val="233"/>
               </a:spcAft>
             </a:pPr>
             <a:r>
-              <a:rPr sz="1200" lang="zh-TW" dirty="0">
+              <a:rPr sz="1400" lang="zh-TW" dirty="0">
                 <a:solidFill>
                   <a:srgbClr val="000000"/>
                 </a:solidFill>
@@ -7346,7 +7346,7 @@
               <a:t>請各位看紅圈的位置：</a:t>
             </a:r>
             <a:r>
-              <a:rPr sz="1200" b="1" lang="zh-TW" dirty="0">
+              <a:rPr sz="1400" b="1" lang="zh-TW" dirty="0">
                 <a:solidFill>
                   <a:srgbClr val="000000"/>
                 </a:solidFill>
@@ -7357,7 +7357,7 @@
               <a:t>全部都在很低的地方。</a:t>
             </a:r>
             <a:r>
-              <a:rPr sz="1200" lang="zh-TW" dirty="0">
+              <a:rPr sz="1400" lang="zh-TW" dirty="0">
                 <a:solidFill>
                   <a:srgbClr val="000000"/>
                 </a:solidFill>
@@ -7375,11 +7375,11 @@
                 <a:spcPts val="0"/>
               </a:spcBef>
               <a:spcAft>
-                <a:spcPts val="200"/>
+                <a:spcPts val="233"/>
               </a:spcAft>
             </a:pPr>
             <a:r>
-              <a:rPr sz="1200" lang="zh-TW" dirty="0">
+              <a:rPr sz="1400" lang="zh-TW" dirty="0">
                 <a:solidFill>
                   <a:srgbClr val="000000"/>
                 </a:solidFill>
@@ -7397,11 +7397,11 @@
                 <a:spcPts val="0"/>
               </a:spcBef>
               <a:spcAft>
-                <a:spcPts val="200"/>
+                <a:spcPts val="233"/>
               </a:spcAft>
             </a:pPr>
             <a:r>
-              <a:rPr sz="1200" lang="zh-TW" dirty="0">
+              <a:rPr sz="1400" lang="zh-TW" dirty="0">
                 <a:solidFill>
                   <a:srgbClr val="000000"/>
                 </a:solidFill>
@@ -7419,11 +7419,11 @@
                 <a:spcPts val="0"/>
               </a:spcBef>
               <a:spcAft>
-                <a:spcPts val="200"/>
+                <a:spcPts val="233"/>
               </a:spcAft>
             </a:pPr>
             <a:r>
-              <a:rPr sz="1200" b="1" lang="zh-TW" dirty="0">
+              <a:rPr sz="1400" b="1" lang="zh-TW" dirty="0">
                 <a:solidFill>
                   <a:srgbClr val="000000"/>
                 </a:solidFill>
@@ -7434,7 +7434,7 @@
               <a:t>記住這兩件事：點很少，而且量不出高度。</a:t>
             </a:r>
             <a:r>
-              <a:rPr sz="1200" lang="zh-TW" dirty="0">
+              <a:rPr sz="1400" lang="zh-TW" dirty="0">
                 <a:solidFill>
                   <a:srgbClr val="000000"/>
                 </a:solidFill>
@@ -7521,8 +7521,8 @@
         </p:nvSpPr>
         <p:spPr>
           <a:xfrm>
-            <a:off x="540000" y="540000"/>
-            <a:ext cx="6480000" cy="3645000"/>
+            <a:off x="1620000" y="380000"/>
+            <a:ext cx="4320000" cy="2430000"/>
           </a:xfrm>
         </p:spPr>
       </p:sp>
@@ -7538,8 +7538,8 @@
         </p:nvSpPr>
         <p:spPr>
           <a:xfrm>
-            <a:off x="540000" y="4440000"/>
-            <a:ext cx="6480000" cy="5500000"/>
+            <a:off x="540000" y="2990000"/>
+            <a:ext cx="6480000" cy="7060000"/>
           </a:xfrm>
         </p:spPr>
         <p:txBody>
@@ -7551,11 +7551,11 @@
                 <a:spcPts val="0"/>
               </a:spcBef>
               <a:spcAft>
-                <a:spcPts val="150"/>
+                <a:spcPts val="167"/>
               </a:spcAft>
             </a:pPr>
             <a:r>
-              <a:rPr sz="900" b="1" lang="zh-TW" dirty="0">
+              <a:rPr sz="1000" b="1" lang="zh-TW" dirty="0">
                 <a:solidFill>
                   <a:srgbClr val="000000"/>
                 </a:solidFill>
@@ -7566,7 +7566,7 @@
               <a:t>這一張的目的：</a:t>
             </a:r>
             <a:r>
-              <a:rPr sz="900" lang="zh-TW" dirty="0">
+              <a:rPr sz="1000" lang="zh-TW" dirty="0">
                 <a:solidFill>
                   <a:srgbClr val="000000"/>
                 </a:solidFill>
@@ -7584,11 +7584,11 @@
                 <a:spcPts val="0"/>
               </a:spcBef>
               <a:spcAft>
-                <a:spcPts val="150"/>
+                <a:spcPts val="167"/>
               </a:spcAft>
             </a:pPr>
             <a:r>
-              <a:rPr sz="900" lang="zh-TW" dirty="0">
+              <a:rPr sz="1000" lang="zh-TW" dirty="0">
                 <a:solidFill>
                   <a:srgbClr val="000000"/>
                 </a:solidFill>
@@ -7599,7 +7599,7 @@
               <a:t>再看一格，波士頓的一個路口。</a:t>
             </a:r>
             <a:r>
-              <a:rPr sz="900" b="1" lang="zh-TW" dirty="0">
+              <a:rPr sz="1000" b="1" lang="zh-TW" dirty="0">
                 <a:solidFill>
                   <a:srgbClr val="000000"/>
                 </a:solidFill>
@@ -7610,7 +7610,7 @@
               <a:t>左邊是相機畫面</a:t>
             </a:r>
             <a:r>
-              <a:rPr sz="900" lang="zh-TW" dirty="0">
+              <a:rPr sz="1000" lang="zh-TW" dirty="0">
                 <a:solidFill>
                   <a:srgbClr val="000000"/>
                 </a:solidFill>
@@ -7628,11 +7628,11 @@
                 <a:spcPts val="0"/>
               </a:spcBef>
               <a:spcAft>
-                <a:spcPts val="150"/>
+                <a:spcPts val="167"/>
               </a:spcAft>
             </a:pPr>
             <a:r>
-              <a:rPr sz="900" lang="zh-TW" dirty="0">
+              <a:rPr sz="1000" lang="zh-TW" dirty="0">
                 <a:solidFill>
                   <a:srgbClr val="000000"/>
                 </a:solidFill>
@@ -7643,7 +7643,7 @@
               <a:t>雷達點這次不畫在相機畫面上。剛剛說過，雷達量不出高度，所有的點都畫在同一個高度，遠處的點擠在地平線附近，會疊在近處的車身上，看起來好像打到車，其實是車子後面更遠的東西。所以改成</a:t>
             </a:r>
             <a:r>
-              <a:rPr sz="900" b="1" lang="zh-TW" dirty="0">
+              <a:rPr sz="1000" b="1" lang="zh-TW" dirty="0">
                 <a:solidFill>
                   <a:srgbClr val="000000"/>
                 </a:solidFill>
@@ -7654,7 +7654,7 @@
               <a:t>從上往下看</a:t>
             </a:r>
             <a:r>
-              <a:rPr sz="900" lang="zh-TW" dirty="0">
+              <a:rPr sz="1000" lang="zh-TW" dirty="0">
                 <a:solidFill>
                   <a:srgbClr val="000000"/>
                 </a:solidFill>
@@ -7672,11 +7672,11 @@
                 <a:spcPts val="0"/>
               </a:spcBef>
               <a:spcAft>
-                <a:spcPts val="150"/>
+                <a:spcPts val="167"/>
               </a:spcAft>
             </a:pPr>
             <a:r>
-              <a:rPr sz="900" b="1" lang="zh-TW" dirty="0">
+              <a:rPr sz="1000" b="1" lang="zh-TW" dirty="0">
                 <a:solidFill>
                   <a:srgbClr val="000000"/>
                 </a:solidFill>
@@ -7687,7 +7687,7 @@
               <a:t>右邊，同一個瞬間，把雷達點畫在地上。</a:t>
             </a:r>
             <a:r>
-              <a:rPr sz="900" lang="zh-TW" dirty="0">
+              <a:rPr sz="1000" lang="zh-TW" dirty="0">
                 <a:solidFill>
                   <a:srgbClr val="000000"/>
                 </a:solidFill>
@@ -7698,7 +7698,7 @@
               <a:t>自己的車在最下面中間，綠色的小長方形，車頭朝上；保險桿上的橘色小方塊是前雷達，淡綠色扇形是它水平往前打出去照得到的範圍。灰色的線是光達掃到的牆和路緣，白框是標註的車。雷達點分兩種顏色：</a:t>
             </a:r>
             <a:r>
-              <a:rPr sz="900" b="1" lang="zh-TW" dirty="0">
+              <a:rPr sz="1000" b="1" lang="zh-TW" dirty="0">
                 <a:solidFill>
                   <a:srgbClr val="000000"/>
                 </a:solidFill>
@@ -7709,7 +7709,7 @@
               <a:t>落在車上的畫綠色，不在車上的畫紅色。</a:t>
             </a:r>
             <a:r>
-              <a:rPr sz="900" lang="zh-TW" dirty="0">
+              <a:rPr sz="1000" lang="zh-TW" dirty="0">
                 <a:solidFill>
                   <a:srgbClr val="000000"/>
                 </a:solidFill>
@@ -7727,11 +7727,11 @@
                 <a:spcPts val="0"/>
               </a:spcBef>
               <a:spcAft>
-                <a:spcPts val="150"/>
+                <a:spcPts val="167"/>
               </a:spcAft>
             </a:pPr>
             <a:r>
-              <a:rPr sz="900" lang="zh-TW" dirty="0">
+              <a:rPr sz="1000" lang="zh-TW" dirty="0">
                 <a:solidFill>
                   <a:srgbClr val="000000"/>
                 </a:solidFill>
@@ -7742,7 +7742,7 @@
               <a:t>數一下：這一格，前方相機看得到的範圍裡有五十三個雷達點，落在車上的二十二個。這一格算多的。</a:t>
             </a:r>
             <a:r>
-              <a:rPr sz="900" b="1" lang="zh-TW" dirty="0">
+              <a:rPr sz="1000" b="1" lang="zh-TW" dirty="0">
                 <a:solidFill>
                   <a:srgbClr val="000000"/>
                 </a:solidFill>
@@ -7753,7 +7753,7 @@
               <a:t>整個 mini 版十段場景平均，不到兩成。</a:t>
             </a:r>
             <a:r>
-              <a:rPr sz="900" lang="zh-TW" dirty="0">
+              <a:rPr sz="1000" lang="zh-TW" dirty="0">
                 <a:solidFill>
                   <a:srgbClr val="000000"/>
                 </a:solidFill>
@@ -7771,11 +7771,11 @@
                 <a:spcPts val="0"/>
               </a:spcBef>
               <a:spcAft>
-                <a:spcPts val="150"/>
+                <a:spcPts val="167"/>
               </a:spcAft>
             </a:pPr>
             <a:r>
-              <a:rPr sz="900" lang="zh-TW" dirty="0">
+              <a:rPr sz="1000" lang="zh-TW" dirty="0">
                 <a:solidFill>
                   <a:srgbClr val="000000"/>
                 </a:solidFill>
@@ -7786,7 +7786,7 @@
               <a:t>這些不在車上的點，大多是</a:t>
             </a:r>
             <a:r>
-              <a:rPr sz="900" b="1" lang="zh-TW" dirty="0">
+              <a:rPr sz="1000" b="1" lang="zh-TW" dirty="0">
                 <a:solidFill>
                   <a:srgbClr val="000000"/>
                 </a:solidFill>
@@ -7797,7 +7797,7 @@
               <a:t>靜止的東西</a:t>
             </a:r>
             <a:r>
-              <a:rPr sz="900" lang="zh-TW" dirty="0">
+              <a:rPr sz="1000" lang="zh-TW" dirty="0">
                 <a:solidFill>
                   <a:srgbClr val="000000"/>
                 </a:solidFill>
@@ -7808,7 +7808,7 @@
               <a:t>。雷達怎麼知道一個東西是靜止的？它不是看那個東西本身，是拿量到的速度，</a:t>
             </a:r>
             <a:r>
-              <a:rPr sz="900" b="1" lang="zh-TW" dirty="0">
+              <a:rPr sz="1000" b="1" lang="zh-TW" dirty="0">
                 <a:solidFill>
                   <a:srgbClr val="000000"/>
                 </a:solidFill>
@@ -7819,7 +7819,7 @@
               <a:t>扣掉自己的車速</a:t>
             </a:r>
             <a:r>
-              <a:rPr sz="900" lang="zh-TW" dirty="0">
+              <a:rPr sz="1000" lang="zh-TW" dirty="0">
                 <a:solidFill>
                   <a:srgbClr val="000000"/>
                 </a:solidFill>
@@ -7837,11 +7837,11 @@
                 <a:spcPts val="0"/>
               </a:spcBef>
               <a:spcAft>
-                <a:spcPts val="150"/>
+                <a:spcPts val="167"/>
               </a:spcAft>
             </a:pPr>
             <a:r>
-              <a:rPr sz="900" lang="zh-TW" dirty="0">
+              <a:rPr sz="1000" lang="zh-TW" dirty="0">
                 <a:solidFill>
                   <a:srgbClr val="000000"/>
                 </a:solidFill>
@@ -7859,11 +7859,11 @@
                 <a:spcPts val="0"/>
               </a:spcBef>
               <a:spcAft>
-                <a:spcPts val="150"/>
+                <a:spcPts val="167"/>
               </a:spcAft>
             </a:pPr>
             <a:r>
-              <a:rPr sz="900" lang="zh-TW" dirty="0">
+              <a:rPr sz="1000" lang="zh-TW" dirty="0">
                 <a:solidFill>
                   <a:srgbClr val="000000"/>
                 </a:solidFill>
@@ -7874,7 +7874,7 @@
               <a:t>我查了兩格資料。</a:t>
             </a:r>
             <a:r>
-              <a:rPr sz="900" b="1" lang="zh-TW" dirty="0">
+              <a:rPr sz="1000" b="1" lang="zh-TW" dirty="0">
                 <a:solidFill>
                   <a:srgbClr val="000000"/>
                 </a:solidFill>
@@ -7885,7 +7885,7 @@
               <a:t>這一格</a:t>
             </a:r>
             <a:r>
-              <a:rPr sz="900" lang="zh-TW" dirty="0">
+              <a:rPr sz="1000" lang="zh-TW" dirty="0">
                 <a:solidFill>
                   <a:srgbClr val="000000"/>
                 </a:solidFill>
@@ -7896,7 +7896,7 @@
               <a:t>，車子停在路口等，時速零，靜止的東西量到的速度本來就是零；前雷達一百一十九個點裡，五十三個判定靜止、二十三個「可能是靜止」。</a:t>
             </a:r>
             <a:r>
-              <a:rPr sz="900" b="1" lang="zh-TW" dirty="0">
+              <a:rPr sz="1000" b="1" lang="zh-TW" dirty="0">
                 <a:solidFill>
                   <a:srgbClr val="000000"/>
                 </a:solidFill>
@@ -7907,7 +7907,7 @@
               <a:t>上一張那條路</a:t>
             </a:r>
             <a:r>
-              <a:rPr sz="900" lang="zh-TW" dirty="0">
+              <a:rPr sz="1000" lang="zh-TW" dirty="0">
                 <a:solidFill>
                   <a:srgbClr val="000000"/>
                 </a:solidFill>
@@ -7925,11 +7925,11 @@
                 <a:spcPts val="0"/>
               </a:spcBef>
               <a:spcAft>
-                <a:spcPts val="150"/>
+                <a:spcPts val="167"/>
               </a:spcAft>
             </a:pPr>
             <a:r>
-              <a:rPr sz="900" lang="zh-TW" dirty="0">
+              <a:rPr sz="1000" lang="zh-TW" dirty="0">
                 <a:solidFill>
                   <a:srgbClr val="000000"/>
                 </a:solidFill>
@@ -7940,7 +7940,7 @@
               <a:t>所以雷達每一秒都要決定：</a:t>
             </a:r>
             <a:r>
-              <a:rPr sz="900" b="1" lang="zh-TW" dirty="0">
+              <a:rPr sz="1000" b="1" lang="zh-TW" dirty="0">
                 <a:solidFill>
                   <a:srgbClr val="000000"/>
                 </a:solidFill>
@@ -7951,7 +7951,7 @@
               <a:t>這一堆靜止的點，哪些可以不理。</a:t>
             </a:r>
             <a:r>
-              <a:rPr sz="900" lang="zh-TW" dirty="0">
+              <a:rPr sz="1000" lang="zh-TW" dirty="0">
                 <a:solidFill>
                   <a:srgbClr val="000000"/>
                 </a:solidFill>
@@ -7969,11 +7969,11 @@
                 <a:spcPts val="0"/>
               </a:spcBef>
               <a:spcAft>
-                <a:spcPts val="150"/>
+                <a:spcPts val="167"/>
               </a:spcAft>
             </a:pPr>
             <a:r>
-              <a:rPr sz="900" lang="zh-TW" dirty="0">
+              <a:rPr sz="1000" lang="zh-TW" dirty="0">
                 <a:solidFill>
                   <a:srgbClr val="000000"/>
                 </a:solidFill>

--- a/第七週(10-22)/第七週_第1節_簡報.pptx
+++ b/第七週(10-22)/第七週_第1節_簡報.pptx
@@ -3657,11 +3657,11 @@
                 <a:spcPts val="0"/>
               </a:spcBef>
               <a:spcAft>
-                <a:spcPts val="200"/>
+                <a:spcPts val="167"/>
               </a:spcAft>
             </a:pPr>
             <a:r>
-              <a:rPr sz="1200" b="1" lang="zh-TW" dirty="0">
+              <a:rPr sz="1000" b="1" lang="zh-TW" dirty="0">
                 <a:solidFill>
                   <a:srgbClr val="000000"/>
                 </a:solidFill>
@@ -3672,7 +3672,7 @@
               <a:t>這一張的目的：</a:t>
             </a:r>
             <a:r>
-              <a:rPr sz="1200" lang="zh-TW" dirty="0">
+              <a:rPr sz="1000" lang="zh-TW" dirty="0">
                 <a:solidFill>
                   <a:srgbClr val="000000"/>
                 </a:solidFill>
@@ -3690,11 +3690,11 @@
                 <a:spcPts val="0"/>
               </a:spcBef>
               <a:spcAft>
-                <a:spcPts val="200"/>
+                <a:spcPts val="167"/>
               </a:spcAft>
             </a:pPr>
             <a:r>
-              <a:rPr sz="1200" lang="zh-TW" dirty="0">
+              <a:rPr sz="1000" lang="zh-TW" dirty="0">
                 <a:solidFill>
                   <a:srgbClr val="000000"/>
                 </a:solidFill>
@@ -3712,11 +3712,11 @@
                 <a:spcPts val="0"/>
               </a:spcBef>
               <a:spcAft>
-                <a:spcPts val="200"/>
+                <a:spcPts val="167"/>
               </a:spcAft>
             </a:pPr>
             <a:r>
-              <a:rPr sz="1200" b="1" lang="zh-TW" dirty="0">
+              <a:rPr sz="1000" b="1" lang="zh-TW" dirty="0">
                 <a:solidFill>
                   <a:srgbClr val="000000"/>
                 </a:solidFill>
@@ -3727,15 +3727,15 @@
               <a:t>第一招，點更多。</a:t>
             </a:r>
             <a:r>
-              <a:rPr sz="1200" lang="zh-TW" dirty="0">
-                <a:solidFill>
-                  <a:srgbClr val="000000"/>
-                </a:solidFill>
-                <a:latin typeface="Arial Unicode MS"/>
-                <a:ea typeface="Arial Unicode MS"/>
-                <a:cs typeface="Arial Unicode MS"/>
-              </a:rPr>
-              <a:t>就是上週講的 4D 雷達。天線從 408 的二十四個，變成 548 的一百九十二個，角度分得更細，一個人身上能分到好幾個點，不會跟旁邊、後面的東西混在一起；又量得出高度，人是瘦高的，車是矮寬的，多一個分辨的線索。
+              <a:rPr sz="1000" lang="zh-TW" dirty="0">
+                <a:solidFill>
+                  <a:srgbClr val="000000"/>
+                </a:solidFill>
+                <a:latin typeface="Arial Unicode MS"/>
+                <a:ea typeface="Arial Unicode MS"/>
+                <a:cs typeface="Arial Unicode MS"/>
+              </a:rPr>
+              <a:t>就是上週講的 4D 雷達。規格表上 408 寫二十四個「通道」：它其實有四根發射天線、十二根接收天線。每一根接收天線都錄到自己一份回聲，就像一排麥克風錄同一場演奏，每一支錄到的都是全部樂器混在一起的聲音；比較同一個音到每支麥克風的時間差，就知道它在哪個方向。發射天線有兩根可以分開辨認，每支「麥克風」就能錄兩份，效果像接收天線多了一倍，所以叫二十四個通道，也有人叫虛擬天線。548 是十二發、十六收，一百九十二個通道。通道愈多、排得愈開，方向切得愈細，一個人身上能分到好幾個點，不會跟旁邊、後面的東西混在一起；又量得出高度，人是瘦高的，車是矮寬的，多一個分辨的線索。
 </a:t>
             </a:r>
           </a:p>
@@ -3745,11 +3745,11 @@
                 <a:spcPts val="0"/>
               </a:spcBef>
               <a:spcAft>
-                <a:spcPts val="200"/>
+                <a:spcPts val="167"/>
               </a:spcAft>
             </a:pPr>
             <a:r>
-              <a:rPr sz="1200" b="1" lang="zh-TW" dirty="0">
+              <a:rPr sz="1000" b="1" lang="zh-TW" dirty="0">
                 <a:solidFill>
                   <a:srgbClr val="000000"/>
                 </a:solidFill>
@@ -3760,7 +3760,7 @@
               <a:t>第二招，看動作。</a:t>
             </a:r>
             <a:r>
-              <a:rPr sz="1200" lang="zh-TW" dirty="0">
+              <a:rPr sz="1000" lang="zh-TW" dirty="0">
                 <a:solidFill>
                   <a:srgbClr val="000000"/>
                 </a:solidFill>
@@ -3771,7 +3771,7 @@
               <a:t>看左邊這張照片，一個正在過馬路的人。一根電線桿，整根都是同一個速度，零。一個人走路，身體往前，手和腳卻一前一後地擺，有的部位快、有的慢、有的往回。雷達量得到這種「同一個東西裡，有好幾種速度，而且有節奏」的特徵，英文叫 micro-Doppler，</a:t>
             </a:r>
             <a:r>
-              <a:rPr sz="1200" b="1" lang="zh-TW" dirty="0">
+              <a:rPr sz="1000" b="1" lang="zh-TW" dirty="0">
                 <a:solidFill>
                   <a:srgbClr val="000000"/>
                 </a:solidFill>
@@ -3782,15 +3782,15 @@
               <a:t>微都卜勒</a:t>
             </a:r>
             <a:r>
-              <a:rPr sz="1200" lang="zh-TW" dirty="0">
-                <a:solidFill>
-                  <a:srgbClr val="000000"/>
-                </a:solidFill>
-                <a:latin typeface="Arial Unicode MS"/>
-                <a:ea typeface="Arial Unicode MS"/>
-                <a:cs typeface="Arial Unicode MS"/>
-              </a:rPr>
-              <a:t>，可以用來分辨行人、腳踏車和桿子。這是雷達研究裡很成熟的方向，不過量產車用到什麼程度，我沒有資料可以講。
+              <a:rPr sz="1000" lang="zh-TW" dirty="0">
+                <a:solidFill>
+                  <a:srgbClr val="000000"/>
+                </a:solidFill>
+                <a:latin typeface="Arial Unicode MS"/>
+                <a:ea typeface="Arial Unicode MS"/>
+                <a:cs typeface="Arial Unicode MS"/>
+              </a:rPr>
+              <a:t>，可以用來分辨行人、腳踏車和桿子。
 </a:t>
             </a:r>
           </a:p>
@@ -3800,30 +3800,85 @@
                 <a:spcPts val="0"/>
               </a:spcBef>
               <a:spcAft>
-                <a:spcPts val="200"/>
+                <a:spcPts val="167"/>
               </a:spcAft>
             </a:pPr>
             <a:r>
-              <a:rPr sz="1200" b="1" lang="zh-TW" dirty="0">
-                <a:solidFill>
-                  <a:srgbClr val="000000"/>
-                </a:solidFill>
-                <a:latin typeface="Arial Unicode MS"/>
-                <a:ea typeface="Arial Unicode MS"/>
-                <a:cs typeface="Arial Unicode MS"/>
-              </a:rPr>
-              <a:t>第三招，看久一點。</a:t>
-            </a:r>
-            <a:r>
-              <a:rPr sz="1200" lang="zh-TW" dirty="0">
-                <a:solidFill>
-                  <a:srgbClr val="000000"/>
-                </a:solidFill>
-                <a:latin typeface="Arial Unicode MS"/>
-                <a:ea typeface="Arial Unicode MS"/>
-                <a:cs typeface="Arial Unicode MS"/>
-              </a:rPr>
-              <a:t>剛剛說雷達看人一閃一閃。可是雷達每秒更新十幾次，一瞬間只抓到兩三成，一秒鐘裡還是會抓到好幾次。把連續幾次的掃描疊起來一起看，再用追蹤把一閃一閃的點串成一條線，中間的空檔先用預測補，下一節會講。荷蘭一份公開資料集的論文也寫到：加上高度、再把連續幾次掃描疊起來，雷達和光達的差距就縮小了。
+              <a:rPr sz="1000" lang="zh-TW" dirty="0">
+                <a:solidFill>
+                  <a:srgbClr val="000000"/>
+                </a:solidFill>
+                <a:latin typeface="Arial Unicode MS"/>
+                <a:ea typeface="Arial Unicode MS"/>
+                <a:cs typeface="Arial Unicode MS"/>
+              </a:rPr>
+              <a:t>注意，這</a:t>
+            </a:r>
+            <a:r>
+              <a:rPr sz="1000" b="1" lang="zh-TW" dirty="0">
+                <a:solidFill>
+                  <a:srgbClr val="000000"/>
+                </a:solidFill>
+                <a:latin typeface="Arial Unicode MS"/>
+                <a:ea typeface="Arial Unicode MS"/>
+                <a:cs typeface="Arial Unicode MS"/>
+              </a:rPr>
+              <a:t>不是靠好幾個點</a:t>
+            </a:r>
+            <a:r>
+              <a:rPr sz="1000" lang="zh-TW" dirty="0">
+                <a:solidFill>
+                  <a:srgbClr val="000000"/>
+                </a:solidFill>
+                <a:latin typeface="Arial Unicode MS"/>
+                <a:ea typeface="Arial Unicode MS"/>
+                <a:cs typeface="Arial Unicode MS"/>
+              </a:rPr>
+              <a:t>。手、腳、身體離雷達幾乎一樣遠，它們的回聲是</a:t>
+            </a:r>
+            <a:r>
+              <a:rPr sz="1000" b="1" lang="zh-TW" dirty="0">
+                <a:solidFill>
+                  <a:srgbClr val="000000"/>
+                </a:solidFill>
+                <a:latin typeface="Arial Unicode MS"/>
+                <a:ea typeface="Arial Unicode MS"/>
+                <a:cs typeface="Arial Unicode MS"/>
+              </a:rPr>
+              <a:t>混在一起</a:t>
+            </a:r>
+            <a:r>
+              <a:rPr sz="1000" lang="zh-TW" dirty="0">
+                <a:solidFill>
+                  <a:srgbClr val="000000"/>
+                </a:solidFill>
+                <a:latin typeface="Arial Unicode MS"/>
+                <a:ea typeface="Arial Unicode MS"/>
+                <a:cs typeface="Arial Unicode MS"/>
+              </a:rPr>
+              <a:t>回來的，就像同時按下鋼琴的三個鍵，傳到耳朵的只有一個聲音，可是你聽得出是三個音。雷達把混在一起的回聲照頻率拆開，就看得出裡面同時有好幾種速度；每隔一下拆一次，接起來就像一段樂譜：身體那個音穩穩的，手腳的音一下高、一下低，每走一步重複一次。電線桿只有一個不變的音，汽車的音也幾乎不動，所以分得出來。我們用的 ARS 408 每個點只給</a:t>
+            </a:r>
+            <a:r>
+              <a:rPr sz="1000" b="1" lang="zh-TW" dirty="0">
+                <a:solidFill>
+                  <a:srgbClr val="000000"/>
+                </a:solidFill>
+                <a:latin typeface="Arial Unicode MS"/>
+                <a:ea typeface="Arial Unicode MS"/>
+                <a:cs typeface="Arial Unicode MS"/>
+              </a:rPr>
+              <a:t>一個</a:t>
+            </a:r>
+            <a:r>
+              <a:rPr sz="1000" lang="zh-TW" dirty="0">
+                <a:solidFill>
+                  <a:srgbClr val="000000"/>
+                </a:solidFill>
+                <a:latin typeface="Arial Unicode MS"/>
+                <a:ea typeface="Arial Unicode MS"/>
+                <a:cs typeface="Arial Unicode MS"/>
+              </a:rPr>
+              <a:t>速度，回聲裡的速度分布在雷達裡面就被壓成一個數字了，所以 nuScenes 的資料看不到微都卜勒。這是雷達研究裡很成熟的方向，不過量產車用到什麼程度，我沒有資料可以講。
 </a:t>
             </a:r>
           </a:p>
@@ -3833,52 +3888,30 @@
                 <a:spcPts val="0"/>
               </a:spcBef>
               <a:spcAft>
-                <a:spcPts val="200"/>
+                <a:spcPts val="167"/>
               </a:spcAft>
             </a:pPr>
             <a:r>
-              <a:rPr sz="1200" b="1" lang="zh-TW" dirty="0">
-                <a:solidFill>
-                  <a:srgbClr val="000000"/>
-                </a:solidFill>
-                <a:latin typeface="Arial Unicode MS"/>
-                <a:ea typeface="Arial Unicode MS"/>
-                <a:cs typeface="Arial Unicode MS"/>
-              </a:rPr>
-              <a:t>第四招，跟別人一起看。</a:t>
-            </a:r>
-            <a:r>
-              <a:rPr sz="1200" lang="zh-TW" dirty="0">
-                <a:solidFill>
-                  <a:srgbClr val="000000"/>
-                </a:solidFill>
-                <a:latin typeface="Arial Unicode MS"/>
-                <a:ea typeface="Arial Unicode MS"/>
-                <a:cs typeface="Arial Unicode MS"/>
-              </a:rPr>
-              <a:t>這是量產車最常見的做法。雷達抓到人的時候，距離和接近的速度量得很準，晚上、下雨也照樣量，這正是相機最弱的地方；它做不到的，是</a:t>
-            </a:r>
-            <a:r>
-              <a:rPr sz="1200" b="1" lang="zh-TW" dirty="0">
-                <a:solidFill>
-                  <a:srgbClr val="000000"/>
-                </a:solidFill>
-                <a:latin typeface="Arial Unicode MS"/>
-                <a:ea typeface="Arial Unicode MS"/>
-                <a:cs typeface="Arial Unicode MS"/>
-              </a:rPr>
-              <a:t>認出那是一個人</a:t>
-            </a:r>
-            <a:r>
-              <a:rPr sz="1200" lang="zh-TW" dirty="0">
-                <a:solidFill>
-                  <a:srgbClr val="000000"/>
-                </a:solidFill>
-                <a:latin typeface="Arial Unicode MS"/>
-                <a:ea typeface="Arial Unicode MS"/>
-                <a:cs typeface="Arial Unicode MS"/>
-              </a:rPr>
-              <a:t>，那要靠相機。所以像 Toyota 的預防碰撞系統，就是相機加毫米波雷達一起看行人。晚上也有人用熱像儀加雷達：人的身體是熱的，在熱像裡特別明顯。
+              <a:rPr sz="1000" b="1" lang="zh-TW" dirty="0">
+                <a:solidFill>
+                  <a:srgbClr val="000000"/>
+                </a:solidFill>
+                <a:latin typeface="Arial Unicode MS"/>
+                <a:ea typeface="Arial Unicode MS"/>
+                <a:cs typeface="Arial Unicode MS"/>
+              </a:rPr>
+              <a:t>第三招，看久一點。</a:t>
+            </a:r>
+            <a:r>
+              <a:rPr sz="1000" lang="zh-TW" dirty="0">
+                <a:solidFill>
+                  <a:srgbClr val="000000"/>
+                </a:solidFill>
+                <a:latin typeface="Arial Unicode MS"/>
+                <a:ea typeface="Arial Unicode MS"/>
+                <a:cs typeface="Arial Unicode MS"/>
+              </a:rPr>
+              <a:t>剛剛說雷達看人一閃一閃。可是雷達每秒更新十幾次，一瞬間只抓到兩三成，一秒鐘裡還是會抓到好幾次。把連續幾次的掃描疊起來一起看，再用追蹤把一閃一閃的點串成一條線，中間的空檔先用預測補，下一節會講。荷蘭一份公開資料集的論文也寫到：加上高度、再把連續幾次掃描疊起來，雷達和光達的差距就縮小了。
 </a:t>
             </a:r>
           </a:p>
@@ -3888,19 +3921,52 @@
                 <a:spcPts val="0"/>
               </a:spcBef>
               <a:spcAft>
-                <a:spcPts val="200"/>
+                <a:spcPts val="167"/>
               </a:spcAft>
             </a:pPr>
             <a:r>
-              <a:rPr sz="1200" lang="zh-TW" dirty="0">
-                <a:solidFill>
-                  <a:srgbClr val="000000"/>
-                </a:solidFill>
-                <a:latin typeface="Arial Unicode MS"/>
-                <a:ea typeface="Arial Unicode MS"/>
-                <a:cs typeface="Arial Unicode MS"/>
-              </a:rPr>
-              <a:t>這些新做法有沒有用？剛剛那份荷蘭的資料集，二〇二二年公開，用的是新一代 4D 雷達：車子正前方的行人，大約一半找得到，比我們今天這顆二〇一八年的 ARS 408 好，但行人還是最難找的那一類；加上相機，分數再往上。
+              <a:rPr sz="1000" b="1" lang="zh-TW" dirty="0">
+                <a:solidFill>
+                  <a:srgbClr val="000000"/>
+                </a:solidFill>
+                <a:latin typeface="Arial Unicode MS"/>
+                <a:ea typeface="Arial Unicode MS"/>
+                <a:cs typeface="Arial Unicode MS"/>
+              </a:rPr>
+              <a:t>第四招，跟別人一起看。</a:t>
+            </a:r>
+            <a:r>
+              <a:rPr sz="1000" lang="zh-TW" dirty="0">
+                <a:solidFill>
+                  <a:srgbClr val="000000"/>
+                </a:solidFill>
+                <a:latin typeface="Arial Unicode MS"/>
+                <a:ea typeface="Arial Unicode MS"/>
+                <a:cs typeface="Arial Unicode MS"/>
+              </a:rPr>
+              <a:t>這是量產車最常見的做法。雷達抓到人的時候，距離和接近的速度量得很準，晚上、下雨也照樣量，這正是相機最弱的地方；它做不到的，是</a:t>
+            </a:r>
+            <a:r>
+              <a:rPr sz="1000" b="1" lang="zh-TW" dirty="0">
+                <a:solidFill>
+                  <a:srgbClr val="000000"/>
+                </a:solidFill>
+                <a:latin typeface="Arial Unicode MS"/>
+                <a:ea typeface="Arial Unicode MS"/>
+                <a:cs typeface="Arial Unicode MS"/>
+              </a:rPr>
+              <a:t>認出那是一個人</a:t>
+            </a:r>
+            <a:r>
+              <a:rPr sz="1000" lang="zh-TW" dirty="0">
+                <a:solidFill>
+                  <a:srgbClr val="000000"/>
+                </a:solidFill>
+                <a:latin typeface="Arial Unicode MS"/>
+                <a:ea typeface="Arial Unicode MS"/>
+                <a:cs typeface="Arial Unicode MS"/>
+              </a:rPr>
+              <a:t>，那要靠相機。所以像 Toyota 的預防碰撞系統，就是相機加毫米波雷達一起看行人。晚上也有人用熱像儀加雷達：人的身體是熱的，在熱像裡特別明顯。
 </a:t>
             </a:r>
           </a:p>
@@ -3910,11 +3976,33 @@
                 <a:spcPts val="0"/>
               </a:spcBef>
               <a:spcAft>
-                <a:spcPts val="200"/>
+                <a:spcPts val="167"/>
               </a:spcAft>
             </a:pPr>
             <a:r>
-              <a:rPr sz="1200" lang="zh-TW" dirty="0">
+              <a:rPr sz="1000" lang="zh-TW" dirty="0">
+                <a:solidFill>
+                  <a:srgbClr val="000000"/>
+                </a:solidFill>
+                <a:latin typeface="Arial Unicode MS"/>
+                <a:ea typeface="Arial Unicode MS"/>
+                <a:cs typeface="Arial Unicode MS"/>
+              </a:rPr>
+              <a:t>這些新做法有沒有用？剛剛那份荷蘭的資料集，二〇二二年公開，用的是新一代 4D 雷達：車子正前方的行人，大約一半找得到，比我們今天這顆二〇一八年的 ARS 408 好，但行人還是最難找的那一類；加上相機，分數再往上。
+</a:t>
+            </a:r>
+          </a:p>
+          <a:p>
+            <a:pPr algn="l">
+              <a:spcBef>
+                <a:spcPts val="0"/>
+              </a:spcBef>
+              <a:spcAft>
+                <a:spcPts val="167"/>
+              </a:spcAft>
+            </a:pPr>
+            <a:r>
+              <a:rPr sz="1000" lang="zh-TW" dirty="0">
                 <a:solidFill>
                   <a:srgbClr val="000000"/>
                 </a:solidFill>
@@ -3925,7 +4013,7 @@
               <a:t>所以結論是：</a:t>
             </a:r>
             <a:r>
-              <a:rPr sz="1200" b="1" lang="zh-TW" dirty="0">
+              <a:rPr sz="1000" b="1" lang="zh-TW" dirty="0">
                 <a:solidFill>
                   <a:srgbClr val="000000"/>
                 </a:solidFill>
@@ -7210,11 +7298,11 @@
                 <a:spcPts val="0"/>
               </a:spcBef>
               <a:spcAft>
-                <a:spcPts val="233"/>
+                <a:spcPts val="192"/>
               </a:spcAft>
             </a:pPr>
             <a:r>
-              <a:rPr sz="1400" b="1" lang="zh-TW" dirty="0">
+              <a:rPr sz="1150" b="1" lang="zh-TW" dirty="0">
                 <a:solidFill>
                   <a:srgbClr val="000000"/>
                 </a:solidFill>
@@ -7225,7 +7313,7 @@
               <a:t>這一張的目的：</a:t>
             </a:r>
             <a:r>
-              <a:rPr sz="1400" lang="zh-TW" dirty="0">
+              <a:rPr sz="1150" lang="zh-TW" dirty="0">
                 <a:solidFill>
                   <a:srgbClr val="000000"/>
                 </a:solidFill>
@@ -7243,11 +7331,11 @@
                 <a:spcPts val="0"/>
               </a:spcBef>
               <a:spcAft>
-                <a:spcPts val="233"/>
+                <a:spcPts val="192"/>
               </a:spcAft>
             </a:pPr>
             <a:r>
-              <a:rPr sz="1400" lang="zh-TW" dirty="0">
+              <a:rPr sz="1150" lang="zh-TW" dirty="0">
                 <a:solidFill>
                   <a:srgbClr val="000000"/>
                 </a:solidFill>
@@ -7265,11 +7353,11 @@
                 <a:spcPts val="0"/>
               </a:spcBef>
               <a:spcAft>
-                <a:spcPts val="233"/>
+                <a:spcPts val="192"/>
               </a:spcAft>
             </a:pPr>
             <a:r>
-              <a:rPr sz="1400" b="1" lang="zh-TW" dirty="0">
+              <a:rPr sz="1150" b="1" lang="zh-TW" dirty="0">
                 <a:solidFill>
                   <a:srgbClr val="000000"/>
                 </a:solidFill>
@@ -7280,7 +7368,7 @@
               <a:t>左邊，光達。</a:t>
             </a:r>
             <a:r>
-              <a:rPr sz="1400" lang="zh-TW" dirty="0">
+              <a:rPr sz="1150" lang="zh-TW" dirty="0">
                 <a:solidFill>
                   <a:srgbClr val="000000"/>
                 </a:solidFill>
@@ -7298,30 +7386,41 @@
                 <a:spcPts val="0"/>
               </a:spcBef>
               <a:spcAft>
-                <a:spcPts val="233"/>
+                <a:spcPts val="192"/>
               </a:spcAft>
             </a:pPr>
             <a:r>
-              <a:rPr sz="1400" b="1" lang="zh-TW" dirty="0">
-                <a:solidFill>
-                  <a:srgbClr val="000000"/>
-                </a:solidFill>
-                <a:latin typeface="Arial Unicode MS"/>
-                <a:ea typeface="Arial Unicode MS"/>
-                <a:cs typeface="Arial Unicode MS"/>
-              </a:rPr>
-              <a:t>右邊，雷達。</a:t>
-            </a:r>
-            <a:r>
-              <a:rPr sz="1400" lang="zh-TW" dirty="0">
-                <a:solidFill>
-                  <a:srgbClr val="000000"/>
-                </a:solidFill>
-                <a:latin typeface="Arial Unicode MS"/>
-                <a:ea typeface="Arial Unicode MS"/>
-                <a:cs typeface="Arial Unicode MS"/>
-              </a:rPr>
-              <a:t>紅圈是雷達點，車頭三顆雷達加起來，大約六十個，比光達少了五十倍。
+              <a:rPr sz="1150" lang="zh-TW" dirty="0">
+                <a:solidFill>
+                  <a:srgbClr val="000000"/>
+                </a:solidFill>
+                <a:latin typeface="Arial Unicode MS"/>
+                <a:ea typeface="Arial Unicode MS"/>
+                <a:cs typeface="Arial Unicode MS"/>
+              </a:rPr>
+              <a:t>各位可能會問：三十二條，那照片上由上往下數，應該有三十二排？其實只看得到</a:t>
+            </a:r>
+            <a:r>
+              <a:rPr sz="1150" b="1" lang="zh-TW" dirty="0">
+                <a:solidFill>
+                  <a:srgbClr val="000000"/>
+                </a:solidFill>
+                <a:latin typeface="Arial Unicode MS"/>
+                <a:ea typeface="Arial Unicode MS"/>
+                <a:cs typeface="Arial Unicode MS"/>
+              </a:rPr>
+              <a:t>二十二排</a:t>
+            </a:r>
+            <a:r>
+              <a:rPr sz="1150" lang="zh-TW" dirty="0">
+                <a:solidFill>
+                  <a:srgbClr val="000000"/>
+                </a:solidFill>
+                <a:latin typeface="Arial Unicode MS"/>
+                <a:ea typeface="Arial Unicode MS"/>
+                <a:cs typeface="Arial Unicode MS"/>
+              </a:rPr>
+              <a:t>。這三十二條像一把上下張開的扇子，從往下三十度到往上十度；最下面那十條往下打得太斜，打在車子前面兩三公尺內的地上，被引擎蓋擋住，也在相機畫面的下緣之外。剩下的，往下那十幾條打在路面上，由近到遠；往上那幾條只打得到樹、房子、車身這些高的東西，打到天空就沒有點。所以同一個位置由上往下數，通常更少。
 </a:t>
             </a:r>
           </a:p>
@@ -7331,41 +7430,52 @@
                 <a:spcPts val="0"/>
               </a:spcBef>
               <a:spcAft>
-                <a:spcPts val="233"/>
+                <a:spcPts val="192"/>
               </a:spcAft>
             </a:pPr>
             <a:r>
-              <a:rPr sz="1400" lang="zh-TW" dirty="0">
-                <a:solidFill>
-                  <a:srgbClr val="000000"/>
-                </a:solidFill>
-                <a:latin typeface="Arial Unicode MS"/>
-                <a:ea typeface="Arial Unicode MS"/>
-                <a:cs typeface="Arial Unicode MS"/>
-              </a:rPr>
-              <a:t>請各位看紅圈的位置：</a:t>
-            </a:r>
-            <a:r>
-              <a:rPr sz="1400" b="1" lang="zh-TW" dirty="0">
-                <a:solidFill>
-                  <a:srgbClr val="000000"/>
-                </a:solidFill>
-                <a:latin typeface="Arial Unicode MS"/>
-                <a:ea typeface="Arial Unicode MS"/>
-                <a:cs typeface="Arial Unicode MS"/>
-              </a:rPr>
-              <a:t>全部都在很低的地方。</a:t>
-            </a:r>
-            <a:r>
-              <a:rPr sz="1400" lang="zh-TW" dirty="0">
-                <a:solidFill>
-                  <a:srgbClr val="000000"/>
-                </a:solidFill>
-                <a:latin typeface="Arial Unicode MS"/>
-                <a:ea typeface="Arial Unicode MS"/>
-                <a:cs typeface="Arial Unicode MS"/>
-              </a:rPr>
-              <a:t>遠處的紅圈貼著地平線，左邊草地上比較近的紅圈低一點；樹幹底下有紅圈，可是樹冠上、牌子上，一個都沒有。為什麼？我打開資料看，每一個雷達點的「高度」那一欄，數字全部是零：所有的點都被放在雷達自己的高度，離地大約半公尺。路邊的樹、遠處的牌子打回來的點，也都被畫在這個高度。
+              <a:rPr sz="1150" b="1" lang="zh-TW" dirty="0">
+                <a:solidFill>
+                  <a:srgbClr val="000000"/>
+                </a:solidFill>
+                <a:latin typeface="Arial Unicode MS"/>
+                <a:ea typeface="Arial Unicode MS"/>
+                <a:cs typeface="Arial Unicode MS"/>
+              </a:rPr>
+              <a:t>右邊，雷達。</a:t>
+            </a:r>
+            <a:r>
+              <a:rPr sz="1150" lang="zh-TW" dirty="0">
+                <a:solidFill>
+                  <a:srgbClr val="000000"/>
+                </a:solidFill>
+                <a:latin typeface="Arial Unicode MS"/>
+                <a:ea typeface="Arial Unicode MS"/>
+                <a:cs typeface="Arial Unicode MS"/>
+              </a:rPr>
+              <a:t>紅圈是雷達點，大約六十個，比光達少了五十倍。這六十個全部來自</a:t>
+            </a:r>
+            <a:r>
+              <a:rPr sz="1150" b="1" lang="zh-TW" dirty="0">
+                <a:solidFill>
+                  <a:srgbClr val="000000"/>
+                </a:solidFill>
+                <a:latin typeface="Arial Unicode MS"/>
+                <a:ea typeface="Arial Unicode MS"/>
+                <a:cs typeface="Arial Unicode MS"/>
+              </a:rPr>
+              <a:t>正前方那一顆</a:t>
+            </a:r>
+            <a:r>
+              <a:rPr sz="1150" lang="zh-TW" dirty="0">
+                <a:solidFill>
+                  <a:srgbClr val="000000"/>
+                </a:solidFill>
+                <a:latin typeface="Arial Unicode MS"/>
+                <a:ea typeface="Arial Unicode MS"/>
+                <a:cs typeface="Arial Unicode MS"/>
+              </a:rPr>
+              <a:t>；左右兩顆前角雷達是朝側面裝的，點都在照片外面。而且這六十個不是「雷達打了幾次」：雷達每一輪大約零點零七秒，把整片扇形一起照過去，收回來的回聲拆開整理成一張清單，清單上每一筆就是一個紅圈。正前方那顆這一輪回報一百二十五個，用官方預設的規則過濾掉不可靠的，剩七十一個，其中六十個落在照片裡。
 </a:t>
             </a:r>
           </a:p>
@@ -7375,19 +7485,41 @@
                 <a:spcPts val="0"/>
               </a:spcBef>
               <a:spcAft>
-                <a:spcPts val="233"/>
+                <a:spcPts val="192"/>
               </a:spcAft>
             </a:pPr>
             <a:r>
-              <a:rPr sz="1400" lang="zh-TW" dirty="0">
-                <a:solidFill>
-                  <a:srgbClr val="000000"/>
-                </a:solidFill>
-                <a:latin typeface="Arial Unicode MS"/>
-                <a:ea typeface="Arial Unicode MS"/>
-                <a:cs typeface="Arial Unicode MS"/>
-              </a:rPr>
-              <a:t>同一個高度，為什麼在照片上有高有低？跟站在路上看地上的斑馬線一樣：近的在腳下，畫面下方；遠的擠到地平線附近。這是透視，不是雷達量到的高度。
+              <a:rPr sz="1150" lang="zh-TW" dirty="0">
+                <a:solidFill>
+                  <a:srgbClr val="000000"/>
+                </a:solidFill>
+                <a:latin typeface="Arial Unicode MS"/>
+                <a:ea typeface="Arial Unicode MS"/>
+                <a:cs typeface="Arial Unicode MS"/>
+              </a:rPr>
+              <a:t>請各位看紅圈的位置：</a:t>
+            </a:r>
+            <a:r>
+              <a:rPr sz="1150" b="1" lang="zh-TW" dirty="0">
+                <a:solidFill>
+                  <a:srgbClr val="000000"/>
+                </a:solidFill>
+                <a:latin typeface="Arial Unicode MS"/>
+                <a:ea typeface="Arial Unicode MS"/>
+                <a:cs typeface="Arial Unicode MS"/>
+              </a:rPr>
+              <a:t>全部都在很低的地方。</a:t>
+            </a:r>
+            <a:r>
+              <a:rPr sz="1150" lang="zh-TW" dirty="0">
+                <a:solidFill>
+                  <a:srgbClr val="000000"/>
+                </a:solidFill>
+                <a:latin typeface="Arial Unicode MS"/>
+                <a:ea typeface="Arial Unicode MS"/>
+                <a:cs typeface="Arial Unicode MS"/>
+              </a:rPr>
+              <a:t>遠處的紅圈貼著地平線，左邊草地上比較近的紅圈低一點；樹幹底下有紅圈，可是樹冠上、牌子上，一個都沒有。為什麼？我打開資料看，每一個雷達點的「高度」那一欄，數字全部是零：所有的點都被放在雷達自己的高度，離地大約半公尺。路邊的樹、遠處的牌子打回來的點，也都被畫在這個高度。
 </a:t>
             </a:r>
           </a:p>
@@ -7397,19 +7529,19 @@
                 <a:spcPts val="0"/>
               </a:spcBef>
               <a:spcAft>
-                <a:spcPts val="233"/>
+                <a:spcPts val="192"/>
               </a:spcAft>
             </a:pPr>
             <a:r>
-              <a:rPr sz="1400" lang="zh-TW" dirty="0">
-                <a:solidFill>
-                  <a:srgbClr val="000000"/>
-                </a:solidFill>
-                <a:latin typeface="Arial Unicode MS"/>
-                <a:ea typeface="Arial Unicode MS"/>
-                <a:cs typeface="Arial Unicode MS"/>
-              </a:rPr>
-              <a:t>這就是上週講雷達弱點那一張說的「ARS 408 沒有高度」。上週是在規格表上讀到，今天是在真的資料裡看到。它分不出前面那個東西是在路上，還是在頭頂上。所以天橋、高架的路牌，對它來說都跟路上的車在同一個平面。
+              <a:rPr sz="1150" lang="zh-TW" dirty="0">
+                <a:solidFill>
+                  <a:srgbClr val="000000"/>
+                </a:solidFill>
+                <a:latin typeface="Arial Unicode MS"/>
+                <a:ea typeface="Arial Unicode MS"/>
+                <a:cs typeface="Arial Unicode MS"/>
+              </a:rPr>
+              <a:t>同一個高度，為什麼在照片上有高有低？跟站在路上看地上的斑馬線一樣：近的在腳下，畫面下方；遠的擠到地平線附近。這是透視，不是雷達量到的高度。
 </a:t>
             </a:r>
           </a:p>
@@ -7419,11 +7551,33 @@
                 <a:spcPts val="0"/>
               </a:spcBef>
               <a:spcAft>
-                <a:spcPts val="233"/>
+                <a:spcPts val="192"/>
               </a:spcAft>
             </a:pPr>
             <a:r>
-              <a:rPr sz="1400" b="1" lang="zh-TW" dirty="0">
+              <a:rPr sz="1150" lang="zh-TW" dirty="0">
+                <a:solidFill>
+                  <a:srgbClr val="000000"/>
+                </a:solidFill>
+                <a:latin typeface="Arial Unicode MS"/>
+                <a:ea typeface="Arial Unicode MS"/>
+                <a:cs typeface="Arial Unicode MS"/>
+              </a:rPr>
+              <a:t>這就是上週講雷達弱點那一張說的「ARS 408 沒有高度」。上週是在規格表上讀到，今天是在真的資料裡看到。它分不出前面那個東西是在路上，還是在頭頂上。所以天橋、高架的路牌，對它來說都跟路上的車在同一個平面。
+</a:t>
+            </a:r>
+          </a:p>
+          <a:p>
+            <a:pPr algn="l">
+              <a:spcBef>
+                <a:spcPts val="0"/>
+              </a:spcBef>
+              <a:spcAft>
+                <a:spcPts val="192"/>
+              </a:spcAft>
+            </a:pPr>
+            <a:r>
+              <a:rPr sz="1150" b="1" lang="zh-TW" dirty="0">
                 <a:solidFill>
                   <a:srgbClr val="000000"/>
                 </a:solidFill>
@@ -7434,7 +7588,7 @@
               <a:t>記住這兩件事：點很少，而且量不出高度。</a:t>
             </a:r>
             <a:r>
-              <a:rPr sz="1400" lang="zh-TW" dirty="0">
+              <a:rPr sz="1150" lang="zh-TW" dirty="0">
                 <a:solidFill>
                   <a:srgbClr val="000000"/>
                 </a:solidFill>
@@ -25866,7 +26020,7 @@
                 <a:ea typeface="Arial" pitchFamily="34" charset="-122"/>
                 <a:cs typeface="Arial" pitchFamily="34" charset="-120"/>
               </a:rPr>
-              <a:t>Radar (3 cái phía trước): khoảng 60 điểm</a:t>
+              <a:t>Radar trước: khoảng 60 điểm</a:t>
             </a:r>
             <a:endParaRPr lang="en-US" sz="950" dirty="0"/>
           </a:p>
@@ -25886,7 +26040,7 @@
                 <a:ea typeface="微軟正黑體" pitchFamily="34" charset="-122"/>
                 <a:cs typeface="微軟正黑體" pitchFamily="34" charset="-120"/>
               </a:rPr>
-              <a:t>雷達（前方三顆）：約 60 點</a:t>
+              <a:t>前雷達：約 60 點</a:t>
             </a:r>
             <a:endParaRPr lang="en-US" sz="950" dirty="0"/>
           </a:p>
